--- a/presentation/module-federation.pptx
+++ b/presentation/module-federation.pptx
@@ -6890,84 +6890,6 @@
       </p:grpSpPr>
       <p:sp>
         <p:nvSpPr>
-          <p:cNvPr id="2" name="Shape 0">
-            <a:extLst>
-              <a:ext uri="{FF2B5EF4-FFF2-40B4-BE49-F238E27FC236}">
-                <a16:creationId xmlns:a16="http://schemas.microsoft.com/office/drawing/2014/main" id="{FD4BE9D9-F483-BD50-33C8-058BADE7CF93}"/>
-              </a:ext>
-            </a:extLst>
-          </p:cNvPr>
-          <p:cNvSpPr/>
-          <p:nvPr/>
-        </p:nvSpPr>
-        <p:spPr>
-          <a:xfrm>
-            <a:off x="548640" y="512064"/>
-            <a:ext cx="411480" cy="45720"/>
-          </a:xfrm>
-          <a:prstGeom prst="rect">
-            <a:avLst/>
-          </a:prstGeom>
-          <a:solidFill>
-            <a:srgbClr val="D4FF00"/>
-          </a:solidFill>
-          <a:ln/>
-        </p:spPr>
-        <p:txBody>
-          <a:bodyPr/>
-          <a:lstStyle/>
-          <a:p>
-            <a:endParaRPr lang="en-GB"/>
-          </a:p>
-        </p:txBody>
-      </p:sp>
-      <p:sp>
-        <p:nvSpPr>
-          <p:cNvPr id="3" name="Text 1">
-            <a:extLst>
-              <a:ext uri="{FF2B5EF4-FFF2-40B4-BE49-F238E27FC236}">
-                <a16:creationId xmlns:a16="http://schemas.microsoft.com/office/drawing/2014/main" id="{1BC770F5-A6EE-019E-0CAD-90A3E4EDC890}"/>
-              </a:ext>
-            </a:extLst>
-          </p:cNvPr>
-          <p:cNvSpPr/>
-          <p:nvPr/>
-        </p:nvSpPr>
-        <p:spPr>
-          <a:xfrm>
-            <a:off x="1097280" y="347472"/>
-            <a:ext cx="10515600" cy="365760"/>
-          </a:xfrm>
-          <a:prstGeom prst="rect">
-            <a:avLst/>
-          </a:prstGeom>
-          <a:noFill/>
-          <a:ln/>
-        </p:spPr>
-        <p:txBody>
-          <a:bodyPr wrap="square" rtlCol="0" anchor="ctr"/>
-          <a:lstStyle/>
-          <a:p>
-            <a:pPr marL="0" indent="0">
-              <a:buNone/>
-            </a:pPr>
-            <a:r>
-              <a:rPr lang="en-US" sz="1050" kern="0" spc="400" dirty="0">
-                <a:solidFill>
-                  <a:srgbClr val="A8A29E"/>
-                </a:solidFill>
-                <a:latin typeface="IBM Plex Mono" pitchFamily="34" charset="0"/>
-                <a:ea typeface="IBM Plex Mono" pitchFamily="34" charset="-122"/>
-                <a:cs typeface="IBM Plex Mono" pitchFamily="34" charset="-120"/>
-              </a:rPr>
-              <a:t>TECH STACK</a:t>
-            </a:r>
-            <a:endParaRPr lang="en-US" sz="1050" dirty="0"/>
-          </a:p>
-        </p:txBody>
-      </p:sp>
-      <p:sp>
-        <p:nvSpPr>
           <p:cNvPr id="4" name="Text 2">
             <a:extLst>
               <a:ext uri="{FF2B5EF4-FFF2-40B4-BE49-F238E27FC236}">
@@ -7641,84 +7563,6 @@
       </p:grpSpPr>
       <p:sp>
         <p:nvSpPr>
-          <p:cNvPr id="2" name="Shape 0">
-            <a:extLst>
-              <a:ext uri="{FF2B5EF4-FFF2-40B4-BE49-F238E27FC236}">
-                <a16:creationId xmlns:a16="http://schemas.microsoft.com/office/drawing/2014/main" id="{F5A717F2-BBA8-88D5-BE79-1C4731237C2C}"/>
-              </a:ext>
-            </a:extLst>
-          </p:cNvPr>
-          <p:cNvSpPr/>
-          <p:nvPr/>
-        </p:nvSpPr>
-        <p:spPr>
-          <a:xfrm>
-            <a:off x="548640" y="512064"/>
-            <a:ext cx="411480" cy="45720"/>
-          </a:xfrm>
-          <a:prstGeom prst="rect">
-            <a:avLst/>
-          </a:prstGeom>
-          <a:solidFill>
-            <a:srgbClr val="D4FF00"/>
-          </a:solidFill>
-          <a:ln/>
-        </p:spPr>
-        <p:txBody>
-          <a:bodyPr/>
-          <a:lstStyle/>
-          <a:p>
-            <a:endParaRPr lang="en-GB"/>
-          </a:p>
-        </p:txBody>
-      </p:sp>
-      <p:sp>
-        <p:nvSpPr>
-          <p:cNvPr id="3" name="Text 1">
-            <a:extLst>
-              <a:ext uri="{FF2B5EF4-FFF2-40B4-BE49-F238E27FC236}">
-                <a16:creationId xmlns:a16="http://schemas.microsoft.com/office/drawing/2014/main" id="{8944910D-A037-0D84-1BB0-E9D9C9D2F7DC}"/>
-              </a:ext>
-            </a:extLst>
-          </p:cNvPr>
-          <p:cNvSpPr/>
-          <p:nvPr/>
-        </p:nvSpPr>
-        <p:spPr>
-          <a:xfrm>
-            <a:off x="1097280" y="347472"/>
-            <a:ext cx="10515600" cy="365760"/>
-          </a:xfrm>
-          <a:prstGeom prst="rect">
-            <a:avLst/>
-          </a:prstGeom>
-          <a:noFill/>
-          <a:ln/>
-        </p:spPr>
-        <p:txBody>
-          <a:bodyPr wrap="square" rtlCol="0" anchor="ctr"/>
-          <a:lstStyle/>
-          <a:p>
-            <a:pPr marL="0" indent="0">
-              <a:buNone/>
-            </a:pPr>
-            <a:r>
-              <a:rPr lang="en-US" sz="1050" kern="0" spc="400" dirty="0">
-                <a:solidFill>
-                  <a:srgbClr val="A8A29E"/>
-                </a:solidFill>
-                <a:latin typeface="IBM Plex Mono" pitchFamily="34" charset="0"/>
-                <a:ea typeface="IBM Plex Mono" pitchFamily="34" charset="-122"/>
-                <a:cs typeface="IBM Plex Mono" pitchFamily="34" charset="-120"/>
-              </a:rPr>
-              <a:t>TECH STACK</a:t>
-            </a:r>
-            <a:endParaRPr lang="en-US" sz="1050" dirty="0"/>
-          </a:p>
-        </p:txBody>
-      </p:sp>
-      <p:sp>
-        <p:nvSpPr>
           <p:cNvPr id="4" name="Text 2">
             <a:extLst>
               <a:ext uri="{FF2B5EF4-FFF2-40B4-BE49-F238E27FC236}">
@@ -7891,72 +7735,6 @@
           <a:chExt cx="0" cy="0"/>
         </a:xfrm>
       </p:grpSpPr>
-      <p:sp>
-        <p:nvSpPr>
-          <p:cNvPr id="2" name="Shape 0"/>
-          <p:cNvSpPr/>
-          <p:nvPr/>
-        </p:nvSpPr>
-        <p:spPr>
-          <a:xfrm>
-            <a:off x="548640" y="512064"/>
-            <a:ext cx="411480" cy="45720"/>
-          </a:xfrm>
-          <a:prstGeom prst="rect">
-            <a:avLst/>
-          </a:prstGeom>
-          <a:solidFill>
-            <a:srgbClr val="D4FF00"/>
-          </a:solidFill>
-          <a:ln/>
-        </p:spPr>
-        <p:txBody>
-          <a:bodyPr/>
-          <a:lstStyle/>
-          <a:p>
-            <a:endParaRPr lang="en-GB"/>
-          </a:p>
-        </p:txBody>
-      </p:sp>
-      <p:sp>
-        <p:nvSpPr>
-          <p:cNvPr id="3" name="Text 1"/>
-          <p:cNvSpPr/>
-          <p:nvPr/>
-        </p:nvSpPr>
-        <p:spPr>
-          <a:xfrm>
-            <a:off x="1097280" y="347472"/>
-            <a:ext cx="10515600" cy="365760"/>
-          </a:xfrm>
-          <a:prstGeom prst="rect">
-            <a:avLst/>
-          </a:prstGeom>
-          <a:noFill/>
-          <a:ln/>
-        </p:spPr>
-        <p:txBody>
-          <a:bodyPr wrap="square" rtlCol="0" anchor="ctr"/>
-          <a:lstStyle/>
-          <a:p>
-            <a:pPr marL="0" indent="0">
-              <a:buNone/>
-            </a:pPr>
-            <a:r>
-              <a:rPr lang="en-US" sz="1050" kern="0" spc="400" dirty="0">
-                <a:solidFill>
-                  <a:srgbClr val="A8A29E"/>
-                </a:solidFill>
-                <a:latin typeface="IBM Plex Mono" pitchFamily="34" charset="0"/>
-                <a:ea typeface="IBM Plex Mono" pitchFamily="34" charset="-122"/>
-                <a:cs typeface="IBM Plex Mono" pitchFamily="34" charset="-120"/>
-              </a:rPr>
-              <a:t>MODULE FEDERATION</a:t>
-            </a:r>
-            <a:endParaRPr lang="en-US" sz="1050" dirty="0"/>
-          </a:p>
-        </p:txBody>
-      </p:sp>
       <p:sp>
         <p:nvSpPr>
           <p:cNvPr id="4" name="Text 2"/>
@@ -8930,84 +8708,6 @@
       </p:grpSpPr>
       <p:sp>
         <p:nvSpPr>
-          <p:cNvPr id="2" name="Shape 0">
-            <a:extLst>
-              <a:ext uri="{FF2B5EF4-FFF2-40B4-BE49-F238E27FC236}">
-                <a16:creationId xmlns:a16="http://schemas.microsoft.com/office/drawing/2014/main" id="{64A3CF9A-0771-F79C-3EBA-62F8C6C9B423}"/>
-              </a:ext>
-            </a:extLst>
-          </p:cNvPr>
-          <p:cNvSpPr/>
-          <p:nvPr/>
-        </p:nvSpPr>
-        <p:spPr>
-          <a:xfrm>
-            <a:off x="548640" y="512064"/>
-            <a:ext cx="411480" cy="45720"/>
-          </a:xfrm>
-          <a:prstGeom prst="rect">
-            <a:avLst/>
-          </a:prstGeom>
-          <a:solidFill>
-            <a:srgbClr val="D4FF00"/>
-          </a:solidFill>
-          <a:ln/>
-        </p:spPr>
-        <p:txBody>
-          <a:bodyPr/>
-          <a:lstStyle/>
-          <a:p>
-            <a:endParaRPr lang="en-GB"/>
-          </a:p>
-        </p:txBody>
-      </p:sp>
-      <p:sp>
-        <p:nvSpPr>
-          <p:cNvPr id="3" name="Text 1">
-            <a:extLst>
-              <a:ext uri="{FF2B5EF4-FFF2-40B4-BE49-F238E27FC236}">
-                <a16:creationId xmlns:a16="http://schemas.microsoft.com/office/drawing/2014/main" id="{31492B12-F9FD-60B2-1150-74CCD605EE6F}"/>
-              </a:ext>
-            </a:extLst>
-          </p:cNvPr>
-          <p:cNvSpPr/>
-          <p:nvPr/>
-        </p:nvSpPr>
-        <p:spPr>
-          <a:xfrm>
-            <a:off x="1097280" y="347472"/>
-            <a:ext cx="10515600" cy="365760"/>
-          </a:xfrm>
-          <a:prstGeom prst="rect">
-            <a:avLst/>
-          </a:prstGeom>
-          <a:noFill/>
-          <a:ln/>
-        </p:spPr>
-        <p:txBody>
-          <a:bodyPr wrap="square" rtlCol="0" anchor="ctr"/>
-          <a:lstStyle/>
-          <a:p>
-            <a:pPr marL="0" indent="0">
-              <a:buNone/>
-            </a:pPr>
-            <a:r>
-              <a:rPr lang="en-US" sz="1050" kern="0" spc="400" dirty="0">
-                <a:solidFill>
-                  <a:srgbClr val="A8A29E"/>
-                </a:solidFill>
-                <a:latin typeface="IBM Plex Mono" pitchFamily="34" charset="0"/>
-                <a:ea typeface="IBM Plex Mono" pitchFamily="34" charset="-122"/>
-                <a:cs typeface="IBM Plex Mono" pitchFamily="34" charset="-120"/>
-              </a:rPr>
-              <a:t>MODULE FEDERATION</a:t>
-            </a:r>
-            <a:endParaRPr lang="en-US" sz="1050" dirty="0"/>
-          </a:p>
-        </p:txBody>
-      </p:sp>
-      <p:sp>
-        <p:nvSpPr>
           <p:cNvPr id="4" name="Text 2">
             <a:extLst>
               <a:ext uri="{FF2B5EF4-FFF2-40B4-BE49-F238E27FC236}">
@@ -9053,51 +8753,6 @@
       </p:sp>
       <p:sp>
         <p:nvSpPr>
-          <p:cNvPr id="6" name="Text 4">
-            <a:extLst>
-              <a:ext uri="{FF2B5EF4-FFF2-40B4-BE49-F238E27FC236}">
-                <a16:creationId xmlns:a16="http://schemas.microsoft.com/office/drawing/2014/main" id="{2A84BFD8-C8F5-CCC3-68FC-2481F558A510}"/>
-              </a:ext>
-            </a:extLst>
-          </p:cNvPr>
-          <p:cNvSpPr/>
-          <p:nvPr/>
-        </p:nvSpPr>
-        <p:spPr>
-          <a:xfrm>
-            <a:off x="11292840" y="6446520"/>
-            <a:ext cx="548640" cy="274320"/>
-          </a:xfrm>
-          <a:prstGeom prst="rect">
-            <a:avLst/>
-          </a:prstGeom>
-          <a:noFill/>
-          <a:ln/>
-        </p:spPr>
-        <p:txBody>
-          <a:bodyPr wrap="square" rtlCol="0" anchor="ctr"/>
-          <a:lstStyle/>
-          <a:p>
-            <a:pPr marL="0" indent="0" algn="r">
-              <a:buNone/>
-            </a:pPr>
-            <a:r>
-              <a:rPr lang="en-US" sz="850" dirty="0">
-                <a:solidFill>
-                  <a:srgbClr val="6B6560"/>
-                </a:solidFill>
-                <a:latin typeface="IBM Plex Mono" pitchFamily="34" charset="0"/>
-                <a:ea typeface="IBM Plex Mono" pitchFamily="34" charset="-122"/>
-                <a:cs typeface="IBM Plex Mono" pitchFamily="34" charset="-120"/>
-              </a:rPr>
-              <a:t>06</a:t>
-            </a:r>
-            <a:endParaRPr lang="en-US" sz="850" dirty="0"/>
-          </a:p>
-        </p:txBody>
-      </p:sp>
-      <p:sp>
-        <p:nvSpPr>
           <p:cNvPr id="7" name="TextBox 6">
             <a:extLst>
               <a:ext uri="{FF2B5EF4-FFF2-40B4-BE49-F238E27FC236}">
@@ -9111,7 +8766,7 @@
         <p:spPr>
           <a:xfrm>
             <a:off x="548640" y="1645920"/>
-            <a:ext cx="11311128" cy="6040628"/>
+            <a:ext cx="10902625" cy="6040628"/>
           </a:xfrm>
           <a:prstGeom prst="rect">
             <a:avLst/>
@@ -9808,84 +9463,6 @@
       </p:grpSpPr>
       <p:sp>
         <p:nvSpPr>
-          <p:cNvPr id="2" name="Shape 0">
-            <a:extLst>
-              <a:ext uri="{FF2B5EF4-FFF2-40B4-BE49-F238E27FC236}">
-                <a16:creationId xmlns:a16="http://schemas.microsoft.com/office/drawing/2014/main" id="{5F192A83-CA3B-910F-4E8A-CD31D78E34E2}"/>
-              </a:ext>
-            </a:extLst>
-          </p:cNvPr>
-          <p:cNvSpPr/>
-          <p:nvPr/>
-        </p:nvSpPr>
-        <p:spPr>
-          <a:xfrm>
-            <a:off x="548640" y="512064"/>
-            <a:ext cx="411480" cy="45720"/>
-          </a:xfrm>
-          <a:prstGeom prst="rect">
-            <a:avLst/>
-          </a:prstGeom>
-          <a:solidFill>
-            <a:srgbClr val="D4FF00"/>
-          </a:solidFill>
-          <a:ln/>
-        </p:spPr>
-        <p:txBody>
-          <a:bodyPr/>
-          <a:lstStyle/>
-          <a:p>
-            <a:endParaRPr lang="en-GB"/>
-          </a:p>
-        </p:txBody>
-      </p:sp>
-      <p:sp>
-        <p:nvSpPr>
-          <p:cNvPr id="3" name="Text 1">
-            <a:extLst>
-              <a:ext uri="{FF2B5EF4-FFF2-40B4-BE49-F238E27FC236}">
-                <a16:creationId xmlns:a16="http://schemas.microsoft.com/office/drawing/2014/main" id="{6FE4679A-9F0B-2753-5DE7-96F1ACA8B5F6}"/>
-              </a:ext>
-            </a:extLst>
-          </p:cNvPr>
-          <p:cNvSpPr/>
-          <p:nvPr/>
-        </p:nvSpPr>
-        <p:spPr>
-          <a:xfrm>
-            <a:off x="1097280" y="347472"/>
-            <a:ext cx="10515600" cy="365760"/>
-          </a:xfrm>
-          <a:prstGeom prst="rect">
-            <a:avLst/>
-          </a:prstGeom>
-          <a:noFill/>
-          <a:ln/>
-        </p:spPr>
-        <p:txBody>
-          <a:bodyPr wrap="square" rtlCol="0" anchor="ctr"/>
-          <a:lstStyle/>
-          <a:p>
-            <a:pPr marL="0" indent="0">
-              <a:buNone/>
-            </a:pPr>
-            <a:r>
-              <a:rPr lang="en-US" sz="1050" kern="0" spc="400" dirty="0">
-                <a:solidFill>
-                  <a:srgbClr val="A8A29E"/>
-                </a:solidFill>
-                <a:latin typeface="IBM Plex Mono" pitchFamily="34" charset="0"/>
-                <a:ea typeface="IBM Plex Mono" pitchFamily="34" charset="-122"/>
-                <a:cs typeface="IBM Plex Mono" pitchFamily="34" charset="-120"/>
-              </a:rPr>
-              <a:t>MODULE FEDERATION</a:t>
-            </a:r>
-            <a:endParaRPr lang="en-US" sz="1050" dirty="0"/>
-          </a:p>
-        </p:txBody>
-      </p:sp>
-      <p:sp>
-        <p:nvSpPr>
           <p:cNvPr id="4" name="Text 2">
             <a:extLst>
               <a:ext uri="{FF2B5EF4-FFF2-40B4-BE49-F238E27FC236}">
@@ -10592,72 +10169,6 @@
       </p:grpSpPr>
       <p:sp>
         <p:nvSpPr>
-          <p:cNvPr id="2" name="Shape 0"/>
-          <p:cNvSpPr/>
-          <p:nvPr/>
-        </p:nvSpPr>
-        <p:spPr>
-          <a:xfrm>
-            <a:off x="548640" y="512064"/>
-            <a:ext cx="411480" cy="45720"/>
-          </a:xfrm>
-          <a:prstGeom prst="rect">
-            <a:avLst/>
-          </a:prstGeom>
-          <a:solidFill>
-            <a:srgbClr val="D4FF00"/>
-          </a:solidFill>
-          <a:ln/>
-        </p:spPr>
-        <p:txBody>
-          <a:bodyPr/>
-          <a:lstStyle/>
-          <a:p>
-            <a:endParaRPr lang="en-GB"/>
-          </a:p>
-        </p:txBody>
-      </p:sp>
-      <p:sp>
-        <p:nvSpPr>
-          <p:cNvPr id="3" name="Text 1"/>
-          <p:cNvSpPr/>
-          <p:nvPr/>
-        </p:nvSpPr>
-        <p:spPr>
-          <a:xfrm>
-            <a:off x="1097280" y="347472"/>
-            <a:ext cx="10515600" cy="365760"/>
-          </a:xfrm>
-          <a:prstGeom prst="rect">
-            <a:avLst/>
-          </a:prstGeom>
-          <a:noFill/>
-          <a:ln/>
-        </p:spPr>
-        <p:txBody>
-          <a:bodyPr wrap="square" rtlCol="0" anchor="ctr"/>
-          <a:lstStyle/>
-          <a:p>
-            <a:pPr marL="0" indent="0">
-              <a:buNone/>
-            </a:pPr>
-            <a:r>
-              <a:rPr lang="en-US" sz="1050" kern="0" spc="400" dirty="0">
-                <a:solidFill>
-                  <a:srgbClr val="A8A29E"/>
-                </a:solidFill>
-                <a:latin typeface="IBM Plex Mono" pitchFamily="34" charset="0"/>
-                <a:ea typeface="IBM Plex Mono" pitchFamily="34" charset="-122"/>
-                <a:cs typeface="IBM Plex Mono" pitchFamily="34" charset="-120"/>
-              </a:rPr>
-              <a:t>LOAD UX</a:t>
-            </a:r>
-            <a:endParaRPr lang="en-US" sz="1050" dirty="0"/>
-          </a:p>
-        </p:txBody>
-      </p:sp>
-      <p:sp>
-        <p:nvSpPr>
           <p:cNvPr id="4" name="Text 2"/>
           <p:cNvSpPr/>
           <p:nvPr/>
@@ -12057,84 +11568,6 @@
           <a:chExt cx="0" cy="0"/>
         </a:xfrm>
       </p:grpSpPr>
-      <p:sp>
-        <p:nvSpPr>
-          <p:cNvPr id="2" name="Shape 0">
-            <a:extLst>
-              <a:ext uri="{FF2B5EF4-FFF2-40B4-BE49-F238E27FC236}">
-                <a16:creationId xmlns:a16="http://schemas.microsoft.com/office/drawing/2014/main" id="{6141440B-003C-3E11-8E03-5682C2DBF47F}"/>
-              </a:ext>
-            </a:extLst>
-          </p:cNvPr>
-          <p:cNvSpPr/>
-          <p:nvPr/>
-        </p:nvSpPr>
-        <p:spPr>
-          <a:xfrm>
-            <a:off x="548640" y="512064"/>
-            <a:ext cx="411480" cy="45720"/>
-          </a:xfrm>
-          <a:prstGeom prst="rect">
-            <a:avLst/>
-          </a:prstGeom>
-          <a:solidFill>
-            <a:srgbClr val="D4FF00"/>
-          </a:solidFill>
-          <a:ln/>
-        </p:spPr>
-        <p:txBody>
-          <a:bodyPr/>
-          <a:lstStyle/>
-          <a:p>
-            <a:endParaRPr lang="en-GB"/>
-          </a:p>
-        </p:txBody>
-      </p:sp>
-      <p:sp>
-        <p:nvSpPr>
-          <p:cNvPr id="3" name="Text 1">
-            <a:extLst>
-              <a:ext uri="{FF2B5EF4-FFF2-40B4-BE49-F238E27FC236}">
-                <a16:creationId xmlns:a16="http://schemas.microsoft.com/office/drawing/2014/main" id="{A61A40F1-560D-61E3-6E88-F322B47C6639}"/>
-              </a:ext>
-            </a:extLst>
-          </p:cNvPr>
-          <p:cNvSpPr/>
-          <p:nvPr/>
-        </p:nvSpPr>
-        <p:spPr>
-          <a:xfrm>
-            <a:off x="1097280" y="347472"/>
-            <a:ext cx="10515600" cy="365760"/>
-          </a:xfrm>
-          <a:prstGeom prst="rect">
-            <a:avLst/>
-          </a:prstGeom>
-          <a:noFill/>
-          <a:ln/>
-        </p:spPr>
-        <p:txBody>
-          <a:bodyPr wrap="square" rtlCol="0" anchor="ctr"/>
-          <a:lstStyle/>
-          <a:p>
-            <a:pPr marL="0" indent="0">
-              <a:buNone/>
-            </a:pPr>
-            <a:r>
-              <a:rPr lang="en-US" sz="1050" kern="0" spc="400" dirty="0">
-                <a:solidFill>
-                  <a:srgbClr val="A8A29E"/>
-                </a:solidFill>
-                <a:latin typeface="IBM Plex Mono" pitchFamily="34" charset="0"/>
-                <a:ea typeface="IBM Plex Mono" pitchFamily="34" charset="-122"/>
-                <a:cs typeface="IBM Plex Mono" pitchFamily="34" charset="-120"/>
-              </a:rPr>
-              <a:t>LOAD UX</a:t>
-            </a:r>
-            <a:endParaRPr lang="en-US" sz="1050" dirty="0"/>
-          </a:p>
-        </p:txBody>
-      </p:sp>
       <p:sp>
         <p:nvSpPr>
           <p:cNvPr id="4" name="Text 2">
@@ -12691,84 +12124,6 @@
       </p:grpSpPr>
       <p:sp>
         <p:nvSpPr>
-          <p:cNvPr id="2" name="Shape 0">
-            <a:extLst>
-              <a:ext uri="{FF2B5EF4-FFF2-40B4-BE49-F238E27FC236}">
-                <a16:creationId xmlns:a16="http://schemas.microsoft.com/office/drawing/2014/main" id="{3B672C99-B74B-01E7-BB60-6C3A20D97834}"/>
-              </a:ext>
-            </a:extLst>
-          </p:cNvPr>
-          <p:cNvSpPr/>
-          <p:nvPr/>
-        </p:nvSpPr>
-        <p:spPr>
-          <a:xfrm>
-            <a:off x="548640" y="512064"/>
-            <a:ext cx="411480" cy="45720"/>
-          </a:xfrm>
-          <a:prstGeom prst="rect">
-            <a:avLst/>
-          </a:prstGeom>
-          <a:solidFill>
-            <a:srgbClr val="D4FF00"/>
-          </a:solidFill>
-          <a:ln/>
-        </p:spPr>
-        <p:txBody>
-          <a:bodyPr/>
-          <a:lstStyle/>
-          <a:p>
-            <a:endParaRPr lang="en-GB"/>
-          </a:p>
-        </p:txBody>
-      </p:sp>
-      <p:sp>
-        <p:nvSpPr>
-          <p:cNvPr id="3" name="Text 1">
-            <a:extLst>
-              <a:ext uri="{FF2B5EF4-FFF2-40B4-BE49-F238E27FC236}">
-                <a16:creationId xmlns:a16="http://schemas.microsoft.com/office/drawing/2014/main" id="{63FBC0FA-BEC0-D939-EB4A-AD72092E0B13}"/>
-              </a:ext>
-            </a:extLst>
-          </p:cNvPr>
-          <p:cNvSpPr/>
-          <p:nvPr/>
-        </p:nvSpPr>
-        <p:spPr>
-          <a:xfrm>
-            <a:off x="1097280" y="347472"/>
-            <a:ext cx="10515600" cy="365760"/>
-          </a:xfrm>
-          <a:prstGeom prst="rect">
-            <a:avLst/>
-          </a:prstGeom>
-          <a:noFill/>
-          <a:ln/>
-        </p:spPr>
-        <p:txBody>
-          <a:bodyPr wrap="square" rtlCol="0" anchor="ctr"/>
-          <a:lstStyle/>
-          <a:p>
-            <a:pPr marL="0" indent="0">
-              <a:buNone/>
-            </a:pPr>
-            <a:r>
-              <a:rPr lang="en-US" sz="1050" kern="0" spc="400" dirty="0">
-                <a:solidFill>
-                  <a:srgbClr val="A8A29E"/>
-                </a:solidFill>
-                <a:latin typeface="IBM Plex Mono" pitchFamily="34" charset="0"/>
-                <a:ea typeface="IBM Plex Mono" pitchFamily="34" charset="-122"/>
-                <a:cs typeface="IBM Plex Mono" pitchFamily="34" charset="-120"/>
-              </a:rPr>
-              <a:t>LOAD UX</a:t>
-            </a:r>
-            <a:endParaRPr lang="en-US" sz="1050" dirty="0"/>
-          </a:p>
-        </p:txBody>
-      </p:sp>
-      <p:sp>
-        <p:nvSpPr>
           <p:cNvPr id="4" name="Text 2">
             <a:extLst>
               <a:ext uri="{FF2B5EF4-FFF2-40B4-BE49-F238E27FC236}">
@@ -12982,72 +12337,6 @@
           <a:chExt cx="0" cy="0"/>
         </a:xfrm>
       </p:grpSpPr>
-      <p:sp>
-        <p:nvSpPr>
-          <p:cNvPr id="2" name="Shape 0"/>
-          <p:cNvSpPr/>
-          <p:nvPr/>
-        </p:nvSpPr>
-        <p:spPr>
-          <a:xfrm>
-            <a:off x="548640" y="512064"/>
-            <a:ext cx="411480" cy="45720"/>
-          </a:xfrm>
-          <a:prstGeom prst="rect">
-            <a:avLst/>
-          </a:prstGeom>
-          <a:solidFill>
-            <a:srgbClr val="D4FF00"/>
-          </a:solidFill>
-          <a:ln/>
-        </p:spPr>
-        <p:txBody>
-          <a:bodyPr/>
-          <a:lstStyle/>
-          <a:p>
-            <a:endParaRPr lang="en-GB"/>
-          </a:p>
-        </p:txBody>
-      </p:sp>
-      <p:sp>
-        <p:nvSpPr>
-          <p:cNvPr id="3" name="Text 1"/>
-          <p:cNvSpPr/>
-          <p:nvPr/>
-        </p:nvSpPr>
-        <p:spPr>
-          <a:xfrm>
-            <a:off x="1097280" y="347472"/>
-            <a:ext cx="10515600" cy="365760"/>
-          </a:xfrm>
-          <a:prstGeom prst="rect">
-            <a:avLst/>
-          </a:prstGeom>
-          <a:noFill/>
-          <a:ln/>
-        </p:spPr>
-        <p:txBody>
-          <a:bodyPr wrap="square" rtlCol="0" anchor="ctr"/>
-          <a:lstStyle/>
-          <a:p>
-            <a:pPr marL="0" indent="0">
-              <a:buNone/>
-            </a:pPr>
-            <a:r>
-              <a:rPr lang="en-US" sz="1050" kern="0" spc="400" dirty="0">
-                <a:solidFill>
-                  <a:srgbClr val="A8A29E"/>
-                </a:solidFill>
-                <a:latin typeface="IBM Plex Mono" pitchFamily="34" charset="0"/>
-                <a:ea typeface="IBM Plex Mono" pitchFamily="34" charset="-122"/>
-                <a:cs typeface="IBM Plex Mono" pitchFamily="34" charset="-120"/>
-              </a:rPr>
-              <a:t>SHELL COMPOSITION</a:t>
-            </a:r>
-            <a:endParaRPr lang="en-US" sz="1050" dirty="0"/>
-          </a:p>
-        </p:txBody>
-      </p:sp>
       <p:sp>
         <p:nvSpPr>
           <p:cNvPr id="4" name="Text 2"/>
@@ -14638,84 +13927,6 @@
       </p:grpSpPr>
       <p:sp>
         <p:nvSpPr>
-          <p:cNvPr id="2" name="Shape 0">
-            <a:extLst>
-              <a:ext uri="{FF2B5EF4-FFF2-40B4-BE49-F238E27FC236}">
-                <a16:creationId xmlns:a16="http://schemas.microsoft.com/office/drawing/2014/main" id="{C9DE0C76-6AD6-A5B4-0311-7E843386D1D6}"/>
-              </a:ext>
-            </a:extLst>
-          </p:cNvPr>
-          <p:cNvSpPr/>
-          <p:nvPr/>
-        </p:nvSpPr>
-        <p:spPr>
-          <a:xfrm>
-            <a:off x="548640" y="512064"/>
-            <a:ext cx="411480" cy="45720"/>
-          </a:xfrm>
-          <a:prstGeom prst="rect">
-            <a:avLst/>
-          </a:prstGeom>
-          <a:solidFill>
-            <a:srgbClr val="D4FF00"/>
-          </a:solidFill>
-          <a:ln/>
-        </p:spPr>
-        <p:txBody>
-          <a:bodyPr/>
-          <a:lstStyle/>
-          <a:p>
-            <a:endParaRPr lang="en-GB"/>
-          </a:p>
-        </p:txBody>
-      </p:sp>
-      <p:sp>
-        <p:nvSpPr>
-          <p:cNvPr id="3" name="Text 1">
-            <a:extLst>
-              <a:ext uri="{FF2B5EF4-FFF2-40B4-BE49-F238E27FC236}">
-                <a16:creationId xmlns:a16="http://schemas.microsoft.com/office/drawing/2014/main" id="{A16FC911-DB00-EC1A-31D2-5E65ED74D026}"/>
-              </a:ext>
-            </a:extLst>
-          </p:cNvPr>
-          <p:cNvSpPr/>
-          <p:nvPr/>
-        </p:nvSpPr>
-        <p:spPr>
-          <a:xfrm>
-            <a:off x="1097280" y="347472"/>
-            <a:ext cx="10515600" cy="365760"/>
-          </a:xfrm>
-          <a:prstGeom prst="rect">
-            <a:avLst/>
-          </a:prstGeom>
-          <a:noFill/>
-          <a:ln/>
-        </p:spPr>
-        <p:txBody>
-          <a:bodyPr wrap="square" rtlCol="0" anchor="ctr"/>
-          <a:lstStyle/>
-          <a:p>
-            <a:pPr marL="0" indent="0">
-              <a:buNone/>
-            </a:pPr>
-            <a:r>
-              <a:rPr lang="en-US" sz="1050" kern="0" spc="400" dirty="0">
-                <a:solidFill>
-                  <a:srgbClr val="A8A29E"/>
-                </a:solidFill>
-                <a:latin typeface="IBM Plex Mono" pitchFamily="34" charset="0"/>
-                <a:ea typeface="IBM Plex Mono" pitchFamily="34" charset="-122"/>
-                <a:cs typeface="IBM Plex Mono" pitchFamily="34" charset="-120"/>
-              </a:rPr>
-              <a:t>SHELL COMPOSITION</a:t>
-            </a:r>
-            <a:endParaRPr lang="en-US" sz="1050" dirty="0"/>
-          </a:p>
-        </p:txBody>
-      </p:sp>
-      <p:sp>
-        <p:nvSpPr>
           <p:cNvPr id="4" name="Text 2">
             <a:extLst>
               <a:ext uri="{FF2B5EF4-FFF2-40B4-BE49-F238E27FC236}">
@@ -14903,84 +14114,6 @@
           <a:chExt cx="0" cy="0"/>
         </a:xfrm>
       </p:grpSpPr>
-      <p:sp>
-        <p:nvSpPr>
-          <p:cNvPr id="2" name="Shape 0">
-            <a:extLst>
-              <a:ext uri="{FF2B5EF4-FFF2-40B4-BE49-F238E27FC236}">
-                <a16:creationId xmlns:a16="http://schemas.microsoft.com/office/drawing/2014/main" id="{5778A97A-2479-18CE-95DF-F383FBA69953}"/>
-              </a:ext>
-            </a:extLst>
-          </p:cNvPr>
-          <p:cNvSpPr/>
-          <p:nvPr/>
-        </p:nvSpPr>
-        <p:spPr>
-          <a:xfrm>
-            <a:off x="548640" y="512064"/>
-            <a:ext cx="411480" cy="45720"/>
-          </a:xfrm>
-          <a:prstGeom prst="rect">
-            <a:avLst/>
-          </a:prstGeom>
-          <a:solidFill>
-            <a:srgbClr val="D4FF00"/>
-          </a:solidFill>
-          <a:ln/>
-        </p:spPr>
-        <p:txBody>
-          <a:bodyPr/>
-          <a:lstStyle/>
-          <a:p>
-            <a:endParaRPr lang="en-GB"/>
-          </a:p>
-        </p:txBody>
-      </p:sp>
-      <p:sp>
-        <p:nvSpPr>
-          <p:cNvPr id="3" name="Text 1">
-            <a:extLst>
-              <a:ext uri="{FF2B5EF4-FFF2-40B4-BE49-F238E27FC236}">
-                <a16:creationId xmlns:a16="http://schemas.microsoft.com/office/drawing/2014/main" id="{0224EF8D-D0D0-8351-763A-41DCAD9D5D07}"/>
-              </a:ext>
-            </a:extLst>
-          </p:cNvPr>
-          <p:cNvSpPr/>
-          <p:nvPr/>
-        </p:nvSpPr>
-        <p:spPr>
-          <a:xfrm>
-            <a:off x="1097280" y="347472"/>
-            <a:ext cx="10515600" cy="365760"/>
-          </a:xfrm>
-          <a:prstGeom prst="rect">
-            <a:avLst/>
-          </a:prstGeom>
-          <a:noFill/>
-          <a:ln/>
-        </p:spPr>
-        <p:txBody>
-          <a:bodyPr wrap="square" rtlCol="0" anchor="ctr"/>
-          <a:lstStyle/>
-          <a:p>
-            <a:pPr marL="0" indent="0">
-              <a:buNone/>
-            </a:pPr>
-            <a:r>
-              <a:rPr lang="en-US" sz="1050" kern="0" spc="400" dirty="0">
-                <a:solidFill>
-                  <a:srgbClr val="A8A29E"/>
-                </a:solidFill>
-                <a:latin typeface="IBM Plex Mono" pitchFamily="34" charset="0"/>
-                <a:ea typeface="IBM Plex Mono" pitchFamily="34" charset="-122"/>
-                <a:cs typeface="IBM Plex Mono" pitchFamily="34" charset="-120"/>
-              </a:rPr>
-              <a:t>SHELL COMPOSITION</a:t>
-            </a:r>
-            <a:endParaRPr lang="en-US" sz="1050" dirty="0"/>
-          </a:p>
-        </p:txBody>
-      </p:sp>
       <p:sp>
         <p:nvSpPr>
           <p:cNvPr id="4" name="Text 2">
@@ -16469,72 +15602,6 @@
       </p:grpSpPr>
       <p:sp>
         <p:nvSpPr>
-          <p:cNvPr id="2" name="Shape 0"/>
-          <p:cNvSpPr/>
-          <p:nvPr/>
-        </p:nvSpPr>
-        <p:spPr>
-          <a:xfrm>
-            <a:off x="548640" y="512064"/>
-            <a:ext cx="411480" cy="45720"/>
-          </a:xfrm>
-          <a:prstGeom prst="rect">
-            <a:avLst/>
-          </a:prstGeom>
-          <a:solidFill>
-            <a:srgbClr val="D4FF00"/>
-          </a:solidFill>
-          <a:ln/>
-        </p:spPr>
-        <p:txBody>
-          <a:bodyPr/>
-          <a:lstStyle/>
-          <a:p>
-            <a:endParaRPr lang="en-GB"/>
-          </a:p>
-        </p:txBody>
-      </p:sp>
-      <p:sp>
-        <p:nvSpPr>
-          <p:cNvPr id="3" name="Text 1"/>
-          <p:cNvSpPr/>
-          <p:nvPr/>
-        </p:nvSpPr>
-        <p:spPr>
-          <a:xfrm>
-            <a:off x="1097280" y="347472"/>
-            <a:ext cx="10515600" cy="365760"/>
-          </a:xfrm>
-          <a:prstGeom prst="rect">
-            <a:avLst/>
-          </a:prstGeom>
-          <a:noFill/>
-          <a:ln/>
-        </p:spPr>
-        <p:txBody>
-          <a:bodyPr wrap="square" rtlCol="0" anchor="ctr"/>
-          <a:lstStyle/>
-          <a:p>
-            <a:pPr marL="0" indent="0">
-              <a:buNone/>
-            </a:pPr>
-            <a:r>
-              <a:rPr lang="en-US" sz="1050" kern="0" spc="400" dirty="0">
-                <a:solidFill>
-                  <a:srgbClr val="A8A29E"/>
-                </a:solidFill>
-                <a:latin typeface="IBM Plex Mono" pitchFamily="34" charset="0"/>
-                <a:ea typeface="IBM Plex Mono" pitchFamily="34" charset="-122"/>
-                <a:cs typeface="IBM Plex Mono" pitchFamily="34" charset="-120"/>
-              </a:rPr>
-              <a:t>FAULT ISOLATION</a:t>
-            </a:r>
-            <a:endParaRPr lang="en-US" sz="1050" dirty="0"/>
-          </a:p>
-        </p:txBody>
-      </p:sp>
-      <p:sp>
-        <p:nvSpPr>
           <p:cNvPr id="4" name="Text 2"/>
           <p:cNvSpPr/>
           <p:nvPr/>
@@ -17706,84 +16773,6 @@
       </p:grpSpPr>
       <p:sp>
         <p:nvSpPr>
-          <p:cNvPr id="2" name="Shape 0">
-            <a:extLst>
-              <a:ext uri="{FF2B5EF4-FFF2-40B4-BE49-F238E27FC236}">
-                <a16:creationId xmlns:a16="http://schemas.microsoft.com/office/drawing/2014/main" id="{CE1C5304-29D1-33EA-4B5F-B6B22D9FE64B}"/>
-              </a:ext>
-            </a:extLst>
-          </p:cNvPr>
-          <p:cNvSpPr/>
-          <p:nvPr/>
-        </p:nvSpPr>
-        <p:spPr>
-          <a:xfrm>
-            <a:off x="548640" y="512064"/>
-            <a:ext cx="411480" cy="45720"/>
-          </a:xfrm>
-          <a:prstGeom prst="rect">
-            <a:avLst/>
-          </a:prstGeom>
-          <a:solidFill>
-            <a:srgbClr val="D4FF00"/>
-          </a:solidFill>
-          <a:ln/>
-        </p:spPr>
-        <p:txBody>
-          <a:bodyPr/>
-          <a:lstStyle/>
-          <a:p>
-            <a:endParaRPr lang="en-GB"/>
-          </a:p>
-        </p:txBody>
-      </p:sp>
-      <p:sp>
-        <p:nvSpPr>
-          <p:cNvPr id="3" name="Text 1">
-            <a:extLst>
-              <a:ext uri="{FF2B5EF4-FFF2-40B4-BE49-F238E27FC236}">
-                <a16:creationId xmlns:a16="http://schemas.microsoft.com/office/drawing/2014/main" id="{11B7ED6A-D235-7514-CFD9-AD0C07E657D0}"/>
-              </a:ext>
-            </a:extLst>
-          </p:cNvPr>
-          <p:cNvSpPr/>
-          <p:nvPr/>
-        </p:nvSpPr>
-        <p:spPr>
-          <a:xfrm>
-            <a:off x="1097280" y="347472"/>
-            <a:ext cx="10515600" cy="365760"/>
-          </a:xfrm>
-          <a:prstGeom prst="rect">
-            <a:avLst/>
-          </a:prstGeom>
-          <a:noFill/>
-          <a:ln/>
-        </p:spPr>
-        <p:txBody>
-          <a:bodyPr wrap="square" rtlCol="0" anchor="ctr"/>
-          <a:lstStyle/>
-          <a:p>
-            <a:pPr marL="0" indent="0">
-              <a:buNone/>
-            </a:pPr>
-            <a:r>
-              <a:rPr lang="en-US" sz="1050" kern="0" spc="400" dirty="0">
-                <a:solidFill>
-                  <a:srgbClr val="A8A29E"/>
-                </a:solidFill>
-                <a:latin typeface="IBM Plex Mono" pitchFamily="34" charset="0"/>
-                <a:ea typeface="IBM Plex Mono" pitchFamily="34" charset="-122"/>
-                <a:cs typeface="IBM Plex Mono" pitchFamily="34" charset="-120"/>
-              </a:rPr>
-              <a:t>FAULT ISOLATION</a:t>
-            </a:r>
-            <a:endParaRPr lang="en-US" sz="1050" dirty="0"/>
-          </a:p>
-        </p:txBody>
-      </p:sp>
-      <p:sp>
-        <p:nvSpPr>
           <p:cNvPr id="4" name="Text 2">
             <a:extLst>
               <a:ext uri="{FF2B5EF4-FFF2-40B4-BE49-F238E27FC236}">
@@ -18306,84 +17295,6 @@
       </p:grpSpPr>
       <p:sp>
         <p:nvSpPr>
-          <p:cNvPr id="2" name="Shape 0">
-            <a:extLst>
-              <a:ext uri="{FF2B5EF4-FFF2-40B4-BE49-F238E27FC236}">
-                <a16:creationId xmlns:a16="http://schemas.microsoft.com/office/drawing/2014/main" id="{AE0C8073-1E21-653D-9C01-E02B8846B353}"/>
-              </a:ext>
-            </a:extLst>
-          </p:cNvPr>
-          <p:cNvSpPr/>
-          <p:nvPr/>
-        </p:nvSpPr>
-        <p:spPr>
-          <a:xfrm>
-            <a:off x="548640" y="512064"/>
-            <a:ext cx="411480" cy="45720"/>
-          </a:xfrm>
-          <a:prstGeom prst="rect">
-            <a:avLst/>
-          </a:prstGeom>
-          <a:solidFill>
-            <a:srgbClr val="D4FF00"/>
-          </a:solidFill>
-          <a:ln/>
-        </p:spPr>
-        <p:txBody>
-          <a:bodyPr/>
-          <a:lstStyle/>
-          <a:p>
-            <a:endParaRPr lang="en-GB"/>
-          </a:p>
-        </p:txBody>
-      </p:sp>
-      <p:sp>
-        <p:nvSpPr>
-          <p:cNvPr id="3" name="Text 1">
-            <a:extLst>
-              <a:ext uri="{FF2B5EF4-FFF2-40B4-BE49-F238E27FC236}">
-                <a16:creationId xmlns:a16="http://schemas.microsoft.com/office/drawing/2014/main" id="{E8D980F0-40AA-5AAE-1C29-D033F211B73A}"/>
-              </a:ext>
-            </a:extLst>
-          </p:cNvPr>
-          <p:cNvSpPr/>
-          <p:nvPr/>
-        </p:nvSpPr>
-        <p:spPr>
-          <a:xfrm>
-            <a:off x="1097280" y="347472"/>
-            <a:ext cx="10515600" cy="365760"/>
-          </a:xfrm>
-          <a:prstGeom prst="rect">
-            <a:avLst/>
-          </a:prstGeom>
-          <a:noFill/>
-          <a:ln/>
-        </p:spPr>
-        <p:txBody>
-          <a:bodyPr wrap="square" rtlCol="0" anchor="ctr"/>
-          <a:lstStyle/>
-          <a:p>
-            <a:pPr marL="0" indent="0">
-              <a:buNone/>
-            </a:pPr>
-            <a:r>
-              <a:rPr lang="en-US" sz="1050" kern="0" spc="400" dirty="0">
-                <a:solidFill>
-                  <a:srgbClr val="A8A29E"/>
-                </a:solidFill>
-                <a:latin typeface="IBM Plex Mono" pitchFamily="34" charset="0"/>
-                <a:ea typeface="IBM Plex Mono" pitchFamily="34" charset="-122"/>
-                <a:cs typeface="IBM Plex Mono" pitchFamily="34" charset="-120"/>
-              </a:rPr>
-              <a:t>FAULT ISOLATION</a:t>
-            </a:r>
-            <a:endParaRPr lang="en-US" sz="1050" dirty="0"/>
-          </a:p>
-        </p:txBody>
-      </p:sp>
-      <p:sp>
-        <p:nvSpPr>
           <p:cNvPr id="4" name="Text 2">
             <a:extLst>
               <a:ext uri="{FF2B5EF4-FFF2-40B4-BE49-F238E27FC236}">
@@ -18551,72 +17462,6 @@
           <a:chExt cx="0" cy="0"/>
         </a:xfrm>
       </p:grpSpPr>
-      <p:sp>
-        <p:nvSpPr>
-          <p:cNvPr id="2" name="Shape 0"/>
-          <p:cNvSpPr/>
-          <p:nvPr/>
-        </p:nvSpPr>
-        <p:spPr>
-          <a:xfrm>
-            <a:off x="548640" y="512064"/>
-            <a:ext cx="411480" cy="45720"/>
-          </a:xfrm>
-          <a:prstGeom prst="rect">
-            <a:avLst/>
-          </a:prstGeom>
-          <a:solidFill>
-            <a:srgbClr val="D4FF00"/>
-          </a:solidFill>
-          <a:ln/>
-        </p:spPr>
-        <p:txBody>
-          <a:bodyPr/>
-          <a:lstStyle/>
-          <a:p>
-            <a:endParaRPr lang="en-GB"/>
-          </a:p>
-        </p:txBody>
-      </p:sp>
-      <p:sp>
-        <p:nvSpPr>
-          <p:cNvPr id="3" name="Text 1"/>
-          <p:cNvSpPr/>
-          <p:nvPr/>
-        </p:nvSpPr>
-        <p:spPr>
-          <a:xfrm>
-            <a:off x="1097280" y="347472"/>
-            <a:ext cx="10515600" cy="365760"/>
-          </a:xfrm>
-          <a:prstGeom prst="rect">
-            <a:avLst/>
-          </a:prstGeom>
-          <a:noFill/>
-          <a:ln/>
-        </p:spPr>
-        <p:txBody>
-          <a:bodyPr wrap="square" rtlCol="0" anchor="ctr"/>
-          <a:lstStyle/>
-          <a:p>
-            <a:pPr marL="0" indent="0">
-              <a:buNone/>
-            </a:pPr>
-            <a:r>
-              <a:rPr lang="en-US" sz="1050" kern="0" spc="400" dirty="0">
-                <a:solidFill>
-                  <a:srgbClr val="A8A29E"/>
-                </a:solidFill>
-                <a:latin typeface="IBM Plex Mono" pitchFamily="34" charset="0"/>
-                <a:ea typeface="IBM Plex Mono" pitchFamily="34" charset="-122"/>
-                <a:cs typeface="IBM Plex Mono" pitchFamily="34" charset="-120"/>
-              </a:rPr>
-              <a:t>TEAM DX</a:t>
-            </a:r>
-            <a:endParaRPr lang="en-US" sz="1050" dirty="0"/>
-          </a:p>
-        </p:txBody>
-      </p:sp>
       <p:sp>
         <p:nvSpPr>
           <p:cNvPr id="4" name="Text 2"/>
@@ -19859,84 +18704,6 @@
       </p:grpSpPr>
       <p:sp>
         <p:nvSpPr>
-          <p:cNvPr id="2" name="Shape 0">
-            <a:extLst>
-              <a:ext uri="{FF2B5EF4-FFF2-40B4-BE49-F238E27FC236}">
-                <a16:creationId xmlns:a16="http://schemas.microsoft.com/office/drawing/2014/main" id="{6DDA52CB-0280-1788-6401-5770ED64E020}"/>
-              </a:ext>
-            </a:extLst>
-          </p:cNvPr>
-          <p:cNvSpPr/>
-          <p:nvPr/>
-        </p:nvSpPr>
-        <p:spPr>
-          <a:xfrm>
-            <a:off x="548640" y="512064"/>
-            <a:ext cx="411480" cy="45720"/>
-          </a:xfrm>
-          <a:prstGeom prst="rect">
-            <a:avLst/>
-          </a:prstGeom>
-          <a:solidFill>
-            <a:srgbClr val="D4FF00"/>
-          </a:solidFill>
-          <a:ln/>
-        </p:spPr>
-        <p:txBody>
-          <a:bodyPr/>
-          <a:lstStyle/>
-          <a:p>
-            <a:endParaRPr lang="en-GB"/>
-          </a:p>
-        </p:txBody>
-      </p:sp>
-      <p:sp>
-        <p:nvSpPr>
-          <p:cNvPr id="3" name="Text 1">
-            <a:extLst>
-              <a:ext uri="{FF2B5EF4-FFF2-40B4-BE49-F238E27FC236}">
-                <a16:creationId xmlns:a16="http://schemas.microsoft.com/office/drawing/2014/main" id="{4B87D253-92D6-3C5D-249D-325BEDC9C24F}"/>
-              </a:ext>
-            </a:extLst>
-          </p:cNvPr>
-          <p:cNvSpPr/>
-          <p:nvPr/>
-        </p:nvSpPr>
-        <p:spPr>
-          <a:xfrm>
-            <a:off x="1097280" y="347472"/>
-            <a:ext cx="10515600" cy="365760"/>
-          </a:xfrm>
-          <a:prstGeom prst="rect">
-            <a:avLst/>
-          </a:prstGeom>
-          <a:noFill/>
-          <a:ln/>
-        </p:spPr>
-        <p:txBody>
-          <a:bodyPr wrap="square" rtlCol="0" anchor="ctr"/>
-          <a:lstStyle/>
-          <a:p>
-            <a:pPr marL="0" indent="0">
-              <a:buNone/>
-            </a:pPr>
-            <a:r>
-              <a:rPr lang="en-US" sz="1050" kern="0" spc="400" dirty="0">
-                <a:solidFill>
-                  <a:srgbClr val="A8A29E"/>
-                </a:solidFill>
-                <a:latin typeface="IBM Plex Mono" pitchFamily="34" charset="0"/>
-                <a:ea typeface="IBM Plex Mono" pitchFamily="34" charset="-122"/>
-                <a:cs typeface="IBM Plex Mono" pitchFamily="34" charset="-120"/>
-              </a:rPr>
-              <a:t>TEAM DX</a:t>
-            </a:r>
-            <a:endParaRPr lang="en-US" sz="1050" dirty="0"/>
-          </a:p>
-        </p:txBody>
-      </p:sp>
-      <p:sp>
-        <p:nvSpPr>
           <p:cNvPr id="4" name="Text 2">
             <a:extLst>
               <a:ext uri="{FF2B5EF4-FFF2-40B4-BE49-F238E27FC236}">
@@ -19977,51 +18744,6 @@
               <a:t>Prefer events over shared state</a:t>
             </a:r>
             <a:endParaRPr lang="en-US" sz="3300" dirty="0"/>
-          </a:p>
-        </p:txBody>
-      </p:sp>
-      <p:sp>
-        <p:nvSpPr>
-          <p:cNvPr id="6" name="Text 4">
-            <a:extLst>
-              <a:ext uri="{FF2B5EF4-FFF2-40B4-BE49-F238E27FC236}">
-                <a16:creationId xmlns:a16="http://schemas.microsoft.com/office/drawing/2014/main" id="{3CED7C11-9E16-56AC-1645-E1812EC12397}"/>
-              </a:ext>
-            </a:extLst>
-          </p:cNvPr>
-          <p:cNvSpPr/>
-          <p:nvPr/>
-        </p:nvSpPr>
-        <p:spPr>
-          <a:xfrm>
-            <a:off x="11292840" y="6446520"/>
-            <a:ext cx="548640" cy="274320"/>
-          </a:xfrm>
-          <a:prstGeom prst="rect">
-            <a:avLst/>
-          </a:prstGeom>
-          <a:noFill/>
-          <a:ln/>
-        </p:spPr>
-        <p:txBody>
-          <a:bodyPr wrap="square" rtlCol="0" anchor="ctr"/>
-          <a:lstStyle/>
-          <a:p>
-            <a:pPr marL="0" indent="0" algn="r">
-              <a:buNone/>
-            </a:pPr>
-            <a:r>
-              <a:rPr lang="en-US" sz="850" dirty="0">
-                <a:solidFill>
-                  <a:srgbClr val="6B6560"/>
-                </a:solidFill>
-                <a:latin typeface="IBM Plex Mono" pitchFamily="34" charset="0"/>
-                <a:ea typeface="IBM Plex Mono" pitchFamily="34" charset="-122"/>
-                <a:cs typeface="IBM Plex Mono" pitchFamily="34" charset="-120"/>
-              </a:rPr>
-              <a:t>11</a:t>
-            </a:r>
-            <a:endParaRPr lang="en-US" sz="850" dirty="0"/>
           </a:p>
         </p:txBody>
       </p:sp>
@@ -20605,84 +19327,6 @@
       </p:grpSpPr>
       <p:sp>
         <p:nvSpPr>
-          <p:cNvPr id="2" name="Shape 0">
-            <a:extLst>
-              <a:ext uri="{FF2B5EF4-FFF2-40B4-BE49-F238E27FC236}">
-                <a16:creationId xmlns:a16="http://schemas.microsoft.com/office/drawing/2014/main" id="{A659D2D4-44C3-C831-F50A-90B5E2B08A85}"/>
-              </a:ext>
-            </a:extLst>
-          </p:cNvPr>
-          <p:cNvSpPr/>
-          <p:nvPr/>
-        </p:nvSpPr>
-        <p:spPr>
-          <a:xfrm>
-            <a:off x="548640" y="512064"/>
-            <a:ext cx="411480" cy="45720"/>
-          </a:xfrm>
-          <a:prstGeom prst="rect">
-            <a:avLst/>
-          </a:prstGeom>
-          <a:solidFill>
-            <a:srgbClr val="D4FF00"/>
-          </a:solidFill>
-          <a:ln/>
-        </p:spPr>
-        <p:txBody>
-          <a:bodyPr/>
-          <a:lstStyle/>
-          <a:p>
-            <a:endParaRPr lang="en-GB"/>
-          </a:p>
-        </p:txBody>
-      </p:sp>
-      <p:sp>
-        <p:nvSpPr>
-          <p:cNvPr id="3" name="Text 1">
-            <a:extLst>
-              <a:ext uri="{FF2B5EF4-FFF2-40B4-BE49-F238E27FC236}">
-                <a16:creationId xmlns:a16="http://schemas.microsoft.com/office/drawing/2014/main" id="{F155A5E6-C77F-5527-555A-FE27A91A9FBD}"/>
-              </a:ext>
-            </a:extLst>
-          </p:cNvPr>
-          <p:cNvSpPr/>
-          <p:nvPr/>
-        </p:nvSpPr>
-        <p:spPr>
-          <a:xfrm>
-            <a:off x="1097280" y="347472"/>
-            <a:ext cx="10515600" cy="365760"/>
-          </a:xfrm>
-          <a:prstGeom prst="rect">
-            <a:avLst/>
-          </a:prstGeom>
-          <a:noFill/>
-          <a:ln/>
-        </p:spPr>
-        <p:txBody>
-          <a:bodyPr wrap="square" rtlCol="0" anchor="ctr"/>
-          <a:lstStyle/>
-          <a:p>
-            <a:pPr marL="0" indent="0">
-              <a:buNone/>
-            </a:pPr>
-            <a:r>
-              <a:rPr lang="en-US" sz="1050" kern="0" spc="400" dirty="0">
-                <a:solidFill>
-                  <a:srgbClr val="A8A29E"/>
-                </a:solidFill>
-                <a:latin typeface="IBM Plex Mono" pitchFamily="34" charset="0"/>
-                <a:ea typeface="IBM Plex Mono" pitchFamily="34" charset="-122"/>
-                <a:cs typeface="IBM Plex Mono" pitchFamily="34" charset="-120"/>
-              </a:rPr>
-              <a:t>TEAM DX</a:t>
-            </a:r>
-            <a:endParaRPr lang="en-US" sz="1050" dirty="0"/>
-          </a:p>
-        </p:txBody>
-      </p:sp>
-      <p:sp>
-        <p:nvSpPr>
           <p:cNvPr id="4" name="Text 2">
             <a:extLst>
               <a:ext uri="{FF2B5EF4-FFF2-40B4-BE49-F238E27FC236}">
@@ -20723,51 +19367,6 @@
               <a:t>Prefer events over shared state</a:t>
             </a:r>
             <a:endParaRPr lang="en-US" sz="3300" dirty="0"/>
-          </a:p>
-        </p:txBody>
-      </p:sp>
-      <p:sp>
-        <p:nvSpPr>
-          <p:cNvPr id="6" name="Text 4">
-            <a:extLst>
-              <a:ext uri="{FF2B5EF4-FFF2-40B4-BE49-F238E27FC236}">
-                <a16:creationId xmlns:a16="http://schemas.microsoft.com/office/drawing/2014/main" id="{285D9F07-C0C7-FF64-80E8-093445375719}"/>
-              </a:ext>
-            </a:extLst>
-          </p:cNvPr>
-          <p:cNvSpPr/>
-          <p:nvPr/>
-        </p:nvSpPr>
-        <p:spPr>
-          <a:xfrm>
-            <a:off x="11292840" y="6446520"/>
-            <a:ext cx="548640" cy="274320"/>
-          </a:xfrm>
-          <a:prstGeom prst="rect">
-            <a:avLst/>
-          </a:prstGeom>
-          <a:noFill/>
-          <a:ln/>
-        </p:spPr>
-        <p:txBody>
-          <a:bodyPr wrap="square" rtlCol="0" anchor="ctr"/>
-          <a:lstStyle/>
-          <a:p>
-            <a:pPr marL="0" indent="0" algn="r">
-              <a:buNone/>
-            </a:pPr>
-            <a:r>
-              <a:rPr lang="en-US" sz="850" dirty="0">
-                <a:solidFill>
-                  <a:srgbClr val="6B6560"/>
-                </a:solidFill>
-                <a:latin typeface="IBM Plex Mono" pitchFamily="34" charset="0"/>
-                <a:ea typeface="IBM Plex Mono" pitchFamily="34" charset="-122"/>
-                <a:cs typeface="IBM Plex Mono" pitchFamily="34" charset="-120"/>
-              </a:rPr>
-              <a:t>11</a:t>
-            </a:r>
-            <a:endParaRPr lang="en-US" sz="850" dirty="0"/>
           </a:p>
         </p:txBody>
       </p:sp>
@@ -20949,72 +19548,6 @@
       </p:grpSpPr>
       <p:sp>
         <p:nvSpPr>
-          <p:cNvPr id="2" name="Shape 0"/>
-          <p:cNvSpPr/>
-          <p:nvPr/>
-        </p:nvSpPr>
-        <p:spPr>
-          <a:xfrm>
-            <a:off x="548640" y="512064"/>
-            <a:ext cx="411480" cy="45720"/>
-          </a:xfrm>
-          <a:prstGeom prst="rect">
-            <a:avLst/>
-          </a:prstGeom>
-          <a:solidFill>
-            <a:srgbClr val="D4FF00"/>
-          </a:solidFill>
-          <a:ln/>
-        </p:spPr>
-        <p:txBody>
-          <a:bodyPr/>
-          <a:lstStyle/>
-          <a:p>
-            <a:endParaRPr lang="en-GB"/>
-          </a:p>
-        </p:txBody>
-      </p:sp>
-      <p:sp>
-        <p:nvSpPr>
-          <p:cNvPr id="3" name="Text 1"/>
-          <p:cNvSpPr/>
-          <p:nvPr/>
-        </p:nvSpPr>
-        <p:spPr>
-          <a:xfrm>
-            <a:off x="1097280" y="347472"/>
-            <a:ext cx="10515600" cy="365760"/>
-          </a:xfrm>
-          <a:prstGeom prst="rect">
-            <a:avLst/>
-          </a:prstGeom>
-          <a:noFill/>
-          <a:ln/>
-        </p:spPr>
-        <p:txBody>
-          <a:bodyPr wrap="square" rtlCol="0" anchor="ctr"/>
-          <a:lstStyle/>
-          <a:p>
-            <a:pPr marL="0" indent="0">
-              <a:buNone/>
-            </a:pPr>
-            <a:r>
-              <a:rPr lang="en-US" sz="1050" kern="0" spc="400" dirty="0">
-                <a:solidFill>
-                  <a:srgbClr val="A8A29E"/>
-                </a:solidFill>
-                <a:latin typeface="IBM Plex Mono" pitchFamily="34" charset="0"/>
-                <a:ea typeface="IBM Plex Mono" pitchFamily="34" charset="-122"/>
-                <a:cs typeface="IBM Plex Mono" pitchFamily="34" charset="-120"/>
-              </a:rPr>
-              <a:t>THE PROBLEM</a:t>
-            </a:r>
-            <a:endParaRPr lang="en-US" sz="1050" dirty="0"/>
-          </a:p>
-        </p:txBody>
-      </p:sp>
-      <p:sp>
-        <p:nvSpPr>
           <p:cNvPr id="4" name="Text 2"/>
           <p:cNvSpPr/>
           <p:nvPr/>
@@ -21049,84 +19582,6 @@
               <a:t>Team size is the bottleneck</a:t>
             </a:r>
             <a:endParaRPr lang="en-US" sz="3300" dirty="0"/>
-          </a:p>
-        </p:txBody>
-      </p:sp>
-      <p:sp>
-        <p:nvSpPr>
-          <p:cNvPr id="5" name="Text 3"/>
-          <p:cNvSpPr/>
-          <p:nvPr/>
-        </p:nvSpPr>
-        <p:spPr>
-          <a:xfrm>
-            <a:off x="548640" y="6446520"/>
-            <a:ext cx="6400800" cy="274320"/>
-          </a:xfrm>
-          <a:prstGeom prst="rect">
-            <a:avLst/>
-          </a:prstGeom>
-          <a:noFill/>
-          <a:ln/>
-        </p:spPr>
-        <p:txBody>
-          <a:bodyPr wrap="square" rtlCol="0" anchor="ctr"/>
-          <a:lstStyle/>
-          <a:p>
-            <a:pPr marL="0" indent="0">
-              <a:buNone/>
-            </a:pPr>
-            <a:r>
-              <a:rPr lang="en-US" sz="850" kern="0" spc="200" dirty="0">
-                <a:solidFill>
-                  <a:srgbClr val="6B6560"/>
-                </a:solidFill>
-                <a:latin typeface="IBM Plex Mono" pitchFamily="34" charset="0"/>
-                <a:ea typeface="IBM Plex Mono" pitchFamily="34" charset="-122"/>
-                <a:cs typeface="IBM Plex Mono" pitchFamily="34" charset="-120"/>
-              </a:rPr>
-              <a:t>From 5 Devs to 200 · Micro-Frontends</a:t>
-            </a:r>
-            <a:endParaRPr lang="en-US" sz="850" dirty="0"/>
-          </a:p>
-        </p:txBody>
-      </p:sp>
-      <p:sp>
-        <p:nvSpPr>
-          <p:cNvPr id="6" name="Text 4"/>
-          <p:cNvSpPr/>
-          <p:nvPr/>
-        </p:nvSpPr>
-        <p:spPr>
-          <a:xfrm>
-            <a:off x="11292840" y="6446520"/>
-            <a:ext cx="548640" cy="274320"/>
-          </a:xfrm>
-          <a:prstGeom prst="rect">
-            <a:avLst/>
-          </a:prstGeom>
-          <a:noFill/>
-          <a:ln/>
-        </p:spPr>
-        <p:txBody>
-          <a:bodyPr wrap="square" rtlCol="0" anchor="ctr"/>
-          <a:lstStyle/>
-          <a:p>
-            <a:pPr marL="0" indent="0" algn="r">
-              <a:buNone/>
-            </a:pPr>
-            <a:r>
-              <a:rPr lang="en-US" sz="850" dirty="0">
-                <a:solidFill>
-                  <a:srgbClr val="6B6560"/>
-                </a:solidFill>
-                <a:latin typeface="IBM Plex Mono" pitchFamily="34" charset="0"/>
-                <a:ea typeface="IBM Plex Mono" pitchFamily="34" charset="-122"/>
-                <a:cs typeface="IBM Plex Mono" pitchFamily="34" charset="-120"/>
-              </a:rPr>
-              <a:t>02</a:t>
-            </a:r>
-            <a:endParaRPr lang="en-US" sz="850" dirty="0"/>
           </a:p>
         </p:txBody>
       </p:sp>
@@ -21285,72 +19740,6 @@
           <a:chExt cx="0" cy="0"/>
         </a:xfrm>
       </p:grpSpPr>
-      <p:sp>
-        <p:nvSpPr>
-          <p:cNvPr id="2" name="Shape 0"/>
-          <p:cNvSpPr/>
-          <p:nvPr/>
-        </p:nvSpPr>
-        <p:spPr>
-          <a:xfrm>
-            <a:off x="548640" y="512064"/>
-            <a:ext cx="411480" cy="45720"/>
-          </a:xfrm>
-          <a:prstGeom prst="rect">
-            <a:avLst/>
-          </a:prstGeom>
-          <a:solidFill>
-            <a:srgbClr val="D4FF00"/>
-          </a:solidFill>
-          <a:ln/>
-        </p:spPr>
-        <p:txBody>
-          <a:bodyPr/>
-          <a:lstStyle/>
-          <a:p>
-            <a:endParaRPr lang="en-GB"/>
-          </a:p>
-        </p:txBody>
-      </p:sp>
-      <p:sp>
-        <p:nvSpPr>
-          <p:cNvPr id="3" name="Text 1"/>
-          <p:cNvSpPr/>
-          <p:nvPr/>
-        </p:nvSpPr>
-        <p:spPr>
-          <a:xfrm>
-            <a:off x="1097280" y="347472"/>
-            <a:ext cx="10515600" cy="365760"/>
-          </a:xfrm>
-          <a:prstGeom prst="rect">
-            <a:avLst/>
-          </a:prstGeom>
-          <a:noFill/>
-          <a:ln/>
-        </p:spPr>
-        <p:txBody>
-          <a:bodyPr wrap="square" rtlCol="0" anchor="ctr"/>
-          <a:lstStyle/>
-          <a:p>
-            <a:pPr marL="0" indent="0">
-              <a:buNone/>
-            </a:pPr>
-            <a:r>
-              <a:rPr lang="en-US" sz="1050" kern="0" spc="400" dirty="0">
-                <a:solidFill>
-                  <a:srgbClr val="A8A29E"/>
-                </a:solidFill>
-                <a:latin typeface="IBM Plex Mono" pitchFamily="34" charset="0"/>
-                <a:ea typeface="IBM Plex Mono" pitchFamily="34" charset="-122"/>
-                <a:cs typeface="IBM Plex Mono" pitchFamily="34" charset="-120"/>
-              </a:rPr>
-              <a:t>THEME SYSTEM</a:t>
-            </a:r>
-            <a:endParaRPr lang="en-US" sz="1050" dirty="0"/>
-          </a:p>
-        </p:txBody>
-      </p:sp>
       <p:sp>
         <p:nvSpPr>
           <p:cNvPr id="4" name="Text 2"/>
@@ -21643,84 +20032,6 @@
           <a:chExt cx="0" cy="0"/>
         </a:xfrm>
       </p:grpSpPr>
-      <p:sp>
-        <p:nvSpPr>
-          <p:cNvPr id="2" name="Shape 0">
-            <a:extLst>
-              <a:ext uri="{FF2B5EF4-FFF2-40B4-BE49-F238E27FC236}">
-                <a16:creationId xmlns:a16="http://schemas.microsoft.com/office/drawing/2014/main" id="{25D90246-B14E-5B5C-D1C4-2DA61A03055E}"/>
-              </a:ext>
-            </a:extLst>
-          </p:cNvPr>
-          <p:cNvSpPr/>
-          <p:nvPr/>
-        </p:nvSpPr>
-        <p:spPr>
-          <a:xfrm>
-            <a:off x="548640" y="512064"/>
-            <a:ext cx="411480" cy="45720"/>
-          </a:xfrm>
-          <a:prstGeom prst="rect">
-            <a:avLst/>
-          </a:prstGeom>
-          <a:solidFill>
-            <a:srgbClr val="D4FF00"/>
-          </a:solidFill>
-          <a:ln/>
-        </p:spPr>
-        <p:txBody>
-          <a:bodyPr/>
-          <a:lstStyle/>
-          <a:p>
-            <a:endParaRPr lang="en-GB"/>
-          </a:p>
-        </p:txBody>
-      </p:sp>
-      <p:sp>
-        <p:nvSpPr>
-          <p:cNvPr id="3" name="Text 1">
-            <a:extLst>
-              <a:ext uri="{FF2B5EF4-FFF2-40B4-BE49-F238E27FC236}">
-                <a16:creationId xmlns:a16="http://schemas.microsoft.com/office/drawing/2014/main" id="{586A5472-C649-15FD-00E7-5441E211D3A3}"/>
-              </a:ext>
-            </a:extLst>
-          </p:cNvPr>
-          <p:cNvSpPr/>
-          <p:nvPr/>
-        </p:nvSpPr>
-        <p:spPr>
-          <a:xfrm>
-            <a:off x="1097280" y="347472"/>
-            <a:ext cx="10515600" cy="365760"/>
-          </a:xfrm>
-          <a:prstGeom prst="rect">
-            <a:avLst/>
-          </a:prstGeom>
-          <a:noFill/>
-          <a:ln/>
-        </p:spPr>
-        <p:txBody>
-          <a:bodyPr wrap="square" rtlCol="0" anchor="ctr"/>
-          <a:lstStyle/>
-          <a:p>
-            <a:pPr marL="0" indent="0">
-              <a:buNone/>
-            </a:pPr>
-            <a:r>
-              <a:rPr lang="en-US" sz="1050" kern="0" spc="400" dirty="0">
-                <a:solidFill>
-                  <a:srgbClr val="A8A29E"/>
-                </a:solidFill>
-                <a:latin typeface="IBM Plex Mono" pitchFamily="34" charset="0"/>
-                <a:ea typeface="IBM Plex Mono" pitchFamily="34" charset="-122"/>
-                <a:cs typeface="IBM Plex Mono" pitchFamily="34" charset="-120"/>
-              </a:rPr>
-              <a:t>THEME SYSTEM</a:t>
-            </a:r>
-            <a:endParaRPr lang="en-US" sz="1050" dirty="0"/>
-          </a:p>
-        </p:txBody>
-      </p:sp>
       <p:sp>
         <p:nvSpPr>
           <p:cNvPr id="4" name="Text 2">
@@ -22866,84 +21177,6 @@
       </p:grpSpPr>
       <p:sp>
         <p:nvSpPr>
-          <p:cNvPr id="2" name="Shape 0">
-            <a:extLst>
-              <a:ext uri="{FF2B5EF4-FFF2-40B4-BE49-F238E27FC236}">
-                <a16:creationId xmlns:a16="http://schemas.microsoft.com/office/drawing/2014/main" id="{26455960-8D07-41BF-0CE3-1DB863560D1F}"/>
-              </a:ext>
-            </a:extLst>
-          </p:cNvPr>
-          <p:cNvSpPr/>
-          <p:nvPr/>
-        </p:nvSpPr>
-        <p:spPr>
-          <a:xfrm>
-            <a:off x="548640" y="512064"/>
-            <a:ext cx="411480" cy="45720"/>
-          </a:xfrm>
-          <a:prstGeom prst="rect">
-            <a:avLst/>
-          </a:prstGeom>
-          <a:solidFill>
-            <a:srgbClr val="D4FF00"/>
-          </a:solidFill>
-          <a:ln/>
-        </p:spPr>
-        <p:txBody>
-          <a:bodyPr/>
-          <a:lstStyle/>
-          <a:p>
-            <a:endParaRPr lang="en-GB"/>
-          </a:p>
-        </p:txBody>
-      </p:sp>
-      <p:sp>
-        <p:nvSpPr>
-          <p:cNvPr id="3" name="Text 1">
-            <a:extLst>
-              <a:ext uri="{FF2B5EF4-FFF2-40B4-BE49-F238E27FC236}">
-                <a16:creationId xmlns:a16="http://schemas.microsoft.com/office/drawing/2014/main" id="{608CF940-CAA6-29EC-12F1-7DB0EAA4A432}"/>
-              </a:ext>
-            </a:extLst>
-          </p:cNvPr>
-          <p:cNvSpPr/>
-          <p:nvPr/>
-        </p:nvSpPr>
-        <p:spPr>
-          <a:xfrm>
-            <a:off x="1097280" y="347472"/>
-            <a:ext cx="10515600" cy="365760"/>
-          </a:xfrm>
-          <a:prstGeom prst="rect">
-            <a:avLst/>
-          </a:prstGeom>
-          <a:noFill/>
-          <a:ln/>
-        </p:spPr>
-        <p:txBody>
-          <a:bodyPr wrap="square" rtlCol="0" anchor="ctr"/>
-          <a:lstStyle/>
-          <a:p>
-            <a:pPr marL="0" indent="0">
-              <a:buNone/>
-            </a:pPr>
-            <a:r>
-              <a:rPr lang="en-US" sz="1050" kern="0" spc="400" dirty="0">
-                <a:solidFill>
-                  <a:srgbClr val="A8A29E"/>
-                </a:solidFill>
-                <a:latin typeface="IBM Plex Mono" pitchFamily="34" charset="0"/>
-                <a:ea typeface="IBM Plex Mono" pitchFamily="34" charset="-122"/>
-                <a:cs typeface="IBM Plex Mono" pitchFamily="34" charset="-120"/>
-              </a:rPr>
-              <a:t>THEME SYSTEM</a:t>
-            </a:r>
-            <a:endParaRPr lang="en-US" sz="1050" dirty="0"/>
-          </a:p>
-        </p:txBody>
-      </p:sp>
-      <p:sp>
-        <p:nvSpPr>
           <p:cNvPr id="4" name="Text 2">
             <a:extLst>
               <a:ext uri="{FF2B5EF4-FFF2-40B4-BE49-F238E27FC236}">
@@ -23113,72 +21346,6 @@
       </p:grpSpPr>
       <p:sp>
         <p:nvSpPr>
-          <p:cNvPr id="2" name="Shape 0"/>
-          <p:cNvSpPr/>
-          <p:nvPr/>
-        </p:nvSpPr>
-        <p:spPr>
-          <a:xfrm>
-            <a:off x="548640" y="512064"/>
-            <a:ext cx="411480" cy="45720"/>
-          </a:xfrm>
-          <a:prstGeom prst="rect">
-            <a:avLst/>
-          </a:prstGeom>
-          <a:solidFill>
-            <a:srgbClr val="D4FF00"/>
-          </a:solidFill>
-          <a:ln/>
-        </p:spPr>
-        <p:txBody>
-          <a:bodyPr/>
-          <a:lstStyle/>
-          <a:p>
-            <a:endParaRPr lang="en-GB"/>
-          </a:p>
-        </p:txBody>
-      </p:sp>
-      <p:sp>
-        <p:nvSpPr>
-          <p:cNvPr id="3" name="Text 1"/>
-          <p:cNvSpPr/>
-          <p:nvPr/>
-        </p:nvSpPr>
-        <p:spPr>
-          <a:xfrm>
-            <a:off x="1097280" y="347472"/>
-            <a:ext cx="10515600" cy="365760"/>
-          </a:xfrm>
-          <a:prstGeom prst="rect">
-            <a:avLst/>
-          </a:prstGeom>
-          <a:noFill/>
-          <a:ln/>
-        </p:spPr>
-        <p:txBody>
-          <a:bodyPr wrap="square" rtlCol="0" anchor="ctr"/>
-          <a:lstStyle/>
-          <a:p>
-            <a:pPr marL="0" indent="0">
-              <a:buNone/>
-            </a:pPr>
-            <a:r>
-              <a:rPr lang="en-US" sz="1050" kern="0" spc="400" dirty="0">
-                <a:solidFill>
-                  <a:srgbClr val="A8A29E"/>
-                </a:solidFill>
-                <a:latin typeface="IBM Plex Mono" pitchFamily="34" charset="0"/>
-                <a:ea typeface="IBM Plex Mono" pitchFamily="34" charset="-122"/>
-                <a:cs typeface="IBM Plex Mono" pitchFamily="34" charset="-120"/>
-              </a:rPr>
-              <a:t>PERFORMANCE</a:t>
-            </a:r>
-            <a:endParaRPr lang="en-US" sz="1050" dirty="0"/>
-          </a:p>
-        </p:txBody>
-      </p:sp>
-      <p:sp>
-        <p:nvSpPr>
           <p:cNvPr id="4" name="Text 2"/>
           <p:cNvSpPr/>
           <p:nvPr/>
@@ -24795,84 +22962,6 @@
           <a:chExt cx="0" cy="0"/>
         </a:xfrm>
       </p:grpSpPr>
-      <p:sp>
-        <p:nvSpPr>
-          <p:cNvPr id="2" name="Shape 0">
-            <a:extLst>
-              <a:ext uri="{FF2B5EF4-FFF2-40B4-BE49-F238E27FC236}">
-                <a16:creationId xmlns:a16="http://schemas.microsoft.com/office/drawing/2014/main" id="{3E38A778-B423-8AB2-9035-52FBD0780110}"/>
-              </a:ext>
-            </a:extLst>
-          </p:cNvPr>
-          <p:cNvSpPr/>
-          <p:nvPr/>
-        </p:nvSpPr>
-        <p:spPr>
-          <a:xfrm>
-            <a:off x="548640" y="512064"/>
-            <a:ext cx="411480" cy="45720"/>
-          </a:xfrm>
-          <a:prstGeom prst="rect">
-            <a:avLst/>
-          </a:prstGeom>
-          <a:solidFill>
-            <a:srgbClr val="D4FF00"/>
-          </a:solidFill>
-          <a:ln/>
-        </p:spPr>
-        <p:txBody>
-          <a:bodyPr/>
-          <a:lstStyle/>
-          <a:p>
-            <a:endParaRPr lang="en-GB"/>
-          </a:p>
-        </p:txBody>
-      </p:sp>
-      <p:sp>
-        <p:nvSpPr>
-          <p:cNvPr id="3" name="Text 1">
-            <a:extLst>
-              <a:ext uri="{FF2B5EF4-FFF2-40B4-BE49-F238E27FC236}">
-                <a16:creationId xmlns:a16="http://schemas.microsoft.com/office/drawing/2014/main" id="{CDC8FC87-C812-7584-70F7-04D704434F46}"/>
-              </a:ext>
-            </a:extLst>
-          </p:cNvPr>
-          <p:cNvSpPr/>
-          <p:nvPr/>
-        </p:nvSpPr>
-        <p:spPr>
-          <a:xfrm>
-            <a:off x="1097280" y="347472"/>
-            <a:ext cx="10515600" cy="365760"/>
-          </a:xfrm>
-          <a:prstGeom prst="rect">
-            <a:avLst/>
-          </a:prstGeom>
-          <a:noFill/>
-          <a:ln/>
-        </p:spPr>
-        <p:txBody>
-          <a:bodyPr wrap="square" rtlCol="0" anchor="ctr"/>
-          <a:lstStyle/>
-          <a:p>
-            <a:pPr marL="0" indent="0">
-              <a:buNone/>
-            </a:pPr>
-            <a:r>
-              <a:rPr lang="en-US" sz="1050" kern="0" spc="400" dirty="0">
-                <a:solidFill>
-                  <a:srgbClr val="A8A29E"/>
-                </a:solidFill>
-                <a:latin typeface="IBM Plex Mono" pitchFamily="34" charset="0"/>
-                <a:ea typeface="IBM Plex Mono" pitchFamily="34" charset="-122"/>
-                <a:cs typeface="IBM Plex Mono" pitchFamily="34" charset="-120"/>
-              </a:rPr>
-              <a:t>PERFORMANCE</a:t>
-            </a:r>
-            <a:endParaRPr lang="en-US" sz="1050" dirty="0"/>
-          </a:p>
-        </p:txBody>
-      </p:sp>
       <p:sp>
         <p:nvSpPr>
           <p:cNvPr id="4" name="Text 2">
@@ -25857,72 +23946,6 @@
       </p:grpSpPr>
       <p:sp>
         <p:nvSpPr>
-          <p:cNvPr id="2" name="Shape 0"/>
-          <p:cNvSpPr/>
-          <p:nvPr/>
-        </p:nvSpPr>
-        <p:spPr>
-          <a:xfrm>
-            <a:off x="548640" y="512064"/>
-            <a:ext cx="411480" cy="45720"/>
-          </a:xfrm>
-          <a:prstGeom prst="rect">
-            <a:avLst/>
-          </a:prstGeom>
-          <a:solidFill>
-            <a:srgbClr val="D4FF00"/>
-          </a:solidFill>
-          <a:ln/>
-        </p:spPr>
-        <p:txBody>
-          <a:bodyPr/>
-          <a:lstStyle/>
-          <a:p>
-            <a:endParaRPr lang="en-GB"/>
-          </a:p>
-        </p:txBody>
-      </p:sp>
-      <p:sp>
-        <p:nvSpPr>
-          <p:cNvPr id="3" name="Text 1"/>
-          <p:cNvSpPr/>
-          <p:nvPr/>
-        </p:nvSpPr>
-        <p:spPr>
-          <a:xfrm>
-            <a:off x="1097280" y="347472"/>
-            <a:ext cx="10515600" cy="365760"/>
-          </a:xfrm>
-          <a:prstGeom prst="rect">
-            <a:avLst/>
-          </a:prstGeom>
-          <a:noFill/>
-          <a:ln/>
-        </p:spPr>
-        <p:txBody>
-          <a:bodyPr wrap="square" rtlCol="0" anchor="ctr"/>
-          <a:lstStyle/>
-          <a:p>
-            <a:pPr marL="0" indent="0">
-              <a:buNone/>
-            </a:pPr>
-            <a:r>
-              <a:rPr lang="en-US" sz="1050" kern="0" spc="400" dirty="0">
-                <a:solidFill>
-                  <a:srgbClr val="A8A29E"/>
-                </a:solidFill>
-                <a:latin typeface="IBM Plex Mono" pitchFamily="34" charset="0"/>
-                <a:ea typeface="IBM Plex Mono" pitchFamily="34" charset="-122"/>
-                <a:cs typeface="IBM Plex Mono" pitchFamily="34" charset="-120"/>
-              </a:rPr>
-              <a:t>TESTING</a:t>
-            </a:r>
-            <a:endParaRPr lang="en-US" sz="1050" dirty="0"/>
-          </a:p>
-        </p:txBody>
-      </p:sp>
-      <p:sp>
-        <p:nvSpPr>
           <p:cNvPr id="4" name="Text 2"/>
           <p:cNvSpPr/>
           <p:nvPr/>
@@ -26451,84 +24474,6 @@
           <a:chExt cx="0" cy="0"/>
         </a:xfrm>
       </p:grpSpPr>
-      <p:sp>
-        <p:nvSpPr>
-          <p:cNvPr id="2" name="Shape 0">
-            <a:extLst>
-              <a:ext uri="{FF2B5EF4-FFF2-40B4-BE49-F238E27FC236}">
-                <a16:creationId xmlns:a16="http://schemas.microsoft.com/office/drawing/2014/main" id="{0DCF891A-24CA-01F7-14DB-C39B2D5DEA22}"/>
-              </a:ext>
-            </a:extLst>
-          </p:cNvPr>
-          <p:cNvSpPr/>
-          <p:nvPr/>
-        </p:nvSpPr>
-        <p:spPr>
-          <a:xfrm>
-            <a:off x="548640" y="512064"/>
-            <a:ext cx="411480" cy="45720"/>
-          </a:xfrm>
-          <a:prstGeom prst="rect">
-            <a:avLst/>
-          </a:prstGeom>
-          <a:solidFill>
-            <a:srgbClr val="D4FF00"/>
-          </a:solidFill>
-          <a:ln/>
-        </p:spPr>
-        <p:txBody>
-          <a:bodyPr/>
-          <a:lstStyle/>
-          <a:p>
-            <a:endParaRPr lang="en-GB"/>
-          </a:p>
-        </p:txBody>
-      </p:sp>
-      <p:sp>
-        <p:nvSpPr>
-          <p:cNvPr id="3" name="Text 1">
-            <a:extLst>
-              <a:ext uri="{FF2B5EF4-FFF2-40B4-BE49-F238E27FC236}">
-                <a16:creationId xmlns:a16="http://schemas.microsoft.com/office/drawing/2014/main" id="{703D8F02-ED0E-5967-C69F-4A6D528F0709}"/>
-              </a:ext>
-            </a:extLst>
-          </p:cNvPr>
-          <p:cNvSpPr/>
-          <p:nvPr/>
-        </p:nvSpPr>
-        <p:spPr>
-          <a:xfrm>
-            <a:off x="1097280" y="347472"/>
-            <a:ext cx="10515600" cy="365760"/>
-          </a:xfrm>
-          <a:prstGeom prst="rect">
-            <a:avLst/>
-          </a:prstGeom>
-          <a:noFill/>
-          <a:ln/>
-        </p:spPr>
-        <p:txBody>
-          <a:bodyPr wrap="square" rtlCol="0" anchor="ctr"/>
-          <a:lstStyle/>
-          <a:p>
-            <a:pPr marL="0" indent="0">
-              <a:buNone/>
-            </a:pPr>
-            <a:r>
-              <a:rPr lang="en-US" sz="1050" kern="0" spc="400" dirty="0">
-                <a:solidFill>
-                  <a:srgbClr val="A8A29E"/>
-                </a:solidFill>
-                <a:latin typeface="IBM Plex Mono" pitchFamily="34" charset="0"/>
-                <a:ea typeface="IBM Plex Mono" pitchFamily="34" charset="-122"/>
-                <a:cs typeface="IBM Plex Mono" pitchFamily="34" charset="-120"/>
-              </a:rPr>
-              <a:t>TESTING</a:t>
-            </a:r>
-            <a:endParaRPr lang="en-US" sz="1050" dirty="0"/>
-          </a:p>
-        </p:txBody>
-      </p:sp>
       <p:sp>
         <p:nvSpPr>
           <p:cNvPr id="4" name="Text 2">
@@ -27489,45 +25434,6 @@
               <a:t>Six segments, ~10 minutes</a:t>
             </a:r>
             <a:endParaRPr lang="en-US" sz="3300" dirty="0"/>
-          </a:p>
-        </p:txBody>
-      </p:sp>
-      <p:sp>
-        <p:nvSpPr>
-          <p:cNvPr id="6" name="Text 4"/>
-          <p:cNvSpPr/>
-          <p:nvPr/>
-        </p:nvSpPr>
-        <p:spPr>
-          <a:xfrm>
-            <a:off x="11292840" y="6446520"/>
-            <a:ext cx="548640" cy="274320"/>
-          </a:xfrm>
-          <a:prstGeom prst="rect">
-            <a:avLst/>
-          </a:prstGeom>
-          <a:noFill/>
-          <a:ln/>
-        </p:spPr>
-        <p:txBody>
-          <a:bodyPr wrap="square" rtlCol="0" anchor="ctr"/>
-          <a:lstStyle/>
-          <a:p>
-            <a:pPr marL="0" indent="0" algn="r">
-              <a:buNone/>
-            </a:pPr>
-            <a:r>
-              <a:rPr lang="en-US" sz="850" dirty="0">
-                <a:solidFill>
-                  <a:srgbClr val="6B6560"/>
-                </a:solidFill>
-                <a:latin typeface="IBM Plex Mono" pitchFamily="34" charset="0"/>
-                <a:ea typeface="IBM Plex Mono" pitchFamily="34" charset="-122"/>
-                <a:cs typeface="IBM Plex Mono" pitchFamily="34" charset="-120"/>
-              </a:rPr>
-              <a:t>16</a:t>
-            </a:r>
-            <a:endParaRPr lang="en-US" sz="850" dirty="0"/>
           </a:p>
         </p:txBody>
       </p:sp>
@@ -29575,72 +27481,6 @@
       </p:grpSpPr>
       <p:sp>
         <p:nvSpPr>
-          <p:cNvPr id="2" name="Shape 0"/>
-          <p:cNvSpPr/>
-          <p:nvPr/>
-        </p:nvSpPr>
-        <p:spPr>
-          <a:xfrm>
-            <a:off x="548640" y="512064"/>
-            <a:ext cx="411480" cy="45720"/>
-          </a:xfrm>
-          <a:prstGeom prst="rect">
-            <a:avLst/>
-          </a:prstGeom>
-          <a:solidFill>
-            <a:srgbClr val="D4FF00"/>
-          </a:solidFill>
-          <a:ln/>
-        </p:spPr>
-        <p:txBody>
-          <a:bodyPr/>
-          <a:lstStyle/>
-          <a:p>
-            <a:endParaRPr lang="en-GB"/>
-          </a:p>
-        </p:txBody>
-      </p:sp>
-      <p:sp>
-        <p:nvSpPr>
-          <p:cNvPr id="3" name="Text 1"/>
-          <p:cNvSpPr/>
-          <p:nvPr/>
-        </p:nvSpPr>
-        <p:spPr>
-          <a:xfrm>
-            <a:off x="1097280" y="347472"/>
-            <a:ext cx="10515600" cy="365760"/>
-          </a:xfrm>
-          <a:prstGeom prst="rect">
-            <a:avLst/>
-          </a:prstGeom>
-          <a:noFill/>
-          <a:ln/>
-        </p:spPr>
-        <p:txBody>
-          <a:bodyPr wrap="square" rtlCol="0" anchor="ctr"/>
-          <a:lstStyle/>
-          <a:p>
-            <a:pPr marL="0" indent="0">
-              <a:buNone/>
-            </a:pPr>
-            <a:r>
-              <a:rPr lang="en-US" sz="1050" kern="0" spc="400" dirty="0">
-                <a:solidFill>
-                  <a:srgbClr val="A8A29E"/>
-                </a:solidFill>
-                <a:latin typeface="IBM Plex Mono" pitchFamily="34" charset="0"/>
-                <a:ea typeface="IBM Plex Mono" pitchFamily="34" charset="-122"/>
-                <a:cs typeface="IBM Plex Mono" pitchFamily="34" charset="-120"/>
-              </a:rPr>
-              <a:t>TAKEAWAYS</a:t>
-            </a:r>
-            <a:endParaRPr lang="en-US" sz="1050" dirty="0"/>
-          </a:p>
-        </p:txBody>
-      </p:sp>
-      <p:sp>
-        <p:nvSpPr>
           <p:cNvPr id="4" name="Text 2"/>
           <p:cNvSpPr/>
           <p:nvPr/>
@@ -29675,45 +27515,6 @@
               <a:t>Seven things to remember</a:t>
             </a:r>
             <a:endParaRPr lang="en-US" sz="3300" dirty="0"/>
-          </a:p>
-        </p:txBody>
-      </p:sp>
-      <p:sp>
-        <p:nvSpPr>
-          <p:cNvPr id="6" name="Text 4"/>
-          <p:cNvSpPr/>
-          <p:nvPr/>
-        </p:nvSpPr>
-        <p:spPr>
-          <a:xfrm>
-            <a:off x="11292840" y="6446520"/>
-            <a:ext cx="548640" cy="274320"/>
-          </a:xfrm>
-          <a:prstGeom prst="rect">
-            <a:avLst/>
-          </a:prstGeom>
-          <a:noFill/>
-          <a:ln/>
-        </p:spPr>
-        <p:txBody>
-          <a:bodyPr wrap="square" rtlCol="0" anchor="ctr"/>
-          <a:lstStyle/>
-          <a:p>
-            <a:pPr marL="0" indent="0" algn="r">
-              <a:buNone/>
-            </a:pPr>
-            <a:r>
-              <a:rPr lang="en-US" sz="850" dirty="0">
-                <a:solidFill>
-                  <a:srgbClr val="6B6560"/>
-                </a:solidFill>
-                <a:latin typeface="IBM Plex Mono" pitchFamily="34" charset="0"/>
-                <a:ea typeface="IBM Plex Mono" pitchFamily="34" charset="-122"/>
-                <a:cs typeface="IBM Plex Mono" pitchFamily="34" charset="-120"/>
-              </a:rPr>
-              <a:t>17</a:t>
-            </a:r>
-            <a:endParaRPr lang="en-US" sz="850" dirty="0"/>
           </a:p>
         </p:txBody>
       </p:sp>
@@ -29914,72 +27715,6 @@
       </p:grpSpPr>
       <p:sp>
         <p:nvSpPr>
-          <p:cNvPr id="2" name="Shape 0"/>
-          <p:cNvSpPr/>
-          <p:nvPr/>
-        </p:nvSpPr>
-        <p:spPr>
-          <a:xfrm>
-            <a:off x="548640" y="512064"/>
-            <a:ext cx="411480" cy="45720"/>
-          </a:xfrm>
-          <a:prstGeom prst="rect">
-            <a:avLst/>
-          </a:prstGeom>
-          <a:solidFill>
-            <a:srgbClr val="D4FF00"/>
-          </a:solidFill>
-          <a:ln/>
-        </p:spPr>
-        <p:txBody>
-          <a:bodyPr/>
-          <a:lstStyle/>
-          <a:p>
-            <a:endParaRPr lang="en-GB"/>
-          </a:p>
-        </p:txBody>
-      </p:sp>
-      <p:sp>
-        <p:nvSpPr>
-          <p:cNvPr id="3" name="Text 1"/>
-          <p:cNvSpPr/>
-          <p:nvPr/>
-        </p:nvSpPr>
-        <p:spPr>
-          <a:xfrm>
-            <a:off x="1097280" y="347472"/>
-            <a:ext cx="10515600" cy="365760"/>
-          </a:xfrm>
-          <a:prstGeom prst="rect">
-            <a:avLst/>
-          </a:prstGeom>
-          <a:noFill/>
-          <a:ln/>
-        </p:spPr>
-        <p:txBody>
-          <a:bodyPr wrap="square" rtlCol="0" anchor="ctr"/>
-          <a:lstStyle/>
-          <a:p>
-            <a:pPr marL="0" indent="0">
-              <a:buNone/>
-            </a:pPr>
-            <a:r>
-              <a:rPr lang="en-US" sz="1050" kern="0" spc="400" dirty="0">
-                <a:solidFill>
-                  <a:srgbClr val="A8A29E"/>
-                </a:solidFill>
-                <a:latin typeface="IBM Plex Mono" pitchFamily="34" charset="0"/>
-                <a:ea typeface="IBM Plex Mono" pitchFamily="34" charset="-122"/>
-                <a:cs typeface="IBM Plex Mono" pitchFamily="34" charset="-120"/>
-              </a:rPr>
-              <a:t>DECISION GUIDE</a:t>
-            </a:r>
-            <a:endParaRPr lang="en-US" sz="1050" dirty="0"/>
-          </a:p>
-        </p:txBody>
-      </p:sp>
-      <p:sp>
-        <p:nvSpPr>
           <p:cNvPr id="4" name="Text 2"/>
           <p:cNvSpPr/>
           <p:nvPr/>
@@ -30014,45 +27749,6 @@
               <a:t>You're ready for this architecture when…</a:t>
             </a:r>
             <a:endParaRPr lang="en-US" sz="3300" dirty="0"/>
-          </a:p>
-        </p:txBody>
-      </p:sp>
-      <p:sp>
-        <p:nvSpPr>
-          <p:cNvPr id="6" name="Text 4"/>
-          <p:cNvSpPr/>
-          <p:nvPr/>
-        </p:nvSpPr>
-        <p:spPr>
-          <a:xfrm>
-            <a:off x="11292840" y="6446520"/>
-            <a:ext cx="548640" cy="274320"/>
-          </a:xfrm>
-          <a:prstGeom prst="rect">
-            <a:avLst/>
-          </a:prstGeom>
-          <a:noFill/>
-          <a:ln/>
-        </p:spPr>
-        <p:txBody>
-          <a:bodyPr wrap="square" rtlCol="0" anchor="ctr"/>
-          <a:lstStyle/>
-          <a:p>
-            <a:pPr marL="0" indent="0" algn="r">
-              <a:buNone/>
-            </a:pPr>
-            <a:r>
-              <a:rPr lang="en-US" sz="850" dirty="0">
-                <a:solidFill>
-                  <a:srgbClr val="6B6560"/>
-                </a:solidFill>
-                <a:latin typeface="IBM Plex Mono" pitchFamily="34" charset="0"/>
-                <a:ea typeface="IBM Plex Mono" pitchFamily="34" charset="-122"/>
-                <a:cs typeface="IBM Plex Mono" pitchFamily="34" charset="-120"/>
-              </a:rPr>
-              <a:t>18</a:t>
-            </a:r>
-            <a:endParaRPr lang="en-US" sz="850" dirty="0"/>
           </a:p>
         </p:txBody>
       </p:sp>
@@ -31140,84 +28836,6 @@
       </p:grpSpPr>
       <p:sp>
         <p:nvSpPr>
-          <p:cNvPr id="2" name="Shape 0">
-            <a:extLst>
-              <a:ext uri="{FF2B5EF4-FFF2-40B4-BE49-F238E27FC236}">
-                <a16:creationId xmlns:a16="http://schemas.microsoft.com/office/drawing/2014/main" id="{4C279172-676F-BB74-ED0E-0DF8DC808EAB}"/>
-              </a:ext>
-            </a:extLst>
-          </p:cNvPr>
-          <p:cNvSpPr/>
-          <p:nvPr/>
-        </p:nvSpPr>
-        <p:spPr>
-          <a:xfrm>
-            <a:off x="548640" y="512064"/>
-            <a:ext cx="411480" cy="45720"/>
-          </a:xfrm>
-          <a:prstGeom prst="rect">
-            <a:avLst/>
-          </a:prstGeom>
-          <a:solidFill>
-            <a:srgbClr val="D4FF00"/>
-          </a:solidFill>
-          <a:ln/>
-        </p:spPr>
-        <p:txBody>
-          <a:bodyPr/>
-          <a:lstStyle/>
-          <a:p>
-            <a:endParaRPr lang="en-GB"/>
-          </a:p>
-        </p:txBody>
-      </p:sp>
-      <p:sp>
-        <p:nvSpPr>
-          <p:cNvPr id="3" name="Text 1">
-            <a:extLst>
-              <a:ext uri="{FF2B5EF4-FFF2-40B4-BE49-F238E27FC236}">
-                <a16:creationId xmlns:a16="http://schemas.microsoft.com/office/drawing/2014/main" id="{99799005-E096-0C9D-0839-6A5EF5FC8218}"/>
-              </a:ext>
-            </a:extLst>
-          </p:cNvPr>
-          <p:cNvSpPr/>
-          <p:nvPr/>
-        </p:nvSpPr>
-        <p:spPr>
-          <a:xfrm>
-            <a:off x="1097280" y="347472"/>
-            <a:ext cx="10515600" cy="365760"/>
-          </a:xfrm>
-          <a:prstGeom prst="rect">
-            <a:avLst/>
-          </a:prstGeom>
-          <a:noFill/>
-          <a:ln/>
-        </p:spPr>
-        <p:txBody>
-          <a:bodyPr wrap="square" rtlCol="0" anchor="ctr"/>
-          <a:lstStyle/>
-          <a:p>
-            <a:pPr marL="0" indent="0">
-              <a:buNone/>
-            </a:pPr>
-            <a:r>
-              <a:rPr lang="en-US" sz="1050" kern="0" spc="400" dirty="0">
-                <a:solidFill>
-                  <a:srgbClr val="A8A29E"/>
-                </a:solidFill>
-                <a:latin typeface="IBM Plex Mono" pitchFamily="34" charset="0"/>
-                <a:ea typeface="IBM Plex Mono" pitchFamily="34" charset="-122"/>
-                <a:cs typeface="IBM Plex Mono" pitchFamily="34" charset="-120"/>
-              </a:rPr>
-              <a:t>THE PROBLEM</a:t>
-            </a:r>
-            <a:endParaRPr lang="en-US" sz="1050" dirty="0"/>
-          </a:p>
-        </p:txBody>
-      </p:sp>
-      <p:sp>
-        <p:nvSpPr>
           <p:cNvPr id="4" name="Text 2">
             <a:extLst>
               <a:ext uri="{FF2B5EF4-FFF2-40B4-BE49-F238E27FC236}">
@@ -31258,96 +28876,6 @@
               <a:t>Team size is the bottleneck</a:t>
             </a:r>
             <a:endParaRPr lang="en-US" sz="3300" dirty="0"/>
-          </a:p>
-        </p:txBody>
-      </p:sp>
-      <p:sp>
-        <p:nvSpPr>
-          <p:cNvPr id="5" name="Text 3">
-            <a:extLst>
-              <a:ext uri="{FF2B5EF4-FFF2-40B4-BE49-F238E27FC236}">
-                <a16:creationId xmlns:a16="http://schemas.microsoft.com/office/drawing/2014/main" id="{0ED2C764-A2A2-FAA2-C055-C49F09644B77}"/>
-              </a:ext>
-            </a:extLst>
-          </p:cNvPr>
-          <p:cNvSpPr/>
-          <p:nvPr/>
-        </p:nvSpPr>
-        <p:spPr>
-          <a:xfrm>
-            <a:off x="548640" y="6446520"/>
-            <a:ext cx="6400800" cy="274320"/>
-          </a:xfrm>
-          <a:prstGeom prst="rect">
-            <a:avLst/>
-          </a:prstGeom>
-          <a:noFill/>
-          <a:ln/>
-        </p:spPr>
-        <p:txBody>
-          <a:bodyPr wrap="square" rtlCol="0" anchor="ctr"/>
-          <a:lstStyle/>
-          <a:p>
-            <a:pPr marL="0" indent="0">
-              <a:buNone/>
-            </a:pPr>
-            <a:r>
-              <a:rPr lang="en-US" sz="850" kern="0" spc="200" dirty="0">
-                <a:solidFill>
-                  <a:srgbClr val="6B6560"/>
-                </a:solidFill>
-                <a:latin typeface="IBM Plex Mono" pitchFamily="34" charset="0"/>
-                <a:ea typeface="IBM Plex Mono" pitchFamily="34" charset="-122"/>
-                <a:cs typeface="IBM Plex Mono" pitchFamily="34" charset="-120"/>
-              </a:rPr>
-              <a:t>From 5 Devs to 200 · Micro-Frontends</a:t>
-            </a:r>
-            <a:endParaRPr lang="en-US" sz="850" dirty="0"/>
-          </a:p>
-        </p:txBody>
-      </p:sp>
-      <p:sp>
-        <p:nvSpPr>
-          <p:cNvPr id="6" name="Text 4">
-            <a:extLst>
-              <a:ext uri="{FF2B5EF4-FFF2-40B4-BE49-F238E27FC236}">
-                <a16:creationId xmlns:a16="http://schemas.microsoft.com/office/drawing/2014/main" id="{8695EF5B-91C8-D1ED-7691-2275348EED02}"/>
-              </a:ext>
-            </a:extLst>
-          </p:cNvPr>
-          <p:cNvSpPr/>
-          <p:nvPr/>
-        </p:nvSpPr>
-        <p:spPr>
-          <a:xfrm>
-            <a:off x="11292840" y="6446520"/>
-            <a:ext cx="548640" cy="274320"/>
-          </a:xfrm>
-          <a:prstGeom prst="rect">
-            <a:avLst/>
-          </a:prstGeom>
-          <a:noFill/>
-          <a:ln/>
-        </p:spPr>
-        <p:txBody>
-          <a:bodyPr wrap="square" rtlCol="0" anchor="ctr"/>
-          <a:lstStyle/>
-          <a:p>
-            <a:pPr marL="0" indent="0" algn="r">
-              <a:buNone/>
-            </a:pPr>
-            <a:r>
-              <a:rPr lang="en-US" sz="850" dirty="0">
-                <a:solidFill>
-                  <a:srgbClr val="6B6560"/>
-                </a:solidFill>
-                <a:latin typeface="IBM Plex Mono" pitchFamily="34" charset="0"/>
-                <a:ea typeface="IBM Plex Mono" pitchFamily="34" charset="-122"/>
-                <a:cs typeface="IBM Plex Mono" pitchFamily="34" charset="-120"/>
-              </a:rPr>
-              <a:t>02</a:t>
-            </a:r>
-            <a:endParaRPr lang="en-US" sz="850" dirty="0"/>
           </a:p>
         </p:txBody>
       </p:sp>
@@ -32411,72 +29939,6 @@
       </p:grpSpPr>
       <p:sp>
         <p:nvSpPr>
-          <p:cNvPr id="2" name="Shape 0"/>
-          <p:cNvSpPr/>
-          <p:nvPr/>
-        </p:nvSpPr>
-        <p:spPr>
-          <a:xfrm>
-            <a:off x="548640" y="512064"/>
-            <a:ext cx="411480" cy="45720"/>
-          </a:xfrm>
-          <a:prstGeom prst="rect">
-            <a:avLst/>
-          </a:prstGeom>
-          <a:solidFill>
-            <a:srgbClr val="D4FF00"/>
-          </a:solidFill>
-          <a:ln/>
-        </p:spPr>
-        <p:txBody>
-          <a:bodyPr/>
-          <a:lstStyle/>
-          <a:p>
-            <a:endParaRPr lang="en-GB"/>
-          </a:p>
-        </p:txBody>
-      </p:sp>
-      <p:sp>
-        <p:nvSpPr>
-          <p:cNvPr id="3" name="Text 1"/>
-          <p:cNvSpPr/>
-          <p:nvPr/>
-        </p:nvSpPr>
-        <p:spPr>
-          <a:xfrm>
-            <a:off x="1097280" y="347472"/>
-            <a:ext cx="10515600" cy="365760"/>
-          </a:xfrm>
-          <a:prstGeom prst="rect">
-            <a:avLst/>
-          </a:prstGeom>
-          <a:noFill/>
-          <a:ln/>
-        </p:spPr>
-        <p:txBody>
-          <a:bodyPr wrap="square" rtlCol="0" anchor="ctr"/>
-          <a:lstStyle/>
-          <a:p>
-            <a:pPr marL="0" indent="0">
-              <a:buNone/>
-            </a:pPr>
-            <a:r>
-              <a:rPr lang="en-US" sz="1050" kern="0" spc="400" dirty="0">
-                <a:solidFill>
-                  <a:srgbClr val="A8A29E"/>
-                </a:solidFill>
-                <a:latin typeface="IBM Plex Mono" pitchFamily="34" charset="0"/>
-                <a:ea typeface="IBM Plex Mono" pitchFamily="34" charset="-122"/>
-                <a:cs typeface="IBM Plex Mono" pitchFamily="34" charset="-120"/>
-              </a:rPr>
-              <a:t>THE INSIGHT</a:t>
-            </a:r>
-            <a:endParaRPr lang="en-US" sz="1050" dirty="0"/>
-          </a:p>
-        </p:txBody>
-      </p:sp>
-      <p:sp>
-        <p:nvSpPr>
           <p:cNvPr id="4" name="Text 2"/>
           <p:cNvSpPr/>
           <p:nvPr/>
@@ -33237,84 +30699,6 @@
       </p:grpSpPr>
       <p:sp>
         <p:nvSpPr>
-          <p:cNvPr id="2" name="Shape 0">
-            <a:extLst>
-              <a:ext uri="{FF2B5EF4-FFF2-40B4-BE49-F238E27FC236}">
-                <a16:creationId xmlns:a16="http://schemas.microsoft.com/office/drawing/2014/main" id="{A18149F6-84F2-319A-406D-6F1A834208B1}"/>
-              </a:ext>
-            </a:extLst>
-          </p:cNvPr>
-          <p:cNvSpPr/>
-          <p:nvPr/>
-        </p:nvSpPr>
-        <p:spPr>
-          <a:xfrm>
-            <a:off x="548640" y="512064"/>
-            <a:ext cx="411480" cy="45720"/>
-          </a:xfrm>
-          <a:prstGeom prst="rect">
-            <a:avLst/>
-          </a:prstGeom>
-          <a:solidFill>
-            <a:srgbClr val="D4FF00"/>
-          </a:solidFill>
-          <a:ln/>
-        </p:spPr>
-        <p:txBody>
-          <a:bodyPr/>
-          <a:lstStyle/>
-          <a:p>
-            <a:endParaRPr lang="en-GB"/>
-          </a:p>
-        </p:txBody>
-      </p:sp>
-      <p:sp>
-        <p:nvSpPr>
-          <p:cNvPr id="3" name="Text 1">
-            <a:extLst>
-              <a:ext uri="{FF2B5EF4-FFF2-40B4-BE49-F238E27FC236}">
-                <a16:creationId xmlns:a16="http://schemas.microsoft.com/office/drawing/2014/main" id="{8BA59A36-AB3C-77D1-0F8B-53C6070216E5}"/>
-              </a:ext>
-            </a:extLst>
-          </p:cNvPr>
-          <p:cNvSpPr/>
-          <p:nvPr/>
-        </p:nvSpPr>
-        <p:spPr>
-          <a:xfrm>
-            <a:off x="1097280" y="347472"/>
-            <a:ext cx="10515600" cy="365760"/>
-          </a:xfrm>
-          <a:prstGeom prst="rect">
-            <a:avLst/>
-          </a:prstGeom>
-          <a:noFill/>
-          <a:ln/>
-        </p:spPr>
-        <p:txBody>
-          <a:bodyPr wrap="square" rtlCol="0" anchor="ctr"/>
-          <a:lstStyle/>
-          <a:p>
-            <a:pPr marL="0" indent="0">
-              <a:buNone/>
-            </a:pPr>
-            <a:r>
-              <a:rPr lang="en-US" sz="1050" kern="0" spc="400" dirty="0">
-                <a:solidFill>
-                  <a:srgbClr val="A8A29E"/>
-                </a:solidFill>
-                <a:latin typeface="IBM Plex Mono" pitchFamily="34" charset="0"/>
-                <a:ea typeface="IBM Plex Mono" pitchFamily="34" charset="-122"/>
-                <a:cs typeface="IBM Plex Mono" pitchFamily="34" charset="-120"/>
-              </a:rPr>
-              <a:t>THE INSIGHT</a:t>
-            </a:r>
-            <a:endParaRPr lang="en-US" sz="1050" dirty="0"/>
-          </a:p>
-        </p:txBody>
-      </p:sp>
-      <p:sp>
-        <p:nvSpPr>
           <p:cNvPr id="4" name="Text 2">
             <a:extLst>
               <a:ext uri="{FF2B5EF4-FFF2-40B4-BE49-F238E27FC236}">
@@ -33536,84 +30920,6 @@
       </p:grpSpPr>
       <p:sp>
         <p:nvSpPr>
-          <p:cNvPr id="2" name="Shape 0">
-            <a:extLst>
-              <a:ext uri="{FF2B5EF4-FFF2-40B4-BE49-F238E27FC236}">
-                <a16:creationId xmlns:a16="http://schemas.microsoft.com/office/drawing/2014/main" id="{495E635A-F8E8-A4AF-4EAB-F68C77D345AE}"/>
-              </a:ext>
-            </a:extLst>
-          </p:cNvPr>
-          <p:cNvSpPr/>
-          <p:nvPr/>
-        </p:nvSpPr>
-        <p:spPr>
-          <a:xfrm>
-            <a:off x="548640" y="512064"/>
-            <a:ext cx="411480" cy="45720"/>
-          </a:xfrm>
-          <a:prstGeom prst="rect">
-            <a:avLst/>
-          </a:prstGeom>
-          <a:solidFill>
-            <a:srgbClr val="D4FF00"/>
-          </a:solidFill>
-          <a:ln/>
-        </p:spPr>
-        <p:txBody>
-          <a:bodyPr/>
-          <a:lstStyle/>
-          <a:p>
-            <a:endParaRPr lang="en-GB"/>
-          </a:p>
-        </p:txBody>
-      </p:sp>
-      <p:sp>
-        <p:nvSpPr>
-          <p:cNvPr id="3" name="Text 1">
-            <a:extLst>
-              <a:ext uri="{FF2B5EF4-FFF2-40B4-BE49-F238E27FC236}">
-                <a16:creationId xmlns:a16="http://schemas.microsoft.com/office/drawing/2014/main" id="{8C0558B2-EF22-C265-1AF5-9AE6E1F90245}"/>
-              </a:ext>
-            </a:extLst>
-          </p:cNvPr>
-          <p:cNvSpPr/>
-          <p:nvPr/>
-        </p:nvSpPr>
-        <p:spPr>
-          <a:xfrm>
-            <a:off x="1097280" y="347472"/>
-            <a:ext cx="10515600" cy="365760"/>
-          </a:xfrm>
-          <a:prstGeom prst="rect">
-            <a:avLst/>
-          </a:prstGeom>
-          <a:noFill/>
-          <a:ln/>
-        </p:spPr>
-        <p:txBody>
-          <a:bodyPr wrap="square" rtlCol="0" anchor="ctr"/>
-          <a:lstStyle/>
-          <a:p>
-            <a:pPr marL="0" indent="0">
-              <a:buNone/>
-            </a:pPr>
-            <a:r>
-              <a:rPr lang="en-US" sz="1050" kern="0" spc="400" dirty="0">
-                <a:solidFill>
-                  <a:srgbClr val="A8A29E"/>
-                </a:solidFill>
-                <a:latin typeface="IBM Plex Mono" pitchFamily="34" charset="0"/>
-                <a:ea typeface="IBM Plex Mono" pitchFamily="34" charset="-122"/>
-                <a:cs typeface="IBM Plex Mono" pitchFamily="34" charset="-120"/>
-              </a:rPr>
-              <a:t>THE INSIGHT</a:t>
-            </a:r>
-            <a:endParaRPr lang="en-US" sz="1050" dirty="0"/>
-          </a:p>
-        </p:txBody>
-      </p:sp>
-      <p:sp>
-        <p:nvSpPr>
           <p:cNvPr id="4" name="Text 2">
             <a:extLst>
               <a:ext uri="{FF2B5EF4-FFF2-40B4-BE49-F238E27FC236}">
@@ -33775,72 +31081,6 @@
       </p:grpSpPr>
       <p:sp>
         <p:nvSpPr>
-          <p:cNvPr id="2" name="Shape 0"/>
-          <p:cNvSpPr/>
-          <p:nvPr/>
-        </p:nvSpPr>
-        <p:spPr>
-          <a:xfrm>
-            <a:off x="548640" y="512064"/>
-            <a:ext cx="411480" cy="45720"/>
-          </a:xfrm>
-          <a:prstGeom prst="rect">
-            <a:avLst/>
-          </a:prstGeom>
-          <a:solidFill>
-            <a:srgbClr val="D4FF00"/>
-          </a:solidFill>
-          <a:ln/>
-        </p:spPr>
-        <p:txBody>
-          <a:bodyPr/>
-          <a:lstStyle/>
-          <a:p>
-            <a:endParaRPr lang="en-GB"/>
-          </a:p>
-        </p:txBody>
-      </p:sp>
-      <p:sp>
-        <p:nvSpPr>
-          <p:cNvPr id="3" name="Text 1"/>
-          <p:cNvSpPr/>
-          <p:nvPr/>
-        </p:nvSpPr>
-        <p:spPr>
-          <a:xfrm>
-            <a:off x="1097280" y="347472"/>
-            <a:ext cx="10515600" cy="365760"/>
-          </a:xfrm>
-          <a:prstGeom prst="rect">
-            <a:avLst/>
-          </a:prstGeom>
-          <a:noFill/>
-          <a:ln/>
-        </p:spPr>
-        <p:txBody>
-          <a:bodyPr wrap="square" rtlCol="0" anchor="ctr"/>
-          <a:lstStyle/>
-          <a:p>
-            <a:pPr marL="0" indent="0">
-              <a:buNone/>
-            </a:pPr>
-            <a:r>
-              <a:rPr lang="en-US" sz="1050" kern="0" spc="400" dirty="0">
-                <a:solidFill>
-                  <a:srgbClr val="A8A29E"/>
-                </a:solidFill>
-                <a:latin typeface="IBM Plex Mono" pitchFamily="34" charset="0"/>
-                <a:ea typeface="IBM Plex Mono" pitchFamily="34" charset="-122"/>
-                <a:cs typeface="IBM Plex Mono" pitchFamily="34" charset="-120"/>
-              </a:rPr>
-              <a:t>ARCHITECTURE</a:t>
-            </a:r>
-            <a:endParaRPr lang="en-US" sz="1050" dirty="0"/>
-          </a:p>
-        </p:txBody>
-      </p:sp>
-      <p:sp>
-        <p:nvSpPr>
           <p:cNvPr id="4" name="Text 2"/>
           <p:cNvSpPr/>
           <p:nvPr/>
@@ -34170,84 +31410,6 @@
           <a:chExt cx="0" cy="0"/>
         </a:xfrm>
       </p:grpSpPr>
-      <p:sp>
-        <p:nvSpPr>
-          <p:cNvPr id="2" name="Shape 0">
-            <a:extLst>
-              <a:ext uri="{FF2B5EF4-FFF2-40B4-BE49-F238E27FC236}">
-                <a16:creationId xmlns:a16="http://schemas.microsoft.com/office/drawing/2014/main" id="{B9564BB6-AFF2-ECA6-512E-A157F577E2E5}"/>
-              </a:ext>
-            </a:extLst>
-          </p:cNvPr>
-          <p:cNvSpPr/>
-          <p:nvPr/>
-        </p:nvSpPr>
-        <p:spPr>
-          <a:xfrm>
-            <a:off x="548640" y="512064"/>
-            <a:ext cx="411480" cy="45720"/>
-          </a:xfrm>
-          <a:prstGeom prst="rect">
-            <a:avLst/>
-          </a:prstGeom>
-          <a:solidFill>
-            <a:srgbClr val="D4FF00"/>
-          </a:solidFill>
-          <a:ln/>
-        </p:spPr>
-        <p:txBody>
-          <a:bodyPr/>
-          <a:lstStyle/>
-          <a:p>
-            <a:endParaRPr lang="en-GB"/>
-          </a:p>
-        </p:txBody>
-      </p:sp>
-      <p:sp>
-        <p:nvSpPr>
-          <p:cNvPr id="3" name="Text 1">
-            <a:extLst>
-              <a:ext uri="{FF2B5EF4-FFF2-40B4-BE49-F238E27FC236}">
-                <a16:creationId xmlns:a16="http://schemas.microsoft.com/office/drawing/2014/main" id="{55A7FC7E-7835-9D7E-0979-176BC3A86403}"/>
-              </a:ext>
-            </a:extLst>
-          </p:cNvPr>
-          <p:cNvSpPr/>
-          <p:nvPr/>
-        </p:nvSpPr>
-        <p:spPr>
-          <a:xfrm>
-            <a:off x="1097280" y="347472"/>
-            <a:ext cx="10515600" cy="365760"/>
-          </a:xfrm>
-          <a:prstGeom prst="rect">
-            <a:avLst/>
-          </a:prstGeom>
-          <a:noFill/>
-          <a:ln/>
-        </p:spPr>
-        <p:txBody>
-          <a:bodyPr wrap="square" rtlCol="0" anchor="ctr"/>
-          <a:lstStyle/>
-          <a:p>
-            <a:pPr marL="0" indent="0">
-              <a:buNone/>
-            </a:pPr>
-            <a:r>
-              <a:rPr lang="en-US" sz="1050" kern="0" spc="400" dirty="0">
-                <a:solidFill>
-                  <a:srgbClr val="A8A29E"/>
-                </a:solidFill>
-                <a:latin typeface="IBM Plex Mono" pitchFamily="34" charset="0"/>
-                <a:ea typeface="IBM Plex Mono" pitchFamily="34" charset="-122"/>
-                <a:cs typeface="IBM Plex Mono" pitchFamily="34" charset="-120"/>
-              </a:rPr>
-              <a:t>ARCHITECTURE</a:t>
-            </a:r>
-            <a:endParaRPr lang="en-US" sz="1050" dirty="0"/>
-          </a:p>
-        </p:txBody>
-      </p:sp>
       <p:sp>
         <p:nvSpPr>
           <p:cNvPr id="4" name="Text 2">

--- a/presentation/module-federation.pptx
+++ b/presentation/module-federation.pptx
@@ -5,7 +5,7 @@
     <p:sldMasterId id="2147483648" r:id="rId1"/>
   </p:sldMasterIdLst>
   <p:notesMasterIdLst>
-    <p:notesMasterId r:id="rId48"/>
+    <p:notesMasterId r:id="rId47"/>
   </p:notesMasterIdLst>
   <p:sldIdLst>
     <p:sldId id="298" r:id="rId2"/>
@@ -34,26 +34,25 @@
     <p:sldId id="285" r:id="rId25"/>
     <p:sldId id="294" r:id="rId26"/>
     <p:sldId id="263" r:id="rId27"/>
-    <p:sldId id="286" r:id="rId28"/>
-    <p:sldId id="295" r:id="rId29"/>
+    <p:sldId id="327" r:id="rId28"/>
+    <p:sldId id="325" r:id="rId29"/>
     <p:sldId id="264" r:id="rId30"/>
     <p:sldId id="287" r:id="rId31"/>
-    <p:sldId id="265" r:id="rId32"/>
-    <p:sldId id="288" r:id="rId33"/>
-    <p:sldId id="289" r:id="rId34"/>
-    <p:sldId id="266" r:id="rId35"/>
-    <p:sldId id="290" r:id="rId36"/>
-    <p:sldId id="291" r:id="rId37"/>
-    <p:sldId id="267" r:id="rId38"/>
-    <p:sldId id="296" r:id="rId39"/>
-    <p:sldId id="297" r:id="rId40"/>
-    <p:sldId id="268" r:id="rId41"/>
-    <p:sldId id="323" r:id="rId42"/>
-    <p:sldId id="269" r:id="rId43"/>
-    <p:sldId id="293" r:id="rId44"/>
-    <p:sldId id="272" r:id="rId45"/>
-    <p:sldId id="310" r:id="rId46"/>
-    <p:sldId id="322" r:id="rId47"/>
+    <p:sldId id="326" r:id="rId32"/>
+    <p:sldId id="265" r:id="rId33"/>
+    <p:sldId id="288" r:id="rId34"/>
+    <p:sldId id="289" r:id="rId35"/>
+    <p:sldId id="266" r:id="rId36"/>
+    <p:sldId id="290" r:id="rId37"/>
+    <p:sldId id="291" r:id="rId38"/>
+    <p:sldId id="267" r:id="rId39"/>
+    <p:sldId id="296" r:id="rId40"/>
+    <p:sldId id="297" r:id="rId41"/>
+    <p:sldId id="268" r:id="rId42"/>
+    <p:sldId id="323" r:id="rId43"/>
+    <p:sldId id="272" r:id="rId44"/>
+    <p:sldId id="310" r:id="rId45"/>
+    <p:sldId id="322" r:id="rId46"/>
   </p:sldIdLst>
   <p:sldSz cx="12188825" cy="6858000"/>
   <p:notesSz cx="6858000" cy="12188825"/>
@@ -2232,13 +2231,7 @@
   <p:cSld>
     <p:spTree>
       <p:nvGrpSpPr>
-        <p:cNvPr id="1" name="">
-          <a:extLst>
-            <a:ext uri="{FF2B5EF4-FFF2-40B4-BE49-F238E27FC236}">
-              <a16:creationId xmlns:a16="http://schemas.microsoft.com/office/drawing/2014/main" id="{D17A8DCB-D4D9-7F2B-D0CD-0E409379A080}"/>
-            </a:ext>
-          </a:extLst>
-        </p:cNvPr>
+        <p:cNvPr id="1" name=""/>
         <p:cNvGrpSpPr/>
         <p:nvPr/>
       </p:nvGrpSpPr>
@@ -2252,13 +2245,7 @@
       </p:grpSpPr>
       <p:sp>
         <p:nvSpPr>
-          <p:cNvPr id="2" name="Slide Image Placeholder 1">
-            <a:extLst>
-              <a:ext uri="{FF2B5EF4-FFF2-40B4-BE49-F238E27FC236}">
-                <a16:creationId xmlns:a16="http://schemas.microsoft.com/office/drawing/2014/main" id="{3CF1C5C2-521E-4323-98CF-1626A3486C67}"/>
-              </a:ext>
-            </a:extLst>
-          </p:cNvPr>
+          <p:cNvPr id="2" name="Slide Image Placeholder 1"/>
           <p:cNvSpPr>
             <a:spLocks noGrp="1" noRot="1" noChangeAspect="1"/>
           </p:cNvSpPr>
@@ -2266,17 +2253,25 @@
             <p:ph type="sldImg"/>
           </p:nvPr>
         </p:nvSpPr>
-        <p:spPr/>
+        <p:spPr>
+          <a:xfrm>
+            <a:off x="-225425" y="1524000"/>
+            <a:ext cx="7308850" cy="4113213"/>
+          </a:xfrm>
+          <a:prstGeom prst="rect">
+            <a:avLst/>
+          </a:prstGeom>
+          <a:noFill/>
+          <a:ln w="12700">
+            <a:solidFill>
+              <a:prstClr val="black"/>
+            </a:solidFill>
+          </a:ln>
+        </p:spPr>
       </p:sp>
       <p:sp>
         <p:nvSpPr>
-          <p:cNvPr id="3" name="Notes Placeholder 2">
-            <a:extLst>
-              <a:ext uri="{FF2B5EF4-FFF2-40B4-BE49-F238E27FC236}">
-                <a16:creationId xmlns:a16="http://schemas.microsoft.com/office/drawing/2014/main" id="{46107DE1-4805-2FD7-B1DC-C03DCB8A66E3}"/>
-              </a:ext>
-            </a:extLst>
-          </p:cNvPr>
+          <p:cNvPr id="3" name="Notes Placeholder 2"/>
           <p:cNvSpPr>
             <a:spLocks noGrp="1"/>
           </p:cNvSpPr>
@@ -2284,7 +2279,15 @@
             <p:ph type="body" idx="1"/>
           </p:nvPr>
         </p:nvSpPr>
-        <p:spPr/>
+        <p:spPr>
+          <a:xfrm>
+            <a:off x="685800" y="5865813"/>
+            <a:ext cx="5486400" cy="4799012"/>
+          </a:xfrm>
+          <a:prstGeom prst="rect">
+            <a:avLst/>
+          </a:prstGeom>
+        </p:spPr>
         <p:txBody>
           <a:bodyPr/>
           <a:lstStyle/>
@@ -2300,41 +2303,15 @@
               <a:t>Every strategy still gets three layers of resilience. A catch on lazy, so an unreachable remote becomes a fallback instead of a white screen. Suspense, so a loading remote shows its own skeleton. An error boundary, so a runtime crash in one remote does not take down the app.</a:t>
             </a:r>
           </a:p>
-        </p:txBody>
-      </p:sp>
-      <p:sp>
-        <p:nvSpPr>
-          <p:cNvPr id="4" name="Slide Number Placeholder 3">
-            <a:extLst>
-              <a:ext uri="{FF2B5EF4-FFF2-40B4-BE49-F238E27FC236}">
-                <a16:creationId xmlns:a16="http://schemas.microsoft.com/office/drawing/2014/main" id="{E3A8A273-B24E-3476-EA69-1FA378736BC7}"/>
-              </a:ext>
-            </a:extLst>
-          </p:cNvPr>
-          <p:cNvSpPr>
-            <a:spLocks noGrp="1"/>
-          </p:cNvSpPr>
-          <p:nvPr>
-            <p:ph type="sldNum" sz="quarter" idx="10"/>
-          </p:nvPr>
-        </p:nvSpPr>
-        <p:spPr/>
-        <p:txBody>
-          <a:bodyPr/>
-          <a:lstStyle/>
-          <a:p>
-            <a:fld id="{F7021451-1387-4CA6-816F-3879F97B5CBC}" type="slidenum">
-              <a:rPr lang="en-US"/>
-              <a:t>27</a:t>
-            </a:fld>
-            <a:endParaRPr lang="en-US"/>
+          <a:p>
+            <a:endParaRPr lang="en-GB" dirty="0"/>
           </a:p>
         </p:txBody>
       </p:sp>
     </p:spTree>
     <p:extLst>
       <p:ext uri="{BB962C8B-B14F-4D97-AF65-F5344CB8AC3E}">
-        <p14:creationId xmlns:p14="http://schemas.microsoft.com/office/powerpoint/2010/main" val="1752608983"/>
+        <p14:creationId xmlns:p14="http://schemas.microsoft.com/office/powerpoint/2010/main" val="4040777647"/>
       </p:ext>
     </p:extLst>
   </p:cSld>
@@ -2349,13 +2326,7 @@
   <p:cSld>
     <p:spTree>
       <p:nvGrpSpPr>
-        <p:cNvPr id="1" name="">
-          <a:extLst>
-            <a:ext uri="{FF2B5EF4-FFF2-40B4-BE49-F238E27FC236}">
-              <a16:creationId xmlns:a16="http://schemas.microsoft.com/office/drawing/2014/main" id="{B1278172-9C71-CFA3-B675-B4062A38A558}"/>
-            </a:ext>
-          </a:extLst>
-        </p:cNvPr>
+        <p:cNvPr id="1" name=""/>
         <p:cNvGrpSpPr/>
         <p:nvPr/>
       </p:nvGrpSpPr>
@@ -2369,13 +2340,7 @@
       </p:grpSpPr>
       <p:sp>
         <p:nvSpPr>
-          <p:cNvPr id="2" name="Slide Image Placeholder 1">
-            <a:extLst>
-              <a:ext uri="{FF2B5EF4-FFF2-40B4-BE49-F238E27FC236}">
-                <a16:creationId xmlns:a16="http://schemas.microsoft.com/office/drawing/2014/main" id="{D21221CC-AE50-C79F-6A55-FAE5370B251D}"/>
-              </a:ext>
-            </a:extLst>
-          </p:cNvPr>
+          <p:cNvPr id="2" name="Slide Image Placeholder 1"/>
           <p:cNvSpPr>
             <a:spLocks noGrp="1" noRot="1" noChangeAspect="1"/>
           </p:cNvSpPr>
@@ -2383,17 +2348,25 @@
             <p:ph type="sldImg"/>
           </p:nvPr>
         </p:nvSpPr>
-        <p:spPr/>
+        <p:spPr>
+          <a:xfrm>
+            <a:off x="-225425" y="1524000"/>
+            <a:ext cx="7308850" cy="4113213"/>
+          </a:xfrm>
+          <a:prstGeom prst="rect">
+            <a:avLst/>
+          </a:prstGeom>
+          <a:noFill/>
+          <a:ln w="12700">
+            <a:solidFill>
+              <a:prstClr val="black"/>
+            </a:solidFill>
+          </a:ln>
+        </p:spPr>
       </p:sp>
       <p:sp>
         <p:nvSpPr>
-          <p:cNvPr id="3" name="Notes Placeholder 2">
-            <a:extLst>
-              <a:ext uri="{FF2B5EF4-FFF2-40B4-BE49-F238E27FC236}">
-                <a16:creationId xmlns:a16="http://schemas.microsoft.com/office/drawing/2014/main" id="{0E6DA320-0162-1F23-628E-717E8A32B846}"/>
-              </a:ext>
-            </a:extLst>
-          </p:cNvPr>
+          <p:cNvPr id="3" name="Notes Placeholder 2"/>
           <p:cNvSpPr>
             <a:spLocks noGrp="1"/>
           </p:cNvSpPr>
@@ -2401,57 +2374,130 @@
             <p:ph type="body" idx="1"/>
           </p:nvPr>
         </p:nvSpPr>
-        <p:spPr/>
+        <p:spPr>
+          <a:xfrm>
+            <a:off x="685800" y="5865813"/>
+            <a:ext cx="5486400" cy="4799012"/>
+          </a:xfrm>
+          <a:prstGeom prst="rect">
+            <a:avLst/>
+          </a:prstGeom>
+        </p:spPr>
         <p:txBody>
           <a:bodyPr/>
           <a:lstStyle/>
           <a:p>
+            <a:pPr marL="0" marR="0" lvl="0" indent="0" algn="l" defTabSz="914400" rtl="0" eaLnBrk="1" fontAlgn="auto" latinLnBrk="0" hangingPunct="1">
+              <a:lnSpc>
+                <a:spcPct val="100000"/>
+              </a:lnSpc>
+              <a:spcBef>
+                <a:spcPts val="0"/>
+              </a:spcBef>
+              <a:spcAft>
+                <a:spcPts val="0"/>
+              </a:spcAft>
+              <a:buClrTx/>
+              <a:buSzTx/>
+              <a:buFontTx/>
+              <a:buNone/>
+              <a:tabLst/>
+              <a:defRPr/>
+            </a:pPr>
             <a:r>
               <a:rPr lang="en-US" dirty="0"/>
-              <a:t>People always ask why we use lazy for eager modules. You cannot use a static import with Module Federation. The remote is a separate build on a separate server, resolved at runtime. So we fire import at shell init, the browser caches the module, and when React later calls the same import inside lazy, it resolves instantly.</a:t>
-            </a:r>
-          </a:p>
-          <a:p>
+              <a:t>People ask why we wrap eager modules in </a:t>
+            </a:r>
+            <a:r>
+              <a:rPr lang="en-US" sz="1200" kern="1200" dirty="0">
+                <a:solidFill>
+                  <a:schemeClr val="tx1"/>
+                </a:solidFill>
+                <a:latin typeface="+mn-lt"/>
+                <a:ea typeface="+mn-ea"/>
+                <a:cs typeface="+mn-cs"/>
+              </a:rPr>
+              <a:t>lazy()</a:t>
+            </a:r>
             <a:r>
               <a:rPr lang="en-US" dirty="0"/>
-              <a:t>Different content, different priority. The landing page is instant. High-value content is eager. Secondary content streams on demand.</a:t>
-            </a:r>
-          </a:p>
-        </p:txBody>
-      </p:sp>
-      <p:sp>
-        <p:nvSpPr>
-          <p:cNvPr id="4" name="Slide Number Placeholder 3">
-            <a:extLst>
-              <a:ext uri="{FF2B5EF4-FFF2-40B4-BE49-F238E27FC236}">
-                <a16:creationId xmlns:a16="http://schemas.microsoft.com/office/drawing/2014/main" id="{5E0E3512-F25A-DA7B-BCA6-BF249EB0FCB0}"/>
-              </a:ext>
-            </a:extLst>
-          </p:cNvPr>
-          <p:cNvSpPr>
-            <a:spLocks noGrp="1"/>
-          </p:cNvSpPr>
-          <p:nvPr>
-            <p:ph type="sldNum" sz="quarter" idx="10"/>
-          </p:nvPr>
-        </p:nvSpPr>
-        <p:spPr/>
-        <p:txBody>
-          <a:bodyPr/>
-          <a:lstStyle/>
-          <a:p>
-            <a:fld id="{F7021451-1387-4CA6-816F-3879F97B5CBC}" type="slidenum">
-              <a:rPr lang="en-US"/>
-              <a:t>28</a:t>
-            </a:fld>
-            <a:endParaRPr lang="en-US"/>
+              <a:t>. It's not that static imports are impossible — they work, because </a:t>
+            </a:r>
+            <a:r>
+              <a:rPr lang="en-US" sz="1200" kern="1200" dirty="0" err="1">
+                <a:solidFill>
+                  <a:schemeClr val="tx1"/>
+                </a:solidFill>
+                <a:latin typeface="+mn-lt"/>
+                <a:ea typeface="+mn-ea"/>
+                <a:cs typeface="+mn-cs"/>
+              </a:rPr>
+              <a:t>index.tsx</a:t>
+            </a:r>
+            <a:r>
+              <a:rPr lang="en-US" dirty="0" err="1"/>
+              <a:t>'s</a:t>
+            </a:r>
+            <a:r>
+              <a:rPr lang="en-US" dirty="0"/>
+              <a:t> dynamic import already resolved the shared scope. It's that a static import makes the remote block first paint, and leaves nowhere to catch a failed remote. So we fire </a:t>
+            </a:r>
+            <a:r>
+              <a:rPr lang="en-US" sz="1200" kern="1200" dirty="0">
+                <a:solidFill>
+                  <a:schemeClr val="tx1"/>
+                </a:solidFill>
+                <a:latin typeface="+mn-lt"/>
+                <a:ea typeface="+mn-ea"/>
+                <a:cs typeface="+mn-cs"/>
+              </a:rPr>
+              <a:t>import()</a:t>
+            </a:r>
+            <a:r>
+              <a:rPr lang="en-US" dirty="0"/>
+              <a:t> at shell </a:t>
+            </a:r>
+            <a:r>
+              <a:rPr lang="en-US" dirty="0" err="1"/>
+              <a:t>init</a:t>
+            </a:r>
+            <a:r>
+              <a:rPr lang="en-US" dirty="0"/>
+              <a:t> to warm it, and </a:t>
+            </a:r>
+            <a:r>
+              <a:rPr lang="en-US" sz="1200" kern="1200" dirty="0">
+                <a:solidFill>
+                  <a:schemeClr val="tx1"/>
+                </a:solidFill>
+                <a:latin typeface="+mn-lt"/>
+                <a:ea typeface="+mn-ea"/>
+                <a:cs typeface="+mn-cs"/>
+              </a:rPr>
+              <a:t>lazy()</a:t>
+            </a:r>
+            <a:r>
+              <a:rPr lang="en-US" dirty="0"/>
+              <a:t> resolves from the module registry instantly — while keeping the Suspense and </a:t>
+            </a:r>
+            <a:r>
+              <a:rPr lang="en-US" dirty="0" err="1"/>
+              <a:t>ErrorBoundary</a:t>
+            </a:r>
+            <a:r>
+              <a:rPr lang="en-US" dirty="0"/>
+              <a:t> per module.</a:t>
+            </a:r>
+          </a:p>
+          <a:p>
+            <a:endParaRPr lang="en-GB" dirty="0"/>
           </a:p>
         </p:txBody>
       </p:sp>
     </p:spTree>
     <p:extLst>
       <p:ext uri="{BB962C8B-B14F-4D97-AF65-F5344CB8AC3E}">
-        <p14:creationId xmlns:p14="http://schemas.microsoft.com/office/powerpoint/2010/main" val="3931399310"/>
+        <p14:creationId xmlns:p14="http://schemas.microsoft.com/office/powerpoint/2010/main" val="2316851497"/>
       </p:ext>
     </p:extLst>
   </p:cSld>
@@ -2630,8 +2676,34 @@
           <a:p>
             <a:r>
               <a:rPr lang="en-US" dirty="0"/>
-              <a:t>A health monitor that polls remoteEntry.js every five seconds. Kill switches. An A/B deployment ring. That panel is the money shot of this talk. I can take a module down in front of you and show you that the rest of the app keeps running.</a:t>
-            </a:r>
+              <a:t>A health monitor that polls remoteEntry.js every five seconds. Kill switches. An A/B deployment ring. That panel is for the demo. I can take a module down in front of you and show you that the rest of the app keeps running. Basically we are going to simulate </a:t>
+            </a:r>
+            <a:r>
+              <a:rPr lang="en-US" sz="1200" i="1" dirty="0">
+                <a:solidFill>
+                  <a:schemeClr val="bg1">
+                    <a:lumMod val="95000"/>
+                  </a:schemeClr>
+                </a:solidFill>
+                <a:latin typeface="Instrument Serif" pitchFamily="34" charset="0"/>
+                <a:ea typeface="Instrument Serif" pitchFamily="34" charset="-122"/>
+              </a:rPr>
+              <a:t>m</a:t>
+            </a:r>
+            <a:r>
+              <a:rPr lang="en-US" sz="1200" i="1" dirty="0">
+                <a:solidFill>
+                  <a:schemeClr val="bg1">
+                    <a:lumMod val="95000"/>
+                  </a:schemeClr>
+                </a:solidFill>
+                <a:latin typeface="Instrument Serif" pitchFamily="34" charset="0"/>
+                <a:ea typeface="Instrument Serif" pitchFamily="34" charset="-122"/>
+                <a:cs typeface="Instrument Serif" pitchFamily="34" charset="-120"/>
+              </a:rPr>
+              <a:t>odule-level crashes, network failures, and bad deploys are isolated at the boundary. </a:t>
+            </a:r>
+            <a:endParaRPr lang="en-US" dirty="0"/>
           </a:p>
         </p:txBody>
       </p:sp>
@@ -2787,6 +2859,122 @@
             <p:ph type="sldImg"/>
           </p:nvPr>
         </p:nvSpPr>
+        <p:spPr>
+          <a:xfrm>
+            <a:off x="-225425" y="1524000"/>
+            <a:ext cx="7308850" cy="4113213"/>
+          </a:xfrm>
+          <a:prstGeom prst="rect">
+            <a:avLst/>
+          </a:prstGeom>
+          <a:noFill/>
+          <a:ln w="12700">
+            <a:solidFill>
+              <a:prstClr val="black"/>
+            </a:solidFill>
+          </a:ln>
+        </p:spPr>
+      </p:sp>
+      <p:sp>
+        <p:nvSpPr>
+          <p:cNvPr id="3" name="Notes Placeholder 2"/>
+          <p:cNvSpPr>
+            <a:spLocks noGrp="1"/>
+          </p:cNvSpPr>
+          <p:nvPr>
+            <p:ph type="body" idx="1"/>
+          </p:nvPr>
+        </p:nvSpPr>
+        <p:spPr>
+          <a:xfrm>
+            <a:off x="685800" y="5865813"/>
+            <a:ext cx="5486400" cy="4799012"/>
+          </a:xfrm>
+          <a:prstGeom prst="rect">
+            <a:avLst/>
+          </a:prstGeom>
+        </p:spPr>
+        <p:txBody>
+          <a:bodyPr/>
+          <a:lstStyle/>
+          <a:p>
+            <a:r>
+              <a:rPr lang="en-US" dirty="0"/>
+              <a:t>A health monitor that polls remoteEntry.js every five seconds. Kill switches. An A/B deployment ring. That panel is for the demo. I can take a module down in front of you and show you that the rest of the app keeps running. </a:t>
+            </a:r>
+            <a:r>
+              <a:rPr lang="en-US"/>
+              <a:t>Basically we are going to simulate </a:t>
+            </a:r>
+            <a:r>
+              <a:rPr lang="en-US" sz="1200" i="1">
+                <a:solidFill>
+                  <a:schemeClr val="bg1">
+                    <a:lumMod val="95000"/>
+                  </a:schemeClr>
+                </a:solidFill>
+                <a:latin typeface="Instrument Serif" pitchFamily="34" charset="0"/>
+                <a:ea typeface="Instrument Serif" pitchFamily="34" charset="-122"/>
+              </a:rPr>
+              <a:t>m</a:t>
+            </a:r>
+            <a:r>
+              <a:rPr lang="en-US" sz="1200" i="1">
+                <a:solidFill>
+                  <a:schemeClr val="bg1">
+                    <a:lumMod val="95000"/>
+                  </a:schemeClr>
+                </a:solidFill>
+                <a:latin typeface="Instrument Serif" pitchFamily="34" charset="0"/>
+                <a:ea typeface="Instrument Serif" pitchFamily="34" charset="-122"/>
+                <a:cs typeface="Instrument Serif" pitchFamily="34" charset="-120"/>
+              </a:rPr>
+              <a:t>odule-level crashes, network failures, and bad deploys are isolated at the boundary. </a:t>
+            </a:r>
+            <a:endParaRPr lang="en-US" dirty="0"/>
+          </a:p>
+        </p:txBody>
+      </p:sp>
+    </p:spTree>
+    <p:extLst>
+      <p:ext uri="{BB962C8B-B14F-4D97-AF65-F5344CB8AC3E}">
+        <p14:creationId xmlns:p14="http://schemas.microsoft.com/office/powerpoint/2010/main" val="3599504877"/>
+      </p:ext>
+    </p:extLst>
+  </p:cSld>
+  <p:clrMapOvr>
+    <a:masterClrMapping/>
+  </p:clrMapOvr>
+</p:notes>
+</file>
+
+<file path=ppt/notesSlides/notesSlide31.xml><?xml version="1.0" encoding="utf-8"?>
+<p:notes xmlns:a="http://schemas.openxmlformats.org/drawingml/2006/main" xmlns:r="http://schemas.openxmlformats.org/officeDocument/2006/relationships" xmlns:p="http://schemas.openxmlformats.org/presentationml/2006/main">
+  <p:cSld>
+    <p:spTree>
+      <p:nvGrpSpPr>
+        <p:cNvPr id="1" name=""/>
+        <p:cNvGrpSpPr/>
+        <p:nvPr/>
+      </p:nvGrpSpPr>
+      <p:grpSpPr>
+        <a:xfrm>
+          <a:off x="0" y="0"/>
+          <a:ext cx="0" cy="0"/>
+          <a:chOff x="0" y="0"/>
+          <a:chExt cx="0" cy="0"/>
+        </a:xfrm>
+      </p:grpSpPr>
+      <p:sp>
+        <p:nvSpPr>
+          <p:cNvPr id="2" name="Slide Image Placeholder 1"/>
+          <p:cNvSpPr>
+            <a:spLocks noGrp="1" noRot="1" noChangeAspect="1"/>
+          </p:cNvSpPr>
+          <p:nvPr>
+            <p:ph type="sldImg"/>
+          </p:nvPr>
+        </p:nvSpPr>
         <p:spPr/>
       </p:sp>
       <p:sp>
@@ -2804,28 +2992,7 @@
           <a:bodyPr/>
           <a:lstStyle/>
           <a:p>
-            <a:r>
-              <a:rPr lang="en-US" dirty="0"/>
-              <a:t>Is this like microservices? For the ninety-nine percent case, yes.</a:t>
-            </a:r>
-          </a:p>
-          <a:p>
-            <a:r>
-              <a:rPr lang="en-US" dirty="0"/>
-              <a:t>Microservices isolate at the operating-system level. Separate processes. Separate memory. If one crashes, the others keep running. Micro-frontends in this demo isolate at the React level. An error boundary per module. If Records crashes, Prescriptions keeps rendering. If an import fails, the catch shows a fallback and a Retry button.</a:t>
-            </a:r>
-          </a:p>
-          <a:p>
-            <a:r>
-              <a:rPr lang="en-US" dirty="0"/>
-              <a:t>We do four things to get that isolation. A per-module error boundary. Per-module Suspense, so a slow remote shows only its own skeleton. A catch on lazy, so a down server becomes a fallback instead of a white screen. And route-based rendering, so only one module is the primary view at a time.</a:t>
-            </a:r>
-          </a:p>
-          <a:p>
-            <a:r>
-              <a:rPr lang="en-US" dirty="0"/>
-              <a:t>The honest caveat is the one percent. All modules share one browser tab. A true infinite loop or a massive memory leak freezes everything.</a:t>
-            </a:r>
+            <a:endParaRPr lang="en-US" dirty="0"/>
           </a:p>
         </p:txBody>
       </p:sp>
@@ -2846,7 +3013,7 @@
           <a:p>
             <a:fld id="{F7021451-1387-4CA6-816F-3879F97B5CBC}" type="slidenum">
               <a:rPr lang="en-US"/>
-              <a:t>31</a:t>
+              <a:t>32</a:t>
             </a:fld>
             <a:endParaRPr lang="en-US"/>
           </a:p>
@@ -2865,7 +3032,7 @@
 </p:notes>
 </file>
 
-<file path=ppt/notesSlides/notesSlide31.xml><?xml version="1.0" encoding="utf-8"?>
+<file path=ppt/notesSlides/notesSlide32.xml><?xml version="1.0" encoding="utf-8"?>
 <p:notes xmlns:a="http://schemas.openxmlformats.org/drawingml/2006/main" xmlns:r="http://schemas.openxmlformats.org/officeDocument/2006/relationships" xmlns:p="http://schemas.openxmlformats.org/presentationml/2006/main">
   <p:cSld>
     <p:spTree>
@@ -2957,7 +3124,7 @@
           <a:p>
             <a:fld id="{F7021451-1387-4CA6-816F-3879F97B5CBC}" type="slidenum">
               <a:rPr lang="en-US"/>
-              <a:t>32</a:t>
+              <a:t>33</a:t>
             </a:fld>
             <a:endParaRPr lang="en-US"/>
           </a:p>
@@ -2976,7 +3143,7 @@
 </p:notes>
 </file>
 
-<file path=ppt/notesSlides/notesSlide32.xml><?xml version="1.0" encoding="utf-8"?>
+<file path=ppt/notesSlides/notesSlide33.xml><?xml version="1.0" encoding="utf-8"?>
 <p:notes xmlns:a="http://schemas.openxmlformats.org/drawingml/2006/main" xmlns:r="http://schemas.openxmlformats.org/officeDocument/2006/relationships" xmlns:p="http://schemas.openxmlformats.org/presentationml/2006/main">
   <p:cSld>
     <p:spTree>
@@ -3074,7 +3241,7 @@
           <a:p>
             <a:fld id="{F7021451-1387-4CA6-816F-3879F97B5CBC}" type="slidenum">
               <a:rPr lang="en-US"/>
-              <a:t>33</a:t>
+              <a:t>34</a:t>
             </a:fld>
             <a:endParaRPr lang="en-US"/>
           </a:p>
@@ -3093,7 +3260,7 @@
 </p:notes>
 </file>
 
-<file path=ppt/notesSlides/notesSlide33.xml><?xml version="1.0" encoding="utf-8"?>
+<file path=ppt/notesSlides/notesSlide34.xml><?xml version="1.0" encoding="utf-8"?>
 <p:notes xmlns:a="http://schemas.openxmlformats.org/drawingml/2006/main" xmlns:r="http://schemas.openxmlformats.org/officeDocument/2006/relationships" xmlns:p="http://schemas.openxmlformats.org/presentationml/2006/main">
   <p:cSld>
     <p:spTree>
@@ -3161,7 +3328,7 @@
           <a:p>
             <a:fld id="{F7021451-1387-4CA6-816F-3879F97B5CBC}" type="slidenum">
               <a:rPr lang="en-US"/>
-              <a:t>34</a:t>
+              <a:t>35</a:t>
             </a:fld>
             <a:endParaRPr lang="en-US"/>
           </a:p>
@@ -3180,7 +3347,7 @@
 </p:notes>
 </file>
 
-<file path=ppt/notesSlides/notesSlide34.xml><?xml version="1.0" encoding="utf-8"?>
+<file path=ppt/notesSlides/notesSlide35.xml><?xml version="1.0" encoding="utf-8"?>
 <p:notes xmlns:a="http://schemas.openxmlformats.org/drawingml/2006/main" xmlns:r="http://schemas.openxmlformats.org/officeDocument/2006/relationships" xmlns:p="http://schemas.openxmlformats.org/presentationml/2006/main">
   <p:cSld>
     <p:spTree>
@@ -3272,7 +3439,7 @@
           <a:p>
             <a:fld id="{F7021451-1387-4CA6-816F-3879F97B5CBC}" type="slidenum">
               <a:rPr lang="en-US"/>
-              <a:t>35</a:t>
+              <a:t>36</a:t>
             </a:fld>
             <a:endParaRPr lang="en-US"/>
           </a:p>
@@ -3291,7 +3458,7 @@
 </p:notes>
 </file>
 
-<file path=ppt/notesSlides/notesSlide35.xml><?xml version="1.0" encoding="utf-8"?>
+<file path=ppt/notesSlides/notesSlide36.xml><?xml version="1.0" encoding="utf-8"?>
 <p:notes xmlns:a="http://schemas.openxmlformats.org/drawingml/2006/main" xmlns:r="http://schemas.openxmlformats.org/officeDocument/2006/relationships" xmlns:p="http://schemas.openxmlformats.org/presentationml/2006/main">
   <p:cSld>
     <p:spTree>
@@ -3389,7 +3556,7 @@
           <a:p>
             <a:fld id="{F7021451-1387-4CA6-816F-3879F97B5CBC}" type="slidenum">
               <a:rPr lang="en-US"/>
-              <a:t>36</a:t>
+              <a:t>37</a:t>
             </a:fld>
             <a:endParaRPr lang="en-US"/>
           </a:p>
@@ -3408,7 +3575,7 @@
 </p:notes>
 </file>
 
-<file path=ppt/notesSlides/notesSlide36.xml><?xml version="1.0" encoding="utf-8"?>
+<file path=ppt/notesSlides/notesSlide37.xml><?xml version="1.0" encoding="utf-8"?>
 <p:notes xmlns:a="http://schemas.openxmlformats.org/drawingml/2006/main" xmlns:r="http://schemas.openxmlformats.org/officeDocument/2006/relationships" xmlns:p="http://schemas.openxmlformats.org/presentationml/2006/main">
   <p:cSld>
     <p:spTree>
@@ -3482,7 +3649,7 @@
           <a:p>
             <a:fld id="{F7021451-1387-4CA6-816F-3879F97B5CBC}" type="slidenum">
               <a:rPr lang="en-US"/>
-              <a:t>37</a:t>
+              <a:t>38</a:t>
             </a:fld>
             <a:endParaRPr lang="en-US"/>
           </a:p>
@@ -3501,7 +3668,7 @@
 </p:notes>
 </file>
 
-<file path=ppt/notesSlides/notesSlide37.xml><?xml version="1.0" encoding="utf-8"?>
+<file path=ppt/notesSlides/notesSlide38.xml><?xml version="1.0" encoding="utf-8"?>
 <p:notes xmlns:a="http://schemas.openxmlformats.org/drawingml/2006/main" xmlns:r="http://schemas.openxmlformats.org/officeDocument/2006/relationships" xmlns:p="http://schemas.openxmlformats.org/presentationml/2006/main">
   <p:cSld>
     <p:spTree>
@@ -3599,7 +3766,7 @@
           <a:p>
             <a:fld id="{F7021451-1387-4CA6-816F-3879F97B5CBC}" type="slidenum">
               <a:rPr lang="en-US"/>
-              <a:t>38</a:t>
+              <a:t>39</a:t>
             </a:fld>
             <a:endParaRPr lang="en-US"/>
           </a:p>
@@ -3618,7 +3785,7 @@
 </p:notes>
 </file>
 
-<file path=ppt/notesSlides/notesSlide38.xml><?xml version="1.0" encoding="utf-8"?>
+<file path=ppt/notesSlides/notesSlide39.xml><?xml version="1.0" encoding="utf-8"?>
 <p:notes xmlns:a="http://schemas.openxmlformats.org/drawingml/2006/main" xmlns:r="http://schemas.openxmlformats.org/officeDocument/2006/relationships" xmlns:p="http://schemas.openxmlformats.org/presentationml/2006/main">
   <p:cSld>
     <p:spTree>
@@ -3710,7 +3877,7 @@
           <a:p>
             <a:fld id="{F7021451-1387-4CA6-816F-3879F97B5CBC}" type="slidenum">
               <a:rPr lang="en-US"/>
-              <a:t>39</a:t>
+              <a:t>40</a:t>
             </a:fld>
             <a:endParaRPr lang="en-US"/>
           </a:p>
@@ -3720,99 +3887,6 @@
     <p:extLst>
       <p:ext uri="{BB962C8B-B14F-4D97-AF65-F5344CB8AC3E}">
         <p14:creationId xmlns:p14="http://schemas.microsoft.com/office/powerpoint/2010/main" val="848263606"/>
-      </p:ext>
-    </p:extLst>
-  </p:cSld>
-  <p:clrMapOvr>
-    <a:masterClrMapping/>
-  </p:clrMapOvr>
-</p:notes>
-</file>
-
-<file path=ppt/notesSlides/notesSlide39.xml><?xml version="1.0" encoding="utf-8"?>
-<p:notes xmlns:a="http://schemas.openxmlformats.org/drawingml/2006/main" xmlns:r="http://schemas.openxmlformats.org/officeDocument/2006/relationships" xmlns:p="http://schemas.openxmlformats.org/presentationml/2006/main">
-  <p:cSld>
-    <p:spTree>
-      <p:nvGrpSpPr>
-        <p:cNvPr id="1" name=""/>
-        <p:cNvGrpSpPr/>
-        <p:nvPr/>
-      </p:nvGrpSpPr>
-      <p:grpSpPr>
-        <a:xfrm>
-          <a:off x="0" y="0"/>
-          <a:ext cx="0" cy="0"/>
-          <a:chOff x="0" y="0"/>
-          <a:chExt cx="0" cy="0"/>
-        </a:xfrm>
-      </p:grpSpPr>
-      <p:sp>
-        <p:nvSpPr>
-          <p:cNvPr id="2" name="Slide Image Placeholder 1"/>
-          <p:cNvSpPr>
-            <a:spLocks noGrp="1" noRot="1" noChangeAspect="1"/>
-          </p:cNvSpPr>
-          <p:nvPr>
-            <p:ph type="sldImg"/>
-          </p:nvPr>
-        </p:nvSpPr>
-        <p:spPr/>
-      </p:sp>
-      <p:sp>
-        <p:nvSpPr>
-          <p:cNvPr id="3" name="Notes Placeholder 2"/>
-          <p:cNvSpPr>
-            <a:spLocks noGrp="1"/>
-          </p:cNvSpPr>
-          <p:nvPr>
-            <p:ph type="body" idx="1"/>
-          </p:nvPr>
-        </p:nvSpPr>
-        <p:spPr/>
-        <p:txBody>
-          <a:bodyPr/>
-          <a:lstStyle/>
-          <a:p>
-            <a:r>
-              <a:rPr lang="en-US" dirty="0"/>
-              <a:t>Two layers of preloading. Eager on mount. Hover on demand.</a:t>
-            </a:r>
-          </a:p>
-          <a:p>
-            <a:r>
-              <a:rPr lang="en-US" dirty="0"/>
-              <a:t>There is a prefetchers map. One function per module. Each function is a bare import of that remote. At shell init, we fire the ones marked eager. Records starts loading before the user has clicked anything.</a:t>
-            </a:r>
-          </a:p>
-        </p:txBody>
-      </p:sp>
-      <p:sp>
-        <p:nvSpPr>
-          <p:cNvPr id="4" name="Slide Number Placeholder 3"/>
-          <p:cNvSpPr>
-            <a:spLocks noGrp="1"/>
-          </p:cNvSpPr>
-          <p:nvPr>
-            <p:ph type="sldNum" sz="quarter" idx="10"/>
-          </p:nvPr>
-        </p:nvSpPr>
-        <p:spPr/>
-        <p:txBody>
-          <a:bodyPr/>
-          <a:lstStyle/>
-          <a:p>
-            <a:fld id="{F7021451-1387-4CA6-816F-3879F97B5CBC}" type="slidenum">
-              <a:rPr lang="en-US"/>
-              <a:t>40</a:t>
-            </a:fld>
-            <a:endParaRPr lang="en-US"/>
-          </a:p>
-        </p:txBody>
-      </p:sp>
-    </p:spTree>
-    <p:extLst>
-      <p:ext uri="{BB962C8B-B14F-4D97-AF65-F5344CB8AC3E}">
-        <p14:creationId xmlns:p14="http://schemas.microsoft.com/office/powerpoint/2010/main" val="1024086991"/>
       </p:ext>
     </p:extLst>
   </p:cSld>
@@ -3936,6 +4010,99 @@
             <p:ph type="sldImg"/>
           </p:nvPr>
         </p:nvSpPr>
+        <p:spPr/>
+      </p:sp>
+      <p:sp>
+        <p:nvSpPr>
+          <p:cNvPr id="3" name="Notes Placeholder 2"/>
+          <p:cNvSpPr>
+            <a:spLocks noGrp="1"/>
+          </p:cNvSpPr>
+          <p:nvPr>
+            <p:ph type="body" idx="1"/>
+          </p:nvPr>
+        </p:nvSpPr>
+        <p:spPr/>
+        <p:txBody>
+          <a:bodyPr/>
+          <a:lstStyle/>
+          <a:p>
+            <a:r>
+              <a:rPr lang="en-US" dirty="0"/>
+              <a:t>Two layers of preloading. Eager on mount. Hover on demand.</a:t>
+            </a:r>
+          </a:p>
+          <a:p>
+            <a:r>
+              <a:rPr lang="en-US" dirty="0"/>
+              <a:t>There is a prefetchers map. One function per module. Each function is a bare import of that remote. At shell init, we fire the ones marked eager. Records starts loading before the user has clicked anything.</a:t>
+            </a:r>
+          </a:p>
+        </p:txBody>
+      </p:sp>
+      <p:sp>
+        <p:nvSpPr>
+          <p:cNvPr id="4" name="Slide Number Placeholder 3"/>
+          <p:cNvSpPr>
+            <a:spLocks noGrp="1"/>
+          </p:cNvSpPr>
+          <p:nvPr>
+            <p:ph type="sldNum" sz="quarter" idx="10"/>
+          </p:nvPr>
+        </p:nvSpPr>
+        <p:spPr/>
+        <p:txBody>
+          <a:bodyPr/>
+          <a:lstStyle/>
+          <a:p>
+            <a:fld id="{F7021451-1387-4CA6-816F-3879F97B5CBC}" type="slidenum">
+              <a:rPr lang="en-US"/>
+              <a:t>41</a:t>
+            </a:fld>
+            <a:endParaRPr lang="en-US"/>
+          </a:p>
+        </p:txBody>
+      </p:sp>
+    </p:spTree>
+    <p:extLst>
+      <p:ext uri="{BB962C8B-B14F-4D97-AF65-F5344CB8AC3E}">
+        <p14:creationId xmlns:p14="http://schemas.microsoft.com/office/powerpoint/2010/main" val="1024086991"/>
+      </p:ext>
+    </p:extLst>
+  </p:cSld>
+  <p:clrMapOvr>
+    <a:masterClrMapping/>
+  </p:clrMapOvr>
+</p:notes>
+</file>
+
+<file path=ppt/notesSlides/notesSlide41.xml><?xml version="1.0" encoding="utf-8"?>
+<p:notes xmlns:a="http://schemas.openxmlformats.org/drawingml/2006/main" xmlns:r="http://schemas.openxmlformats.org/officeDocument/2006/relationships" xmlns:p="http://schemas.openxmlformats.org/presentationml/2006/main">
+  <p:cSld>
+    <p:spTree>
+      <p:nvGrpSpPr>
+        <p:cNvPr id="1" name=""/>
+        <p:cNvGrpSpPr/>
+        <p:nvPr/>
+      </p:nvGrpSpPr>
+      <p:grpSpPr>
+        <a:xfrm>
+          <a:off x="0" y="0"/>
+          <a:ext cx="0" cy="0"/>
+          <a:chOff x="0" y="0"/>
+          <a:chExt cx="0" cy="0"/>
+        </a:xfrm>
+      </p:grpSpPr>
+      <p:sp>
+        <p:nvSpPr>
+          <p:cNvPr id="2" name="Slide Image Placeholder 1"/>
+          <p:cNvSpPr>
+            <a:spLocks noGrp="1" noRot="1" noChangeAspect="1"/>
+          </p:cNvSpPr>
+          <p:nvPr>
+            <p:ph type="sldImg"/>
+          </p:nvPr>
+        </p:nvSpPr>
         <p:spPr>
           <a:xfrm>
             <a:off x="-225425" y="1524000"/>
@@ -4004,7 +4171,7 @@
 </p:notes>
 </file>
 
-<file path=ppt/notesSlides/notesSlide41.xml><?xml version="1.0" encoding="utf-8"?>
+<file path=ppt/notesSlides/notesSlide42.xml><?xml version="1.0" encoding="utf-8"?>
 <p:notes xmlns:a="http://schemas.openxmlformats.org/drawingml/2006/main" xmlns:r="http://schemas.openxmlformats.org/officeDocument/2006/relationships" xmlns:p="http://schemas.openxmlformats.org/presentationml/2006/main">
   <p:cSld>
     <p:spTree>
@@ -4050,7 +4217,49 @@
           <a:p>
             <a:r>
               <a:rPr lang="en-US" dirty="0"/>
-              <a:t>How do you test a federated component without standing up five dev servers? The trick is a Vitest alias. Records slash MedicalRecords does not point at a remote entry. It points at the source file. Same pattern for Home, Prescriptions, and Analytics.</a:t>
+              <a:t>Seven things to take with you.</a:t>
+            </a:r>
+          </a:p>
+          <a:p>
+            <a:r>
+              <a:rPr lang="en-US" dirty="0"/>
+              <a:t>One. Micro-frontends solve a people problem. Adopt this when your team is growing and the monolith cannot keep up. Independent modules let independent teams ship without blocking each other. Team size is the signal, not bundle size.</a:t>
+            </a:r>
+          </a:p>
+          <a:p>
+            <a:r>
+              <a:rPr lang="en-US" dirty="0"/>
+              <a:t>Two. Suspense fallbacks cover load UX. Module Federation covers team DX. You want both. This demo runs both together.</a:t>
+            </a:r>
+          </a:p>
+          <a:p>
+            <a:r>
+              <a:rPr lang="en-US" dirty="0"/>
+              <a:t>Three. Prefer events over shared state. A custom event on window gives you decoupled communication that survives independent deploys. Keep the payload backward compatible.</a:t>
+            </a:r>
+          </a:p>
+          <a:p>
+            <a:r>
+              <a:rPr lang="en-US" dirty="0"/>
+              <a:t>Four. The host owns routing. Remotes can ask for navigation with navigateToModule. Only the shell mutates router state.</a:t>
+            </a:r>
+          </a:p>
+          <a:p>
+            <a:r>
+              <a:rPr lang="en-US" dirty="0"/>
+              <a:t>Five. Ship fault isolation on purpose. A catch on every lazy import, plus an error boundary per module, keeps one broken remote from taking down the app.</a:t>
+            </a:r>
+          </a:p>
+          <a:p>
+            <a:r>
+              <a:rPr lang="en-US" dirty="0"/>
+              <a:t>Six. Rspack keeps the monorepo fast. Sub-second hot reload across four applications. Module Federation is built in. Rspack 2.1 ships the Rust React Compiler, and persistent caching for faster builds and faster restarts.</a:t>
+            </a:r>
+          </a:p>
+          <a:p>
+            <a:r>
+              <a:rPr lang="en-US" dirty="0"/>
+              <a:t>Seven. Match load strategy to content priority. Instant for the landing page. Eager for high-value content. Streamed for secondary modules, with skeletons. Do not load every remote the same way.</a:t>
             </a:r>
           </a:p>
         </p:txBody>
@@ -4072,7 +4281,7 @@
           <a:p>
             <a:fld id="{F7021451-1387-4CA6-816F-3879F97B5CBC}" type="slidenum">
               <a:rPr lang="en-US"/>
-              <a:t>42</a:t>
+              <a:t>43</a:t>
             </a:fld>
             <a:endParaRPr lang="en-US"/>
           </a:p>
@@ -4091,259 +4300,7 @@
 </p:notes>
 </file>
 
-<file path=ppt/notesSlides/notesSlide42.xml><?xml version="1.0" encoding="utf-8"?>
-<p:notes xmlns:a="http://schemas.openxmlformats.org/drawingml/2006/main" xmlns:r="http://schemas.openxmlformats.org/officeDocument/2006/relationships" xmlns:p="http://schemas.openxmlformats.org/presentationml/2006/main">
-  <p:cSld>
-    <p:spTree>
-      <p:nvGrpSpPr>
-        <p:cNvPr id="1" name="">
-          <a:extLst>
-            <a:ext uri="{FF2B5EF4-FFF2-40B4-BE49-F238E27FC236}">
-              <a16:creationId xmlns:a16="http://schemas.microsoft.com/office/drawing/2014/main" id="{35F26C10-5D7C-A85E-149B-F65345F1B10C}"/>
-            </a:ext>
-          </a:extLst>
-        </p:cNvPr>
-        <p:cNvGrpSpPr/>
-        <p:nvPr/>
-      </p:nvGrpSpPr>
-      <p:grpSpPr>
-        <a:xfrm>
-          <a:off x="0" y="0"/>
-          <a:ext cx="0" cy="0"/>
-          <a:chOff x="0" y="0"/>
-          <a:chExt cx="0" cy="0"/>
-        </a:xfrm>
-      </p:grpSpPr>
-      <p:sp>
-        <p:nvSpPr>
-          <p:cNvPr id="2" name="Slide Image Placeholder 1">
-            <a:extLst>
-              <a:ext uri="{FF2B5EF4-FFF2-40B4-BE49-F238E27FC236}">
-                <a16:creationId xmlns:a16="http://schemas.microsoft.com/office/drawing/2014/main" id="{BE46B9F6-6EF9-6BC9-7EA4-3AB5EDA61526}"/>
-              </a:ext>
-            </a:extLst>
-          </p:cNvPr>
-          <p:cNvSpPr>
-            <a:spLocks noGrp="1" noRot="1" noChangeAspect="1"/>
-          </p:cNvSpPr>
-          <p:nvPr>
-            <p:ph type="sldImg"/>
-          </p:nvPr>
-        </p:nvSpPr>
-        <p:spPr/>
-      </p:sp>
-      <p:sp>
-        <p:nvSpPr>
-          <p:cNvPr id="3" name="Notes Placeholder 2">
-            <a:extLst>
-              <a:ext uri="{FF2B5EF4-FFF2-40B4-BE49-F238E27FC236}">
-                <a16:creationId xmlns:a16="http://schemas.microsoft.com/office/drawing/2014/main" id="{1EC1DEFD-09F3-8687-46CF-C0B8C4D8062C}"/>
-              </a:ext>
-            </a:extLst>
-          </p:cNvPr>
-          <p:cNvSpPr>
-            <a:spLocks noGrp="1"/>
-          </p:cNvSpPr>
-          <p:nvPr>
-            <p:ph type="body" idx="1"/>
-          </p:nvPr>
-        </p:nvSpPr>
-        <p:spPr/>
-        <p:txBody>
-          <a:bodyPr/>
-          <a:lstStyle/>
-          <a:p>
-            <a:r>
-              <a:rPr lang="en-US" dirty="0"/>
-              <a:t>Then a normal React Testing Library test works. Render Medical Records. Click the button that creates a prescription for Sarah Chen. Assert that a window event fired, once, with the right payload.</a:t>
-            </a:r>
-          </a:p>
-          <a:p>
-            <a:r>
-              <a:rPr lang="en-US" dirty="0"/>
-              <a:t>Every module is tested in isolation. No network. No remoteEntry.js. Two hundred and ten tests across twenty-one files. All green. A broken prescriptions test does not block the records team. A new hire runs the tests for one folder and understands the contract.</a:t>
-            </a:r>
-          </a:p>
-          <a:p>
-            <a:r>
-              <a:rPr lang="en-US" dirty="0"/>
-              <a:t>If we have time in the demo, I will run pnpm test in front of you.</a:t>
-            </a:r>
-          </a:p>
-        </p:txBody>
-      </p:sp>
-      <p:sp>
-        <p:nvSpPr>
-          <p:cNvPr id="4" name="Slide Number Placeholder 3">
-            <a:extLst>
-              <a:ext uri="{FF2B5EF4-FFF2-40B4-BE49-F238E27FC236}">
-                <a16:creationId xmlns:a16="http://schemas.microsoft.com/office/drawing/2014/main" id="{D5EA6B86-EE6A-571F-57B3-8F35F807385D}"/>
-              </a:ext>
-            </a:extLst>
-          </p:cNvPr>
-          <p:cNvSpPr>
-            <a:spLocks noGrp="1"/>
-          </p:cNvSpPr>
-          <p:nvPr>
-            <p:ph type="sldNum" sz="quarter" idx="10"/>
-          </p:nvPr>
-        </p:nvSpPr>
-        <p:spPr/>
-        <p:txBody>
-          <a:bodyPr/>
-          <a:lstStyle/>
-          <a:p>
-            <a:fld id="{F7021451-1387-4CA6-816F-3879F97B5CBC}" type="slidenum">
-              <a:rPr lang="en-US"/>
-              <a:t>43</a:t>
-            </a:fld>
-            <a:endParaRPr lang="en-US"/>
-          </a:p>
-        </p:txBody>
-      </p:sp>
-    </p:spTree>
-    <p:extLst>
-      <p:ext uri="{BB962C8B-B14F-4D97-AF65-F5344CB8AC3E}">
-        <p14:creationId xmlns:p14="http://schemas.microsoft.com/office/powerpoint/2010/main" val="711222900"/>
-      </p:ext>
-    </p:extLst>
-  </p:cSld>
-  <p:clrMapOvr>
-    <a:masterClrMapping/>
-  </p:clrMapOvr>
-</p:notes>
-</file>
-
 <file path=ppt/notesSlides/notesSlide43.xml><?xml version="1.0" encoding="utf-8"?>
-<p:notes xmlns:a="http://schemas.openxmlformats.org/drawingml/2006/main" xmlns:r="http://schemas.openxmlformats.org/officeDocument/2006/relationships" xmlns:p="http://schemas.openxmlformats.org/presentationml/2006/main">
-  <p:cSld>
-    <p:spTree>
-      <p:nvGrpSpPr>
-        <p:cNvPr id="1" name=""/>
-        <p:cNvGrpSpPr/>
-        <p:nvPr/>
-      </p:nvGrpSpPr>
-      <p:grpSpPr>
-        <a:xfrm>
-          <a:off x="0" y="0"/>
-          <a:ext cx="0" cy="0"/>
-          <a:chOff x="0" y="0"/>
-          <a:chExt cx="0" cy="0"/>
-        </a:xfrm>
-      </p:grpSpPr>
-      <p:sp>
-        <p:nvSpPr>
-          <p:cNvPr id="2" name="Slide Image Placeholder 1"/>
-          <p:cNvSpPr>
-            <a:spLocks noGrp="1" noRot="1" noChangeAspect="1"/>
-          </p:cNvSpPr>
-          <p:nvPr>
-            <p:ph type="sldImg"/>
-          </p:nvPr>
-        </p:nvSpPr>
-        <p:spPr/>
-      </p:sp>
-      <p:sp>
-        <p:nvSpPr>
-          <p:cNvPr id="3" name="Notes Placeholder 2"/>
-          <p:cNvSpPr>
-            <a:spLocks noGrp="1"/>
-          </p:cNvSpPr>
-          <p:nvPr>
-            <p:ph type="body" idx="1"/>
-          </p:nvPr>
-        </p:nvSpPr>
-        <p:spPr/>
-        <p:txBody>
-          <a:bodyPr/>
-          <a:lstStyle/>
-          <a:p>
-            <a:r>
-              <a:rPr lang="en-US" dirty="0"/>
-              <a:t>Seven things to take with you.</a:t>
-            </a:r>
-          </a:p>
-          <a:p>
-            <a:r>
-              <a:rPr lang="en-US" dirty="0"/>
-              <a:t>One. Micro-frontends solve a people problem. Adopt this when your team is growing and the monolith cannot keep up. Independent modules let independent teams ship without blocking each other. Team size is the signal, not bundle size.</a:t>
-            </a:r>
-          </a:p>
-          <a:p>
-            <a:r>
-              <a:rPr lang="en-US" dirty="0"/>
-              <a:t>Two. Suspense fallbacks cover load UX. Module Federation covers team DX. You want both. This demo runs both together.</a:t>
-            </a:r>
-          </a:p>
-          <a:p>
-            <a:r>
-              <a:rPr lang="en-US" dirty="0"/>
-              <a:t>Three. Prefer events over shared state. A custom event on window gives you decoupled communication that survives independent deploys. Keep the payload backward compatible.</a:t>
-            </a:r>
-          </a:p>
-          <a:p>
-            <a:r>
-              <a:rPr lang="en-US" dirty="0"/>
-              <a:t>Four. The host owns routing. Remotes can ask for navigation with navigateToModule. Only the shell mutates router state.</a:t>
-            </a:r>
-          </a:p>
-          <a:p>
-            <a:r>
-              <a:rPr lang="en-US" dirty="0"/>
-              <a:t>Five. Ship fault isolation on purpose. A catch on every lazy import, plus an error boundary per module, keeps one broken remote from taking down the app.</a:t>
-            </a:r>
-          </a:p>
-          <a:p>
-            <a:r>
-              <a:rPr lang="en-US" dirty="0"/>
-              <a:t>Six. Rspack keeps the monorepo fast. Sub-second hot reload across four applications. Module Federation is built in. Rspack 2.1 ships the Rust React Compiler, and persistent caching for faster builds and faster restarts.</a:t>
-            </a:r>
-          </a:p>
-          <a:p>
-            <a:r>
-              <a:rPr lang="en-US" dirty="0"/>
-              <a:t>Seven. Match load strategy to content priority. Instant for the landing page. Eager for high-value content. Streamed for secondary modules, with skeletons. Do not load every remote the same way.</a:t>
-            </a:r>
-          </a:p>
-        </p:txBody>
-      </p:sp>
-      <p:sp>
-        <p:nvSpPr>
-          <p:cNvPr id="4" name="Slide Number Placeholder 3"/>
-          <p:cNvSpPr>
-            <a:spLocks noGrp="1"/>
-          </p:cNvSpPr>
-          <p:nvPr>
-            <p:ph type="sldNum" sz="quarter" idx="10"/>
-          </p:nvPr>
-        </p:nvSpPr>
-        <p:spPr/>
-        <p:txBody>
-          <a:bodyPr/>
-          <a:lstStyle/>
-          <a:p>
-            <a:fld id="{F7021451-1387-4CA6-816F-3879F97B5CBC}" type="slidenum">
-              <a:rPr lang="en-US"/>
-              <a:t>44</a:t>
-            </a:fld>
-            <a:endParaRPr lang="en-US"/>
-          </a:p>
-        </p:txBody>
-      </p:sp>
-    </p:spTree>
-    <p:extLst>
-      <p:ext uri="{BB962C8B-B14F-4D97-AF65-F5344CB8AC3E}">
-        <p14:creationId xmlns:p14="http://schemas.microsoft.com/office/powerpoint/2010/main" val="1024086991"/>
-      </p:ext>
-    </p:extLst>
-  </p:cSld>
-  <p:clrMapOvr>
-    <a:masterClrMapping/>
-  </p:clrMapOvr>
-</p:notes>
-</file>
-
-<file path=ppt/notesSlides/notesSlide44.xml><?xml version="1.0" encoding="utf-8"?>
 <p:notes xmlns:a="http://schemas.openxmlformats.org/drawingml/2006/main" xmlns:r="http://schemas.openxmlformats.org/officeDocument/2006/relationships" xmlns:p="http://schemas.openxmlformats.org/presentationml/2006/main">
   <p:cSld>
     <p:spTree>
@@ -7202,7 +7159,7 @@
 </file>
 
 <file path=ppt/slides/slide17.xml><?xml version="1.0" encoding="utf-8"?>
-<p:sld xmlns:a="http://schemas.openxmlformats.org/drawingml/2006/main" xmlns:r="http://schemas.openxmlformats.org/officeDocument/2006/relationships" xmlns:p="http://schemas.openxmlformats.org/presentationml/2006/main">
+<p:sld xmlns:a="http://schemas.openxmlformats.org/drawingml/2006/main" xmlns:r="http://schemas.openxmlformats.org/officeDocument/2006/relationships" xmlns:p="http://schemas.openxmlformats.org/presentationml/2006/main" show="0">
   <p:cSld>
     <p:spTree>
       <p:nvGrpSpPr>
@@ -8186,7 +8143,7 @@
 </file>
 
 <file path=ppt/slides/slide18.xml><?xml version="1.0" encoding="utf-8"?>
-<p:sld xmlns:a="http://schemas.openxmlformats.org/drawingml/2006/main" xmlns:r="http://schemas.openxmlformats.org/officeDocument/2006/relationships" xmlns:p="http://schemas.openxmlformats.org/presentationml/2006/main">
+<p:sld xmlns:a="http://schemas.openxmlformats.org/drawingml/2006/main" xmlns:r="http://schemas.openxmlformats.org/officeDocument/2006/relationships" xmlns:p="http://schemas.openxmlformats.org/presentationml/2006/main" show="0">
   <p:cSld>
     <p:bg>
       <p:bgPr>
@@ -8859,7 +8816,7 @@
 </file>
 
 <file path=ppt/slides/slide19.xml><?xml version="1.0" encoding="utf-8"?>
-<p:sld xmlns:a="http://schemas.openxmlformats.org/drawingml/2006/main" xmlns:r="http://schemas.openxmlformats.org/officeDocument/2006/relationships" xmlns:p="http://schemas.openxmlformats.org/presentationml/2006/main">
+<p:sld xmlns:a="http://schemas.openxmlformats.org/drawingml/2006/main" xmlns:r="http://schemas.openxmlformats.org/officeDocument/2006/relationships" xmlns:p="http://schemas.openxmlformats.org/presentationml/2006/main" show="0">
   <p:cSld>
     <p:bg>
       <p:bgPr>
@@ -9099,7 +9056,7 @@
 </file>
 
 <file path=ppt/slides/slide20.xml><?xml version="1.0" encoding="utf-8"?>
-<p:sld xmlns:a="http://schemas.openxmlformats.org/drawingml/2006/main" xmlns:r="http://schemas.openxmlformats.org/officeDocument/2006/relationships" xmlns:p="http://schemas.openxmlformats.org/presentationml/2006/main">
+<p:sld xmlns:a="http://schemas.openxmlformats.org/drawingml/2006/main" xmlns:r="http://schemas.openxmlformats.org/officeDocument/2006/relationships" xmlns:p="http://schemas.openxmlformats.org/presentationml/2006/main" show="0">
   <p:cSld>
     <p:spTree>
       <p:nvGrpSpPr>
@@ -10083,7 +10040,7 @@
 </file>
 
 <file path=ppt/slides/slide21.xml><?xml version="1.0" encoding="utf-8"?>
-<p:sld xmlns:a="http://schemas.openxmlformats.org/drawingml/2006/main" xmlns:r="http://schemas.openxmlformats.org/officeDocument/2006/relationships" xmlns:p="http://schemas.openxmlformats.org/presentationml/2006/main">
+<p:sld xmlns:a="http://schemas.openxmlformats.org/drawingml/2006/main" xmlns:r="http://schemas.openxmlformats.org/officeDocument/2006/relationships" xmlns:p="http://schemas.openxmlformats.org/presentationml/2006/main" show="0">
   <p:cSld>
     <p:bg>
       <p:bgPr>
@@ -10838,7 +10795,7 @@
 </file>
 
 <file path=ppt/slides/slide22.xml><?xml version="1.0" encoding="utf-8"?>
-<p:sld xmlns:a="http://schemas.openxmlformats.org/drawingml/2006/main" xmlns:r="http://schemas.openxmlformats.org/officeDocument/2006/relationships" xmlns:p="http://schemas.openxmlformats.org/presentationml/2006/main">
+<p:sld xmlns:a="http://schemas.openxmlformats.org/drawingml/2006/main" xmlns:r="http://schemas.openxmlformats.org/officeDocument/2006/relationships" xmlns:p="http://schemas.openxmlformats.org/presentationml/2006/main" show="0">
   <p:cSld>
     <p:bg>
       <p:bgPr>
@@ -11550,7 +11507,7 @@
 </file>
 
 <file path=ppt/slides/slide23.xml><?xml version="1.0" encoding="utf-8"?>
-<p:sld xmlns:a="http://schemas.openxmlformats.org/drawingml/2006/main" xmlns:r="http://schemas.openxmlformats.org/officeDocument/2006/relationships" xmlns:p="http://schemas.openxmlformats.org/presentationml/2006/main">
+<p:sld xmlns:a="http://schemas.openxmlformats.org/drawingml/2006/main" xmlns:r="http://schemas.openxmlformats.org/officeDocument/2006/relationships" xmlns:p="http://schemas.openxmlformats.org/presentationml/2006/main" show="0">
   <p:cSld name="Slide 7">
     <p:bg>
       <p:bgPr>
@@ -12945,7 +12902,7 @@
 </file>
 
 <file path=ppt/slides/slide24.xml><?xml version="1.0" encoding="utf-8"?>
-<p:sld xmlns:a="http://schemas.openxmlformats.org/drawingml/2006/main" xmlns:r="http://schemas.openxmlformats.org/officeDocument/2006/relationships" xmlns:p="http://schemas.openxmlformats.org/presentationml/2006/main">
+<p:sld xmlns:a="http://schemas.openxmlformats.org/drawingml/2006/main" xmlns:r="http://schemas.openxmlformats.org/officeDocument/2006/relationships" xmlns:p="http://schemas.openxmlformats.org/presentationml/2006/main" show="0">
   <p:cSld>
     <p:bg>
       <p:bgPr>
@@ -13499,7 +13456,7 @@
 </file>
 
 <file path=ppt/slides/slide25.xml><?xml version="1.0" encoding="utf-8"?>
-<p:sld xmlns:a="http://schemas.openxmlformats.org/drawingml/2006/main" xmlns:r="http://schemas.openxmlformats.org/officeDocument/2006/relationships" xmlns:p="http://schemas.openxmlformats.org/presentationml/2006/main">
+<p:sld xmlns:a="http://schemas.openxmlformats.org/drawingml/2006/main" xmlns:r="http://schemas.openxmlformats.org/officeDocument/2006/relationships" xmlns:p="http://schemas.openxmlformats.org/presentationml/2006/main" show="0">
   <p:cSld>
     <p:bg>
       <p:bgPr>
@@ -13720,7 +13677,7 @@
 </file>
 
 <file path=ppt/slides/slide26.xml><?xml version="1.0" encoding="utf-8"?>
-<p:sld xmlns:a="http://schemas.openxmlformats.org/drawingml/2006/main" xmlns:r="http://schemas.openxmlformats.org/officeDocument/2006/relationships" xmlns:p="http://schemas.openxmlformats.org/presentationml/2006/main">
+<p:sld xmlns:a="http://schemas.openxmlformats.org/drawingml/2006/main" xmlns:r="http://schemas.openxmlformats.org/officeDocument/2006/relationships" xmlns:p="http://schemas.openxmlformats.org/presentationml/2006/main" show="0">
   <p:cSld name="Slide 8">
     <p:bg>
       <p:bgPr>
@@ -15127,23 +15084,9 @@
 <file path=ppt/slides/slide27.xml><?xml version="1.0" encoding="utf-8"?>
 <p:sld xmlns:a="http://schemas.openxmlformats.org/drawingml/2006/main" xmlns:r="http://schemas.openxmlformats.org/officeDocument/2006/relationships" xmlns:p="http://schemas.openxmlformats.org/presentationml/2006/main">
   <p:cSld>
-    <p:bg>
-      <p:bgPr>
-        <a:solidFill>
-          <a:srgbClr val="0C0C0C"/>
-        </a:solidFill>
-        <a:effectLst/>
-      </p:bgPr>
-    </p:bg>
     <p:spTree>
       <p:nvGrpSpPr>
-        <p:cNvPr id="1" name="">
-          <a:extLst>
-            <a:ext uri="{FF2B5EF4-FFF2-40B4-BE49-F238E27FC236}">
-              <a16:creationId xmlns:a16="http://schemas.microsoft.com/office/drawing/2014/main" id="{D9A13BE4-D97B-41AC-C490-09834266D35B}"/>
-            </a:ext>
-          </a:extLst>
-        </p:cNvPr>
+        <p:cNvPr id="1" name=""/>
         <p:cNvGrpSpPr/>
         <p:nvPr/>
       </p:nvGrpSpPr>
@@ -15157,10 +15100,10 @@
       </p:grpSpPr>
       <p:sp>
         <p:nvSpPr>
-          <p:cNvPr id="4" name="Text 2">
+          <p:cNvPr id="3" name="Text 2">
             <a:extLst>
               <a:ext uri="{FF2B5EF4-FFF2-40B4-BE49-F238E27FC236}">
-                <a16:creationId xmlns:a16="http://schemas.microsoft.com/office/drawing/2014/main" id="{970290A1-7021-6741-BCD0-264AA8DB4D5E}"/>
+                <a16:creationId xmlns:a16="http://schemas.microsoft.com/office/drawing/2014/main" id="{915B897A-3EEC-DD92-29A6-A9DC36773ED2}"/>
               </a:ext>
             </a:extLst>
           </p:cNvPr>
@@ -15188,7 +15131,10 @@
             <a:r>
               <a:rPr lang="en-US" sz="3300" i="1" dirty="0">
                 <a:solidFill>
-                  <a:srgbClr val="FAFAF9"/>
+                  <a:schemeClr val="tx1">
+                    <a:lumMod val="95000"/>
+                    <a:lumOff val="5000"/>
+                  </a:schemeClr>
                 </a:solidFill>
                 <a:latin typeface="Instrument Serif" pitchFamily="34" charset="0"/>
                 <a:ea typeface="Instrument Serif" pitchFamily="34" charset="-122"/>
@@ -15196,16 +15142,23 @@
               </a:rPr>
               <a:t>Three strategies, three layers of resilience</a:t>
             </a:r>
-            <a:endParaRPr lang="en-US" sz="3300" dirty="0"/>
+            <a:endParaRPr lang="en-US" sz="3300" dirty="0">
+              <a:solidFill>
+                <a:schemeClr val="tx1">
+                  <a:lumMod val="95000"/>
+                  <a:lumOff val="5000"/>
+                </a:schemeClr>
+              </a:solidFill>
+            </a:endParaRPr>
           </a:p>
         </p:txBody>
       </p:sp>
       <p:sp>
         <p:nvSpPr>
-          <p:cNvPr id="9" name="Text 6">
+          <p:cNvPr id="5" name="Text 6">
             <a:extLst>
               <a:ext uri="{FF2B5EF4-FFF2-40B4-BE49-F238E27FC236}">
-                <a16:creationId xmlns:a16="http://schemas.microsoft.com/office/drawing/2014/main" id="{E94D408B-07D3-4042-5C51-61B10B31D198}"/>
+                <a16:creationId xmlns:a16="http://schemas.microsoft.com/office/drawing/2014/main" id="{668BF609-EEBF-0FAC-875A-FCD5A6335B19}"/>
               </a:ext>
             </a:extLst>
           </p:cNvPr>
@@ -15236,7 +15189,10 @@
             <a:r>
               <a:rPr lang="en-US" sz="2800" dirty="0">
                 <a:solidFill>
-                  <a:srgbClr val="FAFAF9"/>
+                  <a:schemeClr val="tx1">
+                    <a:lumMod val="95000"/>
+                    <a:lumOff val="5000"/>
+                  </a:schemeClr>
                 </a:solidFill>
                 <a:latin typeface="Cascadia Code NF" pitchFamily="50" charset="0"/>
                 <a:ea typeface="Cascadia Code NF" pitchFamily="50" charset="0"/>
@@ -15244,11 +15200,6 @@
               </a:rPr>
               <a:t>Layer 1: lazy() + .catch() if remote is unreachable</a:t>
             </a:r>
-            <a:endParaRPr lang="en-US" sz="2800" dirty="0">
-              <a:latin typeface="Cascadia Code NF" pitchFamily="50" charset="0"/>
-              <a:ea typeface="Cascadia Code NF" pitchFamily="50" charset="0"/>
-              <a:cs typeface="Cascadia Code NF" pitchFamily="50" charset="0"/>
-            </a:endParaRPr>
           </a:p>
           <a:p>
             <a:pPr>
@@ -15260,7 +15211,10 @@
             <a:r>
               <a:rPr lang="en-US" sz="2800" dirty="0">
                 <a:solidFill>
-                  <a:srgbClr val="FAFAF9"/>
+                  <a:schemeClr val="tx1">
+                    <a:lumMod val="95000"/>
+                    <a:lumOff val="5000"/>
+                  </a:schemeClr>
                 </a:solidFill>
                 <a:latin typeface="Cascadia Code NF" pitchFamily="50" charset="0"/>
                 <a:ea typeface="Cascadia Code NF" pitchFamily="50" charset="0"/>
@@ -15268,11 +15222,6 @@
               </a:rPr>
               <a:t>Layer 2: &lt;Suspense&gt; skeleton while loading</a:t>
             </a:r>
-            <a:endParaRPr lang="en-US" sz="2800" dirty="0">
-              <a:latin typeface="Cascadia Code NF" pitchFamily="50" charset="0"/>
-              <a:ea typeface="Cascadia Code NF" pitchFamily="50" charset="0"/>
-              <a:cs typeface="Cascadia Code NF" pitchFamily="50" charset="0"/>
-            </a:endParaRPr>
           </a:p>
           <a:p>
             <a:pPr>
@@ -15284,7 +15233,10 @@
             <a:r>
               <a:rPr lang="en-US" sz="2800" dirty="0">
                 <a:solidFill>
-                  <a:srgbClr val="FAFAF9"/>
+                  <a:schemeClr val="tx1">
+                    <a:lumMod val="95000"/>
+                    <a:lumOff val="5000"/>
+                  </a:schemeClr>
                 </a:solidFill>
                 <a:latin typeface="Cascadia Code NF" pitchFamily="50" charset="0"/>
                 <a:ea typeface="Cascadia Code NF" pitchFamily="50" charset="0"/>
@@ -15292,18 +15244,13 @@
               </a:rPr>
               <a:t>Layer 3: &lt;ErrorBoundary&gt; for runtime errors</a:t>
             </a:r>
-            <a:endParaRPr lang="en-US" sz="2800" dirty="0">
-              <a:latin typeface="Cascadia Code NF" pitchFamily="50" charset="0"/>
-              <a:ea typeface="Cascadia Code NF" pitchFamily="50" charset="0"/>
-              <a:cs typeface="Cascadia Code NF" pitchFamily="50" charset="0"/>
-            </a:endParaRPr>
           </a:p>
         </p:txBody>
       </p:sp>
     </p:spTree>
     <p:extLst>
       <p:ext uri="{BB962C8B-B14F-4D97-AF65-F5344CB8AC3E}">
-        <p14:creationId xmlns:p14="http://schemas.microsoft.com/office/powerpoint/2010/main" val="945681252"/>
+        <p14:creationId xmlns:p14="http://schemas.microsoft.com/office/powerpoint/2010/main" val="2619125639"/>
       </p:ext>
     </p:extLst>
   </p:cSld>
@@ -15316,23 +15263,9 @@
 <file path=ppt/slides/slide28.xml><?xml version="1.0" encoding="utf-8"?>
 <p:sld xmlns:a="http://schemas.openxmlformats.org/drawingml/2006/main" xmlns:r="http://schemas.openxmlformats.org/officeDocument/2006/relationships" xmlns:p="http://schemas.openxmlformats.org/presentationml/2006/main">
   <p:cSld>
-    <p:bg>
-      <p:bgPr>
-        <a:solidFill>
-          <a:srgbClr val="0C0C0C"/>
-        </a:solidFill>
-        <a:effectLst/>
-      </p:bgPr>
-    </p:bg>
     <p:spTree>
       <p:nvGrpSpPr>
-        <p:cNvPr id="1" name="">
-          <a:extLst>
-            <a:ext uri="{FF2B5EF4-FFF2-40B4-BE49-F238E27FC236}">
-              <a16:creationId xmlns:a16="http://schemas.microsoft.com/office/drawing/2014/main" id="{023C68B3-071B-AD8B-3884-8C61D0BFEBB9}"/>
-            </a:ext>
-          </a:extLst>
-        </p:cNvPr>
+        <p:cNvPr id="1" name=""/>
         <p:cNvGrpSpPr/>
         <p:nvPr/>
       </p:nvGrpSpPr>
@@ -15346,10 +15279,10 @@
       </p:grpSpPr>
       <p:sp>
         <p:nvSpPr>
-          <p:cNvPr id="4" name="Text 2">
+          <p:cNvPr id="3" name="Text 2">
             <a:extLst>
               <a:ext uri="{FF2B5EF4-FFF2-40B4-BE49-F238E27FC236}">
-                <a16:creationId xmlns:a16="http://schemas.microsoft.com/office/drawing/2014/main" id="{B92C51D0-4CA1-22EB-417E-6CAEC42D023B}"/>
+                <a16:creationId xmlns:a16="http://schemas.microsoft.com/office/drawing/2014/main" id="{E6D9864B-997C-D392-B5C0-9E000C1A03B8}"/>
               </a:ext>
             </a:extLst>
           </p:cNvPr>
@@ -15377,24 +15310,34 @@
             <a:r>
               <a:rPr lang="en-US" sz="3300" i="1" dirty="0">
                 <a:solidFill>
-                  <a:srgbClr val="FAFAF9"/>
+                  <a:schemeClr val="tx1">
+                    <a:lumMod val="95000"/>
+                    <a:lumOff val="5000"/>
+                  </a:schemeClr>
                 </a:solidFill>
                 <a:latin typeface="Instrument Serif" pitchFamily="34" charset="0"/>
                 <a:ea typeface="Instrument Serif" pitchFamily="34" charset="-122"/>
                 <a:cs typeface="Instrument Serif" pitchFamily="34" charset="-120"/>
               </a:rPr>
-              <a:t>Three strategies, three layers of resilience</a:t>
-            </a:r>
-            <a:endParaRPr lang="en-US" sz="3300" dirty="0"/>
+              <a:t>Question</a:t>
+            </a:r>
+            <a:endParaRPr lang="en-US" sz="3300" dirty="0">
+              <a:solidFill>
+                <a:schemeClr val="tx1">
+                  <a:lumMod val="95000"/>
+                  <a:lumOff val="5000"/>
+                </a:schemeClr>
+              </a:solidFill>
+            </a:endParaRPr>
           </a:p>
         </p:txBody>
       </p:sp>
       <p:sp>
         <p:nvSpPr>
-          <p:cNvPr id="10" name="Shape 7">
+          <p:cNvPr id="7" name="Text 8">
             <a:extLst>
               <a:ext uri="{FF2B5EF4-FFF2-40B4-BE49-F238E27FC236}">
-                <a16:creationId xmlns:a16="http://schemas.microsoft.com/office/drawing/2014/main" id="{8F73D7A0-8F1C-ACAC-55C3-FF301E5AEA11}"/>
+                <a16:creationId xmlns:a16="http://schemas.microsoft.com/office/drawing/2014/main" id="{626E23A0-B775-D9BA-9D15-6D62663E3A4A}"/>
               </a:ext>
             </a:extLst>
           </p:cNvPr>
@@ -15403,41 +15346,8 @@
         </p:nvSpPr>
         <p:spPr>
           <a:xfrm>
-            <a:off x="546354" y="3742046"/>
-            <a:ext cx="32004" cy="530352"/>
-          </a:xfrm>
-          <a:prstGeom prst="rect">
-            <a:avLst/>
-          </a:prstGeom>
-          <a:solidFill>
-            <a:srgbClr val="D4FF00"/>
-          </a:solidFill>
-          <a:ln/>
-        </p:spPr>
-        <p:txBody>
-          <a:bodyPr/>
-          <a:lstStyle/>
-          <a:p>
-            <a:endParaRPr lang="en-GB"/>
-          </a:p>
-        </p:txBody>
-      </p:sp>
-      <p:sp>
-        <p:nvSpPr>
-          <p:cNvPr id="11" name="Text 8">
-            <a:extLst>
-              <a:ext uri="{FF2B5EF4-FFF2-40B4-BE49-F238E27FC236}">
-                <a16:creationId xmlns:a16="http://schemas.microsoft.com/office/drawing/2014/main" id="{F3EEE425-EC44-7E52-FB56-0D0C2DD506C0}"/>
-              </a:ext>
-            </a:extLst>
-          </p:cNvPr>
-          <p:cNvSpPr/>
-          <p:nvPr/>
-        </p:nvSpPr>
-        <p:spPr>
-          <a:xfrm>
-            <a:off x="713232" y="3108959"/>
-            <a:ext cx="10881360" cy="1796527"/>
+            <a:off x="713232" y="2678653"/>
+            <a:ext cx="10395758" cy="1796527"/>
           </a:xfrm>
           <a:prstGeom prst="rect">
             <a:avLst/>
@@ -15453,22 +15363,62 @@
               <a:buNone/>
             </a:pPr>
             <a:r>
-              <a:rPr lang="en-US" sz="2000" i="1" dirty="0">
-                <a:solidFill>
-                  <a:schemeClr val="bg1">
-                    <a:lumMod val="95000"/>
+              <a:rPr lang="en-US" sz="2800" i="1" dirty="0">
+                <a:solidFill>
+                  <a:schemeClr val="tx1">
+                    <a:lumMod val="85000"/>
+                    <a:lumOff val="15000"/>
                   </a:schemeClr>
                 </a:solidFill>
                 <a:latin typeface="Cascadia Code NF" pitchFamily="50" charset="0"/>
                 <a:ea typeface="Cascadia Code NF" pitchFamily="50" charset="0"/>
                 <a:cs typeface="Cascadia Code NF" pitchFamily="50" charset="0"/>
               </a:rPr>
-              <a:t>Why lazy() for eager modules? Remotes are separate builds resolved at runtime. Eager import() warms the cache; lazy() resolves from it.</a:t>
-            </a:r>
-            <a:endParaRPr lang="en-US" sz="2000" dirty="0">
+              <a:t>Why lazy() for eager modules? </a:t>
+            </a:r>
+          </a:p>
+          <a:p>
+            <a:pPr marL="0" indent="0">
+              <a:buNone/>
+            </a:pPr>
+            <a:r>
+              <a:rPr lang="en-US" sz="2800" i="1" dirty="0">
+                <a:solidFill>
+                  <a:schemeClr val="tx1">
+                    <a:lumMod val="85000"/>
+                    <a:lumOff val="15000"/>
+                  </a:schemeClr>
+                </a:solidFill>
+                <a:latin typeface="Cascadia Code NF" pitchFamily="50" charset="0"/>
+                <a:ea typeface="Cascadia Code NF" pitchFamily="50" charset="0"/>
+                <a:cs typeface="Cascadia Code NF" pitchFamily="50" charset="0"/>
+              </a:rPr>
+              <a:t>Remotes are separate builds resolved at runtime. </a:t>
+            </a:r>
+          </a:p>
+          <a:p>
+            <a:pPr marL="0" indent="0">
+              <a:buNone/>
+            </a:pPr>
+            <a:r>
+              <a:rPr lang="en-US" sz="2800" i="1" dirty="0">
+                <a:solidFill>
+                  <a:schemeClr val="tx1">
+                    <a:lumMod val="85000"/>
+                    <a:lumOff val="15000"/>
+                  </a:schemeClr>
+                </a:solidFill>
+                <a:latin typeface="Cascadia Code NF" pitchFamily="50" charset="0"/>
+                <a:ea typeface="Cascadia Code NF" pitchFamily="50" charset="0"/>
+                <a:cs typeface="Cascadia Code NF" pitchFamily="50" charset="0"/>
+              </a:rPr>
+              <a:t>Eager import() warms the cache; lazy() resolves from it.</a:t>
+            </a:r>
+            <a:endParaRPr lang="en-US" sz="2800" dirty="0">
               <a:solidFill>
-                <a:schemeClr val="bg1">
-                  <a:lumMod val="95000"/>
+                <a:schemeClr val="tx1">
+                  <a:lumMod val="85000"/>
+                  <a:lumOff val="15000"/>
                 </a:schemeClr>
               </a:solidFill>
               <a:latin typeface="Cascadia Code NF" pitchFamily="50" charset="0"/>
@@ -15481,7 +15431,7 @@
     </p:spTree>
     <p:extLst>
       <p:ext uri="{BB962C8B-B14F-4D97-AF65-F5344CB8AC3E}">
-        <p14:creationId xmlns:p14="http://schemas.microsoft.com/office/powerpoint/2010/main" val="995996138"/>
+        <p14:creationId xmlns:p14="http://schemas.microsoft.com/office/powerpoint/2010/main" val="2577224661"/>
       </p:ext>
     </p:extLst>
   </p:cSld>
@@ -15492,7 +15442,7 @@
 </file>
 
 <file path=ppt/slides/slide29.xml><?xml version="1.0" encoding="utf-8"?>
-<p:sld xmlns:a="http://schemas.openxmlformats.org/drawingml/2006/main" xmlns:r="http://schemas.openxmlformats.org/officeDocument/2006/relationships" xmlns:p="http://schemas.openxmlformats.org/presentationml/2006/main">
+<p:sld xmlns:a="http://schemas.openxmlformats.org/drawingml/2006/main" xmlns:r="http://schemas.openxmlformats.org/officeDocument/2006/relationships" xmlns:p="http://schemas.openxmlformats.org/presentationml/2006/main" show="0">
   <p:cSld name="Slide 9">
     <p:bg>
       <p:bgPr>
@@ -16613,7 +16563,7 @@
 </file>
 
 <file path=ppt/slides/slide30.xml><?xml version="1.0" encoding="utf-8"?>
-<p:sld xmlns:a="http://schemas.openxmlformats.org/drawingml/2006/main" xmlns:r="http://schemas.openxmlformats.org/officeDocument/2006/relationships" xmlns:p="http://schemas.openxmlformats.org/presentationml/2006/main">
+<p:sld xmlns:a="http://schemas.openxmlformats.org/drawingml/2006/main" xmlns:r="http://schemas.openxmlformats.org/officeDocument/2006/relationships" xmlns:p="http://schemas.openxmlformats.org/presentationml/2006/main" show="0">
   <p:cSld>
     <p:bg>
       <p:bgPr>
@@ -16645,84 +16595,6 @@
       </p:grpSpPr>
       <p:sp>
         <p:nvSpPr>
-          <p:cNvPr id="2" name="Shape 0">
-            <a:extLst>
-              <a:ext uri="{FF2B5EF4-FFF2-40B4-BE49-F238E27FC236}">
-                <a16:creationId xmlns:a16="http://schemas.microsoft.com/office/drawing/2014/main" id="{CAE0EB35-0F49-4A4B-7DE8-B524718D36BC}"/>
-              </a:ext>
-            </a:extLst>
-          </p:cNvPr>
-          <p:cNvSpPr/>
-          <p:nvPr/>
-        </p:nvSpPr>
-        <p:spPr>
-          <a:xfrm>
-            <a:off x="548640" y="512064"/>
-            <a:ext cx="411480" cy="45720"/>
-          </a:xfrm>
-          <a:prstGeom prst="rect">
-            <a:avLst/>
-          </a:prstGeom>
-          <a:solidFill>
-            <a:srgbClr val="D4FF00"/>
-          </a:solidFill>
-          <a:ln/>
-        </p:spPr>
-        <p:txBody>
-          <a:bodyPr/>
-          <a:lstStyle/>
-          <a:p>
-            <a:endParaRPr lang="en-GB"/>
-          </a:p>
-        </p:txBody>
-      </p:sp>
-      <p:sp>
-        <p:nvSpPr>
-          <p:cNvPr id="3" name="Text 1">
-            <a:extLst>
-              <a:ext uri="{FF2B5EF4-FFF2-40B4-BE49-F238E27FC236}">
-                <a16:creationId xmlns:a16="http://schemas.microsoft.com/office/drawing/2014/main" id="{53444E75-A680-AD3B-9C48-77C02450A2E6}"/>
-              </a:ext>
-            </a:extLst>
-          </p:cNvPr>
-          <p:cNvSpPr/>
-          <p:nvPr/>
-        </p:nvSpPr>
-        <p:spPr>
-          <a:xfrm>
-            <a:off x="1097280" y="347472"/>
-            <a:ext cx="10515600" cy="365760"/>
-          </a:xfrm>
-          <a:prstGeom prst="rect">
-            <a:avLst/>
-          </a:prstGeom>
-          <a:noFill/>
-          <a:ln/>
-        </p:spPr>
-        <p:txBody>
-          <a:bodyPr wrap="square" rtlCol="0" anchor="ctr"/>
-          <a:lstStyle/>
-          <a:p>
-            <a:pPr marL="0" indent="0">
-              <a:buNone/>
-            </a:pPr>
-            <a:r>
-              <a:rPr lang="en-US" sz="1050" kern="0" spc="400" dirty="0">
-                <a:solidFill>
-                  <a:srgbClr val="A8A29E"/>
-                </a:solidFill>
-                <a:latin typeface="IBM Plex Mono" pitchFamily="34" charset="0"/>
-                <a:ea typeface="IBM Plex Mono" pitchFamily="34" charset="-122"/>
-                <a:cs typeface="IBM Plex Mono" pitchFamily="34" charset="-120"/>
-              </a:rPr>
-              <a:t>LIVE DEMO CONTROLS</a:t>
-            </a:r>
-            <a:endParaRPr lang="en-US" sz="1050" dirty="0"/>
-          </a:p>
-        </p:txBody>
-      </p:sp>
-      <p:sp>
-        <p:nvSpPr>
           <p:cNvPr id="4" name="Text 2">
             <a:extLst>
               <a:ext uri="{FF2B5EF4-FFF2-40B4-BE49-F238E27FC236}">
@@ -16780,8 +16652,8 @@
         </p:nvSpPr>
         <p:spPr>
           <a:xfrm>
-            <a:off x="500768" y="2794299"/>
-            <a:ext cx="11064240" cy="2286000"/>
+            <a:off x="530352" y="2439296"/>
+            <a:ext cx="11064240" cy="3906639"/>
           </a:xfrm>
           <a:prstGeom prst="rect">
             <a:avLst/>
@@ -16802,7 +16674,7 @@
               <a:buChar char="•"/>
             </a:pPr>
             <a:r>
-              <a:rPr lang="en-US" sz="2000" dirty="0">
+              <a:rPr lang="en-US" sz="2400" dirty="0">
                 <a:solidFill>
                   <a:srgbClr val="FAFAF9"/>
                 </a:solidFill>
@@ -16812,7 +16684,7 @@
               </a:rPr>
               <a:t>Health Monitor: polls each remoteEntry.js every 5s, shows latency</a:t>
             </a:r>
-            <a:endParaRPr lang="en-US" sz="2000" dirty="0"/>
+            <a:endParaRPr lang="en-US" sz="2400" dirty="0"/>
           </a:p>
           <a:p>
             <a:pPr marL="285750" indent="-285750">
@@ -16824,7 +16696,7 @@
               <a:buChar char="•"/>
             </a:pPr>
             <a:r>
-              <a:rPr lang="en-US" sz="2000" dirty="0">
+              <a:rPr lang="en-US" sz="2400" dirty="0">
                 <a:solidFill>
                   <a:srgbClr val="FAFAF9"/>
                 </a:solidFill>
@@ -16834,7 +16706,7 @@
               </a:rPr>
               <a:t>Kill Switches: simulate remote failure; the rest keeps running</a:t>
             </a:r>
-            <a:endParaRPr lang="en-US" sz="2000" dirty="0"/>
+            <a:endParaRPr lang="en-US" sz="2400" dirty="0"/>
           </a:p>
           <a:p>
             <a:pPr marL="285750" indent="-285750">
@@ -16846,7 +16718,7 @@
               <a:buChar char="•"/>
             </a:pPr>
             <a:r>
-              <a:rPr lang="en-US" sz="2000" dirty="0">
+              <a:rPr lang="en-US" sz="2400" dirty="0">
                 <a:solidFill>
                   <a:srgbClr val="FAFAF9"/>
                 </a:solidFill>
@@ -16856,7 +16728,7 @@
               </a:rPr>
               <a:t>A/B Deployment: toggle Stable ↔ Canary ring, per-module versions</a:t>
             </a:r>
-            <a:endParaRPr lang="en-US" sz="2000" dirty="0"/>
+            <a:endParaRPr lang="en-US" sz="2400" dirty="0"/>
           </a:p>
           <a:p>
             <a:pPr marL="285750" indent="-285750">
@@ -16868,7 +16740,7 @@
               <a:buChar char="•"/>
             </a:pPr>
             <a:r>
-              <a:rPr lang="en-US" sz="2000" dirty="0">
+              <a:rPr lang="en-US" sz="2400" dirty="0">
                 <a:solidFill>
                   <a:srgbClr val="FAFAF9"/>
                 </a:solidFill>
@@ -16878,7 +16750,6 @@
               </a:rPr>
               <a:t>Theme: CSS variables + localStorage + themeChange event, zero shared imports</a:t>
             </a:r>
-            <a:endParaRPr lang="en-US" sz="2000" dirty="0"/>
           </a:p>
         </p:txBody>
       </p:sp>
@@ -16897,6 +16768,239 @@
 
 <file path=ppt/slides/slide31.xml><?xml version="1.0" encoding="utf-8"?>
 <p:sld xmlns:a="http://schemas.openxmlformats.org/drawingml/2006/main" xmlns:r="http://schemas.openxmlformats.org/officeDocument/2006/relationships" xmlns:p="http://schemas.openxmlformats.org/presentationml/2006/main">
+  <p:cSld>
+    <p:spTree>
+      <p:nvGrpSpPr>
+        <p:cNvPr id="1" name=""/>
+        <p:cNvGrpSpPr/>
+        <p:nvPr/>
+      </p:nvGrpSpPr>
+      <p:grpSpPr>
+        <a:xfrm>
+          <a:off x="0" y="0"/>
+          <a:ext cx="0" cy="0"/>
+          <a:chOff x="0" y="0"/>
+          <a:chExt cx="0" cy="0"/>
+        </a:xfrm>
+      </p:grpSpPr>
+      <p:sp>
+        <p:nvSpPr>
+          <p:cNvPr id="3" name="Text 2">
+            <a:extLst>
+              <a:ext uri="{FF2B5EF4-FFF2-40B4-BE49-F238E27FC236}">
+                <a16:creationId xmlns:a16="http://schemas.microsoft.com/office/drawing/2014/main" id="{CC0F34E4-70E8-F750-1B49-A033FEC0C4E2}"/>
+              </a:ext>
+            </a:extLst>
+          </p:cNvPr>
+          <p:cNvSpPr/>
+          <p:nvPr/>
+        </p:nvSpPr>
+        <p:spPr>
+          <a:xfrm>
+            <a:off x="530352" y="135008"/>
+            <a:ext cx="11109960" cy="777240"/>
+          </a:xfrm>
+          <a:prstGeom prst="rect">
+            <a:avLst/>
+          </a:prstGeom>
+          <a:noFill/>
+          <a:ln/>
+        </p:spPr>
+        <p:txBody>
+          <a:bodyPr wrap="square" rtlCol="0" anchor="ctr"/>
+          <a:lstStyle/>
+          <a:p>
+            <a:pPr marL="0" indent="0">
+              <a:buNone/>
+            </a:pPr>
+            <a:r>
+              <a:rPr lang="en-US" sz="3300" i="1" dirty="0">
+                <a:solidFill>
+                  <a:schemeClr val="tx1">
+                    <a:lumMod val="95000"/>
+                    <a:lumOff val="5000"/>
+                  </a:schemeClr>
+                </a:solidFill>
+                <a:latin typeface="Instrument Serif" pitchFamily="34" charset="0"/>
+                <a:ea typeface="Instrument Serif" pitchFamily="34" charset="-122"/>
+                <a:cs typeface="Instrument Serif" pitchFamily="34" charset="-120"/>
+              </a:rPr>
+              <a:t>Settings · Commands · Federation Lab</a:t>
+            </a:r>
+            <a:endParaRPr lang="en-US" sz="3300" dirty="0">
+              <a:solidFill>
+                <a:schemeClr val="tx1">
+                  <a:lumMod val="95000"/>
+                  <a:lumOff val="5000"/>
+                </a:schemeClr>
+              </a:solidFill>
+            </a:endParaRPr>
+          </a:p>
+        </p:txBody>
+      </p:sp>
+      <p:sp>
+        <p:nvSpPr>
+          <p:cNvPr id="5" name="Text 5">
+            <a:extLst>
+              <a:ext uri="{FF2B5EF4-FFF2-40B4-BE49-F238E27FC236}">
+                <a16:creationId xmlns:a16="http://schemas.microsoft.com/office/drawing/2014/main" id="{8EB8FE32-AB1B-8F6E-B031-72E31947DF0F}"/>
+              </a:ext>
+            </a:extLst>
+          </p:cNvPr>
+          <p:cNvSpPr/>
+          <p:nvPr/>
+        </p:nvSpPr>
+        <p:spPr>
+          <a:xfrm>
+            <a:off x="576072" y="1202166"/>
+            <a:ext cx="10706010" cy="4660752"/>
+          </a:xfrm>
+          <a:prstGeom prst="rect">
+            <a:avLst/>
+          </a:prstGeom>
+          <a:noFill/>
+          <a:ln/>
+        </p:spPr>
+        <p:txBody>
+          <a:bodyPr wrap="square" rtlCol="0" anchor="t"/>
+          <a:lstStyle/>
+          <a:p>
+            <a:pPr marL="285750" indent="-285750">
+              <a:lnSpc>
+                <a:spcPct val="150000"/>
+              </a:lnSpc>
+              <a:buSzPct val="100000"/>
+              <a:buFont typeface="Arial" panose="020B0604020202020204" pitchFamily="34" charset="0"/>
+              <a:buChar char="•"/>
+            </a:pPr>
+            <a:r>
+              <a:rPr lang="en-US" sz="2800" dirty="0">
+                <a:solidFill>
+                  <a:schemeClr val="tx1">
+                    <a:lumMod val="95000"/>
+                    <a:lumOff val="5000"/>
+                  </a:schemeClr>
+                </a:solidFill>
+                <a:latin typeface="DM Sans" pitchFamily="34" charset="0"/>
+                <a:ea typeface="DM Sans" pitchFamily="34" charset="-122"/>
+                <a:cs typeface="DM Sans" pitchFamily="34" charset="-120"/>
+              </a:rPr>
+              <a:t>Health Monitor: polls each remoteEntry.js every 5s, shows latency</a:t>
+            </a:r>
+            <a:endParaRPr lang="en-US" sz="2800" dirty="0">
+              <a:solidFill>
+                <a:schemeClr val="tx1">
+                  <a:lumMod val="95000"/>
+                  <a:lumOff val="5000"/>
+                </a:schemeClr>
+              </a:solidFill>
+            </a:endParaRPr>
+          </a:p>
+          <a:p>
+            <a:pPr marL="285750" indent="-285750">
+              <a:lnSpc>
+                <a:spcPct val="150000"/>
+              </a:lnSpc>
+              <a:buSzPct val="100000"/>
+              <a:buFont typeface="Arial" panose="020B0604020202020204" pitchFamily="34" charset="0"/>
+              <a:buChar char="•"/>
+            </a:pPr>
+            <a:r>
+              <a:rPr lang="en-US" sz="2800" dirty="0">
+                <a:solidFill>
+                  <a:schemeClr val="tx1">
+                    <a:lumMod val="95000"/>
+                    <a:lumOff val="5000"/>
+                  </a:schemeClr>
+                </a:solidFill>
+                <a:latin typeface="DM Sans" pitchFamily="34" charset="0"/>
+                <a:ea typeface="DM Sans" pitchFamily="34" charset="-122"/>
+                <a:cs typeface="DM Sans" pitchFamily="34" charset="-120"/>
+              </a:rPr>
+              <a:t>Kill Switches: simulate remote failure; the rest keeps running</a:t>
+            </a:r>
+            <a:endParaRPr lang="en-US" sz="2800" dirty="0">
+              <a:solidFill>
+                <a:schemeClr val="tx1">
+                  <a:lumMod val="95000"/>
+                  <a:lumOff val="5000"/>
+                </a:schemeClr>
+              </a:solidFill>
+            </a:endParaRPr>
+          </a:p>
+          <a:p>
+            <a:pPr marL="285750" indent="-285750">
+              <a:lnSpc>
+                <a:spcPct val="150000"/>
+              </a:lnSpc>
+              <a:buSzPct val="100000"/>
+              <a:buFont typeface="Arial" panose="020B0604020202020204" pitchFamily="34" charset="0"/>
+              <a:buChar char="•"/>
+            </a:pPr>
+            <a:r>
+              <a:rPr lang="en-US" sz="2800" dirty="0">
+                <a:solidFill>
+                  <a:schemeClr val="tx1">
+                    <a:lumMod val="95000"/>
+                    <a:lumOff val="5000"/>
+                  </a:schemeClr>
+                </a:solidFill>
+                <a:latin typeface="DM Sans" pitchFamily="34" charset="0"/>
+                <a:ea typeface="DM Sans" pitchFamily="34" charset="-122"/>
+                <a:cs typeface="DM Sans" pitchFamily="34" charset="-120"/>
+              </a:rPr>
+              <a:t>A/B Deployment: toggle Stable ↔ Canary ring, per-module versions</a:t>
+            </a:r>
+            <a:endParaRPr lang="en-US" sz="2800" dirty="0">
+              <a:solidFill>
+                <a:schemeClr val="tx1">
+                  <a:lumMod val="95000"/>
+                  <a:lumOff val="5000"/>
+                </a:schemeClr>
+              </a:solidFill>
+            </a:endParaRPr>
+          </a:p>
+          <a:p>
+            <a:pPr marL="285750" indent="-285750">
+              <a:lnSpc>
+                <a:spcPct val="150000"/>
+              </a:lnSpc>
+              <a:buSzPct val="100000"/>
+              <a:buFont typeface="Arial" panose="020B0604020202020204" pitchFamily="34" charset="0"/>
+              <a:buChar char="•"/>
+            </a:pPr>
+            <a:r>
+              <a:rPr lang="en-US" sz="2800" dirty="0">
+                <a:solidFill>
+                  <a:schemeClr val="tx1">
+                    <a:lumMod val="95000"/>
+                    <a:lumOff val="5000"/>
+                  </a:schemeClr>
+                </a:solidFill>
+                <a:latin typeface="DM Sans" pitchFamily="34" charset="0"/>
+                <a:ea typeface="DM Sans" pitchFamily="34" charset="-122"/>
+                <a:cs typeface="DM Sans" pitchFamily="34" charset="-120"/>
+              </a:rPr>
+              <a:t>Theme: CSS variables + localStorage + themeChange event, zero shared imports</a:t>
+            </a:r>
+          </a:p>
+        </p:txBody>
+      </p:sp>
+    </p:spTree>
+    <p:extLst>
+      <p:ext uri="{BB962C8B-B14F-4D97-AF65-F5344CB8AC3E}">
+        <p14:creationId xmlns:p14="http://schemas.microsoft.com/office/powerpoint/2010/main" val="399107473"/>
+      </p:ext>
+    </p:extLst>
+  </p:cSld>
+  <p:clrMapOvr>
+    <a:masterClrMapping/>
+  </p:clrMapOvr>
+</p:sld>
+</file>
+
+<file path=ppt/slides/slide32.xml><?xml version="1.0" encoding="utf-8"?>
+<p:sld xmlns:a="http://schemas.openxmlformats.org/drawingml/2006/main" xmlns:r="http://schemas.openxmlformats.org/officeDocument/2006/relationships" xmlns:p="http://schemas.openxmlformats.org/presentationml/2006/main" show="0">
   <p:cSld name="Slide 10">
     <p:bg>
       <p:bgPr>
@@ -18060,8 +18164,8 @@
 </p:sld>
 </file>
 
-<file path=ppt/slides/slide32.xml><?xml version="1.0" encoding="utf-8"?>
-<p:sld xmlns:a="http://schemas.openxmlformats.org/drawingml/2006/main" xmlns:r="http://schemas.openxmlformats.org/officeDocument/2006/relationships" xmlns:p="http://schemas.openxmlformats.org/presentationml/2006/main">
+<file path=ppt/slides/slide33.xml><?xml version="1.0" encoding="utf-8"?>
+<p:sld xmlns:a="http://schemas.openxmlformats.org/drawingml/2006/main" xmlns:r="http://schemas.openxmlformats.org/officeDocument/2006/relationships" xmlns:p="http://schemas.openxmlformats.org/presentationml/2006/main" show="0">
   <p:cSld>
     <p:bg>
       <p:bgPr>
@@ -18582,7 +18686,7 @@
 </p:sld>
 </file>
 
-<file path=ppt/slides/slide33.xml><?xml version="1.0" encoding="utf-8"?>
+<file path=ppt/slides/slide34.xml><?xml version="1.0" encoding="utf-8"?>
 <p:sld xmlns:a="http://schemas.openxmlformats.org/drawingml/2006/main" xmlns:r="http://schemas.openxmlformats.org/officeDocument/2006/relationships" xmlns:p="http://schemas.openxmlformats.org/presentationml/2006/main">
   <p:cSld>
     <p:bg>
@@ -18757,7 +18861,7 @@
 </p:sld>
 </file>
 
-<file path=ppt/slides/slide34.xml><?xml version="1.0" encoding="utf-8"?>
+<file path=ppt/slides/slide35.xml><?xml version="1.0" encoding="utf-8"?>
 <p:sld xmlns:a="http://schemas.openxmlformats.org/drawingml/2006/main" xmlns:r="http://schemas.openxmlformats.org/officeDocument/2006/relationships" xmlns:p="http://schemas.openxmlformats.org/presentationml/2006/main">
   <p:cSld name="Slide 11">
     <p:bg>
@@ -19991,7 +20095,7 @@
 </p:sld>
 </file>
 
-<file path=ppt/slides/slide35.xml><?xml version="1.0" encoding="utf-8"?>
+<file path=ppt/slides/slide36.xml><?xml version="1.0" encoding="utf-8"?>
 <p:sld xmlns:a="http://schemas.openxmlformats.org/drawingml/2006/main" xmlns:r="http://schemas.openxmlformats.org/officeDocument/2006/relationships" xmlns:p="http://schemas.openxmlformats.org/presentationml/2006/main">
   <p:cSld>
     <p:bg>
@@ -20036,7 +20140,7 @@
         </p:nvSpPr>
         <p:spPr>
           <a:xfrm>
-            <a:off x="530352" y="713232"/>
+            <a:off x="512206" y="0"/>
             <a:ext cx="11109960" cy="777240"/>
           </a:xfrm>
           <a:prstGeom prst="rect">
@@ -20081,7 +20185,7 @@
         </p:nvSpPr>
         <p:spPr>
           <a:xfrm>
-            <a:off x="579262" y="2243193"/>
+            <a:off x="506252" y="1536057"/>
             <a:ext cx="11292840" cy="3270639"/>
           </a:xfrm>
           <a:prstGeom prst="rect">
@@ -20614,7 +20718,7 @@
 </p:sld>
 </file>
 
-<file path=ppt/slides/slide36.xml><?xml version="1.0" encoding="utf-8"?>
+<file path=ppt/slides/slide37.xml><?xml version="1.0" encoding="utf-8"?>
 <p:sld xmlns:a="http://schemas.openxmlformats.org/drawingml/2006/main" xmlns:r="http://schemas.openxmlformats.org/officeDocument/2006/relationships" xmlns:p="http://schemas.openxmlformats.org/presentationml/2006/main">
   <p:cSld>
     <p:bg>
@@ -20841,7 +20945,7 @@
 </p:sld>
 </file>
 
-<file path=ppt/slides/slide37.xml><?xml version="1.0" encoding="utf-8"?>
+<file path=ppt/slides/slide38.xml><?xml version="1.0" encoding="utf-8"?>
 <p:sld xmlns:a="http://schemas.openxmlformats.org/drawingml/2006/main" xmlns:r="http://schemas.openxmlformats.org/officeDocument/2006/relationships" xmlns:p="http://schemas.openxmlformats.org/presentationml/2006/main">
   <p:cSld name="Slide 12">
     <p:bg>
@@ -20874,7 +20978,7 @@
         </p:nvSpPr>
         <p:spPr>
           <a:xfrm>
-            <a:off x="530352" y="713232"/>
+            <a:off x="530352" y="0"/>
             <a:ext cx="11109960" cy="777240"/>
           </a:xfrm>
           <a:prstGeom prst="rect">
@@ -20913,7 +21017,7 @@
         </p:nvSpPr>
         <p:spPr>
           <a:xfrm>
-            <a:off x="548640" y="1691639"/>
+            <a:off x="536448" y="777240"/>
             <a:ext cx="11064240" cy="4741433"/>
           </a:xfrm>
           <a:prstGeom prst="rect">
@@ -21127,7 +21231,7 @@
 </p:sld>
 </file>
 
-<file path=ppt/slides/slide38.xml><?xml version="1.0" encoding="utf-8"?>
+<file path=ppt/slides/slide39.xml><?xml version="1.0" encoding="utf-8"?>
 <p:sld xmlns:a="http://schemas.openxmlformats.org/drawingml/2006/main" xmlns:r="http://schemas.openxmlformats.org/officeDocument/2006/relationships" xmlns:p="http://schemas.openxmlformats.org/presentationml/2006/main">
   <p:cSld>
     <p:bg>
@@ -21172,7 +21276,7 @@
         </p:nvSpPr>
         <p:spPr>
           <a:xfrm>
-            <a:off x="530352" y="713232"/>
+            <a:off x="408432" y="0"/>
             <a:ext cx="11109960" cy="777240"/>
           </a:xfrm>
           <a:prstGeom prst="rect">
@@ -21217,7 +21321,7 @@
         </p:nvSpPr>
         <p:spPr>
           <a:xfrm>
-            <a:off x="222941" y="1645920"/>
+            <a:off x="214234" y="777240"/>
             <a:ext cx="11827659" cy="5030288"/>
           </a:xfrm>
           <a:prstGeom prst="rect">
@@ -22270,7 +22374,74 @@
 </p:sld>
 </file>
 
-<file path=ppt/slides/slide39.xml><?xml version="1.0" encoding="utf-8"?>
+<file path=ppt/slides/slide4.xml><?xml version="1.0" encoding="utf-8"?>
+<p:sld xmlns:a="http://schemas.openxmlformats.org/drawingml/2006/main" xmlns:r="http://schemas.openxmlformats.org/officeDocument/2006/relationships" xmlns:p="http://schemas.openxmlformats.org/presentationml/2006/main">
+  <p:cSld>
+    <p:spTree>
+      <p:nvGrpSpPr>
+        <p:cNvPr id="1" name=""/>
+        <p:cNvGrpSpPr/>
+        <p:nvPr/>
+      </p:nvGrpSpPr>
+      <p:grpSpPr>
+        <a:xfrm>
+          <a:off x="0" y="0"/>
+          <a:ext cx="0" cy="0"/>
+          <a:chOff x="0" y="0"/>
+          <a:chExt cx="0" cy="0"/>
+        </a:xfrm>
+      </p:grpSpPr>
+      <p:sp>
+        <p:nvSpPr>
+          <p:cNvPr id="3" name="TextBox 2">
+            <a:extLst>
+              <a:ext uri="{FF2B5EF4-FFF2-40B4-BE49-F238E27FC236}">
+                <a16:creationId xmlns:a16="http://schemas.microsoft.com/office/drawing/2014/main" id="{6E014679-5AD2-B7E1-FFC9-B9A93814AA10}"/>
+              </a:ext>
+            </a:extLst>
+          </p:cNvPr>
+          <p:cNvSpPr txBox="1"/>
+          <p:nvPr/>
+        </p:nvSpPr>
+        <p:spPr>
+          <a:xfrm>
+            <a:off x="3748972" y="2782669"/>
+            <a:ext cx="5713167" cy="707886"/>
+          </a:xfrm>
+          <a:prstGeom prst="rect">
+            <a:avLst/>
+          </a:prstGeom>
+          <a:noFill/>
+        </p:spPr>
+        <p:txBody>
+          <a:bodyPr wrap="none" rtlCol="0">
+            <a:spAutoFit/>
+          </a:bodyPr>
+          <a:lstStyle/>
+          <a:p>
+            <a:pPr algn="ctr"/>
+            <a:r>
+              <a:rPr lang="en-US" sz="4000" dirty="0"/>
+              <a:t>What are we solving here?</a:t>
+            </a:r>
+            <a:endParaRPr lang="en-GB" sz="4000" dirty="0"/>
+          </a:p>
+        </p:txBody>
+      </p:sp>
+    </p:spTree>
+    <p:extLst>
+      <p:ext uri="{BB962C8B-B14F-4D97-AF65-F5344CB8AC3E}">
+        <p14:creationId xmlns:p14="http://schemas.microsoft.com/office/powerpoint/2010/main" val="683204387"/>
+      </p:ext>
+    </p:extLst>
+  </p:cSld>
+  <p:clrMapOvr>
+    <a:masterClrMapping/>
+  </p:clrMapOvr>
+</p:sld>
+</file>
+
+<file path=ppt/slides/slide40.xml><?xml version="1.0" encoding="utf-8"?>
 <p:sld xmlns:a="http://schemas.openxmlformats.org/drawingml/2006/main" xmlns:r="http://schemas.openxmlformats.org/officeDocument/2006/relationships" xmlns:p="http://schemas.openxmlformats.org/presentationml/2006/main">
   <p:cSld>
     <p:bg>
@@ -22445,74 +22616,7 @@
 </p:sld>
 </file>
 
-<file path=ppt/slides/slide4.xml><?xml version="1.0" encoding="utf-8"?>
-<p:sld xmlns:a="http://schemas.openxmlformats.org/drawingml/2006/main" xmlns:r="http://schemas.openxmlformats.org/officeDocument/2006/relationships" xmlns:p="http://schemas.openxmlformats.org/presentationml/2006/main">
-  <p:cSld>
-    <p:spTree>
-      <p:nvGrpSpPr>
-        <p:cNvPr id="1" name=""/>
-        <p:cNvGrpSpPr/>
-        <p:nvPr/>
-      </p:nvGrpSpPr>
-      <p:grpSpPr>
-        <a:xfrm>
-          <a:off x="0" y="0"/>
-          <a:ext cx="0" cy="0"/>
-          <a:chOff x="0" y="0"/>
-          <a:chExt cx="0" cy="0"/>
-        </a:xfrm>
-      </p:grpSpPr>
-      <p:sp>
-        <p:nvSpPr>
-          <p:cNvPr id="3" name="TextBox 2">
-            <a:extLst>
-              <a:ext uri="{FF2B5EF4-FFF2-40B4-BE49-F238E27FC236}">
-                <a16:creationId xmlns:a16="http://schemas.microsoft.com/office/drawing/2014/main" id="{6E014679-5AD2-B7E1-FFC9-B9A93814AA10}"/>
-              </a:ext>
-            </a:extLst>
-          </p:cNvPr>
-          <p:cNvSpPr txBox="1"/>
-          <p:nvPr/>
-        </p:nvSpPr>
-        <p:spPr>
-          <a:xfrm>
-            <a:off x="3748972" y="2782669"/>
-            <a:ext cx="5713167" cy="707886"/>
-          </a:xfrm>
-          <a:prstGeom prst="rect">
-            <a:avLst/>
-          </a:prstGeom>
-          <a:noFill/>
-        </p:spPr>
-        <p:txBody>
-          <a:bodyPr wrap="none" rtlCol="0">
-            <a:spAutoFit/>
-          </a:bodyPr>
-          <a:lstStyle/>
-          <a:p>
-            <a:pPr algn="ctr"/>
-            <a:r>
-              <a:rPr lang="en-US" sz="4000" dirty="0"/>
-              <a:t>What are we solving here?</a:t>
-            </a:r>
-            <a:endParaRPr lang="en-GB" sz="4000" dirty="0"/>
-          </a:p>
-        </p:txBody>
-      </p:sp>
-    </p:spTree>
-    <p:extLst>
-      <p:ext uri="{BB962C8B-B14F-4D97-AF65-F5344CB8AC3E}">
-        <p14:creationId xmlns:p14="http://schemas.microsoft.com/office/powerpoint/2010/main" val="683204387"/>
-      </p:ext>
-    </p:extLst>
-  </p:cSld>
-  <p:clrMapOvr>
-    <a:masterClrMapping/>
-  </p:clrMapOvr>
-</p:sld>
-</file>
-
-<file path=ppt/slides/slide40.xml><?xml version="1.0" encoding="utf-8"?>
+<file path=ppt/slides/slide41.xml><?xml version="1.0" encoding="utf-8"?>
 <p:sld xmlns:a="http://schemas.openxmlformats.org/drawingml/2006/main" xmlns:r="http://schemas.openxmlformats.org/officeDocument/2006/relationships" xmlns:p="http://schemas.openxmlformats.org/presentationml/2006/main">
   <p:cSld name="Slide 13">
     <p:bg>
@@ -22545,7 +22649,7 @@
         </p:nvSpPr>
         <p:spPr>
           <a:xfrm>
-            <a:off x="530352" y="713232"/>
+            <a:off x="245187" y="35778"/>
             <a:ext cx="11109960" cy="777240"/>
           </a:xfrm>
           <a:prstGeom prst="rect">
@@ -22590,7 +22694,7 @@
         </p:nvSpPr>
         <p:spPr>
           <a:xfrm>
-            <a:off x="245187" y="1951926"/>
+            <a:off x="268090" y="903414"/>
             <a:ext cx="11920735" cy="4481676"/>
           </a:xfrm>
           <a:prstGeom prst="rect">
@@ -24124,7 +24228,7 @@
 </p:sld>
 </file>
 
-<file path=ppt/slides/slide41.xml><?xml version="1.0" encoding="utf-8"?>
+<file path=ppt/slides/slide42.xml><?xml version="1.0" encoding="utf-8"?>
 <p:sld xmlns:a="http://schemas.openxmlformats.org/drawingml/2006/main" xmlns:r="http://schemas.openxmlformats.org/officeDocument/2006/relationships" xmlns:p="http://schemas.openxmlformats.org/presentationml/2006/main">
   <p:cSld>
     <p:spTree>
@@ -25108,1395 +25212,7 @@
 </p:sld>
 </file>
 
-<file path=ppt/slides/slide42.xml><?xml version="1.0" encoding="utf-8"?>
-<p:sld xmlns:a="http://schemas.openxmlformats.org/drawingml/2006/main" xmlns:r="http://schemas.openxmlformats.org/officeDocument/2006/relationships" xmlns:p="http://schemas.openxmlformats.org/presentationml/2006/main">
-  <p:cSld name="Slide 14">
-    <p:bg>
-      <p:bgPr>
-        <a:solidFill>
-          <a:srgbClr val="0C0C0C"/>
-        </a:solidFill>
-        <a:effectLst/>
-      </p:bgPr>
-    </p:bg>
-    <p:spTree>
-      <p:nvGrpSpPr>
-        <p:cNvPr id="1" name=""/>
-        <p:cNvGrpSpPr/>
-        <p:nvPr/>
-      </p:nvGrpSpPr>
-      <p:grpSpPr>
-        <a:xfrm>
-          <a:off x="0" y="0"/>
-          <a:ext cx="0" cy="0"/>
-          <a:chOff x="0" y="0"/>
-          <a:chExt cx="0" cy="0"/>
-        </a:xfrm>
-      </p:grpSpPr>
-      <p:sp>
-        <p:nvSpPr>
-          <p:cNvPr id="4" name="Text 2"/>
-          <p:cNvSpPr/>
-          <p:nvPr/>
-        </p:nvSpPr>
-        <p:spPr>
-          <a:xfrm>
-            <a:off x="539432" y="0"/>
-            <a:ext cx="11109960" cy="777240"/>
-          </a:xfrm>
-          <a:prstGeom prst="rect">
-            <a:avLst/>
-          </a:prstGeom>
-          <a:noFill/>
-          <a:ln/>
-        </p:spPr>
-        <p:txBody>
-          <a:bodyPr wrap="square" rtlCol="0" anchor="ctr"/>
-          <a:lstStyle/>
-          <a:p>
-            <a:pPr marL="0" indent="0">
-              <a:buNone/>
-            </a:pPr>
-            <a:r>
-              <a:rPr lang="en-US" sz="3300" i="1" dirty="0">
-                <a:solidFill>
-                  <a:srgbClr val="FAFAF9"/>
-                </a:solidFill>
-                <a:latin typeface="Instrument Serif" pitchFamily="34" charset="0"/>
-                <a:ea typeface="Instrument Serif" pitchFamily="34" charset="-122"/>
-                <a:cs typeface="Instrument Serif" pitchFamily="34" charset="-120"/>
-              </a:rPr>
-              <a:t>Test federated components in isolation — no servers</a:t>
-            </a:r>
-            <a:endParaRPr lang="en-US" sz="3300" dirty="0"/>
-          </a:p>
-        </p:txBody>
-      </p:sp>
-      <p:sp>
-        <p:nvSpPr>
-          <p:cNvPr id="6" name="TextBox 5">
-            <a:extLst>
-              <a:ext uri="{FF2B5EF4-FFF2-40B4-BE49-F238E27FC236}">
-                <a16:creationId xmlns:a16="http://schemas.microsoft.com/office/drawing/2014/main" id="{7930AE88-2656-09B2-3213-D304AD16B128}"/>
-              </a:ext>
-            </a:extLst>
-          </p:cNvPr>
-          <p:cNvSpPr txBox="1"/>
-          <p:nvPr/>
-        </p:nvSpPr>
-        <p:spPr>
-          <a:xfrm>
-            <a:off x="501644" y="2200939"/>
-            <a:ext cx="11109960" cy="3732304"/>
-          </a:xfrm>
-          <a:prstGeom prst="rect">
-            <a:avLst/>
-          </a:prstGeom>
-          <a:noFill/>
-        </p:spPr>
-        <p:txBody>
-          <a:bodyPr wrap="square">
-            <a:spAutoFit/>
-          </a:bodyPr>
-          <a:lstStyle/>
-          <a:p>
-            <a:pPr>
-              <a:lnSpc>
-                <a:spcPct val="150000"/>
-              </a:lnSpc>
-              <a:buNone/>
-            </a:pPr>
-            <a:r>
-              <a:rPr lang="en-US" sz="2000" b="0" dirty="0">
-                <a:solidFill>
-                  <a:srgbClr val="8B949E"/>
-                </a:solidFill>
-                <a:effectLst/>
-                <a:latin typeface="Cascadia Code" panose="020B0609020000020004" pitchFamily="49" charset="0"/>
-              </a:rPr>
-              <a:t>// </a:t>
-            </a:r>
-            <a:r>
-              <a:rPr lang="en-US" sz="2000" b="0" dirty="0" err="1">
-                <a:solidFill>
-                  <a:srgbClr val="8B949E"/>
-                </a:solidFill>
-                <a:effectLst/>
-                <a:latin typeface="Cascadia Code" panose="020B0609020000020004" pitchFamily="49" charset="0"/>
-              </a:rPr>
-              <a:t>vitest.config.ts</a:t>
-            </a:r>
-            <a:r>
-              <a:rPr lang="en-US" sz="2000" b="0" dirty="0">
-                <a:solidFill>
-                  <a:srgbClr val="8B949E"/>
-                </a:solidFill>
-                <a:effectLst/>
-                <a:latin typeface="Cascadia Code" panose="020B0609020000020004" pitchFamily="49" charset="0"/>
-              </a:rPr>
-              <a:t> — resolve MF imports to source files</a:t>
-            </a:r>
-            <a:endParaRPr lang="en-US" sz="2000" b="0" dirty="0">
-              <a:solidFill>
-                <a:srgbClr val="BBBEBF"/>
-              </a:solidFill>
-              <a:effectLst/>
-              <a:latin typeface="Cascadia Code" panose="020B0609020000020004" pitchFamily="49" charset="0"/>
-            </a:endParaRPr>
-          </a:p>
-          <a:p>
-            <a:pPr>
-              <a:lnSpc>
-                <a:spcPct val="150000"/>
-              </a:lnSpc>
-              <a:buNone/>
-            </a:pPr>
-            <a:r>
-              <a:rPr lang="en-US" sz="2000" b="0" dirty="0">
-                <a:solidFill>
-                  <a:srgbClr val="C8C8C8"/>
-                </a:solidFill>
-                <a:effectLst/>
-                <a:latin typeface="Cascadia Code" panose="020B0609020000020004" pitchFamily="49" charset="0"/>
-              </a:rPr>
-              <a:t>resolve</a:t>
-            </a:r>
-            <a:r>
-              <a:rPr lang="en-US" sz="2000" b="0" dirty="0">
-                <a:solidFill>
-                  <a:srgbClr val="BBBEBF"/>
-                </a:solidFill>
-                <a:effectLst/>
-                <a:latin typeface="Cascadia Code" panose="020B0609020000020004" pitchFamily="49" charset="0"/>
-              </a:rPr>
-              <a:t>: </a:t>
-            </a:r>
-            <a:r>
-              <a:rPr lang="en-US" sz="2000" b="0" dirty="0">
-                <a:solidFill>
-                  <a:srgbClr val="C9D1D9"/>
-                </a:solidFill>
-                <a:effectLst/>
-                <a:latin typeface="Cascadia Code" panose="020B0609020000020004" pitchFamily="49" charset="0"/>
-              </a:rPr>
-              <a:t>{</a:t>
-            </a:r>
-            <a:endParaRPr lang="en-US" sz="2000" b="0" dirty="0">
-              <a:solidFill>
-                <a:srgbClr val="BBBEBF"/>
-              </a:solidFill>
-              <a:effectLst/>
-              <a:latin typeface="Cascadia Code" panose="020B0609020000020004" pitchFamily="49" charset="0"/>
-            </a:endParaRPr>
-          </a:p>
-          <a:p>
-            <a:pPr>
-              <a:lnSpc>
-                <a:spcPct val="150000"/>
-              </a:lnSpc>
-              <a:buNone/>
-            </a:pPr>
-            <a:r>
-              <a:rPr lang="en-US" sz="2000" b="0" dirty="0">
-                <a:solidFill>
-                  <a:srgbClr val="C9D1D9"/>
-                </a:solidFill>
-                <a:effectLst/>
-                <a:latin typeface="Cascadia Code" panose="020B0609020000020004" pitchFamily="49" charset="0"/>
-              </a:rPr>
-              <a:t>  </a:t>
-            </a:r>
-            <a:r>
-              <a:rPr lang="en-US" sz="2000" b="0" dirty="0">
-                <a:solidFill>
-                  <a:srgbClr val="C8C8C8"/>
-                </a:solidFill>
-                <a:effectLst/>
-                <a:latin typeface="Cascadia Code" panose="020B0609020000020004" pitchFamily="49" charset="0"/>
-              </a:rPr>
-              <a:t>alias</a:t>
-            </a:r>
-            <a:r>
-              <a:rPr lang="en-US" sz="2000" b="0" dirty="0">
-                <a:solidFill>
-                  <a:srgbClr val="C9D1D9"/>
-                </a:solidFill>
-                <a:effectLst/>
-                <a:latin typeface="Cascadia Code" panose="020B0609020000020004" pitchFamily="49" charset="0"/>
-              </a:rPr>
-              <a:t>: {</a:t>
-            </a:r>
-            <a:endParaRPr lang="en-US" sz="2000" b="0" dirty="0">
-              <a:solidFill>
-                <a:srgbClr val="BBBEBF"/>
-              </a:solidFill>
-              <a:effectLst/>
-              <a:latin typeface="Cascadia Code" panose="020B0609020000020004" pitchFamily="49" charset="0"/>
-            </a:endParaRPr>
-          </a:p>
-          <a:p>
-            <a:pPr>
-              <a:lnSpc>
-                <a:spcPct val="150000"/>
-              </a:lnSpc>
-              <a:buNone/>
-            </a:pPr>
-            <a:r>
-              <a:rPr lang="en-US" sz="2000" b="0" dirty="0">
-                <a:solidFill>
-                  <a:srgbClr val="C9D1D9"/>
-                </a:solidFill>
-                <a:effectLst/>
-                <a:latin typeface="Cascadia Code" panose="020B0609020000020004" pitchFamily="49" charset="0"/>
-              </a:rPr>
-              <a:t>    </a:t>
-            </a:r>
-            <a:r>
-              <a:rPr lang="en-US" sz="2000" b="0" dirty="0">
-                <a:solidFill>
-                  <a:srgbClr val="A5D6FF"/>
-                </a:solidFill>
-                <a:effectLst/>
-                <a:latin typeface="Cascadia Code" panose="020B0609020000020004" pitchFamily="49" charset="0"/>
-              </a:rPr>
-              <a:t>"records/</a:t>
-            </a:r>
-            <a:r>
-              <a:rPr lang="en-US" sz="2000" b="0" dirty="0" err="1">
-                <a:solidFill>
-                  <a:srgbClr val="A5D6FF"/>
-                </a:solidFill>
-                <a:effectLst/>
-                <a:latin typeface="Cascadia Code" panose="020B0609020000020004" pitchFamily="49" charset="0"/>
-              </a:rPr>
-              <a:t>MedicalRecords</a:t>
-            </a:r>
-            <a:r>
-              <a:rPr lang="en-US" sz="2000" b="0" dirty="0">
-                <a:solidFill>
-                  <a:srgbClr val="A5D6FF"/>
-                </a:solidFill>
-                <a:effectLst/>
-                <a:latin typeface="Cascadia Code" panose="020B0609020000020004" pitchFamily="49" charset="0"/>
-              </a:rPr>
-              <a:t>"</a:t>
-            </a:r>
-            <a:r>
-              <a:rPr lang="en-US" sz="2000" b="0" dirty="0">
-                <a:solidFill>
-                  <a:srgbClr val="C9D1D9"/>
-                </a:solidFill>
-                <a:effectLst/>
-                <a:latin typeface="Cascadia Code" panose="020B0609020000020004" pitchFamily="49" charset="0"/>
-              </a:rPr>
-              <a:t>:</a:t>
-            </a:r>
-            <a:endParaRPr lang="en-US" sz="2000" b="0" dirty="0">
-              <a:solidFill>
-                <a:srgbClr val="BBBEBF"/>
-              </a:solidFill>
-              <a:effectLst/>
-              <a:latin typeface="Cascadia Code" panose="020B0609020000020004" pitchFamily="49" charset="0"/>
-            </a:endParaRPr>
-          </a:p>
-          <a:p>
-            <a:pPr>
-              <a:lnSpc>
-                <a:spcPct val="150000"/>
-              </a:lnSpc>
-              <a:buNone/>
-            </a:pPr>
-            <a:r>
-              <a:rPr lang="en-US" sz="2000" b="0" dirty="0">
-                <a:solidFill>
-                  <a:srgbClr val="C9D1D9"/>
-                </a:solidFill>
-                <a:effectLst/>
-                <a:latin typeface="Cascadia Code" panose="020B0609020000020004" pitchFamily="49" charset="0"/>
-              </a:rPr>
-              <a:t>      </a:t>
-            </a:r>
-            <a:r>
-              <a:rPr lang="en-US" sz="2000" b="0" dirty="0" err="1">
-                <a:solidFill>
-                  <a:srgbClr val="C9D1D9"/>
-                </a:solidFill>
-                <a:effectLst/>
-                <a:latin typeface="Cascadia Code" panose="020B0609020000020004" pitchFamily="49" charset="0"/>
-              </a:rPr>
-              <a:t>path.</a:t>
-            </a:r>
-            <a:r>
-              <a:rPr lang="en-US" sz="2000" b="0" dirty="0" err="1">
-                <a:solidFill>
-                  <a:srgbClr val="D2A8FF"/>
-                </a:solidFill>
-                <a:effectLst/>
-                <a:latin typeface="Cascadia Code" panose="020B0609020000020004" pitchFamily="49" charset="0"/>
-              </a:rPr>
-              <a:t>resolve</a:t>
-            </a:r>
-            <a:r>
-              <a:rPr lang="en-US" sz="2000" b="0" dirty="0">
-                <a:solidFill>
-                  <a:srgbClr val="C9D1D9"/>
-                </a:solidFill>
-                <a:effectLst/>
-                <a:latin typeface="Cascadia Code" panose="020B0609020000020004" pitchFamily="49" charset="0"/>
-              </a:rPr>
-              <a:t>(__</a:t>
-            </a:r>
-            <a:r>
-              <a:rPr lang="en-US" sz="2000" b="0" dirty="0" err="1">
-                <a:solidFill>
-                  <a:srgbClr val="C9D1D9"/>
-                </a:solidFill>
-                <a:effectLst/>
-                <a:latin typeface="Cascadia Code" panose="020B0609020000020004" pitchFamily="49" charset="0"/>
-              </a:rPr>
-              <a:t>dirname</a:t>
-            </a:r>
-            <a:r>
-              <a:rPr lang="en-US" sz="2000" b="0" dirty="0">
-                <a:solidFill>
-                  <a:srgbClr val="C9D1D9"/>
-                </a:solidFill>
-                <a:effectLst/>
-                <a:latin typeface="Cascadia Code" panose="020B0609020000020004" pitchFamily="49" charset="0"/>
-              </a:rPr>
-              <a:t>, </a:t>
-            </a:r>
-            <a:r>
-              <a:rPr lang="en-US" sz="2000" b="0" dirty="0">
-                <a:solidFill>
-                  <a:srgbClr val="A5D6FF"/>
-                </a:solidFill>
-                <a:effectLst/>
-                <a:latin typeface="Cascadia Code" panose="020B0609020000020004" pitchFamily="49" charset="0"/>
-              </a:rPr>
-              <a:t>"packages/records/</a:t>
-            </a:r>
-            <a:r>
-              <a:rPr lang="en-US" sz="2000" b="0" dirty="0" err="1">
-                <a:solidFill>
-                  <a:srgbClr val="A5D6FF"/>
-                </a:solidFill>
-                <a:effectLst/>
-                <a:latin typeface="Cascadia Code" panose="020B0609020000020004" pitchFamily="49" charset="0"/>
-              </a:rPr>
-              <a:t>src</a:t>
-            </a:r>
-            <a:r>
-              <a:rPr lang="en-US" sz="2000" b="0" dirty="0">
-                <a:solidFill>
-                  <a:srgbClr val="A5D6FF"/>
-                </a:solidFill>
-                <a:effectLst/>
-                <a:latin typeface="Cascadia Code" panose="020B0609020000020004" pitchFamily="49" charset="0"/>
-              </a:rPr>
-              <a:t>/</a:t>
-            </a:r>
-            <a:r>
-              <a:rPr lang="en-US" sz="2000" b="0" dirty="0" err="1">
-                <a:solidFill>
-                  <a:srgbClr val="A5D6FF"/>
-                </a:solidFill>
-                <a:effectLst/>
-                <a:latin typeface="Cascadia Code" panose="020B0609020000020004" pitchFamily="49" charset="0"/>
-              </a:rPr>
-              <a:t>MedicalRecords.tsx</a:t>
-            </a:r>
-            <a:r>
-              <a:rPr lang="en-US" sz="2000" b="0" dirty="0">
-                <a:solidFill>
-                  <a:srgbClr val="A5D6FF"/>
-                </a:solidFill>
-                <a:effectLst/>
-                <a:latin typeface="Cascadia Code" panose="020B0609020000020004" pitchFamily="49" charset="0"/>
-              </a:rPr>
-              <a:t>"</a:t>
-            </a:r>
-            <a:r>
-              <a:rPr lang="en-US" sz="2000" b="0" dirty="0">
-                <a:solidFill>
-                  <a:srgbClr val="C9D1D9"/>
-                </a:solidFill>
-                <a:effectLst/>
-                <a:latin typeface="Cascadia Code" panose="020B0609020000020004" pitchFamily="49" charset="0"/>
-              </a:rPr>
-              <a:t>),</a:t>
-            </a:r>
-            <a:endParaRPr lang="en-US" sz="2000" b="0" dirty="0">
-              <a:solidFill>
-                <a:srgbClr val="BBBEBF"/>
-              </a:solidFill>
-              <a:effectLst/>
-              <a:latin typeface="Cascadia Code" panose="020B0609020000020004" pitchFamily="49" charset="0"/>
-            </a:endParaRPr>
-          </a:p>
-          <a:p>
-            <a:pPr>
-              <a:lnSpc>
-                <a:spcPct val="150000"/>
-              </a:lnSpc>
-              <a:buNone/>
-            </a:pPr>
-            <a:r>
-              <a:rPr lang="en-US" sz="2000" b="0" dirty="0">
-                <a:solidFill>
-                  <a:srgbClr val="C9D1D9"/>
-                </a:solidFill>
-                <a:effectLst/>
-                <a:latin typeface="Cascadia Code" panose="020B0609020000020004" pitchFamily="49" charset="0"/>
-              </a:rPr>
-              <a:t>    </a:t>
-            </a:r>
-            <a:r>
-              <a:rPr lang="en-US" sz="2000" b="0" dirty="0">
-                <a:solidFill>
-                  <a:srgbClr val="8B949E"/>
-                </a:solidFill>
-                <a:effectLst/>
-                <a:latin typeface="Cascadia Code" panose="020B0609020000020004" pitchFamily="49" charset="0"/>
-              </a:rPr>
-              <a:t>// home/Home, prescriptions/…, analytics/… same pattern</a:t>
-            </a:r>
-            <a:endParaRPr lang="en-US" sz="2000" b="0" dirty="0">
-              <a:solidFill>
-                <a:srgbClr val="BBBEBF"/>
-              </a:solidFill>
-              <a:effectLst/>
-              <a:latin typeface="Cascadia Code" panose="020B0609020000020004" pitchFamily="49" charset="0"/>
-            </a:endParaRPr>
-          </a:p>
-          <a:p>
-            <a:pPr>
-              <a:lnSpc>
-                <a:spcPct val="150000"/>
-              </a:lnSpc>
-              <a:buNone/>
-            </a:pPr>
-            <a:r>
-              <a:rPr lang="en-US" sz="2000" b="0" dirty="0">
-                <a:solidFill>
-                  <a:srgbClr val="C9D1D9"/>
-                </a:solidFill>
-                <a:effectLst/>
-                <a:latin typeface="Cascadia Code" panose="020B0609020000020004" pitchFamily="49" charset="0"/>
-              </a:rPr>
-              <a:t>  },</a:t>
-            </a:r>
-            <a:endParaRPr lang="en-US" sz="2000" b="0" dirty="0">
-              <a:solidFill>
-                <a:srgbClr val="BBBEBF"/>
-              </a:solidFill>
-              <a:effectLst/>
-              <a:latin typeface="Cascadia Code" panose="020B0609020000020004" pitchFamily="49" charset="0"/>
-            </a:endParaRPr>
-          </a:p>
-          <a:p>
-            <a:pPr>
-              <a:lnSpc>
-                <a:spcPct val="150000"/>
-              </a:lnSpc>
-              <a:buNone/>
-            </a:pPr>
-            <a:r>
-              <a:rPr lang="en-US" sz="2000" b="0" dirty="0">
-                <a:solidFill>
-                  <a:srgbClr val="C9D1D9"/>
-                </a:solidFill>
-                <a:effectLst/>
-                <a:latin typeface="Cascadia Code" panose="020B0609020000020004" pitchFamily="49" charset="0"/>
-              </a:rPr>
-              <a:t>}</a:t>
-            </a:r>
-            <a:r>
-              <a:rPr lang="en-US" sz="2000" b="0" dirty="0">
-                <a:solidFill>
-                  <a:srgbClr val="BBBEBF"/>
-                </a:solidFill>
-                <a:effectLst/>
-                <a:latin typeface="Cascadia Code" panose="020B0609020000020004" pitchFamily="49" charset="0"/>
-              </a:rPr>
-              <a:t>,</a:t>
-            </a:r>
-          </a:p>
-        </p:txBody>
-      </p:sp>
-    </p:spTree>
-  </p:cSld>
-  <p:clrMapOvr>
-    <a:masterClrMapping/>
-  </p:clrMapOvr>
-</p:sld>
-</file>
-
 <file path=ppt/slides/slide43.xml><?xml version="1.0" encoding="utf-8"?>
-<p:sld xmlns:a="http://schemas.openxmlformats.org/drawingml/2006/main" xmlns:r="http://schemas.openxmlformats.org/officeDocument/2006/relationships" xmlns:p="http://schemas.openxmlformats.org/presentationml/2006/main">
-  <p:cSld>
-    <p:bg>
-      <p:bgPr>
-        <a:solidFill>
-          <a:srgbClr val="0C0C0C"/>
-        </a:solidFill>
-        <a:effectLst/>
-      </p:bgPr>
-    </p:bg>
-    <p:spTree>
-      <p:nvGrpSpPr>
-        <p:cNvPr id="1" name="">
-          <a:extLst>
-            <a:ext uri="{FF2B5EF4-FFF2-40B4-BE49-F238E27FC236}">
-              <a16:creationId xmlns:a16="http://schemas.microsoft.com/office/drawing/2014/main" id="{59762A32-EF45-7045-4289-16C8D887CF33}"/>
-            </a:ext>
-          </a:extLst>
-        </p:cNvPr>
-        <p:cNvGrpSpPr/>
-        <p:nvPr/>
-      </p:nvGrpSpPr>
-      <p:grpSpPr>
-        <a:xfrm>
-          <a:off x="0" y="0"/>
-          <a:ext cx="0" cy="0"/>
-          <a:chOff x="0" y="0"/>
-          <a:chExt cx="0" cy="0"/>
-        </a:xfrm>
-      </p:grpSpPr>
-      <p:sp>
-        <p:nvSpPr>
-          <p:cNvPr id="4" name="Text 2">
-            <a:extLst>
-              <a:ext uri="{FF2B5EF4-FFF2-40B4-BE49-F238E27FC236}">
-                <a16:creationId xmlns:a16="http://schemas.microsoft.com/office/drawing/2014/main" id="{315B125C-153E-4C5E-309A-D4E9F04CB5CE}"/>
-              </a:ext>
-            </a:extLst>
-          </p:cNvPr>
-          <p:cNvSpPr/>
-          <p:nvPr/>
-        </p:nvSpPr>
-        <p:spPr>
-          <a:xfrm>
-            <a:off x="548639" y="176022"/>
-            <a:ext cx="11109960" cy="777240"/>
-          </a:xfrm>
-          <a:prstGeom prst="rect">
-            <a:avLst/>
-          </a:prstGeom>
-          <a:noFill/>
-          <a:ln/>
-        </p:spPr>
-        <p:txBody>
-          <a:bodyPr wrap="square" rtlCol="0" anchor="ctr"/>
-          <a:lstStyle/>
-          <a:p>
-            <a:pPr marL="0" indent="0">
-              <a:buNone/>
-            </a:pPr>
-            <a:r>
-              <a:rPr lang="en-US" sz="3300" i="1" dirty="0">
-                <a:solidFill>
-                  <a:srgbClr val="FAFAF9"/>
-                </a:solidFill>
-                <a:latin typeface="Instrument Serif" pitchFamily="34" charset="0"/>
-                <a:ea typeface="Instrument Serif" pitchFamily="34" charset="-122"/>
-                <a:cs typeface="Instrument Serif" pitchFamily="34" charset="-120"/>
-              </a:rPr>
-              <a:t>Test federated components in isolation — no servers</a:t>
-            </a:r>
-            <a:endParaRPr lang="en-US" sz="3300" dirty="0"/>
-          </a:p>
-        </p:txBody>
-      </p:sp>
-      <p:sp>
-        <p:nvSpPr>
-          <p:cNvPr id="6" name="TextBox 5">
-            <a:extLst>
-              <a:ext uri="{FF2B5EF4-FFF2-40B4-BE49-F238E27FC236}">
-                <a16:creationId xmlns:a16="http://schemas.microsoft.com/office/drawing/2014/main" id="{D27A1DC3-BA45-4CEA-062D-0081ED20440A}"/>
-              </a:ext>
-            </a:extLst>
-          </p:cNvPr>
-          <p:cNvSpPr txBox="1"/>
-          <p:nvPr/>
-        </p:nvSpPr>
-        <p:spPr>
-          <a:xfrm>
-            <a:off x="548641" y="953262"/>
-            <a:ext cx="10092690" cy="4193969"/>
-          </a:xfrm>
-          <a:prstGeom prst="rect">
-            <a:avLst/>
-          </a:prstGeom>
-          <a:noFill/>
-        </p:spPr>
-        <p:txBody>
-          <a:bodyPr wrap="square">
-            <a:spAutoFit/>
-          </a:bodyPr>
-          <a:lstStyle/>
-          <a:p>
-            <a:pPr>
-              <a:lnSpc>
-                <a:spcPct val="150000"/>
-              </a:lnSpc>
-              <a:buNone/>
-            </a:pPr>
-            <a:r>
-              <a:rPr lang="en-US" sz="2000" b="0" dirty="0">
-                <a:solidFill>
-                  <a:srgbClr val="D2A8FF"/>
-                </a:solidFill>
-                <a:effectLst/>
-                <a:latin typeface="Cascadia Code" panose="020B0609020000020004" pitchFamily="49" charset="0"/>
-              </a:rPr>
-              <a:t>it</a:t>
-            </a:r>
-            <a:r>
-              <a:rPr lang="en-US" sz="2000" b="0" dirty="0">
-                <a:solidFill>
-                  <a:srgbClr val="BBBEBF"/>
-                </a:solidFill>
-                <a:effectLst/>
-                <a:latin typeface="Cascadia Code" panose="020B0609020000020004" pitchFamily="49" charset="0"/>
-              </a:rPr>
-              <a:t>(</a:t>
-            </a:r>
-            <a:r>
-              <a:rPr lang="en-US" sz="2000" b="0" dirty="0">
-                <a:solidFill>
-                  <a:srgbClr val="A5D6FF"/>
-                </a:solidFill>
-                <a:effectLst/>
-                <a:latin typeface="Cascadia Code" panose="020B0609020000020004" pitchFamily="49" charset="0"/>
-              </a:rPr>
-              <a:t>"dispatches </a:t>
-            </a:r>
-            <a:r>
-              <a:rPr lang="en-US" sz="2000" b="0" dirty="0" err="1">
-                <a:solidFill>
-                  <a:srgbClr val="A5D6FF"/>
-                </a:solidFill>
-                <a:effectLst/>
-                <a:latin typeface="Cascadia Code" panose="020B0609020000020004" pitchFamily="49" charset="0"/>
-              </a:rPr>
-              <a:t>addPrescription</a:t>
-            </a:r>
-            <a:r>
-              <a:rPr lang="en-US" sz="2000" b="0" dirty="0">
-                <a:solidFill>
-                  <a:srgbClr val="A5D6FF"/>
-                </a:solidFill>
-                <a:effectLst/>
-                <a:latin typeface="Cascadia Code" panose="020B0609020000020004" pitchFamily="49" charset="0"/>
-              </a:rPr>
-              <a:t> event on Add click"</a:t>
-            </a:r>
-            <a:r>
-              <a:rPr lang="en-US" sz="2000" b="0" dirty="0">
-                <a:solidFill>
-                  <a:srgbClr val="BBBEBF"/>
-                </a:solidFill>
-                <a:effectLst/>
-                <a:latin typeface="Cascadia Code" panose="020B0609020000020004" pitchFamily="49" charset="0"/>
-              </a:rPr>
-              <a:t>, </a:t>
-            </a:r>
-            <a:r>
-              <a:rPr lang="en-US" sz="2000" b="0" dirty="0">
-                <a:solidFill>
-                  <a:srgbClr val="569CD6"/>
-                </a:solidFill>
-                <a:effectLst/>
-                <a:latin typeface="Cascadia Code" panose="020B0609020000020004" pitchFamily="49" charset="0"/>
-              </a:rPr>
-              <a:t>async</a:t>
-            </a:r>
-            <a:r>
-              <a:rPr lang="en-US" sz="2000" b="0" dirty="0">
-                <a:solidFill>
-                  <a:srgbClr val="BBBEBF"/>
-                </a:solidFill>
-                <a:effectLst/>
-                <a:latin typeface="Cascadia Code" panose="020B0609020000020004" pitchFamily="49" charset="0"/>
-              </a:rPr>
-              <a:t> () </a:t>
-            </a:r>
-            <a:r>
-              <a:rPr lang="en-US" sz="2000" b="0" dirty="0">
-                <a:solidFill>
-                  <a:srgbClr val="FF7B72"/>
-                </a:solidFill>
-                <a:effectLst/>
-                <a:latin typeface="Cascadia Code" panose="020B0609020000020004" pitchFamily="49" charset="0"/>
-              </a:rPr>
-              <a:t>=&gt;</a:t>
-            </a:r>
-            <a:r>
-              <a:rPr lang="en-US" sz="2000" b="0" dirty="0">
-                <a:solidFill>
-                  <a:srgbClr val="BBBEBF"/>
-                </a:solidFill>
-                <a:effectLst/>
-                <a:latin typeface="Cascadia Code" panose="020B0609020000020004" pitchFamily="49" charset="0"/>
-              </a:rPr>
-              <a:t> </a:t>
-            </a:r>
-            <a:r>
-              <a:rPr lang="en-US" sz="2000" b="0" dirty="0">
-                <a:solidFill>
-                  <a:srgbClr val="C9D1D9"/>
-                </a:solidFill>
-                <a:effectLst/>
-                <a:latin typeface="Cascadia Code" panose="020B0609020000020004" pitchFamily="49" charset="0"/>
-              </a:rPr>
-              <a:t>{</a:t>
-            </a:r>
-            <a:endParaRPr lang="en-US" sz="2000" b="0" dirty="0">
-              <a:solidFill>
-                <a:srgbClr val="BBBEBF"/>
-              </a:solidFill>
-              <a:effectLst/>
-              <a:latin typeface="Cascadia Code" panose="020B0609020000020004" pitchFamily="49" charset="0"/>
-            </a:endParaRPr>
-          </a:p>
-          <a:p>
-            <a:pPr>
-              <a:lnSpc>
-                <a:spcPct val="150000"/>
-              </a:lnSpc>
-              <a:buNone/>
-            </a:pPr>
-            <a:r>
-              <a:rPr lang="en-US" sz="2000" b="0" dirty="0">
-                <a:solidFill>
-                  <a:srgbClr val="C9D1D9"/>
-                </a:solidFill>
-                <a:effectLst/>
-                <a:latin typeface="Cascadia Code" panose="020B0609020000020004" pitchFamily="49" charset="0"/>
-              </a:rPr>
-              <a:t>  </a:t>
-            </a:r>
-            <a:r>
-              <a:rPr lang="en-US" sz="2000" b="0" dirty="0">
-                <a:solidFill>
-                  <a:srgbClr val="FF7B72"/>
-                </a:solidFill>
-                <a:effectLst/>
-                <a:latin typeface="Cascadia Code" panose="020B0609020000020004" pitchFamily="49" charset="0"/>
-              </a:rPr>
-              <a:t>const</a:t>
-            </a:r>
-            <a:r>
-              <a:rPr lang="en-US" sz="2000" b="0" dirty="0">
-                <a:solidFill>
-                  <a:srgbClr val="C9D1D9"/>
-                </a:solidFill>
-                <a:effectLst/>
-                <a:latin typeface="Cascadia Code" panose="020B0609020000020004" pitchFamily="49" charset="0"/>
-              </a:rPr>
-              <a:t> </a:t>
-            </a:r>
-            <a:r>
-              <a:rPr lang="en-US" sz="2000" b="0" dirty="0">
-                <a:solidFill>
-                  <a:srgbClr val="79C0FF"/>
-                </a:solidFill>
-                <a:effectLst/>
-                <a:latin typeface="Cascadia Code" panose="020B0609020000020004" pitchFamily="49" charset="0"/>
-              </a:rPr>
-              <a:t>handler</a:t>
-            </a:r>
-            <a:r>
-              <a:rPr lang="en-US" sz="2000" b="0" dirty="0">
-                <a:solidFill>
-                  <a:srgbClr val="C9D1D9"/>
-                </a:solidFill>
-                <a:effectLst/>
-                <a:latin typeface="Cascadia Code" panose="020B0609020000020004" pitchFamily="49" charset="0"/>
-              </a:rPr>
-              <a:t> </a:t>
-            </a:r>
-            <a:r>
-              <a:rPr lang="en-US" sz="2000" b="0" dirty="0">
-                <a:solidFill>
-                  <a:srgbClr val="D4D4D4"/>
-                </a:solidFill>
-                <a:effectLst/>
-                <a:latin typeface="Cascadia Code" panose="020B0609020000020004" pitchFamily="49" charset="0"/>
-              </a:rPr>
-              <a:t>=</a:t>
-            </a:r>
-            <a:r>
-              <a:rPr lang="en-US" sz="2000" b="0" dirty="0">
-                <a:solidFill>
-                  <a:srgbClr val="C9D1D9"/>
-                </a:solidFill>
-                <a:effectLst/>
-                <a:latin typeface="Cascadia Code" panose="020B0609020000020004" pitchFamily="49" charset="0"/>
-              </a:rPr>
-              <a:t> </a:t>
-            </a:r>
-            <a:r>
-              <a:rPr lang="en-US" sz="2000" b="0" dirty="0" err="1">
-                <a:solidFill>
-                  <a:srgbClr val="C9D1D9"/>
-                </a:solidFill>
-                <a:effectLst/>
-                <a:latin typeface="Cascadia Code" panose="020B0609020000020004" pitchFamily="49" charset="0"/>
-              </a:rPr>
-              <a:t>vi.</a:t>
-            </a:r>
-            <a:r>
-              <a:rPr lang="en-US" sz="2000" b="0" dirty="0" err="1">
-                <a:solidFill>
-                  <a:srgbClr val="D2A8FF"/>
-                </a:solidFill>
-                <a:effectLst/>
-                <a:latin typeface="Cascadia Code" panose="020B0609020000020004" pitchFamily="49" charset="0"/>
-              </a:rPr>
-              <a:t>fn</a:t>
-            </a:r>
-            <a:r>
-              <a:rPr lang="en-US" sz="2000" b="0" dirty="0">
-                <a:solidFill>
-                  <a:srgbClr val="C9D1D9"/>
-                </a:solidFill>
-                <a:effectLst/>
-                <a:latin typeface="Cascadia Code" panose="020B0609020000020004" pitchFamily="49" charset="0"/>
-              </a:rPr>
-              <a:t>();</a:t>
-            </a:r>
-            <a:endParaRPr lang="en-US" sz="2000" b="0" dirty="0">
-              <a:solidFill>
-                <a:srgbClr val="BBBEBF"/>
-              </a:solidFill>
-              <a:effectLst/>
-              <a:latin typeface="Cascadia Code" panose="020B0609020000020004" pitchFamily="49" charset="0"/>
-            </a:endParaRPr>
-          </a:p>
-          <a:p>
-            <a:pPr>
-              <a:lnSpc>
-                <a:spcPct val="150000"/>
-              </a:lnSpc>
-              <a:buNone/>
-            </a:pPr>
-            <a:r>
-              <a:rPr lang="en-US" sz="2000" b="0" dirty="0">
-                <a:solidFill>
-                  <a:srgbClr val="C9D1D9"/>
-                </a:solidFill>
-                <a:effectLst/>
-                <a:latin typeface="Cascadia Code" panose="020B0609020000020004" pitchFamily="49" charset="0"/>
-              </a:rPr>
-              <a:t>  </a:t>
-            </a:r>
-            <a:r>
-              <a:rPr lang="en-US" sz="2000" b="0" dirty="0" err="1">
-                <a:solidFill>
-                  <a:srgbClr val="79C0FF"/>
-                </a:solidFill>
-                <a:effectLst/>
-                <a:latin typeface="Cascadia Code" panose="020B0609020000020004" pitchFamily="49" charset="0"/>
-              </a:rPr>
-              <a:t>window</a:t>
-            </a:r>
-            <a:r>
-              <a:rPr lang="en-US" sz="2000" b="0" dirty="0" err="1">
-                <a:solidFill>
-                  <a:srgbClr val="C9D1D9"/>
-                </a:solidFill>
-                <a:effectLst/>
-                <a:latin typeface="Cascadia Code" panose="020B0609020000020004" pitchFamily="49" charset="0"/>
-              </a:rPr>
-              <a:t>.</a:t>
-            </a:r>
-            <a:r>
-              <a:rPr lang="en-US" sz="2000" b="0" dirty="0" err="1">
-                <a:solidFill>
-                  <a:srgbClr val="D2A8FF"/>
-                </a:solidFill>
-                <a:effectLst/>
-                <a:latin typeface="Cascadia Code" panose="020B0609020000020004" pitchFamily="49" charset="0"/>
-              </a:rPr>
-              <a:t>addEventListener</a:t>
-            </a:r>
-            <a:r>
-              <a:rPr lang="en-US" sz="2000" b="0" dirty="0">
-                <a:solidFill>
-                  <a:srgbClr val="C9D1D9"/>
-                </a:solidFill>
-                <a:effectLst/>
-                <a:latin typeface="Cascadia Code" panose="020B0609020000020004" pitchFamily="49" charset="0"/>
-              </a:rPr>
-              <a:t>(</a:t>
-            </a:r>
-            <a:r>
-              <a:rPr lang="en-US" sz="2000" b="0" dirty="0">
-                <a:solidFill>
-                  <a:srgbClr val="A5D6FF"/>
-                </a:solidFill>
-                <a:effectLst/>
-                <a:latin typeface="Cascadia Code" panose="020B0609020000020004" pitchFamily="49" charset="0"/>
-              </a:rPr>
-              <a:t>"</a:t>
-            </a:r>
-            <a:r>
-              <a:rPr lang="en-US" sz="2000" b="0" dirty="0" err="1">
-                <a:solidFill>
-                  <a:srgbClr val="A5D6FF"/>
-                </a:solidFill>
-                <a:effectLst/>
-                <a:latin typeface="Cascadia Code" panose="020B0609020000020004" pitchFamily="49" charset="0"/>
-              </a:rPr>
-              <a:t>addPrescription</a:t>
-            </a:r>
-            <a:r>
-              <a:rPr lang="en-US" sz="2000" b="0" dirty="0">
-                <a:solidFill>
-                  <a:srgbClr val="A5D6FF"/>
-                </a:solidFill>
-                <a:effectLst/>
-                <a:latin typeface="Cascadia Code" panose="020B0609020000020004" pitchFamily="49" charset="0"/>
-              </a:rPr>
-              <a:t>"</a:t>
-            </a:r>
-            <a:r>
-              <a:rPr lang="en-US" sz="2000" b="0" dirty="0">
-                <a:solidFill>
-                  <a:srgbClr val="C9D1D9"/>
-                </a:solidFill>
-                <a:effectLst/>
-                <a:latin typeface="Cascadia Code" panose="020B0609020000020004" pitchFamily="49" charset="0"/>
-              </a:rPr>
-              <a:t>, </a:t>
-            </a:r>
-            <a:r>
-              <a:rPr lang="en-US" sz="2000" b="0" dirty="0">
-                <a:solidFill>
-                  <a:srgbClr val="79C0FF"/>
-                </a:solidFill>
-                <a:effectLst/>
-                <a:latin typeface="Cascadia Code" panose="020B0609020000020004" pitchFamily="49" charset="0"/>
-              </a:rPr>
-              <a:t>handler</a:t>
-            </a:r>
-            <a:r>
-              <a:rPr lang="en-US" sz="2000" b="0" dirty="0">
-                <a:solidFill>
-                  <a:srgbClr val="C9D1D9"/>
-                </a:solidFill>
-                <a:effectLst/>
-                <a:latin typeface="Cascadia Code" panose="020B0609020000020004" pitchFamily="49" charset="0"/>
-              </a:rPr>
-              <a:t>);</a:t>
-            </a:r>
-            <a:endParaRPr lang="en-US" sz="2000" b="0" dirty="0">
-              <a:solidFill>
-                <a:srgbClr val="BBBEBF"/>
-              </a:solidFill>
-              <a:effectLst/>
-              <a:latin typeface="Cascadia Code" panose="020B0609020000020004" pitchFamily="49" charset="0"/>
-            </a:endParaRPr>
-          </a:p>
-          <a:p>
-            <a:pPr>
-              <a:lnSpc>
-                <a:spcPct val="150000"/>
-              </a:lnSpc>
-              <a:buNone/>
-            </a:pPr>
-            <a:r>
-              <a:rPr lang="en-US" sz="2000" b="0" dirty="0">
-                <a:solidFill>
-                  <a:srgbClr val="C9D1D9"/>
-                </a:solidFill>
-                <a:effectLst/>
-                <a:latin typeface="Cascadia Code" panose="020B0609020000020004" pitchFamily="49" charset="0"/>
-              </a:rPr>
-              <a:t>  </a:t>
-            </a:r>
-            <a:r>
-              <a:rPr lang="en-US" sz="2000" b="0" dirty="0">
-                <a:solidFill>
-                  <a:srgbClr val="D2A8FF"/>
-                </a:solidFill>
-                <a:effectLst/>
-                <a:latin typeface="Cascadia Code" panose="020B0609020000020004" pitchFamily="49" charset="0"/>
-              </a:rPr>
-              <a:t>render</a:t>
-            </a:r>
-            <a:r>
-              <a:rPr lang="en-US" sz="2000" b="0" dirty="0">
-                <a:solidFill>
-                  <a:srgbClr val="C9D1D9"/>
-                </a:solidFill>
-                <a:effectLst/>
-                <a:latin typeface="Cascadia Code" panose="020B0609020000020004" pitchFamily="49" charset="0"/>
-              </a:rPr>
-              <a:t>(&lt;</a:t>
-            </a:r>
-            <a:r>
-              <a:rPr lang="en-US" sz="2000" b="0" dirty="0" err="1">
-                <a:solidFill>
-                  <a:srgbClr val="4EC9B0"/>
-                </a:solidFill>
-                <a:effectLst/>
-                <a:latin typeface="Cascadia Code" panose="020B0609020000020004" pitchFamily="49" charset="0"/>
-              </a:rPr>
-              <a:t>MedicalRecords</a:t>
-            </a:r>
-            <a:r>
-              <a:rPr lang="en-US" sz="2000" b="0" dirty="0">
-                <a:solidFill>
-                  <a:srgbClr val="C9D1D9"/>
-                </a:solidFill>
-                <a:effectLst/>
-                <a:latin typeface="Cascadia Code" panose="020B0609020000020004" pitchFamily="49" charset="0"/>
-              </a:rPr>
-              <a:t> /&gt;);</a:t>
-            </a:r>
-          </a:p>
-          <a:p>
-            <a:pPr>
-              <a:lnSpc>
-                <a:spcPct val="150000"/>
-              </a:lnSpc>
-              <a:buNone/>
-            </a:pPr>
-            <a:endParaRPr lang="en-US" sz="2000" b="0" dirty="0">
-              <a:solidFill>
-                <a:srgbClr val="BBBEBF"/>
-              </a:solidFill>
-              <a:effectLst/>
-              <a:latin typeface="Cascadia Code" panose="020B0609020000020004" pitchFamily="49" charset="0"/>
-            </a:endParaRPr>
-          </a:p>
-          <a:p>
-            <a:pPr>
-              <a:lnSpc>
-                <a:spcPct val="150000"/>
-              </a:lnSpc>
-              <a:buNone/>
-            </a:pPr>
-            <a:r>
-              <a:rPr lang="en-US" sz="2000" b="0" dirty="0">
-                <a:solidFill>
-                  <a:srgbClr val="C9D1D9"/>
-                </a:solidFill>
-                <a:effectLst/>
-                <a:latin typeface="Cascadia Code" panose="020B0609020000020004" pitchFamily="49" charset="0"/>
-              </a:rPr>
-              <a:t>  </a:t>
-            </a:r>
-            <a:r>
-              <a:rPr lang="en-US" sz="2000" b="0" dirty="0">
-                <a:solidFill>
-                  <a:srgbClr val="C586C0"/>
-                </a:solidFill>
-                <a:effectLst/>
-                <a:latin typeface="Cascadia Code" panose="020B0609020000020004" pitchFamily="49" charset="0"/>
-              </a:rPr>
-              <a:t>await</a:t>
-            </a:r>
-            <a:r>
-              <a:rPr lang="en-US" sz="2000" b="0" dirty="0">
-                <a:solidFill>
-                  <a:srgbClr val="C9D1D9"/>
-                </a:solidFill>
-                <a:effectLst/>
-                <a:latin typeface="Cascadia Code" panose="020B0609020000020004" pitchFamily="49" charset="0"/>
-              </a:rPr>
-              <a:t> </a:t>
-            </a:r>
-            <a:r>
-              <a:rPr lang="en-US" sz="2000" b="0" dirty="0" err="1">
-                <a:solidFill>
-                  <a:srgbClr val="C9D1D9"/>
-                </a:solidFill>
-                <a:effectLst/>
-                <a:latin typeface="Cascadia Code" panose="020B0609020000020004" pitchFamily="49" charset="0"/>
-              </a:rPr>
-              <a:t>user.</a:t>
-            </a:r>
-            <a:r>
-              <a:rPr lang="en-US" sz="2000" b="0" dirty="0" err="1">
-                <a:solidFill>
-                  <a:srgbClr val="D2A8FF"/>
-                </a:solidFill>
-                <a:effectLst/>
-                <a:latin typeface="Cascadia Code" panose="020B0609020000020004" pitchFamily="49" charset="0"/>
-              </a:rPr>
-              <a:t>click</a:t>
-            </a:r>
-            <a:r>
-              <a:rPr lang="en-US" sz="2000" b="0" dirty="0">
-                <a:solidFill>
-                  <a:srgbClr val="C9D1D9"/>
-                </a:solidFill>
-                <a:effectLst/>
-                <a:latin typeface="Cascadia Code" panose="020B0609020000020004" pitchFamily="49" charset="0"/>
-              </a:rPr>
-              <a:t>(</a:t>
-            </a:r>
-            <a:r>
-              <a:rPr lang="en-US" sz="2000" b="0" dirty="0" err="1">
-                <a:solidFill>
-                  <a:srgbClr val="79C0FF"/>
-                </a:solidFill>
-                <a:effectLst/>
-                <a:latin typeface="Cascadia Code" panose="020B0609020000020004" pitchFamily="49" charset="0"/>
-              </a:rPr>
-              <a:t>screen</a:t>
-            </a:r>
-            <a:r>
-              <a:rPr lang="en-US" sz="2000" b="0" dirty="0" err="1">
-                <a:solidFill>
-                  <a:srgbClr val="C9D1D9"/>
-                </a:solidFill>
-                <a:effectLst/>
-                <a:latin typeface="Cascadia Code" panose="020B0609020000020004" pitchFamily="49" charset="0"/>
-              </a:rPr>
-              <a:t>.</a:t>
-            </a:r>
-            <a:r>
-              <a:rPr lang="en-US" sz="2000" b="0" dirty="0" err="1">
-                <a:solidFill>
-                  <a:srgbClr val="D2A8FF"/>
-                </a:solidFill>
-                <a:effectLst/>
-                <a:latin typeface="Cascadia Code" panose="020B0609020000020004" pitchFamily="49" charset="0"/>
-              </a:rPr>
-              <a:t>getByRole</a:t>
-            </a:r>
-            <a:r>
-              <a:rPr lang="en-US" sz="2000" b="0" dirty="0">
-                <a:solidFill>
-                  <a:srgbClr val="C9D1D9"/>
-                </a:solidFill>
-                <a:effectLst/>
-                <a:latin typeface="Cascadia Code" panose="020B0609020000020004" pitchFamily="49" charset="0"/>
-              </a:rPr>
-              <a:t>(</a:t>
-            </a:r>
-            <a:r>
-              <a:rPr lang="en-US" sz="2000" b="0" dirty="0">
-                <a:solidFill>
-                  <a:srgbClr val="A5D6FF"/>
-                </a:solidFill>
-                <a:effectLst/>
-                <a:latin typeface="Cascadia Code" panose="020B0609020000020004" pitchFamily="49" charset="0"/>
-              </a:rPr>
-              <a:t>"button"</a:t>
-            </a:r>
-            <a:r>
-              <a:rPr lang="en-US" sz="2000" b="0" dirty="0">
-                <a:solidFill>
-                  <a:srgbClr val="C9D1D9"/>
-                </a:solidFill>
-                <a:effectLst/>
-                <a:latin typeface="Cascadia Code" panose="020B0609020000020004" pitchFamily="49" charset="0"/>
-              </a:rPr>
-              <a:t>, { name</a:t>
-            </a:r>
-            <a:r>
-              <a:rPr lang="en-US" sz="2000" b="0" dirty="0">
-                <a:solidFill>
-                  <a:srgbClr val="9CDCFE"/>
-                </a:solidFill>
-                <a:effectLst/>
-                <a:latin typeface="Cascadia Code" panose="020B0609020000020004" pitchFamily="49" charset="0"/>
-              </a:rPr>
-              <a:t>:</a:t>
-            </a:r>
-            <a:r>
-              <a:rPr lang="en-US" sz="2000" b="0" dirty="0">
-                <a:solidFill>
-                  <a:srgbClr val="A5D6FF"/>
-                </a:solidFill>
-                <a:effectLst/>
-                <a:latin typeface="Cascadia Code" panose="020B0609020000020004" pitchFamily="49" charset="0"/>
-              </a:rPr>
-              <a:t> /create prescription/</a:t>
-            </a:r>
-            <a:r>
-              <a:rPr lang="en-US" sz="2000" b="0" dirty="0" err="1">
-                <a:solidFill>
-                  <a:srgbClr val="FF7B72"/>
-                </a:solidFill>
-                <a:effectLst/>
-                <a:latin typeface="Cascadia Code" panose="020B0609020000020004" pitchFamily="49" charset="0"/>
-              </a:rPr>
-              <a:t>i</a:t>
-            </a:r>
-            <a:r>
-              <a:rPr lang="en-US" sz="2000" b="0" dirty="0">
-                <a:solidFill>
-                  <a:srgbClr val="C9D1D9"/>
-                </a:solidFill>
-                <a:effectLst/>
-                <a:latin typeface="Cascadia Code" panose="020B0609020000020004" pitchFamily="49" charset="0"/>
-              </a:rPr>
-              <a:t> }));</a:t>
-            </a:r>
-            <a:endParaRPr lang="en-US" sz="2000" b="0" dirty="0">
-              <a:solidFill>
-                <a:srgbClr val="BBBEBF"/>
-              </a:solidFill>
-              <a:effectLst/>
-              <a:latin typeface="Cascadia Code" panose="020B0609020000020004" pitchFamily="49" charset="0"/>
-            </a:endParaRPr>
-          </a:p>
-          <a:p>
-            <a:pPr>
-              <a:lnSpc>
-                <a:spcPct val="150000"/>
-              </a:lnSpc>
-              <a:buNone/>
-            </a:pPr>
-            <a:r>
-              <a:rPr lang="en-US" sz="2000" b="0" dirty="0">
-                <a:solidFill>
-                  <a:srgbClr val="C9D1D9"/>
-                </a:solidFill>
-                <a:effectLst/>
-                <a:latin typeface="Cascadia Code" panose="020B0609020000020004" pitchFamily="49" charset="0"/>
-              </a:rPr>
-              <a:t>  </a:t>
-            </a:r>
-            <a:r>
-              <a:rPr lang="en-US" sz="2000" b="0" dirty="0">
-                <a:solidFill>
-                  <a:srgbClr val="D2A8FF"/>
-                </a:solidFill>
-                <a:effectLst/>
-                <a:latin typeface="Cascadia Code" panose="020B0609020000020004" pitchFamily="49" charset="0"/>
-              </a:rPr>
-              <a:t>expect</a:t>
-            </a:r>
-            <a:r>
-              <a:rPr lang="en-US" sz="2000" b="0" dirty="0">
-                <a:solidFill>
-                  <a:srgbClr val="C9D1D9"/>
-                </a:solidFill>
-                <a:effectLst/>
-                <a:latin typeface="Cascadia Code" panose="020B0609020000020004" pitchFamily="49" charset="0"/>
-              </a:rPr>
-              <a:t>(</a:t>
-            </a:r>
-            <a:r>
-              <a:rPr lang="en-US" sz="2000" b="0" dirty="0">
-                <a:solidFill>
-                  <a:srgbClr val="79C0FF"/>
-                </a:solidFill>
-                <a:effectLst/>
-                <a:latin typeface="Cascadia Code" panose="020B0609020000020004" pitchFamily="49" charset="0"/>
-              </a:rPr>
-              <a:t>handler</a:t>
-            </a:r>
-            <a:r>
-              <a:rPr lang="en-US" sz="2000" b="0" dirty="0">
-                <a:solidFill>
-                  <a:srgbClr val="C9D1D9"/>
-                </a:solidFill>
-                <a:effectLst/>
-                <a:latin typeface="Cascadia Code" panose="020B0609020000020004" pitchFamily="49" charset="0"/>
-              </a:rPr>
-              <a:t>).</a:t>
-            </a:r>
-            <a:r>
-              <a:rPr lang="en-US" sz="2000" b="0" dirty="0" err="1">
-                <a:solidFill>
-                  <a:srgbClr val="D2A8FF"/>
-                </a:solidFill>
-                <a:effectLst/>
-                <a:latin typeface="Cascadia Code" panose="020B0609020000020004" pitchFamily="49" charset="0"/>
-              </a:rPr>
-              <a:t>toHaveBeenCalledTimes</a:t>
-            </a:r>
-            <a:r>
-              <a:rPr lang="en-US" sz="2000" b="0" dirty="0">
-                <a:solidFill>
-                  <a:srgbClr val="C9D1D9"/>
-                </a:solidFill>
-                <a:effectLst/>
-                <a:latin typeface="Cascadia Code" panose="020B0609020000020004" pitchFamily="49" charset="0"/>
-              </a:rPr>
-              <a:t>(</a:t>
-            </a:r>
-            <a:r>
-              <a:rPr lang="en-US" sz="2000" b="0" dirty="0">
-                <a:solidFill>
-                  <a:srgbClr val="B5CEA8"/>
-                </a:solidFill>
-                <a:effectLst/>
-                <a:latin typeface="Cascadia Code" panose="020B0609020000020004" pitchFamily="49" charset="0"/>
-              </a:rPr>
-              <a:t>1</a:t>
-            </a:r>
-            <a:r>
-              <a:rPr lang="en-US" sz="2000" b="0" dirty="0">
-                <a:solidFill>
-                  <a:srgbClr val="C9D1D9"/>
-                </a:solidFill>
-                <a:effectLst/>
-                <a:latin typeface="Cascadia Code" panose="020B0609020000020004" pitchFamily="49" charset="0"/>
-              </a:rPr>
-              <a:t>);</a:t>
-            </a:r>
-            <a:endParaRPr lang="en-US" sz="2000" b="0" dirty="0">
-              <a:solidFill>
-                <a:srgbClr val="BBBEBF"/>
-              </a:solidFill>
-              <a:effectLst/>
-              <a:latin typeface="Cascadia Code" panose="020B0609020000020004" pitchFamily="49" charset="0"/>
-            </a:endParaRPr>
-          </a:p>
-          <a:p>
-            <a:pPr>
-              <a:lnSpc>
-                <a:spcPct val="150000"/>
-              </a:lnSpc>
-              <a:buNone/>
-            </a:pPr>
-            <a:r>
-              <a:rPr lang="en-US" sz="2000" b="0" dirty="0">
-                <a:solidFill>
-                  <a:srgbClr val="C9D1D9"/>
-                </a:solidFill>
-                <a:effectLst/>
-                <a:latin typeface="Cascadia Code" panose="020B0609020000020004" pitchFamily="49" charset="0"/>
-              </a:rPr>
-              <a:t>}</a:t>
-            </a:r>
-            <a:r>
-              <a:rPr lang="en-US" sz="2000" b="0" dirty="0">
-                <a:solidFill>
-                  <a:srgbClr val="BBBEBF"/>
-                </a:solidFill>
-                <a:effectLst/>
-                <a:latin typeface="Cascadia Code" panose="020B0609020000020004" pitchFamily="49" charset="0"/>
-              </a:rPr>
-              <a:t>);</a:t>
-            </a:r>
-          </a:p>
-        </p:txBody>
-      </p:sp>
-    </p:spTree>
-    <p:extLst>
-      <p:ext uri="{BB962C8B-B14F-4D97-AF65-F5344CB8AC3E}">
-        <p14:creationId xmlns:p14="http://schemas.microsoft.com/office/powerpoint/2010/main" val="1611362441"/>
-      </p:ext>
-    </p:extLst>
-  </p:cSld>
-  <p:clrMapOvr>
-    <a:masterClrMapping/>
-  </p:clrMapOvr>
-</p:sld>
-</file>
-
-<file path=ppt/slides/slide44.xml><?xml version="1.0" encoding="utf-8"?>
 <p:sld xmlns:a="http://schemas.openxmlformats.org/drawingml/2006/main" xmlns:r="http://schemas.openxmlformats.org/officeDocument/2006/relationships" xmlns:p="http://schemas.openxmlformats.org/presentationml/2006/main">
   <p:cSld name="Slide 17">
     <p:bg>
@@ -26755,7 +25471,7 @@
 </p:sld>
 </file>
 
-<file path=ppt/slides/slide45.xml><?xml version="1.0" encoding="utf-8"?>
+<file path=ppt/slides/slide44.xml><?xml version="1.0" encoding="utf-8"?>
 <p:sld xmlns:a="http://schemas.openxmlformats.org/drawingml/2006/main" xmlns:r="http://schemas.openxmlformats.org/officeDocument/2006/relationships" xmlns:p="http://schemas.openxmlformats.org/presentationml/2006/main">
   <p:cSld>
     <p:spTree>
@@ -26815,7 +25531,7 @@
 </p:sld>
 </file>
 
-<file path=ppt/slides/slide46.xml><?xml version="1.0" encoding="utf-8"?>
+<file path=ppt/slides/slide45.xml><?xml version="1.0" encoding="utf-8"?>
 <p:sld xmlns:a="http://schemas.openxmlformats.org/drawingml/2006/main" xmlns:r="http://schemas.openxmlformats.org/officeDocument/2006/relationships" xmlns:p="http://schemas.openxmlformats.org/presentationml/2006/main">
   <p:cSld>
     <p:spTree>

--- a/presentation/module-federation.pptx
+++ b/presentation/module-federation.pptx
@@ -5,7 +5,7 @@
     <p:sldMasterId id="2147483648" r:id="rId1"/>
   </p:sldMasterIdLst>
   <p:notesMasterIdLst>
-    <p:notesMasterId r:id="rId47"/>
+    <p:notesMasterId r:id="rId45"/>
   </p:notesMasterIdLst>
   <p:sldIdLst>
     <p:sldId id="298" r:id="rId2"/>
@@ -37,22 +37,20 @@
     <p:sldId id="327" r:id="rId28"/>
     <p:sldId id="325" r:id="rId29"/>
     <p:sldId id="264" r:id="rId30"/>
-    <p:sldId id="287" r:id="rId31"/>
-    <p:sldId id="326" r:id="rId32"/>
-    <p:sldId id="265" r:id="rId33"/>
-    <p:sldId id="288" r:id="rId34"/>
-    <p:sldId id="289" r:id="rId35"/>
-    <p:sldId id="266" r:id="rId36"/>
-    <p:sldId id="290" r:id="rId37"/>
-    <p:sldId id="291" r:id="rId38"/>
-    <p:sldId id="267" r:id="rId39"/>
-    <p:sldId id="296" r:id="rId40"/>
-    <p:sldId id="297" r:id="rId41"/>
-    <p:sldId id="268" r:id="rId42"/>
-    <p:sldId id="323" r:id="rId43"/>
-    <p:sldId id="272" r:id="rId44"/>
-    <p:sldId id="310" r:id="rId45"/>
-    <p:sldId id="322" r:id="rId46"/>
+    <p:sldId id="326" r:id="rId31"/>
+    <p:sldId id="265" r:id="rId32"/>
+    <p:sldId id="288" r:id="rId33"/>
+    <p:sldId id="289" r:id="rId34"/>
+    <p:sldId id="266" r:id="rId35"/>
+    <p:sldId id="290" r:id="rId36"/>
+    <p:sldId id="291" r:id="rId37"/>
+    <p:sldId id="267" r:id="rId38"/>
+    <p:sldId id="296" r:id="rId39"/>
+    <p:sldId id="268" r:id="rId40"/>
+    <p:sldId id="323" r:id="rId41"/>
+    <p:sldId id="272" r:id="rId42"/>
+    <p:sldId id="310" r:id="rId43"/>
+    <p:sldId id="322" r:id="rId44"/>
   </p:sldIdLst>
   <p:sldSz cx="12188825" cy="6858000"/>
   <p:notesSz cx="6858000" cy="12188825"/>
@@ -2617,13 +2615,7 @@
   <p:cSld>
     <p:spTree>
       <p:nvGrpSpPr>
-        <p:cNvPr id="1" name="">
-          <a:extLst>
-            <a:ext uri="{FF2B5EF4-FFF2-40B4-BE49-F238E27FC236}">
-              <a16:creationId xmlns:a16="http://schemas.microsoft.com/office/drawing/2014/main" id="{AE46C20B-4A97-425B-9490-9DCB56D8340E}"/>
-            </a:ext>
-          </a:extLst>
-        </p:cNvPr>
+        <p:cNvPr id="1" name=""/>
         <p:cNvGrpSpPr/>
         <p:nvPr/>
       </p:nvGrpSpPr>
@@ -2637,13 +2629,7 @@
       </p:grpSpPr>
       <p:sp>
         <p:nvSpPr>
-          <p:cNvPr id="2" name="Slide Image Placeholder 1">
-            <a:extLst>
-              <a:ext uri="{FF2B5EF4-FFF2-40B4-BE49-F238E27FC236}">
-                <a16:creationId xmlns:a16="http://schemas.microsoft.com/office/drawing/2014/main" id="{B4A6AA92-E4A6-E6FA-B226-EA06DA333F1D}"/>
-              </a:ext>
-            </a:extLst>
-          </p:cNvPr>
+          <p:cNvPr id="2" name="Slide Image Placeholder 1"/>
           <p:cNvSpPr>
             <a:spLocks noGrp="1" noRot="1" noChangeAspect="1"/>
           </p:cNvSpPr>
@@ -2651,17 +2637,25 @@
             <p:ph type="sldImg"/>
           </p:nvPr>
         </p:nvSpPr>
-        <p:spPr/>
+        <p:spPr>
+          <a:xfrm>
+            <a:off x="-225425" y="1524000"/>
+            <a:ext cx="7308850" cy="4113213"/>
+          </a:xfrm>
+          <a:prstGeom prst="rect">
+            <a:avLst/>
+          </a:prstGeom>
+          <a:noFill/>
+          <a:ln w="12700">
+            <a:solidFill>
+              <a:prstClr val="black"/>
+            </a:solidFill>
+          </a:ln>
+        </p:spPr>
       </p:sp>
       <p:sp>
         <p:nvSpPr>
-          <p:cNvPr id="3" name="Notes Placeholder 2">
-            <a:extLst>
-              <a:ext uri="{FF2B5EF4-FFF2-40B4-BE49-F238E27FC236}">
-                <a16:creationId xmlns:a16="http://schemas.microsoft.com/office/drawing/2014/main" id="{A4AF670C-0428-B0E1-DB0B-324F0BBE39F8}"/>
-              </a:ext>
-            </a:extLst>
-          </p:cNvPr>
+          <p:cNvPr id="3" name="Notes Placeholder 2"/>
           <p:cNvSpPr>
             <a:spLocks noGrp="1"/>
           </p:cNvSpPr>
@@ -2669,7 +2663,15 @@
             <p:ph type="body" idx="1"/>
           </p:nvPr>
         </p:nvSpPr>
-        <p:spPr/>
+        <p:spPr>
+          <a:xfrm>
+            <a:off x="685800" y="5865813"/>
+            <a:ext cx="5486400" cy="4799012"/>
+          </a:xfrm>
+          <a:prstGeom prst="rect">
+            <a:avLst/>
+          </a:prstGeom>
+        </p:spPr>
         <p:txBody>
           <a:bodyPr/>
           <a:lstStyle/>
@@ -2704,42 +2706,13 @@
               <a:t>odule-level crashes, network failures, and bad deploys are isolated at the boundary. </a:t>
             </a:r>
             <a:endParaRPr lang="en-US" dirty="0"/>
-          </a:p>
-        </p:txBody>
-      </p:sp>
-      <p:sp>
-        <p:nvSpPr>
-          <p:cNvPr id="4" name="Slide Number Placeholder 3">
-            <a:extLst>
-              <a:ext uri="{FF2B5EF4-FFF2-40B4-BE49-F238E27FC236}">
-                <a16:creationId xmlns:a16="http://schemas.microsoft.com/office/drawing/2014/main" id="{069010F3-8DE1-A2AD-7962-CBD9E92C139D}"/>
-              </a:ext>
-            </a:extLst>
-          </p:cNvPr>
-          <p:cNvSpPr>
-            <a:spLocks noGrp="1"/>
-          </p:cNvSpPr>
-          <p:nvPr>
-            <p:ph type="sldNum" sz="quarter" idx="10"/>
-          </p:nvPr>
-        </p:nvSpPr>
-        <p:spPr/>
-        <p:txBody>
-          <a:bodyPr/>
-          <a:lstStyle/>
-          <a:p>
-            <a:fld id="{F7021451-1387-4CA6-816F-3879F97B5CBC}" type="slidenum">
-              <a:rPr lang="en-US"/>
-              <a:t>30</a:t>
-            </a:fld>
-            <a:endParaRPr lang="en-US"/>
           </a:p>
         </p:txBody>
       </p:sp>
     </p:spTree>
     <p:extLst>
       <p:ext uri="{BB962C8B-B14F-4D97-AF65-F5344CB8AC3E}">
-        <p14:creationId xmlns:p14="http://schemas.microsoft.com/office/powerpoint/2010/main" val="2770988812"/>
+        <p14:creationId xmlns:p14="http://schemas.microsoft.com/office/powerpoint/2010/main" val="3599504877"/>
       </p:ext>
     </p:extLst>
   </p:cSld>
@@ -2859,122 +2832,6 @@
             <p:ph type="sldImg"/>
           </p:nvPr>
         </p:nvSpPr>
-        <p:spPr>
-          <a:xfrm>
-            <a:off x="-225425" y="1524000"/>
-            <a:ext cx="7308850" cy="4113213"/>
-          </a:xfrm>
-          <a:prstGeom prst="rect">
-            <a:avLst/>
-          </a:prstGeom>
-          <a:noFill/>
-          <a:ln w="12700">
-            <a:solidFill>
-              <a:prstClr val="black"/>
-            </a:solidFill>
-          </a:ln>
-        </p:spPr>
-      </p:sp>
-      <p:sp>
-        <p:nvSpPr>
-          <p:cNvPr id="3" name="Notes Placeholder 2"/>
-          <p:cNvSpPr>
-            <a:spLocks noGrp="1"/>
-          </p:cNvSpPr>
-          <p:nvPr>
-            <p:ph type="body" idx="1"/>
-          </p:nvPr>
-        </p:nvSpPr>
-        <p:spPr>
-          <a:xfrm>
-            <a:off x="685800" y="5865813"/>
-            <a:ext cx="5486400" cy="4799012"/>
-          </a:xfrm>
-          <a:prstGeom prst="rect">
-            <a:avLst/>
-          </a:prstGeom>
-        </p:spPr>
-        <p:txBody>
-          <a:bodyPr/>
-          <a:lstStyle/>
-          <a:p>
-            <a:r>
-              <a:rPr lang="en-US" dirty="0"/>
-              <a:t>A health monitor that polls remoteEntry.js every five seconds. Kill switches. An A/B deployment ring. That panel is for the demo. I can take a module down in front of you and show you that the rest of the app keeps running. </a:t>
-            </a:r>
-            <a:r>
-              <a:rPr lang="en-US"/>
-              <a:t>Basically we are going to simulate </a:t>
-            </a:r>
-            <a:r>
-              <a:rPr lang="en-US" sz="1200" i="1">
-                <a:solidFill>
-                  <a:schemeClr val="bg1">
-                    <a:lumMod val="95000"/>
-                  </a:schemeClr>
-                </a:solidFill>
-                <a:latin typeface="Instrument Serif" pitchFamily="34" charset="0"/>
-                <a:ea typeface="Instrument Serif" pitchFamily="34" charset="-122"/>
-              </a:rPr>
-              <a:t>m</a:t>
-            </a:r>
-            <a:r>
-              <a:rPr lang="en-US" sz="1200" i="1">
-                <a:solidFill>
-                  <a:schemeClr val="bg1">
-                    <a:lumMod val="95000"/>
-                  </a:schemeClr>
-                </a:solidFill>
-                <a:latin typeface="Instrument Serif" pitchFamily="34" charset="0"/>
-                <a:ea typeface="Instrument Serif" pitchFamily="34" charset="-122"/>
-                <a:cs typeface="Instrument Serif" pitchFamily="34" charset="-120"/>
-              </a:rPr>
-              <a:t>odule-level crashes, network failures, and bad deploys are isolated at the boundary. </a:t>
-            </a:r>
-            <a:endParaRPr lang="en-US" dirty="0"/>
-          </a:p>
-        </p:txBody>
-      </p:sp>
-    </p:spTree>
-    <p:extLst>
-      <p:ext uri="{BB962C8B-B14F-4D97-AF65-F5344CB8AC3E}">
-        <p14:creationId xmlns:p14="http://schemas.microsoft.com/office/powerpoint/2010/main" val="3599504877"/>
-      </p:ext>
-    </p:extLst>
-  </p:cSld>
-  <p:clrMapOvr>
-    <a:masterClrMapping/>
-  </p:clrMapOvr>
-</p:notes>
-</file>
-
-<file path=ppt/notesSlides/notesSlide31.xml><?xml version="1.0" encoding="utf-8"?>
-<p:notes xmlns:a="http://schemas.openxmlformats.org/drawingml/2006/main" xmlns:r="http://schemas.openxmlformats.org/officeDocument/2006/relationships" xmlns:p="http://schemas.openxmlformats.org/presentationml/2006/main">
-  <p:cSld>
-    <p:spTree>
-      <p:nvGrpSpPr>
-        <p:cNvPr id="1" name=""/>
-        <p:cNvGrpSpPr/>
-        <p:nvPr/>
-      </p:nvGrpSpPr>
-      <p:grpSpPr>
-        <a:xfrm>
-          <a:off x="0" y="0"/>
-          <a:ext cx="0" cy="0"/>
-          <a:chOff x="0" y="0"/>
-          <a:chExt cx="0" cy="0"/>
-        </a:xfrm>
-      </p:grpSpPr>
-      <p:sp>
-        <p:nvSpPr>
-          <p:cNvPr id="2" name="Slide Image Placeholder 1"/>
-          <p:cNvSpPr>
-            <a:spLocks noGrp="1" noRot="1" noChangeAspect="1"/>
-          </p:cNvSpPr>
-          <p:nvPr>
-            <p:ph type="sldImg"/>
-          </p:nvPr>
-        </p:nvSpPr>
         <p:spPr/>
       </p:sp>
       <p:sp>
@@ -3013,7 +2870,7 @@
           <a:p>
             <a:fld id="{F7021451-1387-4CA6-816F-3879F97B5CBC}" type="slidenum">
               <a:rPr lang="en-US"/>
-              <a:t>32</a:t>
+              <a:t>31</a:t>
             </a:fld>
             <a:endParaRPr lang="en-US"/>
           </a:p>
@@ -3032,7 +2889,7 @@
 </p:notes>
 </file>
 
-<file path=ppt/notesSlides/notesSlide32.xml><?xml version="1.0" encoding="utf-8"?>
+<file path=ppt/notesSlides/notesSlide31.xml><?xml version="1.0" encoding="utf-8"?>
 <p:notes xmlns:a="http://schemas.openxmlformats.org/drawingml/2006/main" xmlns:r="http://schemas.openxmlformats.org/officeDocument/2006/relationships" xmlns:p="http://schemas.openxmlformats.org/presentationml/2006/main">
   <p:cSld>
     <p:spTree>
@@ -3124,7 +2981,7 @@
           <a:p>
             <a:fld id="{F7021451-1387-4CA6-816F-3879F97B5CBC}" type="slidenum">
               <a:rPr lang="en-US"/>
-              <a:t>33</a:t>
+              <a:t>32</a:t>
             </a:fld>
             <a:endParaRPr lang="en-US"/>
           </a:p>
@@ -3143,7 +3000,7 @@
 </p:notes>
 </file>
 
-<file path=ppt/notesSlides/notesSlide33.xml><?xml version="1.0" encoding="utf-8"?>
+<file path=ppt/notesSlides/notesSlide32.xml><?xml version="1.0" encoding="utf-8"?>
 <p:notes xmlns:a="http://schemas.openxmlformats.org/drawingml/2006/main" xmlns:r="http://schemas.openxmlformats.org/officeDocument/2006/relationships" xmlns:p="http://schemas.openxmlformats.org/presentationml/2006/main">
   <p:cSld>
     <p:spTree>
@@ -3241,7 +3098,7 @@
           <a:p>
             <a:fld id="{F7021451-1387-4CA6-816F-3879F97B5CBC}" type="slidenum">
               <a:rPr lang="en-US"/>
-              <a:t>34</a:t>
+              <a:t>33</a:t>
             </a:fld>
             <a:endParaRPr lang="en-US"/>
           </a:p>
@@ -3260,7 +3117,7 @@
 </p:notes>
 </file>
 
-<file path=ppt/notesSlides/notesSlide34.xml><?xml version="1.0" encoding="utf-8"?>
+<file path=ppt/notesSlides/notesSlide33.xml><?xml version="1.0" encoding="utf-8"?>
 <p:notes xmlns:a="http://schemas.openxmlformats.org/drawingml/2006/main" xmlns:r="http://schemas.openxmlformats.org/officeDocument/2006/relationships" xmlns:p="http://schemas.openxmlformats.org/presentationml/2006/main">
   <p:cSld>
     <p:spTree>
@@ -3328,7 +3185,7 @@
           <a:p>
             <a:fld id="{F7021451-1387-4CA6-816F-3879F97B5CBC}" type="slidenum">
               <a:rPr lang="en-US"/>
-              <a:t>35</a:t>
+              <a:t>34</a:t>
             </a:fld>
             <a:endParaRPr lang="en-US"/>
           </a:p>
@@ -3347,7 +3204,7 @@
 </p:notes>
 </file>
 
-<file path=ppt/notesSlides/notesSlide35.xml><?xml version="1.0" encoding="utf-8"?>
+<file path=ppt/notesSlides/notesSlide34.xml><?xml version="1.0" encoding="utf-8"?>
 <p:notes xmlns:a="http://schemas.openxmlformats.org/drawingml/2006/main" xmlns:r="http://schemas.openxmlformats.org/officeDocument/2006/relationships" xmlns:p="http://schemas.openxmlformats.org/presentationml/2006/main">
   <p:cSld>
     <p:spTree>
@@ -3439,7 +3296,7 @@
           <a:p>
             <a:fld id="{F7021451-1387-4CA6-816F-3879F97B5CBC}" type="slidenum">
               <a:rPr lang="en-US"/>
-              <a:t>36</a:t>
+              <a:t>35</a:t>
             </a:fld>
             <a:endParaRPr lang="en-US"/>
           </a:p>
@@ -3458,7 +3315,7 @@
 </p:notes>
 </file>
 
-<file path=ppt/notesSlides/notesSlide36.xml><?xml version="1.0" encoding="utf-8"?>
+<file path=ppt/notesSlides/notesSlide35.xml><?xml version="1.0" encoding="utf-8"?>
 <p:notes xmlns:a="http://schemas.openxmlformats.org/drawingml/2006/main" xmlns:r="http://schemas.openxmlformats.org/officeDocument/2006/relationships" xmlns:p="http://schemas.openxmlformats.org/presentationml/2006/main">
   <p:cSld>
     <p:spTree>
@@ -3556,7 +3413,7 @@
           <a:p>
             <a:fld id="{F7021451-1387-4CA6-816F-3879F97B5CBC}" type="slidenum">
               <a:rPr lang="en-US"/>
-              <a:t>37</a:t>
+              <a:t>36</a:t>
             </a:fld>
             <a:endParaRPr lang="en-US"/>
           </a:p>
@@ -3575,7 +3432,7 @@
 </p:notes>
 </file>
 
-<file path=ppt/notesSlides/notesSlide37.xml><?xml version="1.0" encoding="utf-8"?>
+<file path=ppt/notesSlides/notesSlide36.xml><?xml version="1.0" encoding="utf-8"?>
 <p:notes xmlns:a="http://schemas.openxmlformats.org/drawingml/2006/main" xmlns:r="http://schemas.openxmlformats.org/officeDocument/2006/relationships" xmlns:p="http://schemas.openxmlformats.org/presentationml/2006/main">
   <p:cSld>
     <p:spTree>
@@ -3649,7 +3506,7 @@
           <a:p>
             <a:fld id="{F7021451-1387-4CA6-816F-3879F97B5CBC}" type="slidenum">
               <a:rPr lang="en-US"/>
-              <a:t>38</a:t>
+              <a:t>37</a:t>
             </a:fld>
             <a:endParaRPr lang="en-US"/>
           </a:p>
@@ -3668,7 +3525,7 @@
 </p:notes>
 </file>
 
-<file path=ppt/notesSlides/notesSlide38.xml><?xml version="1.0" encoding="utf-8"?>
+<file path=ppt/notesSlides/notesSlide37.xml><?xml version="1.0" encoding="utf-8"?>
 <p:notes xmlns:a="http://schemas.openxmlformats.org/drawingml/2006/main" xmlns:r="http://schemas.openxmlformats.org/officeDocument/2006/relationships" xmlns:p="http://schemas.openxmlformats.org/presentationml/2006/main">
   <p:cSld>
     <p:spTree>
@@ -3766,7 +3623,7 @@
           <a:p>
             <a:fld id="{F7021451-1387-4CA6-816F-3879F97B5CBC}" type="slidenum">
               <a:rPr lang="en-US"/>
-              <a:t>39</a:t>
+              <a:t>38</a:t>
             </a:fld>
             <a:endParaRPr lang="en-US"/>
           </a:p>
@@ -3785,18 +3642,12 @@
 </p:notes>
 </file>
 
-<file path=ppt/notesSlides/notesSlide39.xml><?xml version="1.0" encoding="utf-8"?>
+<file path=ppt/notesSlides/notesSlide38.xml><?xml version="1.0" encoding="utf-8"?>
 <p:notes xmlns:a="http://schemas.openxmlformats.org/drawingml/2006/main" xmlns:r="http://schemas.openxmlformats.org/officeDocument/2006/relationships" xmlns:p="http://schemas.openxmlformats.org/presentationml/2006/main">
   <p:cSld>
     <p:spTree>
       <p:nvGrpSpPr>
-        <p:cNvPr id="1" name="">
-          <a:extLst>
-            <a:ext uri="{FF2B5EF4-FFF2-40B4-BE49-F238E27FC236}">
-              <a16:creationId xmlns:a16="http://schemas.microsoft.com/office/drawing/2014/main" id="{563E29B8-5372-5A08-6FEF-A81B7745CC50}"/>
-            </a:ext>
-          </a:extLst>
-        </p:cNvPr>
+        <p:cNvPr id="1" name=""/>
         <p:cNvGrpSpPr/>
         <p:nvPr/>
       </p:nvGrpSpPr>
@@ -3810,13 +3661,7 @@
       </p:grpSpPr>
       <p:sp>
         <p:nvSpPr>
-          <p:cNvPr id="2" name="Slide Image Placeholder 1">
-            <a:extLst>
-              <a:ext uri="{FF2B5EF4-FFF2-40B4-BE49-F238E27FC236}">
-                <a16:creationId xmlns:a16="http://schemas.microsoft.com/office/drawing/2014/main" id="{932AE8A2-A2AD-2435-B7E5-CEB345584737}"/>
-              </a:ext>
-            </a:extLst>
-          </p:cNvPr>
+          <p:cNvPr id="2" name="Slide Image Placeholder 1"/>
           <p:cNvSpPr>
             <a:spLocks noGrp="1" noRot="1" noChangeAspect="1"/>
           </p:cNvSpPr>
@@ -3828,13 +3673,7 @@
       </p:sp>
       <p:sp>
         <p:nvSpPr>
-          <p:cNvPr id="3" name="Notes Placeholder 2">
-            <a:extLst>
-              <a:ext uri="{FF2B5EF4-FFF2-40B4-BE49-F238E27FC236}">
-                <a16:creationId xmlns:a16="http://schemas.microsoft.com/office/drawing/2014/main" id="{9C69E0C0-C363-E26C-0C13-E39FD76D3F77}"/>
-              </a:ext>
-            </a:extLst>
-          </p:cNvPr>
+          <p:cNvPr id="3" name="Notes Placeholder 2"/>
           <p:cNvSpPr>
             <a:spLocks noGrp="1"/>
           </p:cNvSpPr>
@@ -3849,20 +3688,20 @@
           <a:p>
             <a:r>
               <a:rPr lang="en-US" dirty="0"/>
-              <a:t>In the demo I will flip this live, and you will watch Records, Prescriptions, and Analytics change together.</a:t>
+              <a:t>Two layers of preloading. Eager on mount. Hover on demand.</a:t>
+            </a:r>
+          </a:p>
+          <a:p>
+            <a:r>
+              <a:rPr lang="en-US" dirty="0"/>
+              <a:t>There is a prefetchers map. One function per module. Each function is a bare import of that remote. At shell init, we fire the ones marked eager. Records starts loading before the user has clicked anything.</a:t>
             </a:r>
           </a:p>
         </p:txBody>
       </p:sp>
       <p:sp>
         <p:nvSpPr>
-          <p:cNvPr id="4" name="Slide Number Placeholder 3">
-            <a:extLst>
-              <a:ext uri="{FF2B5EF4-FFF2-40B4-BE49-F238E27FC236}">
-                <a16:creationId xmlns:a16="http://schemas.microsoft.com/office/drawing/2014/main" id="{D0CA3F0D-B84A-84C7-CCE7-445B4B705FE5}"/>
-              </a:ext>
-            </a:extLst>
-          </p:cNvPr>
+          <p:cNvPr id="4" name="Slide Number Placeholder 3"/>
           <p:cNvSpPr>
             <a:spLocks noGrp="1"/>
           </p:cNvSpPr>
@@ -3877,7 +3716,7 @@
           <a:p>
             <a:fld id="{F7021451-1387-4CA6-816F-3879F97B5CBC}" type="slidenum">
               <a:rPr lang="en-US"/>
-              <a:t>40</a:t>
+              <a:t>39</a:t>
             </a:fld>
             <a:endParaRPr lang="en-US"/>
           </a:p>
@@ -3886,7 +3725,102 @@
     </p:spTree>
     <p:extLst>
       <p:ext uri="{BB962C8B-B14F-4D97-AF65-F5344CB8AC3E}">
-        <p14:creationId xmlns:p14="http://schemas.microsoft.com/office/powerpoint/2010/main" val="848263606"/>
+        <p14:creationId xmlns:p14="http://schemas.microsoft.com/office/powerpoint/2010/main" val="1024086991"/>
+      </p:ext>
+    </p:extLst>
+  </p:cSld>
+  <p:clrMapOvr>
+    <a:masterClrMapping/>
+  </p:clrMapOvr>
+</p:notes>
+</file>
+
+<file path=ppt/notesSlides/notesSlide39.xml><?xml version="1.0" encoding="utf-8"?>
+<p:notes xmlns:a="http://schemas.openxmlformats.org/drawingml/2006/main" xmlns:r="http://schemas.openxmlformats.org/officeDocument/2006/relationships" xmlns:p="http://schemas.openxmlformats.org/presentationml/2006/main">
+  <p:cSld>
+    <p:spTree>
+      <p:nvGrpSpPr>
+        <p:cNvPr id="1" name=""/>
+        <p:cNvGrpSpPr/>
+        <p:nvPr/>
+      </p:nvGrpSpPr>
+      <p:grpSpPr>
+        <a:xfrm>
+          <a:off x="0" y="0"/>
+          <a:ext cx="0" cy="0"/>
+          <a:chOff x="0" y="0"/>
+          <a:chExt cx="0" cy="0"/>
+        </a:xfrm>
+      </p:grpSpPr>
+      <p:sp>
+        <p:nvSpPr>
+          <p:cNvPr id="2" name="Slide Image Placeholder 1"/>
+          <p:cNvSpPr>
+            <a:spLocks noGrp="1" noRot="1" noChangeAspect="1"/>
+          </p:cNvSpPr>
+          <p:nvPr>
+            <p:ph type="sldImg"/>
+          </p:nvPr>
+        </p:nvSpPr>
+        <p:spPr>
+          <a:xfrm>
+            <a:off x="-225425" y="1524000"/>
+            <a:ext cx="7308850" cy="4113213"/>
+          </a:xfrm>
+          <a:prstGeom prst="rect">
+            <a:avLst/>
+          </a:prstGeom>
+          <a:noFill/>
+          <a:ln w="12700">
+            <a:solidFill>
+              <a:prstClr val="black"/>
+            </a:solidFill>
+          </a:ln>
+        </p:spPr>
+      </p:sp>
+      <p:sp>
+        <p:nvSpPr>
+          <p:cNvPr id="3" name="Notes Placeholder 2"/>
+          <p:cNvSpPr>
+            <a:spLocks noGrp="1"/>
+          </p:cNvSpPr>
+          <p:nvPr>
+            <p:ph type="body" idx="1"/>
+          </p:nvPr>
+        </p:nvSpPr>
+        <p:spPr>
+          <a:xfrm>
+            <a:off x="685800" y="5865813"/>
+            <a:ext cx="5486400" cy="4799012"/>
+          </a:xfrm>
+          <a:prstGeom prst="rect">
+            <a:avLst/>
+          </a:prstGeom>
+        </p:spPr>
+        <p:txBody>
+          <a:bodyPr/>
+          <a:lstStyle/>
+          <a:p>
+            <a:r>
+              <a:rPr lang="en-US" dirty="0"/>
+              <a:t>For the rest, the nav link fires on mouse enter. When the cursor touches Prescriptions or Analytics, the chunk starts fetching in the background. Click, and it is often already cached.</a:t>
+            </a:r>
+          </a:p>
+          <a:p>
+            <a:r>
+              <a:rPr lang="en-US" dirty="0"/>
+              <a:t>Instant means the landing page fetches lazily, with no streaming delay. Eager means preloaded the moment the shell mounts. Hover means prefetched when the user aims at a tab. That is why Records feels instant even though it is a separate app on a separate server. The work happened at mount.</a:t>
+            </a:r>
+          </a:p>
+          <a:p>
+            <a:endParaRPr lang="en-GB" dirty="0"/>
+          </a:p>
+        </p:txBody>
+      </p:sp>
+    </p:spTree>
+    <p:extLst>
+      <p:ext uri="{BB962C8B-B14F-4D97-AF65-F5344CB8AC3E}">
+        <p14:creationId xmlns:p14="http://schemas.microsoft.com/office/powerpoint/2010/main" val="2202382534"/>
       </p:ext>
     </p:extLst>
   </p:cSld>
@@ -4029,13 +3963,49 @@
           <a:p>
             <a:r>
               <a:rPr lang="en-US" dirty="0"/>
-              <a:t>Two layers of preloading. Eager on mount. Hover on demand.</a:t>
+              <a:t>Seven things to take with you.</a:t>
             </a:r>
           </a:p>
           <a:p>
             <a:r>
               <a:rPr lang="en-US" dirty="0"/>
-              <a:t>There is a prefetchers map. One function per module. Each function is a bare import of that remote. At shell init, we fire the ones marked eager. Records starts loading before the user has clicked anything.</a:t>
+              <a:t>One. Micro-frontends solve a people problem. Adopt this when your team is growing and the monolith cannot keep up. Independent modules let independent teams ship without blocking each other. Team size is the signal, not bundle size.</a:t>
+            </a:r>
+          </a:p>
+          <a:p>
+            <a:r>
+              <a:rPr lang="en-US" dirty="0"/>
+              <a:t>Two. Suspense fallbacks cover load UX. Module Federation covers team DX. You want both. This demo runs both together.</a:t>
+            </a:r>
+          </a:p>
+          <a:p>
+            <a:r>
+              <a:rPr lang="en-US" dirty="0"/>
+              <a:t>Three. Prefer events over shared state. A custom event on window gives you decoupled communication that survives independent deploys. Keep the payload backward compatible.</a:t>
+            </a:r>
+          </a:p>
+          <a:p>
+            <a:r>
+              <a:rPr lang="en-US" dirty="0"/>
+              <a:t>Four. The host owns routing. Remotes can ask for navigation with navigateToModule. Only the shell mutates router state.</a:t>
+            </a:r>
+          </a:p>
+          <a:p>
+            <a:r>
+              <a:rPr lang="en-US" dirty="0"/>
+              <a:t>Five. Ship fault isolation on purpose. A catch on every lazy import, plus an error boundary per module, keeps one broken remote from taking down the app.</a:t>
+            </a:r>
+          </a:p>
+          <a:p>
+            <a:r>
+              <a:rPr lang="en-US" dirty="0"/>
+              <a:t>Six. Rspack keeps the monorepo fast. Sub-second hot reload across four applications. Module Federation is built in. Rspack 2.1 ships the Rust React Compiler, and persistent caching for faster builds and faster restarts.</a:t>
+            </a:r>
+          </a:p>
+          <a:p>
+            <a:r>
+              <a:rPr lang="en-US" dirty="0"/>
+              <a:t>Seven. Match load strategy to content priority. Instant for the landing page. Eager for high-value content. Streamed for secondary modules, with skeletons. Do not load every remote the same way.</a:t>
             </a:r>
           </a:p>
         </p:txBody>
@@ -4077,230 +4047,6 @@
 </file>
 
 <file path=ppt/notesSlides/notesSlide41.xml><?xml version="1.0" encoding="utf-8"?>
-<p:notes xmlns:a="http://schemas.openxmlformats.org/drawingml/2006/main" xmlns:r="http://schemas.openxmlformats.org/officeDocument/2006/relationships" xmlns:p="http://schemas.openxmlformats.org/presentationml/2006/main">
-  <p:cSld>
-    <p:spTree>
-      <p:nvGrpSpPr>
-        <p:cNvPr id="1" name=""/>
-        <p:cNvGrpSpPr/>
-        <p:nvPr/>
-      </p:nvGrpSpPr>
-      <p:grpSpPr>
-        <a:xfrm>
-          <a:off x="0" y="0"/>
-          <a:ext cx="0" cy="0"/>
-          <a:chOff x="0" y="0"/>
-          <a:chExt cx="0" cy="0"/>
-        </a:xfrm>
-      </p:grpSpPr>
-      <p:sp>
-        <p:nvSpPr>
-          <p:cNvPr id="2" name="Slide Image Placeholder 1"/>
-          <p:cNvSpPr>
-            <a:spLocks noGrp="1" noRot="1" noChangeAspect="1"/>
-          </p:cNvSpPr>
-          <p:nvPr>
-            <p:ph type="sldImg"/>
-          </p:nvPr>
-        </p:nvSpPr>
-        <p:spPr>
-          <a:xfrm>
-            <a:off x="-225425" y="1524000"/>
-            <a:ext cx="7308850" cy="4113213"/>
-          </a:xfrm>
-          <a:prstGeom prst="rect">
-            <a:avLst/>
-          </a:prstGeom>
-          <a:noFill/>
-          <a:ln w="12700">
-            <a:solidFill>
-              <a:prstClr val="black"/>
-            </a:solidFill>
-          </a:ln>
-        </p:spPr>
-      </p:sp>
-      <p:sp>
-        <p:nvSpPr>
-          <p:cNvPr id="3" name="Notes Placeholder 2"/>
-          <p:cNvSpPr>
-            <a:spLocks noGrp="1"/>
-          </p:cNvSpPr>
-          <p:nvPr>
-            <p:ph type="body" idx="1"/>
-          </p:nvPr>
-        </p:nvSpPr>
-        <p:spPr>
-          <a:xfrm>
-            <a:off x="685800" y="5865813"/>
-            <a:ext cx="5486400" cy="4799012"/>
-          </a:xfrm>
-          <a:prstGeom prst="rect">
-            <a:avLst/>
-          </a:prstGeom>
-        </p:spPr>
-        <p:txBody>
-          <a:bodyPr/>
-          <a:lstStyle/>
-          <a:p>
-            <a:r>
-              <a:rPr lang="en-US" dirty="0"/>
-              <a:t>For the rest, the nav link fires on mouse enter. When the cursor touches Prescriptions or Analytics, the chunk starts fetching in the background. Click, and it is often already cached.</a:t>
-            </a:r>
-          </a:p>
-          <a:p>
-            <a:r>
-              <a:rPr lang="en-US" dirty="0"/>
-              <a:t>Instant means the landing page fetches lazily, with no streaming delay. Eager means preloaded the moment the shell mounts. Hover means prefetched when the user aims at a tab. That is why Records feels instant even though it is a separate app on a separate server. The work happened at mount.</a:t>
-            </a:r>
-          </a:p>
-          <a:p>
-            <a:endParaRPr lang="en-GB" dirty="0"/>
-          </a:p>
-        </p:txBody>
-      </p:sp>
-    </p:spTree>
-    <p:extLst>
-      <p:ext uri="{BB962C8B-B14F-4D97-AF65-F5344CB8AC3E}">
-        <p14:creationId xmlns:p14="http://schemas.microsoft.com/office/powerpoint/2010/main" val="2202382534"/>
-      </p:ext>
-    </p:extLst>
-  </p:cSld>
-  <p:clrMapOvr>
-    <a:masterClrMapping/>
-  </p:clrMapOvr>
-</p:notes>
-</file>
-
-<file path=ppt/notesSlides/notesSlide42.xml><?xml version="1.0" encoding="utf-8"?>
-<p:notes xmlns:a="http://schemas.openxmlformats.org/drawingml/2006/main" xmlns:r="http://schemas.openxmlformats.org/officeDocument/2006/relationships" xmlns:p="http://schemas.openxmlformats.org/presentationml/2006/main">
-  <p:cSld>
-    <p:spTree>
-      <p:nvGrpSpPr>
-        <p:cNvPr id="1" name=""/>
-        <p:cNvGrpSpPr/>
-        <p:nvPr/>
-      </p:nvGrpSpPr>
-      <p:grpSpPr>
-        <a:xfrm>
-          <a:off x="0" y="0"/>
-          <a:ext cx="0" cy="0"/>
-          <a:chOff x="0" y="0"/>
-          <a:chExt cx="0" cy="0"/>
-        </a:xfrm>
-      </p:grpSpPr>
-      <p:sp>
-        <p:nvSpPr>
-          <p:cNvPr id="2" name="Slide Image Placeholder 1"/>
-          <p:cNvSpPr>
-            <a:spLocks noGrp="1" noRot="1" noChangeAspect="1"/>
-          </p:cNvSpPr>
-          <p:nvPr>
-            <p:ph type="sldImg"/>
-          </p:nvPr>
-        </p:nvSpPr>
-        <p:spPr/>
-      </p:sp>
-      <p:sp>
-        <p:nvSpPr>
-          <p:cNvPr id="3" name="Notes Placeholder 2"/>
-          <p:cNvSpPr>
-            <a:spLocks noGrp="1"/>
-          </p:cNvSpPr>
-          <p:nvPr>
-            <p:ph type="body" idx="1"/>
-          </p:nvPr>
-        </p:nvSpPr>
-        <p:spPr/>
-        <p:txBody>
-          <a:bodyPr/>
-          <a:lstStyle/>
-          <a:p>
-            <a:r>
-              <a:rPr lang="en-US" dirty="0"/>
-              <a:t>Seven things to take with you.</a:t>
-            </a:r>
-          </a:p>
-          <a:p>
-            <a:r>
-              <a:rPr lang="en-US" dirty="0"/>
-              <a:t>One. Micro-frontends solve a people problem. Adopt this when your team is growing and the monolith cannot keep up. Independent modules let independent teams ship without blocking each other. Team size is the signal, not bundle size.</a:t>
-            </a:r>
-          </a:p>
-          <a:p>
-            <a:r>
-              <a:rPr lang="en-US" dirty="0"/>
-              <a:t>Two. Suspense fallbacks cover load UX. Module Federation covers team DX. You want both. This demo runs both together.</a:t>
-            </a:r>
-          </a:p>
-          <a:p>
-            <a:r>
-              <a:rPr lang="en-US" dirty="0"/>
-              <a:t>Three. Prefer events over shared state. A custom event on window gives you decoupled communication that survives independent deploys. Keep the payload backward compatible.</a:t>
-            </a:r>
-          </a:p>
-          <a:p>
-            <a:r>
-              <a:rPr lang="en-US" dirty="0"/>
-              <a:t>Four. The host owns routing. Remotes can ask for navigation with navigateToModule. Only the shell mutates router state.</a:t>
-            </a:r>
-          </a:p>
-          <a:p>
-            <a:r>
-              <a:rPr lang="en-US" dirty="0"/>
-              <a:t>Five. Ship fault isolation on purpose. A catch on every lazy import, plus an error boundary per module, keeps one broken remote from taking down the app.</a:t>
-            </a:r>
-          </a:p>
-          <a:p>
-            <a:r>
-              <a:rPr lang="en-US" dirty="0"/>
-              <a:t>Six. Rspack keeps the monorepo fast. Sub-second hot reload across four applications. Module Federation is built in. Rspack 2.1 ships the Rust React Compiler, and persistent caching for faster builds and faster restarts.</a:t>
-            </a:r>
-          </a:p>
-          <a:p>
-            <a:r>
-              <a:rPr lang="en-US" dirty="0"/>
-              <a:t>Seven. Match load strategy to content priority. Instant for the landing page. Eager for high-value content. Streamed for secondary modules, with skeletons. Do not load every remote the same way.</a:t>
-            </a:r>
-          </a:p>
-        </p:txBody>
-      </p:sp>
-      <p:sp>
-        <p:nvSpPr>
-          <p:cNvPr id="4" name="Slide Number Placeholder 3"/>
-          <p:cNvSpPr>
-            <a:spLocks noGrp="1"/>
-          </p:cNvSpPr>
-          <p:nvPr>
-            <p:ph type="sldNum" sz="quarter" idx="10"/>
-          </p:nvPr>
-        </p:nvSpPr>
-        <p:spPr/>
-        <p:txBody>
-          <a:bodyPr/>
-          <a:lstStyle/>
-          <a:p>
-            <a:fld id="{F7021451-1387-4CA6-816F-3879F97B5CBC}" type="slidenum">
-              <a:rPr lang="en-US"/>
-              <a:t>43</a:t>
-            </a:fld>
-            <a:endParaRPr lang="en-US"/>
-          </a:p>
-        </p:txBody>
-      </p:sp>
-    </p:spTree>
-    <p:extLst>
-      <p:ext uri="{BB962C8B-B14F-4D97-AF65-F5344CB8AC3E}">
-        <p14:creationId xmlns:p14="http://schemas.microsoft.com/office/powerpoint/2010/main" val="1024086991"/>
-      </p:ext>
-    </p:extLst>
-  </p:cSld>
-  <p:clrMapOvr>
-    <a:masterClrMapping/>
-  </p:clrMapOvr>
-</p:notes>
-</file>
-
-<file path=ppt/notesSlides/notesSlide43.xml><?xml version="1.0" encoding="utf-8"?>
 <p:notes xmlns:a="http://schemas.openxmlformats.org/drawingml/2006/main" xmlns:r="http://schemas.openxmlformats.org/officeDocument/2006/relationships" xmlns:p="http://schemas.openxmlformats.org/presentationml/2006/main">
   <p:cSld>
     <p:spTree>
@@ -16563,210 +16309,6 @@
 </file>
 
 <file path=ppt/slides/slide30.xml><?xml version="1.0" encoding="utf-8"?>
-<p:sld xmlns:a="http://schemas.openxmlformats.org/drawingml/2006/main" xmlns:r="http://schemas.openxmlformats.org/officeDocument/2006/relationships" xmlns:p="http://schemas.openxmlformats.org/presentationml/2006/main" show="0">
-  <p:cSld>
-    <p:bg>
-      <p:bgPr>
-        <a:solidFill>
-          <a:srgbClr val="0C0C0C"/>
-        </a:solidFill>
-        <a:effectLst/>
-      </p:bgPr>
-    </p:bg>
-    <p:spTree>
-      <p:nvGrpSpPr>
-        <p:cNvPr id="1" name="">
-          <a:extLst>
-            <a:ext uri="{FF2B5EF4-FFF2-40B4-BE49-F238E27FC236}">
-              <a16:creationId xmlns:a16="http://schemas.microsoft.com/office/drawing/2014/main" id="{5BEAE97A-93D2-71A3-F8E4-966B5995B41F}"/>
-            </a:ext>
-          </a:extLst>
-        </p:cNvPr>
-        <p:cNvGrpSpPr/>
-        <p:nvPr/>
-      </p:nvGrpSpPr>
-      <p:grpSpPr>
-        <a:xfrm>
-          <a:off x="0" y="0"/>
-          <a:ext cx="0" cy="0"/>
-          <a:chOff x="0" y="0"/>
-          <a:chExt cx="0" cy="0"/>
-        </a:xfrm>
-      </p:grpSpPr>
-      <p:sp>
-        <p:nvSpPr>
-          <p:cNvPr id="4" name="Text 2">
-            <a:extLst>
-              <a:ext uri="{FF2B5EF4-FFF2-40B4-BE49-F238E27FC236}">
-                <a16:creationId xmlns:a16="http://schemas.microsoft.com/office/drawing/2014/main" id="{C0E7C841-CD9B-AC06-4ACA-B40050601CDF}"/>
-              </a:ext>
-            </a:extLst>
-          </p:cNvPr>
-          <p:cNvSpPr/>
-          <p:nvPr/>
-        </p:nvSpPr>
-        <p:spPr>
-          <a:xfrm>
-            <a:off x="530352" y="713232"/>
-            <a:ext cx="11109960" cy="777240"/>
-          </a:xfrm>
-          <a:prstGeom prst="rect">
-            <a:avLst/>
-          </a:prstGeom>
-          <a:noFill/>
-          <a:ln/>
-        </p:spPr>
-        <p:txBody>
-          <a:bodyPr wrap="square" rtlCol="0" anchor="ctr"/>
-          <a:lstStyle/>
-          <a:p>
-            <a:pPr marL="0" indent="0">
-              <a:buNone/>
-            </a:pPr>
-            <a:r>
-              <a:rPr lang="en-US" sz="3300" i="1" dirty="0">
-                <a:solidFill>
-                  <a:srgbClr val="FAFAF9"/>
-                </a:solidFill>
-                <a:latin typeface="Instrument Serif" pitchFamily="34" charset="0"/>
-                <a:ea typeface="Instrument Serif" pitchFamily="34" charset="-122"/>
-                <a:cs typeface="Instrument Serif" pitchFamily="34" charset="-120"/>
-              </a:rPr>
-              <a:t>Settings · Commands · Federation Lab</a:t>
-            </a:r>
-            <a:endParaRPr lang="en-US" sz="3300" dirty="0"/>
-          </a:p>
-        </p:txBody>
-      </p:sp>
-      <p:sp>
-        <p:nvSpPr>
-          <p:cNvPr id="9" name="Text 5">
-            <a:extLst>
-              <a:ext uri="{FF2B5EF4-FFF2-40B4-BE49-F238E27FC236}">
-                <a16:creationId xmlns:a16="http://schemas.microsoft.com/office/drawing/2014/main" id="{FD4C2A18-B492-69F0-6C3E-D1498154B66D}"/>
-              </a:ext>
-            </a:extLst>
-          </p:cNvPr>
-          <p:cNvSpPr/>
-          <p:nvPr/>
-        </p:nvSpPr>
-        <p:spPr>
-          <a:xfrm>
-            <a:off x="530352" y="2439296"/>
-            <a:ext cx="11064240" cy="3906639"/>
-          </a:xfrm>
-          <a:prstGeom prst="rect">
-            <a:avLst/>
-          </a:prstGeom>
-          <a:noFill/>
-          <a:ln/>
-        </p:spPr>
-        <p:txBody>
-          <a:bodyPr wrap="square" rtlCol="0" anchor="t"/>
-          <a:lstStyle/>
-          <a:p>
-            <a:pPr marL="285750" indent="-285750">
-              <a:lnSpc>
-                <a:spcPct val="150000"/>
-              </a:lnSpc>
-              <a:buSzPct val="100000"/>
-              <a:buFont typeface="Arial" panose="020B0604020202020204" pitchFamily="34" charset="0"/>
-              <a:buChar char="•"/>
-            </a:pPr>
-            <a:r>
-              <a:rPr lang="en-US" sz="2400" dirty="0">
-                <a:solidFill>
-                  <a:srgbClr val="FAFAF9"/>
-                </a:solidFill>
-                <a:latin typeface="DM Sans" pitchFamily="34" charset="0"/>
-                <a:ea typeface="DM Sans" pitchFamily="34" charset="-122"/>
-                <a:cs typeface="DM Sans" pitchFamily="34" charset="-120"/>
-              </a:rPr>
-              <a:t>Health Monitor: polls each remoteEntry.js every 5s, shows latency</a:t>
-            </a:r>
-            <a:endParaRPr lang="en-US" sz="2400" dirty="0"/>
-          </a:p>
-          <a:p>
-            <a:pPr marL="285750" indent="-285750">
-              <a:lnSpc>
-                <a:spcPct val="150000"/>
-              </a:lnSpc>
-              <a:buSzPct val="100000"/>
-              <a:buFont typeface="Arial" panose="020B0604020202020204" pitchFamily="34" charset="0"/>
-              <a:buChar char="•"/>
-            </a:pPr>
-            <a:r>
-              <a:rPr lang="en-US" sz="2400" dirty="0">
-                <a:solidFill>
-                  <a:srgbClr val="FAFAF9"/>
-                </a:solidFill>
-                <a:latin typeface="DM Sans" pitchFamily="34" charset="0"/>
-                <a:ea typeface="DM Sans" pitchFamily="34" charset="-122"/>
-                <a:cs typeface="DM Sans" pitchFamily="34" charset="-120"/>
-              </a:rPr>
-              <a:t>Kill Switches: simulate remote failure; the rest keeps running</a:t>
-            </a:r>
-            <a:endParaRPr lang="en-US" sz="2400" dirty="0"/>
-          </a:p>
-          <a:p>
-            <a:pPr marL="285750" indent="-285750">
-              <a:lnSpc>
-                <a:spcPct val="150000"/>
-              </a:lnSpc>
-              <a:buSzPct val="100000"/>
-              <a:buFont typeface="Arial" panose="020B0604020202020204" pitchFamily="34" charset="0"/>
-              <a:buChar char="•"/>
-            </a:pPr>
-            <a:r>
-              <a:rPr lang="en-US" sz="2400" dirty="0">
-                <a:solidFill>
-                  <a:srgbClr val="FAFAF9"/>
-                </a:solidFill>
-                <a:latin typeface="DM Sans" pitchFamily="34" charset="0"/>
-                <a:ea typeface="DM Sans" pitchFamily="34" charset="-122"/>
-                <a:cs typeface="DM Sans" pitchFamily="34" charset="-120"/>
-              </a:rPr>
-              <a:t>A/B Deployment: toggle Stable ↔ Canary ring, per-module versions</a:t>
-            </a:r>
-            <a:endParaRPr lang="en-US" sz="2400" dirty="0"/>
-          </a:p>
-          <a:p>
-            <a:pPr marL="285750" indent="-285750">
-              <a:lnSpc>
-                <a:spcPct val="150000"/>
-              </a:lnSpc>
-              <a:buSzPct val="100000"/>
-              <a:buFont typeface="Arial" panose="020B0604020202020204" pitchFamily="34" charset="0"/>
-              <a:buChar char="•"/>
-            </a:pPr>
-            <a:r>
-              <a:rPr lang="en-US" sz="2400" dirty="0">
-                <a:solidFill>
-                  <a:srgbClr val="FAFAF9"/>
-                </a:solidFill>
-                <a:latin typeface="DM Sans" pitchFamily="34" charset="0"/>
-                <a:ea typeface="DM Sans" pitchFamily="34" charset="-122"/>
-                <a:cs typeface="DM Sans" pitchFamily="34" charset="-120"/>
-              </a:rPr>
-              <a:t>Theme: CSS variables + localStorage + themeChange event, zero shared imports</a:t>
-            </a:r>
-          </a:p>
-        </p:txBody>
-      </p:sp>
-    </p:spTree>
-    <p:extLst>
-      <p:ext uri="{BB962C8B-B14F-4D97-AF65-F5344CB8AC3E}">
-        <p14:creationId xmlns:p14="http://schemas.microsoft.com/office/powerpoint/2010/main" val="3383769051"/>
-      </p:ext>
-    </p:extLst>
-  </p:cSld>
-  <p:clrMapOvr>
-    <a:masterClrMapping/>
-  </p:clrMapOvr>
-</p:sld>
-</file>
-
-<file path=ppt/slides/slide31.xml><?xml version="1.0" encoding="utf-8"?>
 <p:sld xmlns:a="http://schemas.openxmlformats.org/drawingml/2006/main" xmlns:r="http://schemas.openxmlformats.org/officeDocument/2006/relationships" xmlns:p="http://schemas.openxmlformats.org/presentationml/2006/main">
   <p:cSld>
     <p:spTree>
@@ -16999,7 +16541,7 @@
 </p:sld>
 </file>
 
-<file path=ppt/slides/slide32.xml><?xml version="1.0" encoding="utf-8"?>
+<file path=ppt/slides/slide31.xml><?xml version="1.0" encoding="utf-8"?>
 <p:sld xmlns:a="http://schemas.openxmlformats.org/drawingml/2006/main" xmlns:r="http://schemas.openxmlformats.org/officeDocument/2006/relationships" xmlns:p="http://schemas.openxmlformats.org/presentationml/2006/main" show="0">
   <p:cSld name="Slide 10">
     <p:bg>
@@ -18164,7 +17706,7 @@
 </p:sld>
 </file>
 
-<file path=ppt/slides/slide33.xml><?xml version="1.0" encoding="utf-8"?>
+<file path=ppt/slides/slide32.xml><?xml version="1.0" encoding="utf-8"?>
 <p:sld xmlns:a="http://schemas.openxmlformats.org/drawingml/2006/main" xmlns:r="http://schemas.openxmlformats.org/officeDocument/2006/relationships" xmlns:p="http://schemas.openxmlformats.org/presentationml/2006/main" show="0">
   <p:cSld>
     <p:bg>
@@ -18686,8 +18228,8 @@
 </p:sld>
 </file>
 
-<file path=ppt/slides/slide34.xml><?xml version="1.0" encoding="utf-8"?>
-<p:sld xmlns:a="http://schemas.openxmlformats.org/drawingml/2006/main" xmlns:r="http://schemas.openxmlformats.org/officeDocument/2006/relationships" xmlns:p="http://schemas.openxmlformats.org/presentationml/2006/main">
+<file path=ppt/slides/slide33.xml><?xml version="1.0" encoding="utf-8"?>
+<p:sld xmlns:a="http://schemas.openxmlformats.org/drawingml/2006/main" xmlns:r="http://schemas.openxmlformats.org/officeDocument/2006/relationships" xmlns:p="http://schemas.openxmlformats.org/presentationml/2006/main" show="0">
   <p:cSld>
     <p:bg>
       <p:bgPr>
@@ -18861,8 +18403,8 @@
 </p:sld>
 </file>
 
-<file path=ppt/slides/slide35.xml><?xml version="1.0" encoding="utf-8"?>
-<p:sld xmlns:a="http://schemas.openxmlformats.org/drawingml/2006/main" xmlns:r="http://schemas.openxmlformats.org/officeDocument/2006/relationships" xmlns:p="http://schemas.openxmlformats.org/presentationml/2006/main">
+<file path=ppt/slides/slide34.xml><?xml version="1.0" encoding="utf-8"?>
+<p:sld xmlns:a="http://schemas.openxmlformats.org/drawingml/2006/main" xmlns:r="http://schemas.openxmlformats.org/officeDocument/2006/relationships" xmlns:p="http://schemas.openxmlformats.org/presentationml/2006/main" show="0">
   <p:cSld name="Slide 11">
     <p:bg>
       <p:bgPr>
@@ -20095,8 +19637,8 @@
 </p:sld>
 </file>
 
-<file path=ppt/slides/slide36.xml><?xml version="1.0" encoding="utf-8"?>
-<p:sld xmlns:a="http://schemas.openxmlformats.org/drawingml/2006/main" xmlns:r="http://schemas.openxmlformats.org/officeDocument/2006/relationships" xmlns:p="http://schemas.openxmlformats.org/presentationml/2006/main">
+<file path=ppt/slides/slide35.xml><?xml version="1.0" encoding="utf-8"?>
+<p:sld xmlns:a="http://schemas.openxmlformats.org/drawingml/2006/main" xmlns:r="http://schemas.openxmlformats.org/officeDocument/2006/relationships" xmlns:p="http://schemas.openxmlformats.org/presentationml/2006/main" show="0">
   <p:cSld>
     <p:bg>
       <p:bgPr>
@@ -20718,7 +20260,7 @@
 </p:sld>
 </file>
 
-<file path=ppt/slides/slide37.xml><?xml version="1.0" encoding="utf-8"?>
+<file path=ppt/slides/slide36.xml><?xml version="1.0" encoding="utf-8"?>
 <p:sld xmlns:a="http://schemas.openxmlformats.org/drawingml/2006/main" xmlns:r="http://schemas.openxmlformats.org/officeDocument/2006/relationships" xmlns:p="http://schemas.openxmlformats.org/presentationml/2006/main">
   <p:cSld>
     <p:bg>
@@ -20945,7 +20487,7 @@
 </p:sld>
 </file>
 
-<file path=ppt/slides/slide38.xml><?xml version="1.0" encoding="utf-8"?>
+<file path=ppt/slides/slide37.xml><?xml version="1.0" encoding="utf-8"?>
 <p:sld xmlns:a="http://schemas.openxmlformats.org/drawingml/2006/main" xmlns:r="http://schemas.openxmlformats.org/officeDocument/2006/relationships" xmlns:p="http://schemas.openxmlformats.org/presentationml/2006/main">
   <p:cSld name="Slide 12">
     <p:bg>
@@ -21231,8 +20773,8 @@
 </p:sld>
 </file>
 
-<file path=ppt/slides/slide39.xml><?xml version="1.0" encoding="utf-8"?>
-<p:sld xmlns:a="http://schemas.openxmlformats.org/drawingml/2006/main" xmlns:r="http://schemas.openxmlformats.org/officeDocument/2006/relationships" xmlns:p="http://schemas.openxmlformats.org/presentationml/2006/main">
+<file path=ppt/slides/slide38.xml><?xml version="1.0" encoding="utf-8"?>
+<p:sld xmlns:a="http://schemas.openxmlformats.org/drawingml/2006/main" xmlns:r="http://schemas.openxmlformats.org/officeDocument/2006/relationships" xmlns:p="http://schemas.openxmlformats.org/presentationml/2006/main" show="0">
   <p:cSld>
     <p:bg>
       <p:bgPr>
@@ -22374,6 +21916,1618 @@
 </p:sld>
 </file>
 
+<file path=ppt/slides/slide39.xml><?xml version="1.0" encoding="utf-8"?>
+<p:sld xmlns:a="http://schemas.openxmlformats.org/drawingml/2006/main" xmlns:r="http://schemas.openxmlformats.org/officeDocument/2006/relationships" xmlns:p="http://schemas.openxmlformats.org/presentationml/2006/main" show="0">
+  <p:cSld name="Slide 13">
+    <p:bg>
+      <p:bgPr>
+        <a:solidFill>
+          <a:srgbClr val="0C0C0C"/>
+        </a:solidFill>
+        <a:effectLst/>
+      </p:bgPr>
+    </p:bg>
+    <p:spTree>
+      <p:nvGrpSpPr>
+        <p:cNvPr id="1" name=""/>
+        <p:cNvGrpSpPr/>
+        <p:nvPr/>
+      </p:nvGrpSpPr>
+      <p:grpSpPr>
+        <a:xfrm>
+          <a:off x="0" y="0"/>
+          <a:ext cx="0" cy="0"/>
+          <a:chOff x="0" y="0"/>
+          <a:chExt cx="0" cy="0"/>
+        </a:xfrm>
+      </p:grpSpPr>
+      <p:sp>
+        <p:nvSpPr>
+          <p:cNvPr id="4" name="Text 2"/>
+          <p:cNvSpPr/>
+          <p:nvPr/>
+        </p:nvSpPr>
+        <p:spPr>
+          <a:xfrm>
+            <a:off x="245187" y="35778"/>
+            <a:ext cx="11109960" cy="777240"/>
+          </a:xfrm>
+          <a:prstGeom prst="rect">
+            <a:avLst/>
+          </a:prstGeom>
+          <a:noFill/>
+          <a:ln/>
+        </p:spPr>
+        <p:txBody>
+          <a:bodyPr wrap="square" rtlCol="0" anchor="ctr"/>
+          <a:lstStyle/>
+          <a:p>
+            <a:pPr marL="0" indent="0">
+              <a:buNone/>
+            </a:pPr>
+            <a:r>
+              <a:rPr lang="en-US" sz="3300" i="1" dirty="0">
+                <a:solidFill>
+                  <a:srgbClr val="FAFAF9"/>
+                </a:solidFill>
+                <a:latin typeface="Instrument Serif" pitchFamily="34" charset="0"/>
+                <a:ea typeface="Instrument Serif" pitchFamily="34" charset="-122"/>
+                <a:cs typeface="Instrument Serif" pitchFamily="34" charset="-120"/>
+              </a:rPr>
+              <a:t>Two-tier preloading: eager on mount, hover on demand</a:t>
+            </a:r>
+            <a:endParaRPr lang="en-US" sz="3300" dirty="0"/>
+          </a:p>
+        </p:txBody>
+      </p:sp>
+      <p:sp>
+        <p:nvSpPr>
+          <p:cNvPr id="6" name="TextBox 5">
+            <a:extLst>
+              <a:ext uri="{FF2B5EF4-FFF2-40B4-BE49-F238E27FC236}">
+                <a16:creationId xmlns:a16="http://schemas.microsoft.com/office/drawing/2014/main" id="{1D8490F4-0DAA-31B1-E2C3-4C604C983C01}"/>
+              </a:ext>
+            </a:extLst>
+          </p:cNvPr>
+          <p:cNvSpPr txBox="1"/>
+          <p:nvPr/>
+        </p:nvSpPr>
+        <p:spPr>
+          <a:xfrm>
+            <a:off x="268090" y="903414"/>
+            <a:ext cx="11920735" cy="4481676"/>
+          </a:xfrm>
+          <a:prstGeom prst="rect">
+            <a:avLst/>
+          </a:prstGeom>
+          <a:noFill/>
+        </p:spPr>
+        <p:txBody>
+          <a:bodyPr wrap="square">
+            <a:spAutoFit/>
+          </a:bodyPr>
+          <a:lstStyle/>
+          <a:p>
+            <a:pPr>
+              <a:lnSpc>
+                <a:spcPct val="150000"/>
+              </a:lnSpc>
+              <a:buNone/>
+            </a:pPr>
+            <a:r>
+              <a:rPr lang="en-US" sz="1600" b="0" dirty="0">
+                <a:solidFill>
+                  <a:srgbClr val="FF7B72"/>
+                </a:solidFill>
+                <a:effectLst/>
+                <a:latin typeface="Cascadia Code" panose="020B0609020000020004" pitchFamily="49" charset="0"/>
+              </a:rPr>
+              <a:t>const</a:t>
+            </a:r>
+            <a:r>
+              <a:rPr lang="en-US" sz="1600" b="0" dirty="0">
+                <a:solidFill>
+                  <a:srgbClr val="BBBEBF"/>
+                </a:solidFill>
+                <a:effectLst/>
+                <a:latin typeface="Cascadia Code" panose="020B0609020000020004" pitchFamily="49" charset="0"/>
+              </a:rPr>
+              <a:t> </a:t>
+            </a:r>
+            <a:r>
+              <a:rPr lang="en-US" sz="1600" b="0" dirty="0">
+                <a:solidFill>
+                  <a:srgbClr val="79C0FF"/>
+                </a:solidFill>
+                <a:effectLst/>
+                <a:latin typeface="Cascadia Code" panose="020B0609020000020004" pitchFamily="49" charset="0"/>
+              </a:rPr>
+              <a:t>PREFETCHERS</a:t>
+            </a:r>
+            <a:r>
+              <a:rPr lang="en-US" sz="1600" b="0" dirty="0">
+                <a:solidFill>
+                  <a:srgbClr val="D4D4D4"/>
+                </a:solidFill>
+                <a:effectLst/>
+                <a:latin typeface="Cascadia Code" panose="020B0609020000020004" pitchFamily="49" charset="0"/>
+              </a:rPr>
+              <a:t>:</a:t>
+            </a:r>
+            <a:r>
+              <a:rPr lang="en-US" sz="1600" b="0" dirty="0">
+                <a:solidFill>
+                  <a:srgbClr val="BBBEBF"/>
+                </a:solidFill>
+                <a:effectLst/>
+                <a:latin typeface="Cascadia Code" panose="020B0609020000020004" pitchFamily="49" charset="0"/>
+              </a:rPr>
+              <a:t> </a:t>
+            </a:r>
+            <a:r>
+              <a:rPr lang="en-US" sz="1600" b="0" dirty="0">
+                <a:solidFill>
+                  <a:srgbClr val="4EC9B0"/>
+                </a:solidFill>
+                <a:effectLst/>
+                <a:latin typeface="Cascadia Code" panose="020B0609020000020004" pitchFamily="49" charset="0"/>
+              </a:rPr>
+              <a:t>Record</a:t>
+            </a:r>
+            <a:r>
+              <a:rPr lang="en-US" sz="1600" b="0" dirty="0">
+                <a:solidFill>
+                  <a:srgbClr val="BBBEBF"/>
+                </a:solidFill>
+                <a:effectLst/>
+                <a:latin typeface="Cascadia Code" panose="020B0609020000020004" pitchFamily="49" charset="0"/>
+              </a:rPr>
+              <a:t>&lt;</a:t>
+            </a:r>
+            <a:r>
+              <a:rPr lang="en-US" sz="1600" b="0" dirty="0" err="1">
+                <a:solidFill>
+                  <a:srgbClr val="4EC9B0"/>
+                </a:solidFill>
+                <a:effectLst/>
+                <a:latin typeface="Cascadia Code" panose="020B0609020000020004" pitchFamily="49" charset="0"/>
+              </a:rPr>
+              <a:t>ModuleType</a:t>
+            </a:r>
+            <a:r>
+              <a:rPr lang="en-US" sz="1600" b="0" dirty="0">
+                <a:solidFill>
+                  <a:srgbClr val="BBBEBF"/>
+                </a:solidFill>
+                <a:effectLst/>
+                <a:latin typeface="Cascadia Code" panose="020B0609020000020004" pitchFamily="49" charset="0"/>
+              </a:rPr>
+              <a:t>, () </a:t>
+            </a:r>
+            <a:r>
+              <a:rPr lang="en-US" sz="1600" b="0" dirty="0">
+                <a:solidFill>
+                  <a:srgbClr val="FF7B72"/>
+                </a:solidFill>
+                <a:effectLst/>
+                <a:latin typeface="Cascadia Code" panose="020B0609020000020004" pitchFamily="49" charset="0"/>
+              </a:rPr>
+              <a:t>=&gt;</a:t>
+            </a:r>
+            <a:r>
+              <a:rPr lang="en-US" sz="1600" b="0" dirty="0">
+                <a:solidFill>
+                  <a:srgbClr val="BBBEBF"/>
+                </a:solidFill>
+                <a:effectLst/>
+                <a:latin typeface="Cascadia Code" panose="020B0609020000020004" pitchFamily="49" charset="0"/>
+              </a:rPr>
+              <a:t> </a:t>
+            </a:r>
+            <a:r>
+              <a:rPr lang="en-US" sz="1600" b="0" dirty="0">
+                <a:solidFill>
+                  <a:srgbClr val="4EC9B0"/>
+                </a:solidFill>
+                <a:effectLst/>
+                <a:latin typeface="Cascadia Code" panose="020B0609020000020004" pitchFamily="49" charset="0"/>
+              </a:rPr>
+              <a:t>Promise</a:t>
+            </a:r>
+            <a:r>
+              <a:rPr lang="en-US" sz="1600" b="0" dirty="0">
+                <a:solidFill>
+                  <a:srgbClr val="BBBEBF"/>
+                </a:solidFill>
+                <a:effectLst/>
+                <a:latin typeface="Cascadia Code" panose="020B0609020000020004" pitchFamily="49" charset="0"/>
+              </a:rPr>
+              <a:t>&lt;</a:t>
+            </a:r>
+            <a:r>
+              <a:rPr lang="en-US" sz="1600" b="0" dirty="0">
+                <a:solidFill>
+                  <a:srgbClr val="4EC9B0"/>
+                </a:solidFill>
+                <a:effectLst/>
+                <a:latin typeface="Cascadia Code" panose="020B0609020000020004" pitchFamily="49" charset="0"/>
+              </a:rPr>
+              <a:t>unknown</a:t>
+            </a:r>
+            <a:r>
+              <a:rPr lang="en-US" sz="1600" b="0" dirty="0">
+                <a:solidFill>
+                  <a:srgbClr val="BBBEBF"/>
+                </a:solidFill>
+                <a:effectLst/>
+                <a:latin typeface="Cascadia Code" panose="020B0609020000020004" pitchFamily="49" charset="0"/>
+              </a:rPr>
+              <a:t>&gt;&gt; </a:t>
+            </a:r>
+            <a:r>
+              <a:rPr lang="en-US" sz="1600" b="0" dirty="0">
+                <a:solidFill>
+                  <a:srgbClr val="D4D4D4"/>
+                </a:solidFill>
+                <a:effectLst/>
+                <a:latin typeface="Cascadia Code" panose="020B0609020000020004" pitchFamily="49" charset="0"/>
+              </a:rPr>
+              <a:t>=</a:t>
+            </a:r>
+            <a:r>
+              <a:rPr lang="en-US" sz="1600" b="0" dirty="0">
+                <a:solidFill>
+                  <a:srgbClr val="BBBEBF"/>
+                </a:solidFill>
+                <a:effectLst/>
+                <a:latin typeface="Cascadia Code" panose="020B0609020000020004" pitchFamily="49" charset="0"/>
+              </a:rPr>
+              <a:t> {</a:t>
+            </a:r>
+          </a:p>
+          <a:p>
+            <a:pPr>
+              <a:lnSpc>
+                <a:spcPct val="150000"/>
+              </a:lnSpc>
+              <a:buNone/>
+            </a:pPr>
+            <a:r>
+              <a:rPr lang="en-US" sz="1600" b="0" dirty="0">
+                <a:solidFill>
+                  <a:srgbClr val="BBBEBF"/>
+                </a:solidFill>
+                <a:effectLst/>
+                <a:latin typeface="Cascadia Code" panose="020B0609020000020004" pitchFamily="49" charset="0"/>
+              </a:rPr>
+              <a:t>  </a:t>
+            </a:r>
+            <a:r>
+              <a:rPr lang="en-US" sz="1600" b="0" dirty="0">
+                <a:solidFill>
+                  <a:srgbClr val="D2A8FF"/>
+                </a:solidFill>
+                <a:effectLst/>
+                <a:latin typeface="Cascadia Code" panose="020B0609020000020004" pitchFamily="49" charset="0"/>
+              </a:rPr>
+              <a:t>home</a:t>
+            </a:r>
+            <a:r>
+              <a:rPr lang="en-US" sz="1600" b="0" dirty="0">
+                <a:solidFill>
+                  <a:srgbClr val="9CDCFE"/>
+                </a:solidFill>
+                <a:effectLst/>
+                <a:latin typeface="Cascadia Code" panose="020B0609020000020004" pitchFamily="49" charset="0"/>
+              </a:rPr>
+              <a:t>:</a:t>
+            </a:r>
+            <a:r>
+              <a:rPr lang="en-US" sz="1600" b="0" dirty="0">
+                <a:solidFill>
+                  <a:srgbClr val="C9D1D9"/>
+                </a:solidFill>
+                <a:effectLst/>
+                <a:latin typeface="Cascadia Code" panose="020B0609020000020004" pitchFamily="49" charset="0"/>
+              </a:rPr>
+              <a:t>          () </a:t>
+            </a:r>
+            <a:r>
+              <a:rPr lang="en-US" sz="1600" b="0" dirty="0">
+                <a:solidFill>
+                  <a:srgbClr val="FF7B72"/>
+                </a:solidFill>
+                <a:effectLst/>
+                <a:latin typeface="Cascadia Code" panose="020B0609020000020004" pitchFamily="49" charset="0"/>
+              </a:rPr>
+              <a:t>=&gt;</a:t>
+            </a:r>
+            <a:r>
+              <a:rPr lang="en-US" sz="1600" b="0" dirty="0">
+                <a:solidFill>
+                  <a:srgbClr val="C9D1D9"/>
+                </a:solidFill>
+                <a:effectLst/>
+                <a:latin typeface="Cascadia Code" panose="020B0609020000020004" pitchFamily="49" charset="0"/>
+              </a:rPr>
+              <a:t> </a:t>
+            </a:r>
+            <a:r>
+              <a:rPr lang="en-US" sz="1600" b="0" dirty="0">
+                <a:solidFill>
+                  <a:srgbClr val="569CD6"/>
+                </a:solidFill>
+                <a:effectLst/>
+                <a:latin typeface="Cascadia Code" panose="020B0609020000020004" pitchFamily="49" charset="0"/>
+              </a:rPr>
+              <a:t>import</a:t>
+            </a:r>
+            <a:r>
+              <a:rPr lang="en-US" sz="1600" b="0" dirty="0">
+                <a:solidFill>
+                  <a:srgbClr val="C9D1D9"/>
+                </a:solidFill>
+                <a:effectLst/>
+                <a:latin typeface="Cascadia Code" panose="020B0609020000020004" pitchFamily="49" charset="0"/>
+              </a:rPr>
+              <a:t>(</a:t>
+            </a:r>
+            <a:r>
+              <a:rPr lang="en-US" sz="1600" b="0" dirty="0">
+                <a:solidFill>
+                  <a:srgbClr val="A5D6FF"/>
+                </a:solidFill>
+                <a:effectLst/>
+                <a:latin typeface="Cascadia Code" panose="020B0609020000020004" pitchFamily="49" charset="0"/>
+              </a:rPr>
+              <a:t>"home/Home"</a:t>
+            </a:r>
+            <a:r>
+              <a:rPr lang="en-US" sz="1600" b="0" dirty="0">
+                <a:solidFill>
+                  <a:srgbClr val="C9D1D9"/>
+                </a:solidFill>
+                <a:effectLst/>
+                <a:latin typeface="Cascadia Code" panose="020B0609020000020004" pitchFamily="49" charset="0"/>
+              </a:rPr>
+              <a:t>).</a:t>
+            </a:r>
+            <a:r>
+              <a:rPr lang="en-US" sz="1600" b="0" dirty="0">
+                <a:solidFill>
+                  <a:srgbClr val="D2A8FF"/>
+                </a:solidFill>
+                <a:effectLst/>
+                <a:latin typeface="Cascadia Code" panose="020B0609020000020004" pitchFamily="49" charset="0"/>
+              </a:rPr>
+              <a:t>catch</a:t>
+            </a:r>
+            <a:r>
+              <a:rPr lang="en-US" sz="1600" b="0" dirty="0">
+                <a:solidFill>
+                  <a:srgbClr val="C9D1D9"/>
+                </a:solidFill>
+                <a:effectLst/>
+                <a:latin typeface="Cascadia Code" panose="020B0609020000020004" pitchFamily="49" charset="0"/>
+              </a:rPr>
+              <a:t>(() </a:t>
+            </a:r>
+            <a:r>
+              <a:rPr lang="en-US" sz="1600" b="0" dirty="0">
+                <a:solidFill>
+                  <a:srgbClr val="FF7B72"/>
+                </a:solidFill>
+                <a:effectLst/>
+                <a:latin typeface="Cascadia Code" panose="020B0609020000020004" pitchFamily="49" charset="0"/>
+              </a:rPr>
+              <a:t>=&gt;</a:t>
+            </a:r>
+            <a:r>
+              <a:rPr lang="en-US" sz="1600" b="0" dirty="0">
+                <a:solidFill>
+                  <a:srgbClr val="C9D1D9"/>
+                </a:solidFill>
+                <a:effectLst/>
+                <a:latin typeface="Cascadia Code" panose="020B0609020000020004" pitchFamily="49" charset="0"/>
+              </a:rPr>
+              <a:t> </a:t>
+            </a:r>
+            <a:r>
+              <a:rPr lang="en-US" sz="1600" b="0" dirty="0">
+                <a:solidFill>
+                  <a:srgbClr val="569CD6"/>
+                </a:solidFill>
+                <a:effectLst/>
+                <a:latin typeface="Cascadia Code" panose="020B0609020000020004" pitchFamily="49" charset="0"/>
+              </a:rPr>
+              <a:t>undefined</a:t>
+            </a:r>
+            <a:r>
+              <a:rPr lang="en-US" sz="1600" b="0" dirty="0">
+                <a:solidFill>
+                  <a:srgbClr val="C9D1D9"/>
+                </a:solidFill>
+                <a:effectLst/>
+                <a:latin typeface="Cascadia Code" panose="020B0609020000020004" pitchFamily="49" charset="0"/>
+              </a:rPr>
+              <a:t>)</a:t>
+            </a:r>
+            <a:r>
+              <a:rPr lang="en-US" sz="1600" b="0" dirty="0">
+                <a:solidFill>
+                  <a:srgbClr val="BBBEBF"/>
+                </a:solidFill>
+                <a:effectLst/>
+                <a:latin typeface="Cascadia Code" panose="020B0609020000020004" pitchFamily="49" charset="0"/>
+              </a:rPr>
+              <a:t>,</a:t>
+            </a:r>
+          </a:p>
+          <a:p>
+            <a:pPr>
+              <a:lnSpc>
+                <a:spcPct val="150000"/>
+              </a:lnSpc>
+              <a:buNone/>
+            </a:pPr>
+            <a:r>
+              <a:rPr lang="en-US" sz="1600" b="0" dirty="0">
+                <a:solidFill>
+                  <a:srgbClr val="BBBEBF"/>
+                </a:solidFill>
+                <a:effectLst/>
+                <a:latin typeface="Cascadia Code" panose="020B0609020000020004" pitchFamily="49" charset="0"/>
+              </a:rPr>
+              <a:t>  </a:t>
+            </a:r>
+            <a:r>
+              <a:rPr lang="en-US" sz="1600" b="0" dirty="0">
+                <a:solidFill>
+                  <a:srgbClr val="D2A8FF"/>
+                </a:solidFill>
+                <a:effectLst/>
+                <a:latin typeface="Cascadia Code" panose="020B0609020000020004" pitchFamily="49" charset="0"/>
+              </a:rPr>
+              <a:t>records</a:t>
+            </a:r>
+            <a:r>
+              <a:rPr lang="en-US" sz="1600" b="0" dirty="0">
+                <a:solidFill>
+                  <a:srgbClr val="9CDCFE"/>
+                </a:solidFill>
+                <a:effectLst/>
+                <a:latin typeface="Cascadia Code" panose="020B0609020000020004" pitchFamily="49" charset="0"/>
+              </a:rPr>
+              <a:t>:</a:t>
+            </a:r>
+            <a:r>
+              <a:rPr lang="en-US" sz="1600" b="0" dirty="0">
+                <a:solidFill>
+                  <a:srgbClr val="C9D1D9"/>
+                </a:solidFill>
+                <a:effectLst/>
+                <a:latin typeface="Cascadia Code" panose="020B0609020000020004" pitchFamily="49" charset="0"/>
+              </a:rPr>
+              <a:t>       () </a:t>
+            </a:r>
+            <a:r>
+              <a:rPr lang="en-US" sz="1600" b="0" dirty="0">
+                <a:solidFill>
+                  <a:srgbClr val="FF7B72"/>
+                </a:solidFill>
+                <a:effectLst/>
+                <a:latin typeface="Cascadia Code" panose="020B0609020000020004" pitchFamily="49" charset="0"/>
+              </a:rPr>
+              <a:t>=&gt;</a:t>
+            </a:r>
+            <a:r>
+              <a:rPr lang="en-US" sz="1600" b="0" dirty="0">
+                <a:solidFill>
+                  <a:srgbClr val="C9D1D9"/>
+                </a:solidFill>
+                <a:effectLst/>
+                <a:latin typeface="Cascadia Code" panose="020B0609020000020004" pitchFamily="49" charset="0"/>
+              </a:rPr>
+              <a:t> </a:t>
+            </a:r>
+            <a:r>
+              <a:rPr lang="en-US" sz="1600" b="0" dirty="0">
+                <a:solidFill>
+                  <a:srgbClr val="569CD6"/>
+                </a:solidFill>
+                <a:effectLst/>
+                <a:latin typeface="Cascadia Code" panose="020B0609020000020004" pitchFamily="49" charset="0"/>
+              </a:rPr>
+              <a:t>import</a:t>
+            </a:r>
+            <a:r>
+              <a:rPr lang="en-US" sz="1600" b="0" dirty="0">
+                <a:solidFill>
+                  <a:srgbClr val="C9D1D9"/>
+                </a:solidFill>
+                <a:effectLst/>
+                <a:latin typeface="Cascadia Code" panose="020B0609020000020004" pitchFamily="49" charset="0"/>
+              </a:rPr>
+              <a:t>(</a:t>
+            </a:r>
+            <a:r>
+              <a:rPr lang="en-US" sz="1600" b="0" dirty="0">
+                <a:solidFill>
+                  <a:srgbClr val="A5D6FF"/>
+                </a:solidFill>
+                <a:effectLst/>
+                <a:latin typeface="Cascadia Code" panose="020B0609020000020004" pitchFamily="49" charset="0"/>
+              </a:rPr>
+              <a:t>"records/</a:t>
+            </a:r>
+            <a:r>
+              <a:rPr lang="en-US" sz="1600" b="0" dirty="0" err="1">
+                <a:solidFill>
+                  <a:srgbClr val="A5D6FF"/>
+                </a:solidFill>
+                <a:effectLst/>
+                <a:latin typeface="Cascadia Code" panose="020B0609020000020004" pitchFamily="49" charset="0"/>
+              </a:rPr>
+              <a:t>MedicalRecords</a:t>
+            </a:r>
+            <a:r>
+              <a:rPr lang="en-US" sz="1600" b="0" dirty="0">
+                <a:solidFill>
+                  <a:srgbClr val="A5D6FF"/>
+                </a:solidFill>
+                <a:effectLst/>
+                <a:latin typeface="Cascadia Code" panose="020B0609020000020004" pitchFamily="49" charset="0"/>
+              </a:rPr>
+              <a:t>"</a:t>
+            </a:r>
+            <a:r>
+              <a:rPr lang="en-US" sz="1600" b="0" dirty="0">
+                <a:solidFill>
+                  <a:srgbClr val="C9D1D9"/>
+                </a:solidFill>
+                <a:effectLst/>
+                <a:latin typeface="Cascadia Code" panose="020B0609020000020004" pitchFamily="49" charset="0"/>
+              </a:rPr>
+              <a:t>).</a:t>
+            </a:r>
+            <a:r>
+              <a:rPr lang="en-US" sz="1600" b="0" dirty="0">
+                <a:solidFill>
+                  <a:srgbClr val="D2A8FF"/>
+                </a:solidFill>
+                <a:effectLst/>
+                <a:latin typeface="Cascadia Code" panose="020B0609020000020004" pitchFamily="49" charset="0"/>
+              </a:rPr>
+              <a:t>catch</a:t>
+            </a:r>
+            <a:r>
+              <a:rPr lang="en-US" sz="1600" b="0" dirty="0">
+                <a:solidFill>
+                  <a:srgbClr val="C9D1D9"/>
+                </a:solidFill>
+                <a:effectLst/>
+                <a:latin typeface="Cascadia Code" panose="020B0609020000020004" pitchFamily="49" charset="0"/>
+              </a:rPr>
+              <a:t>(() </a:t>
+            </a:r>
+            <a:r>
+              <a:rPr lang="en-US" sz="1600" b="0" dirty="0">
+                <a:solidFill>
+                  <a:srgbClr val="FF7B72"/>
+                </a:solidFill>
+                <a:effectLst/>
+                <a:latin typeface="Cascadia Code" panose="020B0609020000020004" pitchFamily="49" charset="0"/>
+              </a:rPr>
+              <a:t>=&gt;</a:t>
+            </a:r>
+            <a:r>
+              <a:rPr lang="en-US" sz="1600" b="0" dirty="0">
+                <a:solidFill>
+                  <a:srgbClr val="C9D1D9"/>
+                </a:solidFill>
+                <a:effectLst/>
+                <a:latin typeface="Cascadia Code" panose="020B0609020000020004" pitchFamily="49" charset="0"/>
+              </a:rPr>
+              <a:t> </a:t>
+            </a:r>
+            <a:r>
+              <a:rPr lang="en-US" sz="1600" b="0" dirty="0">
+                <a:solidFill>
+                  <a:srgbClr val="569CD6"/>
+                </a:solidFill>
+                <a:effectLst/>
+                <a:latin typeface="Cascadia Code" panose="020B0609020000020004" pitchFamily="49" charset="0"/>
+              </a:rPr>
+              <a:t>undefined</a:t>
+            </a:r>
+            <a:r>
+              <a:rPr lang="en-US" sz="1600" b="0" dirty="0">
+                <a:solidFill>
+                  <a:srgbClr val="C9D1D9"/>
+                </a:solidFill>
+                <a:effectLst/>
+                <a:latin typeface="Cascadia Code" panose="020B0609020000020004" pitchFamily="49" charset="0"/>
+              </a:rPr>
+              <a:t>)</a:t>
+            </a:r>
+            <a:r>
+              <a:rPr lang="en-US" sz="1600" b="0" dirty="0">
+                <a:solidFill>
+                  <a:srgbClr val="BBBEBF"/>
+                </a:solidFill>
+                <a:effectLst/>
+                <a:latin typeface="Cascadia Code" panose="020B0609020000020004" pitchFamily="49" charset="0"/>
+              </a:rPr>
+              <a:t>,</a:t>
+            </a:r>
+          </a:p>
+          <a:p>
+            <a:pPr>
+              <a:lnSpc>
+                <a:spcPct val="150000"/>
+              </a:lnSpc>
+              <a:buNone/>
+            </a:pPr>
+            <a:r>
+              <a:rPr lang="en-US" sz="1600" b="0" dirty="0">
+                <a:solidFill>
+                  <a:srgbClr val="BBBEBF"/>
+                </a:solidFill>
+                <a:effectLst/>
+                <a:latin typeface="Cascadia Code" panose="020B0609020000020004" pitchFamily="49" charset="0"/>
+              </a:rPr>
+              <a:t>  </a:t>
+            </a:r>
+            <a:r>
+              <a:rPr lang="en-US" sz="1600" b="0" dirty="0">
+                <a:solidFill>
+                  <a:srgbClr val="D2A8FF"/>
+                </a:solidFill>
+                <a:effectLst/>
+                <a:latin typeface="Cascadia Code" panose="020B0609020000020004" pitchFamily="49" charset="0"/>
+              </a:rPr>
+              <a:t>prescriptions</a:t>
+            </a:r>
+            <a:r>
+              <a:rPr lang="en-US" sz="1600" b="0" dirty="0">
+                <a:solidFill>
+                  <a:srgbClr val="9CDCFE"/>
+                </a:solidFill>
+                <a:effectLst/>
+                <a:latin typeface="Cascadia Code" panose="020B0609020000020004" pitchFamily="49" charset="0"/>
+              </a:rPr>
+              <a:t>:</a:t>
+            </a:r>
+            <a:r>
+              <a:rPr lang="en-US" sz="1600" b="0" dirty="0">
+                <a:solidFill>
+                  <a:srgbClr val="C9D1D9"/>
+                </a:solidFill>
+                <a:effectLst/>
+                <a:latin typeface="Cascadia Code" panose="020B0609020000020004" pitchFamily="49" charset="0"/>
+              </a:rPr>
+              <a:t> () </a:t>
+            </a:r>
+            <a:r>
+              <a:rPr lang="en-US" sz="1600" b="0" dirty="0">
+                <a:solidFill>
+                  <a:srgbClr val="FF7B72"/>
+                </a:solidFill>
+                <a:effectLst/>
+                <a:latin typeface="Cascadia Code" panose="020B0609020000020004" pitchFamily="49" charset="0"/>
+              </a:rPr>
+              <a:t>=&gt;</a:t>
+            </a:r>
+            <a:r>
+              <a:rPr lang="en-US" sz="1600" b="0" dirty="0">
+                <a:solidFill>
+                  <a:srgbClr val="C9D1D9"/>
+                </a:solidFill>
+                <a:effectLst/>
+                <a:latin typeface="Cascadia Code" panose="020B0609020000020004" pitchFamily="49" charset="0"/>
+              </a:rPr>
+              <a:t> </a:t>
+            </a:r>
+            <a:r>
+              <a:rPr lang="en-US" sz="1600" b="0" dirty="0">
+                <a:solidFill>
+                  <a:srgbClr val="569CD6"/>
+                </a:solidFill>
+                <a:effectLst/>
+                <a:latin typeface="Cascadia Code" panose="020B0609020000020004" pitchFamily="49" charset="0"/>
+              </a:rPr>
+              <a:t>import</a:t>
+            </a:r>
+            <a:r>
+              <a:rPr lang="en-US" sz="1600" b="0" dirty="0">
+                <a:solidFill>
+                  <a:srgbClr val="C9D1D9"/>
+                </a:solidFill>
+                <a:effectLst/>
+                <a:latin typeface="Cascadia Code" panose="020B0609020000020004" pitchFamily="49" charset="0"/>
+              </a:rPr>
+              <a:t>(</a:t>
+            </a:r>
+            <a:r>
+              <a:rPr lang="en-US" sz="1600" b="0" dirty="0">
+                <a:solidFill>
+                  <a:srgbClr val="A5D6FF"/>
+                </a:solidFill>
+                <a:effectLst/>
+                <a:latin typeface="Cascadia Code" panose="020B0609020000020004" pitchFamily="49" charset="0"/>
+              </a:rPr>
+              <a:t>"prescriptions/</a:t>
+            </a:r>
+            <a:r>
+              <a:rPr lang="en-US" sz="1600" b="0" dirty="0" err="1">
+                <a:solidFill>
+                  <a:srgbClr val="A5D6FF"/>
+                </a:solidFill>
+                <a:effectLst/>
+                <a:latin typeface="Cascadia Code" panose="020B0609020000020004" pitchFamily="49" charset="0"/>
+              </a:rPr>
+              <a:t>StreamingPrescriptionOrders</a:t>
+            </a:r>
+            <a:r>
+              <a:rPr lang="en-US" sz="1600" b="0" dirty="0">
+                <a:solidFill>
+                  <a:srgbClr val="A5D6FF"/>
+                </a:solidFill>
+                <a:effectLst/>
+                <a:latin typeface="Cascadia Code" panose="020B0609020000020004" pitchFamily="49" charset="0"/>
+              </a:rPr>
+              <a:t>"</a:t>
+            </a:r>
+            <a:r>
+              <a:rPr lang="en-US" sz="1600" b="0" dirty="0">
+                <a:solidFill>
+                  <a:srgbClr val="C9D1D9"/>
+                </a:solidFill>
+                <a:effectLst/>
+                <a:latin typeface="Cascadia Code" panose="020B0609020000020004" pitchFamily="49" charset="0"/>
+              </a:rPr>
+              <a:t>).</a:t>
+            </a:r>
+            <a:r>
+              <a:rPr lang="en-US" sz="1600" b="0" dirty="0">
+                <a:solidFill>
+                  <a:srgbClr val="D2A8FF"/>
+                </a:solidFill>
+                <a:effectLst/>
+                <a:latin typeface="Cascadia Code" panose="020B0609020000020004" pitchFamily="49" charset="0"/>
+              </a:rPr>
+              <a:t>catch</a:t>
+            </a:r>
+            <a:r>
+              <a:rPr lang="en-US" sz="1600" b="0" dirty="0">
+                <a:solidFill>
+                  <a:srgbClr val="C9D1D9"/>
+                </a:solidFill>
+                <a:effectLst/>
+                <a:latin typeface="Cascadia Code" panose="020B0609020000020004" pitchFamily="49" charset="0"/>
+              </a:rPr>
+              <a:t>(() </a:t>
+            </a:r>
+            <a:r>
+              <a:rPr lang="en-US" sz="1600" b="0" dirty="0">
+                <a:solidFill>
+                  <a:srgbClr val="FF7B72"/>
+                </a:solidFill>
+                <a:effectLst/>
+                <a:latin typeface="Cascadia Code" panose="020B0609020000020004" pitchFamily="49" charset="0"/>
+              </a:rPr>
+              <a:t>=&gt;</a:t>
+            </a:r>
+            <a:r>
+              <a:rPr lang="en-US" sz="1600" b="0" dirty="0">
+                <a:solidFill>
+                  <a:srgbClr val="C9D1D9"/>
+                </a:solidFill>
+                <a:effectLst/>
+                <a:latin typeface="Cascadia Code" panose="020B0609020000020004" pitchFamily="49" charset="0"/>
+              </a:rPr>
+              <a:t> </a:t>
+            </a:r>
+            <a:r>
+              <a:rPr lang="en-US" sz="1600" b="0" dirty="0">
+                <a:solidFill>
+                  <a:srgbClr val="569CD6"/>
+                </a:solidFill>
+                <a:effectLst/>
+                <a:latin typeface="Cascadia Code" panose="020B0609020000020004" pitchFamily="49" charset="0"/>
+              </a:rPr>
+              <a:t>undefined</a:t>
+            </a:r>
+            <a:r>
+              <a:rPr lang="en-US" sz="1600" b="0" dirty="0">
+                <a:solidFill>
+                  <a:srgbClr val="C9D1D9"/>
+                </a:solidFill>
+                <a:effectLst/>
+                <a:latin typeface="Cascadia Code" panose="020B0609020000020004" pitchFamily="49" charset="0"/>
+              </a:rPr>
+              <a:t>)</a:t>
+            </a:r>
+            <a:r>
+              <a:rPr lang="en-US" sz="1600" b="0" dirty="0">
+                <a:solidFill>
+                  <a:srgbClr val="BBBEBF"/>
+                </a:solidFill>
+                <a:effectLst/>
+                <a:latin typeface="Cascadia Code" panose="020B0609020000020004" pitchFamily="49" charset="0"/>
+              </a:rPr>
+              <a:t>,</a:t>
+            </a:r>
+          </a:p>
+          <a:p>
+            <a:pPr>
+              <a:lnSpc>
+                <a:spcPct val="150000"/>
+              </a:lnSpc>
+              <a:buNone/>
+            </a:pPr>
+            <a:r>
+              <a:rPr lang="en-US" sz="1600" b="0" dirty="0">
+                <a:solidFill>
+                  <a:srgbClr val="BBBEBF"/>
+                </a:solidFill>
+                <a:effectLst/>
+                <a:latin typeface="Cascadia Code" panose="020B0609020000020004" pitchFamily="49" charset="0"/>
+              </a:rPr>
+              <a:t>  </a:t>
+            </a:r>
+            <a:r>
+              <a:rPr lang="en-US" sz="1600" b="0" dirty="0">
+                <a:solidFill>
+                  <a:srgbClr val="D2A8FF"/>
+                </a:solidFill>
+                <a:effectLst/>
+                <a:latin typeface="Cascadia Code" panose="020B0609020000020004" pitchFamily="49" charset="0"/>
+              </a:rPr>
+              <a:t>analytics</a:t>
+            </a:r>
+            <a:r>
+              <a:rPr lang="en-US" sz="1600" b="0" dirty="0">
+                <a:solidFill>
+                  <a:srgbClr val="9CDCFE"/>
+                </a:solidFill>
+                <a:effectLst/>
+                <a:latin typeface="Cascadia Code" panose="020B0609020000020004" pitchFamily="49" charset="0"/>
+              </a:rPr>
+              <a:t>:</a:t>
+            </a:r>
+            <a:r>
+              <a:rPr lang="en-US" sz="1600" b="0" dirty="0">
+                <a:solidFill>
+                  <a:srgbClr val="C9D1D9"/>
+                </a:solidFill>
+                <a:effectLst/>
+                <a:latin typeface="Cascadia Code" panose="020B0609020000020004" pitchFamily="49" charset="0"/>
+              </a:rPr>
+              <a:t>     () </a:t>
+            </a:r>
+            <a:r>
+              <a:rPr lang="en-US" sz="1600" b="0" dirty="0">
+                <a:solidFill>
+                  <a:srgbClr val="FF7B72"/>
+                </a:solidFill>
+                <a:effectLst/>
+                <a:latin typeface="Cascadia Code" panose="020B0609020000020004" pitchFamily="49" charset="0"/>
+              </a:rPr>
+              <a:t>=&gt;</a:t>
+            </a:r>
+            <a:r>
+              <a:rPr lang="en-US" sz="1600" b="0" dirty="0">
+                <a:solidFill>
+                  <a:srgbClr val="C9D1D9"/>
+                </a:solidFill>
+                <a:effectLst/>
+                <a:latin typeface="Cascadia Code" panose="020B0609020000020004" pitchFamily="49" charset="0"/>
+              </a:rPr>
+              <a:t> </a:t>
+            </a:r>
+            <a:r>
+              <a:rPr lang="en-US" sz="1600" b="0" dirty="0">
+                <a:solidFill>
+                  <a:srgbClr val="569CD6"/>
+                </a:solidFill>
+                <a:effectLst/>
+                <a:latin typeface="Cascadia Code" panose="020B0609020000020004" pitchFamily="49" charset="0"/>
+              </a:rPr>
+              <a:t>import</a:t>
+            </a:r>
+            <a:r>
+              <a:rPr lang="en-US" sz="1600" b="0" dirty="0">
+                <a:solidFill>
+                  <a:srgbClr val="C9D1D9"/>
+                </a:solidFill>
+                <a:effectLst/>
+                <a:latin typeface="Cascadia Code" panose="020B0609020000020004" pitchFamily="49" charset="0"/>
+              </a:rPr>
+              <a:t>(</a:t>
+            </a:r>
+            <a:r>
+              <a:rPr lang="en-US" sz="1600" b="0" dirty="0">
+                <a:solidFill>
+                  <a:srgbClr val="A5D6FF"/>
+                </a:solidFill>
+                <a:effectLst/>
+                <a:latin typeface="Cascadia Code" panose="020B0609020000020004" pitchFamily="49" charset="0"/>
+              </a:rPr>
+              <a:t>"analytics/</a:t>
+            </a:r>
+            <a:r>
+              <a:rPr lang="en-US" sz="1600" b="0" dirty="0" err="1">
+                <a:solidFill>
+                  <a:srgbClr val="A5D6FF"/>
+                </a:solidFill>
+                <a:effectLst/>
+                <a:latin typeface="Cascadia Code" panose="020B0609020000020004" pitchFamily="49" charset="0"/>
+              </a:rPr>
+              <a:t>StreamingClinicalAnalytics</a:t>
+            </a:r>
+            <a:r>
+              <a:rPr lang="en-US" sz="1600" b="0" dirty="0">
+                <a:solidFill>
+                  <a:srgbClr val="A5D6FF"/>
+                </a:solidFill>
+                <a:effectLst/>
+                <a:latin typeface="Cascadia Code" panose="020B0609020000020004" pitchFamily="49" charset="0"/>
+              </a:rPr>
+              <a:t>"</a:t>
+            </a:r>
+            <a:r>
+              <a:rPr lang="en-US" sz="1600" b="0" dirty="0">
+                <a:solidFill>
+                  <a:srgbClr val="C9D1D9"/>
+                </a:solidFill>
+                <a:effectLst/>
+                <a:latin typeface="Cascadia Code" panose="020B0609020000020004" pitchFamily="49" charset="0"/>
+              </a:rPr>
+              <a:t>).</a:t>
+            </a:r>
+            <a:r>
+              <a:rPr lang="en-US" sz="1600" b="0" dirty="0">
+                <a:solidFill>
+                  <a:srgbClr val="D2A8FF"/>
+                </a:solidFill>
+                <a:effectLst/>
+                <a:latin typeface="Cascadia Code" panose="020B0609020000020004" pitchFamily="49" charset="0"/>
+              </a:rPr>
+              <a:t>catch</a:t>
+            </a:r>
+            <a:r>
+              <a:rPr lang="en-US" sz="1600" b="0" dirty="0">
+                <a:solidFill>
+                  <a:srgbClr val="C9D1D9"/>
+                </a:solidFill>
+                <a:effectLst/>
+                <a:latin typeface="Cascadia Code" panose="020B0609020000020004" pitchFamily="49" charset="0"/>
+              </a:rPr>
+              <a:t>(() </a:t>
+            </a:r>
+            <a:r>
+              <a:rPr lang="en-US" sz="1600" b="0" dirty="0">
+                <a:solidFill>
+                  <a:srgbClr val="FF7B72"/>
+                </a:solidFill>
+                <a:effectLst/>
+                <a:latin typeface="Cascadia Code" panose="020B0609020000020004" pitchFamily="49" charset="0"/>
+              </a:rPr>
+              <a:t>=&gt;</a:t>
+            </a:r>
+            <a:r>
+              <a:rPr lang="en-US" sz="1600" b="0" dirty="0">
+                <a:solidFill>
+                  <a:srgbClr val="C9D1D9"/>
+                </a:solidFill>
+                <a:effectLst/>
+                <a:latin typeface="Cascadia Code" panose="020B0609020000020004" pitchFamily="49" charset="0"/>
+              </a:rPr>
+              <a:t> </a:t>
+            </a:r>
+            <a:r>
+              <a:rPr lang="en-US" sz="1600" b="0" dirty="0">
+                <a:solidFill>
+                  <a:srgbClr val="569CD6"/>
+                </a:solidFill>
+                <a:effectLst/>
+                <a:latin typeface="Cascadia Code" panose="020B0609020000020004" pitchFamily="49" charset="0"/>
+              </a:rPr>
+              <a:t>undefined</a:t>
+            </a:r>
+            <a:r>
+              <a:rPr lang="en-US" sz="1600" b="0" dirty="0">
+                <a:solidFill>
+                  <a:srgbClr val="C9D1D9"/>
+                </a:solidFill>
+                <a:effectLst/>
+                <a:latin typeface="Cascadia Code" panose="020B0609020000020004" pitchFamily="49" charset="0"/>
+              </a:rPr>
+              <a:t>)</a:t>
+            </a:r>
+            <a:r>
+              <a:rPr lang="en-US" sz="1600" b="0" dirty="0">
+                <a:solidFill>
+                  <a:srgbClr val="BBBEBF"/>
+                </a:solidFill>
+                <a:effectLst/>
+                <a:latin typeface="Cascadia Code" panose="020B0609020000020004" pitchFamily="49" charset="0"/>
+              </a:rPr>
+              <a:t>,</a:t>
+            </a:r>
+          </a:p>
+          <a:p>
+            <a:pPr>
+              <a:lnSpc>
+                <a:spcPct val="150000"/>
+              </a:lnSpc>
+              <a:buNone/>
+            </a:pPr>
+            <a:r>
+              <a:rPr lang="en-US" sz="1600" b="0" dirty="0">
+                <a:solidFill>
+                  <a:srgbClr val="BBBEBF"/>
+                </a:solidFill>
+                <a:effectLst/>
+                <a:latin typeface="Cascadia Code" panose="020B0609020000020004" pitchFamily="49" charset="0"/>
+              </a:rPr>
+              <a:t>};</a:t>
+            </a:r>
+          </a:p>
+          <a:p>
+            <a:pPr>
+              <a:lnSpc>
+                <a:spcPct val="150000"/>
+              </a:lnSpc>
+              <a:buNone/>
+            </a:pPr>
+            <a:endParaRPr lang="en-US" sz="1600" b="0" dirty="0">
+              <a:solidFill>
+                <a:srgbClr val="BBBEBF"/>
+              </a:solidFill>
+              <a:effectLst/>
+              <a:latin typeface="Cascadia Code" panose="020B0609020000020004" pitchFamily="49" charset="0"/>
+            </a:endParaRPr>
+          </a:p>
+          <a:p>
+            <a:pPr>
+              <a:lnSpc>
+                <a:spcPct val="150000"/>
+              </a:lnSpc>
+              <a:buNone/>
+            </a:pPr>
+            <a:r>
+              <a:rPr lang="en-US" sz="1600" b="0" dirty="0">
+                <a:solidFill>
+                  <a:srgbClr val="8B949E"/>
+                </a:solidFill>
+                <a:effectLst/>
+                <a:latin typeface="Cascadia Code" panose="020B0609020000020004" pitchFamily="49" charset="0"/>
+              </a:rPr>
+              <a:t>// EAGER — preload on shell mount</a:t>
+            </a:r>
+            <a:endParaRPr lang="en-US" sz="1600" b="0" dirty="0">
+              <a:solidFill>
+                <a:srgbClr val="BBBEBF"/>
+              </a:solidFill>
+              <a:effectLst/>
+              <a:latin typeface="Cascadia Code" panose="020B0609020000020004" pitchFamily="49" charset="0"/>
+            </a:endParaRPr>
+          </a:p>
+          <a:p>
+            <a:pPr>
+              <a:lnSpc>
+                <a:spcPct val="150000"/>
+              </a:lnSpc>
+              <a:buNone/>
+            </a:pPr>
+            <a:r>
+              <a:rPr lang="en-US" sz="1600" b="0" dirty="0">
+                <a:solidFill>
+                  <a:srgbClr val="C586C0"/>
+                </a:solidFill>
+                <a:effectLst/>
+                <a:latin typeface="Cascadia Code" panose="020B0609020000020004" pitchFamily="49" charset="0"/>
+              </a:rPr>
+              <a:t>for</a:t>
+            </a:r>
+            <a:r>
+              <a:rPr lang="en-US" sz="1600" b="0" dirty="0">
+                <a:solidFill>
+                  <a:srgbClr val="BBBEBF"/>
+                </a:solidFill>
+                <a:effectLst/>
+                <a:latin typeface="Cascadia Code" panose="020B0609020000020004" pitchFamily="49" charset="0"/>
+              </a:rPr>
+              <a:t> (</a:t>
+            </a:r>
+            <a:r>
+              <a:rPr lang="en-US" sz="1600" b="0" dirty="0">
+                <a:solidFill>
+                  <a:srgbClr val="FF7B72"/>
+                </a:solidFill>
+                <a:effectLst/>
+                <a:latin typeface="Cascadia Code" panose="020B0609020000020004" pitchFamily="49" charset="0"/>
+              </a:rPr>
+              <a:t>const</a:t>
+            </a:r>
+            <a:r>
+              <a:rPr lang="en-US" sz="1600" b="0" dirty="0">
+                <a:solidFill>
+                  <a:srgbClr val="BBBEBF"/>
+                </a:solidFill>
+                <a:effectLst/>
+                <a:latin typeface="Cascadia Code" panose="020B0609020000020004" pitchFamily="49" charset="0"/>
+              </a:rPr>
+              <a:t> </a:t>
+            </a:r>
+            <a:r>
+              <a:rPr lang="en-US" sz="1600" b="0" dirty="0">
+                <a:solidFill>
+                  <a:srgbClr val="79C0FF"/>
+                </a:solidFill>
+                <a:effectLst/>
+                <a:latin typeface="Cascadia Code" panose="020B0609020000020004" pitchFamily="49" charset="0"/>
+              </a:rPr>
+              <a:t>m</a:t>
+            </a:r>
+            <a:r>
+              <a:rPr lang="en-US" sz="1600" b="0" dirty="0">
+                <a:solidFill>
+                  <a:srgbClr val="BBBEBF"/>
+                </a:solidFill>
+                <a:effectLst/>
+                <a:latin typeface="Cascadia Code" panose="020B0609020000020004" pitchFamily="49" charset="0"/>
+              </a:rPr>
+              <a:t> </a:t>
+            </a:r>
+            <a:r>
+              <a:rPr lang="en-US" sz="1600" b="0" dirty="0">
+                <a:solidFill>
+                  <a:srgbClr val="569CD6"/>
+                </a:solidFill>
+                <a:effectLst/>
+                <a:latin typeface="Cascadia Code" panose="020B0609020000020004" pitchFamily="49" charset="0"/>
+              </a:rPr>
+              <a:t>of</a:t>
+            </a:r>
+            <a:r>
+              <a:rPr lang="en-US" sz="1600" b="0" dirty="0">
+                <a:solidFill>
+                  <a:srgbClr val="BBBEBF"/>
+                </a:solidFill>
+                <a:effectLst/>
+                <a:latin typeface="Cascadia Code" panose="020B0609020000020004" pitchFamily="49" charset="0"/>
+              </a:rPr>
+              <a:t> </a:t>
+            </a:r>
+            <a:r>
+              <a:rPr lang="en-US" sz="1600" b="0" dirty="0" err="1">
+                <a:solidFill>
+                  <a:srgbClr val="79C0FF"/>
+                </a:solidFill>
+                <a:effectLst/>
+                <a:latin typeface="Cascadia Code" panose="020B0609020000020004" pitchFamily="49" charset="0"/>
+              </a:rPr>
+              <a:t>MODULES</a:t>
+            </a:r>
+            <a:r>
+              <a:rPr lang="en-US" sz="1600" b="0" dirty="0" err="1">
+                <a:solidFill>
+                  <a:srgbClr val="BBBEBF"/>
+                </a:solidFill>
+                <a:effectLst/>
+                <a:latin typeface="Cascadia Code" panose="020B0609020000020004" pitchFamily="49" charset="0"/>
+              </a:rPr>
+              <a:t>.</a:t>
+            </a:r>
+            <a:r>
+              <a:rPr lang="en-US" sz="1600" b="0" dirty="0" err="1">
+                <a:solidFill>
+                  <a:srgbClr val="D2A8FF"/>
+                </a:solidFill>
+                <a:effectLst/>
+                <a:latin typeface="Cascadia Code" panose="020B0609020000020004" pitchFamily="49" charset="0"/>
+              </a:rPr>
+              <a:t>filter</a:t>
+            </a:r>
+            <a:r>
+              <a:rPr lang="en-US" sz="1600" b="0" dirty="0">
+                <a:solidFill>
+                  <a:srgbClr val="BBBEBF"/>
+                </a:solidFill>
+                <a:effectLst/>
+                <a:latin typeface="Cascadia Code" panose="020B0609020000020004" pitchFamily="49" charset="0"/>
+              </a:rPr>
+              <a:t>((</a:t>
+            </a:r>
+            <a:r>
+              <a:rPr lang="en-US" sz="1600" b="0" dirty="0">
+                <a:solidFill>
+                  <a:srgbClr val="FFA657"/>
+                </a:solidFill>
+                <a:effectLst/>
+                <a:latin typeface="Cascadia Code" panose="020B0609020000020004" pitchFamily="49" charset="0"/>
+              </a:rPr>
+              <a:t>m</a:t>
+            </a:r>
+            <a:r>
+              <a:rPr lang="en-US" sz="1600" b="0" dirty="0">
+                <a:solidFill>
+                  <a:srgbClr val="BBBEBF"/>
+                </a:solidFill>
+                <a:effectLst/>
+                <a:latin typeface="Cascadia Code" panose="020B0609020000020004" pitchFamily="49" charset="0"/>
+              </a:rPr>
+              <a:t>) </a:t>
+            </a:r>
+            <a:r>
+              <a:rPr lang="en-US" sz="1600" b="0" dirty="0">
+                <a:solidFill>
+                  <a:srgbClr val="FF7B72"/>
+                </a:solidFill>
+                <a:effectLst/>
+                <a:latin typeface="Cascadia Code" panose="020B0609020000020004" pitchFamily="49" charset="0"/>
+              </a:rPr>
+              <a:t>=&gt;</a:t>
+            </a:r>
+            <a:r>
+              <a:rPr lang="en-US" sz="1600" b="0" dirty="0">
+                <a:solidFill>
+                  <a:srgbClr val="BBBEBF"/>
+                </a:solidFill>
+                <a:effectLst/>
+                <a:latin typeface="Cascadia Code" panose="020B0609020000020004" pitchFamily="49" charset="0"/>
+              </a:rPr>
+              <a:t> </a:t>
+            </a:r>
+            <a:r>
+              <a:rPr lang="en-US" sz="1600" b="0" dirty="0" err="1">
+                <a:solidFill>
+                  <a:srgbClr val="FFA657"/>
+                </a:solidFill>
+                <a:effectLst/>
+                <a:latin typeface="Cascadia Code" panose="020B0609020000020004" pitchFamily="49" charset="0"/>
+              </a:rPr>
+              <a:t>m</a:t>
+            </a:r>
+            <a:r>
+              <a:rPr lang="en-US" sz="1600" b="0" dirty="0" err="1">
+                <a:solidFill>
+                  <a:srgbClr val="BBBEBF"/>
+                </a:solidFill>
+                <a:effectLst/>
+                <a:latin typeface="Cascadia Code" panose="020B0609020000020004" pitchFamily="49" charset="0"/>
+              </a:rPr>
+              <a:t>.</a:t>
+            </a:r>
+            <a:r>
+              <a:rPr lang="en-US" sz="1600" b="0" dirty="0" err="1">
+                <a:solidFill>
+                  <a:srgbClr val="C9D1D9"/>
+                </a:solidFill>
+                <a:effectLst/>
+                <a:latin typeface="Cascadia Code" panose="020B0609020000020004" pitchFamily="49" charset="0"/>
+              </a:rPr>
+              <a:t>loadStrategy</a:t>
+            </a:r>
+            <a:r>
+              <a:rPr lang="en-US" sz="1600" b="0" dirty="0">
+                <a:solidFill>
+                  <a:srgbClr val="BBBEBF"/>
+                </a:solidFill>
+                <a:effectLst/>
+                <a:latin typeface="Cascadia Code" panose="020B0609020000020004" pitchFamily="49" charset="0"/>
+              </a:rPr>
+              <a:t> </a:t>
+            </a:r>
+            <a:r>
+              <a:rPr lang="en-US" sz="1600" b="0" dirty="0">
+                <a:solidFill>
+                  <a:srgbClr val="D4D4D4"/>
+                </a:solidFill>
+                <a:effectLst/>
+                <a:latin typeface="Cascadia Code" panose="020B0609020000020004" pitchFamily="49" charset="0"/>
+              </a:rPr>
+              <a:t>===</a:t>
+            </a:r>
+            <a:r>
+              <a:rPr lang="en-US" sz="1600" b="0" dirty="0">
+                <a:solidFill>
+                  <a:srgbClr val="BBBEBF"/>
+                </a:solidFill>
+                <a:effectLst/>
+                <a:latin typeface="Cascadia Code" panose="020B0609020000020004" pitchFamily="49" charset="0"/>
+              </a:rPr>
+              <a:t> </a:t>
+            </a:r>
+            <a:r>
+              <a:rPr lang="en-US" sz="1600" b="0" dirty="0">
+                <a:solidFill>
+                  <a:srgbClr val="A5D6FF"/>
+                </a:solidFill>
+                <a:effectLst/>
+                <a:latin typeface="Cascadia Code" panose="020B0609020000020004" pitchFamily="49" charset="0"/>
+              </a:rPr>
+              <a:t>"eager"</a:t>
+            </a:r>
+            <a:r>
+              <a:rPr lang="en-US" sz="1600" b="0" dirty="0">
+                <a:solidFill>
+                  <a:srgbClr val="BBBEBF"/>
+                </a:solidFill>
+                <a:effectLst/>
+                <a:latin typeface="Cascadia Code" panose="020B0609020000020004" pitchFamily="49" charset="0"/>
+              </a:rPr>
+              <a:t>)) </a:t>
+            </a:r>
+            <a:r>
+              <a:rPr lang="en-US" sz="1600" b="0" dirty="0">
+                <a:solidFill>
+                  <a:srgbClr val="79C0FF"/>
+                </a:solidFill>
+                <a:effectLst/>
+                <a:latin typeface="Cascadia Code" panose="020B0609020000020004" pitchFamily="49" charset="0"/>
+              </a:rPr>
+              <a:t>PREFETCHERS</a:t>
+            </a:r>
+            <a:r>
+              <a:rPr lang="en-US" sz="1600" b="0" dirty="0">
+                <a:solidFill>
+                  <a:srgbClr val="BBBEBF"/>
+                </a:solidFill>
+                <a:effectLst/>
+                <a:latin typeface="Cascadia Code" panose="020B0609020000020004" pitchFamily="49" charset="0"/>
+              </a:rPr>
+              <a:t>[</a:t>
+            </a:r>
+            <a:r>
+              <a:rPr lang="en-US" sz="1600" b="0" dirty="0">
+                <a:solidFill>
+                  <a:srgbClr val="79C0FF"/>
+                </a:solidFill>
+                <a:effectLst/>
+                <a:latin typeface="Cascadia Code" panose="020B0609020000020004" pitchFamily="49" charset="0"/>
+              </a:rPr>
+              <a:t>m</a:t>
+            </a:r>
+            <a:r>
+              <a:rPr lang="en-US" sz="1600" b="0" dirty="0">
+                <a:solidFill>
+                  <a:srgbClr val="BBBEBF"/>
+                </a:solidFill>
+                <a:effectLst/>
+                <a:latin typeface="Cascadia Code" panose="020B0609020000020004" pitchFamily="49" charset="0"/>
+              </a:rPr>
+              <a:t>.</a:t>
+            </a:r>
+            <a:r>
+              <a:rPr lang="en-US" sz="1600" b="0" dirty="0">
+                <a:solidFill>
+                  <a:srgbClr val="C9D1D9"/>
+                </a:solidFill>
+                <a:effectLst/>
+                <a:latin typeface="Cascadia Code" panose="020B0609020000020004" pitchFamily="49" charset="0"/>
+              </a:rPr>
+              <a:t>id</a:t>
+            </a:r>
+            <a:r>
+              <a:rPr lang="en-US" sz="1600" b="0" dirty="0">
+                <a:solidFill>
+                  <a:srgbClr val="BBBEBF"/>
+                </a:solidFill>
+                <a:effectLst/>
+                <a:latin typeface="Cascadia Code" panose="020B0609020000020004" pitchFamily="49" charset="0"/>
+              </a:rPr>
+              <a:t>]();</a:t>
+            </a:r>
+          </a:p>
+          <a:p>
+            <a:pPr>
+              <a:lnSpc>
+                <a:spcPct val="150000"/>
+              </a:lnSpc>
+              <a:buNone/>
+            </a:pPr>
+            <a:endParaRPr lang="en-US" sz="1600" b="0" dirty="0">
+              <a:solidFill>
+                <a:srgbClr val="BBBEBF"/>
+              </a:solidFill>
+              <a:effectLst/>
+              <a:latin typeface="Cascadia Code" panose="020B0609020000020004" pitchFamily="49" charset="0"/>
+            </a:endParaRPr>
+          </a:p>
+          <a:p>
+            <a:pPr>
+              <a:lnSpc>
+                <a:spcPct val="150000"/>
+              </a:lnSpc>
+              <a:buNone/>
+            </a:pPr>
+            <a:r>
+              <a:rPr lang="en-US" sz="1600" b="0" dirty="0">
+                <a:solidFill>
+                  <a:srgbClr val="8B949E"/>
+                </a:solidFill>
+                <a:effectLst/>
+                <a:latin typeface="Cascadia Code" panose="020B0609020000020004" pitchFamily="49" charset="0"/>
+              </a:rPr>
+              <a:t>// HOVER — prefetch on tab hover</a:t>
+            </a:r>
+            <a:endParaRPr lang="en-US" sz="1600" b="0" dirty="0">
+              <a:solidFill>
+                <a:srgbClr val="BBBEBF"/>
+              </a:solidFill>
+              <a:effectLst/>
+              <a:latin typeface="Cascadia Code" panose="020B0609020000020004" pitchFamily="49" charset="0"/>
+            </a:endParaRPr>
+          </a:p>
+          <a:p>
+            <a:pPr>
+              <a:lnSpc>
+                <a:spcPct val="150000"/>
+              </a:lnSpc>
+              <a:buNone/>
+            </a:pPr>
+            <a:r>
+              <a:rPr lang="en-US" sz="1600" b="0" dirty="0">
+                <a:solidFill>
+                  <a:srgbClr val="D4D4D4"/>
+                </a:solidFill>
+                <a:effectLst/>
+                <a:latin typeface="Cascadia Code" panose="020B0609020000020004" pitchFamily="49" charset="0"/>
+              </a:rPr>
+              <a:t>&lt;</a:t>
+            </a:r>
+            <a:r>
+              <a:rPr lang="en-US" sz="1600" b="0" dirty="0" err="1">
+                <a:solidFill>
+                  <a:srgbClr val="4EC9B0"/>
+                </a:solidFill>
+                <a:effectLst/>
+                <a:latin typeface="Cascadia Code" panose="020B0609020000020004" pitchFamily="49" charset="0"/>
+              </a:rPr>
+              <a:t>NavLink</a:t>
+            </a:r>
+            <a:r>
+              <a:rPr lang="en-US" sz="1600" b="0" dirty="0">
+                <a:solidFill>
+                  <a:srgbClr val="BBBEBF"/>
+                </a:solidFill>
+                <a:effectLst/>
+                <a:latin typeface="Cascadia Code" panose="020B0609020000020004" pitchFamily="49" charset="0"/>
+              </a:rPr>
+              <a:t> </a:t>
+            </a:r>
+            <a:r>
+              <a:rPr lang="en-US" sz="1600" b="0" dirty="0" err="1">
+                <a:solidFill>
+                  <a:srgbClr val="C9D1D9"/>
+                </a:solidFill>
+                <a:effectLst/>
+                <a:latin typeface="Cascadia Code" panose="020B0609020000020004" pitchFamily="49" charset="0"/>
+              </a:rPr>
+              <a:t>onMouseEnter</a:t>
+            </a:r>
+            <a:r>
+              <a:rPr lang="en-US" sz="1600" b="0" dirty="0">
+                <a:solidFill>
+                  <a:srgbClr val="D4D4D4"/>
+                </a:solidFill>
+                <a:effectLst/>
+                <a:latin typeface="Cascadia Code" panose="020B0609020000020004" pitchFamily="49" charset="0"/>
+              </a:rPr>
+              <a:t>=</a:t>
+            </a:r>
+            <a:r>
+              <a:rPr lang="en-US" sz="1600" b="0" dirty="0">
+                <a:solidFill>
+                  <a:srgbClr val="BBBEBF"/>
+                </a:solidFill>
+                <a:effectLst/>
+                <a:latin typeface="Cascadia Code" panose="020B0609020000020004" pitchFamily="49" charset="0"/>
+              </a:rPr>
+              <a:t>{() =&gt; </a:t>
+            </a:r>
+            <a:r>
+              <a:rPr lang="en-US" sz="1600" b="0" dirty="0">
+                <a:solidFill>
+                  <a:srgbClr val="79C0FF"/>
+                </a:solidFill>
+                <a:effectLst/>
+                <a:latin typeface="Cascadia Code" panose="020B0609020000020004" pitchFamily="49" charset="0"/>
+              </a:rPr>
+              <a:t>PREFETCHERS</a:t>
+            </a:r>
+            <a:r>
+              <a:rPr lang="en-US" sz="1600" b="0" dirty="0">
+                <a:solidFill>
+                  <a:srgbClr val="9CDCFE"/>
+                </a:solidFill>
+                <a:effectLst/>
+                <a:latin typeface="Cascadia Code" panose="020B0609020000020004" pitchFamily="49" charset="0"/>
+              </a:rPr>
+              <a:t>[</a:t>
+            </a:r>
+            <a:r>
+              <a:rPr lang="en-US" sz="1600" b="0" dirty="0">
+                <a:solidFill>
+                  <a:srgbClr val="C9D1D9"/>
+                </a:solidFill>
+                <a:effectLst/>
+                <a:latin typeface="Cascadia Code" panose="020B0609020000020004" pitchFamily="49" charset="0"/>
+              </a:rPr>
+              <a:t>module</a:t>
+            </a:r>
+            <a:r>
+              <a:rPr lang="en-US" sz="1600" b="0" dirty="0">
+                <a:solidFill>
+                  <a:srgbClr val="9CDCFE"/>
+                </a:solidFill>
+                <a:effectLst/>
+                <a:latin typeface="Cascadia Code" panose="020B0609020000020004" pitchFamily="49" charset="0"/>
+              </a:rPr>
+              <a:t>.</a:t>
+            </a:r>
+            <a:r>
+              <a:rPr lang="en-US" sz="1600" b="0" dirty="0">
+                <a:solidFill>
+                  <a:srgbClr val="C9D1D9"/>
+                </a:solidFill>
+                <a:effectLst/>
+                <a:latin typeface="Cascadia Code" panose="020B0609020000020004" pitchFamily="49" charset="0"/>
+              </a:rPr>
+              <a:t>id</a:t>
+            </a:r>
+            <a:r>
+              <a:rPr lang="en-US" sz="1600" b="0" dirty="0">
+                <a:solidFill>
+                  <a:srgbClr val="9CDCFE"/>
+                </a:solidFill>
+                <a:effectLst/>
+                <a:latin typeface="Cascadia Code" panose="020B0609020000020004" pitchFamily="49" charset="0"/>
+              </a:rPr>
+              <a:t>]</a:t>
+            </a:r>
+            <a:r>
+              <a:rPr lang="en-US" sz="1600" b="0" dirty="0">
+                <a:solidFill>
+                  <a:srgbClr val="BBBEBF"/>
+                </a:solidFill>
+                <a:effectLst/>
+                <a:latin typeface="Cascadia Code" panose="020B0609020000020004" pitchFamily="49" charset="0"/>
+              </a:rPr>
+              <a:t>()} </a:t>
+            </a:r>
+            <a:r>
+              <a:rPr lang="en-US" sz="1600" b="0" dirty="0">
+                <a:solidFill>
+                  <a:srgbClr val="D4D4D4"/>
+                </a:solidFill>
+                <a:effectLst/>
+                <a:latin typeface="Cascadia Code" panose="020B0609020000020004" pitchFamily="49" charset="0"/>
+              </a:rPr>
+              <a:t>/&gt;</a:t>
+            </a:r>
+            <a:endParaRPr lang="en-US" sz="1600" b="0" dirty="0">
+              <a:solidFill>
+                <a:srgbClr val="BBBEBF"/>
+              </a:solidFill>
+              <a:effectLst/>
+              <a:latin typeface="Cascadia Code" panose="020B0609020000020004" pitchFamily="49" charset="0"/>
+            </a:endParaRPr>
+          </a:p>
+        </p:txBody>
+      </p:sp>
+    </p:spTree>
+  </p:cSld>
+  <p:clrMapOvr>
+    <a:masterClrMapping/>
+  </p:clrMapOvr>
+</p:sld>
+</file>
+
 <file path=ppt/slides/slide4.xml><?xml version="1.0" encoding="utf-8"?>
 <p:sld xmlns:a="http://schemas.openxmlformats.org/drawingml/2006/main" xmlns:r="http://schemas.openxmlformats.org/officeDocument/2006/relationships" xmlns:p="http://schemas.openxmlformats.org/presentationml/2006/main">
   <p:cSld>
@@ -22442,1793 +23596,6 @@
 </file>
 
 <file path=ppt/slides/slide40.xml><?xml version="1.0" encoding="utf-8"?>
-<p:sld xmlns:a="http://schemas.openxmlformats.org/drawingml/2006/main" xmlns:r="http://schemas.openxmlformats.org/officeDocument/2006/relationships" xmlns:p="http://schemas.openxmlformats.org/presentationml/2006/main">
-  <p:cSld>
-    <p:bg>
-      <p:bgPr>
-        <a:solidFill>
-          <a:srgbClr val="0C0C0C"/>
-        </a:solidFill>
-        <a:effectLst/>
-      </p:bgPr>
-    </p:bg>
-    <p:spTree>
-      <p:nvGrpSpPr>
-        <p:cNvPr id="1" name="">
-          <a:extLst>
-            <a:ext uri="{FF2B5EF4-FFF2-40B4-BE49-F238E27FC236}">
-              <a16:creationId xmlns:a16="http://schemas.microsoft.com/office/drawing/2014/main" id="{5B12A6B0-1201-0953-1A3D-8D6D8D8715CC}"/>
-            </a:ext>
-          </a:extLst>
-        </p:cNvPr>
-        <p:cNvGrpSpPr/>
-        <p:nvPr/>
-      </p:nvGrpSpPr>
-      <p:grpSpPr>
-        <a:xfrm>
-          <a:off x="0" y="0"/>
-          <a:ext cx="0" cy="0"/>
-          <a:chOff x="0" y="0"/>
-          <a:chExt cx="0" cy="0"/>
-        </a:xfrm>
-      </p:grpSpPr>
-      <p:sp>
-        <p:nvSpPr>
-          <p:cNvPr id="4" name="Text 2">
-            <a:extLst>
-              <a:ext uri="{FF2B5EF4-FFF2-40B4-BE49-F238E27FC236}">
-                <a16:creationId xmlns:a16="http://schemas.microsoft.com/office/drawing/2014/main" id="{3DAE27F7-5CB4-3D6D-47FE-B530FCF25510}"/>
-              </a:ext>
-            </a:extLst>
-          </p:cNvPr>
-          <p:cNvSpPr/>
-          <p:nvPr/>
-        </p:nvSpPr>
-        <p:spPr>
-          <a:xfrm>
-            <a:off x="530352" y="713232"/>
-            <a:ext cx="11109960" cy="777240"/>
-          </a:xfrm>
-          <a:prstGeom prst="rect">
-            <a:avLst/>
-          </a:prstGeom>
-          <a:noFill/>
-          <a:ln/>
-        </p:spPr>
-        <p:txBody>
-          <a:bodyPr wrap="square" rtlCol="0" anchor="ctr"/>
-          <a:lstStyle/>
-          <a:p>
-            <a:pPr marL="0" indent="0">
-              <a:buNone/>
-            </a:pPr>
-            <a:r>
-              <a:rPr lang="en-US" sz="3300" i="1" dirty="0">
-                <a:solidFill>
-                  <a:srgbClr val="FAFAF9"/>
-                </a:solidFill>
-                <a:latin typeface="Instrument Serif" pitchFamily="34" charset="0"/>
-                <a:ea typeface="Instrument Serif" pitchFamily="34" charset="-122"/>
-                <a:cs typeface="Instrument Serif" pitchFamily="34" charset="-120"/>
-              </a:rPr>
-              <a:t>Shell-owned theming across the federation</a:t>
-            </a:r>
-            <a:endParaRPr lang="en-US" sz="3300" dirty="0"/>
-          </a:p>
-        </p:txBody>
-      </p:sp>
-      <p:sp>
-        <p:nvSpPr>
-          <p:cNvPr id="10" name="Shape 7">
-            <a:extLst>
-              <a:ext uri="{FF2B5EF4-FFF2-40B4-BE49-F238E27FC236}">
-                <a16:creationId xmlns:a16="http://schemas.microsoft.com/office/drawing/2014/main" id="{EF6A061B-3435-3C2D-18D5-B7BA9ED059BA}"/>
-              </a:ext>
-            </a:extLst>
-          </p:cNvPr>
-          <p:cNvSpPr/>
-          <p:nvPr/>
-        </p:nvSpPr>
-        <p:spPr>
-          <a:xfrm>
-            <a:off x="548640" y="2903489"/>
-            <a:ext cx="32004" cy="530352"/>
-          </a:xfrm>
-          <a:prstGeom prst="rect">
-            <a:avLst/>
-          </a:prstGeom>
-          <a:solidFill>
-            <a:srgbClr val="D4FF00"/>
-          </a:solidFill>
-          <a:ln/>
-        </p:spPr>
-        <p:txBody>
-          <a:bodyPr/>
-          <a:lstStyle/>
-          <a:p>
-            <a:endParaRPr lang="en-GB"/>
-          </a:p>
-        </p:txBody>
-      </p:sp>
-      <p:sp>
-        <p:nvSpPr>
-          <p:cNvPr id="11" name="Text 8">
-            <a:extLst>
-              <a:ext uri="{FF2B5EF4-FFF2-40B4-BE49-F238E27FC236}">
-                <a16:creationId xmlns:a16="http://schemas.microsoft.com/office/drawing/2014/main" id="{8948693B-5F8E-3F98-F658-8A39BBE550CF}"/>
-              </a:ext>
-            </a:extLst>
-          </p:cNvPr>
-          <p:cNvSpPr/>
-          <p:nvPr/>
-        </p:nvSpPr>
-        <p:spPr>
-          <a:xfrm>
-            <a:off x="731520" y="2848625"/>
-            <a:ext cx="10881360" cy="640080"/>
-          </a:xfrm>
-          <a:prstGeom prst="rect">
-            <a:avLst/>
-          </a:prstGeom>
-          <a:noFill/>
-          <a:ln/>
-        </p:spPr>
-        <p:txBody>
-          <a:bodyPr wrap="square" rtlCol="0" anchor="ctr"/>
-          <a:lstStyle/>
-          <a:p>
-            <a:pPr marL="0" indent="0">
-              <a:buNone/>
-            </a:pPr>
-            <a:r>
-              <a:rPr lang="en-US" sz="2400" i="1" dirty="0">
-                <a:solidFill>
-                  <a:schemeClr val="bg1">
-                    <a:lumMod val="95000"/>
-                  </a:schemeClr>
-                </a:solidFill>
-                <a:latin typeface="Instrument Serif" pitchFamily="34" charset="0"/>
-                <a:ea typeface="Instrument Serif" pitchFamily="34" charset="-122"/>
-                <a:cs typeface="Instrument Serif" pitchFamily="34" charset="-120"/>
-              </a:rPr>
-              <a:t>Every remote reacts immediately. No shared imports, no prop drilling, no re-deploys.</a:t>
-            </a:r>
-            <a:endParaRPr lang="en-US" sz="2400" dirty="0">
-              <a:solidFill>
-                <a:schemeClr val="bg1">
-                  <a:lumMod val="95000"/>
-                </a:schemeClr>
-              </a:solidFill>
-            </a:endParaRPr>
-          </a:p>
-        </p:txBody>
-      </p:sp>
-    </p:spTree>
-    <p:extLst>
-      <p:ext uri="{BB962C8B-B14F-4D97-AF65-F5344CB8AC3E}">
-        <p14:creationId xmlns:p14="http://schemas.microsoft.com/office/powerpoint/2010/main" val="4232498868"/>
-      </p:ext>
-    </p:extLst>
-  </p:cSld>
-  <p:clrMapOvr>
-    <a:masterClrMapping/>
-  </p:clrMapOvr>
-</p:sld>
-</file>
-
-<file path=ppt/slides/slide41.xml><?xml version="1.0" encoding="utf-8"?>
-<p:sld xmlns:a="http://schemas.openxmlformats.org/drawingml/2006/main" xmlns:r="http://schemas.openxmlformats.org/officeDocument/2006/relationships" xmlns:p="http://schemas.openxmlformats.org/presentationml/2006/main">
-  <p:cSld name="Slide 13">
-    <p:bg>
-      <p:bgPr>
-        <a:solidFill>
-          <a:srgbClr val="0C0C0C"/>
-        </a:solidFill>
-        <a:effectLst/>
-      </p:bgPr>
-    </p:bg>
-    <p:spTree>
-      <p:nvGrpSpPr>
-        <p:cNvPr id="1" name=""/>
-        <p:cNvGrpSpPr/>
-        <p:nvPr/>
-      </p:nvGrpSpPr>
-      <p:grpSpPr>
-        <a:xfrm>
-          <a:off x="0" y="0"/>
-          <a:ext cx="0" cy="0"/>
-          <a:chOff x="0" y="0"/>
-          <a:chExt cx="0" cy="0"/>
-        </a:xfrm>
-      </p:grpSpPr>
-      <p:sp>
-        <p:nvSpPr>
-          <p:cNvPr id="4" name="Text 2"/>
-          <p:cNvSpPr/>
-          <p:nvPr/>
-        </p:nvSpPr>
-        <p:spPr>
-          <a:xfrm>
-            <a:off x="245187" y="35778"/>
-            <a:ext cx="11109960" cy="777240"/>
-          </a:xfrm>
-          <a:prstGeom prst="rect">
-            <a:avLst/>
-          </a:prstGeom>
-          <a:noFill/>
-          <a:ln/>
-        </p:spPr>
-        <p:txBody>
-          <a:bodyPr wrap="square" rtlCol="0" anchor="ctr"/>
-          <a:lstStyle/>
-          <a:p>
-            <a:pPr marL="0" indent="0">
-              <a:buNone/>
-            </a:pPr>
-            <a:r>
-              <a:rPr lang="en-US" sz="3300" i="1" dirty="0">
-                <a:solidFill>
-                  <a:srgbClr val="FAFAF9"/>
-                </a:solidFill>
-                <a:latin typeface="Instrument Serif" pitchFamily="34" charset="0"/>
-                <a:ea typeface="Instrument Serif" pitchFamily="34" charset="-122"/>
-                <a:cs typeface="Instrument Serif" pitchFamily="34" charset="-120"/>
-              </a:rPr>
-              <a:t>Two-tier preloading: eager on mount, hover on demand</a:t>
-            </a:r>
-            <a:endParaRPr lang="en-US" sz="3300" dirty="0"/>
-          </a:p>
-        </p:txBody>
-      </p:sp>
-      <p:sp>
-        <p:nvSpPr>
-          <p:cNvPr id="6" name="TextBox 5">
-            <a:extLst>
-              <a:ext uri="{FF2B5EF4-FFF2-40B4-BE49-F238E27FC236}">
-                <a16:creationId xmlns:a16="http://schemas.microsoft.com/office/drawing/2014/main" id="{1D8490F4-0DAA-31B1-E2C3-4C604C983C01}"/>
-              </a:ext>
-            </a:extLst>
-          </p:cNvPr>
-          <p:cNvSpPr txBox="1"/>
-          <p:nvPr/>
-        </p:nvSpPr>
-        <p:spPr>
-          <a:xfrm>
-            <a:off x="268090" y="903414"/>
-            <a:ext cx="11920735" cy="4481676"/>
-          </a:xfrm>
-          <a:prstGeom prst="rect">
-            <a:avLst/>
-          </a:prstGeom>
-          <a:noFill/>
-        </p:spPr>
-        <p:txBody>
-          <a:bodyPr wrap="square">
-            <a:spAutoFit/>
-          </a:bodyPr>
-          <a:lstStyle/>
-          <a:p>
-            <a:pPr>
-              <a:lnSpc>
-                <a:spcPct val="150000"/>
-              </a:lnSpc>
-              <a:buNone/>
-            </a:pPr>
-            <a:r>
-              <a:rPr lang="en-US" sz="1600" b="0" dirty="0">
-                <a:solidFill>
-                  <a:srgbClr val="FF7B72"/>
-                </a:solidFill>
-                <a:effectLst/>
-                <a:latin typeface="Cascadia Code" panose="020B0609020000020004" pitchFamily="49" charset="0"/>
-              </a:rPr>
-              <a:t>const</a:t>
-            </a:r>
-            <a:r>
-              <a:rPr lang="en-US" sz="1600" b="0" dirty="0">
-                <a:solidFill>
-                  <a:srgbClr val="BBBEBF"/>
-                </a:solidFill>
-                <a:effectLst/>
-                <a:latin typeface="Cascadia Code" panose="020B0609020000020004" pitchFamily="49" charset="0"/>
-              </a:rPr>
-              <a:t> </a:t>
-            </a:r>
-            <a:r>
-              <a:rPr lang="en-US" sz="1600" b="0" dirty="0">
-                <a:solidFill>
-                  <a:srgbClr val="79C0FF"/>
-                </a:solidFill>
-                <a:effectLst/>
-                <a:latin typeface="Cascadia Code" panose="020B0609020000020004" pitchFamily="49" charset="0"/>
-              </a:rPr>
-              <a:t>PREFETCHERS</a:t>
-            </a:r>
-            <a:r>
-              <a:rPr lang="en-US" sz="1600" b="0" dirty="0">
-                <a:solidFill>
-                  <a:srgbClr val="D4D4D4"/>
-                </a:solidFill>
-                <a:effectLst/>
-                <a:latin typeface="Cascadia Code" panose="020B0609020000020004" pitchFamily="49" charset="0"/>
-              </a:rPr>
-              <a:t>:</a:t>
-            </a:r>
-            <a:r>
-              <a:rPr lang="en-US" sz="1600" b="0" dirty="0">
-                <a:solidFill>
-                  <a:srgbClr val="BBBEBF"/>
-                </a:solidFill>
-                <a:effectLst/>
-                <a:latin typeface="Cascadia Code" panose="020B0609020000020004" pitchFamily="49" charset="0"/>
-              </a:rPr>
-              <a:t> </a:t>
-            </a:r>
-            <a:r>
-              <a:rPr lang="en-US" sz="1600" b="0" dirty="0">
-                <a:solidFill>
-                  <a:srgbClr val="4EC9B0"/>
-                </a:solidFill>
-                <a:effectLst/>
-                <a:latin typeface="Cascadia Code" panose="020B0609020000020004" pitchFamily="49" charset="0"/>
-              </a:rPr>
-              <a:t>Record</a:t>
-            </a:r>
-            <a:r>
-              <a:rPr lang="en-US" sz="1600" b="0" dirty="0">
-                <a:solidFill>
-                  <a:srgbClr val="BBBEBF"/>
-                </a:solidFill>
-                <a:effectLst/>
-                <a:latin typeface="Cascadia Code" panose="020B0609020000020004" pitchFamily="49" charset="0"/>
-              </a:rPr>
-              <a:t>&lt;</a:t>
-            </a:r>
-            <a:r>
-              <a:rPr lang="en-US" sz="1600" b="0" dirty="0" err="1">
-                <a:solidFill>
-                  <a:srgbClr val="4EC9B0"/>
-                </a:solidFill>
-                <a:effectLst/>
-                <a:latin typeface="Cascadia Code" panose="020B0609020000020004" pitchFamily="49" charset="0"/>
-              </a:rPr>
-              <a:t>ModuleType</a:t>
-            </a:r>
-            <a:r>
-              <a:rPr lang="en-US" sz="1600" b="0" dirty="0">
-                <a:solidFill>
-                  <a:srgbClr val="BBBEBF"/>
-                </a:solidFill>
-                <a:effectLst/>
-                <a:latin typeface="Cascadia Code" panose="020B0609020000020004" pitchFamily="49" charset="0"/>
-              </a:rPr>
-              <a:t>, () </a:t>
-            </a:r>
-            <a:r>
-              <a:rPr lang="en-US" sz="1600" b="0" dirty="0">
-                <a:solidFill>
-                  <a:srgbClr val="FF7B72"/>
-                </a:solidFill>
-                <a:effectLst/>
-                <a:latin typeface="Cascadia Code" panose="020B0609020000020004" pitchFamily="49" charset="0"/>
-              </a:rPr>
-              <a:t>=&gt;</a:t>
-            </a:r>
-            <a:r>
-              <a:rPr lang="en-US" sz="1600" b="0" dirty="0">
-                <a:solidFill>
-                  <a:srgbClr val="BBBEBF"/>
-                </a:solidFill>
-                <a:effectLst/>
-                <a:latin typeface="Cascadia Code" panose="020B0609020000020004" pitchFamily="49" charset="0"/>
-              </a:rPr>
-              <a:t> </a:t>
-            </a:r>
-            <a:r>
-              <a:rPr lang="en-US" sz="1600" b="0" dirty="0">
-                <a:solidFill>
-                  <a:srgbClr val="4EC9B0"/>
-                </a:solidFill>
-                <a:effectLst/>
-                <a:latin typeface="Cascadia Code" panose="020B0609020000020004" pitchFamily="49" charset="0"/>
-              </a:rPr>
-              <a:t>Promise</a:t>
-            </a:r>
-            <a:r>
-              <a:rPr lang="en-US" sz="1600" b="0" dirty="0">
-                <a:solidFill>
-                  <a:srgbClr val="BBBEBF"/>
-                </a:solidFill>
-                <a:effectLst/>
-                <a:latin typeface="Cascadia Code" panose="020B0609020000020004" pitchFamily="49" charset="0"/>
-              </a:rPr>
-              <a:t>&lt;</a:t>
-            </a:r>
-            <a:r>
-              <a:rPr lang="en-US" sz="1600" b="0" dirty="0">
-                <a:solidFill>
-                  <a:srgbClr val="4EC9B0"/>
-                </a:solidFill>
-                <a:effectLst/>
-                <a:latin typeface="Cascadia Code" panose="020B0609020000020004" pitchFamily="49" charset="0"/>
-              </a:rPr>
-              <a:t>unknown</a:t>
-            </a:r>
-            <a:r>
-              <a:rPr lang="en-US" sz="1600" b="0" dirty="0">
-                <a:solidFill>
-                  <a:srgbClr val="BBBEBF"/>
-                </a:solidFill>
-                <a:effectLst/>
-                <a:latin typeface="Cascadia Code" panose="020B0609020000020004" pitchFamily="49" charset="0"/>
-              </a:rPr>
-              <a:t>&gt;&gt; </a:t>
-            </a:r>
-            <a:r>
-              <a:rPr lang="en-US" sz="1600" b="0" dirty="0">
-                <a:solidFill>
-                  <a:srgbClr val="D4D4D4"/>
-                </a:solidFill>
-                <a:effectLst/>
-                <a:latin typeface="Cascadia Code" panose="020B0609020000020004" pitchFamily="49" charset="0"/>
-              </a:rPr>
-              <a:t>=</a:t>
-            </a:r>
-            <a:r>
-              <a:rPr lang="en-US" sz="1600" b="0" dirty="0">
-                <a:solidFill>
-                  <a:srgbClr val="BBBEBF"/>
-                </a:solidFill>
-                <a:effectLst/>
-                <a:latin typeface="Cascadia Code" panose="020B0609020000020004" pitchFamily="49" charset="0"/>
-              </a:rPr>
-              <a:t> {</a:t>
-            </a:r>
-          </a:p>
-          <a:p>
-            <a:pPr>
-              <a:lnSpc>
-                <a:spcPct val="150000"/>
-              </a:lnSpc>
-              <a:buNone/>
-            </a:pPr>
-            <a:r>
-              <a:rPr lang="en-US" sz="1600" b="0" dirty="0">
-                <a:solidFill>
-                  <a:srgbClr val="BBBEBF"/>
-                </a:solidFill>
-                <a:effectLst/>
-                <a:latin typeface="Cascadia Code" panose="020B0609020000020004" pitchFamily="49" charset="0"/>
-              </a:rPr>
-              <a:t>  </a:t>
-            </a:r>
-            <a:r>
-              <a:rPr lang="en-US" sz="1600" b="0" dirty="0">
-                <a:solidFill>
-                  <a:srgbClr val="D2A8FF"/>
-                </a:solidFill>
-                <a:effectLst/>
-                <a:latin typeface="Cascadia Code" panose="020B0609020000020004" pitchFamily="49" charset="0"/>
-              </a:rPr>
-              <a:t>home</a:t>
-            </a:r>
-            <a:r>
-              <a:rPr lang="en-US" sz="1600" b="0" dirty="0">
-                <a:solidFill>
-                  <a:srgbClr val="9CDCFE"/>
-                </a:solidFill>
-                <a:effectLst/>
-                <a:latin typeface="Cascadia Code" panose="020B0609020000020004" pitchFamily="49" charset="0"/>
-              </a:rPr>
-              <a:t>:</a:t>
-            </a:r>
-            <a:r>
-              <a:rPr lang="en-US" sz="1600" b="0" dirty="0">
-                <a:solidFill>
-                  <a:srgbClr val="C9D1D9"/>
-                </a:solidFill>
-                <a:effectLst/>
-                <a:latin typeface="Cascadia Code" panose="020B0609020000020004" pitchFamily="49" charset="0"/>
-              </a:rPr>
-              <a:t>          () </a:t>
-            </a:r>
-            <a:r>
-              <a:rPr lang="en-US" sz="1600" b="0" dirty="0">
-                <a:solidFill>
-                  <a:srgbClr val="FF7B72"/>
-                </a:solidFill>
-                <a:effectLst/>
-                <a:latin typeface="Cascadia Code" panose="020B0609020000020004" pitchFamily="49" charset="0"/>
-              </a:rPr>
-              <a:t>=&gt;</a:t>
-            </a:r>
-            <a:r>
-              <a:rPr lang="en-US" sz="1600" b="0" dirty="0">
-                <a:solidFill>
-                  <a:srgbClr val="C9D1D9"/>
-                </a:solidFill>
-                <a:effectLst/>
-                <a:latin typeface="Cascadia Code" panose="020B0609020000020004" pitchFamily="49" charset="0"/>
-              </a:rPr>
-              <a:t> </a:t>
-            </a:r>
-            <a:r>
-              <a:rPr lang="en-US" sz="1600" b="0" dirty="0">
-                <a:solidFill>
-                  <a:srgbClr val="569CD6"/>
-                </a:solidFill>
-                <a:effectLst/>
-                <a:latin typeface="Cascadia Code" panose="020B0609020000020004" pitchFamily="49" charset="0"/>
-              </a:rPr>
-              <a:t>import</a:t>
-            </a:r>
-            <a:r>
-              <a:rPr lang="en-US" sz="1600" b="0" dirty="0">
-                <a:solidFill>
-                  <a:srgbClr val="C9D1D9"/>
-                </a:solidFill>
-                <a:effectLst/>
-                <a:latin typeface="Cascadia Code" panose="020B0609020000020004" pitchFamily="49" charset="0"/>
-              </a:rPr>
-              <a:t>(</a:t>
-            </a:r>
-            <a:r>
-              <a:rPr lang="en-US" sz="1600" b="0" dirty="0">
-                <a:solidFill>
-                  <a:srgbClr val="A5D6FF"/>
-                </a:solidFill>
-                <a:effectLst/>
-                <a:latin typeface="Cascadia Code" panose="020B0609020000020004" pitchFamily="49" charset="0"/>
-              </a:rPr>
-              <a:t>"home/Home"</a:t>
-            </a:r>
-            <a:r>
-              <a:rPr lang="en-US" sz="1600" b="0" dirty="0">
-                <a:solidFill>
-                  <a:srgbClr val="C9D1D9"/>
-                </a:solidFill>
-                <a:effectLst/>
-                <a:latin typeface="Cascadia Code" panose="020B0609020000020004" pitchFamily="49" charset="0"/>
-              </a:rPr>
-              <a:t>).</a:t>
-            </a:r>
-            <a:r>
-              <a:rPr lang="en-US" sz="1600" b="0" dirty="0">
-                <a:solidFill>
-                  <a:srgbClr val="D2A8FF"/>
-                </a:solidFill>
-                <a:effectLst/>
-                <a:latin typeface="Cascadia Code" panose="020B0609020000020004" pitchFamily="49" charset="0"/>
-              </a:rPr>
-              <a:t>catch</a:t>
-            </a:r>
-            <a:r>
-              <a:rPr lang="en-US" sz="1600" b="0" dirty="0">
-                <a:solidFill>
-                  <a:srgbClr val="C9D1D9"/>
-                </a:solidFill>
-                <a:effectLst/>
-                <a:latin typeface="Cascadia Code" panose="020B0609020000020004" pitchFamily="49" charset="0"/>
-              </a:rPr>
-              <a:t>(() </a:t>
-            </a:r>
-            <a:r>
-              <a:rPr lang="en-US" sz="1600" b="0" dirty="0">
-                <a:solidFill>
-                  <a:srgbClr val="FF7B72"/>
-                </a:solidFill>
-                <a:effectLst/>
-                <a:latin typeface="Cascadia Code" panose="020B0609020000020004" pitchFamily="49" charset="0"/>
-              </a:rPr>
-              <a:t>=&gt;</a:t>
-            </a:r>
-            <a:r>
-              <a:rPr lang="en-US" sz="1600" b="0" dirty="0">
-                <a:solidFill>
-                  <a:srgbClr val="C9D1D9"/>
-                </a:solidFill>
-                <a:effectLst/>
-                <a:latin typeface="Cascadia Code" panose="020B0609020000020004" pitchFamily="49" charset="0"/>
-              </a:rPr>
-              <a:t> </a:t>
-            </a:r>
-            <a:r>
-              <a:rPr lang="en-US" sz="1600" b="0" dirty="0">
-                <a:solidFill>
-                  <a:srgbClr val="569CD6"/>
-                </a:solidFill>
-                <a:effectLst/>
-                <a:latin typeface="Cascadia Code" panose="020B0609020000020004" pitchFamily="49" charset="0"/>
-              </a:rPr>
-              <a:t>undefined</a:t>
-            </a:r>
-            <a:r>
-              <a:rPr lang="en-US" sz="1600" b="0" dirty="0">
-                <a:solidFill>
-                  <a:srgbClr val="C9D1D9"/>
-                </a:solidFill>
-                <a:effectLst/>
-                <a:latin typeface="Cascadia Code" panose="020B0609020000020004" pitchFamily="49" charset="0"/>
-              </a:rPr>
-              <a:t>)</a:t>
-            </a:r>
-            <a:r>
-              <a:rPr lang="en-US" sz="1600" b="0" dirty="0">
-                <a:solidFill>
-                  <a:srgbClr val="BBBEBF"/>
-                </a:solidFill>
-                <a:effectLst/>
-                <a:latin typeface="Cascadia Code" panose="020B0609020000020004" pitchFamily="49" charset="0"/>
-              </a:rPr>
-              <a:t>,</a:t>
-            </a:r>
-          </a:p>
-          <a:p>
-            <a:pPr>
-              <a:lnSpc>
-                <a:spcPct val="150000"/>
-              </a:lnSpc>
-              <a:buNone/>
-            </a:pPr>
-            <a:r>
-              <a:rPr lang="en-US" sz="1600" b="0" dirty="0">
-                <a:solidFill>
-                  <a:srgbClr val="BBBEBF"/>
-                </a:solidFill>
-                <a:effectLst/>
-                <a:latin typeface="Cascadia Code" panose="020B0609020000020004" pitchFamily="49" charset="0"/>
-              </a:rPr>
-              <a:t>  </a:t>
-            </a:r>
-            <a:r>
-              <a:rPr lang="en-US" sz="1600" b="0" dirty="0">
-                <a:solidFill>
-                  <a:srgbClr val="D2A8FF"/>
-                </a:solidFill>
-                <a:effectLst/>
-                <a:latin typeface="Cascadia Code" panose="020B0609020000020004" pitchFamily="49" charset="0"/>
-              </a:rPr>
-              <a:t>records</a:t>
-            </a:r>
-            <a:r>
-              <a:rPr lang="en-US" sz="1600" b="0" dirty="0">
-                <a:solidFill>
-                  <a:srgbClr val="9CDCFE"/>
-                </a:solidFill>
-                <a:effectLst/>
-                <a:latin typeface="Cascadia Code" panose="020B0609020000020004" pitchFamily="49" charset="0"/>
-              </a:rPr>
-              <a:t>:</a:t>
-            </a:r>
-            <a:r>
-              <a:rPr lang="en-US" sz="1600" b="0" dirty="0">
-                <a:solidFill>
-                  <a:srgbClr val="C9D1D9"/>
-                </a:solidFill>
-                <a:effectLst/>
-                <a:latin typeface="Cascadia Code" panose="020B0609020000020004" pitchFamily="49" charset="0"/>
-              </a:rPr>
-              <a:t>       () </a:t>
-            </a:r>
-            <a:r>
-              <a:rPr lang="en-US" sz="1600" b="0" dirty="0">
-                <a:solidFill>
-                  <a:srgbClr val="FF7B72"/>
-                </a:solidFill>
-                <a:effectLst/>
-                <a:latin typeface="Cascadia Code" panose="020B0609020000020004" pitchFamily="49" charset="0"/>
-              </a:rPr>
-              <a:t>=&gt;</a:t>
-            </a:r>
-            <a:r>
-              <a:rPr lang="en-US" sz="1600" b="0" dirty="0">
-                <a:solidFill>
-                  <a:srgbClr val="C9D1D9"/>
-                </a:solidFill>
-                <a:effectLst/>
-                <a:latin typeface="Cascadia Code" panose="020B0609020000020004" pitchFamily="49" charset="0"/>
-              </a:rPr>
-              <a:t> </a:t>
-            </a:r>
-            <a:r>
-              <a:rPr lang="en-US" sz="1600" b="0" dirty="0">
-                <a:solidFill>
-                  <a:srgbClr val="569CD6"/>
-                </a:solidFill>
-                <a:effectLst/>
-                <a:latin typeface="Cascadia Code" panose="020B0609020000020004" pitchFamily="49" charset="0"/>
-              </a:rPr>
-              <a:t>import</a:t>
-            </a:r>
-            <a:r>
-              <a:rPr lang="en-US" sz="1600" b="0" dirty="0">
-                <a:solidFill>
-                  <a:srgbClr val="C9D1D9"/>
-                </a:solidFill>
-                <a:effectLst/>
-                <a:latin typeface="Cascadia Code" panose="020B0609020000020004" pitchFamily="49" charset="0"/>
-              </a:rPr>
-              <a:t>(</a:t>
-            </a:r>
-            <a:r>
-              <a:rPr lang="en-US" sz="1600" b="0" dirty="0">
-                <a:solidFill>
-                  <a:srgbClr val="A5D6FF"/>
-                </a:solidFill>
-                <a:effectLst/>
-                <a:latin typeface="Cascadia Code" panose="020B0609020000020004" pitchFamily="49" charset="0"/>
-              </a:rPr>
-              <a:t>"records/</a:t>
-            </a:r>
-            <a:r>
-              <a:rPr lang="en-US" sz="1600" b="0" dirty="0" err="1">
-                <a:solidFill>
-                  <a:srgbClr val="A5D6FF"/>
-                </a:solidFill>
-                <a:effectLst/>
-                <a:latin typeface="Cascadia Code" panose="020B0609020000020004" pitchFamily="49" charset="0"/>
-              </a:rPr>
-              <a:t>MedicalRecords</a:t>
-            </a:r>
-            <a:r>
-              <a:rPr lang="en-US" sz="1600" b="0" dirty="0">
-                <a:solidFill>
-                  <a:srgbClr val="A5D6FF"/>
-                </a:solidFill>
-                <a:effectLst/>
-                <a:latin typeface="Cascadia Code" panose="020B0609020000020004" pitchFamily="49" charset="0"/>
-              </a:rPr>
-              <a:t>"</a:t>
-            </a:r>
-            <a:r>
-              <a:rPr lang="en-US" sz="1600" b="0" dirty="0">
-                <a:solidFill>
-                  <a:srgbClr val="C9D1D9"/>
-                </a:solidFill>
-                <a:effectLst/>
-                <a:latin typeface="Cascadia Code" panose="020B0609020000020004" pitchFamily="49" charset="0"/>
-              </a:rPr>
-              <a:t>).</a:t>
-            </a:r>
-            <a:r>
-              <a:rPr lang="en-US" sz="1600" b="0" dirty="0">
-                <a:solidFill>
-                  <a:srgbClr val="D2A8FF"/>
-                </a:solidFill>
-                <a:effectLst/>
-                <a:latin typeface="Cascadia Code" panose="020B0609020000020004" pitchFamily="49" charset="0"/>
-              </a:rPr>
-              <a:t>catch</a:t>
-            </a:r>
-            <a:r>
-              <a:rPr lang="en-US" sz="1600" b="0" dirty="0">
-                <a:solidFill>
-                  <a:srgbClr val="C9D1D9"/>
-                </a:solidFill>
-                <a:effectLst/>
-                <a:latin typeface="Cascadia Code" panose="020B0609020000020004" pitchFamily="49" charset="0"/>
-              </a:rPr>
-              <a:t>(() </a:t>
-            </a:r>
-            <a:r>
-              <a:rPr lang="en-US" sz="1600" b="0" dirty="0">
-                <a:solidFill>
-                  <a:srgbClr val="FF7B72"/>
-                </a:solidFill>
-                <a:effectLst/>
-                <a:latin typeface="Cascadia Code" panose="020B0609020000020004" pitchFamily="49" charset="0"/>
-              </a:rPr>
-              <a:t>=&gt;</a:t>
-            </a:r>
-            <a:r>
-              <a:rPr lang="en-US" sz="1600" b="0" dirty="0">
-                <a:solidFill>
-                  <a:srgbClr val="C9D1D9"/>
-                </a:solidFill>
-                <a:effectLst/>
-                <a:latin typeface="Cascadia Code" panose="020B0609020000020004" pitchFamily="49" charset="0"/>
-              </a:rPr>
-              <a:t> </a:t>
-            </a:r>
-            <a:r>
-              <a:rPr lang="en-US" sz="1600" b="0" dirty="0">
-                <a:solidFill>
-                  <a:srgbClr val="569CD6"/>
-                </a:solidFill>
-                <a:effectLst/>
-                <a:latin typeface="Cascadia Code" panose="020B0609020000020004" pitchFamily="49" charset="0"/>
-              </a:rPr>
-              <a:t>undefined</a:t>
-            </a:r>
-            <a:r>
-              <a:rPr lang="en-US" sz="1600" b="0" dirty="0">
-                <a:solidFill>
-                  <a:srgbClr val="C9D1D9"/>
-                </a:solidFill>
-                <a:effectLst/>
-                <a:latin typeface="Cascadia Code" panose="020B0609020000020004" pitchFamily="49" charset="0"/>
-              </a:rPr>
-              <a:t>)</a:t>
-            </a:r>
-            <a:r>
-              <a:rPr lang="en-US" sz="1600" b="0" dirty="0">
-                <a:solidFill>
-                  <a:srgbClr val="BBBEBF"/>
-                </a:solidFill>
-                <a:effectLst/>
-                <a:latin typeface="Cascadia Code" panose="020B0609020000020004" pitchFamily="49" charset="0"/>
-              </a:rPr>
-              <a:t>,</a:t>
-            </a:r>
-          </a:p>
-          <a:p>
-            <a:pPr>
-              <a:lnSpc>
-                <a:spcPct val="150000"/>
-              </a:lnSpc>
-              <a:buNone/>
-            </a:pPr>
-            <a:r>
-              <a:rPr lang="en-US" sz="1600" b="0" dirty="0">
-                <a:solidFill>
-                  <a:srgbClr val="BBBEBF"/>
-                </a:solidFill>
-                <a:effectLst/>
-                <a:latin typeface="Cascadia Code" panose="020B0609020000020004" pitchFamily="49" charset="0"/>
-              </a:rPr>
-              <a:t>  </a:t>
-            </a:r>
-            <a:r>
-              <a:rPr lang="en-US" sz="1600" b="0" dirty="0">
-                <a:solidFill>
-                  <a:srgbClr val="D2A8FF"/>
-                </a:solidFill>
-                <a:effectLst/>
-                <a:latin typeface="Cascadia Code" panose="020B0609020000020004" pitchFamily="49" charset="0"/>
-              </a:rPr>
-              <a:t>prescriptions</a:t>
-            </a:r>
-            <a:r>
-              <a:rPr lang="en-US" sz="1600" b="0" dirty="0">
-                <a:solidFill>
-                  <a:srgbClr val="9CDCFE"/>
-                </a:solidFill>
-                <a:effectLst/>
-                <a:latin typeface="Cascadia Code" panose="020B0609020000020004" pitchFamily="49" charset="0"/>
-              </a:rPr>
-              <a:t>:</a:t>
-            </a:r>
-            <a:r>
-              <a:rPr lang="en-US" sz="1600" b="0" dirty="0">
-                <a:solidFill>
-                  <a:srgbClr val="C9D1D9"/>
-                </a:solidFill>
-                <a:effectLst/>
-                <a:latin typeface="Cascadia Code" panose="020B0609020000020004" pitchFamily="49" charset="0"/>
-              </a:rPr>
-              <a:t> () </a:t>
-            </a:r>
-            <a:r>
-              <a:rPr lang="en-US" sz="1600" b="0" dirty="0">
-                <a:solidFill>
-                  <a:srgbClr val="FF7B72"/>
-                </a:solidFill>
-                <a:effectLst/>
-                <a:latin typeface="Cascadia Code" panose="020B0609020000020004" pitchFamily="49" charset="0"/>
-              </a:rPr>
-              <a:t>=&gt;</a:t>
-            </a:r>
-            <a:r>
-              <a:rPr lang="en-US" sz="1600" b="0" dirty="0">
-                <a:solidFill>
-                  <a:srgbClr val="C9D1D9"/>
-                </a:solidFill>
-                <a:effectLst/>
-                <a:latin typeface="Cascadia Code" panose="020B0609020000020004" pitchFamily="49" charset="0"/>
-              </a:rPr>
-              <a:t> </a:t>
-            </a:r>
-            <a:r>
-              <a:rPr lang="en-US" sz="1600" b="0" dirty="0">
-                <a:solidFill>
-                  <a:srgbClr val="569CD6"/>
-                </a:solidFill>
-                <a:effectLst/>
-                <a:latin typeface="Cascadia Code" panose="020B0609020000020004" pitchFamily="49" charset="0"/>
-              </a:rPr>
-              <a:t>import</a:t>
-            </a:r>
-            <a:r>
-              <a:rPr lang="en-US" sz="1600" b="0" dirty="0">
-                <a:solidFill>
-                  <a:srgbClr val="C9D1D9"/>
-                </a:solidFill>
-                <a:effectLst/>
-                <a:latin typeface="Cascadia Code" panose="020B0609020000020004" pitchFamily="49" charset="0"/>
-              </a:rPr>
-              <a:t>(</a:t>
-            </a:r>
-            <a:r>
-              <a:rPr lang="en-US" sz="1600" b="0" dirty="0">
-                <a:solidFill>
-                  <a:srgbClr val="A5D6FF"/>
-                </a:solidFill>
-                <a:effectLst/>
-                <a:latin typeface="Cascadia Code" panose="020B0609020000020004" pitchFamily="49" charset="0"/>
-              </a:rPr>
-              <a:t>"prescriptions/</a:t>
-            </a:r>
-            <a:r>
-              <a:rPr lang="en-US" sz="1600" b="0" dirty="0" err="1">
-                <a:solidFill>
-                  <a:srgbClr val="A5D6FF"/>
-                </a:solidFill>
-                <a:effectLst/>
-                <a:latin typeface="Cascadia Code" panose="020B0609020000020004" pitchFamily="49" charset="0"/>
-              </a:rPr>
-              <a:t>StreamingPrescriptionOrders</a:t>
-            </a:r>
-            <a:r>
-              <a:rPr lang="en-US" sz="1600" b="0" dirty="0">
-                <a:solidFill>
-                  <a:srgbClr val="A5D6FF"/>
-                </a:solidFill>
-                <a:effectLst/>
-                <a:latin typeface="Cascadia Code" panose="020B0609020000020004" pitchFamily="49" charset="0"/>
-              </a:rPr>
-              <a:t>"</a:t>
-            </a:r>
-            <a:r>
-              <a:rPr lang="en-US" sz="1600" b="0" dirty="0">
-                <a:solidFill>
-                  <a:srgbClr val="C9D1D9"/>
-                </a:solidFill>
-                <a:effectLst/>
-                <a:latin typeface="Cascadia Code" panose="020B0609020000020004" pitchFamily="49" charset="0"/>
-              </a:rPr>
-              <a:t>).</a:t>
-            </a:r>
-            <a:r>
-              <a:rPr lang="en-US" sz="1600" b="0" dirty="0">
-                <a:solidFill>
-                  <a:srgbClr val="D2A8FF"/>
-                </a:solidFill>
-                <a:effectLst/>
-                <a:latin typeface="Cascadia Code" panose="020B0609020000020004" pitchFamily="49" charset="0"/>
-              </a:rPr>
-              <a:t>catch</a:t>
-            </a:r>
-            <a:r>
-              <a:rPr lang="en-US" sz="1600" b="0" dirty="0">
-                <a:solidFill>
-                  <a:srgbClr val="C9D1D9"/>
-                </a:solidFill>
-                <a:effectLst/>
-                <a:latin typeface="Cascadia Code" panose="020B0609020000020004" pitchFamily="49" charset="0"/>
-              </a:rPr>
-              <a:t>(() </a:t>
-            </a:r>
-            <a:r>
-              <a:rPr lang="en-US" sz="1600" b="0" dirty="0">
-                <a:solidFill>
-                  <a:srgbClr val="FF7B72"/>
-                </a:solidFill>
-                <a:effectLst/>
-                <a:latin typeface="Cascadia Code" panose="020B0609020000020004" pitchFamily="49" charset="0"/>
-              </a:rPr>
-              <a:t>=&gt;</a:t>
-            </a:r>
-            <a:r>
-              <a:rPr lang="en-US" sz="1600" b="0" dirty="0">
-                <a:solidFill>
-                  <a:srgbClr val="C9D1D9"/>
-                </a:solidFill>
-                <a:effectLst/>
-                <a:latin typeface="Cascadia Code" panose="020B0609020000020004" pitchFamily="49" charset="0"/>
-              </a:rPr>
-              <a:t> </a:t>
-            </a:r>
-            <a:r>
-              <a:rPr lang="en-US" sz="1600" b="0" dirty="0">
-                <a:solidFill>
-                  <a:srgbClr val="569CD6"/>
-                </a:solidFill>
-                <a:effectLst/>
-                <a:latin typeface="Cascadia Code" panose="020B0609020000020004" pitchFamily="49" charset="0"/>
-              </a:rPr>
-              <a:t>undefined</a:t>
-            </a:r>
-            <a:r>
-              <a:rPr lang="en-US" sz="1600" b="0" dirty="0">
-                <a:solidFill>
-                  <a:srgbClr val="C9D1D9"/>
-                </a:solidFill>
-                <a:effectLst/>
-                <a:latin typeface="Cascadia Code" panose="020B0609020000020004" pitchFamily="49" charset="0"/>
-              </a:rPr>
-              <a:t>)</a:t>
-            </a:r>
-            <a:r>
-              <a:rPr lang="en-US" sz="1600" b="0" dirty="0">
-                <a:solidFill>
-                  <a:srgbClr val="BBBEBF"/>
-                </a:solidFill>
-                <a:effectLst/>
-                <a:latin typeface="Cascadia Code" panose="020B0609020000020004" pitchFamily="49" charset="0"/>
-              </a:rPr>
-              <a:t>,</a:t>
-            </a:r>
-          </a:p>
-          <a:p>
-            <a:pPr>
-              <a:lnSpc>
-                <a:spcPct val="150000"/>
-              </a:lnSpc>
-              <a:buNone/>
-            </a:pPr>
-            <a:r>
-              <a:rPr lang="en-US" sz="1600" b="0" dirty="0">
-                <a:solidFill>
-                  <a:srgbClr val="BBBEBF"/>
-                </a:solidFill>
-                <a:effectLst/>
-                <a:latin typeface="Cascadia Code" panose="020B0609020000020004" pitchFamily="49" charset="0"/>
-              </a:rPr>
-              <a:t>  </a:t>
-            </a:r>
-            <a:r>
-              <a:rPr lang="en-US" sz="1600" b="0" dirty="0">
-                <a:solidFill>
-                  <a:srgbClr val="D2A8FF"/>
-                </a:solidFill>
-                <a:effectLst/>
-                <a:latin typeface="Cascadia Code" panose="020B0609020000020004" pitchFamily="49" charset="0"/>
-              </a:rPr>
-              <a:t>analytics</a:t>
-            </a:r>
-            <a:r>
-              <a:rPr lang="en-US" sz="1600" b="0" dirty="0">
-                <a:solidFill>
-                  <a:srgbClr val="9CDCFE"/>
-                </a:solidFill>
-                <a:effectLst/>
-                <a:latin typeface="Cascadia Code" panose="020B0609020000020004" pitchFamily="49" charset="0"/>
-              </a:rPr>
-              <a:t>:</a:t>
-            </a:r>
-            <a:r>
-              <a:rPr lang="en-US" sz="1600" b="0" dirty="0">
-                <a:solidFill>
-                  <a:srgbClr val="C9D1D9"/>
-                </a:solidFill>
-                <a:effectLst/>
-                <a:latin typeface="Cascadia Code" panose="020B0609020000020004" pitchFamily="49" charset="0"/>
-              </a:rPr>
-              <a:t>     () </a:t>
-            </a:r>
-            <a:r>
-              <a:rPr lang="en-US" sz="1600" b="0" dirty="0">
-                <a:solidFill>
-                  <a:srgbClr val="FF7B72"/>
-                </a:solidFill>
-                <a:effectLst/>
-                <a:latin typeface="Cascadia Code" panose="020B0609020000020004" pitchFamily="49" charset="0"/>
-              </a:rPr>
-              <a:t>=&gt;</a:t>
-            </a:r>
-            <a:r>
-              <a:rPr lang="en-US" sz="1600" b="0" dirty="0">
-                <a:solidFill>
-                  <a:srgbClr val="C9D1D9"/>
-                </a:solidFill>
-                <a:effectLst/>
-                <a:latin typeface="Cascadia Code" panose="020B0609020000020004" pitchFamily="49" charset="0"/>
-              </a:rPr>
-              <a:t> </a:t>
-            </a:r>
-            <a:r>
-              <a:rPr lang="en-US" sz="1600" b="0" dirty="0">
-                <a:solidFill>
-                  <a:srgbClr val="569CD6"/>
-                </a:solidFill>
-                <a:effectLst/>
-                <a:latin typeface="Cascadia Code" panose="020B0609020000020004" pitchFamily="49" charset="0"/>
-              </a:rPr>
-              <a:t>import</a:t>
-            </a:r>
-            <a:r>
-              <a:rPr lang="en-US" sz="1600" b="0" dirty="0">
-                <a:solidFill>
-                  <a:srgbClr val="C9D1D9"/>
-                </a:solidFill>
-                <a:effectLst/>
-                <a:latin typeface="Cascadia Code" panose="020B0609020000020004" pitchFamily="49" charset="0"/>
-              </a:rPr>
-              <a:t>(</a:t>
-            </a:r>
-            <a:r>
-              <a:rPr lang="en-US" sz="1600" b="0" dirty="0">
-                <a:solidFill>
-                  <a:srgbClr val="A5D6FF"/>
-                </a:solidFill>
-                <a:effectLst/>
-                <a:latin typeface="Cascadia Code" panose="020B0609020000020004" pitchFamily="49" charset="0"/>
-              </a:rPr>
-              <a:t>"analytics/</a:t>
-            </a:r>
-            <a:r>
-              <a:rPr lang="en-US" sz="1600" b="0" dirty="0" err="1">
-                <a:solidFill>
-                  <a:srgbClr val="A5D6FF"/>
-                </a:solidFill>
-                <a:effectLst/>
-                <a:latin typeface="Cascadia Code" panose="020B0609020000020004" pitchFamily="49" charset="0"/>
-              </a:rPr>
-              <a:t>StreamingClinicalAnalytics</a:t>
-            </a:r>
-            <a:r>
-              <a:rPr lang="en-US" sz="1600" b="0" dirty="0">
-                <a:solidFill>
-                  <a:srgbClr val="A5D6FF"/>
-                </a:solidFill>
-                <a:effectLst/>
-                <a:latin typeface="Cascadia Code" panose="020B0609020000020004" pitchFamily="49" charset="0"/>
-              </a:rPr>
-              <a:t>"</a:t>
-            </a:r>
-            <a:r>
-              <a:rPr lang="en-US" sz="1600" b="0" dirty="0">
-                <a:solidFill>
-                  <a:srgbClr val="C9D1D9"/>
-                </a:solidFill>
-                <a:effectLst/>
-                <a:latin typeface="Cascadia Code" panose="020B0609020000020004" pitchFamily="49" charset="0"/>
-              </a:rPr>
-              <a:t>).</a:t>
-            </a:r>
-            <a:r>
-              <a:rPr lang="en-US" sz="1600" b="0" dirty="0">
-                <a:solidFill>
-                  <a:srgbClr val="D2A8FF"/>
-                </a:solidFill>
-                <a:effectLst/>
-                <a:latin typeface="Cascadia Code" panose="020B0609020000020004" pitchFamily="49" charset="0"/>
-              </a:rPr>
-              <a:t>catch</a:t>
-            </a:r>
-            <a:r>
-              <a:rPr lang="en-US" sz="1600" b="0" dirty="0">
-                <a:solidFill>
-                  <a:srgbClr val="C9D1D9"/>
-                </a:solidFill>
-                <a:effectLst/>
-                <a:latin typeface="Cascadia Code" panose="020B0609020000020004" pitchFamily="49" charset="0"/>
-              </a:rPr>
-              <a:t>(() </a:t>
-            </a:r>
-            <a:r>
-              <a:rPr lang="en-US" sz="1600" b="0" dirty="0">
-                <a:solidFill>
-                  <a:srgbClr val="FF7B72"/>
-                </a:solidFill>
-                <a:effectLst/>
-                <a:latin typeface="Cascadia Code" panose="020B0609020000020004" pitchFamily="49" charset="0"/>
-              </a:rPr>
-              <a:t>=&gt;</a:t>
-            </a:r>
-            <a:r>
-              <a:rPr lang="en-US" sz="1600" b="0" dirty="0">
-                <a:solidFill>
-                  <a:srgbClr val="C9D1D9"/>
-                </a:solidFill>
-                <a:effectLst/>
-                <a:latin typeface="Cascadia Code" panose="020B0609020000020004" pitchFamily="49" charset="0"/>
-              </a:rPr>
-              <a:t> </a:t>
-            </a:r>
-            <a:r>
-              <a:rPr lang="en-US" sz="1600" b="0" dirty="0">
-                <a:solidFill>
-                  <a:srgbClr val="569CD6"/>
-                </a:solidFill>
-                <a:effectLst/>
-                <a:latin typeface="Cascadia Code" panose="020B0609020000020004" pitchFamily="49" charset="0"/>
-              </a:rPr>
-              <a:t>undefined</a:t>
-            </a:r>
-            <a:r>
-              <a:rPr lang="en-US" sz="1600" b="0" dirty="0">
-                <a:solidFill>
-                  <a:srgbClr val="C9D1D9"/>
-                </a:solidFill>
-                <a:effectLst/>
-                <a:latin typeface="Cascadia Code" panose="020B0609020000020004" pitchFamily="49" charset="0"/>
-              </a:rPr>
-              <a:t>)</a:t>
-            </a:r>
-            <a:r>
-              <a:rPr lang="en-US" sz="1600" b="0" dirty="0">
-                <a:solidFill>
-                  <a:srgbClr val="BBBEBF"/>
-                </a:solidFill>
-                <a:effectLst/>
-                <a:latin typeface="Cascadia Code" panose="020B0609020000020004" pitchFamily="49" charset="0"/>
-              </a:rPr>
-              <a:t>,</a:t>
-            </a:r>
-          </a:p>
-          <a:p>
-            <a:pPr>
-              <a:lnSpc>
-                <a:spcPct val="150000"/>
-              </a:lnSpc>
-              <a:buNone/>
-            </a:pPr>
-            <a:r>
-              <a:rPr lang="en-US" sz="1600" b="0" dirty="0">
-                <a:solidFill>
-                  <a:srgbClr val="BBBEBF"/>
-                </a:solidFill>
-                <a:effectLst/>
-                <a:latin typeface="Cascadia Code" panose="020B0609020000020004" pitchFamily="49" charset="0"/>
-              </a:rPr>
-              <a:t>};</a:t>
-            </a:r>
-          </a:p>
-          <a:p>
-            <a:pPr>
-              <a:lnSpc>
-                <a:spcPct val="150000"/>
-              </a:lnSpc>
-              <a:buNone/>
-            </a:pPr>
-            <a:endParaRPr lang="en-US" sz="1600" b="0" dirty="0">
-              <a:solidFill>
-                <a:srgbClr val="BBBEBF"/>
-              </a:solidFill>
-              <a:effectLst/>
-              <a:latin typeface="Cascadia Code" panose="020B0609020000020004" pitchFamily="49" charset="0"/>
-            </a:endParaRPr>
-          </a:p>
-          <a:p>
-            <a:pPr>
-              <a:lnSpc>
-                <a:spcPct val="150000"/>
-              </a:lnSpc>
-              <a:buNone/>
-            </a:pPr>
-            <a:r>
-              <a:rPr lang="en-US" sz="1600" b="0" dirty="0">
-                <a:solidFill>
-                  <a:srgbClr val="8B949E"/>
-                </a:solidFill>
-                <a:effectLst/>
-                <a:latin typeface="Cascadia Code" panose="020B0609020000020004" pitchFamily="49" charset="0"/>
-              </a:rPr>
-              <a:t>// EAGER — preload on shell mount</a:t>
-            </a:r>
-            <a:endParaRPr lang="en-US" sz="1600" b="0" dirty="0">
-              <a:solidFill>
-                <a:srgbClr val="BBBEBF"/>
-              </a:solidFill>
-              <a:effectLst/>
-              <a:latin typeface="Cascadia Code" panose="020B0609020000020004" pitchFamily="49" charset="0"/>
-            </a:endParaRPr>
-          </a:p>
-          <a:p>
-            <a:pPr>
-              <a:lnSpc>
-                <a:spcPct val="150000"/>
-              </a:lnSpc>
-              <a:buNone/>
-            </a:pPr>
-            <a:r>
-              <a:rPr lang="en-US" sz="1600" b="0" dirty="0">
-                <a:solidFill>
-                  <a:srgbClr val="C586C0"/>
-                </a:solidFill>
-                <a:effectLst/>
-                <a:latin typeface="Cascadia Code" panose="020B0609020000020004" pitchFamily="49" charset="0"/>
-              </a:rPr>
-              <a:t>for</a:t>
-            </a:r>
-            <a:r>
-              <a:rPr lang="en-US" sz="1600" b="0" dirty="0">
-                <a:solidFill>
-                  <a:srgbClr val="BBBEBF"/>
-                </a:solidFill>
-                <a:effectLst/>
-                <a:latin typeface="Cascadia Code" panose="020B0609020000020004" pitchFamily="49" charset="0"/>
-              </a:rPr>
-              <a:t> (</a:t>
-            </a:r>
-            <a:r>
-              <a:rPr lang="en-US" sz="1600" b="0" dirty="0">
-                <a:solidFill>
-                  <a:srgbClr val="FF7B72"/>
-                </a:solidFill>
-                <a:effectLst/>
-                <a:latin typeface="Cascadia Code" panose="020B0609020000020004" pitchFamily="49" charset="0"/>
-              </a:rPr>
-              <a:t>const</a:t>
-            </a:r>
-            <a:r>
-              <a:rPr lang="en-US" sz="1600" b="0" dirty="0">
-                <a:solidFill>
-                  <a:srgbClr val="BBBEBF"/>
-                </a:solidFill>
-                <a:effectLst/>
-                <a:latin typeface="Cascadia Code" panose="020B0609020000020004" pitchFamily="49" charset="0"/>
-              </a:rPr>
-              <a:t> </a:t>
-            </a:r>
-            <a:r>
-              <a:rPr lang="en-US" sz="1600" b="0" dirty="0">
-                <a:solidFill>
-                  <a:srgbClr val="79C0FF"/>
-                </a:solidFill>
-                <a:effectLst/>
-                <a:latin typeface="Cascadia Code" panose="020B0609020000020004" pitchFamily="49" charset="0"/>
-              </a:rPr>
-              <a:t>m</a:t>
-            </a:r>
-            <a:r>
-              <a:rPr lang="en-US" sz="1600" b="0" dirty="0">
-                <a:solidFill>
-                  <a:srgbClr val="BBBEBF"/>
-                </a:solidFill>
-                <a:effectLst/>
-                <a:latin typeface="Cascadia Code" panose="020B0609020000020004" pitchFamily="49" charset="0"/>
-              </a:rPr>
-              <a:t> </a:t>
-            </a:r>
-            <a:r>
-              <a:rPr lang="en-US" sz="1600" b="0" dirty="0">
-                <a:solidFill>
-                  <a:srgbClr val="569CD6"/>
-                </a:solidFill>
-                <a:effectLst/>
-                <a:latin typeface="Cascadia Code" panose="020B0609020000020004" pitchFamily="49" charset="0"/>
-              </a:rPr>
-              <a:t>of</a:t>
-            </a:r>
-            <a:r>
-              <a:rPr lang="en-US" sz="1600" b="0" dirty="0">
-                <a:solidFill>
-                  <a:srgbClr val="BBBEBF"/>
-                </a:solidFill>
-                <a:effectLst/>
-                <a:latin typeface="Cascadia Code" panose="020B0609020000020004" pitchFamily="49" charset="0"/>
-              </a:rPr>
-              <a:t> </a:t>
-            </a:r>
-            <a:r>
-              <a:rPr lang="en-US" sz="1600" b="0" dirty="0" err="1">
-                <a:solidFill>
-                  <a:srgbClr val="79C0FF"/>
-                </a:solidFill>
-                <a:effectLst/>
-                <a:latin typeface="Cascadia Code" panose="020B0609020000020004" pitchFamily="49" charset="0"/>
-              </a:rPr>
-              <a:t>MODULES</a:t>
-            </a:r>
-            <a:r>
-              <a:rPr lang="en-US" sz="1600" b="0" dirty="0" err="1">
-                <a:solidFill>
-                  <a:srgbClr val="BBBEBF"/>
-                </a:solidFill>
-                <a:effectLst/>
-                <a:latin typeface="Cascadia Code" panose="020B0609020000020004" pitchFamily="49" charset="0"/>
-              </a:rPr>
-              <a:t>.</a:t>
-            </a:r>
-            <a:r>
-              <a:rPr lang="en-US" sz="1600" b="0" dirty="0" err="1">
-                <a:solidFill>
-                  <a:srgbClr val="D2A8FF"/>
-                </a:solidFill>
-                <a:effectLst/>
-                <a:latin typeface="Cascadia Code" panose="020B0609020000020004" pitchFamily="49" charset="0"/>
-              </a:rPr>
-              <a:t>filter</a:t>
-            </a:r>
-            <a:r>
-              <a:rPr lang="en-US" sz="1600" b="0" dirty="0">
-                <a:solidFill>
-                  <a:srgbClr val="BBBEBF"/>
-                </a:solidFill>
-                <a:effectLst/>
-                <a:latin typeface="Cascadia Code" panose="020B0609020000020004" pitchFamily="49" charset="0"/>
-              </a:rPr>
-              <a:t>((</a:t>
-            </a:r>
-            <a:r>
-              <a:rPr lang="en-US" sz="1600" b="0" dirty="0">
-                <a:solidFill>
-                  <a:srgbClr val="FFA657"/>
-                </a:solidFill>
-                <a:effectLst/>
-                <a:latin typeface="Cascadia Code" panose="020B0609020000020004" pitchFamily="49" charset="0"/>
-              </a:rPr>
-              <a:t>m</a:t>
-            </a:r>
-            <a:r>
-              <a:rPr lang="en-US" sz="1600" b="0" dirty="0">
-                <a:solidFill>
-                  <a:srgbClr val="BBBEBF"/>
-                </a:solidFill>
-                <a:effectLst/>
-                <a:latin typeface="Cascadia Code" panose="020B0609020000020004" pitchFamily="49" charset="0"/>
-              </a:rPr>
-              <a:t>) </a:t>
-            </a:r>
-            <a:r>
-              <a:rPr lang="en-US" sz="1600" b="0" dirty="0">
-                <a:solidFill>
-                  <a:srgbClr val="FF7B72"/>
-                </a:solidFill>
-                <a:effectLst/>
-                <a:latin typeface="Cascadia Code" panose="020B0609020000020004" pitchFamily="49" charset="0"/>
-              </a:rPr>
-              <a:t>=&gt;</a:t>
-            </a:r>
-            <a:r>
-              <a:rPr lang="en-US" sz="1600" b="0" dirty="0">
-                <a:solidFill>
-                  <a:srgbClr val="BBBEBF"/>
-                </a:solidFill>
-                <a:effectLst/>
-                <a:latin typeface="Cascadia Code" panose="020B0609020000020004" pitchFamily="49" charset="0"/>
-              </a:rPr>
-              <a:t> </a:t>
-            </a:r>
-            <a:r>
-              <a:rPr lang="en-US" sz="1600" b="0" dirty="0" err="1">
-                <a:solidFill>
-                  <a:srgbClr val="FFA657"/>
-                </a:solidFill>
-                <a:effectLst/>
-                <a:latin typeface="Cascadia Code" panose="020B0609020000020004" pitchFamily="49" charset="0"/>
-              </a:rPr>
-              <a:t>m</a:t>
-            </a:r>
-            <a:r>
-              <a:rPr lang="en-US" sz="1600" b="0" dirty="0" err="1">
-                <a:solidFill>
-                  <a:srgbClr val="BBBEBF"/>
-                </a:solidFill>
-                <a:effectLst/>
-                <a:latin typeface="Cascadia Code" panose="020B0609020000020004" pitchFamily="49" charset="0"/>
-              </a:rPr>
-              <a:t>.</a:t>
-            </a:r>
-            <a:r>
-              <a:rPr lang="en-US" sz="1600" b="0" dirty="0" err="1">
-                <a:solidFill>
-                  <a:srgbClr val="C9D1D9"/>
-                </a:solidFill>
-                <a:effectLst/>
-                <a:latin typeface="Cascadia Code" panose="020B0609020000020004" pitchFamily="49" charset="0"/>
-              </a:rPr>
-              <a:t>loadStrategy</a:t>
-            </a:r>
-            <a:r>
-              <a:rPr lang="en-US" sz="1600" b="0" dirty="0">
-                <a:solidFill>
-                  <a:srgbClr val="BBBEBF"/>
-                </a:solidFill>
-                <a:effectLst/>
-                <a:latin typeface="Cascadia Code" panose="020B0609020000020004" pitchFamily="49" charset="0"/>
-              </a:rPr>
-              <a:t> </a:t>
-            </a:r>
-            <a:r>
-              <a:rPr lang="en-US" sz="1600" b="0" dirty="0">
-                <a:solidFill>
-                  <a:srgbClr val="D4D4D4"/>
-                </a:solidFill>
-                <a:effectLst/>
-                <a:latin typeface="Cascadia Code" panose="020B0609020000020004" pitchFamily="49" charset="0"/>
-              </a:rPr>
-              <a:t>===</a:t>
-            </a:r>
-            <a:r>
-              <a:rPr lang="en-US" sz="1600" b="0" dirty="0">
-                <a:solidFill>
-                  <a:srgbClr val="BBBEBF"/>
-                </a:solidFill>
-                <a:effectLst/>
-                <a:latin typeface="Cascadia Code" panose="020B0609020000020004" pitchFamily="49" charset="0"/>
-              </a:rPr>
-              <a:t> </a:t>
-            </a:r>
-            <a:r>
-              <a:rPr lang="en-US" sz="1600" b="0" dirty="0">
-                <a:solidFill>
-                  <a:srgbClr val="A5D6FF"/>
-                </a:solidFill>
-                <a:effectLst/>
-                <a:latin typeface="Cascadia Code" panose="020B0609020000020004" pitchFamily="49" charset="0"/>
-              </a:rPr>
-              <a:t>"eager"</a:t>
-            </a:r>
-            <a:r>
-              <a:rPr lang="en-US" sz="1600" b="0" dirty="0">
-                <a:solidFill>
-                  <a:srgbClr val="BBBEBF"/>
-                </a:solidFill>
-                <a:effectLst/>
-                <a:latin typeface="Cascadia Code" panose="020B0609020000020004" pitchFamily="49" charset="0"/>
-              </a:rPr>
-              <a:t>)) </a:t>
-            </a:r>
-            <a:r>
-              <a:rPr lang="en-US" sz="1600" b="0" dirty="0">
-                <a:solidFill>
-                  <a:srgbClr val="79C0FF"/>
-                </a:solidFill>
-                <a:effectLst/>
-                <a:latin typeface="Cascadia Code" panose="020B0609020000020004" pitchFamily="49" charset="0"/>
-              </a:rPr>
-              <a:t>PREFETCHERS</a:t>
-            </a:r>
-            <a:r>
-              <a:rPr lang="en-US" sz="1600" b="0" dirty="0">
-                <a:solidFill>
-                  <a:srgbClr val="BBBEBF"/>
-                </a:solidFill>
-                <a:effectLst/>
-                <a:latin typeface="Cascadia Code" panose="020B0609020000020004" pitchFamily="49" charset="0"/>
-              </a:rPr>
-              <a:t>[</a:t>
-            </a:r>
-            <a:r>
-              <a:rPr lang="en-US" sz="1600" b="0" dirty="0">
-                <a:solidFill>
-                  <a:srgbClr val="79C0FF"/>
-                </a:solidFill>
-                <a:effectLst/>
-                <a:latin typeface="Cascadia Code" panose="020B0609020000020004" pitchFamily="49" charset="0"/>
-              </a:rPr>
-              <a:t>m</a:t>
-            </a:r>
-            <a:r>
-              <a:rPr lang="en-US" sz="1600" b="0" dirty="0">
-                <a:solidFill>
-                  <a:srgbClr val="BBBEBF"/>
-                </a:solidFill>
-                <a:effectLst/>
-                <a:latin typeface="Cascadia Code" panose="020B0609020000020004" pitchFamily="49" charset="0"/>
-              </a:rPr>
-              <a:t>.</a:t>
-            </a:r>
-            <a:r>
-              <a:rPr lang="en-US" sz="1600" b="0" dirty="0">
-                <a:solidFill>
-                  <a:srgbClr val="C9D1D9"/>
-                </a:solidFill>
-                <a:effectLst/>
-                <a:latin typeface="Cascadia Code" panose="020B0609020000020004" pitchFamily="49" charset="0"/>
-              </a:rPr>
-              <a:t>id</a:t>
-            </a:r>
-            <a:r>
-              <a:rPr lang="en-US" sz="1600" b="0" dirty="0">
-                <a:solidFill>
-                  <a:srgbClr val="BBBEBF"/>
-                </a:solidFill>
-                <a:effectLst/>
-                <a:latin typeface="Cascadia Code" panose="020B0609020000020004" pitchFamily="49" charset="0"/>
-              </a:rPr>
-              <a:t>]();</a:t>
-            </a:r>
-          </a:p>
-          <a:p>
-            <a:pPr>
-              <a:lnSpc>
-                <a:spcPct val="150000"/>
-              </a:lnSpc>
-              <a:buNone/>
-            </a:pPr>
-            <a:endParaRPr lang="en-US" sz="1600" b="0" dirty="0">
-              <a:solidFill>
-                <a:srgbClr val="BBBEBF"/>
-              </a:solidFill>
-              <a:effectLst/>
-              <a:latin typeface="Cascadia Code" panose="020B0609020000020004" pitchFamily="49" charset="0"/>
-            </a:endParaRPr>
-          </a:p>
-          <a:p>
-            <a:pPr>
-              <a:lnSpc>
-                <a:spcPct val="150000"/>
-              </a:lnSpc>
-              <a:buNone/>
-            </a:pPr>
-            <a:r>
-              <a:rPr lang="en-US" sz="1600" b="0" dirty="0">
-                <a:solidFill>
-                  <a:srgbClr val="8B949E"/>
-                </a:solidFill>
-                <a:effectLst/>
-                <a:latin typeface="Cascadia Code" panose="020B0609020000020004" pitchFamily="49" charset="0"/>
-              </a:rPr>
-              <a:t>// HOVER — prefetch on tab hover</a:t>
-            </a:r>
-            <a:endParaRPr lang="en-US" sz="1600" b="0" dirty="0">
-              <a:solidFill>
-                <a:srgbClr val="BBBEBF"/>
-              </a:solidFill>
-              <a:effectLst/>
-              <a:latin typeface="Cascadia Code" panose="020B0609020000020004" pitchFamily="49" charset="0"/>
-            </a:endParaRPr>
-          </a:p>
-          <a:p>
-            <a:pPr>
-              <a:lnSpc>
-                <a:spcPct val="150000"/>
-              </a:lnSpc>
-              <a:buNone/>
-            </a:pPr>
-            <a:r>
-              <a:rPr lang="en-US" sz="1600" b="0" dirty="0">
-                <a:solidFill>
-                  <a:srgbClr val="D4D4D4"/>
-                </a:solidFill>
-                <a:effectLst/>
-                <a:latin typeface="Cascadia Code" panose="020B0609020000020004" pitchFamily="49" charset="0"/>
-              </a:rPr>
-              <a:t>&lt;</a:t>
-            </a:r>
-            <a:r>
-              <a:rPr lang="en-US" sz="1600" b="0" dirty="0" err="1">
-                <a:solidFill>
-                  <a:srgbClr val="4EC9B0"/>
-                </a:solidFill>
-                <a:effectLst/>
-                <a:latin typeface="Cascadia Code" panose="020B0609020000020004" pitchFamily="49" charset="0"/>
-              </a:rPr>
-              <a:t>NavLink</a:t>
-            </a:r>
-            <a:r>
-              <a:rPr lang="en-US" sz="1600" b="0" dirty="0">
-                <a:solidFill>
-                  <a:srgbClr val="BBBEBF"/>
-                </a:solidFill>
-                <a:effectLst/>
-                <a:latin typeface="Cascadia Code" panose="020B0609020000020004" pitchFamily="49" charset="0"/>
-              </a:rPr>
-              <a:t> </a:t>
-            </a:r>
-            <a:r>
-              <a:rPr lang="en-US" sz="1600" b="0" dirty="0" err="1">
-                <a:solidFill>
-                  <a:srgbClr val="C9D1D9"/>
-                </a:solidFill>
-                <a:effectLst/>
-                <a:latin typeface="Cascadia Code" panose="020B0609020000020004" pitchFamily="49" charset="0"/>
-              </a:rPr>
-              <a:t>onMouseEnter</a:t>
-            </a:r>
-            <a:r>
-              <a:rPr lang="en-US" sz="1600" b="0" dirty="0">
-                <a:solidFill>
-                  <a:srgbClr val="D4D4D4"/>
-                </a:solidFill>
-                <a:effectLst/>
-                <a:latin typeface="Cascadia Code" panose="020B0609020000020004" pitchFamily="49" charset="0"/>
-              </a:rPr>
-              <a:t>=</a:t>
-            </a:r>
-            <a:r>
-              <a:rPr lang="en-US" sz="1600" b="0" dirty="0">
-                <a:solidFill>
-                  <a:srgbClr val="BBBEBF"/>
-                </a:solidFill>
-                <a:effectLst/>
-                <a:latin typeface="Cascadia Code" panose="020B0609020000020004" pitchFamily="49" charset="0"/>
-              </a:rPr>
-              <a:t>{() =&gt; </a:t>
-            </a:r>
-            <a:r>
-              <a:rPr lang="en-US" sz="1600" b="0" dirty="0">
-                <a:solidFill>
-                  <a:srgbClr val="79C0FF"/>
-                </a:solidFill>
-                <a:effectLst/>
-                <a:latin typeface="Cascadia Code" panose="020B0609020000020004" pitchFamily="49" charset="0"/>
-              </a:rPr>
-              <a:t>PREFETCHERS</a:t>
-            </a:r>
-            <a:r>
-              <a:rPr lang="en-US" sz="1600" b="0" dirty="0">
-                <a:solidFill>
-                  <a:srgbClr val="9CDCFE"/>
-                </a:solidFill>
-                <a:effectLst/>
-                <a:latin typeface="Cascadia Code" panose="020B0609020000020004" pitchFamily="49" charset="0"/>
-              </a:rPr>
-              <a:t>[</a:t>
-            </a:r>
-            <a:r>
-              <a:rPr lang="en-US" sz="1600" b="0" dirty="0">
-                <a:solidFill>
-                  <a:srgbClr val="C9D1D9"/>
-                </a:solidFill>
-                <a:effectLst/>
-                <a:latin typeface="Cascadia Code" panose="020B0609020000020004" pitchFamily="49" charset="0"/>
-              </a:rPr>
-              <a:t>module</a:t>
-            </a:r>
-            <a:r>
-              <a:rPr lang="en-US" sz="1600" b="0" dirty="0">
-                <a:solidFill>
-                  <a:srgbClr val="9CDCFE"/>
-                </a:solidFill>
-                <a:effectLst/>
-                <a:latin typeface="Cascadia Code" panose="020B0609020000020004" pitchFamily="49" charset="0"/>
-              </a:rPr>
-              <a:t>.</a:t>
-            </a:r>
-            <a:r>
-              <a:rPr lang="en-US" sz="1600" b="0" dirty="0">
-                <a:solidFill>
-                  <a:srgbClr val="C9D1D9"/>
-                </a:solidFill>
-                <a:effectLst/>
-                <a:latin typeface="Cascadia Code" panose="020B0609020000020004" pitchFamily="49" charset="0"/>
-              </a:rPr>
-              <a:t>id</a:t>
-            </a:r>
-            <a:r>
-              <a:rPr lang="en-US" sz="1600" b="0" dirty="0">
-                <a:solidFill>
-                  <a:srgbClr val="9CDCFE"/>
-                </a:solidFill>
-                <a:effectLst/>
-                <a:latin typeface="Cascadia Code" panose="020B0609020000020004" pitchFamily="49" charset="0"/>
-              </a:rPr>
-              <a:t>]</a:t>
-            </a:r>
-            <a:r>
-              <a:rPr lang="en-US" sz="1600" b="0" dirty="0">
-                <a:solidFill>
-                  <a:srgbClr val="BBBEBF"/>
-                </a:solidFill>
-                <a:effectLst/>
-                <a:latin typeface="Cascadia Code" panose="020B0609020000020004" pitchFamily="49" charset="0"/>
-              </a:rPr>
-              <a:t>()} </a:t>
-            </a:r>
-            <a:r>
-              <a:rPr lang="en-US" sz="1600" b="0" dirty="0">
-                <a:solidFill>
-                  <a:srgbClr val="D4D4D4"/>
-                </a:solidFill>
-                <a:effectLst/>
-                <a:latin typeface="Cascadia Code" panose="020B0609020000020004" pitchFamily="49" charset="0"/>
-              </a:rPr>
-              <a:t>/&gt;</a:t>
-            </a:r>
-            <a:endParaRPr lang="en-US" sz="1600" b="0" dirty="0">
-              <a:solidFill>
-                <a:srgbClr val="BBBEBF"/>
-              </a:solidFill>
-              <a:effectLst/>
-              <a:latin typeface="Cascadia Code" panose="020B0609020000020004" pitchFamily="49" charset="0"/>
-            </a:endParaRPr>
-          </a:p>
-        </p:txBody>
-      </p:sp>
-    </p:spTree>
-  </p:cSld>
-  <p:clrMapOvr>
-    <a:masterClrMapping/>
-  </p:clrMapOvr>
-</p:sld>
-</file>
-
-<file path=ppt/slides/slide42.xml><?xml version="1.0" encoding="utf-8"?>
 <p:sld xmlns:a="http://schemas.openxmlformats.org/drawingml/2006/main" xmlns:r="http://schemas.openxmlformats.org/officeDocument/2006/relationships" xmlns:p="http://schemas.openxmlformats.org/presentationml/2006/main">
   <p:cSld>
     <p:spTree>
@@ -25212,7 +24579,7 @@
 </p:sld>
 </file>
 
-<file path=ppt/slides/slide43.xml><?xml version="1.0" encoding="utf-8"?>
+<file path=ppt/slides/slide41.xml><?xml version="1.0" encoding="utf-8"?>
 <p:sld xmlns:a="http://schemas.openxmlformats.org/drawingml/2006/main" xmlns:r="http://schemas.openxmlformats.org/officeDocument/2006/relationships" xmlns:p="http://schemas.openxmlformats.org/presentationml/2006/main">
   <p:cSld name="Slide 17">
     <p:bg>
@@ -25471,7 +24838,7 @@
 </p:sld>
 </file>
 
-<file path=ppt/slides/slide44.xml><?xml version="1.0" encoding="utf-8"?>
+<file path=ppt/slides/slide42.xml><?xml version="1.0" encoding="utf-8"?>
 <p:sld xmlns:a="http://schemas.openxmlformats.org/drawingml/2006/main" xmlns:r="http://schemas.openxmlformats.org/officeDocument/2006/relationships" xmlns:p="http://schemas.openxmlformats.org/presentationml/2006/main">
   <p:cSld>
     <p:spTree>
@@ -25531,7 +24898,7 @@
 </p:sld>
 </file>
 
-<file path=ppt/slides/slide45.xml><?xml version="1.0" encoding="utf-8"?>
+<file path=ppt/slides/slide43.xml><?xml version="1.0" encoding="utf-8"?>
 <p:sld xmlns:a="http://schemas.openxmlformats.org/drawingml/2006/main" xmlns:r="http://schemas.openxmlformats.org/officeDocument/2006/relationships" xmlns:p="http://schemas.openxmlformats.org/presentationml/2006/main">
   <p:cSld>
     <p:spTree>

--- a/presentation/module-federation.pptx
+++ b/presentation/module-federation.pptx
@@ -5,7 +5,7 @@
     <p:sldMasterId id="2147483648" r:id="rId1"/>
   </p:sldMasterIdLst>
   <p:notesMasterIdLst>
-    <p:notesMasterId r:id="rId45"/>
+    <p:notesMasterId r:id="rId46"/>
   </p:notesMasterIdLst>
   <p:sldIdLst>
     <p:sldId id="298" r:id="rId2"/>
@@ -20,10 +20,10 @@
     <p:sldId id="317" r:id="rId11"/>
     <p:sldId id="316" r:id="rId12"/>
     <p:sldId id="318" r:id="rId13"/>
-    <p:sldId id="276" r:id="rId14"/>
+    <p:sldId id="328" r:id="rId14"/>
     <p:sldId id="319" r:id="rId15"/>
     <p:sldId id="320" r:id="rId16"/>
-    <p:sldId id="259" r:id="rId17"/>
+    <p:sldId id="329" r:id="rId17"/>
     <p:sldId id="324" r:id="rId18"/>
     <p:sldId id="281" r:id="rId19"/>
     <p:sldId id="282" r:id="rId20"/>
@@ -43,14 +43,15 @@
     <p:sldId id="289" r:id="rId34"/>
     <p:sldId id="266" r:id="rId35"/>
     <p:sldId id="290" r:id="rId36"/>
-    <p:sldId id="291" r:id="rId37"/>
-    <p:sldId id="267" r:id="rId38"/>
-    <p:sldId id="296" r:id="rId39"/>
-    <p:sldId id="268" r:id="rId40"/>
-    <p:sldId id="323" r:id="rId41"/>
-    <p:sldId id="272" r:id="rId42"/>
-    <p:sldId id="310" r:id="rId43"/>
-    <p:sldId id="322" r:id="rId44"/>
+    <p:sldId id="332" r:id="rId37"/>
+    <p:sldId id="333" r:id="rId38"/>
+    <p:sldId id="331" r:id="rId39"/>
+    <p:sldId id="296" r:id="rId40"/>
+    <p:sldId id="268" r:id="rId41"/>
+    <p:sldId id="323" r:id="rId42"/>
+    <p:sldId id="330" r:id="rId43"/>
+    <p:sldId id="310" r:id="rId44"/>
+    <p:sldId id="322" r:id="rId45"/>
   </p:sldIdLst>
   <p:sldSz cx="12188825" cy="6858000"/>
   <p:notesSz cx="6858000" cy="12188825"/>
@@ -367,6 +368,93 @@
   <p:cSld>
     <p:spTree>
       <p:nvGrpSpPr>
+        <p:cNvPr id="1" name=""/>
+        <p:cNvGrpSpPr/>
+        <p:nvPr/>
+      </p:nvGrpSpPr>
+      <p:grpSpPr>
+        <a:xfrm>
+          <a:off x="0" y="0"/>
+          <a:ext cx="0" cy="0"/>
+          <a:chOff x="0" y="0"/>
+          <a:chExt cx="0" cy="0"/>
+        </a:xfrm>
+      </p:grpSpPr>
+      <p:sp>
+        <p:nvSpPr>
+          <p:cNvPr id="2" name="Slide Image Placeholder 1"/>
+          <p:cNvSpPr>
+            <a:spLocks noGrp="1" noRot="1" noChangeAspect="1"/>
+          </p:cNvSpPr>
+          <p:nvPr>
+            <p:ph type="sldImg"/>
+          </p:nvPr>
+        </p:nvSpPr>
+        <p:spPr>
+          <a:xfrm>
+            <a:off x="-225425" y="1524000"/>
+            <a:ext cx="7308850" cy="4113213"/>
+          </a:xfrm>
+          <a:prstGeom prst="rect">
+            <a:avLst/>
+          </a:prstGeom>
+          <a:noFill/>
+          <a:ln w="12700">
+            <a:solidFill>
+              <a:prstClr val="black"/>
+            </a:solidFill>
+          </a:ln>
+        </p:spPr>
+      </p:sp>
+      <p:sp>
+        <p:nvSpPr>
+          <p:cNvPr id="3" name="Notes Placeholder 2"/>
+          <p:cNvSpPr>
+            <a:spLocks noGrp="1"/>
+          </p:cNvSpPr>
+          <p:nvPr>
+            <p:ph type="body" idx="1"/>
+          </p:nvPr>
+        </p:nvSpPr>
+        <p:spPr>
+          <a:xfrm>
+            <a:off x="685800" y="5865813"/>
+            <a:ext cx="5486400" cy="4799012"/>
+          </a:xfrm>
+          <a:prstGeom prst="rect">
+            <a:avLst/>
+          </a:prstGeom>
+        </p:spPr>
+        <p:txBody>
+          <a:bodyPr/>
+          <a:lstStyle/>
+          <a:p>
+            <a:r>
+              <a:rPr lang="en-US" dirty="0"/>
+              <a:t>This is the one people underrate. It isn't about total lines of code — it's about how much of the system a person must hold in their head before they can safely change one line of it.</a:t>
+            </a:r>
+            <a:endParaRPr lang="en-GB" dirty="0"/>
+          </a:p>
+        </p:txBody>
+      </p:sp>
+    </p:spTree>
+    <p:extLst>
+      <p:ext uri="{BB962C8B-B14F-4D97-AF65-F5344CB8AC3E}">
+        <p14:creationId xmlns:p14="http://schemas.microsoft.com/office/powerpoint/2010/main" val="3278199916"/>
+      </p:ext>
+    </p:extLst>
+  </p:cSld>
+  <p:clrMapOvr>
+    <a:masterClrMapping/>
+  </p:clrMapOvr>
+</p:notes>
+</file>
+
+<file path=ppt/notesSlides/notesSlide11.xml><?xml version="1.0" encoding="utf-8"?>
+<p:notes xmlns:a="http://schemas.openxmlformats.org/drawingml/2006/main" xmlns:r="http://schemas.openxmlformats.org/officeDocument/2006/relationships" xmlns:p="http://schemas.openxmlformats.org/presentationml/2006/main">
+  <p:cSld>
+    <p:spTree>
+      <p:nvGrpSpPr>
         <p:cNvPr id="1" name="">
           <a:extLst>
             <a:ext uri="{FF2B5EF4-FFF2-40B4-BE49-F238E27FC236}">
@@ -467,7 +555,7 @@
 </p:notes>
 </file>
 
-<file path=ppt/notesSlides/notesSlide11.xml><?xml version="1.0" encoding="utf-8"?>
+<file path=ppt/notesSlides/notesSlide12.xml><?xml version="1.0" encoding="utf-8"?>
 <p:notes xmlns:a="http://schemas.openxmlformats.org/drawingml/2006/main" xmlns:r="http://schemas.openxmlformats.org/officeDocument/2006/relationships" xmlns:p="http://schemas.openxmlformats.org/presentationml/2006/main">
   <p:cSld>
     <p:spTree>
@@ -545,170 +633,6 @@
     <p:extLst>
       <p:ext uri="{BB962C8B-B14F-4D97-AF65-F5344CB8AC3E}">
         <p14:creationId xmlns:p14="http://schemas.microsoft.com/office/powerpoint/2010/main" val="3631577675"/>
-      </p:ext>
-    </p:extLst>
-  </p:cSld>
-  <p:clrMapOvr>
-    <a:masterClrMapping/>
-  </p:clrMapOvr>
-</p:notes>
-</file>
-
-<file path=ppt/notesSlides/notesSlide12.xml><?xml version="1.0" encoding="utf-8"?>
-<p:notes xmlns:a="http://schemas.openxmlformats.org/drawingml/2006/main" xmlns:r="http://schemas.openxmlformats.org/officeDocument/2006/relationships" xmlns:p="http://schemas.openxmlformats.org/presentationml/2006/main">
-  <p:cSld>
-    <p:spTree>
-      <p:nvGrpSpPr>
-        <p:cNvPr id="1" name="">
-          <a:extLst>
-            <a:ext uri="{FF2B5EF4-FFF2-40B4-BE49-F238E27FC236}">
-              <a16:creationId xmlns:a16="http://schemas.microsoft.com/office/drawing/2014/main" id="{AB6264C9-CBBA-A379-0F18-AC511CA52198}"/>
-            </a:ext>
-          </a:extLst>
-        </p:cNvPr>
-        <p:cNvGrpSpPr/>
-        <p:nvPr/>
-      </p:nvGrpSpPr>
-      <p:grpSpPr>
-        <a:xfrm>
-          <a:off x="0" y="0"/>
-          <a:ext cx="0" cy="0"/>
-          <a:chOff x="0" y="0"/>
-          <a:chExt cx="0" cy="0"/>
-        </a:xfrm>
-      </p:grpSpPr>
-      <p:sp>
-        <p:nvSpPr>
-          <p:cNvPr id="2" name="Slide Image Placeholder 1">
-            <a:extLst>
-              <a:ext uri="{FF2B5EF4-FFF2-40B4-BE49-F238E27FC236}">
-                <a16:creationId xmlns:a16="http://schemas.microsoft.com/office/drawing/2014/main" id="{E1400835-96D6-34E4-242C-D4E1576F8509}"/>
-              </a:ext>
-            </a:extLst>
-          </p:cNvPr>
-          <p:cNvSpPr>
-            <a:spLocks noGrp="1" noRot="1" noChangeAspect="1"/>
-          </p:cNvSpPr>
-          <p:nvPr>
-            <p:ph type="sldImg"/>
-          </p:nvPr>
-        </p:nvSpPr>
-        <p:spPr/>
-      </p:sp>
-      <p:sp>
-        <p:nvSpPr>
-          <p:cNvPr id="3" name="Notes Placeholder 2">
-            <a:extLst>
-              <a:ext uri="{FF2B5EF4-FFF2-40B4-BE49-F238E27FC236}">
-                <a16:creationId xmlns:a16="http://schemas.microsoft.com/office/drawing/2014/main" id="{614C2021-8BA1-759E-7582-FC72580C7018}"/>
-              </a:ext>
-            </a:extLst>
-          </p:cNvPr>
-          <p:cNvSpPr>
-            <a:spLocks noGrp="1"/>
-          </p:cNvSpPr>
-          <p:nvPr>
-            <p:ph type="body" idx="1"/>
-          </p:nvPr>
-        </p:nvSpPr>
-        <p:spPr/>
-        <p:txBody>
-          <a:bodyPr/>
-          <a:lstStyle/>
-          <a:p>
-            <a:r>
-              <a:rPr lang="en-US" dirty="0"/>
-              <a:t>This is a diagram of the demo app. It is a running healthcare shell. </a:t>
-            </a:r>
-          </a:p>
-          <a:p>
-            <a:r>
-              <a:rPr lang="en-US" dirty="0"/>
-              <a:t>The host is on port 3000. Home is on 3004 and loads instantly. </a:t>
-            </a:r>
-          </a:p>
-          <a:p>
-            <a:r>
-              <a:rPr lang="en-US" dirty="0"/>
-              <a:t>Records is on 3001 and is eagerly preloaded. </a:t>
-            </a:r>
-          </a:p>
-          <a:p>
-            <a:r>
-              <a:rPr lang="en-US" dirty="0"/>
-              <a:t>Prescriptions is on 3002 and streams on demand. </a:t>
-            </a:r>
-          </a:p>
-          <a:p>
-            <a:r>
-              <a:rPr lang="en-US" dirty="0"/>
-              <a:t>Analytics is on 3003 and does the same.</a:t>
-            </a:r>
-          </a:p>
-          <a:p>
-            <a:endParaRPr lang="en-US" dirty="0"/>
-          </a:p>
-          <a:p>
-            <a:r>
-              <a:rPr lang="en-US" dirty="0"/>
-              <a:t>Five independent React apps. Each has its own bundler config, its own dev server, and its own test suite. They compose at runtime through Module Federation. React 19. </a:t>
-            </a:r>
-            <a:r>
-              <a:rPr lang="en-US" dirty="0" err="1"/>
-              <a:t>Rspack</a:t>
-            </a:r>
-            <a:r>
-              <a:rPr lang="en-US" dirty="0"/>
-              <a:t> 2.1. TypeScript 7. Tailwind CSS v4. You can clone this after the talk and run it.</a:t>
-            </a:r>
-          </a:p>
-          <a:p>
-            <a:endParaRPr lang="en-US" dirty="0"/>
-          </a:p>
-          <a:p>
-            <a:r>
-              <a:rPr lang="en-US" dirty="0"/>
-              <a:t>Two promises. Module Federation gives growing teams better developer experience. Suspense fallbacks give visitors better user experience. We are going to prove both, live, in the same architecture.</a:t>
-            </a:r>
-          </a:p>
-          <a:p>
-            <a:endParaRPr lang="en-US" dirty="0"/>
-          </a:p>
-        </p:txBody>
-      </p:sp>
-      <p:sp>
-        <p:nvSpPr>
-          <p:cNvPr id="4" name="Slide Number Placeholder 3">
-            <a:extLst>
-              <a:ext uri="{FF2B5EF4-FFF2-40B4-BE49-F238E27FC236}">
-                <a16:creationId xmlns:a16="http://schemas.microsoft.com/office/drawing/2014/main" id="{BF5BDD75-7889-D9B0-B939-E9B065792DC3}"/>
-              </a:ext>
-            </a:extLst>
-          </p:cNvPr>
-          <p:cNvSpPr>
-            <a:spLocks noGrp="1"/>
-          </p:cNvSpPr>
-          <p:nvPr>
-            <p:ph type="sldNum" sz="quarter" idx="10"/>
-          </p:nvPr>
-        </p:nvSpPr>
-        <p:spPr/>
-        <p:txBody>
-          <a:bodyPr/>
-          <a:lstStyle/>
-          <a:p>
-            <a:fld id="{F7021451-1387-4CA6-816F-3879F97B5CBC}" type="slidenum">
-              <a:rPr lang="en-US"/>
-              <a:t>13</a:t>
-            </a:fld>
-            <a:endParaRPr lang="en-US"/>
-          </a:p>
-        </p:txBody>
-      </p:sp>
-    </p:spTree>
-    <p:extLst>
-      <p:ext uri="{BB962C8B-B14F-4D97-AF65-F5344CB8AC3E}">
-        <p14:creationId xmlns:p14="http://schemas.microsoft.com/office/powerpoint/2010/main" val="1848272310"/>
       </p:ext>
     </p:extLst>
   </p:cSld>
@@ -786,14 +710,61 @@
           <a:p>
             <a:r>
               <a:rPr lang="en-US" dirty="0"/>
-              <a:t>Module Federation is for developers and teams. Independent builds. Independent deploys. Onboarding that actually scales.</a:t>
+              <a:t>This is a diagram of the demo app. It is a running healthcare shell. </a:t>
             </a:r>
           </a:p>
           <a:p>
             <a:r>
               <a:rPr lang="en-US" dirty="0"/>
-              <a:t>Suspense and skeletons are for end users. Instant perceived load. No blank screens at runtime.</a:t>
-            </a:r>
+              <a:t>The host is on port 3000. Home is on 3004 and loads instantly. </a:t>
+            </a:r>
+          </a:p>
+          <a:p>
+            <a:r>
+              <a:rPr lang="en-US" dirty="0"/>
+              <a:t>Records is on 3001 and is eagerly preloaded. </a:t>
+            </a:r>
+          </a:p>
+          <a:p>
+            <a:r>
+              <a:rPr lang="en-US" dirty="0"/>
+              <a:t>Prescriptions is on 3002 and streams on demand. </a:t>
+            </a:r>
+          </a:p>
+          <a:p>
+            <a:r>
+              <a:rPr lang="en-US" dirty="0"/>
+              <a:t>Analytics is on 3003 and does the same.</a:t>
+            </a:r>
+          </a:p>
+          <a:p>
+            <a:endParaRPr lang="en-US" dirty="0"/>
+          </a:p>
+          <a:p>
+            <a:r>
+              <a:rPr lang="en-US" dirty="0"/>
+              <a:t>Five independent React apps. Each has its own bundler config, its own dev server, and its own test suite. They compose at runtime through Module Federation. React 19. </a:t>
+            </a:r>
+            <a:r>
+              <a:rPr lang="en-US" dirty="0" err="1"/>
+              <a:t>Rspack</a:t>
+            </a:r>
+            <a:r>
+              <a:rPr lang="en-US" dirty="0"/>
+              <a:t> 2.1. TypeScript 7. Tailwind CSS v4. You can clone this after the talk and run it.</a:t>
+            </a:r>
+          </a:p>
+          <a:p>
+            <a:endParaRPr lang="en-US" dirty="0"/>
+          </a:p>
+          <a:p>
+            <a:r>
+              <a:rPr lang="en-US" dirty="0"/>
+              <a:t>Two promises. Module Federation gives growing teams better developer experience. Suspense fallbacks give visitors better user experience. We are going to prove both, live, in the same architecture.</a:t>
+            </a:r>
+          </a:p>
+          <a:p>
+            <a:endParaRPr lang="en-US" dirty="0"/>
           </a:p>
           <a:p>
             <a:endParaRPr lang="en-GB" dirty="0"/>
@@ -803,7 +774,7 @@
     </p:spTree>
     <p:extLst>
       <p:ext uri="{BB962C8B-B14F-4D97-AF65-F5344CB8AC3E}">
-        <p14:creationId xmlns:p14="http://schemas.microsoft.com/office/powerpoint/2010/main" val="447115205"/>
+        <p14:creationId xmlns:p14="http://schemas.microsoft.com/office/powerpoint/2010/main" val="1396901090"/>
       </p:ext>
     </p:extLst>
   </p:cSld>
@@ -881,13 +852,16 @@
           <a:p>
             <a:r>
               <a:rPr lang="en-US" dirty="0"/>
-              <a:t>You can have one without the other. Plenty of teams do. You can federate four remotes and still show a blank screen and a spinner every time someone clicks a tab. That is slow user experience even when team ownership is solid.</a:t>
-            </a:r>
+              <a:t>Module Federation is for developers and teams. Independent builds. Independent deploys. Onboarding that actually scales.</a:t>
+            </a:r>
+          </a:p>
+          <a:p>
+            <a:endParaRPr lang="en-US" dirty="0"/>
           </a:p>
           <a:p>
             <a:r>
               <a:rPr lang="en-US" dirty="0"/>
-              <a:t>With Suspense, the user clicks a tab, a skeleton appears immediately, and the content resolves when it is ready. Each remote owns its own loading choreography.</a:t>
+              <a:t>Suspense and skeletons are for end users. Instant perceived load. No blank screens at runtime.</a:t>
             </a:r>
           </a:p>
           <a:p>
@@ -898,7 +872,7 @@
     </p:spTree>
     <p:extLst>
       <p:ext uri="{BB962C8B-B14F-4D97-AF65-F5344CB8AC3E}">
-        <p14:creationId xmlns:p14="http://schemas.microsoft.com/office/powerpoint/2010/main" val="2672093464"/>
+        <p14:creationId xmlns:p14="http://schemas.microsoft.com/office/powerpoint/2010/main" val="447115205"/>
       </p:ext>
     </p:extLst>
   </p:cSld>
@@ -935,7 +909,21 @@
             <p:ph type="sldImg"/>
           </p:nvPr>
         </p:nvSpPr>
-        <p:spPr/>
+        <p:spPr>
+          <a:xfrm>
+            <a:off x="-225425" y="1524000"/>
+            <a:ext cx="7308850" cy="4113213"/>
+          </a:xfrm>
+          <a:prstGeom prst="rect">
+            <a:avLst/>
+          </a:prstGeom>
+          <a:noFill/>
+          <a:ln w="12700">
+            <a:solidFill>
+              <a:prstClr val="black"/>
+            </a:solidFill>
+          </a:ln>
+        </p:spPr>
       </p:sp>
       <p:sp>
         <p:nvSpPr>
@@ -947,57 +935,39 @@
             <p:ph type="body" idx="1"/>
           </p:nvPr>
         </p:nvSpPr>
-        <p:spPr/>
+        <p:spPr>
+          <a:xfrm>
+            <a:off x="685800" y="5865813"/>
+            <a:ext cx="5486400" cy="4799012"/>
+          </a:xfrm>
+          <a:prstGeom prst="rect">
+            <a:avLst/>
+          </a:prstGeom>
+        </p:spPr>
         <p:txBody>
           <a:bodyPr/>
           <a:lstStyle/>
           <a:p>
             <a:r>
               <a:rPr lang="en-US" dirty="0"/>
-              <a:t>This is the shape of the app. One shell on port 3000. It owns navigation, the router, the theme, and a status strip that reads Instant, Eager, or Streaming.</a:t>
+              <a:t>You can have one without the other. Plenty of teams do. You can federate four remotes and still show a blank screen and a spinner every time someone clicks a tab. That is slow user experience even when team ownership is solid.</a:t>
             </a:r>
           </a:p>
           <a:p>
             <a:r>
               <a:rPr lang="en-US" dirty="0"/>
-              <a:t>Every remote is wrapped the same way. An error boundary. Then Suspense with a skeleton fallback. Then the remote module itself.</a:t>
-            </a:r>
-          </a:p>
-          <a:p>
-            <a:r>
-              <a:rPr lang="en-US" dirty="0"/>
-              <a:t>Four remotes hang off that shell. Home on 3004, instant. Records on 3001, eager. Prescriptions on 3002, streamed. Analytics on 3003, streamed. Not every module should load the same way. Content priority decides the strategy.</a:t>
-            </a:r>
-          </a:p>
-        </p:txBody>
-      </p:sp>
-      <p:sp>
-        <p:nvSpPr>
-          <p:cNvPr id="4" name="Slide Number Placeholder 3"/>
-          <p:cNvSpPr>
-            <a:spLocks noGrp="1"/>
-          </p:cNvSpPr>
-          <p:nvPr>
-            <p:ph type="sldNum" sz="quarter" idx="10"/>
-          </p:nvPr>
-        </p:nvSpPr>
-        <p:spPr/>
-        <p:txBody>
-          <a:bodyPr/>
-          <a:lstStyle/>
-          <a:p>
-            <a:fld id="{F7021451-1387-4CA6-816F-3879F97B5CBC}" type="slidenum">
-              <a:rPr lang="en-US"/>
-              <a:t>16</a:t>
-            </a:fld>
-            <a:endParaRPr lang="en-US"/>
+              <a:t>With Suspense, the user clicks a tab, a skeleton appears immediately, and the content resolves when it is ready. Each remote owns its own loading choreography.</a:t>
+            </a:r>
+          </a:p>
+          <a:p>
+            <a:endParaRPr lang="en-GB" dirty="0"/>
           </a:p>
         </p:txBody>
       </p:sp>
     </p:spTree>
     <p:extLst>
       <p:ext uri="{BB962C8B-B14F-4D97-AF65-F5344CB8AC3E}">
-        <p14:creationId xmlns:p14="http://schemas.microsoft.com/office/powerpoint/2010/main" val="1024086991"/>
+        <p14:creationId xmlns:p14="http://schemas.microsoft.com/office/powerpoint/2010/main" val="2672093464"/>
       </p:ext>
     </p:extLst>
   </p:cSld>
@@ -1075,25 +1045,19 @@
           <a:p>
             <a:r>
               <a:rPr lang="en-US" dirty="0"/>
-              <a:t>Home is the landing page. It is lazy for code splitting, with no artificial delay. It renders the moment the chunk arrives. The status strip says Instant.</a:t>
+              <a:t>This is the shape of the app. One shell on port 3000. It owns navigation, the router, the theme, and a status strip that reads Instant, Eager, or Streaming.</a:t>
             </a:r>
           </a:p>
           <a:p>
             <a:r>
               <a:rPr lang="en-US" dirty="0"/>
-              <a:t>Records is high-value content. It is preloaded the moment the shell mounts. By the time the user clicks, it is already cached. The status strip says Eager.</a:t>
+              <a:t>Every remote is wrapped the same way. An error boundary. Then Suspense with a skeleton fallback. Then the remote module itself.</a:t>
             </a:r>
           </a:p>
           <a:p>
             <a:r>
               <a:rPr lang="en-US" dirty="0"/>
-              <a:t>Prescriptions and Analytics are secondary. They load on demand. The user sees a purpose-built skeleton while the module resolves. The status strip says Streaming.</a:t>
-            </a:r>
-          </a:p>
-          <a:p>
-            <a:r>
-              <a:rPr lang="en-US" dirty="0"/>
-              <a:t>When we get to the live demo, watch that status strip. It is the scoreboard for this architecture.</a:t>
+              <a:t>Four remotes hang off that shell. Home on 3004, instant. Records on 3001, eager. Prescriptions on 3002, streamed. Analytics on 3003, streamed. Not every module should load the same way. Content priority decides the strategy.</a:t>
             </a:r>
           </a:p>
           <a:p>
@@ -1104,7 +1068,7 @@
     </p:spTree>
     <p:extLst>
       <p:ext uri="{BB962C8B-B14F-4D97-AF65-F5344CB8AC3E}">
-        <p14:creationId xmlns:p14="http://schemas.microsoft.com/office/powerpoint/2010/main" val="1651726170"/>
+        <p14:creationId xmlns:p14="http://schemas.microsoft.com/office/powerpoint/2010/main" val="1899568420"/>
       </p:ext>
     </p:extLst>
   </p:cSld>
@@ -1115,240 +1079,6 @@
 </file>
 
 <file path=ppt/notesSlides/notesSlide17.xml><?xml version="1.0" encoding="utf-8"?>
-<p:notes xmlns:a="http://schemas.openxmlformats.org/drawingml/2006/main" xmlns:r="http://schemas.openxmlformats.org/officeDocument/2006/relationships" xmlns:p="http://schemas.openxmlformats.org/presentationml/2006/main">
-  <p:cSld>
-    <p:spTree>
-      <p:nvGrpSpPr>
-        <p:cNvPr id="1" name="">
-          <a:extLst>
-            <a:ext uri="{FF2B5EF4-FFF2-40B4-BE49-F238E27FC236}">
-              <a16:creationId xmlns:a16="http://schemas.microsoft.com/office/drawing/2014/main" id="{02274E12-9E8D-AFB5-3041-D4CE3F6A618E}"/>
-            </a:ext>
-          </a:extLst>
-        </p:cNvPr>
-        <p:cNvGrpSpPr/>
-        <p:nvPr/>
-      </p:nvGrpSpPr>
-      <p:grpSpPr>
-        <a:xfrm>
-          <a:off x="0" y="0"/>
-          <a:ext cx="0" cy="0"/>
-          <a:chOff x="0" y="0"/>
-          <a:chExt cx="0" cy="0"/>
-        </a:xfrm>
-      </p:grpSpPr>
-      <p:sp>
-        <p:nvSpPr>
-          <p:cNvPr id="2" name="Slide Image Placeholder 1">
-            <a:extLst>
-              <a:ext uri="{FF2B5EF4-FFF2-40B4-BE49-F238E27FC236}">
-                <a16:creationId xmlns:a16="http://schemas.microsoft.com/office/drawing/2014/main" id="{71BB1D06-B6BA-E8F9-8521-8BC0BE9DE2BB}"/>
-              </a:ext>
-            </a:extLst>
-          </p:cNvPr>
-          <p:cNvSpPr>
-            <a:spLocks noGrp="1" noRot="1" noChangeAspect="1"/>
-          </p:cNvSpPr>
-          <p:nvPr>
-            <p:ph type="sldImg"/>
-          </p:nvPr>
-        </p:nvSpPr>
-        <p:spPr/>
-      </p:sp>
-      <p:sp>
-        <p:nvSpPr>
-          <p:cNvPr id="3" name="Notes Placeholder 2">
-            <a:extLst>
-              <a:ext uri="{FF2B5EF4-FFF2-40B4-BE49-F238E27FC236}">
-                <a16:creationId xmlns:a16="http://schemas.microsoft.com/office/drawing/2014/main" id="{42DFC480-5001-6921-742A-B8CE57747570}"/>
-              </a:ext>
-            </a:extLst>
-          </p:cNvPr>
-          <p:cNvSpPr>
-            <a:spLocks noGrp="1"/>
-          </p:cNvSpPr>
-          <p:nvPr>
-            <p:ph type="body" idx="1"/>
-          </p:nvPr>
-        </p:nvSpPr>
-        <p:spPr/>
-        <p:txBody>
-          <a:bodyPr/>
-          <a:lstStyle/>
-          <a:p>
-            <a:r>
-              <a:rPr lang="en-US" dirty="0"/>
-              <a:t>There is one trick that makes standalone mode possible. The entire entry file of every module is one line: import bootstrap. </a:t>
-            </a:r>
-          </a:p>
-        </p:txBody>
-      </p:sp>
-      <p:sp>
-        <p:nvSpPr>
-          <p:cNvPr id="4" name="Slide Number Placeholder 3">
-            <a:extLst>
-              <a:ext uri="{FF2B5EF4-FFF2-40B4-BE49-F238E27FC236}">
-                <a16:creationId xmlns:a16="http://schemas.microsoft.com/office/drawing/2014/main" id="{B988A9D4-A6F8-268D-8EA4-5DB05D5E7B79}"/>
-              </a:ext>
-            </a:extLst>
-          </p:cNvPr>
-          <p:cNvSpPr>
-            <a:spLocks noGrp="1"/>
-          </p:cNvSpPr>
-          <p:nvPr>
-            <p:ph type="sldNum" sz="quarter" idx="10"/>
-          </p:nvPr>
-        </p:nvSpPr>
-        <p:spPr/>
-        <p:txBody>
-          <a:bodyPr/>
-          <a:lstStyle/>
-          <a:p>
-            <a:fld id="{F7021451-1387-4CA6-816F-3879F97B5CBC}" type="slidenum">
-              <a:rPr lang="en-US"/>
-              <a:t>18</a:t>
-            </a:fld>
-            <a:endParaRPr lang="en-US"/>
-          </a:p>
-        </p:txBody>
-      </p:sp>
-    </p:spTree>
-    <p:extLst>
-      <p:ext uri="{BB962C8B-B14F-4D97-AF65-F5344CB8AC3E}">
-        <p14:creationId xmlns:p14="http://schemas.microsoft.com/office/powerpoint/2010/main" val="1910171874"/>
-      </p:ext>
-    </p:extLst>
-  </p:cSld>
-  <p:clrMapOvr>
-    <a:masterClrMapping/>
-  </p:clrMapOvr>
-</p:notes>
-</file>
-
-<file path=ppt/notesSlides/notesSlide18.xml><?xml version="1.0" encoding="utf-8"?>
-<p:notes xmlns:a="http://schemas.openxmlformats.org/drawingml/2006/main" xmlns:r="http://schemas.openxmlformats.org/officeDocument/2006/relationships" xmlns:p="http://schemas.openxmlformats.org/presentationml/2006/main">
-  <p:cSld>
-    <p:spTree>
-      <p:nvGrpSpPr>
-        <p:cNvPr id="1" name="">
-          <a:extLst>
-            <a:ext uri="{FF2B5EF4-FFF2-40B4-BE49-F238E27FC236}">
-              <a16:creationId xmlns:a16="http://schemas.microsoft.com/office/drawing/2014/main" id="{60136AC3-6EF3-7107-D76D-63DD64E263E3}"/>
-            </a:ext>
-          </a:extLst>
-        </p:cNvPr>
-        <p:cNvGrpSpPr/>
-        <p:nvPr/>
-      </p:nvGrpSpPr>
-      <p:grpSpPr>
-        <a:xfrm>
-          <a:off x="0" y="0"/>
-          <a:ext cx="0" cy="0"/>
-          <a:chOff x="0" y="0"/>
-          <a:chExt cx="0" cy="0"/>
-        </a:xfrm>
-      </p:grpSpPr>
-      <p:sp>
-        <p:nvSpPr>
-          <p:cNvPr id="2" name="Slide Image Placeholder 1">
-            <a:extLst>
-              <a:ext uri="{FF2B5EF4-FFF2-40B4-BE49-F238E27FC236}">
-                <a16:creationId xmlns:a16="http://schemas.microsoft.com/office/drawing/2014/main" id="{C31433DC-A735-7F16-61AA-6F23B022A745}"/>
-              </a:ext>
-            </a:extLst>
-          </p:cNvPr>
-          <p:cNvSpPr>
-            <a:spLocks noGrp="1" noRot="1" noChangeAspect="1"/>
-          </p:cNvSpPr>
-          <p:nvPr>
-            <p:ph type="sldImg"/>
-          </p:nvPr>
-        </p:nvSpPr>
-        <p:spPr/>
-      </p:sp>
-      <p:sp>
-        <p:nvSpPr>
-          <p:cNvPr id="3" name="Notes Placeholder 2">
-            <a:extLst>
-              <a:ext uri="{FF2B5EF4-FFF2-40B4-BE49-F238E27FC236}">
-                <a16:creationId xmlns:a16="http://schemas.microsoft.com/office/drawing/2014/main" id="{2C706371-E97C-24F1-680A-BB10D527C906}"/>
-              </a:ext>
-            </a:extLst>
-          </p:cNvPr>
-          <p:cNvSpPr>
-            <a:spLocks noGrp="1"/>
-          </p:cNvSpPr>
-          <p:nvPr>
-            <p:ph type="body" idx="1"/>
-          </p:nvPr>
-        </p:nvSpPr>
-        <p:spPr/>
-        <p:txBody>
-          <a:bodyPr/>
-          <a:lstStyle/>
-          <a:p>
-            <a:r>
-              <a:rPr lang="en-US" dirty="0"/>
-              <a:t>That dynamic import is an async boundary.</a:t>
-            </a:r>
-          </a:p>
-          <a:p>
-            <a:r>
-              <a:rPr lang="en-US" dirty="0"/>
-              <a:t>Module Federation shares React with eager set to false. Shared React has to be negotiated before any React code runs. Import React synchronously in the entry file and you get a white screen and a loadShareSync error.</a:t>
-            </a:r>
-          </a:p>
-          <a:p>
-            <a:r>
-              <a:rPr lang="en-US" dirty="0"/>
-              <a:t>With the bootstrap split, Module Federation finishes the handshake, then bootstrap renders. All five packages use this pattern. Do not remove it.</a:t>
-            </a:r>
-          </a:p>
-        </p:txBody>
-      </p:sp>
-      <p:sp>
-        <p:nvSpPr>
-          <p:cNvPr id="4" name="Slide Number Placeholder 3">
-            <a:extLst>
-              <a:ext uri="{FF2B5EF4-FFF2-40B4-BE49-F238E27FC236}">
-                <a16:creationId xmlns:a16="http://schemas.microsoft.com/office/drawing/2014/main" id="{3D4262D7-F1FB-BF43-C3BD-EB90E311C904}"/>
-              </a:ext>
-            </a:extLst>
-          </p:cNvPr>
-          <p:cNvSpPr>
-            <a:spLocks noGrp="1"/>
-          </p:cNvSpPr>
-          <p:nvPr>
-            <p:ph type="sldNum" sz="quarter" idx="10"/>
-          </p:nvPr>
-        </p:nvSpPr>
-        <p:spPr/>
-        <p:txBody>
-          <a:bodyPr/>
-          <a:lstStyle/>
-          <a:p>
-            <a:fld id="{F7021451-1387-4CA6-816F-3879F97B5CBC}" type="slidenum">
-              <a:rPr lang="en-US"/>
-              <a:t>19</a:t>
-            </a:fld>
-            <a:endParaRPr lang="en-US"/>
-          </a:p>
-        </p:txBody>
-      </p:sp>
-    </p:spTree>
-    <p:extLst>
-      <p:ext uri="{BB962C8B-B14F-4D97-AF65-F5344CB8AC3E}">
-        <p14:creationId xmlns:p14="http://schemas.microsoft.com/office/powerpoint/2010/main" val="944579646"/>
-      </p:ext>
-    </p:extLst>
-  </p:cSld>
-  <p:clrMapOvr>
-    <a:masterClrMapping/>
-  </p:clrMapOvr>
-</p:notes>
-</file>
-
-<file path=ppt/notesSlides/notesSlide19.xml><?xml version="1.0" encoding="utf-8"?>
 <p:notes xmlns:a="http://schemas.openxmlformats.org/drawingml/2006/main" xmlns:r="http://schemas.openxmlformats.org/officeDocument/2006/relationships" xmlns:p="http://schemas.openxmlformats.org/presentationml/2006/main">
   <p:cSld>
     <p:spTree>
@@ -1416,45 +1146,25 @@
           <a:p>
             <a:r>
               <a:rPr lang="en-US" dirty="0"/>
-              <a:t>Everything else in the </a:t>
-            </a:r>
-            <a:r>
-              <a:rPr lang="en-US" dirty="0" err="1"/>
-              <a:t>Rspack</a:t>
-            </a:r>
+              <a:t>Home is the landing page. It is lazy for code splitting, with no artificial delay. It renders the moment the chunk arrives. The status strip says Instant.</a:t>
+            </a:r>
+          </a:p>
+          <a:p>
             <a:r>
               <a:rPr lang="en-US" dirty="0"/>
-              <a:t> config is a normal bundler config. Entry. Rules. Dev server. Optimization. You would write the same file for a single React app.</a:t>
+              <a:t>Records is high-value content. It is preloaded the moment the shell mounts. By the time the user clicks, it is already cached. The status strip says Eager.</a:t>
             </a:r>
           </a:p>
           <a:p>
             <a:r>
               <a:rPr lang="en-US" dirty="0"/>
-              <a:t>The one plugin that turns five unrelated apps into a federated architecture is Module Federation Plugin. Three properties do all the work.</a:t>
+              <a:t>Prescriptions and Analytics are secondary. They load on demand. The user sees a purpose-built skeleton while the module resolves. The status strip says Streaming.</a:t>
             </a:r>
           </a:p>
           <a:p>
             <a:r>
               <a:rPr lang="en-US" dirty="0"/>
-              <a:t>Exposes lives on remotes. It is the team's public API. Records exposes Medical Records. That is the contract other apps are allowed to import.</a:t>
-            </a:r>
-          </a:p>
-          <a:p>
-            <a:r>
-              <a:rPr lang="en-US" dirty="0"/>
-              <a:t>Remotes lives on the host. It is runtime discovery. A scope name, an at sign, and a URL to remoteEntry.js. The shell does not build Records. It finds Records at runtime on port 3001.</a:t>
-            </a:r>
-          </a:p>
-          <a:p>
-            <a:r>
-              <a:rPr lang="en-US" dirty="0"/>
-              <a:t>Shared lives on both sides. Singleton true means one React for everyone. Remove that, and you get invalid hook call errors, because each remote loads its own React.</a:t>
-            </a:r>
-          </a:p>
-          <a:p>
-            <a:r>
-              <a:rPr lang="en-US" dirty="0"/>
-              <a:t>Remove the plugin and you have five normal, unrelated apps. Add it back and they become a micro-frontend architecture. That is the entire infrastructure story.</a:t>
+              <a:t>When we get to the live demo, watch that status strip. It is the scoreboard for this architecture.</a:t>
             </a:r>
           </a:p>
           <a:p>
@@ -1465,7 +1175,241 @@
     </p:spTree>
     <p:extLst>
       <p:ext uri="{BB962C8B-B14F-4D97-AF65-F5344CB8AC3E}">
-        <p14:creationId xmlns:p14="http://schemas.microsoft.com/office/powerpoint/2010/main" val="3990870486"/>
+        <p14:creationId xmlns:p14="http://schemas.microsoft.com/office/powerpoint/2010/main" val="1651726170"/>
+      </p:ext>
+    </p:extLst>
+  </p:cSld>
+  <p:clrMapOvr>
+    <a:masterClrMapping/>
+  </p:clrMapOvr>
+</p:notes>
+</file>
+
+<file path=ppt/notesSlides/notesSlide18.xml><?xml version="1.0" encoding="utf-8"?>
+<p:notes xmlns:a="http://schemas.openxmlformats.org/drawingml/2006/main" xmlns:r="http://schemas.openxmlformats.org/officeDocument/2006/relationships" xmlns:p="http://schemas.openxmlformats.org/presentationml/2006/main">
+  <p:cSld>
+    <p:spTree>
+      <p:nvGrpSpPr>
+        <p:cNvPr id="1" name="">
+          <a:extLst>
+            <a:ext uri="{FF2B5EF4-FFF2-40B4-BE49-F238E27FC236}">
+              <a16:creationId xmlns:a16="http://schemas.microsoft.com/office/drawing/2014/main" id="{02274E12-9E8D-AFB5-3041-D4CE3F6A618E}"/>
+            </a:ext>
+          </a:extLst>
+        </p:cNvPr>
+        <p:cNvGrpSpPr/>
+        <p:nvPr/>
+      </p:nvGrpSpPr>
+      <p:grpSpPr>
+        <a:xfrm>
+          <a:off x="0" y="0"/>
+          <a:ext cx="0" cy="0"/>
+          <a:chOff x="0" y="0"/>
+          <a:chExt cx="0" cy="0"/>
+        </a:xfrm>
+      </p:grpSpPr>
+      <p:sp>
+        <p:nvSpPr>
+          <p:cNvPr id="2" name="Slide Image Placeholder 1">
+            <a:extLst>
+              <a:ext uri="{FF2B5EF4-FFF2-40B4-BE49-F238E27FC236}">
+                <a16:creationId xmlns:a16="http://schemas.microsoft.com/office/drawing/2014/main" id="{71BB1D06-B6BA-E8F9-8521-8BC0BE9DE2BB}"/>
+              </a:ext>
+            </a:extLst>
+          </p:cNvPr>
+          <p:cNvSpPr>
+            <a:spLocks noGrp="1" noRot="1" noChangeAspect="1"/>
+          </p:cNvSpPr>
+          <p:nvPr>
+            <p:ph type="sldImg"/>
+          </p:nvPr>
+        </p:nvSpPr>
+        <p:spPr/>
+      </p:sp>
+      <p:sp>
+        <p:nvSpPr>
+          <p:cNvPr id="3" name="Notes Placeholder 2">
+            <a:extLst>
+              <a:ext uri="{FF2B5EF4-FFF2-40B4-BE49-F238E27FC236}">
+                <a16:creationId xmlns:a16="http://schemas.microsoft.com/office/drawing/2014/main" id="{42DFC480-5001-6921-742A-B8CE57747570}"/>
+              </a:ext>
+            </a:extLst>
+          </p:cNvPr>
+          <p:cNvSpPr>
+            <a:spLocks noGrp="1"/>
+          </p:cNvSpPr>
+          <p:nvPr>
+            <p:ph type="body" idx="1"/>
+          </p:nvPr>
+        </p:nvSpPr>
+        <p:spPr/>
+        <p:txBody>
+          <a:bodyPr/>
+          <a:lstStyle/>
+          <a:p>
+            <a:r>
+              <a:rPr lang="en-US" dirty="0"/>
+              <a:t>There is one trick that makes standalone mode possible. The entire entry file of every module is one line: import bootstrap. </a:t>
+            </a:r>
+          </a:p>
+        </p:txBody>
+      </p:sp>
+      <p:sp>
+        <p:nvSpPr>
+          <p:cNvPr id="4" name="Slide Number Placeholder 3">
+            <a:extLst>
+              <a:ext uri="{FF2B5EF4-FFF2-40B4-BE49-F238E27FC236}">
+                <a16:creationId xmlns:a16="http://schemas.microsoft.com/office/drawing/2014/main" id="{B988A9D4-A6F8-268D-8EA4-5DB05D5E7B79}"/>
+              </a:ext>
+            </a:extLst>
+          </p:cNvPr>
+          <p:cNvSpPr>
+            <a:spLocks noGrp="1"/>
+          </p:cNvSpPr>
+          <p:nvPr>
+            <p:ph type="sldNum" sz="quarter" idx="10"/>
+          </p:nvPr>
+        </p:nvSpPr>
+        <p:spPr/>
+        <p:txBody>
+          <a:bodyPr/>
+          <a:lstStyle/>
+          <a:p>
+            <a:fld id="{F7021451-1387-4CA6-816F-3879F97B5CBC}" type="slidenum">
+              <a:rPr lang="en-US"/>
+              <a:t>18</a:t>
+            </a:fld>
+            <a:endParaRPr lang="en-US"/>
+          </a:p>
+        </p:txBody>
+      </p:sp>
+    </p:spTree>
+    <p:extLst>
+      <p:ext uri="{BB962C8B-B14F-4D97-AF65-F5344CB8AC3E}">
+        <p14:creationId xmlns:p14="http://schemas.microsoft.com/office/powerpoint/2010/main" val="1910171874"/>
+      </p:ext>
+    </p:extLst>
+  </p:cSld>
+  <p:clrMapOvr>
+    <a:masterClrMapping/>
+  </p:clrMapOvr>
+</p:notes>
+</file>
+
+<file path=ppt/notesSlides/notesSlide19.xml><?xml version="1.0" encoding="utf-8"?>
+<p:notes xmlns:a="http://schemas.openxmlformats.org/drawingml/2006/main" xmlns:r="http://schemas.openxmlformats.org/officeDocument/2006/relationships" xmlns:p="http://schemas.openxmlformats.org/presentationml/2006/main">
+  <p:cSld>
+    <p:spTree>
+      <p:nvGrpSpPr>
+        <p:cNvPr id="1" name="">
+          <a:extLst>
+            <a:ext uri="{FF2B5EF4-FFF2-40B4-BE49-F238E27FC236}">
+              <a16:creationId xmlns:a16="http://schemas.microsoft.com/office/drawing/2014/main" id="{60136AC3-6EF3-7107-D76D-63DD64E263E3}"/>
+            </a:ext>
+          </a:extLst>
+        </p:cNvPr>
+        <p:cNvGrpSpPr/>
+        <p:nvPr/>
+      </p:nvGrpSpPr>
+      <p:grpSpPr>
+        <a:xfrm>
+          <a:off x="0" y="0"/>
+          <a:ext cx="0" cy="0"/>
+          <a:chOff x="0" y="0"/>
+          <a:chExt cx="0" cy="0"/>
+        </a:xfrm>
+      </p:grpSpPr>
+      <p:sp>
+        <p:nvSpPr>
+          <p:cNvPr id="2" name="Slide Image Placeholder 1">
+            <a:extLst>
+              <a:ext uri="{FF2B5EF4-FFF2-40B4-BE49-F238E27FC236}">
+                <a16:creationId xmlns:a16="http://schemas.microsoft.com/office/drawing/2014/main" id="{C31433DC-A735-7F16-61AA-6F23B022A745}"/>
+              </a:ext>
+            </a:extLst>
+          </p:cNvPr>
+          <p:cNvSpPr>
+            <a:spLocks noGrp="1" noRot="1" noChangeAspect="1"/>
+          </p:cNvSpPr>
+          <p:nvPr>
+            <p:ph type="sldImg"/>
+          </p:nvPr>
+        </p:nvSpPr>
+        <p:spPr/>
+      </p:sp>
+      <p:sp>
+        <p:nvSpPr>
+          <p:cNvPr id="3" name="Notes Placeholder 2">
+            <a:extLst>
+              <a:ext uri="{FF2B5EF4-FFF2-40B4-BE49-F238E27FC236}">
+                <a16:creationId xmlns:a16="http://schemas.microsoft.com/office/drawing/2014/main" id="{2C706371-E97C-24F1-680A-BB10D527C906}"/>
+              </a:ext>
+            </a:extLst>
+          </p:cNvPr>
+          <p:cNvSpPr>
+            <a:spLocks noGrp="1"/>
+          </p:cNvSpPr>
+          <p:nvPr>
+            <p:ph type="body" idx="1"/>
+          </p:nvPr>
+        </p:nvSpPr>
+        <p:spPr/>
+        <p:txBody>
+          <a:bodyPr/>
+          <a:lstStyle/>
+          <a:p>
+            <a:r>
+              <a:rPr lang="en-US" dirty="0"/>
+              <a:t>That dynamic import is an async boundary.</a:t>
+            </a:r>
+          </a:p>
+          <a:p>
+            <a:r>
+              <a:rPr lang="en-US" dirty="0"/>
+              <a:t>Module Federation shares React with eager set to false. Shared React has to be negotiated before any React code runs. Import React synchronously in the entry file and you get a white screen and a loadShareSync error.</a:t>
+            </a:r>
+          </a:p>
+          <a:p>
+            <a:r>
+              <a:rPr lang="en-US" dirty="0"/>
+              <a:t>With the bootstrap split, Module Federation finishes the handshake, then bootstrap renders. All five packages use this pattern. Do not remove it.</a:t>
+            </a:r>
+          </a:p>
+        </p:txBody>
+      </p:sp>
+      <p:sp>
+        <p:nvSpPr>
+          <p:cNvPr id="4" name="Slide Number Placeholder 3">
+            <a:extLst>
+              <a:ext uri="{FF2B5EF4-FFF2-40B4-BE49-F238E27FC236}">
+                <a16:creationId xmlns:a16="http://schemas.microsoft.com/office/drawing/2014/main" id="{3D4262D7-F1FB-BF43-C3BD-EB90E311C904}"/>
+              </a:ext>
+            </a:extLst>
+          </p:cNvPr>
+          <p:cNvSpPr>
+            <a:spLocks noGrp="1"/>
+          </p:cNvSpPr>
+          <p:nvPr>
+            <p:ph type="sldNum" sz="quarter" idx="10"/>
+          </p:nvPr>
+        </p:nvSpPr>
+        <p:spPr/>
+        <p:txBody>
+          <a:bodyPr/>
+          <a:lstStyle/>
+          <a:p>
+            <a:fld id="{F7021451-1387-4CA6-816F-3879F97B5CBC}" type="slidenum">
+              <a:rPr lang="en-US"/>
+              <a:t>19</a:t>
+            </a:fld>
+            <a:endParaRPr lang="en-US"/>
+          </a:p>
+        </p:txBody>
+      </p:sp>
+    </p:spTree>
+    <p:extLst>
+      <p:ext uri="{BB962C8B-B14F-4D97-AF65-F5344CB8AC3E}">
+        <p14:creationId xmlns:p14="http://schemas.microsoft.com/office/powerpoint/2010/main" val="944579646"/>
       </p:ext>
     </p:extLst>
   </p:cSld>
@@ -1563,6 +1507,133 @@
   <p:cSld>
     <p:spTree>
       <p:nvGrpSpPr>
+        <p:cNvPr id="1" name=""/>
+        <p:cNvGrpSpPr/>
+        <p:nvPr/>
+      </p:nvGrpSpPr>
+      <p:grpSpPr>
+        <a:xfrm>
+          <a:off x="0" y="0"/>
+          <a:ext cx="0" cy="0"/>
+          <a:chOff x="0" y="0"/>
+          <a:chExt cx="0" cy="0"/>
+        </a:xfrm>
+      </p:grpSpPr>
+      <p:sp>
+        <p:nvSpPr>
+          <p:cNvPr id="2" name="Slide Image Placeholder 1"/>
+          <p:cNvSpPr>
+            <a:spLocks noGrp="1" noRot="1" noChangeAspect="1"/>
+          </p:cNvSpPr>
+          <p:nvPr>
+            <p:ph type="sldImg"/>
+          </p:nvPr>
+        </p:nvSpPr>
+        <p:spPr>
+          <a:xfrm>
+            <a:off x="-225425" y="1524000"/>
+            <a:ext cx="7308850" cy="4113213"/>
+          </a:xfrm>
+          <a:prstGeom prst="rect">
+            <a:avLst/>
+          </a:prstGeom>
+          <a:noFill/>
+          <a:ln w="12700">
+            <a:solidFill>
+              <a:prstClr val="black"/>
+            </a:solidFill>
+          </a:ln>
+        </p:spPr>
+      </p:sp>
+      <p:sp>
+        <p:nvSpPr>
+          <p:cNvPr id="3" name="Notes Placeholder 2"/>
+          <p:cNvSpPr>
+            <a:spLocks noGrp="1"/>
+          </p:cNvSpPr>
+          <p:nvPr>
+            <p:ph type="body" idx="1"/>
+          </p:nvPr>
+        </p:nvSpPr>
+        <p:spPr>
+          <a:xfrm>
+            <a:off x="685800" y="5865813"/>
+            <a:ext cx="5486400" cy="4799012"/>
+          </a:xfrm>
+          <a:prstGeom prst="rect">
+            <a:avLst/>
+          </a:prstGeom>
+        </p:spPr>
+        <p:txBody>
+          <a:bodyPr/>
+          <a:lstStyle/>
+          <a:p>
+            <a:r>
+              <a:rPr lang="en-US" dirty="0"/>
+              <a:t>Everything else in the </a:t>
+            </a:r>
+            <a:r>
+              <a:rPr lang="en-US" dirty="0" err="1"/>
+              <a:t>Rspack</a:t>
+            </a:r>
+            <a:r>
+              <a:rPr lang="en-US" dirty="0"/>
+              <a:t> config is a normal bundler config. Entry. Rules. Dev server. Optimization. You would write the same file for a single React app.</a:t>
+            </a:r>
+          </a:p>
+          <a:p>
+            <a:r>
+              <a:rPr lang="en-US" dirty="0"/>
+              <a:t>The one plugin that turns five unrelated apps into a federated architecture is Module Federation Plugin. Three properties do all the work.</a:t>
+            </a:r>
+          </a:p>
+          <a:p>
+            <a:r>
+              <a:rPr lang="en-US" dirty="0"/>
+              <a:t>Exposes lives on remotes. It is the team's public API. Records exposes Medical Records. That is the contract other apps are allowed to import.</a:t>
+            </a:r>
+          </a:p>
+          <a:p>
+            <a:r>
+              <a:rPr lang="en-US" dirty="0"/>
+              <a:t>Remotes lives on the host. It is runtime discovery. A scope name, an at sign, and a URL to remoteEntry.js. The shell does not build Records. It finds Records at runtime on port 3001.</a:t>
+            </a:r>
+          </a:p>
+          <a:p>
+            <a:r>
+              <a:rPr lang="en-US" dirty="0"/>
+              <a:t>Shared lives on both sides. Singleton true means one React for everyone. Remove that, and you get invalid hook call errors, because each remote loads its own React.</a:t>
+            </a:r>
+          </a:p>
+          <a:p>
+            <a:r>
+              <a:rPr lang="en-US" dirty="0"/>
+              <a:t>Remove the plugin and you have five normal, unrelated apps. Add it back and they become a micro-frontend architecture. That is the entire infrastructure story.</a:t>
+            </a:r>
+          </a:p>
+          <a:p>
+            <a:endParaRPr lang="en-GB" dirty="0"/>
+          </a:p>
+        </p:txBody>
+      </p:sp>
+    </p:spTree>
+    <p:extLst>
+      <p:ext uri="{BB962C8B-B14F-4D97-AF65-F5344CB8AC3E}">
+        <p14:creationId xmlns:p14="http://schemas.microsoft.com/office/powerpoint/2010/main" val="3990870486"/>
+      </p:ext>
+    </p:extLst>
+  </p:cSld>
+  <p:clrMapOvr>
+    <a:masterClrMapping/>
+  </p:clrMapOvr>
+</p:notes>
+</file>
+
+<file path=ppt/notesSlides/notesSlide21.xml><?xml version="1.0" encoding="utf-8"?>
+<p:notes xmlns:a="http://schemas.openxmlformats.org/drawingml/2006/main" xmlns:r="http://schemas.openxmlformats.org/officeDocument/2006/relationships" xmlns:p="http://schemas.openxmlformats.org/presentationml/2006/main">
+  <p:cSld>
+    <p:spTree>
+      <p:nvGrpSpPr>
         <p:cNvPr id="1" name="">
           <a:extLst>
             <a:ext uri="{FF2B5EF4-FFF2-40B4-BE49-F238E27FC236}">
@@ -1681,7 +1752,7 @@
 </p:notes>
 </file>
 
-<file path=ppt/notesSlides/notesSlide21.xml><?xml version="1.0" encoding="utf-8"?>
+<file path=ppt/notesSlides/notesSlide22.xml><?xml version="1.0" encoding="utf-8"?>
 <p:notes xmlns:a="http://schemas.openxmlformats.org/drawingml/2006/main" xmlns:r="http://schemas.openxmlformats.org/officeDocument/2006/relationships" xmlns:p="http://schemas.openxmlformats.org/presentationml/2006/main">
   <p:cSld>
     <p:spTree>
@@ -1804,7 +1875,7 @@
 </p:notes>
 </file>
 
-<file path=ppt/notesSlides/notesSlide22.xml><?xml version="1.0" encoding="utf-8"?>
+<file path=ppt/notesSlides/notesSlide23.xml><?xml version="1.0" encoding="utf-8"?>
 <p:notes xmlns:a="http://schemas.openxmlformats.org/drawingml/2006/main" xmlns:r="http://schemas.openxmlformats.org/officeDocument/2006/relationships" xmlns:p="http://schemas.openxmlformats.org/presentationml/2006/main">
   <p:cSld>
     <p:spTree>
@@ -1897,7 +1968,7 @@
 </p:notes>
 </file>
 
-<file path=ppt/notesSlides/notesSlide23.xml><?xml version="1.0" encoding="utf-8"?>
+<file path=ppt/notesSlides/notesSlide24.xml><?xml version="1.0" encoding="utf-8"?>
 <p:notes xmlns:a="http://schemas.openxmlformats.org/drawingml/2006/main" xmlns:r="http://schemas.openxmlformats.org/officeDocument/2006/relationships" xmlns:p="http://schemas.openxmlformats.org/presentationml/2006/main">
   <p:cSld>
     <p:spTree>
@@ -2008,7 +2079,7 @@
 </p:notes>
 </file>
 
-<file path=ppt/notesSlides/notesSlide24.xml><?xml version="1.0" encoding="utf-8"?>
+<file path=ppt/notesSlides/notesSlide25.xml><?xml version="1.0" encoding="utf-8"?>
 <p:notes xmlns:a="http://schemas.openxmlformats.org/drawingml/2006/main" xmlns:r="http://schemas.openxmlformats.org/officeDocument/2006/relationships" xmlns:p="http://schemas.openxmlformats.org/presentationml/2006/main">
   <p:cSld>
     <p:spTree>
@@ -2125,7 +2196,7 @@
 </p:notes>
 </file>
 
-<file path=ppt/notesSlides/notesSlide25.xml><?xml version="1.0" encoding="utf-8"?>
+<file path=ppt/notesSlides/notesSlide26.xml><?xml version="1.0" encoding="utf-8"?>
 <p:notes xmlns:a="http://schemas.openxmlformats.org/drawingml/2006/main" xmlns:r="http://schemas.openxmlformats.org/officeDocument/2006/relationships" xmlns:p="http://schemas.openxmlformats.org/presentationml/2006/main">
   <p:cSld>
     <p:spTree>
@@ -2215,101 +2286,6 @@
     <p:extLst>
       <p:ext uri="{BB962C8B-B14F-4D97-AF65-F5344CB8AC3E}">
         <p14:creationId xmlns:p14="http://schemas.microsoft.com/office/powerpoint/2010/main" val="1024086991"/>
-      </p:ext>
-    </p:extLst>
-  </p:cSld>
-  <p:clrMapOvr>
-    <a:masterClrMapping/>
-  </p:clrMapOvr>
-</p:notes>
-</file>
-
-<file path=ppt/notesSlides/notesSlide26.xml><?xml version="1.0" encoding="utf-8"?>
-<p:notes xmlns:a="http://schemas.openxmlformats.org/drawingml/2006/main" xmlns:r="http://schemas.openxmlformats.org/officeDocument/2006/relationships" xmlns:p="http://schemas.openxmlformats.org/presentationml/2006/main">
-  <p:cSld>
-    <p:spTree>
-      <p:nvGrpSpPr>
-        <p:cNvPr id="1" name=""/>
-        <p:cNvGrpSpPr/>
-        <p:nvPr/>
-      </p:nvGrpSpPr>
-      <p:grpSpPr>
-        <a:xfrm>
-          <a:off x="0" y="0"/>
-          <a:ext cx="0" cy="0"/>
-          <a:chOff x="0" y="0"/>
-          <a:chExt cx="0" cy="0"/>
-        </a:xfrm>
-      </p:grpSpPr>
-      <p:sp>
-        <p:nvSpPr>
-          <p:cNvPr id="2" name="Slide Image Placeholder 1"/>
-          <p:cNvSpPr>
-            <a:spLocks noGrp="1" noRot="1" noChangeAspect="1"/>
-          </p:cNvSpPr>
-          <p:nvPr>
-            <p:ph type="sldImg"/>
-          </p:nvPr>
-        </p:nvSpPr>
-        <p:spPr>
-          <a:xfrm>
-            <a:off x="-225425" y="1524000"/>
-            <a:ext cx="7308850" cy="4113213"/>
-          </a:xfrm>
-          <a:prstGeom prst="rect">
-            <a:avLst/>
-          </a:prstGeom>
-          <a:noFill/>
-          <a:ln w="12700">
-            <a:solidFill>
-              <a:prstClr val="black"/>
-            </a:solidFill>
-          </a:ln>
-        </p:spPr>
-      </p:sp>
-      <p:sp>
-        <p:nvSpPr>
-          <p:cNvPr id="3" name="Notes Placeholder 2"/>
-          <p:cNvSpPr>
-            <a:spLocks noGrp="1"/>
-          </p:cNvSpPr>
-          <p:nvPr>
-            <p:ph type="body" idx="1"/>
-          </p:nvPr>
-        </p:nvSpPr>
-        <p:spPr>
-          <a:xfrm>
-            <a:off x="685800" y="5865813"/>
-            <a:ext cx="5486400" cy="4799012"/>
-          </a:xfrm>
-          <a:prstGeom prst="rect">
-            <a:avLst/>
-          </a:prstGeom>
-        </p:spPr>
-        <p:txBody>
-          <a:bodyPr/>
-          <a:lstStyle/>
-          <a:p>
-            <a:r>
-              <a:rPr lang="en-US" dirty="0"/>
-              <a:t>Prescriptions and Analytics are streamed. They load on demand, behind per-module skeletons.</a:t>
-            </a:r>
-          </a:p>
-          <a:p>
-            <a:r>
-              <a:rPr lang="en-US" dirty="0"/>
-              <a:t>Every strategy still gets three layers of resilience. A catch on lazy, so an unreachable remote becomes a fallback instead of a white screen. Suspense, so a loading remote shows its own skeleton. An error boundary, so a runtime crash in one remote does not take down the app.</a:t>
-            </a:r>
-          </a:p>
-          <a:p>
-            <a:endParaRPr lang="en-GB" dirty="0"/>
-          </a:p>
-        </p:txBody>
-      </p:sp>
-    </p:spTree>
-    <p:extLst>
-      <p:ext uri="{BB962C8B-B14F-4D97-AF65-F5344CB8AC3E}">
-        <p14:creationId xmlns:p14="http://schemas.microsoft.com/office/powerpoint/2010/main" val="4040777647"/>
       </p:ext>
     </p:extLst>
   </p:cSld>
@@ -2385,106 +2361,15 @@
           <a:bodyPr/>
           <a:lstStyle/>
           <a:p>
-            <a:pPr marL="0" marR="0" lvl="0" indent="0" algn="l" defTabSz="914400" rtl="0" eaLnBrk="1" fontAlgn="auto" latinLnBrk="0" hangingPunct="1">
-              <a:lnSpc>
-                <a:spcPct val="100000"/>
-              </a:lnSpc>
-              <a:spcBef>
-                <a:spcPts val="0"/>
-              </a:spcBef>
-              <a:spcAft>
-                <a:spcPts val="0"/>
-              </a:spcAft>
-              <a:buClrTx/>
-              <a:buSzTx/>
-              <a:buFontTx/>
-              <a:buNone/>
-              <a:tabLst/>
-              <a:defRPr/>
-            </a:pPr>
             <a:r>
               <a:rPr lang="en-US" dirty="0"/>
-              <a:t>People ask why we wrap eager modules in </a:t>
-            </a:r>
-            <a:r>
-              <a:rPr lang="en-US" sz="1200" kern="1200" dirty="0">
-                <a:solidFill>
-                  <a:schemeClr val="tx1"/>
-                </a:solidFill>
-                <a:latin typeface="+mn-lt"/>
-                <a:ea typeface="+mn-ea"/>
-                <a:cs typeface="+mn-cs"/>
-              </a:rPr>
-              <a:t>lazy()</a:t>
-            </a:r>
+              <a:t>Prescriptions and Analytics are streamed. They load on demand, behind per-module skeletons.</a:t>
+            </a:r>
+          </a:p>
+          <a:p>
             <a:r>
               <a:rPr lang="en-US" dirty="0"/>
-              <a:t>. It's not that static imports are impossible — they work, because </a:t>
-            </a:r>
-            <a:r>
-              <a:rPr lang="en-US" sz="1200" kern="1200" dirty="0" err="1">
-                <a:solidFill>
-                  <a:schemeClr val="tx1"/>
-                </a:solidFill>
-                <a:latin typeface="+mn-lt"/>
-                <a:ea typeface="+mn-ea"/>
-                <a:cs typeface="+mn-cs"/>
-              </a:rPr>
-              <a:t>index.tsx</a:t>
-            </a:r>
-            <a:r>
-              <a:rPr lang="en-US" dirty="0" err="1"/>
-              <a:t>'s</a:t>
-            </a:r>
-            <a:r>
-              <a:rPr lang="en-US" dirty="0"/>
-              <a:t> dynamic import already resolved the shared scope. It's that a static import makes the remote block first paint, and leaves nowhere to catch a failed remote. So we fire </a:t>
-            </a:r>
-            <a:r>
-              <a:rPr lang="en-US" sz="1200" kern="1200" dirty="0">
-                <a:solidFill>
-                  <a:schemeClr val="tx1"/>
-                </a:solidFill>
-                <a:latin typeface="+mn-lt"/>
-                <a:ea typeface="+mn-ea"/>
-                <a:cs typeface="+mn-cs"/>
-              </a:rPr>
-              <a:t>import()</a:t>
-            </a:r>
-            <a:r>
-              <a:rPr lang="en-US" dirty="0"/>
-              <a:t> at shell </a:t>
-            </a:r>
-            <a:r>
-              <a:rPr lang="en-US" dirty="0" err="1"/>
-              <a:t>init</a:t>
-            </a:r>
-            <a:r>
-              <a:rPr lang="en-US" dirty="0"/>
-              <a:t> to warm it, and </a:t>
-            </a:r>
-            <a:r>
-              <a:rPr lang="en-US" sz="1200" kern="1200" dirty="0">
-                <a:solidFill>
-                  <a:schemeClr val="tx1"/>
-                </a:solidFill>
-                <a:latin typeface="+mn-lt"/>
-                <a:ea typeface="+mn-ea"/>
-                <a:cs typeface="+mn-cs"/>
-              </a:rPr>
-              <a:t>lazy()</a:t>
-            </a:r>
-            <a:r>
-              <a:rPr lang="en-US" dirty="0"/>
-              <a:t> resolves from the module registry instantly — while keeping the Suspense and </a:t>
-            </a:r>
-            <a:r>
-              <a:rPr lang="en-US" dirty="0" err="1"/>
-              <a:t>ErrorBoundary</a:t>
-            </a:r>
-            <a:r>
-              <a:rPr lang="en-US" dirty="0"/>
-              <a:t> per module.</a:t>
+              <a:t>Every strategy still gets three layers of resilience. A catch on lazy, so an unreachable remote becomes a fallback instead of a white screen. Suspense, so a loading remote shows its own skeleton. An error boundary, so a runtime crash in one remote does not take down the app.</a:t>
             </a:r>
           </a:p>
           <a:p>
@@ -2495,7 +2380,7 @@
     </p:spTree>
     <p:extLst>
       <p:ext uri="{BB962C8B-B14F-4D97-AF65-F5344CB8AC3E}">
-        <p14:creationId xmlns:p14="http://schemas.microsoft.com/office/powerpoint/2010/main" val="2316851497"/>
+        <p14:creationId xmlns:p14="http://schemas.microsoft.com/office/powerpoint/2010/main" val="4040777647"/>
       </p:ext>
     </p:extLst>
   </p:cSld>
@@ -2506,111 +2391,6 @@
 </file>
 
 <file path=ppt/notesSlides/notesSlide28.xml><?xml version="1.0" encoding="utf-8"?>
-<p:notes xmlns:a="http://schemas.openxmlformats.org/drawingml/2006/main" xmlns:r="http://schemas.openxmlformats.org/officeDocument/2006/relationships" xmlns:p="http://schemas.openxmlformats.org/presentationml/2006/main">
-  <p:cSld>
-    <p:spTree>
-      <p:nvGrpSpPr>
-        <p:cNvPr id="1" name=""/>
-        <p:cNvGrpSpPr/>
-        <p:nvPr/>
-      </p:nvGrpSpPr>
-      <p:grpSpPr>
-        <a:xfrm>
-          <a:off x="0" y="0"/>
-          <a:ext cx="0" cy="0"/>
-          <a:chOff x="0" y="0"/>
-          <a:chExt cx="0" cy="0"/>
-        </a:xfrm>
-      </p:grpSpPr>
-      <p:sp>
-        <p:nvSpPr>
-          <p:cNvPr id="2" name="Slide Image Placeholder 1"/>
-          <p:cNvSpPr>
-            <a:spLocks noGrp="1" noRot="1" noChangeAspect="1"/>
-          </p:cNvSpPr>
-          <p:nvPr>
-            <p:ph type="sldImg"/>
-          </p:nvPr>
-        </p:nvSpPr>
-        <p:spPr/>
-      </p:sp>
-      <p:sp>
-        <p:nvSpPr>
-          <p:cNvPr id="3" name="Notes Placeholder 2"/>
-          <p:cNvSpPr>
-            <a:spLocks noGrp="1"/>
-          </p:cNvSpPr>
-          <p:nvPr>
-            <p:ph type="body" idx="1"/>
-          </p:nvPr>
-        </p:nvSpPr>
-        <p:spPr/>
-        <p:txBody>
-          <a:bodyPr/>
-          <a:lstStyle/>
-          <a:p>
-            <a:r>
-              <a:rPr lang="en-US" dirty="0"/>
-              <a:t>The shell header exposes three buttons. Settings, Commands, and Lab. They are how I will run the live demo without hunting for UI.</a:t>
-            </a:r>
-          </a:p>
-          <a:p>
-            <a:r>
-              <a:rPr lang="en-US" dirty="0"/>
-              <a:t>Settings is a drawer. Dark or light. The shell rewrites CSS variables on the root, persists the choice to local storage, and dispatches a typed theme-change event. Every remote reacts. No shared imports. No prop drilling.</a:t>
-            </a:r>
-          </a:p>
-          <a:p>
-            <a:r>
-              <a:rPr lang="en-US" dirty="0"/>
-              <a:t>Commands is a Control K palette. Type kill records, or canary, or dark, and the list filters in real time. Navigation, theme, kill switches, and deployment rings are all keyboard actions.</a:t>
-            </a:r>
-          </a:p>
-          <a:p>
-            <a:r>
-              <a:rPr lang="en-US" dirty="0"/>
-              <a:t>Lab is the Federation Lab. Four remotes. </a:t>
-            </a:r>
-          </a:p>
-        </p:txBody>
-      </p:sp>
-      <p:sp>
-        <p:nvSpPr>
-          <p:cNvPr id="4" name="Slide Number Placeholder 3"/>
-          <p:cNvSpPr>
-            <a:spLocks noGrp="1"/>
-          </p:cNvSpPr>
-          <p:nvPr>
-            <p:ph type="sldNum" sz="quarter" idx="10"/>
-          </p:nvPr>
-        </p:nvSpPr>
-        <p:spPr/>
-        <p:txBody>
-          <a:bodyPr/>
-          <a:lstStyle/>
-          <a:p>
-            <a:fld id="{F7021451-1387-4CA6-816F-3879F97B5CBC}" type="slidenum">
-              <a:rPr lang="en-US"/>
-              <a:t>29</a:t>
-            </a:fld>
-            <a:endParaRPr lang="en-US"/>
-          </a:p>
-        </p:txBody>
-      </p:sp>
-    </p:spTree>
-    <p:extLst>
-      <p:ext uri="{BB962C8B-B14F-4D97-AF65-F5344CB8AC3E}">
-        <p14:creationId xmlns:p14="http://schemas.microsoft.com/office/powerpoint/2010/main" val="1024086991"/>
-      </p:ext>
-    </p:extLst>
-  </p:cSld>
-  <p:clrMapOvr>
-    <a:masterClrMapping/>
-  </p:clrMapOvr>
-</p:notes>
-</file>
-
-<file path=ppt/notesSlides/notesSlide29.xml><?xml version="1.0" encoding="utf-8"?>
 <p:notes xmlns:a="http://schemas.openxmlformats.org/drawingml/2006/main" xmlns:r="http://schemas.openxmlformats.org/officeDocument/2006/relationships" xmlns:p="http://schemas.openxmlformats.org/presentationml/2006/main">
   <p:cSld>
     <p:spTree>
@@ -2676,43 +2456,222 @@
           <a:bodyPr/>
           <a:lstStyle/>
           <a:p>
+            <a:pPr marL="0" marR="0" lvl="0" indent="0" algn="l" defTabSz="914400" rtl="0" eaLnBrk="1" fontAlgn="auto" latinLnBrk="0" hangingPunct="1">
+              <a:lnSpc>
+                <a:spcPct val="100000"/>
+              </a:lnSpc>
+              <a:spcBef>
+                <a:spcPts val="0"/>
+              </a:spcBef>
+              <a:spcAft>
+                <a:spcPts val="0"/>
+              </a:spcAft>
+              <a:buClrTx/>
+              <a:buSzTx/>
+              <a:buFontTx/>
+              <a:buNone/>
+              <a:tabLst/>
+              <a:defRPr/>
+            </a:pPr>
             <a:r>
               <a:rPr lang="en-US" dirty="0"/>
-              <a:t>A health monitor that polls remoteEntry.js every five seconds. Kill switches. An A/B deployment ring. That panel is for the demo. I can take a module down in front of you and show you that the rest of the app keeps running. Basically we are going to simulate </a:t>
-            </a:r>
-            <a:r>
-              <a:rPr lang="en-US" sz="1200" i="1" dirty="0">
-                <a:solidFill>
-                  <a:schemeClr val="bg1">
-                    <a:lumMod val="95000"/>
-                  </a:schemeClr>
-                </a:solidFill>
-                <a:latin typeface="Instrument Serif" pitchFamily="34" charset="0"/>
-                <a:ea typeface="Instrument Serif" pitchFamily="34" charset="-122"/>
-              </a:rPr>
-              <a:t>m</a:t>
-            </a:r>
-            <a:r>
-              <a:rPr lang="en-US" sz="1200" i="1" dirty="0">
-                <a:solidFill>
-                  <a:schemeClr val="bg1">
-                    <a:lumMod val="95000"/>
-                  </a:schemeClr>
-                </a:solidFill>
-                <a:latin typeface="Instrument Serif" pitchFamily="34" charset="0"/>
-                <a:ea typeface="Instrument Serif" pitchFamily="34" charset="-122"/>
-                <a:cs typeface="Instrument Serif" pitchFamily="34" charset="-120"/>
-              </a:rPr>
-              <a:t>odule-level crashes, network failures, and bad deploys are isolated at the boundary. </a:t>
-            </a:r>
-            <a:endParaRPr lang="en-US" dirty="0"/>
+              <a:t>People ask why we wrap eager modules in </a:t>
+            </a:r>
+            <a:r>
+              <a:rPr lang="en-US" sz="1200" kern="1200" dirty="0">
+                <a:solidFill>
+                  <a:schemeClr val="tx1"/>
+                </a:solidFill>
+                <a:latin typeface="+mn-lt"/>
+                <a:ea typeface="+mn-ea"/>
+                <a:cs typeface="+mn-cs"/>
+              </a:rPr>
+              <a:t>lazy()</a:t>
+            </a:r>
+            <a:r>
+              <a:rPr lang="en-US" dirty="0"/>
+              <a:t>. It's not that static imports are impossible — they work, because </a:t>
+            </a:r>
+            <a:r>
+              <a:rPr lang="en-US" sz="1200" kern="1200" dirty="0" err="1">
+                <a:solidFill>
+                  <a:schemeClr val="tx1"/>
+                </a:solidFill>
+                <a:latin typeface="+mn-lt"/>
+                <a:ea typeface="+mn-ea"/>
+                <a:cs typeface="+mn-cs"/>
+              </a:rPr>
+              <a:t>index.tsx</a:t>
+            </a:r>
+            <a:r>
+              <a:rPr lang="en-US" dirty="0" err="1"/>
+              <a:t>'s</a:t>
+            </a:r>
+            <a:r>
+              <a:rPr lang="en-US" dirty="0"/>
+              <a:t> dynamic import already resolved the shared scope. It's that a static import makes the remote block first paint, and leaves nowhere to catch a failed remote. So we fire </a:t>
+            </a:r>
+            <a:r>
+              <a:rPr lang="en-US" sz="1200" kern="1200" dirty="0">
+                <a:solidFill>
+                  <a:schemeClr val="tx1"/>
+                </a:solidFill>
+                <a:latin typeface="+mn-lt"/>
+                <a:ea typeface="+mn-ea"/>
+                <a:cs typeface="+mn-cs"/>
+              </a:rPr>
+              <a:t>import()</a:t>
+            </a:r>
+            <a:r>
+              <a:rPr lang="en-US" dirty="0"/>
+              <a:t> at shell </a:t>
+            </a:r>
+            <a:r>
+              <a:rPr lang="en-US" dirty="0" err="1"/>
+              <a:t>init</a:t>
+            </a:r>
+            <a:r>
+              <a:rPr lang="en-US" dirty="0"/>
+              <a:t> to warm it, and </a:t>
+            </a:r>
+            <a:r>
+              <a:rPr lang="en-US" sz="1200" kern="1200" dirty="0">
+                <a:solidFill>
+                  <a:schemeClr val="tx1"/>
+                </a:solidFill>
+                <a:latin typeface="+mn-lt"/>
+                <a:ea typeface="+mn-ea"/>
+                <a:cs typeface="+mn-cs"/>
+              </a:rPr>
+              <a:t>lazy()</a:t>
+            </a:r>
+            <a:r>
+              <a:rPr lang="en-US" dirty="0"/>
+              <a:t> resolves from the module registry instantly — while keeping the Suspense and </a:t>
+            </a:r>
+            <a:r>
+              <a:rPr lang="en-US" dirty="0" err="1"/>
+              <a:t>ErrorBoundary</a:t>
+            </a:r>
+            <a:r>
+              <a:rPr lang="en-US" dirty="0"/>
+              <a:t> per module.</a:t>
+            </a:r>
+          </a:p>
+          <a:p>
+            <a:endParaRPr lang="en-GB" dirty="0"/>
           </a:p>
         </p:txBody>
       </p:sp>
     </p:spTree>
     <p:extLst>
       <p:ext uri="{BB962C8B-B14F-4D97-AF65-F5344CB8AC3E}">
-        <p14:creationId xmlns:p14="http://schemas.microsoft.com/office/powerpoint/2010/main" val="3599504877"/>
+        <p14:creationId xmlns:p14="http://schemas.microsoft.com/office/powerpoint/2010/main" val="2316851497"/>
+      </p:ext>
+    </p:extLst>
+  </p:cSld>
+  <p:clrMapOvr>
+    <a:masterClrMapping/>
+  </p:clrMapOvr>
+</p:notes>
+</file>
+
+<file path=ppt/notesSlides/notesSlide29.xml><?xml version="1.0" encoding="utf-8"?>
+<p:notes xmlns:a="http://schemas.openxmlformats.org/drawingml/2006/main" xmlns:r="http://schemas.openxmlformats.org/officeDocument/2006/relationships" xmlns:p="http://schemas.openxmlformats.org/presentationml/2006/main">
+  <p:cSld>
+    <p:spTree>
+      <p:nvGrpSpPr>
+        <p:cNvPr id="1" name=""/>
+        <p:cNvGrpSpPr/>
+        <p:nvPr/>
+      </p:nvGrpSpPr>
+      <p:grpSpPr>
+        <a:xfrm>
+          <a:off x="0" y="0"/>
+          <a:ext cx="0" cy="0"/>
+          <a:chOff x="0" y="0"/>
+          <a:chExt cx="0" cy="0"/>
+        </a:xfrm>
+      </p:grpSpPr>
+      <p:sp>
+        <p:nvSpPr>
+          <p:cNvPr id="2" name="Slide Image Placeholder 1"/>
+          <p:cNvSpPr>
+            <a:spLocks noGrp="1" noRot="1" noChangeAspect="1"/>
+          </p:cNvSpPr>
+          <p:nvPr>
+            <p:ph type="sldImg"/>
+          </p:nvPr>
+        </p:nvSpPr>
+        <p:spPr/>
+      </p:sp>
+      <p:sp>
+        <p:nvSpPr>
+          <p:cNvPr id="3" name="Notes Placeholder 2"/>
+          <p:cNvSpPr>
+            <a:spLocks noGrp="1"/>
+          </p:cNvSpPr>
+          <p:nvPr>
+            <p:ph type="body" idx="1"/>
+          </p:nvPr>
+        </p:nvSpPr>
+        <p:spPr/>
+        <p:txBody>
+          <a:bodyPr/>
+          <a:lstStyle/>
+          <a:p>
+            <a:r>
+              <a:rPr lang="en-US" dirty="0"/>
+              <a:t>The shell header exposes three buttons. Settings, Commands, and Lab. They are how I will run the live demo without hunting for UI.</a:t>
+            </a:r>
+          </a:p>
+          <a:p>
+            <a:r>
+              <a:rPr lang="en-US" dirty="0"/>
+              <a:t>Settings is a drawer. Dark or light. The shell rewrites CSS variables on the root, persists the choice to local storage, and dispatches a typed theme-change event. Every remote reacts. No shared imports. No prop drilling.</a:t>
+            </a:r>
+          </a:p>
+          <a:p>
+            <a:r>
+              <a:rPr lang="en-US" dirty="0"/>
+              <a:t>Commands is a Control K palette. Type kill records, or canary, or dark, and the list filters in real time. Navigation, theme, kill switches, and deployment rings are all keyboard actions.</a:t>
+            </a:r>
+          </a:p>
+          <a:p>
+            <a:r>
+              <a:rPr lang="en-US" dirty="0"/>
+              <a:t>Lab is the Federation Lab. Four remotes. </a:t>
+            </a:r>
+          </a:p>
+        </p:txBody>
+      </p:sp>
+      <p:sp>
+        <p:nvSpPr>
+          <p:cNvPr id="4" name="Slide Number Placeholder 3"/>
+          <p:cNvSpPr>
+            <a:spLocks noGrp="1"/>
+          </p:cNvSpPr>
+          <p:nvPr>
+            <p:ph type="sldNum" sz="quarter" idx="10"/>
+          </p:nvPr>
+        </p:nvSpPr>
+        <p:spPr/>
+        <p:txBody>
+          <a:bodyPr/>
+          <a:lstStyle/>
+          <a:p>
+            <a:fld id="{F7021451-1387-4CA6-816F-3879F97B5CBC}" type="slidenum">
+              <a:rPr lang="en-US"/>
+              <a:t>29</a:t>
+            </a:fld>
+            <a:endParaRPr lang="en-US"/>
+          </a:p>
+        </p:txBody>
+      </p:sp>
+    </p:spTree>
+    <p:extLst>
+      <p:ext uri="{BB962C8B-B14F-4D97-AF65-F5344CB8AC3E}">
+        <p14:creationId xmlns:p14="http://schemas.microsoft.com/office/powerpoint/2010/main" val="1024086991"/>
       </p:ext>
     </p:extLst>
   </p:cSld>
@@ -2832,6 +2791,118 @@
             <p:ph type="sldImg"/>
           </p:nvPr>
         </p:nvSpPr>
+        <p:spPr>
+          <a:xfrm>
+            <a:off x="-225425" y="1524000"/>
+            <a:ext cx="7308850" cy="4113213"/>
+          </a:xfrm>
+          <a:prstGeom prst="rect">
+            <a:avLst/>
+          </a:prstGeom>
+          <a:noFill/>
+          <a:ln w="12700">
+            <a:solidFill>
+              <a:prstClr val="black"/>
+            </a:solidFill>
+          </a:ln>
+        </p:spPr>
+      </p:sp>
+      <p:sp>
+        <p:nvSpPr>
+          <p:cNvPr id="3" name="Notes Placeholder 2"/>
+          <p:cNvSpPr>
+            <a:spLocks noGrp="1"/>
+          </p:cNvSpPr>
+          <p:nvPr>
+            <p:ph type="body" idx="1"/>
+          </p:nvPr>
+        </p:nvSpPr>
+        <p:spPr>
+          <a:xfrm>
+            <a:off x="685800" y="5865813"/>
+            <a:ext cx="5486400" cy="4799012"/>
+          </a:xfrm>
+          <a:prstGeom prst="rect">
+            <a:avLst/>
+          </a:prstGeom>
+        </p:spPr>
+        <p:txBody>
+          <a:bodyPr/>
+          <a:lstStyle/>
+          <a:p>
+            <a:r>
+              <a:rPr lang="en-US" dirty="0"/>
+              <a:t>A health monitor that polls remoteEntry.js every five seconds. Kill switches. An A/B deployment ring. That panel is for the demo. I can take a module down in front of you and show you that the rest of the app keeps running. Basically we are going to simulate </a:t>
+            </a:r>
+            <a:r>
+              <a:rPr lang="en-US" sz="1200" i="1" dirty="0">
+                <a:solidFill>
+                  <a:schemeClr val="bg1">
+                    <a:lumMod val="95000"/>
+                  </a:schemeClr>
+                </a:solidFill>
+                <a:latin typeface="Instrument Serif" pitchFamily="34" charset="0"/>
+                <a:ea typeface="Instrument Serif" pitchFamily="34" charset="-122"/>
+              </a:rPr>
+              <a:t>m</a:t>
+            </a:r>
+            <a:r>
+              <a:rPr lang="en-US" sz="1200" i="1" dirty="0">
+                <a:solidFill>
+                  <a:schemeClr val="bg1">
+                    <a:lumMod val="95000"/>
+                  </a:schemeClr>
+                </a:solidFill>
+                <a:latin typeface="Instrument Serif" pitchFamily="34" charset="0"/>
+                <a:ea typeface="Instrument Serif" pitchFamily="34" charset="-122"/>
+                <a:cs typeface="Instrument Serif" pitchFamily="34" charset="-120"/>
+              </a:rPr>
+              <a:t>odule-level crashes, network failures, and bad deploys are isolated at the boundary. </a:t>
+            </a:r>
+            <a:endParaRPr lang="en-US" dirty="0"/>
+          </a:p>
+        </p:txBody>
+      </p:sp>
+    </p:spTree>
+    <p:extLst>
+      <p:ext uri="{BB962C8B-B14F-4D97-AF65-F5344CB8AC3E}">
+        <p14:creationId xmlns:p14="http://schemas.microsoft.com/office/powerpoint/2010/main" val="3599504877"/>
+      </p:ext>
+    </p:extLst>
+  </p:cSld>
+  <p:clrMapOvr>
+    <a:masterClrMapping/>
+  </p:clrMapOvr>
+</p:notes>
+</file>
+
+<file path=ppt/notesSlides/notesSlide31.xml><?xml version="1.0" encoding="utf-8"?>
+<p:notes xmlns:a="http://schemas.openxmlformats.org/drawingml/2006/main" xmlns:r="http://schemas.openxmlformats.org/officeDocument/2006/relationships" xmlns:p="http://schemas.openxmlformats.org/presentationml/2006/main">
+  <p:cSld>
+    <p:spTree>
+      <p:nvGrpSpPr>
+        <p:cNvPr id="1" name=""/>
+        <p:cNvGrpSpPr/>
+        <p:nvPr/>
+      </p:nvGrpSpPr>
+      <p:grpSpPr>
+        <a:xfrm>
+          <a:off x="0" y="0"/>
+          <a:ext cx="0" cy="0"/>
+          <a:chOff x="0" y="0"/>
+          <a:chExt cx="0" cy="0"/>
+        </a:xfrm>
+      </p:grpSpPr>
+      <p:sp>
+        <p:nvSpPr>
+          <p:cNvPr id="2" name="Slide Image Placeholder 1"/>
+          <p:cNvSpPr>
+            <a:spLocks noGrp="1" noRot="1" noChangeAspect="1"/>
+          </p:cNvSpPr>
+          <p:nvPr>
+            <p:ph type="sldImg"/>
+          </p:nvPr>
+        </p:nvSpPr>
         <p:spPr/>
       </p:sp>
       <p:sp>
@@ -2889,7 +2960,7 @@
 </p:notes>
 </file>
 
-<file path=ppt/notesSlides/notesSlide31.xml><?xml version="1.0" encoding="utf-8"?>
+<file path=ppt/notesSlides/notesSlide32.xml><?xml version="1.0" encoding="utf-8"?>
 <p:notes xmlns:a="http://schemas.openxmlformats.org/drawingml/2006/main" xmlns:r="http://schemas.openxmlformats.org/officeDocument/2006/relationships" xmlns:p="http://schemas.openxmlformats.org/presentationml/2006/main">
   <p:cSld>
     <p:spTree>
@@ -3000,7 +3071,7 @@
 </p:notes>
 </file>
 
-<file path=ppt/notesSlides/notesSlide32.xml><?xml version="1.0" encoding="utf-8"?>
+<file path=ppt/notesSlides/notesSlide33.xml><?xml version="1.0" encoding="utf-8"?>
 <p:notes xmlns:a="http://schemas.openxmlformats.org/drawingml/2006/main" xmlns:r="http://schemas.openxmlformats.org/officeDocument/2006/relationships" xmlns:p="http://schemas.openxmlformats.org/presentationml/2006/main">
   <p:cSld>
     <p:spTree>
@@ -3117,7 +3188,7 @@
 </p:notes>
 </file>
 
-<file path=ppt/notesSlides/notesSlide33.xml><?xml version="1.0" encoding="utf-8"?>
+<file path=ppt/notesSlides/notesSlide34.xml><?xml version="1.0" encoding="utf-8"?>
 <p:notes xmlns:a="http://schemas.openxmlformats.org/drawingml/2006/main" xmlns:r="http://schemas.openxmlformats.org/officeDocument/2006/relationships" xmlns:p="http://schemas.openxmlformats.org/presentationml/2006/main">
   <p:cSld>
     <p:spTree>
@@ -3204,7 +3275,7 @@
 </p:notes>
 </file>
 
-<file path=ppt/notesSlides/notesSlide34.xml><?xml version="1.0" encoding="utf-8"?>
+<file path=ppt/notesSlides/notesSlide35.xml><?xml version="1.0" encoding="utf-8"?>
 <p:notes xmlns:a="http://schemas.openxmlformats.org/drawingml/2006/main" xmlns:r="http://schemas.openxmlformats.org/officeDocument/2006/relationships" xmlns:p="http://schemas.openxmlformats.org/presentationml/2006/main">
   <p:cSld>
     <p:spTree>
@@ -3315,427 +3386,7 @@
 </p:notes>
 </file>
 
-<file path=ppt/notesSlides/notesSlide35.xml><?xml version="1.0" encoding="utf-8"?>
-<p:notes xmlns:a="http://schemas.openxmlformats.org/drawingml/2006/main" xmlns:r="http://schemas.openxmlformats.org/officeDocument/2006/relationships" xmlns:p="http://schemas.openxmlformats.org/presentationml/2006/main">
-  <p:cSld>
-    <p:spTree>
-      <p:nvGrpSpPr>
-        <p:cNvPr id="1" name="">
-          <a:extLst>
-            <a:ext uri="{FF2B5EF4-FFF2-40B4-BE49-F238E27FC236}">
-              <a16:creationId xmlns:a16="http://schemas.microsoft.com/office/drawing/2014/main" id="{3EADF92F-1432-B155-F69A-449695794E1B}"/>
-            </a:ext>
-          </a:extLst>
-        </p:cNvPr>
-        <p:cNvGrpSpPr/>
-        <p:nvPr/>
-      </p:nvGrpSpPr>
-      <p:grpSpPr>
-        <a:xfrm>
-          <a:off x="0" y="0"/>
-          <a:ext cx="0" cy="0"/>
-          <a:chOff x="0" y="0"/>
-          <a:chExt cx="0" cy="0"/>
-        </a:xfrm>
-      </p:grpSpPr>
-      <p:sp>
-        <p:nvSpPr>
-          <p:cNvPr id="2" name="Slide Image Placeholder 1">
-            <a:extLst>
-              <a:ext uri="{FF2B5EF4-FFF2-40B4-BE49-F238E27FC236}">
-                <a16:creationId xmlns:a16="http://schemas.microsoft.com/office/drawing/2014/main" id="{AAFD1928-9456-CC27-B942-39DE05D198F0}"/>
-              </a:ext>
-            </a:extLst>
-          </p:cNvPr>
-          <p:cNvSpPr>
-            <a:spLocks noGrp="1" noRot="1" noChangeAspect="1"/>
-          </p:cNvSpPr>
-          <p:nvPr>
-            <p:ph type="sldImg"/>
-          </p:nvPr>
-        </p:nvSpPr>
-        <p:spPr/>
-      </p:sp>
-      <p:sp>
-        <p:nvSpPr>
-          <p:cNvPr id="3" name="Notes Placeholder 2">
-            <a:extLst>
-              <a:ext uri="{FF2B5EF4-FFF2-40B4-BE49-F238E27FC236}">
-                <a16:creationId xmlns:a16="http://schemas.microsoft.com/office/drawing/2014/main" id="{42560C42-5436-02AD-F4EC-6EFD0E350CD3}"/>
-              </a:ext>
-            </a:extLst>
-          </p:cNvPr>
-          <p:cNvSpPr>
-            <a:spLocks noGrp="1"/>
-          </p:cNvSpPr>
-          <p:nvPr>
-            <p:ph type="body" idx="1"/>
-          </p:nvPr>
-        </p:nvSpPr>
-        <p:spPr/>
-        <p:txBody>
-          <a:bodyPr/>
-          <a:lstStyle/>
-          <a:p>
-            <a:r>
-              <a:rPr lang="en-US" dirty="0"/>
-              <a:t>Why events instead of a shared store? A shared store is a shared dependency. Version coupling between teams. Events survive independent deploys. They even survive framework diversity. A Vue remote and a React remote can talk through the same window contract.</a:t>
-            </a:r>
-          </a:p>
-          <a:p>
-            <a:r>
-              <a:rPr lang="en-US" dirty="0"/>
-              <a:t>The payload is still a versioned contract. Keep it backward compatible. Each remote defines the same event shapes in its own types file by augmenting WindowEventMap. No shared package is required. addEventListener is fully typed.</a:t>
-            </a:r>
-          </a:p>
-        </p:txBody>
-      </p:sp>
-      <p:sp>
-        <p:nvSpPr>
-          <p:cNvPr id="4" name="Slide Number Placeholder 3">
-            <a:extLst>
-              <a:ext uri="{FF2B5EF4-FFF2-40B4-BE49-F238E27FC236}">
-                <a16:creationId xmlns:a16="http://schemas.microsoft.com/office/drawing/2014/main" id="{CFDF3C66-8E85-C62D-CCBB-7C7F6A8FC8DC}"/>
-              </a:ext>
-            </a:extLst>
-          </p:cNvPr>
-          <p:cNvSpPr>
-            <a:spLocks noGrp="1"/>
-          </p:cNvSpPr>
-          <p:nvPr>
-            <p:ph type="sldNum" sz="quarter" idx="10"/>
-          </p:nvPr>
-        </p:nvSpPr>
-        <p:spPr/>
-        <p:txBody>
-          <a:bodyPr/>
-          <a:lstStyle/>
-          <a:p>
-            <a:fld id="{F7021451-1387-4CA6-816F-3879F97B5CBC}" type="slidenum">
-              <a:rPr lang="en-US"/>
-              <a:t>36</a:t>
-            </a:fld>
-            <a:endParaRPr lang="en-US"/>
-          </a:p>
-        </p:txBody>
-      </p:sp>
-    </p:spTree>
-    <p:extLst>
-      <p:ext uri="{BB962C8B-B14F-4D97-AF65-F5344CB8AC3E}">
-        <p14:creationId xmlns:p14="http://schemas.microsoft.com/office/powerpoint/2010/main" val="3205027053"/>
-      </p:ext>
-    </p:extLst>
-  </p:cSld>
-  <p:clrMapOvr>
-    <a:masterClrMapping/>
-  </p:clrMapOvr>
-</p:notes>
-</file>
-
 <file path=ppt/notesSlides/notesSlide36.xml><?xml version="1.0" encoding="utf-8"?>
-<p:notes xmlns:a="http://schemas.openxmlformats.org/drawingml/2006/main" xmlns:r="http://schemas.openxmlformats.org/officeDocument/2006/relationships" xmlns:p="http://schemas.openxmlformats.org/presentationml/2006/main">
-  <p:cSld>
-    <p:spTree>
-      <p:nvGrpSpPr>
-        <p:cNvPr id="1" name=""/>
-        <p:cNvGrpSpPr/>
-        <p:nvPr/>
-      </p:nvGrpSpPr>
-      <p:grpSpPr>
-        <a:xfrm>
-          <a:off x="0" y="0"/>
-          <a:ext cx="0" cy="0"/>
-          <a:chOff x="0" y="0"/>
-          <a:chExt cx="0" cy="0"/>
-        </a:xfrm>
-      </p:grpSpPr>
-      <p:sp>
-        <p:nvSpPr>
-          <p:cNvPr id="2" name="Slide Image Placeholder 1"/>
-          <p:cNvSpPr>
-            <a:spLocks noGrp="1" noRot="1" noChangeAspect="1"/>
-          </p:cNvSpPr>
-          <p:nvPr>
-            <p:ph type="sldImg"/>
-          </p:nvPr>
-        </p:nvSpPr>
-        <p:spPr/>
-      </p:sp>
-      <p:sp>
-        <p:nvSpPr>
-          <p:cNvPr id="3" name="Notes Placeholder 2"/>
-          <p:cNvSpPr>
-            <a:spLocks noGrp="1"/>
-          </p:cNvSpPr>
-          <p:nvPr>
-            <p:ph type="body" idx="1"/>
-          </p:nvPr>
-        </p:nvSpPr>
-        <p:spPr/>
-        <p:txBody>
-          <a:bodyPr/>
-          <a:lstStyle/>
-          <a:p>
-            <a:r>
-              <a:rPr lang="en-US" dirty="0"/>
-              <a:t>Theming is a cross-cutting concern, and the shell owns it.</a:t>
-            </a:r>
-          </a:p>
-          <a:p>
-            <a:r>
-              <a:rPr lang="en-US" dirty="0"/>
-              <a:t>The shell persists the choice to local storage. It applies CSS variables to the document element. It exposes a small bridge on window so a remote can read or set the theme without importing host code. And it broadcasts a theme-change event.</a:t>
-            </a:r>
-          </a:p>
-        </p:txBody>
-      </p:sp>
-      <p:sp>
-        <p:nvSpPr>
-          <p:cNvPr id="4" name="Slide Number Placeholder 3"/>
-          <p:cNvSpPr>
-            <a:spLocks noGrp="1"/>
-          </p:cNvSpPr>
-          <p:nvPr>
-            <p:ph type="sldNum" sz="quarter" idx="10"/>
-          </p:nvPr>
-        </p:nvSpPr>
-        <p:spPr/>
-        <p:txBody>
-          <a:bodyPr/>
-          <a:lstStyle/>
-          <a:p>
-            <a:fld id="{F7021451-1387-4CA6-816F-3879F97B5CBC}" type="slidenum">
-              <a:rPr lang="en-US"/>
-              <a:t>37</a:t>
-            </a:fld>
-            <a:endParaRPr lang="en-US"/>
-          </a:p>
-        </p:txBody>
-      </p:sp>
-    </p:spTree>
-    <p:extLst>
-      <p:ext uri="{BB962C8B-B14F-4D97-AF65-F5344CB8AC3E}">
-        <p14:creationId xmlns:p14="http://schemas.microsoft.com/office/powerpoint/2010/main" val="1024086991"/>
-      </p:ext>
-    </p:extLst>
-  </p:cSld>
-  <p:clrMapOvr>
-    <a:masterClrMapping/>
-  </p:clrMapOvr>
-</p:notes>
-</file>
-
-<file path=ppt/notesSlides/notesSlide37.xml><?xml version="1.0" encoding="utf-8"?>
-<p:notes xmlns:a="http://schemas.openxmlformats.org/drawingml/2006/main" xmlns:r="http://schemas.openxmlformats.org/officeDocument/2006/relationships" xmlns:p="http://schemas.openxmlformats.org/presentationml/2006/main">
-  <p:cSld>
-    <p:spTree>
-      <p:nvGrpSpPr>
-        <p:cNvPr id="1" name="">
-          <a:extLst>
-            <a:ext uri="{FF2B5EF4-FFF2-40B4-BE49-F238E27FC236}">
-              <a16:creationId xmlns:a16="http://schemas.microsoft.com/office/drawing/2014/main" id="{8A13CAA7-9985-05A8-54F2-CCF3F6B12B76}"/>
-            </a:ext>
-          </a:extLst>
-        </p:cNvPr>
-        <p:cNvGrpSpPr/>
-        <p:nvPr/>
-      </p:nvGrpSpPr>
-      <p:grpSpPr>
-        <a:xfrm>
-          <a:off x="0" y="0"/>
-          <a:ext cx="0" cy="0"/>
-          <a:chOff x="0" y="0"/>
-          <a:chExt cx="0" cy="0"/>
-        </a:xfrm>
-      </p:grpSpPr>
-      <p:sp>
-        <p:nvSpPr>
-          <p:cNvPr id="2" name="Slide Image Placeholder 1">
-            <a:extLst>
-              <a:ext uri="{FF2B5EF4-FFF2-40B4-BE49-F238E27FC236}">
-                <a16:creationId xmlns:a16="http://schemas.microsoft.com/office/drawing/2014/main" id="{AB941509-2BEA-EF7A-F3FB-001DE8FC8601}"/>
-              </a:ext>
-            </a:extLst>
-          </p:cNvPr>
-          <p:cNvSpPr>
-            <a:spLocks noGrp="1" noRot="1" noChangeAspect="1"/>
-          </p:cNvSpPr>
-          <p:nvPr>
-            <p:ph type="sldImg"/>
-          </p:nvPr>
-        </p:nvSpPr>
-        <p:spPr/>
-      </p:sp>
-      <p:sp>
-        <p:nvSpPr>
-          <p:cNvPr id="3" name="Notes Placeholder 2">
-            <a:extLst>
-              <a:ext uri="{FF2B5EF4-FFF2-40B4-BE49-F238E27FC236}">
-                <a16:creationId xmlns:a16="http://schemas.microsoft.com/office/drawing/2014/main" id="{308E4D37-CD85-804A-C20E-AD8765FFB94D}"/>
-              </a:ext>
-            </a:extLst>
-          </p:cNvPr>
-          <p:cNvSpPr>
-            <a:spLocks noGrp="1"/>
-          </p:cNvSpPr>
-          <p:nvPr>
-            <p:ph type="body" idx="1"/>
-          </p:nvPr>
-        </p:nvSpPr>
-        <p:spPr/>
-        <p:txBody>
-          <a:bodyPr/>
-          <a:lstStyle/>
-          <a:p>
-            <a:r>
-              <a:rPr lang="en-US" dirty="0"/>
-              <a:t>Every remote has a useActiveTheme hook. It tries the host bridge first, falls back to local storage, and defaults to dark. Then it listens for theme-change and updates. Remotes style with Tailwind classes that point at those CSS variables. When the shell rewrites the variables, every remote repaints. No shared CSS build step.</a:t>
-            </a:r>
-          </a:p>
-          <a:p>
-            <a:r>
-              <a:rPr lang="en-US" dirty="0"/>
-              <a:t>Two palettes. Dark is editorial noir. Light is clean white.</a:t>
-            </a:r>
-          </a:p>
-        </p:txBody>
-      </p:sp>
-      <p:sp>
-        <p:nvSpPr>
-          <p:cNvPr id="4" name="Slide Number Placeholder 3">
-            <a:extLst>
-              <a:ext uri="{FF2B5EF4-FFF2-40B4-BE49-F238E27FC236}">
-                <a16:creationId xmlns:a16="http://schemas.microsoft.com/office/drawing/2014/main" id="{FFCE2B23-CA02-7023-FC3C-A6851775B8B1}"/>
-              </a:ext>
-            </a:extLst>
-          </p:cNvPr>
-          <p:cNvSpPr>
-            <a:spLocks noGrp="1"/>
-          </p:cNvSpPr>
-          <p:nvPr>
-            <p:ph type="sldNum" sz="quarter" idx="10"/>
-          </p:nvPr>
-        </p:nvSpPr>
-        <p:spPr/>
-        <p:txBody>
-          <a:bodyPr/>
-          <a:lstStyle/>
-          <a:p>
-            <a:fld id="{F7021451-1387-4CA6-816F-3879F97B5CBC}" type="slidenum">
-              <a:rPr lang="en-US"/>
-              <a:t>38</a:t>
-            </a:fld>
-            <a:endParaRPr lang="en-US"/>
-          </a:p>
-        </p:txBody>
-      </p:sp>
-    </p:spTree>
-    <p:extLst>
-      <p:ext uri="{BB962C8B-B14F-4D97-AF65-F5344CB8AC3E}">
-        <p14:creationId xmlns:p14="http://schemas.microsoft.com/office/powerpoint/2010/main" val="559982868"/>
-      </p:ext>
-    </p:extLst>
-  </p:cSld>
-  <p:clrMapOvr>
-    <a:masterClrMapping/>
-  </p:clrMapOvr>
-</p:notes>
-</file>
-
-<file path=ppt/notesSlides/notesSlide38.xml><?xml version="1.0" encoding="utf-8"?>
-<p:notes xmlns:a="http://schemas.openxmlformats.org/drawingml/2006/main" xmlns:r="http://schemas.openxmlformats.org/officeDocument/2006/relationships" xmlns:p="http://schemas.openxmlformats.org/presentationml/2006/main">
-  <p:cSld>
-    <p:spTree>
-      <p:nvGrpSpPr>
-        <p:cNvPr id="1" name=""/>
-        <p:cNvGrpSpPr/>
-        <p:nvPr/>
-      </p:nvGrpSpPr>
-      <p:grpSpPr>
-        <a:xfrm>
-          <a:off x="0" y="0"/>
-          <a:ext cx="0" cy="0"/>
-          <a:chOff x="0" y="0"/>
-          <a:chExt cx="0" cy="0"/>
-        </a:xfrm>
-      </p:grpSpPr>
-      <p:sp>
-        <p:nvSpPr>
-          <p:cNvPr id="2" name="Slide Image Placeholder 1"/>
-          <p:cNvSpPr>
-            <a:spLocks noGrp="1" noRot="1" noChangeAspect="1"/>
-          </p:cNvSpPr>
-          <p:nvPr>
-            <p:ph type="sldImg"/>
-          </p:nvPr>
-        </p:nvSpPr>
-        <p:spPr/>
-      </p:sp>
-      <p:sp>
-        <p:nvSpPr>
-          <p:cNvPr id="3" name="Notes Placeholder 2"/>
-          <p:cNvSpPr>
-            <a:spLocks noGrp="1"/>
-          </p:cNvSpPr>
-          <p:nvPr>
-            <p:ph type="body" idx="1"/>
-          </p:nvPr>
-        </p:nvSpPr>
-        <p:spPr/>
-        <p:txBody>
-          <a:bodyPr/>
-          <a:lstStyle/>
-          <a:p>
-            <a:r>
-              <a:rPr lang="en-US" dirty="0"/>
-              <a:t>Two layers of preloading. Eager on mount. Hover on demand.</a:t>
-            </a:r>
-          </a:p>
-          <a:p>
-            <a:r>
-              <a:rPr lang="en-US" dirty="0"/>
-              <a:t>There is a prefetchers map. One function per module. Each function is a bare import of that remote. At shell init, we fire the ones marked eager. Records starts loading before the user has clicked anything.</a:t>
-            </a:r>
-          </a:p>
-        </p:txBody>
-      </p:sp>
-      <p:sp>
-        <p:nvSpPr>
-          <p:cNvPr id="4" name="Slide Number Placeholder 3"/>
-          <p:cNvSpPr>
-            <a:spLocks noGrp="1"/>
-          </p:cNvSpPr>
-          <p:nvPr>
-            <p:ph type="sldNum" sz="quarter" idx="10"/>
-          </p:nvPr>
-        </p:nvSpPr>
-        <p:spPr/>
-        <p:txBody>
-          <a:bodyPr/>
-          <a:lstStyle/>
-          <a:p>
-            <a:fld id="{F7021451-1387-4CA6-816F-3879F97B5CBC}" type="slidenum">
-              <a:rPr lang="en-US"/>
-              <a:t>39</a:t>
-            </a:fld>
-            <a:endParaRPr lang="en-US"/>
-          </a:p>
-        </p:txBody>
-      </p:sp>
-    </p:spTree>
-    <p:extLst>
-      <p:ext uri="{BB962C8B-B14F-4D97-AF65-F5344CB8AC3E}">
-        <p14:creationId xmlns:p14="http://schemas.microsoft.com/office/powerpoint/2010/main" val="1024086991"/>
-      </p:ext>
-    </p:extLst>
-  </p:cSld>
-  <p:clrMapOvr>
-    <a:masterClrMapping/>
-  </p:clrMapOvr>
-</p:notes>
-</file>
-
-<file path=ppt/notesSlides/notesSlide39.xml><?xml version="1.0" encoding="utf-8"?>
 <p:notes xmlns:a="http://schemas.openxmlformats.org/drawingml/2006/main" xmlns:r="http://schemas.openxmlformats.org/officeDocument/2006/relationships" xmlns:p="http://schemas.openxmlformats.org/presentationml/2006/main">
   <p:cSld>
     <p:spTree>
@@ -3803,13 +3454,29 @@
           <a:p>
             <a:r>
               <a:rPr lang="en-US" dirty="0"/>
-              <a:t>For the rest, the nav link fires on mouse enter. When the cursor touches Prescriptions or Analytics, the chunk starts fetching in the background. Click, and it is often already cached.</a:t>
+              <a:t>Why events instead of a shared store? A shared store is a shared dependency. Version coupling between teams. Events survive independent deploys. They even survive framework diversity. A Vue remote and a React remote can talk through the same window contract.</a:t>
             </a:r>
           </a:p>
           <a:p>
             <a:r>
               <a:rPr lang="en-US" dirty="0"/>
-              <a:t>Instant means the landing page fetches lazily, with no streaming delay. Eager means preloaded the moment the shell mounts. Hover means prefetched when the user aims at a tab. That is why Records feels instant even though it is a separate app on a separate server. The work happened at mount.</a:t>
+              <a:t>The payload is still a versioned contract. Keep it backward compatible. Each remote defines the same event shapes in its own types file by augmenting </a:t>
+            </a:r>
+            <a:r>
+              <a:rPr lang="en-US" dirty="0" err="1"/>
+              <a:t>WindowEventMap</a:t>
+            </a:r>
+            <a:r>
+              <a:rPr lang="en-US" dirty="0"/>
+              <a:t>. No shared package is required. </a:t>
+            </a:r>
+            <a:r>
+              <a:rPr lang="en-US" dirty="0" err="1"/>
+              <a:t>addEventListener</a:t>
+            </a:r>
+            <a:r>
+              <a:rPr lang="en-US" dirty="0"/>
+              <a:t> is fully typed.</a:t>
             </a:r>
           </a:p>
           <a:p>
@@ -3820,7 +3487,306 @@
     </p:spTree>
     <p:extLst>
       <p:ext uri="{BB962C8B-B14F-4D97-AF65-F5344CB8AC3E}">
-        <p14:creationId xmlns:p14="http://schemas.microsoft.com/office/powerpoint/2010/main" val="2202382534"/>
+        <p14:creationId xmlns:p14="http://schemas.microsoft.com/office/powerpoint/2010/main" val="3974856141"/>
+      </p:ext>
+    </p:extLst>
+  </p:cSld>
+  <p:clrMapOvr>
+    <a:masterClrMapping/>
+  </p:clrMapOvr>
+</p:notes>
+</file>
+
+<file path=ppt/notesSlides/notesSlide37.xml><?xml version="1.0" encoding="utf-8"?>
+<p:notes xmlns:a="http://schemas.openxmlformats.org/drawingml/2006/main" xmlns:r="http://schemas.openxmlformats.org/officeDocument/2006/relationships" xmlns:p="http://schemas.openxmlformats.org/presentationml/2006/main">
+  <p:cSld>
+    <p:spTree>
+      <p:nvGrpSpPr>
+        <p:cNvPr id="1" name=""/>
+        <p:cNvGrpSpPr/>
+        <p:nvPr/>
+      </p:nvGrpSpPr>
+      <p:grpSpPr>
+        <a:xfrm>
+          <a:off x="0" y="0"/>
+          <a:ext cx="0" cy="0"/>
+          <a:chOff x="0" y="0"/>
+          <a:chExt cx="0" cy="0"/>
+        </a:xfrm>
+      </p:grpSpPr>
+      <p:sp>
+        <p:nvSpPr>
+          <p:cNvPr id="2" name="Slide Image Placeholder 1"/>
+          <p:cNvSpPr>
+            <a:spLocks noGrp="1" noRot="1" noChangeAspect="1"/>
+          </p:cNvSpPr>
+          <p:nvPr>
+            <p:ph type="sldImg"/>
+          </p:nvPr>
+        </p:nvSpPr>
+        <p:spPr>
+          <a:xfrm>
+            <a:off x="-225425" y="1524000"/>
+            <a:ext cx="7308850" cy="4113213"/>
+          </a:xfrm>
+          <a:prstGeom prst="rect">
+            <a:avLst/>
+          </a:prstGeom>
+          <a:noFill/>
+          <a:ln w="12700">
+            <a:solidFill>
+              <a:prstClr val="black"/>
+            </a:solidFill>
+          </a:ln>
+        </p:spPr>
+      </p:sp>
+      <p:sp>
+        <p:nvSpPr>
+          <p:cNvPr id="3" name="Notes Placeholder 2"/>
+          <p:cNvSpPr>
+            <a:spLocks noGrp="1"/>
+          </p:cNvSpPr>
+          <p:nvPr>
+            <p:ph type="body" idx="1"/>
+          </p:nvPr>
+        </p:nvSpPr>
+        <p:spPr>
+          <a:xfrm>
+            <a:off x="685800" y="5865813"/>
+            <a:ext cx="5486400" cy="4799012"/>
+          </a:xfrm>
+          <a:prstGeom prst="rect">
+            <a:avLst/>
+          </a:prstGeom>
+        </p:spPr>
+        <p:txBody>
+          <a:bodyPr/>
+          <a:lstStyle/>
+          <a:p>
+            <a:r>
+              <a:rPr lang="en-US" dirty="0"/>
+              <a:t>Each app owns its own store and its own query client — nothing is shared. For client state they agree on a typed event contract, and whoever owns the state is the one who broadcasts: the shell owns theme and routing, so it broadcasts those; the counter belongs to nobody, so any module can. For server state there's no syncing at all — every app just fetches, because the API is already the shared state.</a:t>
+            </a:r>
+            <a:endParaRPr lang="en-GB" dirty="0"/>
+          </a:p>
+        </p:txBody>
+      </p:sp>
+    </p:spTree>
+    <p:extLst>
+      <p:ext uri="{BB962C8B-B14F-4D97-AF65-F5344CB8AC3E}">
+        <p14:creationId xmlns:p14="http://schemas.microsoft.com/office/powerpoint/2010/main" val="983126966"/>
+      </p:ext>
+    </p:extLst>
+  </p:cSld>
+  <p:clrMapOvr>
+    <a:masterClrMapping/>
+  </p:clrMapOvr>
+</p:notes>
+</file>
+
+<file path=ppt/notesSlides/notesSlide38.xml><?xml version="1.0" encoding="utf-8"?>
+<p:notes xmlns:a="http://schemas.openxmlformats.org/drawingml/2006/main" xmlns:r="http://schemas.openxmlformats.org/officeDocument/2006/relationships" xmlns:p="http://schemas.openxmlformats.org/presentationml/2006/main">
+  <p:cSld>
+    <p:spTree>
+      <p:nvGrpSpPr>
+        <p:cNvPr id="1" name=""/>
+        <p:cNvGrpSpPr/>
+        <p:nvPr/>
+      </p:nvGrpSpPr>
+      <p:grpSpPr>
+        <a:xfrm>
+          <a:off x="0" y="0"/>
+          <a:ext cx="0" cy="0"/>
+          <a:chOff x="0" y="0"/>
+          <a:chExt cx="0" cy="0"/>
+        </a:xfrm>
+      </p:grpSpPr>
+      <p:sp>
+        <p:nvSpPr>
+          <p:cNvPr id="2" name="Slide Image Placeholder 1"/>
+          <p:cNvSpPr>
+            <a:spLocks noGrp="1" noRot="1" noChangeAspect="1"/>
+          </p:cNvSpPr>
+          <p:nvPr>
+            <p:ph type="sldImg"/>
+          </p:nvPr>
+        </p:nvSpPr>
+        <p:spPr>
+          <a:xfrm>
+            <a:off x="-225425" y="1524000"/>
+            <a:ext cx="7308850" cy="4113213"/>
+          </a:xfrm>
+          <a:prstGeom prst="rect">
+            <a:avLst/>
+          </a:prstGeom>
+          <a:noFill/>
+          <a:ln w="12700">
+            <a:solidFill>
+              <a:prstClr val="black"/>
+            </a:solidFill>
+          </a:ln>
+        </p:spPr>
+      </p:sp>
+      <p:sp>
+        <p:nvSpPr>
+          <p:cNvPr id="3" name="Notes Placeholder 2"/>
+          <p:cNvSpPr>
+            <a:spLocks noGrp="1"/>
+          </p:cNvSpPr>
+          <p:nvPr>
+            <p:ph type="body" idx="1"/>
+          </p:nvPr>
+        </p:nvSpPr>
+        <p:spPr>
+          <a:xfrm>
+            <a:off x="685800" y="5865813"/>
+            <a:ext cx="5486400" cy="4799012"/>
+          </a:xfrm>
+          <a:prstGeom prst="rect">
+            <a:avLst/>
+          </a:prstGeom>
+        </p:spPr>
+        <p:txBody>
+          <a:bodyPr/>
+          <a:lstStyle/>
+          <a:p>
+            <a:r>
+              <a:rPr lang="en-US" dirty="0"/>
+              <a:t>Theming is a cross-cutting concern, and the shell owns it.</a:t>
+            </a:r>
+          </a:p>
+          <a:p>
+            <a:r>
+              <a:rPr lang="en-US" dirty="0"/>
+              <a:t>The shell persists the choice to local storage. It applies CSS variables to the document element. It exposes a small bridge on window so a remote can read or set the theme without importing host code. And it broadcasts a theme-change event.</a:t>
+            </a:r>
+          </a:p>
+          <a:p>
+            <a:endParaRPr lang="en-GB" dirty="0"/>
+          </a:p>
+        </p:txBody>
+      </p:sp>
+    </p:spTree>
+    <p:extLst>
+      <p:ext uri="{BB962C8B-B14F-4D97-AF65-F5344CB8AC3E}">
+        <p14:creationId xmlns:p14="http://schemas.microsoft.com/office/powerpoint/2010/main" val="2728972476"/>
+      </p:ext>
+    </p:extLst>
+  </p:cSld>
+  <p:clrMapOvr>
+    <a:masterClrMapping/>
+  </p:clrMapOvr>
+</p:notes>
+</file>
+
+<file path=ppt/notesSlides/notesSlide39.xml><?xml version="1.0" encoding="utf-8"?>
+<p:notes xmlns:a="http://schemas.openxmlformats.org/drawingml/2006/main" xmlns:r="http://schemas.openxmlformats.org/officeDocument/2006/relationships" xmlns:p="http://schemas.openxmlformats.org/presentationml/2006/main">
+  <p:cSld>
+    <p:spTree>
+      <p:nvGrpSpPr>
+        <p:cNvPr id="1" name="">
+          <a:extLst>
+            <a:ext uri="{FF2B5EF4-FFF2-40B4-BE49-F238E27FC236}">
+              <a16:creationId xmlns:a16="http://schemas.microsoft.com/office/drawing/2014/main" id="{8A13CAA7-9985-05A8-54F2-CCF3F6B12B76}"/>
+            </a:ext>
+          </a:extLst>
+        </p:cNvPr>
+        <p:cNvGrpSpPr/>
+        <p:nvPr/>
+      </p:nvGrpSpPr>
+      <p:grpSpPr>
+        <a:xfrm>
+          <a:off x="0" y="0"/>
+          <a:ext cx="0" cy="0"/>
+          <a:chOff x="0" y="0"/>
+          <a:chExt cx="0" cy="0"/>
+        </a:xfrm>
+      </p:grpSpPr>
+      <p:sp>
+        <p:nvSpPr>
+          <p:cNvPr id="2" name="Slide Image Placeholder 1">
+            <a:extLst>
+              <a:ext uri="{FF2B5EF4-FFF2-40B4-BE49-F238E27FC236}">
+                <a16:creationId xmlns:a16="http://schemas.microsoft.com/office/drawing/2014/main" id="{AB941509-2BEA-EF7A-F3FB-001DE8FC8601}"/>
+              </a:ext>
+            </a:extLst>
+          </p:cNvPr>
+          <p:cNvSpPr>
+            <a:spLocks noGrp="1" noRot="1" noChangeAspect="1"/>
+          </p:cNvSpPr>
+          <p:nvPr>
+            <p:ph type="sldImg"/>
+          </p:nvPr>
+        </p:nvSpPr>
+        <p:spPr/>
+      </p:sp>
+      <p:sp>
+        <p:nvSpPr>
+          <p:cNvPr id="3" name="Notes Placeholder 2">
+            <a:extLst>
+              <a:ext uri="{FF2B5EF4-FFF2-40B4-BE49-F238E27FC236}">
+                <a16:creationId xmlns:a16="http://schemas.microsoft.com/office/drawing/2014/main" id="{308E4D37-CD85-804A-C20E-AD8765FFB94D}"/>
+              </a:ext>
+            </a:extLst>
+          </p:cNvPr>
+          <p:cNvSpPr>
+            <a:spLocks noGrp="1"/>
+          </p:cNvSpPr>
+          <p:nvPr>
+            <p:ph type="body" idx="1"/>
+          </p:nvPr>
+        </p:nvSpPr>
+        <p:spPr/>
+        <p:txBody>
+          <a:bodyPr/>
+          <a:lstStyle/>
+          <a:p>
+            <a:r>
+              <a:rPr lang="en-US" dirty="0"/>
+              <a:t>Every remote has a useActiveTheme hook. It tries the host bridge first, falls back to local storage, and defaults to dark. Then it listens for theme-change and updates. Remotes style with Tailwind classes that point at those CSS variables. When the shell rewrites the variables, every remote repaints. No shared CSS build step.</a:t>
+            </a:r>
+          </a:p>
+          <a:p>
+            <a:r>
+              <a:rPr lang="en-US" dirty="0"/>
+              <a:t>Two palettes. Dark is editorial noir. Light is clean white.</a:t>
+            </a:r>
+          </a:p>
+        </p:txBody>
+      </p:sp>
+      <p:sp>
+        <p:nvSpPr>
+          <p:cNvPr id="4" name="Slide Number Placeholder 3">
+            <a:extLst>
+              <a:ext uri="{FF2B5EF4-FFF2-40B4-BE49-F238E27FC236}">
+                <a16:creationId xmlns:a16="http://schemas.microsoft.com/office/drawing/2014/main" id="{FFCE2B23-CA02-7023-FC3C-A6851775B8B1}"/>
+              </a:ext>
+            </a:extLst>
+          </p:cNvPr>
+          <p:cNvSpPr>
+            <a:spLocks noGrp="1"/>
+          </p:cNvSpPr>
+          <p:nvPr>
+            <p:ph type="sldNum" sz="quarter" idx="10"/>
+          </p:nvPr>
+        </p:nvSpPr>
+        <p:spPr/>
+        <p:txBody>
+          <a:bodyPr/>
+          <a:lstStyle/>
+          <a:p>
+            <a:fld id="{F7021451-1387-4CA6-816F-3879F97B5CBC}" type="slidenum">
+              <a:rPr lang="en-US"/>
+              <a:t>39</a:t>
+            </a:fld>
+            <a:endParaRPr lang="en-US"/>
+          </a:p>
+        </p:txBody>
+      </p:sp>
+    </p:spTree>
+    <p:extLst>
+      <p:ext uri="{BB962C8B-B14F-4D97-AF65-F5344CB8AC3E}">
+        <p14:creationId xmlns:p14="http://schemas.microsoft.com/office/powerpoint/2010/main" val="559982868"/>
       </p:ext>
     </p:extLst>
   </p:cSld>
@@ -3896,18 +3862,14 @@
           <a:bodyPr/>
           <a:lstStyle/>
           <a:p>
-            <a:r>
-              <a:rPr lang="en-US" dirty="0"/>
-              <a:t>Here's the first. </a:t>
-            </a:r>
-            <a:endParaRPr lang="en-GB" dirty="0"/>
+            <a:endParaRPr lang="en-GB"/>
           </a:p>
         </p:txBody>
       </p:sp>
     </p:spTree>
     <p:extLst>
       <p:ext uri="{BB962C8B-B14F-4D97-AF65-F5344CB8AC3E}">
-        <p14:creationId xmlns:p14="http://schemas.microsoft.com/office/powerpoint/2010/main" val="2498909475"/>
+        <p14:creationId xmlns:p14="http://schemas.microsoft.com/office/powerpoint/2010/main" val="644055462"/>
       </p:ext>
     </p:extLst>
   </p:cSld>
@@ -3963,49 +3925,13 @@
           <a:p>
             <a:r>
               <a:rPr lang="en-US" dirty="0"/>
-              <a:t>Seven things to take with you.</a:t>
+              <a:t>Two layers of preloading. Eager on mount. Hover on demand.</a:t>
             </a:r>
           </a:p>
           <a:p>
             <a:r>
               <a:rPr lang="en-US" dirty="0"/>
-              <a:t>One. Micro-frontends solve a people problem. Adopt this when your team is growing and the monolith cannot keep up. Independent modules let independent teams ship without blocking each other. Team size is the signal, not bundle size.</a:t>
-            </a:r>
-          </a:p>
-          <a:p>
-            <a:r>
-              <a:rPr lang="en-US" dirty="0"/>
-              <a:t>Two. Suspense fallbacks cover load UX. Module Federation covers team DX. You want both. This demo runs both together.</a:t>
-            </a:r>
-          </a:p>
-          <a:p>
-            <a:r>
-              <a:rPr lang="en-US" dirty="0"/>
-              <a:t>Three. Prefer events over shared state. A custom event on window gives you decoupled communication that survives independent deploys. Keep the payload backward compatible.</a:t>
-            </a:r>
-          </a:p>
-          <a:p>
-            <a:r>
-              <a:rPr lang="en-US" dirty="0"/>
-              <a:t>Four. The host owns routing. Remotes can ask for navigation with navigateToModule. Only the shell mutates router state.</a:t>
-            </a:r>
-          </a:p>
-          <a:p>
-            <a:r>
-              <a:rPr lang="en-US" dirty="0"/>
-              <a:t>Five. Ship fault isolation on purpose. A catch on every lazy import, plus an error boundary per module, keeps one broken remote from taking down the app.</a:t>
-            </a:r>
-          </a:p>
-          <a:p>
-            <a:r>
-              <a:rPr lang="en-US" dirty="0"/>
-              <a:t>Six. Rspack keeps the monorepo fast. Sub-second hot reload across four applications. Module Federation is built in. Rspack 2.1 ships the Rust React Compiler, and persistent caching for faster builds and faster restarts.</a:t>
-            </a:r>
-          </a:p>
-          <a:p>
-            <a:r>
-              <a:rPr lang="en-US" dirty="0"/>
-              <a:t>Seven. Match load strategy to content priority. Instant for the landing page. Eager for high-value content. Streamed for secondary modules, with skeletons. Do not load every remote the same way.</a:t>
+              <a:t>There is a prefetchers map. One function per module. Each function is a bare import of that remote. At shell init, we fire the ones marked eager. Records starts loading before the user has clicked anything.</a:t>
             </a:r>
           </a:p>
         </p:txBody>
@@ -4027,7 +3953,7 @@
           <a:p>
             <a:fld id="{F7021451-1387-4CA6-816F-3879F97B5CBC}" type="slidenum">
               <a:rPr lang="en-US"/>
-              <a:t>41</a:t>
+              <a:t>40</a:t>
             </a:fld>
             <a:endParaRPr lang="en-US"/>
           </a:p>
@@ -4047,6 +3973,264 @@
 </file>
 
 <file path=ppt/notesSlides/notesSlide41.xml><?xml version="1.0" encoding="utf-8"?>
+<p:notes xmlns:a="http://schemas.openxmlformats.org/drawingml/2006/main" xmlns:r="http://schemas.openxmlformats.org/officeDocument/2006/relationships" xmlns:p="http://schemas.openxmlformats.org/presentationml/2006/main">
+  <p:cSld>
+    <p:spTree>
+      <p:nvGrpSpPr>
+        <p:cNvPr id="1" name=""/>
+        <p:cNvGrpSpPr/>
+        <p:nvPr/>
+      </p:nvGrpSpPr>
+      <p:grpSpPr>
+        <a:xfrm>
+          <a:off x="0" y="0"/>
+          <a:ext cx="0" cy="0"/>
+          <a:chOff x="0" y="0"/>
+          <a:chExt cx="0" cy="0"/>
+        </a:xfrm>
+      </p:grpSpPr>
+      <p:sp>
+        <p:nvSpPr>
+          <p:cNvPr id="2" name="Slide Image Placeholder 1"/>
+          <p:cNvSpPr>
+            <a:spLocks noGrp="1" noRot="1" noChangeAspect="1"/>
+          </p:cNvSpPr>
+          <p:nvPr>
+            <p:ph type="sldImg"/>
+          </p:nvPr>
+        </p:nvSpPr>
+        <p:spPr>
+          <a:xfrm>
+            <a:off x="-225425" y="1524000"/>
+            <a:ext cx="7308850" cy="4113213"/>
+          </a:xfrm>
+          <a:prstGeom prst="rect">
+            <a:avLst/>
+          </a:prstGeom>
+          <a:noFill/>
+          <a:ln w="12700">
+            <a:solidFill>
+              <a:prstClr val="black"/>
+            </a:solidFill>
+          </a:ln>
+        </p:spPr>
+      </p:sp>
+      <p:sp>
+        <p:nvSpPr>
+          <p:cNvPr id="3" name="Notes Placeholder 2"/>
+          <p:cNvSpPr>
+            <a:spLocks noGrp="1"/>
+          </p:cNvSpPr>
+          <p:nvPr>
+            <p:ph type="body" idx="1"/>
+          </p:nvPr>
+        </p:nvSpPr>
+        <p:spPr>
+          <a:xfrm>
+            <a:off x="685800" y="5865813"/>
+            <a:ext cx="5486400" cy="4799012"/>
+          </a:xfrm>
+          <a:prstGeom prst="rect">
+            <a:avLst/>
+          </a:prstGeom>
+        </p:spPr>
+        <p:txBody>
+          <a:bodyPr/>
+          <a:lstStyle/>
+          <a:p>
+            <a:r>
+              <a:rPr lang="en-US" dirty="0"/>
+              <a:t>For the rest, the nav link fires on mouse enter. When the cursor touches Prescriptions or Analytics, the chunk starts fetching in the background. Click, and it is often already cached.</a:t>
+            </a:r>
+          </a:p>
+          <a:p>
+            <a:r>
+              <a:rPr lang="en-US" dirty="0"/>
+              <a:t>Instant means the landing page fetches lazily, with no streaming delay. Eager means preloaded the moment the shell mounts. Hover means prefetched when the user aims at a tab. That is why Records feels instant even though it is a separate app on a separate server. The work happened at mount.</a:t>
+            </a:r>
+          </a:p>
+          <a:p>
+            <a:endParaRPr lang="en-GB" dirty="0"/>
+          </a:p>
+        </p:txBody>
+      </p:sp>
+    </p:spTree>
+    <p:extLst>
+      <p:ext uri="{BB962C8B-B14F-4D97-AF65-F5344CB8AC3E}">
+        <p14:creationId xmlns:p14="http://schemas.microsoft.com/office/powerpoint/2010/main" val="2202382534"/>
+      </p:ext>
+    </p:extLst>
+  </p:cSld>
+  <p:clrMapOvr>
+    <a:masterClrMapping/>
+  </p:clrMapOvr>
+</p:notes>
+</file>
+
+<file path=ppt/notesSlides/notesSlide42.xml><?xml version="1.0" encoding="utf-8"?>
+<p:notes xmlns:a="http://schemas.openxmlformats.org/drawingml/2006/main" xmlns:r="http://schemas.openxmlformats.org/officeDocument/2006/relationships" xmlns:p="http://schemas.openxmlformats.org/presentationml/2006/main">
+  <p:cSld>
+    <p:spTree>
+      <p:nvGrpSpPr>
+        <p:cNvPr id="1" name=""/>
+        <p:cNvGrpSpPr/>
+        <p:nvPr/>
+      </p:nvGrpSpPr>
+      <p:grpSpPr>
+        <a:xfrm>
+          <a:off x="0" y="0"/>
+          <a:ext cx="0" cy="0"/>
+          <a:chOff x="0" y="0"/>
+          <a:chExt cx="0" cy="0"/>
+        </a:xfrm>
+      </p:grpSpPr>
+      <p:sp>
+        <p:nvSpPr>
+          <p:cNvPr id="2" name="Slide Image Placeholder 1"/>
+          <p:cNvSpPr>
+            <a:spLocks noGrp="1" noRot="1" noChangeAspect="1"/>
+          </p:cNvSpPr>
+          <p:nvPr>
+            <p:ph type="sldImg"/>
+          </p:nvPr>
+        </p:nvSpPr>
+        <p:spPr>
+          <a:xfrm>
+            <a:off x="-225425" y="1524000"/>
+            <a:ext cx="7308850" cy="4113213"/>
+          </a:xfrm>
+          <a:prstGeom prst="rect">
+            <a:avLst/>
+          </a:prstGeom>
+          <a:noFill/>
+          <a:ln w="12700">
+            <a:solidFill>
+              <a:prstClr val="black"/>
+            </a:solidFill>
+          </a:ln>
+        </p:spPr>
+      </p:sp>
+      <p:sp>
+        <p:nvSpPr>
+          <p:cNvPr id="3" name="Notes Placeholder 2"/>
+          <p:cNvSpPr>
+            <a:spLocks noGrp="1"/>
+          </p:cNvSpPr>
+          <p:nvPr>
+            <p:ph type="body" idx="1"/>
+          </p:nvPr>
+        </p:nvSpPr>
+        <p:spPr>
+          <a:xfrm>
+            <a:off x="685800" y="5865813"/>
+            <a:ext cx="5486400" cy="4799012"/>
+          </a:xfrm>
+          <a:prstGeom prst="rect">
+            <a:avLst/>
+          </a:prstGeom>
+        </p:spPr>
+        <p:txBody>
+          <a:bodyPr/>
+          <a:lstStyle/>
+          <a:p>
+            <a:r>
+              <a:rPr lang="en-US" dirty="0"/>
+              <a:t>Seven things to take with you.</a:t>
+            </a:r>
+          </a:p>
+          <a:p>
+            <a:r>
+              <a:rPr lang="en-US" dirty="0"/>
+              <a:t>One. Micro-frontends solve a people problem. Adopt this when your team is growing and the monolith cannot keep up. Independent modules let independent teams ship without blocking each other. Team size is the signal, not bundle size.</a:t>
+            </a:r>
+          </a:p>
+          <a:p>
+            <a:r>
+              <a:rPr lang="en-US" dirty="0"/>
+              <a:t>Two. Suspense fallbacks cover load UX. Module Federation covers team DX. You want both. This demo runs both together.</a:t>
+            </a:r>
+          </a:p>
+          <a:p>
+            <a:r>
+              <a:rPr lang="en-US" dirty="0"/>
+              <a:t>Three. Prefer events over shared state. A custom event on window gives you decoupled communication that survives independent deploys. Keep the payload backward compatible.</a:t>
+            </a:r>
+          </a:p>
+          <a:p>
+            <a:r>
+              <a:rPr lang="en-US" dirty="0"/>
+              <a:t>Four. The host owns routing. Remotes can ask for navigation with </a:t>
+            </a:r>
+            <a:r>
+              <a:rPr lang="en-US" dirty="0" err="1"/>
+              <a:t>navigateToModule</a:t>
+            </a:r>
+            <a:r>
+              <a:rPr lang="en-US" dirty="0"/>
+              <a:t>. Only the shell mutates router state.</a:t>
+            </a:r>
+          </a:p>
+          <a:p>
+            <a:r>
+              <a:rPr lang="en-US" dirty="0"/>
+              <a:t>Five. Ship fault isolation on purpose. A catch on every lazy import, plus an error boundary per module, keeps one broken remote from taking down the app.</a:t>
+            </a:r>
+          </a:p>
+          <a:p>
+            <a:r>
+              <a:rPr lang="en-US" dirty="0"/>
+              <a:t>Six. </a:t>
+            </a:r>
+            <a:r>
+              <a:rPr lang="en-US" dirty="0" err="1"/>
+              <a:t>Rspack</a:t>
+            </a:r>
+            <a:r>
+              <a:rPr lang="en-US" dirty="0"/>
+              <a:t> keeps the </a:t>
+            </a:r>
+            <a:r>
+              <a:rPr lang="en-US" dirty="0" err="1"/>
+              <a:t>monorepo</a:t>
+            </a:r>
+            <a:r>
+              <a:rPr lang="en-US" dirty="0"/>
+              <a:t> fast. Sub-second hot reload across four applications. Module Federation is built in. </a:t>
+            </a:r>
+            <a:r>
+              <a:rPr lang="en-US" dirty="0" err="1"/>
+              <a:t>Rspack</a:t>
+            </a:r>
+            <a:r>
+              <a:rPr lang="en-US" dirty="0"/>
+              <a:t> 2.1 ships the Rust React Compiler, and persistent caching for faster builds and faster restarts.</a:t>
+            </a:r>
+          </a:p>
+          <a:p>
+            <a:r>
+              <a:rPr lang="en-US" dirty="0"/>
+              <a:t>Seven. Match load strategy to content priority. Instant for the landing page. Eager for high-value content. Streamed for secondary modules, with skeletons. Do not load every remote the same way.</a:t>
+            </a:r>
+          </a:p>
+          <a:p>
+            <a:endParaRPr lang="en-GB" dirty="0"/>
+          </a:p>
+        </p:txBody>
+      </p:sp>
+    </p:spTree>
+    <p:extLst>
+      <p:ext uri="{BB962C8B-B14F-4D97-AF65-F5344CB8AC3E}">
+        <p14:creationId xmlns:p14="http://schemas.microsoft.com/office/powerpoint/2010/main" val="693830592"/>
+      </p:ext>
+    </p:extLst>
+  </p:cSld>
+  <p:clrMapOvr>
+    <a:masterClrMapping/>
+  </p:clrMapOvr>
+</p:notes>
+</file>
+
+<file path=ppt/notesSlides/notesSlide43.xml><?xml version="1.0" encoding="utf-8"?>
 <p:notes xmlns:a="http://schemas.openxmlformats.org/drawingml/2006/main" xmlns:r="http://schemas.openxmlformats.org/officeDocument/2006/relationships" xmlns:p="http://schemas.openxmlformats.org/presentationml/2006/main">
   <p:cSld>
     <p:spTree>
@@ -4120,6 +4304,89 @@
     <p:extLst>
       <p:ext uri="{BB962C8B-B14F-4D97-AF65-F5344CB8AC3E}">
         <p14:creationId xmlns:p14="http://schemas.microsoft.com/office/powerpoint/2010/main" val="922607855"/>
+      </p:ext>
+    </p:extLst>
+  </p:cSld>
+  <p:clrMapOvr>
+    <a:masterClrMapping/>
+  </p:clrMapOvr>
+</p:notes>
+</file>
+
+<file path=ppt/notesSlides/notesSlide44.xml><?xml version="1.0" encoding="utf-8"?>
+<p:notes xmlns:a="http://schemas.openxmlformats.org/drawingml/2006/main" xmlns:r="http://schemas.openxmlformats.org/officeDocument/2006/relationships" xmlns:p="http://schemas.openxmlformats.org/presentationml/2006/main">
+  <p:cSld>
+    <p:spTree>
+      <p:nvGrpSpPr>
+        <p:cNvPr id="1" name=""/>
+        <p:cNvGrpSpPr/>
+        <p:nvPr/>
+      </p:nvGrpSpPr>
+      <p:grpSpPr>
+        <a:xfrm>
+          <a:off x="0" y="0"/>
+          <a:ext cx="0" cy="0"/>
+          <a:chOff x="0" y="0"/>
+          <a:chExt cx="0" cy="0"/>
+        </a:xfrm>
+      </p:grpSpPr>
+      <p:sp>
+        <p:nvSpPr>
+          <p:cNvPr id="2" name="Slide Image Placeholder 1"/>
+          <p:cNvSpPr>
+            <a:spLocks noGrp="1" noRot="1" noChangeAspect="1"/>
+          </p:cNvSpPr>
+          <p:nvPr>
+            <p:ph type="sldImg"/>
+          </p:nvPr>
+        </p:nvSpPr>
+        <p:spPr>
+          <a:xfrm>
+            <a:off x="-225425" y="1524000"/>
+            <a:ext cx="7308850" cy="4113213"/>
+          </a:xfrm>
+          <a:prstGeom prst="rect">
+            <a:avLst/>
+          </a:prstGeom>
+          <a:noFill/>
+          <a:ln w="12700">
+            <a:solidFill>
+              <a:prstClr val="black"/>
+            </a:solidFill>
+          </a:ln>
+        </p:spPr>
+      </p:sp>
+      <p:sp>
+        <p:nvSpPr>
+          <p:cNvPr id="3" name="Notes Placeholder 2"/>
+          <p:cNvSpPr>
+            <a:spLocks noGrp="1"/>
+          </p:cNvSpPr>
+          <p:nvPr>
+            <p:ph type="body" idx="1"/>
+          </p:nvPr>
+        </p:nvSpPr>
+        <p:spPr>
+          <a:xfrm>
+            <a:off x="685800" y="5865813"/>
+            <a:ext cx="5486400" cy="4799012"/>
+          </a:xfrm>
+          <a:prstGeom prst="rect">
+            <a:avLst/>
+          </a:prstGeom>
+        </p:spPr>
+        <p:txBody>
+          <a:bodyPr/>
+          <a:lstStyle/>
+          <a:p>
+            <a:endParaRPr lang="en-GB"/>
+          </a:p>
+        </p:txBody>
+      </p:sp>
+    </p:spTree>
+    <p:extLst>
+      <p:ext uri="{BB962C8B-B14F-4D97-AF65-F5344CB8AC3E}">
+        <p14:creationId xmlns:p14="http://schemas.microsoft.com/office/powerpoint/2010/main" val="3223691410"/>
       </p:ext>
     </p:extLst>
   </p:cSld>
@@ -4197,6 +4464,93 @@
           <a:p>
             <a:r>
               <a:rPr lang="en-US" dirty="0"/>
+              <a:t>Here's the first. </a:t>
+            </a:r>
+            <a:endParaRPr lang="en-GB" dirty="0"/>
+          </a:p>
+        </p:txBody>
+      </p:sp>
+    </p:spTree>
+    <p:extLst>
+      <p:ext uri="{BB962C8B-B14F-4D97-AF65-F5344CB8AC3E}">
+        <p14:creationId xmlns:p14="http://schemas.microsoft.com/office/powerpoint/2010/main" val="2498909475"/>
+      </p:ext>
+    </p:extLst>
+  </p:cSld>
+  <p:clrMapOvr>
+    <a:masterClrMapping/>
+  </p:clrMapOvr>
+</p:notes>
+</file>
+
+<file path=ppt/notesSlides/notesSlide6.xml><?xml version="1.0" encoding="utf-8"?>
+<p:notes xmlns:a="http://schemas.openxmlformats.org/drawingml/2006/main" xmlns:r="http://schemas.openxmlformats.org/officeDocument/2006/relationships" xmlns:p="http://schemas.openxmlformats.org/presentationml/2006/main">
+  <p:cSld>
+    <p:spTree>
+      <p:nvGrpSpPr>
+        <p:cNvPr id="1" name=""/>
+        <p:cNvGrpSpPr/>
+        <p:nvPr/>
+      </p:nvGrpSpPr>
+      <p:grpSpPr>
+        <a:xfrm>
+          <a:off x="0" y="0"/>
+          <a:ext cx="0" cy="0"/>
+          <a:chOff x="0" y="0"/>
+          <a:chExt cx="0" cy="0"/>
+        </a:xfrm>
+      </p:grpSpPr>
+      <p:sp>
+        <p:nvSpPr>
+          <p:cNvPr id="2" name="Slide Image Placeholder 1"/>
+          <p:cNvSpPr>
+            <a:spLocks noGrp="1" noRot="1" noChangeAspect="1"/>
+          </p:cNvSpPr>
+          <p:nvPr>
+            <p:ph type="sldImg"/>
+          </p:nvPr>
+        </p:nvSpPr>
+        <p:spPr>
+          <a:xfrm>
+            <a:off x="-225425" y="1524000"/>
+            <a:ext cx="7308850" cy="4113213"/>
+          </a:xfrm>
+          <a:prstGeom prst="rect">
+            <a:avLst/>
+          </a:prstGeom>
+          <a:noFill/>
+          <a:ln w="12700">
+            <a:solidFill>
+              <a:prstClr val="black"/>
+            </a:solidFill>
+          </a:ln>
+        </p:spPr>
+      </p:sp>
+      <p:sp>
+        <p:nvSpPr>
+          <p:cNvPr id="3" name="Notes Placeholder 2"/>
+          <p:cNvSpPr>
+            <a:spLocks noGrp="1"/>
+          </p:cNvSpPr>
+          <p:nvPr>
+            <p:ph type="body" idx="1"/>
+          </p:nvPr>
+        </p:nvSpPr>
+        <p:spPr>
+          <a:xfrm>
+            <a:off x="685800" y="5865813"/>
+            <a:ext cx="5486400" cy="4799012"/>
+          </a:xfrm>
+          <a:prstGeom prst="rect">
+            <a:avLst/>
+          </a:prstGeom>
+        </p:spPr>
+        <p:txBody>
+          <a:bodyPr/>
+          <a:lstStyle/>
+          <a:p>
+            <a:r>
+              <a:rPr lang="en-US" dirty="0"/>
               <a:t>The distinction that matters is between </a:t>
             </a:r>
             <a:r>
@@ -4232,7 +4586,7 @@
 </p:notes>
 </file>
 
-<file path=ppt/notesSlides/notesSlide6.xml><?xml version="1.0" encoding="utf-8"?>
+<file path=ppt/notesSlides/notesSlide7.xml><?xml version="1.0" encoding="utf-8"?>
 <p:notes xmlns:a="http://schemas.openxmlformats.org/drawingml/2006/main" xmlns:r="http://schemas.openxmlformats.org/officeDocument/2006/relationships" xmlns:p="http://schemas.openxmlformats.org/presentationml/2006/main">
   <p:cSld>
     <p:spTree>
@@ -4337,7 +4691,7 @@
 </p:notes>
 </file>
 
-<file path=ppt/notesSlides/notesSlide7.xml><?xml version="1.0" encoding="utf-8"?>
+<file path=ppt/notesSlides/notesSlide8.xml><?xml version="1.0" encoding="utf-8"?>
 <p:notes xmlns:a="http://schemas.openxmlformats.org/drawingml/2006/main" xmlns:r="http://schemas.openxmlformats.org/officeDocument/2006/relationships" xmlns:p="http://schemas.openxmlformats.org/presentationml/2006/main">
   <p:cSld>
     <p:spTree>
@@ -4424,7 +4778,7 @@
 </p:notes>
 </file>
 
-<file path=ppt/notesSlides/notesSlide8.xml><?xml version="1.0" encoding="utf-8"?>
+<file path=ppt/notesSlides/notesSlide9.xml><?xml version="1.0" encoding="utf-8"?>
 <p:notes xmlns:a="http://schemas.openxmlformats.org/drawingml/2006/main" xmlns:r="http://schemas.openxmlformats.org/officeDocument/2006/relationships" xmlns:p="http://schemas.openxmlformats.org/presentationml/2006/main">
   <p:cSld>
     <p:spTree>
@@ -4529,93 +4883,6 @@
 </p:notes>
 </file>
 
-<file path=ppt/notesSlides/notesSlide9.xml><?xml version="1.0" encoding="utf-8"?>
-<p:notes xmlns:a="http://schemas.openxmlformats.org/drawingml/2006/main" xmlns:r="http://schemas.openxmlformats.org/officeDocument/2006/relationships" xmlns:p="http://schemas.openxmlformats.org/presentationml/2006/main">
-  <p:cSld>
-    <p:spTree>
-      <p:nvGrpSpPr>
-        <p:cNvPr id="1" name=""/>
-        <p:cNvGrpSpPr/>
-        <p:nvPr/>
-      </p:nvGrpSpPr>
-      <p:grpSpPr>
-        <a:xfrm>
-          <a:off x="0" y="0"/>
-          <a:ext cx="0" cy="0"/>
-          <a:chOff x="0" y="0"/>
-          <a:chExt cx="0" cy="0"/>
-        </a:xfrm>
-      </p:grpSpPr>
-      <p:sp>
-        <p:nvSpPr>
-          <p:cNvPr id="2" name="Slide Image Placeholder 1"/>
-          <p:cNvSpPr>
-            <a:spLocks noGrp="1" noRot="1" noChangeAspect="1"/>
-          </p:cNvSpPr>
-          <p:nvPr>
-            <p:ph type="sldImg"/>
-          </p:nvPr>
-        </p:nvSpPr>
-        <p:spPr>
-          <a:xfrm>
-            <a:off x="-225425" y="1524000"/>
-            <a:ext cx="7308850" cy="4113213"/>
-          </a:xfrm>
-          <a:prstGeom prst="rect">
-            <a:avLst/>
-          </a:prstGeom>
-          <a:noFill/>
-          <a:ln w="12700">
-            <a:solidFill>
-              <a:prstClr val="black"/>
-            </a:solidFill>
-          </a:ln>
-        </p:spPr>
-      </p:sp>
-      <p:sp>
-        <p:nvSpPr>
-          <p:cNvPr id="3" name="Notes Placeholder 2"/>
-          <p:cNvSpPr>
-            <a:spLocks noGrp="1"/>
-          </p:cNvSpPr>
-          <p:nvPr>
-            <p:ph type="body" idx="1"/>
-          </p:nvPr>
-        </p:nvSpPr>
-        <p:spPr>
-          <a:xfrm>
-            <a:off x="685800" y="5865813"/>
-            <a:ext cx="5486400" cy="4799012"/>
-          </a:xfrm>
-          <a:prstGeom prst="rect">
-            <a:avLst/>
-          </a:prstGeom>
-        </p:spPr>
-        <p:txBody>
-          <a:bodyPr/>
-          <a:lstStyle/>
-          <a:p>
-            <a:r>
-              <a:rPr lang="en-US" dirty="0"/>
-              <a:t>This is the one people underrate. It isn't about total lines of code — it's about how much of the system a person must hold in their head before they can safely change one line of it.</a:t>
-            </a:r>
-            <a:endParaRPr lang="en-GB" dirty="0"/>
-          </a:p>
-        </p:txBody>
-      </p:sp>
-    </p:spTree>
-    <p:extLst>
-      <p:ext uri="{BB962C8B-B14F-4D97-AF65-F5344CB8AC3E}">
-        <p14:creationId xmlns:p14="http://schemas.microsoft.com/office/powerpoint/2010/main" val="3278199916"/>
-      </p:ext>
-    </p:extLst>
-  </p:cSld>
-  <p:clrMapOvr>
-    <a:masterClrMapping/>
-  </p:clrMapOvr>
-</p:notes>
-</file>
-
 <file path=ppt/slideLayouts/slideLayout1.xml><?xml version="1.0" encoding="utf-8"?>
 <p:sldLayout xmlns:a="http://schemas.openxmlformats.org/drawingml/2006/main" xmlns:r="http://schemas.openxmlformats.org/officeDocument/2006/relationships" xmlns:p="http://schemas.openxmlformats.org/presentationml/2006/main" preserve="1">
   <p:cSld name="DEFAULT">
@@ -4680,7 +4947,7 @@
           <a:p>
             <a:fld id="{5BCAD085-E8A6-8845-BD4E-CB4CCA059FC4}" type="datetimeFigureOut">
               <a:rPr lang="en-US" smtClean="0"/>
-              <a:t>8/29/2026</a:t>
+              <a:t>8/30/2026</a:t>
             </a:fld>
             <a:endParaRPr lang="en-US"/>
           </a:p>
@@ -5373,23 +5640,9 @@
 <file path=ppt/slides/slide13.xml><?xml version="1.0" encoding="utf-8"?>
 <p:sld xmlns:a="http://schemas.openxmlformats.org/drawingml/2006/main" xmlns:r="http://schemas.openxmlformats.org/officeDocument/2006/relationships" xmlns:p="http://schemas.openxmlformats.org/presentationml/2006/main">
   <p:cSld>
-    <p:bg>
-      <p:bgPr>
-        <a:solidFill>
-          <a:srgbClr val="0C0C0C"/>
-        </a:solidFill>
-        <a:effectLst/>
-      </p:bgPr>
-    </p:bg>
     <p:spTree>
       <p:nvGrpSpPr>
-        <p:cNvPr id="1" name="">
-          <a:extLst>
-            <a:ext uri="{FF2B5EF4-FFF2-40B4-BE49-F238E27FC236}">
-              <a16:creationId xmlns:a16="http://schemas.microsoft.com/office/drawing/2014/main" id="{5E6E5659-012F-9DB5-24D7-BCB6DF4F0BD8}"/>
-            </a:ext>
-          </a:extLst>
-        </p:cNvPr>
+        <p:cNvPr id="1" name=""/>
         <p:cNvGrpSpPr/>
         <p:nvPr/>
       </p:nvGrpSpPr>
@@ -5406,7 +5659,7 @@
           <p:cNvPr id="3" name="Text 4">
             <a:extLst>
               <a:ext uri="{FF2B5EF4-FFF2-40B4-BE49-F238E27FC236}">
-                <a16:creationId xmlns:a16="http://schemas.microsoft.com/office/drawing/2014/main" id="{97970F93-03A9-E039-C72E-6674A13A62F6}"/>
+                <a16:creationId xmlns:a16="http://schemas.microsoft.com/office/drawing/2014/main" id="{59B45F36-03DD-1F61-AE4F-491056679896}"/>
               </a:ext>
             </a:extLst>
           </p:cNvPr>
@@ -5437,8 +5690,9 @@
             <a:r>
               <a:rPr lang="en-US" sz="4000" dirty="0">
                 <a:solidFill>
-                  <a:schemeClr val="bg1">
+                  <a:schemeClr val="tx1">
                     <a:lumMod val="95000"/>
+                    <a:lumOff val="5000"/>
                   </a:schemeClr>
                 </a:solidFill>
                 <a:latin typeface="Cascadia Code NF" pitchFamily="50" charset="0"/>
@@ -5458,8 +5712,9 @@
             <a:r>
               <a:rPr lang="en-US" sz="4000" dirty="0">
                 <a:solidFill>
-                  <a:schemeClr val="bg1">
+                  <a:schemeClr val="tx1">
                     <a:lumMod val="95000"/>
+                    <a:lumOff val="5000"/>
                   </a:schemeClr>
                 </a:solidFill>
                 <a:latin typeface="Cascadia Code NF" pitchFamily="50" charset="0"/>
@@ -5479,8 +5734,9 @@
             <a:r>
               <a:rPr lang="en-US" sz="4000" dirty="0">
                 <a:solidFill>
-                  <a:schemeClr val="bg1">
+                  <a:schemeClr val="tx1">
                     <a:lumMod val="95000"/>
+                    <a:lumOff val="5000"/>
                   </a:schemeClr>
                 </a:solidFill>
                 <a:latin typeface="Cascadia Code NF" pitchFamily="50" charset="0"/>
@@ -5500,8 +5756,9 @@
             <a:r>
               <a:rPr lang="en-US" sz="4000" dirty="0">
                 <a:solidFill>
-                  <a:schemeClr val="bg1">
+                  <a:schemeClr val="tx1">
                     <a:lumMod val="95000"/>
+                    <a:lumOff val="5000"/>
                   </a:schemeClr>
                 </a:solidFill>
                 <a:latin typeface="Cascadia Code NF" pitchFamily="50" charset="0"/>
@@ -5521,8 +5778,9 @@
             <a:r>
               <a:rPr lang="en-US" sz="4000" dirty="0">
                 <a:solidFill>
-                  <a:schemeClr val="bg1">
+                  <a:schemeClr val="tx1">
                     <a:lumMod val="95000"/>
+                    <a:lumOff val="5000"/>
                   </a:schemeClr>
                 </a:solidFill>
                 <a:latin typeface="Cascadia Code NF" pitchFamily="50" charset="0"/>
@@ -5537,7 +5795,7 @@
     </p:spTree>
     <p:extLst>
       <p:ext uri="{BB962C8B-B14F-4D97-AF65-F5344CB8AC3E}">
-        <p14:creationId xmlns:p14="http://schemas.microsoft.com/office/powerpoint/2010/main" val="4017365065"/>
+        <p14:creationId xmlns:p14="http://schemas.microsoft.com/office/powerpoint/2010/main" val="3384620455"/>
       </p:ext>
     </p:extLst>
   </p:cSld>
@@ -6581,15 +6839,7 @@
 
 <file path=ppt/slides/slide16.xml><?xml version="1.0" encoding="utf-8"?>
 <p:sld xmlns:a="http://schemas.openxmlformats.org/drawingml/2006/main" xmlns:r="http://schemas.openxmlformats.org/officeDocument/2006/relationships" xmlns:p="http://schemas.openxmlformats.org/presentationml/2006/main">
-  <p:cSld name="Slide 4">
-    <p:bg>
-      <p:bgPr>
-        <a:solidFill>
-          <a:srgbClr val="0C0C0C"/>
-        </a:solidFill>
-        <a:effectLst/>
-      </p:bgPr>
-    </p:bg>
+  <p:cSld>
     <p:spTree>
       <p:nvGrpSpPr>
         <p:cNvPr id="1" name=""/>
@@ -6606,7 +6856,13 @@
       </p:grpSpPr>
       <p:sp>
         <p:nvSpPr>
-          <p:cNvPr id="4" name="Text 2"/>
+          <p:cNvPr id="3" name="Text 2">
+            <a:extLst>
+              <a:ext uri="{FF2B5EF4-FFF2-40B4-BE49-F238E27FC236}">
+                <a16:creationId xmlns:a16="http://schemas.microsoft.com/office/drawing/2014/main" id="{AE7BAA42-8979-2749-678C-C4B2DCFC42DC}"/>
+              </a:ext>
+            </a:extLst>
+          </p:cNvPr>
           <p:cNvSpPr/>
           <p:nvPr/>
         </p:nvSpPr>
@@ -6631,7 +6887,10 @@
             <a:r>
               <a:rPr lang="en-US" sz="3300" i="1" dirty="0">
                 <a:solidFill>
-                  <a:srgbClr val="FAFAF9"/>
+                  <a:schemeClr val="tx1">
+                    <a:lumMod val="95000"/>
+                    <a:lumOff val="5000"/>
+                  </a:schemeClr>
                 </a:solidFill>
                 <a:latin typeface="Instrument Serif" pitchFamily="34" charset="0"/>
                 <a:ea typeface="Instrument Serif" pitchFamily="34" charset="-122"/>
@@ -6639,13 +6898,26 @@
               </a:rPr>
               <a:t>One shell, four remotes, three loading strategies</a:t>
             </a:r>
-            <a:endParaRPr lang="en-US" sz="3300" dirty="0"/>
+            <a:endParaRPr lang="en-US" sz="3300" dirty="0">
+              <a:solidFill>
+                <a:schemeClr val="tx1">
+                  <a:lumMod val="95000"/>
+                  <a:lumOff val="5000"/>
+                </a:schemeClr>
+              </a:solidFill>
+            </a:endParaRPr>
           </a:p>
         </p:txBody>
       </p:sp>
       <p:sp>
         <p:nvSpPr>
-          <p:cNvPr id="8" name="Text 5"/>
+          <p:cNvPr id="5" name="Text 5">
+            <a:extLst>
+              <a:ext uri="{FF2B5EF4-FFF2-40B4-BE49-F238E27FC236}">
+                <a16:creationId xmlns:a16="http://schemas.microsoft.com/office/drawing/2014/main" id="{5E252CBF-4D3F-DA4C-2817-C743E648F88B}"/>
+              </a:ext>
+            </a:extLst>
+          </p:cNvPr>
           <p:cNvSpPr/>
           <p:nvPr/>
         </p:nvSpPr>
@@ -6673,8 +6945,9 @@
             <a:r>
               <a:rPr lang="en-US" dirty="0">
                 <a:solidFill>
-                  <a:schemeClr val="bg1">
-                    <a:lumMod val="85000"/>
+                  <a:schemeClr val="tx1">
+                    <a:lumMod val="95000"/>
+                    <a:lumOff val="5000"/>
                   </a:schemeClr>
                 </a:solidFill>
                 <a:latin typeface="Cascadia Code NF" pitchFamily="50" charset="0"/>
@@ -6694,8 +6967,9 @@
             <a:r>
               <a:rPr lang="en-US" dirty="0">
                 <a:solidFill>
-                  <a:schemeClr val="bg1">
-                    <a:lumMod val="85000"/>
+                  <a:schemeClr val="tx1">
+                    <a:lumMod val="95000"/>
+                    <a:lumOff val="5000"/>
                   </a:schemeClr>
                 </a:solidFill>
                 <a:latin typeface="Cascadia Code NF" pitchFamily="50" charset="0"/>
@@ -6715,8 +6989,9 @@
             <a:r>
               <a:rPr lang="en-US" dirty="0">
                 <a:solidFill>
-                  <a:schemeClr val="bg1">
-                    <a:lumMod val="85000"/>
+                  <a:schemeClr val="tx1">
+                    <a:lumMod val="95000"/>
+                    <a:lumOff val="5000"/>
                   </a:schemeClr>
                 </a:solidFill>
                 <a:latin typeface="Cascadia Code NF" pitchFamily="50" charset="0"/>
@@ -6736,8 +7011,9 @@
             <a:r>
               <a:rPr lang="en-US" dirty="0">
                 <a:solidFill>
-                  <a:schemeClr val="bg1">
-                    <a:lumMod val="85000"/>
+                  <a:schemeClr val="tx1">
+                    <a:lumMod val="95000"/>
+                    <a:lumOff val="5000"/>
                   </a:schemeClr>
                 </a:solidFill>
                 <a:latin typeface="Cascadia Code NF" pitchFamily="50" charset="0"/>
@@ -6757,8 +7033,9 @@
             <a:r>
               <a:rPr lang="en-US" dirty="0">
                 <a:solidFill>
-                  <a:schemeClr val="bg1">
-                    <a:lumMod val="85000"/>
+                  <a:schemeClr val="tx1">
+                    <a:lumMod val="95000"/>
+                    <a:lumOff val="5000"/>
                   </a:schemeClr>
                 </a:solidFill>
                 <a:latin typeface="Cascadia Code NF" pitchFamily="50" charset="0"/>
@@ -6778,8 +7055,9 @@
             <a:r>
               <a:rPr lang="en-US" dirty="0">
                 <a:solidFill>
-                  <a:schemeClr val="bg1">
-                    <a:lumMod val="85000"/>
+                  <a:schemeClr val="tx1">
+                    <a:lumMod val="95000"/>
+                    <a:lumOff val="5000"/>
                   </a:schemeClr>
                 </a:solidFill>
                 <a:latin typeface="Cascadia Code NF" pitchFamily="50" charset="0"/>
@@ -6799,8 +7077,9 @@
             <a:r>
               <a:rPr lang="en-US" dirty="0">
                 <a:solidFill>
-                  <a:schemeClr val="bg1">
-                    <a:lumMod val="85000"/>
+                  <a:schemeClr val="tx1">
+                    <a:lumMod val="95000"/>
+                    <a:lumOff val="5000"/>
                   </a:schemeClr>
                 </a:solidFill>
                 <a:latin typeface="Cascadia Code NF" pitchFamily="50" charset="0"/>
@@ -6820,8 +7099,9 @@
             <a:r>
               <a:rPr lang="en-US" dirty="0">
                 <a:solidFill>
-                  <a:schemeClr val="bg1">
-                    <a:lumMod val="85000"/>
+                  <a:schemeClr val="tx1">
+                    <a:lumMod val="95000"/>
+                    <a:lumOff val="5000"/>
                   </a:schemeClr>
                 </a:solidFill>
                 <a:latin typeface="Cascadia Code NF" pitchFamily="50" charset="0"/>
@@ -6841,8 +7121,9 @@
             <a:r>
               <a:rPr lang="en-US" dirty="0">
                 <a:solidFill>
-                  <a:schemeClr val="bg1">
-                    <a:lumMod val="85000"/>
+                  <a:schemeClr val="tx1">
+                    <a:lumMod val="95000"/>
+                    <a:lumOff val="5000"/>
                   </a:schemeClr>
                 </a:solidFill>
                 <a:latin typeface="Cascadia Code NF" pitchFamily="50" charset="0"/>
@@ -6862,8 +7143,9 @@
             <a:r>
               <a:rPr lang="en-US" dirty="0">
                 <a:solidFill>
-                  <a:schemeClr val="bg1">
-                    <a:lumMod val="85000"/>
+                  <a:schemeClr val="tx1">
+                    <a:lumMod val="95000"/>
+                    <a:lumOff val="5000"/>
                   </a:schemeClr>
                 </a:solidFill>
                 <a:latin typeface="Cascadia Code NF" pitchFamily="50" charset="0"/>
@@ -6883,8 +7165,9 @@
             <a:r>
               <a:rPr lang="en-US" dirty="0">
                 <a:solidFill>
-                  <a:schemeClr val="bg1">
-                    <a:lumMod val="85000"/>
+                  <a:schemeClr val="tx1">
+                    <a:lumMod val="95000"/>
+                    <a:lumOff val="5000"/>
                   </a:schemeClr>
                 </a:solidFill>
                 <a:latin typeface="Cascadia Code NF" pitchFamily="50" charset="0"/>
@@ -6897,6 +7180,11 @@
         </p:txBody>
       </p:sp>
     </p:spTree>
+    <p:extLst>
+      <p:ext uri="{BB962C8B-B14F-4D97-AF65-F5344CB8AC3E}">
+        <p14:creationId xmlns:p14="http://schemas.microsoft.com/office/powerpoint/2010/main" val="32020069"/>
+      </p:ext>
+    </p:extLst>
   </p:cSld>
   <p:clrMapOvr>
     <a:masterClrMapping/>
@@ -20263,23 +20551,9 @@
 <file path=ppt/slides/slide36.xml><?xml version="1.0" encoding="utf-8"?>
 <p:sld xmlns:a="http://schemas.openxmlformats.org/drawingml/2006/main" xmlns:r="http://schemas.openxmlformats.org/officeDocument/2006/relationships" xmlns:p="http://schemas.openxmlformats.org/presentationml/2006/main">
   <p:cSld>
-    <p:bg>
-      <p:bgPr>
-        <a:solidFill>
-          <a:srgbClr val="0C0C0C"/>
-        </a:solidFill>
-        <a:effectLst/>
-      </p:bgPr>
-    </p:bg>
     <p:spTree>
       <p:nvGrpSpPr>
-        <p:cNvPr id="1" name="">
-          <a:extLst>
-            <a:ext uri="{FF2B5EF4-FFF2-40B4-BE49-F238E27FC236}">
-              <a16:creationId xmlns:a16="http://schemas.microsoft.com/office/drawing/2014/main" id="{E9266DA0-9E88-2B61-A14C-981001959880}"/>
-            </a:ext>
-          </a:extLst>
-        </p:cNvPr>
+        <p:cNvPr id="1" name=""/>
         <p:cNvGrpSpPr/>
         <p:nvPr/>
       </p:nvGrpSpPr>
@@ -20293,10 +20567,10 @@
       </p:grpSpPr>
       <p:sp>
         <p:nvSpPr>
-          <p:cNvPr id="4" name="Text 2">
+          <p:cNvPr id="3" name="Text 2">
             <a:extLst>
               <a:ext uri="{FF2B5EF4-FFF2-40B4-BE49-F238E27FC236}">
-                <a16:creationId xmlns:a16="http://schemas.microsoft.com/office/drawing/2014/main" id="{9AA07FA8-4CA1-BF85-BD19-4998B6EE63F9}"/>
+                <a16:creationId xmlns:a16="http://schemas.microsoft.com/office/drawing/2014/main" id="{48D92EEC-F99D-6E3A-015E-51DCF972D104}"/>
               </a:ext>
             </a:extLst>
           </p:cNvPr>
@@ -20324,7 +20598,10 @@
             <a:r>
               <a:rPr lang="en-US" sz="3300" i="1" dirty="0">
                 <a:solidFill>
-                  <a:srgbClr val="FAFAF9"/>
+                  <a:schemeClr val="tx1">
+                    <a:lumMod val="95000"/>
+                    <a:lumOff val="5000"/>
+                  </a:schemeClr>
                 </a:solidFill>
                 <a:latin typeface="Instrument Serif" pitchFamily="34" charset="0"/>
                 <a:ea typeface="Instrument Serif" pitchFamily="34" charset="-122"/>
@@ -20332,16 +20609,23 @@
               </a:rPr>
               <a:t>Prefer events over shared state</a:t>
             </a:r>
-            <a:endParaRPr lang="en-US" sz="3300" dirty="0"/>
+            <a:endParaRPr lang="en-US" sz="3300" dirty="0">
+              <a:solidFill>
+                <a:schemeClr val="tx1">
+                  <a:lumMod val="95000"/>
+                  <a:lumOff val="5000"/>
+                </a:schemeClr>
+              </a:solidFill>
+            </a:endParaRPr>
           </a:p>
         </p:txBody>
       </p:sp>
       <p:sp>
         <p:nvSpPr>
-          <p:cNvPr id="9" name="Text 6">
+          <p:cNvPr id="5" name="Text 6">
             <a:extLst>
               <a:ext uri="{FF2B5EF4-FFF2-40B4-BE49-F238E27FC236}">
-                <a16:creationId xmlns:a16="http://schemas.microsoft.com/office/drawing/2014/main" id="{74D97750-5AE7-6359-54C3-EED46048AEDD}"/>
+                <a16:creationId xmlns:a16="http://schemas.microsoft.com/office/drawing/2014/main" id="{F96AB674-C4AE-79FF-80B1-8B452266F247}"/>
               </a:ext>
             </a:extLst>
           </p:cNvPr>
@@ -20374,7 +20658,10 @@
             <a:r>
               <a:rPr lang="en-US" sz="2400" dirty="0">
                 <a:solidFill>
-                  <a:srgbClr val="FAFAF9"/>
+                  <a:schemeClr val="tx1">
+                    <a:lumMod val="95000"/>
+                    <a:lumOff val="5000"/>
+                  </a:schemeClr>
                 </a:solidFill>
                 <a:latin typeface="DM Sans" pitchFamily="34" charset="0"/>
                 <a:ea typeface="DM Sans" pitchFamily="34" charset="-122"/>
@@ -20382,7 +20669,14 @@
               </a:rPr>
               <a:t>No direct cross-module imports</a:t>
             </a:r>
-            <a:endParaRPr lang="en-US" sz="2400" dirty="0"/>
+            <a:endParaRPr lang="en-US" sz="2400" dirty="0">
+              <a:solidFill>
+                <a:schemeClr val="tx1">
+                  <a:lumMod val="95000"/>
+                  <a:lumOff val="5000"/>
+                </a:schemeClr>
+              </a:solidFill>
+            </a:endParaRPr>
           </a:p>
           <a:p>
             <a:pPr marL="342900" indent="-342900">
@@ -20396,7 +20690,10 @@
             <a:r>
               <a:rPr lang="en-US" sz="2400" dirty="0">
                 <a:solidFill>
-                  <a:srgbClr val="FAFAF9"/>
+                  <a:schemeClr val="tx1">
+                    <a:lumMod val="95000"/>
+                    <a:lumOff val="5000"/>
+                  </a:schemeClr>
                 </a:solidFill>
                 <a:latin typeface="DM Sans" pitchFamily="34" charset="0"/>
                 <a:ea typeface="DM Sans" pitchFamily="34" charset="-122"/>
@@ -20404,7 +20701,14 @@
               </a:rPr>
               <a:t>Shell stays the only router owner</a:t>
             </a:r>
-            <a:endParaRPr lang="en-US" sz="2400" dirty="0"/>
+            <a:endParaRPr lang="en-US" sz="2400" dirty="0">
+              <a:solidFill>
+                <a:schemeClr val="tx1">
+                  <a:lumMod val="95000"/>
+                  <a:lumOff val="5000"/>
+                </a:schemeClr>
+              </a:solidFill>
+            </a:endParaRPr>
           </a:p>
           <a:p>
             <a:pPr marL="342900" indent="-342900">
@@ -20418,7 +20722,10 @@
             <a:r>
               <a:rPr lang="en-US" sz="2400" dirty="0">
                 <a:solidFill>
-                  <a:srgbClr val="FAFAF9"/>
+                  <a:schemeClr val="tx1">
+                    <a:lumMod val="95000"/>
+                    <a:lumOff val="5000"/>
+                  </a:schemeClr>
                 </a:solidFill>
                 <a:latin typeface="DM Sans" pitchFamily="34" charset="0"/>
                 <a:ea typeface="DM Sans" pitchFamily="34" charset="-122"/>
@@ -20426,7 +20733,14 @@
               </a:rPr>
               <a:t>Works across deployments when the event contract stays compatible</a:t>
             </a:r>
-            <a:endParaRPr lang="en-US" sz="2400" dirty="0"/>
+            <a:endParaRPr lang="en-US" sz="2400" dirty="0">
+              <a:solidFill>
+                <a:schemeClr val="tx1">
+                  <a:lumMod val="95000"/>
+                  <a:lumOff val="5000"/>
+                </a:schemeClr>
+              </a:solidFill>
+            </a:endParaRPr>
           </a:p>
           <a:p>
             <a:pPr marL="342900" indent="-342900">
@@ -20440,7 +20754,10 @@
             <a:r>
               <a:rPr lang="en-US" sz="2400" dirty="0">
                 <a:solidFill>
-                  <a:srgbClr val="FAFAF9"/>
+                  <a:schemeClr val="tx1">
+                    <a:lumMod val="95000"/>
+                    <a:lumOff val="5000"/>
+                  </a:schemeClr>
                 </a:solidFill>
                 <a:latin typeface="DM Sans" pitchFamily="34" charset="0"/>
                 <a:ea typeface="DM Sans" pitchFamily="34" charset="-122"/>
@@ -20448,7 +20765,14 @@
               </a:rPr>
               <a:t>Framework-agnostic (React, Vue, Svelte)</a:t>
             </a:r>
-            <a:endParaRPr lang="en-US" sz="2400" dirty="0"/>
+            <a:endParaRPr lang="en-US" sz="2400" dirty="0">
+              <a:solidFill>
+                <a:schemeClr val="tx1">
+                  <a:lumMod val="95000"/>
+                  <a:lumOff val="5000"/>
+                </a:schemeClr>
+              </a:solidFill>
+            </a:endParaRPr>
           </a:p>
           <a:p>
             <a:pPr marL="342900" indent="-342900">
@@ -20462,7 +20786,10 @@
             <a:r>
               <a:rPr lang="en-US" sz="2400" dirty="0">
                 <a:solidFill>
-                  <a:srgbClr val="FAFAF9"/>
+                  <a:schemeClr val="tx1">
+                    <a:lumMod val="95000"/>
+                    <a:lumOff val="5000"/>
+                  </a:schemeClr>
                 </a:solidFill>
                 <a:latin typeface="DM Sans" pitchFamily="34" charset="0"/>
                 <a:ea typeface="DM Sans" pitchFamily="34" charset="-122"/>
@@ -20470,14 +20797,21 @@
               </a:rPr>
               <a:t>Typed via WindowEventMap augmentation</a:t>
             </a:r>
-            <a:endParaRPr lang="en-US" sz="2400" dirty="0"/>
+            <a:endParaRPr lang="en-US" sz="2400" dirty="0">
+              <a:solidFill>
+                <a:schemeClr val="tx1">
+                  <a:lumMod val="95000"/>
+                  <a:lumOff val="5000"/>
+                </a:schemeClr>
+              </a:solidFill>
+            </a:endParaRPr>
           </a:p>
         </p:txBody>
       </p:sp>
     </p:spTree>
     <p:extLst>
       <p:ext uri="{BB962C8B-B14F-4D97-AF65-F5344CB8AC3E}">
-        <p14:creationId xmlns:p14="http://schemas.microsoft.com/office/powerpoint/2010/main" val="996275403"/>
+        <p14:creationId xmlns:p14="http://schemas.microsoft.com/office/powerpoint/2010/main" val="2583238171"/>
       </p:ext>
     </p:extLst>
   </p:cSld>
@@ -20489,15 +20823,892 @@
 
 <file path=ppt/slides/slide37.xml><?xml version="1.0" encoding="utf-8"?>
 <p:sld xmlns:a="http://schemas.openxmlformats.org/drawingml/2006/main" xmlns:r="http://schemas.openxmlformats.org/officeDocument/2006/relationships" xmlns:p="http://schemas.openxmlformats.org/presentationml/2006/main">
-  <p:cSld name="Slide 12">
-    <p:bg>
-      <p:bgPr>
-        <a:solidFill>
-          <a:srgbClr val="0C0C0C"/>
-        </a:solidFill>
-        <a:effectLst/>
-      </p:bgPr>
-    </p:bg>
+  <p:cSld>
+    <p:spTree>
+      <p:nvGrpSpPr>
+        <p:cNvPr id="1" name=""/>
+        <p:cNvGrpSpPr/>
+        <p:nvPr/>
+      </p:nvGrpSpPr>
+      <p:grpSpPr>
+        <a:xfrm>
+          <a:off x="0" y="0"/>
+          <a:ext cx="0" cy="0"/>
+          <a:chOff x="0" y="0"/>
+          <a:chExt cx="0" cy="0"/>
+        </a:xfrm>
+      </p:grpSpPr>
+      <p:graphicFrame>
+        <p:nvGraphicFramePr>
+          <p:cNvPr id="2" name="Table 1">
+            <a:extLst>
+              <a:ext uri="{FF2B5EF4-FFF2-40B4-BE49-F238E27FC236}">
+                <a16:creationId xmlns:a16="http://schemas.microsoft.com/office/drawing/2014/main" id="{46D2C31A-9631-8861-A387-D11C77608896}"/>
+              </a:ext>
+            </a:extLst>
+          </p:cNvPr>
+          <p:cNvGraphicFramePr>
+            <a:graphicFrameLocks noGrp="1"/>
+          </p:cNvGraphicFramePr>
+          <p:nvPr>
+            <p:extLst>
+              <p:ext uri="{D42A27DB-BD31-4B8C-83A1-F6EECF244321}">
+                <p14:modId xmlns:p14="http://schemas.microsoft.com/office/powerpoint/2010/main" val="780093546"/>
+              </p:ext>
+            </p:extLst>
+          </p:nvPr>
+        </p:nvGraphicFramePr>
+        <p:xfrm>
+          <a:off x="362857" y="1320800"/>
+          <a:ext cx="11654972" cy="5455967"/>
+        </p:xfrm>
+        <a:graphic>
+          <a:graphicData uri="http://schemas.openxmlformats.org/drawingml/2006/table">
+            <a:tbl>
+              <a:tblPr/>
+              <a:tblGrid>
+                <a:gridCol w="3178629">
+                  <a:extLst>
+                    <a:ext uri="{9D8B030D-6E8A-4147-A177-3AD203B41FA5}">
+                      <a16:colId xmlns:a16="http://schemas.microsoft.com/office/drawing/2014/main" val="607345058"/>
+                    </a:ext>
+                  </a:extLst>
+                </a:gridCol>
+                <a:gridCol w="2975428">
+                  <a:extLst>
+                    <a:ext uri="{9D8B030D-6E8A-4147-A177-3AD203B41FA5}">
+                      <a16:colId xmlns:a16="http://schemas.microsoft.com/office/drawing/2014/main" val="2182254365"/>
+                    </a:ext>
+                  </a:extLst>
+                </a:gridCol>
+                <a:gridCol w="5500915">
+                  <a:extLst>
+                    <a:ext uri="{9D8B030D-6E8A-4147-A177-3AD203B41FA5}">
+                      <a16:colId xmlns:a16="http://schemas.microsoft.com/office/drawing/2014/main" val="3397293518"/>
+                    </a:ext>
+                  </a:extLst>
+                </a:gridCol>
+              </a:tblGrid>
+              <a:tr h="416364">
+                <a:tc>
+                  <a:txBody>
+                    <a:bodyPr/>
+                    <a:lstStyle/>
+                    <a:p>
+                      <a:pPr algn="l">
+                        <a:buNone/>
+                      </a:pPr>
+                      <a:r>
+                        <a:rPr lang="en-US" sz="2400" b="0" i="0">
+                          <a:solidFill>
+                            <a:srgbClr val="3B3B3B"/>
+                          </a:solidFill>
+                          <a:effectLst/>
+                          <a:latin typeface="Cascadia Code" panose="020B0609020000020004" pitchFamily="49" charset="0"/>
+                          <a:cs typeface="Cascadia Code" panose="020B0609020000020004" pitchFamily="49" charset="0"/>
+                        </a:rPr>
+                        <a:t>Event</a:t>
+                      </a:r>
+                    </a:p>
+                  </a:txBody>
+                  <a:tcPr marL="76200" marR="76200" marT="38100" marB="38100" anchor="ctr">
+                    <a:lnL>
+                      <a:noFill/>
+                    </a:lnL>
+                    <a:lnR>
+                      <a:noFill/>
+                    </a:lnR>
+                    <a:lnT>
+                      <a:noFill/>
+                    </a:lnT>
+                    <a:lnB>
+                      <a:noFill/>
+                    </a:lnB>
+                    <a:noFill/>
+                  </a:tcPr>
+                </a:tc>
+                <a:tc>
+                  <a:txBody>
+                    <a:bodyPr/>
+                    <a:lstStyle/>
+                    <a:p>
+                      <a:pPr algn="l">
+                        <a:buNone/>
+                      </a:pPr>
+                      <a:r>
+                        <a:rPr lang="en-US" sz="2400" b="0" i="0">
+                          <a:solidFill>
+                            <a:srgbClr val="3B3B3B"/>
+                          </a:solidFill>
+                          <a:effectLst/>
+                          <a:latin typeface="Cascadia Code" panose="020B0609020000020004" pitchFamily="49" charset="0"/>
+                          <a:cs typeface="Cascadia Code" panose="020B0609020000020004" pitchFamily="49" charset="0"/>
+                        </a:rPr>
+                        <a:t>Who broadcasts</a:t>
+                      </a:r>
+                    </a:p>
+                  </a:txBody>
+                  <a:tcPr marL="76200" marR="76200" marT="38100" marB="38100" anchor="ctr">
+                    <a:lnL>
+                      <a:noFill/>
+                    </a:lnL>
+                    <a:lnR>
+                      <a:noFill/>
+                    </a:lnR>
+                    <a:lnT>
+                      <a:noFill/>
+                    </a:lnT>
+                    <a:lnB>
+                      <a:noFill/>
+                    </a:lnB>
+                    <a:noFill/>
+                  </a:tcPr>
+                </a:tc>
+                <a:tc>
+                  <a:txBody>
+                    <a:bodyPr/>
+                    <a:lstStyle/>
+                    <a:p>
+                      <a:pPr algn="l">
+                        <a:buNone/>
+                      </a:pPr>
+                      <a:r>
+                        <a:rPr lang="en-US" sz="2400" b="0" i="0">
+                          <a:solidFill>
+                            <a:srgbClr val="3B3B3B"/>
+                          </a:solidFill>
+                          <a:effectLst/>
+                          <a:latin typeface="Cascadia Code" panose="020B0609020000020004" pitchFamily="49" charset="0"/>
+                          <a:cs typeface="Cascadia Code" panose="020B0609020000020004" pitchFamily="49" charset="0"/>
+                        </a:rPr>
+                        <a:t>Why</a:t>
+                      </a:r>
+                    </a:p>
+                  </a:txBody>
+                  <a:tcPr marL="76200" marR="76200" marT="38100" marB="38100" anchor="ctr">
+                    <a:lnL>
+                      <a:noFill/>
+                    </a:lnL>
+                    <a:lnR>
+                      <a:noFill/>
+                    </a:lnR>
+                    <a:lnT>
+                      <a:noFill/>
+                    </a:lnT>
+                    <a:lnB>
+                      <a:noFill/>
+                    </a:lnB>
+                    <a:noFill/>
+                  </a:tcPr>
+                </a:tc>
+                <a:extLst>
+                  <a:ext uri="{0D108BD9-81ED-4DB2-BD59-A6C34878D82A}">
+                    <a16:rowId xmlns:a16="http://schemas.microsoft.com/office/drawing/2014/main" val="3074802040"/>
+                  </a:ext>
+                </a:extLst>
+              </a:tr>
+              <a:tr h="735957">
+                <a:tc>
+                  <a:txBody>
+                    <a:bodyPr/>
+                    <a:lstStyle/>
+                    <a:p>
+                      <a:pPr algn="l">
+                        <a:buNone/>
+                      </a:pPr>
+                      <a:r>
+                        <a:rPr lang="en-US" sz="2400" b="0" i="0">
+                          <a:solidFill>
+                            <a:srgbClr val="3B3B3B"/>
+                          </a:solidFill>
+                          <a:effectLst/>
+                          <a:latin typeface="Cascadia Code" panose="020B0609020000020004" pitchFamily="49" charset="0"/>
+                          <a:cs typeface="Cascadia Code" panose="020B0609020000020004" pitchFamily="49" charset="0"/>
+                        </a:rPr>
+                        <a:t>themeChange</a:t>
+                      </a:r>
+                    </a:p>
+                  </a:txBody>
+                  <a:tcPr marL="76200" marR="76200" marT="38100" marB="38100" anchor="ctr">
+                    <a:lnL>
+                      <a:noFill/>
+                    </a:lnL>
+                    <a:lnR>
+                      <a:noFill/>
+                    </a:lnR>
+                    <a:lnT>
+                      <a:noFill/>
+                    </a:lnT>
+                    <a:lnB>
+                      <a:noFill/>
+                    </a:lnB>
+                    <a:noFill/>
+                  </a:tcPr>
+                </a:tc>
+                <a:tc>
+                  <a:txBody>
+                    <a:bodyPr/>
+                    <a:lstStyle/>
+                    <a:p>
+                      <a:pPr algn="l">
+                        <a:buNone/>
+                      </a:pPr>
+                      <a:r>
+                        <a:rPr lang="en-US" sz="2400" b="1" i="0">
+                          <a:solidFill>
+                            <a:srgbClr val="3B3B3B"/>
+                          </a:solidFill>
+                          <a:effectLst/>
+                          <a:latin typeface="Cascadia Code" panose="020B0609020000020004" pitchFamily="49" charset="0"/>
+                          <a:cs typeface="Cascadia Code" panose="020B0609020000020004" pitchFamily="49" charset="0"/>
+                        </a:rPr>
+                        <a:t>shell only</a:t>
+                      </a:r>
+                      <a:endParaRPr lang="en-US" sz="2400" b="0" i="0">
+                        <a:solidFill>
+                          <a:srgbClr val="3B3B3B"/>
+                        </a:solidFill>
+                        <a:effectLst/>
+                        <a:latin typeface="Cascadia Code" panose="020B0609020000020004" pitchFamily="49" charset="0"/>
+                        <a:cs typeface="Cascadia Code" panose="020B0609020000020004" pitchFamily="49" charset="0"/>
+                      </a:endParaRPr>
+                    </a:p>
+                  </a:txBody>
+                  <a:tcPr marL="76200" marR="76200" marT="38100" marB="38100" anchor="ctr">
+                    <a:lnL>
+                      <a:noFill/>
+                    </a:lnL>
+                    <a:lnR>
+                      <a:noFill/>
+                    </a:lnR>
+                    <a:lnT>
+                      <a:noFill/>
+                    </a:lnT>
+                    <a:lnB>
+                      <a:noFill/>
+                    </a:lnB>
+                    <a:noFill/>
+                  </a:tcPr>
+                </a:tc>
+                <a:tc>
+                  <a:txBody>
+                    <a:bodyPr/>
+                    <a:lstStyle/>
+                    <a:p>
+                      <a:pPr algn="l">
+                        <a:buNone/>
+                      </a:pPr>
+                      <a:r>
+                        <a:rPr lang="en-US" sz="2400" b="0" i="0">
+                          <a:solidFill>
+                            <a:srgbClr val="3B3B3B"/>
+                          </a:solidFill>
+                          <a:effectLst/>
+                          <a:latin typeface="Cascadia Code" panose="020B0609020000020004" pitchFamily="49" charset="0"/>
+                          <a:cs typeface="Cascadia Code" panose="020B0609020000020004" pitchFamily="49" charset="0"/>
+                        </a:rPr>
+                        <a:t>The shell owns the theme</a:t>
+                      </a:r>
+                    </a:p>
+                  </a:txBody>
+                  <a:tcPr marL="76200" marR="76200" marT="38100" marB="38100" anchor="ctr">
+                    <a:lnL>
+                      <a:noFill/>
+                    </a:lnL>
+                    <a:lnR>
+                      <a:noFill/>
+                    </a:lnR>
+                    <a:lnT>
+                      <a:noFill/>
+                    </a:lnT>
+                    <a:lnB>
+                      <a:noFill/>
+                    </a:lnB>
+                    <a:noFill/>
+                  </a:tcPr>
+                </a:tc>
+                <a:extLst>
+                  <a:ext uri="{0D108BD9-81ED-4DB2-BD59-A6C34878D82A}">
+                    <a16:rowId xmlns:a16="http://schemas.microsoft.com/office/drawing/2014/main" val="240654752"/>
+                  </a:ext>
+                </a:extLst>
+              </a:tr>
+              <a:tr h="735957">
+                <a:tc>
+                  <a:txBody>
+                    <a:bodyPr/>
+                    <a:lstStyle/>
+                    <a:p>
+                      <a:pPr algn="l">
+                        <a:buNone/>
+                      </a:pPr>
+                      <a:r>
+                        <a:rPr lang="en-US" sz="2400" b="0" i="0">
+                          <a:solidFill>
+                            <a:srgbClr val="3B3B3B"/>
+                          </a:solidFill>
+                          <a:effectLst/>
+                          <a:latin typeface="Cascadia Code" panose="020B0609020000020004" pitchFamily="49" charset="0"/>
+                          <a:cs typeface="Cascadia Code" panose="020B0609020000020004" pitchFamily="49" charset="0"/>
+                        </a:rPr>
+                        <a:t>moduleChange</a:t>
+                      </a:r>
+                    </a:p>
+                  </a:txBody>
+                  <a:tcPr marL="76200" marR="76200" marT="38100" marB="38100" anchor="ctr">
+                    <a:lnL>
+                      <a:noFill/>
+                    </a:lnL>
+                    <a:lnR>
+                      <a:noFill/>
+                    </a:lnR>
+                    <a:lnT>
+                      <a:noFill/>
+                    </a:lnT>
+                    <a:lnB>
+                      <a:noFill/>
+                    </a:lnB>
+                    <a:noFill/>
+                  </a:tcPr>
+                </a:tc>
+                <a:tc>
+                  <a:txBody>
+                    <a:bodyPr/>
+                    <a:lstStyle/>
+                    <a:p>
+                      <a:pPr algn="l">
+                        <a:buNone/>
+                      </a:pPr>
+                      <a:r>
+                        <a:rPr lang="en-US" sz="2400" b="1" i="0">
+                          <a:solidFill>
+                            <a:srgbClr val="3B3B3B"/>
+                          </a:solidFill>
+                          <a:effectLst/>
+                          <a:latin typeface="Cascadia Code" panose="020B0609020000020004" pitchFamily="49" charset="0"/>
+                          <a:cs typeface="Cascadia Code" panose="020B0609020000020004" pitchFamily="49" charset="0"/>
+                        </a:rPr>
+                        <a:t>shell only</a:t>
+                      </a:r>
+                      <a:endParaRPr lang="en-US" sz="2400" b="0" i="0">
+                        <a:solidFill>
+                          <a:srgbClr val="3B3B3B"/>
+                        </a:solidFill>
+                        <a:effectLst/>
+                        <a:latin typeface="Cascadia Code" panose="020B0609020000020004" pitchFamily="49" charset="0"/>
+                        <a:cs typeface="Cascadia Code" panose="020B0609020000020004" pitchFamily="49" charset="0"/>
+                      </a:endParaRPr>
+                    </a:p>
+                  </a:txBody>
+                  <a:tcPr marL="76200" marR="76200" marT="38100" marB="38100" anchor="ctr">
+                    <a:lnL>
+                      <a:noFill/>
+                    </a:lnL>
+                    <a:lnR>
+                      <a:noFill/>
+                    </a:lnR>
+                    <a:lnT>
+                      <a:noFill/>
+                    </a:lnT>
+                    <a:lnB>
+                      <a:noFill/>
+                    </a:lnB>
+                    <a:noFill/>
+                  </a:tcPr>
+                </a:tc>
+                <a:tc>
+                  <a:txBody>
+                    <a:bodyPr/>
+                    <a:lstStyle/>
+                    <a:p>
+                      <a:pPr algn="l">
+                        <a:buNone/>
+                      </a:pPr>
+                      <a:r>
+                        <a:rPr lang="en-US" sz="2400" b="0" i="0">
+                          <a:solidFill>
+                            <a:srgbClr val="3B3B3B"/>
+                          </a:solidFill>
+                          <a:effectLst/>
+                          <a:latin typeface="Cascadia Code" panose="020B0609020000020004" pitchFamily="49" charset="0"/>
+                          <a:cs typeface="Cascadia Code" panose="020B0609020000020004" pitchFamily="49" charset="0"/>
+                        </a:rPr>
+                        <a:t>The shell owns the router</a:t>
+                      </a:r>
+                    </a:p>
+                  </a:txBody>
+                  <a:tcPr marL="76200" marR="76200" marT="38100" marB="38100" anchor="ctr">
+                    <a:lnL>
+                      <a:noFill/>
+                    </a:lnL>
+                    <a:lnR>
+                      <a:noFill/>
+                    </a:lnR>
+                    <a:lnT>
+                      <a:noFill/>
+                    </a:lnT>
+                    <a:lnB>
+                      <a:noFill/>
+                    </a:lnB>
+                    <a:noFill/>
+                  </a:tcPr>
+                </a:tc>
+                <a:extLst>
+                  <a:ext uri="{0D108BD9-81ED-4DB2-BD59-A6C34878D82A}">
+                    <a16:rowId xmlns:a16="http://schemas.microsoft.com/office/drawing/2014/main" val="1750626137"/>
+                  </a:ext>
+                </a:extLst>
+              </a:tr>
+              <a:tr h="1069222">
+                <a:tc>
+                  <a:txBody>
+                    <a:bodyPr/>
+                    <a:lstStyle/>
+                    <a:p>
+                      <a:pPr algn="l">
+                        <a:buNone/>
+                      </a:pPr>
+                      <a:r>
+                        <a:rPr lang="en-US" sz="2400" b="0" i="0" dirty="0" err="1">
+                          <a:solidFill>
+                            <a:srgbClr val="3B3B3B"/>
+                          </a:solidFill>
+                          <a:effectLst/>
+                          <a:latin typeface="Cascadia Code" panose="020B0609020000020004" pitchFamily="49" charset="0"/>
+                          <a:cs typeface="Cascadia Code" panose="020B0609020000020004" pitchFamily="49" charset="0"/>
+                        </a:rPr>
+                        <a:t>addPrescription</a:t>
+                      </a:r>
+                      <a:endParaRPr lang="en-US" sz="2400" b="0" i="0" dirty="0">
+                        <a:solidFill>
+                          <a:srgbClr val="3B3B3B"/>
+                        </a:solidFill>
+                        <a:effectLst/>
+                        <a:latin typeface="Cascadia Code" panose="020B0609020000020004" pitchFamily="49" charset="0"/>
+                        <a:cs typeface="Cascadia Code" panose="020B0609020000020004" pitchFamily="49" charset="0"/>
+                      </a:endParaRPr>
+                    </a:p>
+                  </a:txBody>
+                  <a:tcPr marL="76200" marR="76200" marT="38100" marB="38100" anchor="ctr">
+                    <a:lnL>
+                      <a:noFill/>
+                    </a:lnL>
+                    <a:lnR>
+                      <a:noFill/>
+                    </a:lnR>
+                    <a:lnT>
+                      <a:noFill/>
+                    </a:lnT>
+                    <a:lnB>
+                      <a:noFill/>
+                    </a:lnB>
+                    <a:noFill/>
+                  </a:tcPr>
+                </a:tc>
+                <a:tc>
+                  <a:txBody>
+                    <a:bodyPr/>
+                    <a:lstStyle/>
+                    <a:p>
+                      <a:pPr algn="l">
+                        <a:buNone/>
+                      </a:pPr>
+                      <a:r>
+                        <a:rPr lang="en-US" sz="2400" b="1" i="0" dirty="0">
+                          <a:solidFill>
+                            <a:srgbClr val="3B3B3B"/>
+                          </a:solidFill>
+                          <a:effectLst/>
+                          <a:latin typeface="Cascadia Code" panose="020B0609020000020004" pitchFamily="49" charset="0"/>
+                          <a:cs typeface="Cascadia Code" panose="020B0609020000020004" pitchFamily="49" charset="0"/>
+                        </a:rPr>
+                        <a:t>records</a:t>
+                      </a:r>
+                      <a:endParaRPr lang="en-US" sz="2400" b="0" i="0" dirty="0">
+                        <a:solidFill>
+                          <a:srgbClr val="3B3B3B"/>
+                        </a:solidFill>
+                        <a:effectLst/>
+                        <a:latin typeface="Cascadia Code" panose="020B0609020000020004" pitchFamily="49" charset="0"/>
+                        <a:cs typeface="Cascadia Code" panose="020B0609020000020004" pitchFamily="49" charset="0"/>
+                      </a:endParaRPr>
+                    </a:p>
+                  </a:txBody>
+                  <a:tcPr marL="76200" marR="76200" marT="38100" marB="38100" anchor="ctr">
+                    <a:lnL>
+                      <a:noFill/>
+                    </a:lnL>
+                    <a:lnR>
+                      <a:noFill/>
+                    </a:lnR>
+                    <a:lnT>
+                      <a:noFill/>
+                    </a:lnT>
+                    <a:lnB>
+                      <a:noFill/>
+                    </a:lnB>
+                    <a:noFill/>
+                  </a:tcPr>
+                </a:tc>
+                <a:tc>
+                  <a:txBody>
+                    <a:bodyPr/>
+                    <a:lstStyle/>
+                    <a:p>
+                      <a:pPr algn="l">
+                        <a:buNone/>
+                      </a:pPr>
+                      <a:r>
+                        <a:rPr lang="en-US" sz="2400" b="0" i="0">
+                          <a:solidFill>
+                            <a:srgbClr val="3B3B3B"/>
+                          </a:solidFill>
+                          <a:effectLst/>
+                          <a:latin typeface="Cascadia Code" panose="020B0609020000020004" pitchFamily="49" charset="0"/>
+                          <a:cs typeface="Cascadia Code" panose="020B0609020000020004" pitchFamily="49" charset="0"/>
+                        </a:rPr>
+                        <a:t>Records owns "a prescription was requested"</a:t>
+                      </a:r>
+                    </a:p>
+                  </a:txBody>
+                  <a:tcPr marL="76200" marR="76200" marT="38100" marB="38100" anchor="ctr">
+                    <a:lnL>
+                      <a:noFill/>
+                    </a:lnL>
+                    <a:lnR>
+                      <a:noFill/>
+                    </a:lnR>
+                    <a:lnT>
+                      <a:noFill/>
+                    </a:lnT>
+                    <a:lnB>
+                      <a:noFill/>
+                    </a:lnB>
+                    <a:noFill/>
+                  </a:tcPr>
+                </a:tc>
+                <a:extLst>
+                  <a:ext uri="{0D108BD9-81ED-4DB2-BD59-A6C34878D82A}">
+                    <a16:rowId xmlns:a16="http://schemas.microsoft.com/office/drawing/2014/main" val="1485486134"/>
+                  </a:ext>
+                </a:extLst>
+              </a:tr>
+              <a:tr h="1402485">
+                <a:tc>
+                  <a:txBody>
+                    <a:bodyPr/>
+                    <a:lstStyle/>
+                    <a:p>
+                      <a:pPr algn="l">
+                        <a:buNone/>
+                      </a:pPr>
+                      <a:r>
+                        <a:rPr lang="en-US" sz="2400" b="0" i="0">
+                          <a:solidFill>
+                            <a:srgbClr val="3B3B3B"/>
+                          </a:solidFill>
+                          <a:effectLst/>
+                          <a:latin typeface="Cascadia Code" panose="020B0609020000020004" pitchFamily="49" charset="0"/>
+                          <a:cs typeface="Cascadia Code" panose="020B0609020000020004" pitchFamily="49" charset="0"/>
+                        </a:rPr>
+                        <a:t>showNotification</a:t>
+                      </a:r>
+                    </a:p>
+                  </a:txBody>
+                  <a:tcPr marL="76200" marR="76200" marT="38100" marB="38100" anchor="ctr">
+                    <a:lnL>
+                      <a:noFill/>
+                    </a:lnL>
+                    <a:lnR>
+                      <a:noFill/>
+                    </a:lnR>
+                    <a:lnT>
+                      <a:noFill/>
+                    </a:lnT>
+                    <a:lnB>
+                      <a:noFill/>
+                    </a:lnB>
+                    <a:noFill/>
+                  </a:tcPr>
+                </a:tc>
+                <a:tc>
+                  <a:txBody>
+                    <a:bodyPr/>
+                    <a:lstStyle/>
+                    <a:p>
+                      <a:pPr algn="l">
+                        <a:buNone/>
+                      </a:pPr>
+                      <a:r>
+                        <a:rPr lang="en-US" sz="2400" b="1" i="0">
+                          <a:solidFill>
+                            <a:srgbClr val="3B3B3B"/>
+                          </a:solidFill>
+                          <a:effectLst/>
+                          <a:latin typeface="Cascadia Code" panose="020B0609020000020004" pitchFamily="49" charset="0"/>
+                          <a:cs typeface="Cascadia Code" panose="020B0609020000020004" pitchFamily="49" charset="0"/>
+                        </a:rPr>
+                        <a:t>any module</a:t>
+                      </a:r>
+                      <a:endParaRPr lang="en-US" sz="2400" b="0" i="0">
+                        <a:solidFill>
+                          <a:srgbClr val="3B3B3B"/>
+                        </a:solidFill>
+                        <a:effectLst/>
+                        <a:latin typeface="Cascadia Code" panose="020B0609020000020004" pitchFamily="49" charset="0"/>
+                        <a:cs typeface="Cascadia Code" panose="020B0609020000020004" pitchFamily="49" charset="0"/>
+                      </a:endParaRPr>
+                    </a:p>
+                  </a:txBody>
+                  <a:tcPr marL="76200" marR="76200" marT="38100" marB="38100" anchor="ctr">
+                    <a:lnL>
+                      <a:noFill/>
+                    </a:lnL>
+                    <a:lnR>
+                      <a:noFill/>
+                    </a:lnR>
+                    <a:lnT>
+                      <a:noFill/>
+                    </a:lnT>
+                    <a:lnB>
+                      <a:noFill/>
+                    </a:lnB>
+                    <a:noFill/>
+                  </a:tcPr>
+                </a:tc>
+                <a:tc>
+                  <a:txBody>
+                    <a:bodyPr/>
+                    <a:lstStyle/>
+                    <a:p>
+                      <a:pPr algn="l">
+                        <a:buNone/>
+                      </a:pPr>
+                      <a:r>
+                        <a:rPr lang="en-US" sz="2400" b="0" i="0">
+                          <a:solidFill>
+                            <a:srgbClr val="3B3B3B"/>
+                          </a:solidFill>
+                          <a:effectLst/>
+                          <a:latin typeface="Cascadia Code" panose="020B0609020000020004" pitchFamily="49" charset="0"/>
+                          <a:cs typeface="Cascadia Code" panose="020B0609020000020004" pitchFamily="49" charset="0"/>
+                        </a:rPr>
+                        <a:t>Anyone can have something to say; the shell owns the &lt;Toaster /&gt;</a:t>
+                      </a:r>
+                    </a:p>
+                  </a:txBody>
+                  <a:tcPr marL="76200" marR="76200" marT="38100" marB="38100" anchor="ctr">
+                    <a:lnL>
+                      <a:noFill/>
+                    </a:lnL>
+                    <a:lnR>
+                      <a:noFill/>
+                    </a:lnR>
+                    <a:lnT>
+                      <a:noFill/>
+                    </a:lnT>
+                    <a:lnB>
+                      <a:noFill/>
+                    </a:lnB>
+                    <a:noFill/>
+                  </a:tcPr>
+                </a:tc>
+                <a:extLst>
+                  <a:ext uri="{0D108BD9-81ED-4DB2-BD59-A6C34878D82A}">
+                    <a16:rowId xmlns:a16="http://schemas.microsoft.com/office/drawing/2014/main" val="3065737248"/>
+                  </a:ext>
+                </a:extLst>
+              </a:tr>
+              <a:tr h="1070386">
+                <a:tc>
+                  <a:txBody>
+                    <a:bodyPr/>
+                    <a:lstStyle/>
+                    <a:p>
+                      <a:pPr algn="l">
+                        <a:buNone/>
+                      </a:pPr>
+                      <a:r>
+                        <a:rPr lang="en-US" sz="2400" b="0" i="0" dirty="0" err="1">
+                          <a:solidFill>
+                            <a:srgbClr val="3B3B3B"/>
+                          </a:solidFill>
+                          <a:effectLst/>
+                          <a:latin typeface="Cascadia Code" panose="020B0609020000020004" pitchFamily="49" charset="0"/>
+                          <a:cs typeface="Cascadia Code" panose="020B0609020000020004" pitchFamily="49" charset="0"/>
+                        </a:rPr>
+                        <a:t>counterChange</a:t>
+                      </a:r>
+                      <a:endParaRPr lang="en-US" sz="2400" b="0" i="0" dirty="0">
+                        <a:solidFill>
+                          <a:srgbClr val="3B3B3B"/>
+                        </a:solidFill>
+                        <a:effectLst/>
+                        <a:latin typeface="Cascadia Code" panose="020B0609020000020004" pitchFamily="49" charset="0"/>
+                        <a:cs typeface="Cascadia Code" panose="020B0609020000020004" pitchFamily="49" charset="0"/>
+                      </a:endParaRPr>
+                    </a:p>
+                  </a:txBody>
+                  <a:tcPr marL="76200" marR="76200" marT="38100" marB="38100" anchor="ctr">
+                    <a:lnL>
+                      <a:noFill/>
+                    </a:lnL>
+                    <a:lnR>
+                      <a:noFill/>
+                    </a:lnR>
+                    <a:lnT>
+                      <a:noFill/>
+                    </a:lnT>
+                    <a:lnB>
+                      <a:noFill/>
+                    </a:lnB>
+                    <a:noFill/>
+                  </a:tcPr>
+                </a:tc>
+                <a:tc>
+                  <a:txBody>
+                    <a:bodyPr/>
+                    <a:lstStyle/>
+                    <a:p>
+                      <a:pPr algn="l">
+                        <a:buNone/>
+                      </a:pPr>
+                      <a:r>
+                        <a:rPr lang="en-US" sz="2400" b="1" i="0">
+                          <a:solidFill>
+                            <a:srgbClr val="3B3B3B"/>
+                          </a:solidFill>
+                          <a:effectLst/>
+                          <a:latin typeface="Cascadia Code" panose="020B0609020000020004" pitchFamily="49" charset="0"/>
+                          <a:cs typeface="Cascadia Code" panose="020B0609020000020004" pitchFamily="49" charset="0"/>
+                        </a:rPr>
+                        <a:t>any module</a:t>
+                      </a:r>
+                      <a:endParaRPr lang="en-US" sz="2400" b="0" i="0">
+                        <a:solidFill>
+                          <a:srgbClr val="3B3B3B"/>
+                        </a:solidFill>
+                        <a:effectLst/>
+                        <a:latin typeface="Cascadia Code" panose="020B0609020000020004" pitchFamily="49" charset="0"/>
+                        <a:cs typeface="Cascadia Code" panose="020B0609020000020004" pitchFamily="49" charset="0"/>
+                      </a:endParaRPr>
+                    </a:p>
+                  </a:txBody>
+                  <a:tcPr marL="76200" marR="76200" marT="38100" marB="38100" anchor="ctr">
+                    <a:lnL>
+                      <a:noFill/>
+                    </a:lnL>
+                    <a:lnR>
+                      <a:noFill/>
+                    </a:lnR>
+                    <a:lnT>
+                      <a:noFill/>
+                    </a:lnT>
+                    <a:lnB>
+                      <a:noFill/>
+                    </a:lnB>
+                    <a:noFill/>
+                  </a:tcPr>
+                </a:tc>
+                <a:tc>
+                  <a:txBody>
+                    <a:bodyPr/>
+                    <a:lstStyle/>
+                    <a:p>
+                      <a:pPr algn="l">
+                        <a:buNone/>
+                      </a:pPr>
+                      <a:r>
+                        <a:rPr lang="en-US" sz="2400" b="0" i="0" dirty="0">
+                          <a:solidFill>
+                            <a:srgbClr val="3B3B3B"/>
+                          </a:solidFill>
+                          <a:effectLst/>
+                          <a:latin typeface="Cascadia Code" panose="020B0609020000020004" pitchFamily="49" charset="0"/>
+                          <a:cs typeface="Cascadia Code" panose="020B0609020000020004" pitchFamily="49" charset="0"/>
+                        </a:rPr>
+                        <a:t>Nobody owns the counter — it's genuinely peer state</a:t>
+                      </a:r>
+                    </a:p>
+                  </a:txBody>
+                  <a:tcPr marL="76200" marR="76200" marT="38100" marB="38100" anchor="ctr">
+                    <a:lnL>
+                      <a:noFill/>
+                    </a:lnL>
+                    <a:lnR>
+                      <a:noFill/>
+                    </a:lnR>
+                    <a:lnT>
+                      <a:noFill/>
+                    </a:lnT>
+                    <a:lnB>
+                      <a:noFill/>
+                    </a:lnB>
+                    <a:noFill/>
+                  </a:tcPr>
+                </a:tc>
+                <a:extLst>
+                  <a:ext uri="{0D108BD9-81ED-4DB2-BD59-A6C34878D82A}">
+                    <a16:rowId xmlns:a16="http://schemas.microsoft.com/office/drawing/2014/main" val="1091983602"/>
+                  </a:ext>
+                </a:extLst>
+              </a:tr>
+            </a:tbl>
+          </a:graphicData>
+        </a:graphic>
+      </p:graphicFrame>
+      <p:sp>
+        <p:nvSpPr>
+          <p:cNvPr id="4" name="TextBox 3">
+            <a:extLst>
+              <a:ext uri="{FF2B5EF4-FFF2-40B4-BE49-F238E27FC236}">
+                <a16:creationId xmlns:a16="http://schemas.microsoft.com/office/drawing/2014/main" id="{FCBFEC0A-AD33-0E5A-BF45-ABD21D98423F}"/>
+              </a:ext>
+            </a:extLst>
+          </p:cNvPr>
+          <p:cNvSpPr txBox="1"/>
+          <p:nvPr/>
+        </p:nvSpPr>
+        <p:spPr>
+          <a:xfrm>
+            <a:off x="362857" y="231614"/>
+            <a:ext cx="11161486" cy="646331"/>
+          </a:xfrm>
+          <a:prstGeom prst="rect">
+            <a:avLst/>
+          </a:prstGeom>
+          <a:noFill/>
+        </p:spPr>
+        <p:txBody>
+          <a:bodyPr wrap="square">
+            <a:spAutoFit/>
+          </a:bodyPr>
+          <a:lstStyle/>
+          <a:p>
+            <a:r>
+              <a:rPr lang="en-US" sz="3600" i="1" dirty="0"/>
+              <a:t>The ownership rule </a:t>
+            </a:r>
+            <a:endParaRPr lang="en-GB" sz="4800" i="1" dirty="0"/>
+          </a:p>
+        </p:txBody>
+      </p:sp>
+    </p:spTree>
+    <p:extLst>
+      <p:ext uri="{BB962C8B-B14F-4D97-AF65-F5344CB8AC3E}">
+        <p14:creationId xmlns:p14="http://schemas.microsoft.com/office/powerpoint/2010/main" val="3174723160"/>
+      </p:ext>
+    </p:extLst>
+  </p:cSld>
+  <p:clrMapOvr>
+    <a:masterClrMapping/>
+  </p:clrMapOvr>
+</p:sld>
+</file>
+
+<file path=ppt/slides/slide38.xml><?xml version="1.0" encoding="utf-8"?>
+<p:sld xmlns:a="http://schemas.openxmlformats.org/drawingml/2006/main" xmlns:r="http://schemas.openxmlformats.org/officeDocument/2006/relationships" xmlns:p="http://schemas.openxmlformats.org/presentationml/2006/main">
+  <p:cSld>
     <p:spTree>
       <p:nvGrpSpPr>
         <p:cNvPr id="1" name=""/>
@@ -20514,7 +21725,13 @@
       </p:grpSpPr>
       <p:sp>
         <p:nvSpPr>
-          <p:cNvPr id="4" name="Text 2"/>
+          <p:cNvPr id="3" name="Text 2">
+            <a:extLst>
+              <a:ext uri="{FF2B5EF4-FFF2-40B4-BE49-F238E27FC236}">
+                <a16:creationId xmlns:a16="http://schemas.microsoft.com/office/drawing/2014/main" id="{177067D6-BE87-AD69-1C20-9125336CF2E5}"/>
+              </a:ext>
+            </a:extLst>
+          </p:cNvPr>
           <p:cNvSpPr/>
           <p:nvPr/>
         </p:nvSpPr>
@@ -20539,7 +21756,10 @@
             <a:r>
               <a:rPr lang="en-US" sz="3300" i="1" dirty="0">
                 <a:solidFill>
-                  <a:srgbClr val="FAFAF9"/>
+                  <a:schemeClr val="tx1">
+                    <a:lumMod val="95000"/>
+                    <a:lumOff val="5000"/>
+                  </a:schemeClr>
                 </a:solidFill>
                 <a:latin typeface="Instrument Serif" pitchFamily="34" charset="0"/>
                 <a:ea typeface="Instrument Serif" pitchFamily="34" charset="-122"/>
@@ -20547,13 +21767,26 @@
               </a:rPr>
               <a:t>Shell-owned theming across the federation</a:t>
             </a:r>
-            <a:endParaRPr lang="en-US" sz="3300" dirty="0"/>
+            <a:endParaRPr lang="en-US" sz="3300" dirty="0">
+              <a:solidFill>
+                <a:schemeClr val="tx1">
+                  <a:lumMod val="95000"/>
+                  <a:lumOff val="5000"/>
+                </a:schemeClr>
+              </a:solidFill>
+            </a:endParaRPr>
           </a:p>
         </p:txBody>
       </p:sp>
       <p:sp>
         <p:nvSpPr>
-          <p:cNvPr id="8" name="Text 5"/>
+          <p:cNvPr id="5" name="Text 5">
+            <a:extLst>
+              <a:ext uri="{FF2B5EF4-FFF2-40B4-BE49-F238E27FC236}">
+                <a16:creationId xmlns:a16="http://schemas.microsoft.com/office/drawing/2014/main" id="{956EBAC9-BB98-ECDE-8693-BBDC50395DCE}"/>
+              </a:ext>
+            </a:extLst>
+          </p:cNvPr>
           <p:cNvSpPr/>
           <p:nvPr/>
         </p:nvSpPr>
@@ -20581,7 +21814,10 @@
             <a:r>
               <a:rPr lang="en-US" sz="2400" dirty="0">
                 <a:solidFill>
-                  <a:srgbClr val="FAFAF9"/>
+                  <a:schemeClr val="tx1">
+                    <a:lumMod val="95000"/>
+                    <a:lumOff val="5000"/>
+                  </a:schemeClr>
                 </a:solidFill>
                 <a:latin typeface="Cascadia Code NF" pitchFamily="50" charset="0"/>
                 <a:ea typeface="Cascadia Code NF" pitchFamily="50" charset="0"/>
@@ -20589,11 +21825,6 @@
               </a:rPr>
               <a:t>Shell (owns theme)</a:t>
             </a:r>
-            <a:endParaRPr lang="en-US" sz="2400" dirty="0">
-              <a:latin typeface="Cascadia Code NF" pitchFamily="50" charset="0"/>
-              <a:ea typeface="Cascadia Code NF" pitchFamily="50" charset="0"/>
-              <a:cs typeface="Cascadia Code NF" pitchFamily="50" charset="0"/>
-            </a:endParaRPr>
           </a:p>
           <a:p>
             <a:pPr marL="0" indent="0" algn="l">
@@ -20605,7 +21836,10 @@
             <a:r>
               <a:rPr lang="en-US" sz="2400" dirty="0">
                 <a:solidFill>
-                  <a:srgbClr val="FAFAF9"/>
+                  <a:schemeClr val="tx1">
+                    <a:lumMod val="95000"/>
+                    <a:lumOff val="5000"/>
+                  </a:schemeClr>
                 </a:solidFill>
                 <a:latin typeface="Cascadia Code NF" pitchFamily="50" charset="0"/>
                 <a:ea typeface="Cascadia Code NF" pitchFamily="50" charset="0"/>
@@ -20613,11 +21847,6 @@
               </a:rPr>
               <a:t>  ├── Persists to localStorage ("mf-demo-theme")</a:t>
             </a:r>
-            <a:endParaRPr lang="en-US" sz="2400" dirty="0">
-              <a:latin typeface="Cascadia Code NF" pitchFamily="50" charset="0"/>
-              <a:ea typeface="Cascadia Code NF" pitchFamily="50" charset="0"/>
-              <a:cs typeface="Cascadia Code NF" pitchFamily="50" charset="0"/>
-            </a:endParaRPr>
           </a:p>
           <a:p>
             <a:pPr marL="0" indent="0" algn="l">
@@ -20629,7 +21858,10 @@
             <a:r>
               <a:rPr lang="en-US" sz="2400" dirty="0">
                 <a:solidFill>
-                  <a:srgbClr val="FAFAF9"/>
+                  <a:schemeClr val="tx1">
+                    <a:lumMod val="95000"/>
+                    <a:lumOff val="5000"/>
+                  </a:schemeClr>
                 </a:solidFill>
                 <a:latin typeface="Cascadia Code NF" pitchFamily="50" charset="0"/>
                 <a:ea typeface="Cascadia Code NF" pitchFamily="50" charset="0"/>
@@ -20637,11 +21869,6 @@
               </a:rPr>
               <a:t>  ├── Applies CSS variables to document.documentElement</a:t>
             </a:r>
-            <a:endParaRPr lang="en-US" sz="2400" dirty="0">
-              <a:latin typeface="Cascadia Code NF" pitchFamily="50" charset="0"/>
-              <a:ea typeface="Cascadia Code NF" pitchFamily="50" charset="0"/>
-              <a:cs typeface="Cascadia Code NF" pitchFamily="50" charset="0"/>
-            </a:endParaRPr>
           </a:p>
           <a:p>
             <a:pPr marL="0" indent="0" algn="l">
@@ -20653,7 +21880,10 @@
             <a:r>
               <a:rPr lang="en-US" sz="2400" dirty="0">
                 <a:solidFill>
-                  <a:srgbClr val="FAFAF9"/>
+                  <a:schemeClr val="tx1">
+                    <a:lumMod val="95000"/>
+                    <a:lumOff val="5000"/>
+                  </a:schemeClr>
                 </a:solidFill>
                 <a:latin typeface="Cascadia Code NF" pitchFamily="50" charset="0"/>
                 <a:ea typeface="Cascadia Code NF" pitchFamily="50" charset="0"/>
@@ -20661,11 +21891,6 @@
               </a:rPr>
               <a:t>  ├── Exposes window.__MF_THEME__ bridge</a:t>
             </a:r>
-            <a:endParaRPr lang="en-US" sz="2400" dirty="0">
-              <a:latin typeface="Cascadia Code NF" pitchFamily="50" charset="0"/>
-              <a:ea typeface="Cascadia Code NF" pitchFamily="50" charset="0"/>
-              <a:cs typeface="Cascadia Code NF" pitchFamily="50" charset="0"/>
-            </a:endParaRPr>
           </a:p>
           <a:p>
             <a:pPr marL="0" indent="0" algn="l">
@@ -20677,7 +21902,10 @@
             <a:r>
               <a:rPr lang="en-US" sz="2400" dirty="0">
                 <a:solidFill>
-                  <a:srgbClr val="FAFAF9"/>
+                  <a:schemeClr val="tx1">
+                    <a:lumMod val="95000"/>
+                    <a:lumOff val="5000"/>
+                  </a:schemeClr>
                 </a:solidFill>
                 <a:latin typeface="Cascadia Code NF" pitchFamily="50" charset="0"/>
                 <a:ea typeface="Cascadia Code NF" pitchFamily="50" charset="0"/>
@@ -20685,11 +21913,6 @@
               </a:rPr>
               <a:t>  └── Broadcasts "themeChange" event</a:t>
             </a:r>
-            <a:endParaRPr lang="en-US" sz="2400" dirty="0">
-              <a:latin typeface="Cascadia Code NF" pitchFamily="50" charset="0"/>
-              <a:ea typeface="Cascadia Code NF" pitchFamily="50" charset="0"/>
-              <a:cs typeface="Cascadia Code NF" pitchFamily="50" charset="0"/>
-            </a:endParaRPr>
           </a:p>
           <a:p>
             <a:pPr marL="0" indent="0" algn="l">
@@ -20701,7 +21924,10 @@
             <a:r>
               <a:rPr lang="en-US" sz="2400" dirty="0">
                 <a:solidFill>
-                  <a:srgbClr val="FAFAF9"/>
+                  <a:schemeClr val="tx1">
+                    <a:lumMod val="95000"/>
+                    <a:lumOff val="5000"/>
+                  </a:schemeClr>
                 </a:solidFill>
                 <a:latin typeface="Cascadia Code NF" pitchFamily="50" charset="0"/>
                 <a:ea typeface="Cascadia Code NF" pitchFamily="50" charset="0"/>
@@ -20709,11 +21935,6 @@
               </a:rPr>
               <a:t>        ├── Records       → useActiveTheme()</a:t>
             </a:r>
-            <a:endParaRPr lang="en-US" sz="2400" dirty="0">
-              <a:latin typeface="Cascadia Code NF" pitchFamily="50" charset="0"/>
-              <a:ea typeface="Cascadia Code NF" pitchFamily="50" charset="0"/>
-              <a:cs typeface="Cascadia Code NF" pitchFamily="50" charset="0"/>
-            </a:endParaRPr>
           </a:p>
           <a:p>
             <a:pPr marL="0" indent="0" algn="l">
@@ -20725,7 +21946,10 @@
             <a:r>
               <a:rPr lang="en-US" sz="2400" dirty="0">
                 <a:solidFill>
-                  <a:srgbClr val="FAFAF9"/>
+                  <a:schemeClr val="tx1">
+                    <a:lumMod val="95000"/>
+                    <a:lumOff val="5000"/>
+                  </a:schemeClr>
                 </a:solidFill>
                 <a:latin typeface="Cascadia Code NF" pitchFamily="50" charset="0"/>
                 <a:ea typeface="Cascadia Code NF" pitchFamily="50" charset="0"/>
@@ -20733,11 +21957,6 @@
               </a:rPr>
               <a:t>        ├── Prescriptions → useActiveTheme()</a:t>
             </a:r>
-            <a:endParaRPr lang="en-US" sz="2400" dirty="0">
-              <a:latin typeface="Cascadia Code NF" pitchFamily="50" charset="0"/>
-              <a:ea typeface="Cascadia Code NF" pitchFamily="50" charset="0"/>
-              <a:cs typeface="Cascadia Code NF" pitchFamily="50" charset="0"/>
-            </a:endParaRPr>
           </a:p>
           <a:p>
             <a:pPr marL="0" indent="0" algn="l">
@@ -20749,7 +21968,10 @@
             <a:r>
               <a:rPr lang="en-US" sz="2400" dirty="0">
                 <a:solidFill>
-                  <a:srgbClr val="FAFAF9"/>
+                  <a:schemeClr val="tx1">
+                    <a:lumMod val="95000"/>
+                    <a:lumOff val="5000"/>
+                  </a:schemeClr>
                 </a:solidFill>
                 <a:latin typeface="Cascadia Code NF" pitchFamily="50" charset="0"/>
                 <a:ea typeface="Cascadia Code NF" pitchFamily="50" charset="0"/>
@@ -20757,15 +21979,15 @@
               </a:rPr>
               <a:t>        └── Analytics     → useActiveTheme()</a:t>
             </a:r>
-            <a:endParaRPr lang="en-US" sz="2400" dirty="0">
-              <a:latin typeface="Cascadia Code NF" pitchFamily="50" charset="0"/>
-              <a:ea typeface="Cascadia Code NF" pitchFamily="50" charset="0"/>
-              <a:cs typeface="Cascadia Code NF" pitchFamily="50" charset="0"/>
-            </a:endParaRPr>
           </a:p>
         </p:txBody>
       </p:sp>
     </p:spTree>
+    <p:extLst>
+      <p:ext uri="{BB962C8B-B14F-4D97-AF65-F5344CB8AC3E}">
+        <p14:creationId xmlns:p14="http://schemas.microsoft.com/office/powerpoint/2010/main" val="3171738305"/>
+      </p:ext>
+    </p:extLst>
   </p:cSld>
   <p:clrMapOvr>
     <a:masterClrMapping/>
@@ -20773,7 +21995,7 @@
 </p:sld>
 </file>
 
-<file path=ppt/slides/slide38.xml><?xml version="1.0" encoding="utf-8"?>
+<file path=ppt/slides/slide39.xml><?xml version="1.0" encoding="utf-8"?>
 <p:sld xmlns:a="http://schemas.openxmlformats.org/drawingml/2006/main" xmlns:r="http://schemas.openxmlformats.org/officeDocument/2006/relationships" xmlns:p="http://schemas.openxmlformats.org/presentationml/2006/main" show="0">
   <p:cSld>
     <p:bg>
@@ -21916,7 +23138,74 @@
 </p:sld>
 </file>
 
-<file path=ppt/slides/slide39.xml><?xml version="1.0" encoding="utf-8"?>
+<file path=ppt/slides/slide4.xml><?xml version="1.0" encoding="utf-8"?>
+<p:sld xmlns:a="http://schemas.openxmlformats.org/drawingml/2006/main" xmlns:r="http://schemas.openxmlformats.org/officeDocument/2006/relationships" xmlns:p="http://schemas.openxmlformats.org/presentationml/2006/main">
+  <p:cSld>
+    <p:spTree>
+      <p:nvGrpSpPr>
+        <p:cNvPr id="1" name=""/>
+        <p:cNvGrpSpPr/>
+        <p:nvPr/>
+      </p:nvGrpSpPr>
+      <p:grpSpPr>
+        <a:xfrm>
+          <a:off x="0" y="0"/>
+          <a:ext cx="0" cy="0"/>
+          <a:chOff x="0" y="0"/>
+          <a:chExt cx="0" cy="0"/>
+        </a:xfrm>
+      </p:grpSpPr>
+      <p:sp>
+        <p:nvSpPr>
+          <p:cNvPr id="3" name="TextBox 2">
+            <a:extLst>
+              <a:ext uri="{FF2B5EF4-FFF2-40B4-BE49-F238E27FC236}">
+                <a16:creationId xmlns:a16="http://schemas.microsoft.com/office/drawing/2014/main" id="{6E014679-5AD2-B7E1-FFC9-B9A93814AA10}"/>
+              </a:ext>
+            </a:extLst>
+          </p:cNvPr>
+          <p:cNvSpPr txBox="1"/>
+          <p:nvPr/>
+        </p:nvSpPr>
+        <p:spPr>
+          <a:xfrm>
+            <a:off x="3748972" y="2782669"/>
+            <a:ext cx="5713167" cy="707886"/>
+          </a:xfrm>
+          <a:prstGeom prst="rect">
+            <a:avLst/>
+          </a:prstGeom>
+          <a:noFill/>
+        </p:spPr>
+        <p:txBody>
+          <a:bodyPr wrap="none" rtlCol="0">
+            <a:spAutoFit/>
+          </a:bodyPr>
+          <a:lstStyle/>
+          <a:p>
+            <a:pPr algn="ctr"/>
+            <a:r>
+              <a:rPr lang="en-US" sz="4000" dirty="0"/>
+              <a:t>What are we solving here?</a:t>
+            </a:r>
+            <a:endParaRPr lang="en-GB" sz="4000" dirty="0"/>
+          </a:p>
+        </p:txBody>
+      </p:sp>
+    </p:spTree>
+    <p:extLst>
+      <p:ext uri="{BB962C8B-B14F-4D97-AF65-F5344CB8AC3E}">
+        <p14:creationId xmlns:p14="http://schemas.microsoft.com/office/powerpoint/2010/main" val="683204387"/>
+      </p:ext>
+    </p:extLst>
+  </p:cSld>
+  <p:clrMapOvr>
+    <a:masterClrMapping/>
+  </p:clrMapOvr>
+</p:sld>
+</file>
+
+<file path=ppt/slides/slide40.xml><?xml version="1.0" encoding="utf-8"?>
 <p:sld xmlns:a="http://schemas.openxmlformats.org/drawingml/2006/main" xmlns:r="http://schemas.openxmlformats.org/officeDocument/2006/relationships" xmlns:p="http://schemas.openxmlformats.org/presentationml/2006/main" show="0">
   <p:cSld name="Slide 13">
     <p:bg>
@@ -23528,74 +24817,7 @@
 </p:sld>
 </file>
 
-<file path=ppt/slides/slide4.xml><?xml version="1.0" encoding="utf-8"?>
-<p:sld xmlns:a="http://schemas.openxmlformats.org/drawingml/2006/main" xmlns:r="http://schemas.openxmlformats.org/officeDocument/2006/relationships" xmlns:p="http://schemas.openxmlformats.org/presentationml/2006/main">
-  <p:cSld>
-    <p:spTree>
-      <p:nvGrpSpPr>
-        <p:cNvPr id="1" name=""/>
-        <p:cNvGrpSpPr/>
-        <p:nvPr/>
-      </p:nvGrpSpPr>
-      <p:grpSpPr>
-        <a:xfrm>
-          <a:off x="0" y="0"/>
-          <a:ext cx="0" cy="0"/>
-          <a:chOff x="0" y="0"/>
-          <a:chExt cx="0" cy="0"/>
-        </a:xfrm>
-      </p:grpSpPr>
-      <p:sp>
-        <p:nvSpPr>
-          <p:cNvPr id="3" name="TextBox 2">
-            <a:extLst>
-              <a:ext uri="{FF2B5EF4-FFF2-40B4-BE49-F238E27FC236}">
-                <a16:creationId xmlns:a16="http://schemas.microsoft.com/office/drawing/2014/main" id="{6E014679-5AD2-B7E1-FFC9-B9A93814AA10}"/>
-              </a:ext>
-            </a:extLst>
-          </p:cNvPr>
-          <p:cNvSpPr txBox="1"/>
-          <p:nvPr/>
-        </p:nvSpPr>
-        <p:spPr>
-          <a:xfrm>
-            <a:off x="3748972" y="2782669"/>
-            <a:ext cx="5713167" cy="707886"/>
-          </a:xfrm>
-          <a:prstGeom prst="rect">
-            <a:avLst/>
-          </a:prstGeom>
-          <a:noFill/>
-        </p:spPr>
-        <p:txBody>
-          <a:bodyPr wrap="none" rtlCol="0">
-            <a:spAutoFit/>
-          </a:bodyPr>
-          <a:lstStyle/>
-          <a:p>
-            <a:pPr algn="ctr"/>
-            <a:r>
-              <a:rPr lang="en-US" sz="4000" dirty="0"/>
-              <a:t>What are we solving here?</a:t>
-            </a:r>
-            <a:endParaRPr lang="en-GB" sz="4000" dirty="0"/>
-          </a:p>
-        </p:txBody>
-      </p:sp>
-    </p:spTree>
-    <p:extLst>
-      <p:ext uri="{BB962C8B-B14F-4D97-AF65-F5344CB8AC3E}">
-        <p14:creationId xmlns:p14="http://schemas.microsoft.com/office/powerpoint/2010/main" val="683204387"/>
-      </p:ext>
-    </p:extLst>
-  </p:cSld>
-  <p:clrMapOvr>
-    <a:masterClrMapping/>
-  </p:clrMapOvr>
-</p:sld>
-</file>
-
-<file path=ppt/slides/slide40.xml><?xml version="1.0" encoding="utf-8"?>
+<file path=ppt/slides/slide41.xml><?xml version="1.0" encoding="utf-8"?>
 <p:sld xmlns:a="http://schemas.openxmlformats.org/drawingml/2006/main" xmlns:r="http://schemas.openxmlformats.org/officeDocument/2006/relationships" xmlns:p="http://schemas.openxmlformats.org/presentationml/2006/main">
   <p:cSld>
     <p:spTree>
@@ -24579,17 +25801,9 @@
 </p:sld>
 </file>
 
-<file path=ppt/slides/slide41.xml><?xml version="1.0" encoding="utf-8"?>
+<file path=ppt/slides/slide42.xml><?xml version="1.0" encoding="utf-8"?>
 <p:sld xmlns:a="http://schemas.openxmlformats.org/drawingml/2006/main" xmlns:r="http://schemas.openxmlformats.org/officeDocument/2006/relationships" xmlns:p="http://schemas.openxmlformats.org/presentationml/2006/main">
-  <p:cSld name="Slide 17">
-    <p:bg>
-      <p:bgPr>
-        <a:solidFill>
-          <a:srgbClr val="0C0C0C"/>
-        </a:solidFill>
-        <a:effectLst/>
-      </p:bgPr>
-    </p:bg>
+  <p:cSld>
     <p:spTree>
       <p:nvGrpSpPr>
         <p:cNvPr id="1" name=""/>
@@ -24606,7 +25820,13 @@
       </p:grpSpPr>
       <p:sp>
         <p:nvSpPr>
-          <p:cNvPr id="4" name="Text 2"/>
+          <p:cNvPr id="3" name="Text 2">
+            <a:extLst>
+              <a:ext uri="{FF2B5EF4-FFF2-40B4-BE49-F238E27FC236}">
+                <a16:creationId xmlns:a16="http://schemas.microsoft.com/office/drawing/2014/main" id="{EF027E61-C1A6-D975-A2F7-55C2DC49228C}"/>
+              </a:ext>
+            </a:extLst>
+          </p:cNvPr>
           <p:cNvSpPr/>
           <p:nvPr/>
         </p:nvSpPr>
@@ -24631,7 +25851,10 @@
             <a:r>
               <a:rPr lang="en-US" sz="3300" i="1" dirty="0">
                 <a:solidFill>
-                  <a:srgbClr val="FAFAF9"/>
+                  <a:schemeClr val="tx1">
+                    <a:lumMod val="95000"/>
+                    <a:lumOff val="5000"/>
+                  </a:schemeClr>
                 </a:solidFill>
                 <a:latin typeface="Instrument Serif" pitchFamily="34" charset="0"/>
                 <a:ea typeface="Instrument Serif" pitchFamily="34" charset="-122"/>
@@ -24639,13 +25862,26 @@
               </a:rPr>
               <a:t>Seven things to remember</a:t>
             </a:r>
-            <a:endParaRPr lang="en-US" sz="3300" dirty="0"/>
+            <a:endParaRPr lang="en-US" sz="3300" dirty="0">
+              <a:solidFill>
+                <a:schemeClr val="tx1">
+                  <a:lumMod val="95000"/>
+                  <a:lumOff val="5000"/>
+                </a:schemeClr>
+              </a:solidFill>
+            </a:endParaRPr>
           </a:p>
         </p:txBody>
       </p:sp>
       <p:sp>
         <p:nvSpPr>
-          <p:cNvPr id="8" name="Text 5"/>
+          <p:cNvPr id="5" name="Text 5">
+            <a:extLst>
+              <a:ext uri="{FF2B5EF4-FFF2-40B4-BE49-F238E27FC236}">
+                <a16:creationId xmlns:a16="http://schemas.microsoft.com/office/drawing/2014/main" id="{EFF2B295-89D0-700E-1CD6-1F0E290DD0E1}"/>
+              </a:ext>
+            </a:extLst>
+          </p:cNvPr>
           <p:cNvSpPr/>
           <p:nvPr/>
         </p:nvSpPr>
@@ -24675,7 +25911,10 @@
             <a:r>
               <a:rPr lang="en-US" sz="2400" dirty="0">
                 <a:solidFill>
-                  <a:srgbClr val="FAFAF9"/>
+                  <a:schemeClr val="tx1">
+                    <a:lumMod val="95000"/>
+                    <a:lumOff val="5000"/>
+                  </a:schemeClr>
                 </a:solidFill>
                 <a:latin typeface="DM Sans" pitchFamily="34" charset="0"/>
                 <a:ea typeface="DM Sans" pitchFamily="34" charset="-122"/>
@@ -24683,7 +25922,14 @@
               </a:rPr>
               <a:t>Micro-frontends solve a people problem: team scale, not bundle size</a:t>
             </a:r>
-            <a:endParaRPr lang="en-US" sz="2400" dirty="0"/>
+            <a:endParaRPr lang="en-US" sz="2400" dirty="0">
+              <a:solidFill>
+                <a:schemeClr val="tx1">
+                  <a:lumMod val="95000"/>
+                  <a:lumOff val="5000"/>
+                </a:schemeClr>
+              </a:solidFill>
+            </a:endParaRPr>
           </a:p>
           <a:p>
             <a:pPr marL="342900" indent="-342900">
@@ -24697,7 +25943,10 @@
             <a:r>
               <a:rPr lang="en-US" sz="2400" dirty="0">
                 <a:solidFill>
-                  <a:srgbClr val="FAFAF9"/>
+                  <a:schemeClr val="tx1">
+                    <a:lumMod val="95000"/>
+                    <a:lumOff val="5000"/>
+                  </a:schemeClr>
                 </a:solidFill>
                 <a:latin typeface="DM Sans" pitchFamily="34" charset="0"/>
                 <a:ea typeface="DM Sans" pitchFamily="34" charset="-122"/>
@@ -24705,7 +25954,14 @@
               </a:rPr>
               <a:t>Suspense fallbacks cover load UX. Module Federation covers team DX</a:t>
             </a:r>
-            <a:endParaRPr lang="en-US" sz="2400" dirty="0"/>
+            <a:endParaRPr lang="en-US" sz="2400" dirty="0">
+              <a:solidFill>
+                <a:schemeClr val="tx1">
+                  <a:lumMod val="95000"/>
+                  <a:lumOff val="5000"/>
+                </a:schemeClr>
+              </a:solidFill>
+            </a:endParaRPr>
           </a:p>
           <a:p>
             <a:pPr marL="342900" indent="-342900">
@@ -24719,7 +25975,10 @@
             <a:r>
               <a:rPr lang="en-US" sz="2400" dirty="0">
                 <a:solidFill>
-                  <a:srgbClr val="FAFAF9"/>
+                  <a:schemeClr val="tx1">
+                    <a:lumMod val="95000"/>
+                    <a:lumOff val="5000"/>
+                  </a:schemeClr>
                 </a:solidFill>
                 <a:latin typeface="DM Sans" pitchFamily="34" charset="0"/>
                 <a:ea typeface="DM Sans" pitchFamily="34" charset="-122"/>
@@ -24727,7 +25986,14 @@
               </a:rPr>
               <a:t>Prefer events over shared state: CustomEvents survive independent deploys</a:t>
             </a:r>
-            <a:endParaRPr lang="en-US" sz="2400" dirty="0"/>
+            <a:endParaRPr lang="en-US" sz="2400" dirty="0">
+              <a:solidFill>
+                <a:schemeClr val="tx1">
+                  <a:lumMod val="95000"/>
+                  <a:lumOff val="5000"/>
+                </a:schemeClr>
+              </a:solidFill>
+            </a:endParaRPr>
           </a:p>
           <a:p>
             <a:pPr marL="342900" indent="-342900">
@@ -24741,7 +26007,10 @@
             <a:r>
               <a:rPr lang="en-US" sz="2400" dirty="0">
                 <a:solidFill>
-                  <a:srgbClr val="FAFAF9"/>
+                  <a:schemeClr val="tx1">
+                    <a:lumMod val="95000"/>
+                    <a:lumOff val="5000"/>
+                  </a:schemeClr>
                 </a:solidFill>
                 <a:latin typeface="DM Sans" pitchFamily="34" charset="0"/>
                 <a:ea typeface="DM Sans" pitchFamily="34" charset="-122"/>
@@ -24749,7 +26018,14 @@
               </a:rPr>
               <a:t>Host owns routing: remotes request navigation, only the shell mutates it</a:t>
             </a:r>
-            <a:endParaRPr lang="en-US" sz="2400" dirty="0"/>
+            <a:endParaRPr lang="en-US" sz="2400" dirty="0">
+              <a:solidFill>
+                <a:schemeClr val="tx1">
+                  <a:lumMod val="95000"/>
+                  <a:lumOff val="5000"/>
+                </a:schemeClr>
+              </a:solidFill>
+            </a:endParaRPr>
           </a:p>
           <a:p>
             <a:pPr marL="342900" indent="-342900">
@@ -24763,7 +26039,10 @@
             <a:r>
               <a:rPr lang="en-US" sz="2400" dirty="0">
                 <a:solidFill>
-                  <a:srgbClr val="FAFAF9"/>
+                  <a:schemeClr val="tx1">
+                    <a:lumMod val="95000"/>
+                    <a:lumOff val="5000"/>
+                  </a:schemeClr>
                 </a:solidFill>
                 <a:latin typeface="DM Sans" pitchFamily="34" charset="0"/>
                 <a:ea typeface="DM Sans" pitchFamily="34" charset="-122"/>
@@ -24771,7 +26050,14 @@
               </a:rPr>
               <a:t>Ship fault isolation on purpose: .catch() + ErrorBoundary per module</a:t>
             </a:r>
-            <a:endParaRPr lang="en-US" sz="2400" dirty="0"/>
+            <a:endParaRPr lang="en-US" sz="2400" dirty="0">
+              <a:solidFill>
+                <a:schemeClr val="tx1">
+                  <a:lumMod val="95000"/>
+                  <a:lumOff val="5000"/>
+                </a:schemeClr>
+              </a:solidFill>
+            </a:endParaRPr>
           </a:p>
           <a:p>
             <a:pPr marL="342900" indent="-342900">
@@ -24785,7 +26071,10 @@
             <a:r>
               <a:rPr lang="en-US" sz="2400" dirty="0" err="1">
                 <a:solidFill>
-                  <a:srgbClr val="FAFAF9"/>
+                  <a:schemeClr val="tx1">
+                    <a:lumMod val="95000"/>
+                    <a:lumOff val="5000"/>
+                  </a:schemeClr>
                 </a:solidFill>
                 <a:latin typeface="DM Sans" pitchFamily="34" charset="0"/>
                 <a:ea typeface="DM Sans" pitchFamily="34" charset="-122"/>
@@ -24796,7 +26085,10 @@
             <a:r>
               <a:rPr lang="en-US" sz="2400" dirty="0">
                 <a:solidFill>
-                  <a:srgbClr val="FAFAF9"/>
+                  <a:schemeClr val="tx1">
+                    <a:lumMod val="95000"/>
+                    <a:lumOff val="5000"/>
+                  </a:schemeClr>
                 </a:solidFill>
                 <a:latin typeface="DM Sans" pitchFamily="34" charset="0"/>
                 <a:ea typeface="DM Sans" pitchFamily="34" charset="-122"/>
@@ -24804,7 +26096,14 @@
               </a:rPr>
               <a:t> keeps the monorepo fast: sub-second HMR, Rust React Compiler, cache</a:t>
             </a:r>
-            <a:endParaRPr lang="en-US" sz="2400" dirty="0"/>
+            <a:endParaRPr lang="en-US" sz="2400" dirty="0">
+              <a:solidFill>
+                <a:schemeClr val="tx1">
+                  <a:lumMod val="95000"/>
+                  <a:lumOff val="5000"/>
+                </a:schemeClr>
+              </a:solidFill>
+            </a:endParaRPr>
           </a:p>
           <a:p>
             <a:pPr marL="342900" indent="-342900">
@@ -24818,7 +26117,10 @@
             <a:r>
               <a:rPr lang="en-US" sz="2400" dirty="0">
                 <a:solidFill>
-                  <a:srgbClr val="FAFAF9"/>
+                  <a:schemeClr val="tx1">
+                    <a:lumMod val="95000"/>
+                    <a:lumOff val="5000"/>
+                  </a:schemeClr>
                 </a:solidFill>
                 <a:latin typeface="DM Sans" pitchFamily="34" charset="0"/>
                 <a:ea typeface="DM Sans" pitchFamily="34" charset="-122"/>
@@ -24826,11 +26128,23 @@
               </a:rPr>
               <a:t>Match load strategy to content: instant / eager / streamed</a:t>
             </a:r>
-            <a:endParaRPr lang="en-US" sz="2400" dirty="0"/>
+            <a:endParaRPr lang="en-US" sz="2400" dirty="0">
+              <a:solidFill>
+                <a:schemeClr val="tx1">
+                  <a:lumMod val="95000"/>
+                  <a:lumOff val="5000"/>
+                </a:schemeClr>
+              </a:solidFill>
+            </a:endParaRPr>
           </a:p>
         </p:txBody>
       </p:sp>
     </p:spTree>
+    <p:extLst>
+      <p:ext uri="{BB962C8B-B14F-4D97-AF65-F5344CB8AC3E}">
+        <p14:creationId xmlns:p14="http://schemas.microsoft.com/office/powerpoint/2010/main" val="1008954746"/>
+      </p:ext>
+    </p:extLst>
   </p:cSld>
   <p:clrMapOvr>
     <a:masterClrMapping/>
@@ -24838,7 +26152,7 @@
 </p:sld>
 </file>
 
-<file path=ppt/slides/slide42.xml><?xml version="1.0" encoding="utf-8"?>
+<file path=ppt/slides/slide43.xml><?xml version="1.0" encoding="utf-8"?>
 <p:sld xmlns:a="http://schemas.openxmlformats.org/drawingml/2006/main" xmlns:r="http://schemas.openxmlformats.org/officeDocument/2006/relationships" xmlns:p="http://schemas.openxmlformats.org/presentationml/2006/main">
   <p:cSld>
     <p:spTree>
@@ -24898,7 +26212,7 @@
 </p:sld>
 </file>
 
-<file path=ppt/slides/slide43.xml><?xml version="1.0" encoding="utf-8"?>
+<file path=ppt/slides/slide44.xml><?xml version="1.0" encoding="utf-8"?>
 <p:sld xmlns:a="http://schemas.openxmlformats.org/drawingml/2006/main" xmlns:r="http://schemas.openxmlformats.org/officeDocument/2006/relationships" xmlns:p="http://schemas.openxmlformats.org/presentationml/2006/main">
   <p:cSld>
     <p:spTree>
@@ -25040,7 +26354,7 @@
           <p:nvPr/>
         </p:nvPicPr>
         <p:blipFill>
-          <a:blip r:embed="rId2">
+          <a:blip r:embed="rId3">
             <a:extLst>
               <a:ext uri="{28A0092B-C50C-407E-A947-70E740481C1C}">
                 <a14:useLocalDpi xmlns:a14="http://schemas.microsoft.com/office/drawing/2010/main" val="0"/>

--- a/presentation/module-federation.pptx
+++ b/presentation/module-federation.pptx
@@ -5,7 +5,7 @@
     <p:sldMasterId id="2147483648" r:id="rId1"/>
   </p:sldMasterIdLst>
   <p:notesMasterIdLst>
-    <p:notesMasterId r:id="rId30"/>
+    <p:notesMasterId r:id="rId31"/>
   </p:notesMasterIdLst>
   <p:sldIdLst>
     <p:sldId id="298" r:id="rId2"/>
@@ -20,22 +20,23 @@
     <p:sldId id="317" r:id="rId11"/>
     <p:sldId id="316" r:id="rId12"/>
     <p:sldId id="318" r:id="rId13"/>
-    <p:sldId id="328" r:id="rId14"/>
-    <p:sldId id="319" r:id="rId15"/>
-    <p:sldId id="320" r:id="rId16"/>
-    <p:sldId id="329" r:id="rId17"/>
-    <p:sldId id="327" r:id="rId18"/>
-    <p:sldId id="335" r:id="rId19"/>
-    <p:sldId id="325" r:id="rId20"/>
-    <p:sldId id="326" r:id="rId21"/>
-    <p:sldId id="334" r:id="rId22"/>
-    <p:sldId id="332" r:id="rId23"/>
-    <p:sldId id="333" r:id="rId24"/>
-    <p:sldId id="331" r:id="rId25"/>
-    <p:sldId id="323" r:id="rId26"/>
-    <p:sldId id="330" r:id="rId27"/>
-    <p:sldId id="310" r:id="rId28"/>
-    <p:sldId id="322" r:id="rId29"/>
+    <p:sldId id="336" r:id="rId14"/>
+    <p:sldId id="328" r:id="rId15"/>
+    <p:sldId id="319" r:id="rId16"/>
+    <p:sldId id="320" r:id="rId17"/>
+    <p:sldId id="329" r:id="rId18"/>
+    <p:sldId id="327" r:id="rId19"/>
+    <p:sldId id="335" r:id="rId20"/>
+    <p:sldId id="325" r:id="rId21"/>
+    <p:sldId id="326" r:id="rId22"/>
+    <p:sldId id="334" r:id="rId23"/>
+    <p:sldId id="332" r:id="rId24"/>
+    <p:sldId id="333" r:id="rId25"/>
+    <p:sldId id="331" r:id="rId26"/>
+    <p:sldId id="323" r:id="rId27"/>
+    <p:sldId id="330" r:id="rId28"/>
+    <p:sldId id="310" r:id="rId29"/>
+    <p:sldId id="322" r:id="rId30"/>
   </p:sldIdLst>
   <p:sldSz cx="12188825" cy="6858000"/>
   <p:notesSz cx="6858000" cy="12188825"/>
@@ -693,72 +694,16 @@
           <a:lstStyle/>
           <a:p>
             <a:r>
-              <a:rPr lang="en-US" dirty="0"/>
-              <a:t>This is a diagram of the demo app. It is a running healthcare shell. </a:t>
-            </a:r>
-          </a:p>
-          <a:p>
-            <a:r>
-              <a:rPr lang="en-US" dirty="0"/>
-              <a:t>The host is on port 3000. Home is on 3004 and loads instantly. </a:t>
-            </a:r>
-          </a:p>
-          <a:p>
-            <a:r>
-              <a:rPr lang="en-US" dirty="0"/>
-              <a:t>Records is on 3001 and is eagerly preloaded. </a:t>
-            </a:r>
-          </a:p>
-          <a:p>
-            <a:r>
-              <a:rPr lang="en-US" dirty="0"/>
-              <a:t>Prescriptions is on 3002 and streams on demand. </a:t>
-            </a:r>
-          </a:p>
-          <a:p>
-            <a:r>
-              <a:rPr lang="en-US" dirty="0"/>
-              <a:t>Analytics is on 3003 and does the same.</a:t>
-            </a:r>
-          </a:p>
-          <a:p>
-            <a:endParaRPr lang="en-US" dirty="0"/>
-          </a:p>
-          <a:p>
-            <a:r>
-              <a:rPr lang="en-US" dirty="0"/>
-              <a:t>Five independent React apps. Each has its own bundler config, its own dev server, and its own test suite. They compose at runtime through Module Federation. React 19. </a:t>
-            </a:r>
-            <a:r>
-              <a:rPr lang="en-US" dirty="0" err="1"/>
-              <a:t>Rspack</a:t>
-            </a:r>
-            <a:r>
-              <a:rPr lang="en-US" dirty="0"/>
-              <a:t> 2.1. TypeScript 7. Tailwind CSS v4. You can clone this after the talk and run it.</a:t>
-            </a:r>
-          </a:p>
-          <a:p>
-            <a:endParaRPr lang="en-US" dirty="0"/>
-          </a:p>
-          <a:p>
-            <a:r>
-              <a:rPr lang="en-US" dirty="0"/>
-              <a:t>Two promises. Module Federation gives growing teams better developer experience. Suspense fallbacks give visitors better user experience. We are going to prove both, live, in the same architecture.</a:t>
-            </a:r>
-          </a:p>
-          <a:p>
-            <a:endParaRPr lang="en-US" dirty="0"/>
-          </a:p>
-          <a:p>
-            <a:endParaRPr lang="en-GB" dirty="0"/>
+              <a:rPr lang="en-GB" dirty="0"/>
+              <a:t>This is a healthcare app. With some patient records, prescriptions, analytics.</a:t>
+            </a:r>
           </a:p>
         </p:txBody>
       </p:sp>
     </p:spTree>
     <p:extLst>
       <p:ext uri="{BB962C8B-B14F-4D97-AF65-F5344CB8AC3E}">
-        <p14:creationId xmlns:p14="http://schemas.microsoft.com/office/powerpoint/2010/main" val="1396901090"/>
+        <p14:creationId xmlns:p14="http://schemas.microsoft.com/office/powerpoint/2010/main" val="1226422263"/>
       </p:ext>
     </p:extLst>
   </p:cSld>
@@ -836,7 +781,31 @@
           <a:p>
             <a:r>
               <a:rPr lang="en-US" dirty="0"/>
-              <a:t>Module Federation is for developers and teams. Independent builds. Independent deploys. Onboarding that actually scales.</a:t>
+              <a:t>This is a diagram of the demo app. It is a running healthcare shell. </a:t>
+            </a:r>
+          </a:p>
+          <a:p>
+            <a:r>
+              <a:rPr lang="en-US" dirty="0"/>
+              <a:t>The host is on port 3000. Home is on 3004 and loads instantly. </a:t>
+            </a:r>
+          </a:p>
+          <a:p>
+            <a:r>
+              <a:rPr lang="en-US" dirty="0"/>
+              <a:t>Records is on 3001 and is eagerly preloaded. </a:t>
+            </a:r>
+          </a:p>
+          <a:p>
+            <a:r>
+              <a:rPr lang="en-US" dirty="0"/>
+              <a:t>Prescriptions is on 3002 and streams on demand. </a:t>
+            </a:r>
+          </a:p>
+          <a:p>
+            <a:r>
+              <a:rPr lang="en-US" dirty="0"/>
+              <a:t>Analytics is on 3003 and does the same.</a:t>
             </a:r>
           </a:p>
           <a:p>
@@ -845,8 +814,28 @@
           <a:p>
             <a:r>
               <a:rPr lang="en-US" dirty="0"/>
-              <a:t>Suspense and skeletons are for end users. Instant perceived load. No blank screens at runtime.</a:t>
-            </a:r>
+              <a:t>Five independent React apps. Each has its own bundler config, its own dev server, and its own test suite. They compose at runtime through Module Federation. React 19. </a:t>
+            </a:r>
+            <a:r>
+              <a:rPr lang="en-US" dirty="0" err="1"/>
+              <a:t>Rspack</a:t>
+            </a:r>
+            <a:r>
+              <a:rPr lang="en-US" dirty="0"/>
+              <a:t> 2.1.</a:t>
+            </a:r>
+          </a:p>
+          <a:p>
+            <a:endParaRPr lang="en-US" dirty="0"/>
+          </a:p>
+          <a:p>
+            <a:r>
+              <a:rPr lang="en-US" dirty="0"/>
+              <a:t>This module federation gives your teams better developer experience. And suspense fallbacks gives your visitors better user experience. We are going to prove both, live, in the same architecture.</a:t>
+            </a:r>
+          </a:p>
+          <a:p>
+            <a:endParaRPr lang="en-US" dirty="0"/>
           </a:p>
           <a:p>
             <a:endParaRPr lang="en-GB" dirty="0"/>
@@ -856,7 +845,7 @@
     </p:spTree>
     <p:extLst>
       <p:ext uri="{BB962C8B-B14F-4D97-AF65-F5344CB8AC3E}">
-        <p14:creationId xmlns:p14="http://schemas.microsoft.com/office/powerpoint/2010/main" val="447115205"/>
+        <p14:creationId xmlns:p14="http://schemas.microsoft.com/office/powerpoint/2010/main" val="1396901090"/>
       </p:ext>
     </p:extLst>
   </p:cSld>
@@ -934,13 +923,16 @@
           <a:p>
             <a:r>
               <a:rPr lang="en-US" dirty="0"/>
-              <a:t>You can have one without the other. Plenty of teams do. You can federate four remotes and still show a blank screen and a spinner every time someone clicks a tab. That is slow user experience even when team ownership is solid.</a:t>
-            </a:r>
+              <a:t>Module Federation is for developers and teams. Independent builds. Independent deploys. Onboarding that actually scales.</a:t>
+            </a:r>
+          </a:p>
+          <a:p>
+            <a:endParaRPr lang="en-US" dirty="0"/>
           </a:p>
           <a:p>
             <a:r>
               <a:rPr lang="en-US" dirty="0"/>
-              <a:t>With Suspense, the user clicks a tab, a skeleton appears immediately, and the content resolves when it is ready. Each remote owns its own loading choreography.</a:t>
+              <a:t>Suspense and skeletons are for end users. Instant perceived load. No blank screens at runtime.</a:t>
             </a:r>
           </a:p>
           <a:p>
@@ -951,7 +943,7 @@
     </p:spTree>
     <p:extLst>
       <p:ext uri="{BB962C8B-B14F-4D97-AF65-F5344CB8AC3E}">
-        <p14:creationId xmlns:p14="http://schemas.microsoft.com/office/powerpoint/2010/main" val="2672093464"/>
+        <p14:creationId xmlns:p14="http://schemas.microsoft.com/office/powerpoint/2010/main" val="447115205"/>
       </p:ext>
     </p:extLst>
   </p:cSld>
@@ -1029,19 +1021,16 @@
           <a:p>
             <a:r>
               <a:rPr lang="en-US" dirty="0"/>
-              <a:t>This is the shape of the app. One shell on port 3000. It owns navigation, the router, the theme, and a status strip that reads Instant, Eager, or Streaming.</a:t>
-            </a:r>
+              <a:t>You can have one without the other. Plenty of teams do. You can federate four remotes and still show a blank screen and a spinner every time someone clicks a tab. That is slow user experience even when team ownership is solid.</a:t>
+            </a:r>
+          </a:p>
+          <a:p>
+            <a:endParaRPr lang="en-US" dirty="0"/>
           </a:p>
           <a:p>
             <a:r>
               <a:rPr lang="en-US" dirty="0"/>
-              <a:t>Every remote is wrapped the same way. An error boundary. Then Suspense with a skeleton fallback. Then the remote module itself.</a:t>
-            </a:r>
-          </a:p>
-          <a:p>
-            <a:r>
-              <a:rPr lang="en-US" dirty="0"/>
-              <a:t>Four remotes hang off that shell. Home on 3004, instant. Records on 3001, eager. Prescriptions on 3002, streamed. Analytics on 3003, streamed. Not every module should load the same way. Content priority decides the strategy.</a:t>
+              <a:t>With Suspense, the user clicks a tab, a skeleton appears immediately, and the content resolves when it is ready. Each remote owns its own loading choreography.</a:t>
             </a:r>
           </a:p>
           <a:p>
@@ -1052,7 +1041,7 @@
     </p:spTree>
     <p:extLst>
       <p:ext uri="{BB962C8B-B14F-4D97-AF65-F5344CB8AC3E}">
-        <p14:creationId xmlns:p14="http://schemas.microsoft.com/office/powerpoint/2010/main" val="1899568420"/>
+        <p14:creationId xmlns:p14="http://schemas.microsoft.com/office/powerpoint/2010/main" val="2672093464"/>
       </p:ext>
     </p:extLst>
   </p:cSld>
@@ -1130,13 +1119,22 @@
           <a:p>
             <a:r>
               <a:rPr lang="en-US" dirty="0"/>
-              <a:t>Prescriptions and Analytics are streamed. They load on demand, behind per-module skeletons.</a:t>
+              <a:t>This is the shape of the app. One shell on port 3000. It owns navigation, the router, the theme, and a status strip that reads Instant, Eager, or Streaming.</a:t>
             </a:r>
           </a:p>
           <a:p>
             <a:r>
               <a:rPr lang="en-US" dirty="0"/>
-              <a:t>Every strategy still gets three layers of resilience. A catch on lazy, so an unreachable remote becomes a fallback instead of a white screen. Suspense, so a loading remote shows its own skeleton. An error boundary, so a runtime crash in one remote does not take down the app.</a:t>
+              <a:t>Every remote is wrapped the same way. An error boundary. Then Suspense with a skeleton fallback. Then the remote module itself.</a:t>
+            </a:r>
+          </a:p>
+          <a:p>
+            <a:endParaRPr lang="en-US" dirty="0"/>
+          </a:p>
+          <a:p>
+            <a:r>
+              <a:rPr lang="en-US" dirty="0"/>
+              <a:t>Four remotes hang off that shell. Home on 3004, instant. Records on 3001, eager. Prescriptions on 3002, streamed. Analytics on 3003, streamed. Not every module should load the same way. Content priority decides the strategy.</a:t>
             </a:r>
           </a:p>
           <a:p>
@@ -1147,7 +1145,7 @@
     </p:spTree>
     <p:extLst>
       <p:ext uri="{BB962C8B-B14F-4D97-AF65-F5344CB8AC3E}">
-        <p14:creationId xmlns:p14="http://schemas.microsoft.com/office/powerpoint/2010/main" val="4040777647"/>
+        <p14:creationId xmlns:p14="http://schemas.microsoft.com/office/powerpoint/2010/main" val="1899568420"/>
       </p:ext>
     </p:extLst>
   </p:cSld>
@@ -1223,6 +1221,18 @@
           <a:bodyPr/>
           <a:lstStyle/>
           <a:p>
+            <a:r>
+              <a:rPr lang="en-US" dirty="0"/>
+              <a:t>Prescriptions and Analytics are streamed. They load on demand, behind per-module skeletons.</a:t>
+            </a:r>
+          </a:p>
+          <a:p>
+            <a:r>
+              <a:rPr lang="en-US" dirty="0"/>
+              <a:t>Every strategy still gets three layers of resilience. A catch on lazy, so an unreachable remote becomes a fallback instead of a white screen. Suspense, so a loading remote shows its own skeleton. An error boundary, so a runtime crash in one remote does not take down the app.</a:t>
+            </a:r>
+          </a:p>
+          <a:p>
             <a:endParaRPr lang="en-GB" dirty="0"/>
           </a:p>
         </p:txBody>
@@ -1230,7 +1240,7 @@
     </p:spTree>
     <p:extLst>
       <p:ext uri="{BB962C8B-B14F-4D97-AF65-F5344CB8AC3E}">
-        <p14:creationId xmlns:p14="http://schemas.microsoft.com/office/powerpoint/2010/main" val="874813599"/>
+        <p14:creationId xmlns:p14="http://schemas.microsoft.com/office/powerpoint/2010/main" val="4040777647"/>
       </p:ext>
     </p:extLst>
   </p:cSld>
@@ -1306,109 +1316,6 @@
           <a:bodyPr/>
           <a:lstStyle/>
           <a:p>
-            <a:pPr marL="0" marR="0" lvl="0" indent="0" algn="l" defTabSz="914400" rtl="0" eaLnBrk="1" fontAlgn="auto" latinLnBrk="0" hangingPunct="1">
-              <a:lnSpc>
-                <a:spcPct val="100000"/>
-              </a:lnSpc>
-              <a:spcBef>
-                <a:spcPts val="0"/>
-              </a:spcBef>
-              <a:spcAft>
-                <a:spcPts val="0"/>
-              </a:spcAft>
-              <a:buClrTx/>
-              <a:buSzTx/>
-              <a:buFontTx/>
-              <a:buNone/>
-              <a:tabLst/>
-              <a:defRPr/>
-            </a:pPr>
-            <a:r>
-              <a:rPr lang="en-US" dirty="0"/>
-              <a:t>People ask why we wrap eager modules in </a:t>
-            </a:r>
-            <a:r>
-              <a:rPr lang="en-US" sz="1200" kern="1200" dirty="0">
-                <a:solidFill>
-                  <a:schemeClr val="tx1"/>
-                </a:solidFill>
-                <a:latin typeface="+mn-lt"/>
-                <a:ea typeface="+mn-ea"/>
-                <a:cs typeface="+mn-cs"/>
-              </a:rPr>
-              <a:t>lazy()</a:t>
-            </a:r>
-            <a:r>
-              <a:rPr lang="en-US" dirty="0"/>
-              <a:t>. It's not that static imports are impossible — they work, because </a:t>
-            </a:r>
-            <a:r>
-              <a:rPr lang="en-US" sz="1200" kern="1200" dirty="0" err="1">
-                <a:solidFill>
-                  <a:schemeClr val="tx1"/>
-                </a:solidFill>
-                <a:latin typeface="+mn-lt"/>
-                <a:ea typeface="+mn-ea"/>
-                <a:cs typeface="+mn-cs"/>
-              </a:rPr>
-              <a:t>index.tsx</a:t>
-            </a:r>
-            <a:r>
-              <a:rPr lang="en-US" dirty="0" err="1"/>
-              <a:t>'s</a:t>
-            </a:r>
-            <a:r>
-              <a:rPr lang="en-US" dirty="0"/>
-              <a:t> dynamic import already resolved the shared scope. It's that a static import makes the remote block first paint, and leaves nowhere to catch a failed remote. So we fire </a:t>
-            </a:r>
-            <a:r>
-              <a:rPr lang="en-US" sz="1200" kern="1200" dirty="0">
-                <a:solidFill>
-                  <a:schemeClr val="tx1"/>
-                </a:solidFill>
-                <a:latin typeface="+mn-lt"/>
-                <a:ea typeface="+mn-ea"/>
-                <a:cs typeface="+mn-cs"/>
-              </a:rPr>
-              <a:t>import()</a:t>
-            </a:r>
-            <a:r>
-              <a:rPr lang="en-US" dirty="0"/>
-              <a:t> at shell </a:t>
-            </a:r>
-            <a:r>
-              <a:rPr lang="en-US" dirty="0" err="1"/>
-              <a:t>init</a:t>
-            </a:r>
-            <a:r>
-              <a:rPr lang="en-US" dirty="0"/>
-              <a:t> to warm it, and </a:t>
-            </a:r>
-            <a:r>
-              <a:rPr lang="en-US" sz="1200" kern="1200" dirty="0">
-                <a:solidFill>
-                  <a:schemeClr val="tx1"/>
-                </a:solidFill>
-                <a:latin typeface="+mn-lt"/>
-                <a:ea typeface="+mn-ea"/>
-                <a:cs typeface="+mn-cs"/>
-              </a:rPr>
-              <a:t>lazy()</a:t>
-            </a:r>
-            <a:r>
-              <a:rPr lang="en-US" dirty="0"/>
-              <a:t> resolves from the module registry instantly — while keeping the Suspense and </a:t>
-            </a:r>
-            <a:r>
-              <a:rPr lang="en-US" dirty="0" err="1"/>
-              <a:t>ErrorBoundary</a:t>
-            </a:r>
-            <a:r>
-              <a:rPr lang="en-US" dirty="0"/>
-              <a:t> per module.</a:t>
-            </a:r>
-          </a:p>
-          <a:p>
             <a:endParaRPr lang="en-GB" dirty="0"/>
           </a:p>
         </p:txBody>
@@ -1416,7 +1323,7 @@
     </p:spTree>
     <p:extLst>
       <p:ext uri="{BB962C8B-B14F-4D97-AF65-F5344CB8AC3E}">
-        <p14:creationId xmlns:p14="http://schemas.microsoft.com/office/powerpoint/2010/main" val="2316851497"/>
+        <p14:creationId xmlns:p14="http://schemas.microsoft.com/office/powerpoint/2010/main" val="874813599"/>
       </p:ext>
     </p:extLst>
   </p:cSld>
@@ -1575,43 +1482,117 @@
           <a:bodyPr/>
           <a:lstStyle/>
           <a:p>
+            <a:pPr marL="0" marR="0" lvl="0" indent="0" algn="l" defTabSz="914400" rtl="0" eaLnBrk="1" fontAlgn="auto" latinLnBrk="0" hangingPunct="1">
+              <a:lnSpc>
+                <a:spcPct val="100000"/>
+              </a:lnSpc>
+              <a:spcBef>
+                <a:spcPts val="0"/>
+              </a:spcBef>
+              <a:spcAft>
+                <a:spcPts val="0"/>
+              </a:spcAft>
+              <a:buClrTx/>
+              <a:buSzTx/>
+              <a:buFontTx/>
+              <a:buNone/>
+              <a:tabLst/>
+              <a:defRPr/>
+            </a:pPr>
             <a:r>
               <a:rPr lang="en-US" dirty="0"/>
-              <a:t>A health monitor that polls remoteEntry.js every five seconds. Kill switches. An A/B deployment ring. That panel is for the demo. I can take a module down in front of you and show you that the rest of the app keeps running. Basically we are going to simulate </a:t>
-            </a:r>
-            <a:r>
-              <a:rPr lang="en-US" sz="1200" i="1" dirty="0">
+              <a:t>People ask why we wrap eager modules in </a:t>
+            </a:r>
+            <a:r>
+              <a:rPr lang="en-US" sz="1200" kern="1200" dirty="0">
                 <a:solidFill>
-                  <a:schemeClr val="bg1">
-                    <a:lumMod val="95000"/>
-                  </a:schemeClr>
+                  <a:schemeClr val="tx1"/>
                 </a:solidFill>
-                <a:latin typeface="Instrument Serif" pitchFamily="34" charset="0"/>
-                <a:ea typeface="Instrument Serif" pitchFamily="34" charset="-122"/>
+                <a:latin typeface="+mn-lt"/>
+                <a:ea typeface="+mn-ea"/>
+                <a:cs typeface="+mn-cs"/>
               </a:rPr>
-              <a:t>m</a:t>
-            </a:r>
-            <a:r>
-              <a:rPr lang="en-US" sz="1200" i="1" dirty="0">
+              <a:t>lazy()</a:t>
+            </a:r>
+            <a:r>
+              <a:rPr lang="en-US" dirty="0"/>
+              <a:t>. It's not that static imports are impossible — they work, because </a:t>
+            </a:r>
+            <a:r>
+              <a:rPr lang="en-US" sz="1200" kern="1200" dirty="0" err="1">
                 <a:solidFill>
-                  <a:schemeClr val="bg1">
-                    <a:lumMod val="95000"/>
-                  </a:schemeClr>
+                  <a:schemeClr val="tx1"/>
                 </a:solidFill>
-                <a:latin typeface="Instrument Serif" pitchFamily="34" charset="0"/>
-                <a:ea typeface="Instrument Serif" pitchFamily="34" charset="-122"/>
-                <a:cs typeface="Instrument Serif" pitchFamily="34" charset="-120"/>
+                <a:latin typeface="+mn-lt"/>
+                <a:ea typeface="+mn-ea"/>
+                <a:cs typeface="+mn-cs"/>
               </a:rPr>
-              <a:t>odule-level crashes, network failures, and bad deploys are isolated at the boundary. </a:t>
-            </a:r>
-            <a:endParaRPr lang="en-US" dirty="0"/>
+              <a:t>index.tsx</a:t>
+            </a:r>
+            <a:r>
+              <a:rPr lang="en-US" dirty="0" err="1"/>
+              <a:t>'s</a:t>
+            </a:r>
+            <a:r>
+              <a:rPr lang="en-US" dirty="0"/>
+              <a:t> dynamic import already resolved the shared scope. It's that a static import makes the remote block first paint, and leaves nowhere to catch a failed remote. So we fire </a:t>
+            </a:r>
+            <a:r>
+              <a:rPr lang="en-US" sz="1200" kern="1200" dirty="0">
+                <a:solidFill>
+                  <a:schemeClr val="tx1"/>
+                </a:solidFill>
+                <a:latin typeface="+mn-lt"/>
+                <a:ea typeface="+mn-ea"/>
+                <a:cs typeface="+mn-cs"/>
+              </a:rPr>
+              <a:t>import()</a:t>
+            </a:r>
+            <a:r>
+              <a:rPr lang="en-US" dirty="0"/>
+              <a:t> at shell </a:t>
+            </a:r>
+            <a:r>
+              <a:rPr lang="en-US" dirty="0" err="1"/>
+              <a:t>init</a:t>
+            </a:r>
+            <a:r>
+              <a:rPr lang="en-US" dirty="0"/>
+              <a:t> to warm it, and </a:t>
+            </a:r>
+            <a:r>
+              <a:rPr lang="en-US" sz="1200" kern="1200" dirty="0">
+                <a:solidFill>
+                  <a:schemeClr val="tx1"/>
+                </a:solidFill>
+                <a:latin typeface="+mn-lt"/>
+                <a:ea typeface="+mn-ea"/>
+                <a:cs typeface="+mn-cs"/>
+              </a:rPr>
+              <a:t>lazy()</a:t>
+            </a:r>
+            <a:r>
+              <a:rPr lang="en-US" dirty="0"/>
+              <a:t> resolves from the module registry instantly — while keeping the Suspense and </a:t>
+            </a:r>
+            <a:r>
+              <a:rPr lang="en-US" dirty="0" err="1"/>
+              <a:t>ErrorBoundary</a:t>
+            </a:r>
+            <a:r>
+              <a:rPr lang="en-US" dirty="0"/>
+              <a:t> per module.</a:t>
+            </a:r>
+          </a:p>
+          <a:p>
+            <a:endParaRPr lang="en-GB" dirty="0"/>
           </a:p>
         </p:txBody>
       </p:sp>
     </p:spTree>
     <p:extLst>
       <p:ext uri="{BB962C8B-B14F-4D97-AF65-F5344CB8AC3E}">
-        <p14:creationId xmlns:p14="http://schemas.microsoft.com/office/powerpoint/2010/main" val="3599504877"/>
+        <p14:creationId xmlns:p14="http://schemas.microsoft.com/office/powerpoint/2010/main" val="2316851497"/>
       </p:ext>
     </p:extLst>
   </p:cSld>
@@ -1687,14 +1668,43 @@
           <a:bodyPr/>
           <a:lstStyle/>
           <a:p>
-            <a:endParaRPr lang="en-GB" dirty="0"/>
+            <a:r>
+              <a:rPr lang="en-US" dirty="0"/>
+              <a:t>A health monitor that polls remoteEntry.js every five seconds. Kill switches. An A/B deployment ring. That panel is for the demo. I can take a module down in front of you and show you that the rest of the app keeps running. Basically we are going to simulate </a:t>
+            </a:r>
+            <a:r>
+              <a:rPr lang="en-US" sz="1200" i="1" dirty="0">
+                <a:solidFill>
+                  <a:schemeClr val="bg1">
+                    <a:lumMod val="95000"/>
+                  </a:schemeClr>
+                </a:solidFill>
+                <a:latin typeface="Instrument Serif" pitchFamily="34" charset="0"/>
+                <a:ea typeface="Instrument Serif" pitchFamily="34" charset="-122"/>
+              </a:rPr>
+              <a:t>m</a:t>
+            </a:r>
+            <a:r>
+              <a:rPr lang="en-US" sz="1200" i="1" dirty="0">
+                <a:solidFill>
+                  <a:schemeClr val="bg1">
+                    <a:lumMod val="95000"/>
+                  </a:schemeClr>
+                </a:solidFill>
+                <a:latin typeface="Instrument Serif" pitchFamily="34" charset="0"/>
+                <a:ea typeface="Instrument Serif" pitchFamily="34" charset="-122"/>
+                <a:cs typeface="Instrument Serif" pitchFamily="34" charset="-120"/>
+              </a:rPr>
+              <a:t>odule-level crashes, network failures, and bad deploys are isolated at the boundary. </a:t>
+            </a:r>
+            <a:endParaRPr lang="en-US" dirty="0"/>
           </a:p>
         </p:txBody>
       </p:sp>
     </p:spTree>
     <p:extLst>
       <p:ext uri="{BB962C8B-B14F-4D97-AF65-F5344CB8AC3E}">
-        <p14:creationId xmlns:p14="http://schemas.microsoft.com/office/powerpoint/2010/main" val="3759391641"/>
+        <p14:creationId xmlns:p14="http://schemas.microsoft.com/office/powerpoint/2010/main" val="3599504877"/>
       </p:ext>
     </p:extLst>
   </p:cSld>
@@ -1770,34 +1780,6 @@
           <a:bodyPr/>
           <a:lstStyle/>
           <a:p>
-            <a:r>
-              <a:rPr lang="en-US" dirty="0"/>
-              <a:t>Why events instead of a shared store? A shared store is a shared dependency. Version coupling between teams. Events survive independent deploys. They even survive framework diversity. A Vue remote and a React remote can talk through the same window contract.</a:t>
-            </a:r>
-          </a:p>
-          <a:p>
-            <a:r>
-              <a:rPr lang="en-US" dirty="0"/>
-              <a:t>The payload is still a versioned contract. Keep it backward compatible. Each remote defines the same event shapes in its own types file by augmenting </a:t>
-            </a:r>
-            <a:r>
-              <a:rPr lang="en-US" dirty="0" err="1"/>
-              <a:t>WindowEventMap</a:t>
-            </a:r>
-            <a:r>
-              <a:rPr lang="en-US" dirty="0"/>
-              <a:t>. No shared package is required. </a:t>
-            </a:r>
-            <a:r>
-              <a:rPr lang="en-US" dirty="0" err="1"/>
-              <a:t>addEventListener</a:t>
-            </a:r>
-            <a:r>
-              <a:rPr lang="en-US" dirty="0"/>
-              <a:t> is fully typed.</a:t>
-            </a:r>
-          </a:p>
-          <a:p>
             <a:endParaRPr lang="en-GB" dirty="0"/>
           </a:p>
         </p:txBody>
@@ -1805,7 +1787,7 @@
     </p:spTree>
     <p:extLst>
       <p:ext uri="{BB962C8B-B14F-4D97-AF65-F5344CB8AC3E}">
-        <p14:creationId xmlns:p14="http://schemas.microsoft.com/office/powerpoint/2010/main" val="3974856141"/>
+        <p14:creationId xmlns:p14="http://schemas.microsoft.com/office/powerpoint/2010/main" val="3759391641"/>
       </p:ext>
     </p:extLst>
   </p:cSld>
@@ -1883,8 +1865,32 @@
           <a:p>
             <a:r>
               <a:rPr lang="en-US" dirty="0"/>
-              <a:t>Each app owns its own store and its own query client — nothing is shared. For client state they agree on a typed event contract, and whoever owns the state is the one who broadcasts: the shell owns theme and routing, so it broadcasts those; the counter belongs to nobody, so any module can. For server state there's no syncing at all — every app just fetches, because the API is already the shared state.</a:t>
-            </a:r>
+              <a:t>Why events instead of a shared store? A shared store is a shared dependency. Version coupling between teams. Events survive independent deploys. They even survive framework diversity. A Vue remote and a React remote can talk through the same window contract.</a:t>
+            </a:r>
+          </a:p>
+          <a:p>
+            <a:r>
+              <a:rPr lang="en-US" dirty="0"/>
+              <a:t>The payload is still a versioned contract. Keep it backward compatible. Each remote defines the same event shapes in its own types file by augmenting </a:t>
+            </a:r>
+            <a:r>
+              <a:rPr lang="en-US" dirty="0" err="1"/>
+              <a:t>WindowEventMap</a:t>
+            </a:r>
+            <a:r>
+              <a:rPr lang="en-US" dirty="0"/>
+              <a:t>. No shared package is required. </a:t>
+            </a:r>
+            <a:r>
+              <a:rPr lang="en-US" dirty="0" err="1"/>
+              <a:t>addEventListener</a:t>
+            </a:r>
+            <a:r>
+              <a:rPr lang="en-US" dirty="0"/>
+              <a:t> is fully typed.</a:t>
+            </a:r>
+          </a:p>
+          <a:p>
             <a:endParaRPr lang="en-GB" dirty="0"/>
           </a:p>
         </p:txBody>
@@ -1892,7 +1898,7 @@
     </p:spTree>
     <p:extLst>
       <p:ext uri="{BB962C8B-B14F-4D97-AF65-F5344CB8AC3E}">
-        <p14:creationId xmlns:p14="http://schemas.microsoft.com/office/powerpoint/2010/main" val="983126966"/>
+        <p14:creationId xmlns:p14="http://schemas.microsoft.com/office/powerpoint/2010/main" val="3974856141"/>
       </p:ext>
     </p:extLst>
   </p:cSld>
@@ -1970,16 +1976,8 @@
           <a:p>
             <a:r>
               <a:rPr lang="en-US" dirty="0"/>
-              <a:t>Theming is a cross-cutting concern, and the shell owns it.</a:t>
-            </a:r>
-          </a:p>
-          <a:p>
-            <a:r>
-              <a:rPr lang="en-US" dirty="0"/>
-              <a:t>The shell persists the choice to local storage. It applies CSS variables to the document element. It exposes a small bridge on window so a remote can read or set the theme without importing host code. And it broadcasts a theme-change event.</a:t>
-            </a:r>
-          </a:p>
-          <a:p>
+              <a:t>Each app owns its own store and its own query client — nothing is shared. For client state they agree on a typed event contract, and whoever owns the state is the one who broadcasts: the shell owns theme and routing, so it broadcasts those; the counter belongs to nobody, so any module can. For server state there's no syncing at all — every app just fetches, because the API is already the shared state.</a:t>
+            </a:r>
             <a:endParaRPr lang="en-GB" dirty="0"/>
           </a:p>
         </p:txBody>
@@ -1987,7 +1985,7 @@
     </p:spTree>
     <p:extLst>
       <p:ext uri="{BB962C8B-B14F-4D97-AF65-F5344CB8AC3E}">
-        <p14:creationId xmlns:p14="http://schemas.microsoft.com/office/powerpoint/2010/main" val="2728972476"/>
+        <p14:creationId xmlns:p14="http://schemas.microsoft.com/office/powerpoint/2010/main" val="983126966"/>
       </p:ext>
     </p:extLst>
   </p:cSld>
@@ -2065,13 +2063,13 @@
           <a:p>
             <a:r>
               <a:rPr lang="en-US" dirty="0"/>
-              <a:t>For the rest, the nav link fires on mouse enter. When the cursor touches Prescriptions or Analytics, the chunk starts fetching in the background. Click, and it is often already cached.</a:t>
+              <a:t>Theming is a cross-cutting concern, and the shell owns it.</a:t>
             </a:r>
           </a:p>
           <a:p>
             <a:r>
               <a:rPr lang="en-US" dirty="0"/>
-              <a:t>Instant means the landing page fetches lazily, with no streaming delay. Eager means preloaded the moment the shell mounts. Hover means prefetched when the user aims at a tab. That is why Records feels instant even though it is a separate app on a separate server. The work happened at mount.</a:t>
+              <a:t>The shell persists the choice to local storage. It applies CSS variables to the document element. It exposes a small bridge on window so a remote can read or set the theme without importing host code. And it broadcasts a theme-change event.</a:t>
             </a:r>
           </a:p>
           <a:p>
@@ -2082,7 +2080,7 @@
     </p:spTree>
     <p:extLst>
       <p:ext uri="{BB962C8B-B14F-4D97-AF65-F5344CB8AC3E}">
-        <p14:creationId xmlns:p14="http://schemas.microsoft.com/office/powerpoint/2010/main" val="2202382534"/>
+        <p14:creationId xmlns:p14="http://schemas.microsoft.com/office/powerpoint/2010/main" val="2728972476"/>
       </p:ext>
     </p:extLst>
   </p:cSld>
@@ -2160,6 +2158,101 @@
           <a:p>
             <a:r>
               <a:rPr lang="en-US" dirty="0"/>
+              <a:t>For the rest, the nav link fires on mouse enter. When the cursor touches Prescriptions or Analytics, the chunk starts fetching in the background. Click, and it is often already cached.</a:t>
+            </a:r>
+          </a:p>
+          <a:p>
+            <a:r>
+              <a:rPr lang="en-US" dirty="0"/>
+              <a:t>Instant means the landing page fetches lazily, with no streaming delay. Eager means preloaded the moment the shell mounts. Hover means prefetched when the user aims at a tab. That is why Records feels instant even though it is a separate app on a separate server. The work happened at mount.</a:t>
+            </a:r>
+          </a:p>
+          <a:p>
+            <a:endParaRPr lang="en-GB" dirty="0"/>
+          </a:p>
+        </p:txBody>
+      </p:sp>
+    </p:spTree>
+    <p:extLst>
+      <p:ext uri="{BB962C8B-B14F-4D97-AF65-F5344CB8AC3E}">
+        <p14:creationId xmlns:p14="http://schemas.microsoft.com/office/powerpoint/2010/main" val="2202382534"/>
+      </p:ext>
+    </p:extLst>
+  </p:cSld>
+  <p:clrMapOvr>
+    <a:masterClrMapping/>
+  </p:clrMapOvr>
+</p:notes>
+</file>
+
+<file path=ppt/notesSlides/notesSlide27.xml><?xml version="1.0" encoding="utf-8"?>
+<p:notes xmlns:a="http://schemas.openxmlformats.org/drawingml/2006/main" xmlns:r="http://schemas.openxmlformats.org/officeDocument/2006/relationships" xmlns:p="http://schemas.openxmlformats.org/presentationml/2006/main">
+  <p:cSld>
+    <p:spTree>
+      <p:nvGrpSpPr>
+        <p:cNvPr id="1" name=""/>
+        <p:cNvGrpSpPr/>
+        <p:nvPr/>
+      </p:nvGrpSpPr>
+      <p:grpSpPr>
+        <a:xfrm>
+          <a:off x="0" y="0"/>
+          <a:ext cx="0" cy="0"/>
+          <a:chOff x="0" y="0"/>
+          <a:chExt cx="0" cy="0"/>
+        </a:xfrm>
+      </p:grpSpPr>
+      <p:sp>
+        <p:nvSpPr>
+          <p:cNvPr id="2" name="Slide Image Placeholder 1"/>
+          <p:cNvSpPr>
+            <a:spLocks noGrp="1" noRot="1" noChangeAspect="1"/>
+          </p:cNvSpPr>
+          <p:nvPr>
+            <p:ph type="sldImg"/>
+          </p:nvPr>
+        </p:nvSpPr>
+        <p:spPr>
+          <a:xfrm>
+            <a:off x="-225425" y="1524000"/>
+            <a:ext cx="7308850" cy="4113213"/>
+          </a:xfrm>
+          <a:prstGeom prst="rect">
+            <a:avLst/>
+          </a:prstGeom>
+          <a:noFill/>
+          <a:ln w="12700">
+            <a:solidFill>
+              <a:prstClr val="black"/>
+            </a:solidFill>
+          </a:ln>
+        </p:spPr>
+      </p:sp>
+      <p:sp>
+        <p:nvSpPr>
+          <p:cNvPr id="3" name="Notes Placeholder 2"/>
+          <p:cNvSpPr>
+            <a:spLocks noGrp="1"/>
+          </p:cNvSpPr>
+          <p:nvPr>
+            <p:ph type="body" idx="1"/>
+          </p:nvPr>
+        </p:nvSpPr>
+        <p:spPr>
+          <a:xfrm>
+            <a:off x="685800" y="5865813"/>
+            <a:ext cx="5486400" cy="4799012"/>
+          </a:xfrm>
+          <a:prstGeom prst="rect">
+            <a:avLst/>
+          </a:prstGeom>
+        </p:spPr>
+        <p:txBody>
+          <a:bodyPr/>
+          <a:lstStyle/>
+          <a:p>
+            <a:r>
+              <a:rPr lang="en-US" dirty="0"/>
               <a:t>Seven things to take with you.</a:t>
             </a:r>
           </a:p>
@@ -2255,7 +2348,7 @@
 </p:notes>
 </file>
 
-<file path=ppt/notesSlides/notesSlide27.xml><?xml version="1.0" encoding="utf-8"?>
+<file path=ppt/notesSlides/notesSlide28.xml><?xml version="1.0" encoding="utf-8"?>
 <p:notes xmlns:a="http://schemas.openxmlformats.org/drawingml/2006/main" xmlns:r="http://schemas.openxmlformats.org/officeDocument/2006/relationships" xmlns:p="http://schemas.openxmlformats.org/presentationml/2006/main">
   <p:cSld>
     <p:spTree>
@@ -2338,7 +2431,7 @@
 </p:notes>
 </file>
 
-<file path=ppt/notesSlides/notesSlide28.xml><?xml version="1.0" encoding="utf-8"?>
+<file path=ppt/notesSlides/notesSlide29.xml><?xml version="1.0" encoding="utf-8"?>
 <p:notes xmlns:a="http://schemas.openxmlformats.org/drawingml/2006/main" xmlns:r="http://schemas.openxmlformats.org/officeDocument/2006/relationships" xmlns:p="http://schemas.openxmlformats.org/presentationml/2006/main">
   <p:cSld>
     <p:spTree>
@@ -2759,6 +2852,24 @@
             <a:r>
               <a:rPr lang="en-US" dirty="0"/>
               <a:t> coupling — teams can share a repo happily, but sharing a release train means one team's red build becomes everyone's problem.</a:t>
+            </a:r>
+          </a:p>
+          <a:p>
+            <a:endParaRPr lang="en-US" dirty="0"/>
+          </a:p>
+          <a:p>
+            <a:r>
+              <a:rPr lang="en-US" dirty="0"/>
+              <a:t>Team D maybe have a failing build and that’s a blocker in the upper half. </a:t>
+            </a:r>
+          </a:p>
+          <a:p>
+            <a:endParaRPr lang="en-US" dirty="0"/>
+          </a:p>
+          <a:p>
+            <a:r>
+              <a:rPr lang="en-US" dirty="0"/>
+              <a:t>While the lower half lets you own your build and problems stay where they are.</a:t>
             </a:r>
             <a:endParaRPr lang="en-GB" dirty="0"/>
           </a:p>
@@ -2950,9 +3061,17 @@
           <a:p>
             <a:r>
               <a:rPr lang="en-US" dirty="0"/>
-              <a:t>This is subtler because the failure is gradual. Nobody decides to violate a boundary; someone is just on a deadline and reaches across, and the import survives review because it looks like every other import. Deploy boundaries make that reach physically visible.</a:t>
-            </a:r>
-            <a:endParaRPr lang="en-GB" dirty="0"/>
+              <a:t>Up top, Checkout, Catalog, and Account are one app, so any team can import from any other part. The dashed lines are those reaches — they look like normal imports, so nobody notices them in review. Down below, each part ships separately, so using Catalog's code means adding a dependency or calling an API. That is a real change in a real file, and a reviewer will see it. Before, crossing a boundary was invisible. After, it is visible. </a:t>
+            </a:r>
+          </a:p>
+          <a:p>
+            <a:endParaRPr lang="en-US" dirty="0"/>
+          </a:p>
+          <a:p>
+            <a:r>
+              <a:rPr lang="en-US" dirty="0"/>
+              <a:t>What you can do here is a shared library.</a:t>
+            </a:r>
           </a:p>
         </p:txBody>
       </p:sp>
@@ -3138,7 +3257,7 @@
           <a:p>
             <a:fld id="{5BCAD085-E8A6-8845-BD4E-CB4CCA059FC4}" type="datetimeFigureOut">
               <a:rPr lang="en-US" smtClean="0"/>
-              <a:t>8/31/2026</a:t>
+              <a:t>9/5/2026</a:t>
             </a:fld>
             <a:endParaRPr lang="en-US"/>
           </a:p>
@@ -3845,6 +3964,66 @@
           <a:chExt cx="0" cy="0"/>
         </a:xfrm>
       </p:grpSpPr>
+      <p:pic>
+        <p:nvPicPr>
+          <p:cNvPr id="3" name="Picture 2">
+            <a:extLst>
+              <a:ext uri="{FF2B5EF4-FFF2-40B4-BE49-F238E27FC236}">
+                <a16:creationId xmlns:a16="http://schemas.microsoft.com/office/drawing/2014/main" id="{4BDDECCB-2C5F-1707-9F5F-328AB2ED0298}"/>
+              </a:ext>
+            </a:extLst>
+          </p:cNvPr>
+          <p:cNvPicPr>
+            <a:picLocks noChangeAspect="1"/>
+          </p:cNvPicPr>
+          <p:nvPr/>
+        </p:nvPicPr>
+        <p:blipFill>
+          <a:blip r:embed="rId3"/>
+          <a:stretch>
+            <a:fillRect/>
+          </a:stretch>
+        </p:blipFill>
+        <p:spPr>
+          <a:xfrm>
+            <a:off x="0" y="242697"/>
+            <a:ext cx="12188825" cy="6615303"/>
+          </a:xfrm>
+          <a:prstGeom prst="rect">
+            <a:avLst/>
+          </a:prstGeom>
+        </p:spPr>
+      </p:pic>
+    </p:spTree>
+    <p:extLst>
+      <p:ext uri="{BB962C8B-B14F-4D97-AF65-F5344CB8AC3E}">
+        <p14:creationId xmlns:p14="http://schemas.microsoft.com/office/powerpoint/2010/main" val="4080975099"/>
+      </p:ext>
+    </p:extLst>
+  </p:cSld>
+  <p:clrMapOvr>
+    <a:masterClrMapping/>
+  </p:clrMapOvr>
+</p:sld>
+</file>
+
+<file path=ppt/slides/slide14.xml><?xml version="1.0" encoding="utf-8"?>
+<p:sld xmlns:a="http://schemas.openxmlformats.org/drawingml/2006/main" xmlns:r="http://schemas.openxmlformats.org/officeDocument/2006/relationships" xmlns:p="http://schemas.openxmlformats.org/presentationml/2006/main">
+  <p:cSld>
+    <p:spTree>
+      <p:nvGrpSpPr>
+        <p:cNvPr id="1" name=""/>
+        <p:cNvGrpSpPr/>
+        <p:nvPr/>
+      </p:nvGrpSpPr>
+      <p:grpSpPr>
+        <a:xfrm>
+          <a:off x="0" y="0"/>
+          <a:ext cx="0" cy="0"/>
+          <a:chOff x="0" y="0"/>
+          <a:chExt cx="0" cy="0"/>
+        </a:xfrm>
+      </p:grpSpPr>
       <p:sp>
         <p:nvSpPr>
           <p:cNvPr id="3" name="Text 4">
@@ -3996,7 +4175,7 @@
 </p:sld>
 </file>
 
-<file path=ppt/slides/slide14.xml><?xml version="1.0" encoding="utf-8"?>
+<file path=ppt/slides/slide15.xml><?xml version="1.0" encoding="utf-8"?>
 <p:sld xmlns:a="http://schemas.openxmlformats.org/drawingml/2006/main" xmlns:r="http://schemas.openxmlformats.org/officeDocument/2006/relationships" xmlns:p="http://schemas.openxmlformats.org/presentationml/2006/main">
   <p:cSld>
     <p:spTree>
@@ -4769,7 +4948,7 @@
 </p:sld>
 </file>
 
-<file path=ppt/slides/slide15.xml><?xml version="1.0" encoding="utf-8"?>
+<file path=ppt/slides/slide16.xml><?xml version="1.0" encoding="utf-8"?>
 <p:sld xmlns:a="http://schemas.openxmlformats.org/drawingml/2006/main" xmlns:r="http://schemas.openxmlformats.org/officeDocument/2006/relationships" xmlns:p="http://schemas.openxmlformats.org/presentationml/2006/main">
   <p:cSld>
     <p:spTree>
@@ -5028,7 +5207,7 @@
 </p:sld>
 </file>
 
-<file path=ppt/slides/slide16.xml><?xml version="1.0" encoding="utf-8"?>
+<file path=ppt/slides/slide17.xml><?xml version="1.0" encoding="utf-8"?>
 <p:sld xmlns:a="http://schemas.openxmlformats.org/drawingml/2006/main" xmlns:r="http://schemas.openxmlformats.org/officeDocument/2006/relationships" xmlns:p="http://schemas.openxmlformats.org/presentationml/2006/main">
   <p:cSld>
     <p:spTree>
@@ -5383,7 +5562,7 @@
 </p:sld>
 </file>
 
-<file path=ppt/slides/slide17.xml><?xml version="1.0" encoding="utf-8"?>
+<file path=ppt/slides/slide18.xml><?xml version="1.0" encoding="utf-8"?>
 <p:sld xmlns:a="http://schemas.openxmlformats.org/drawingml/2006/main" xmlns:r="http://schemas.openxmlformats.org/officeDocument/2006/relationships" xmlns:p="http://schemas.openxmlformats.org/presentationml/2006/main">
   <p:cSld>
     <p:spTree>
@@ -5562,7 +5741,7 @@
 </p:sld>
 </file>
 
-<file path=ppt/slides/slide18.xml><?xml version="1.0" encoding="utf-8"?>
+<file path=ppt/slides/slide19.xml><?xml version="1.0" encoding="utf-8"?>
 <p:sld xmlns:a="http://schemas.openxmlformats.org/drawingml/2006/main" xmlns:r="http://schemas.openxmlformats.org/officeDocument/2006/relationships" xmlns:p="http://schemas.openxmlformats.org/presentationml/2006/main">
   <p:cSld>
     <p:spTree>
@@ -5613,187 +5792,6 @@
     <p:extLst>
       <p:ext uri="{BB962C8B-B14F-4D97-AF65-F5344CB8AC3E}">
         <p14:creationId xmlns:p14="http://schemas.microsoft.com/office/powerpoint/2010/main" val="836858276"/>
-      </p:ext>
-    </p:extLst>
-  </p:cSld>
-  <p:clrMapOvr>
-    <a:masterClrMapping/>
-  </p:clrMapOvr>
-</p:sld>
-</file>
-
-<file path=ppt/slides/slide19.xml><?xml version="1.0" encoding="utf-8"?>
-<p:sld xmlns:a="http://schemas.openxmlformats.org/drawingml/2006/main" xmlns:r="http://schemas.openxmlformats.org/officeDocument/2006/relationships" xmlns:p="http://schemas.openxmlformats.org/presentationml/2006/main">
-  <p:cSld>
-    <p:spTree>
-      <p:nvGrpSpPr>
-        <p:cNvPr id="1" name=""/>
-        <p:cNvGrpSpPr/>
-        <p:nvPr/>
-      </p:nvGrpSpPr>
-      <p:grpSpPr>
-        <a:xfrm>
-          <a:off x="0" y="0"/>
-          <a:ext cx="0" cy="0"/>
-          <a:chOff x="0" y="0"/>
-          <a:chExt cx="0" cy="0"/>
-        </a:xfrm>
-      </p:grpSpPr>
-      <p:sp>
-        <p:nvSpPr>
-          <p:cNvPr id="3" name="Text 2">
-            <a:extLst>
-              <a:ext uri="{FF2B5EF4-FFF2-40B4-BE49-F238E27FC236}">
-                <a16:creationId xmlns:a16="http://schemas.microsoft.com/office/drawing/2014/main" id="{E6D9864B-997C-D392-B5C0-9E000C1A03B8}"/>
-              </a:ext>
-            </a:extLst>
-          </p:cNvPr>
-          <p:cNvSpPr/>
-          <p:nvPr/>
-        </p:nvSpPr>
-        <p:spPr>
-          <a:xfrm>
-            <a:off x="530352" y="713232"/>
-            <a:ext cx="11109960" cy="777240"/>
-          </a:xfrm>
-          <a:prstGeom prst="rect">
-            <a:avLst/>
-          </a:prstGeom>
-          <a:noFill/>
-          <a:ln/>
-        </p:spPr>
-        <p:txBody>
-          <a:bodyPr wrap="square" rtlCol="0" anchor="ctr"/>
-          <a:lstStyle/>
-          <a:p>
-            <a:pPr marL="0" indent="0">
-              <a:buNone/>
-            </a:pPr>
-            <a:r>
-              <a:rPr lang="en-US" sz="3300" i="1" dirty="0">
-                <a:solidFill>
-                  <a:schemeClr val="tx1">
-                    <a:lumMod val="95000"/>
-                    <a:lumOff val="5000"/>
-                  </a:schemeClr>
-                </a:solidFill>
-                <a:latin typeface="Instrument Serif" pitchFamily="34" charset="0"/>
-                <a:ea typeface="Instrument Serif" pitchFamily="34" charset="-122"/>
-                <a:cs typeface="Instrument Serif" pitchFamily="34" charset="-120"/>
-              </a:rPr>
-              <a:t>Question</a:t>
-            </a:r>
-            <a:endParaRPr lang="en-US" sz="3300" dirty="0">
-              <a:solidFill>
-                <a:schemeClr val="tx1">
-                  <a:lumMod val="95000"/>
-                  <a:lumOff val="5000"/>
-                </a:schemeClr>
-              </a:solidFill>
-            </a:endParaRPr>
-          </a:p>
-        </p:txBody>
-      </p:sp>
-      <p:sp>
-        <p:nvSpPr>
-          <p:cNvPr id="7" name="Text 8">
-            <a:extLst>
-              <a:ext uri="{FF2B5EF4-FFF2-40B4-BE49-F238E27FC236}">
-                <a16:creationId xmlns:a16="http://schemas.microsoft.com/office/drawing/2014/main" id="{626E23A0-B775-D9BA-9D15-6D62663E3A4A}"/>
-              </a:ext>
-            </a:extLst>
-          </p:cNvPr>
-          <p:cNvSpPr/>
-          <p:nvPr/>
-        </p:nvSpPr>
-        <p:spPr>
-          <a:xfrm>
-            <a:off x="713232" y="2678653"/>
-            <a:ext cx="10395758" cy="1796527"/>
-          </a:xfrm>
-          <a:prstGeom prst="rect">
-            <a:avLst/>
-          </a:prstGeom>
-          <a:noFill/>
-          <a:ln/>
-        </p:spPr>
-        <p:txBody>
-          <a:bodyPr wrap="square" rtlCol="0" anchor="ctr"/>
-          <a:lstStyle/>
-          <a:p>
-            <a:pPr marL="0" indent="0">
-              <a:buNone/>
-            </a:pPr>
-            <a:r>
-              <a:rPr lang="en-US" sz="2800" i="1" dirty="0">
-                <a:solidFill>
-                  <a:schemeClr val="tx1">
-                    <a:lumMod val="85000"/>
-                    <a:lumOff val="15000"/>
-                  </a:schemeClr>
-                </a:solidFill>
-                <a:latin typeface="Cascadia Code NF" pitchFamily="50" charset="0"/>
-                <a:ea typeface="Cascadia Code NF" pitchFamily="50" charset="0"/>
-                <a:cs typeface="Cascadia Code NF" pitchFamily="50" charset="0"/>
-              </a:rPr>
-              <a:t>Why lazy() for eager modules? </a:t>
-            </a:r>
-          </a:p>
-          <a:p>
-            <a:pPr marL="0" indent="0">
-              <a:buNone/>
-            </a:pPr>
-            <a:r>
-              <a:rPr lang="en-US" sz="2800" i="1" dirty="0">
-                <a:solidFill>
-                  <a:schemeClr val="tx1">
-                    <a:lumMod val="85000"/>
-                    <a:lumOff val="15000"/>
-                  </a:schemeClr>
-                </a:solidFill>
-                <a:latin typeface="Cascadia Code NF" pitchFamily="50" charset="0"/>
-                <a:ea typeface="Cascadia Code NF" pitchFamily="50" charset="0"/>
-                <a:cs typeface="Cascadia Code NF" pitchFamily="50" charset="0"/>
-              </a:rPr>
-              <a:t>Remotes are separate builds resolved at runtime. </a:t>
-            </a:r>
-          </a:p>
-          <a:p>
-            <a:pPr marL="0" indent="0">
-              <a:buNone/>
-            </a:pPr>
-            <a:r>
-              <a:rPr lang="en-US" sz="2800" i="1" dirty="0">
-                <a:solidFill>
-                  <a:schemeClr val="tx1">
-                    <a:lumMod val="85000"/>
-                    <a:lumOff val="15000"/>
-                  </a:schemeClr>
-                </a:solidFill>
-                <a:latin typeface="Cascadia Code NF" pitchFamily="50" charset="0"/>
-                <a:ea typeface="Cascadia Code NF" pitchFamily="50" charset="0"/>
-                <a:cs typeface="Cascadia Code NF" pitchFamily="50" charset="0"/>
-              </a:rPr>
-              <a:t>Eager import() warms the cache; lazy() resolves from it.</a:t>
-            </a:r>
-            <a:endParaRPr lang="en-US" sz="2800" dirty="0">
-              <a:solidFill>
-                <a:schemeClr val="tx1">
-                  <a:lumMod val="85000"/>
-                  <a:lumOff val="15000"/>
-                </a:schemeClr>
-              </a:solidFill>
-              <a:latin typeface="Cascadia Code NF" pitchFamily="50" charset="0"/>
-              <a:ea typeface="Cascadia Code NF" pitchFamily="50" charset="0"/>
-              <a:cs typeface="Cascadia Code NF" pitchFamily="50" charset="0"/>
-            </a:endParaRPr>
-          </a:p>
-        </p:txBody>
-      </p:sp>
-    </p:spTree>
-    <p:extLst>
-      <p:ext uri="{BB962C8B-B14F-4D97-AF65-F5344CB8AC3E}">
-        <p14:creationId xmlns:p14="http://schemas.microsoft.com/office/powerpoint/2010/main" val="2577224661"/>
       </p:ext>
     </p:extLst>
   </p:cSld>
@@ -5885,6 +5883,187 @@
           <p:cNvPr id="3" name="Text 2">
             <a:extLst>
               <a:ext uri="{FF2B5EF4-FFF2-40B4-BE49-F238E27FC236}">
+                <a16:creationId xmlns:a16="http://schemas.microsoft.com/office/drawing/2014/main" id="{E6D9864B-997C-D392-B5C0-9E000C1A03B8}"/>
+              </a:ext>
+            </a:extLst>
+          </p:cNvPr>
+          <p:cNvSpPr/>
+          <p:nvPr/>
+        </p:nvSpPr>
+        <p:spPr>
+          <a:xfrm>
+            <a:off x="530352" y="713232"/>
+            <a:ext cx="11109960" cy="777240"/>
+          </a:xfrm>
+          <a:prstGeom prst="rect">
+            <a:avLst/>
+          </a:prstGeom>
+          <a:noFill/>
+          <a:ln/>
+        </p:spPr>
+        <p:txBody>
+          <a:bodyPr wrap="square" rtlCol="0" anchor="ctr"/>
+          <a:lstStyle/>
+          <a:p>
+            <a:pPr marL="0" indent="0">
+              <a:buNone/>
+            </a:pPr>
+            <a:r>
+              <a:rPr lang="en-US" sz="3300" i="1" dirty="0">
+                <a:solidFill>
+                  <a:schemeClr val="tx1">
+                    <a:lumMod val="95000"/>
+                    <a:lumOff val="5000"/>
+                  </a:schemeClr>
+                </a:solidFill>
+                <a:latin typeface="Instrument Serif" pitchFamily="34" charset="0"/>
+                <a:ea typeface="Instrument Serif" pitchFamily="34" charset="-122"/>
+                <a:cs typeface="Instrument Serif" pitchFamily="34" charset="-120"/>
+              </a:rPr>
+              <a:t>Question</a:t>
+            </a:r>
+            <a:endParaRPr lang="en-US" sz="3300" dirty="0">
+              <a:solidFill>
+                <a:schemeClr val="tx1">
+                  <a:lumMod val="95000"/>
+                  <a:lumOff val="5000"/>
+                </a:schemeClr>
+              </a:solidFill>
+            </a:endParaRPr>
+          </a:p>
+        </p:txBody>
+      </p:sp>
+      <p:sp>
+        <p:nvSpPr>
+          <p:cNvPr id="7" name="Text 8">
+            <a:extLst>
+              <a:ext uri="{FF2B5EF4-FFF2-40B4-BE49-F238E27FC236}">
+                <a16:creationId xmlns:a16="http://schemas.microsoft.com/office/drawing/2014/main" id="{626E23A0-B775-D9BA-9D15-6D62663E3A4A}"/>
+              </a:ext>
+            </a:extLst>
+          </p:cNvPr>
+          <p:cNvSpPr/>
+          <p:nvPr/>
+        </p:nvSpPr>
+        <p:spPr>
+          <a:xfrm>
+            <a:off x="713232" y="2678653"/>
+            <a:ext cx="10395758" cy="1796527"/>
+          </a:xfrm>
+          <a:prstGeom prst="rect">
+            <a:avLst/>
+          </a:prstGeom>
+          <a:noFill/>
+          <a:ln/>
+        </p:spPr>
+        <p:txBody>
+          <a:bodyPr wrap="square" rtlCol="0" anchor="ctr"/>
+          <a:lstStyle/>
+          <a:p>
+            <a:pPr marL="0" indent="0">
+              <a:buNone/>
+            </a:pPr>
+            <a:r>
+              <a:rPr lang="en-US" sz="2800" i="1" dirty="0">
+                <a:solidFill>
+                  <a:schemeClr val="tx1">
+                    <a:lumMod val="85000"/>
+                    <a:lumOff val="15000"/>
+                  </a:schemeClr>
+                </a:solidFill>
+                <a:latin typeface="Cascadia Code NF" pitchFamily="50" charset="0"/>
+                <a:ea typeface="Cascadia Code NF" pitchFamily="50" charset="0"/>
+                <a:cs typeface="Cascadia Code NF" pitchFamily="50" charset="0"/>
+              </a:rPr>
+              <a:t>Why lazy() for eager modules? </a:t>
+            </a:r>
+          </a:p>
+          <a:p>
+            <a:pPr marL="0" indent="0">
+              <a:buNone/>
+            </a:pPr>
+            <a:r>
+              <a:rPr lang="en-US" sz="2800" i="1" dirty="0">
+                <a:solidFill>
+                  <a:schemeClr val="tx1">
+                    <a:lumMod val="85000"/>
+                    <a:lumOff val="15000"/>
+                  </a:schemeClr>
+                </a:solidFill>
+                <a:latin typeface="Cascadia Code NF" pitchFamily="50" charset="0"/>
+                <a:ea typeface="Cascadia Code NF" pitchFamily="50" charset="0"/>
+                <a:cs typeface="Cascadia Code NF" pitchFamily="50" charset="0"/>
+              </a:rPr>
+              <a:t>Remotes are separate builds resolved at runtime. </a:t>
+            </a:r>
+          </a:p>
+          <a:p>
+            <a:pPr marL="0" indent="0">
+              <a:buNone/>
+            </a:pPr>
+            <a:r>
+              <a:rPr lang="en-US" sz="2800" i="1" dirty="0">
+                <a:solidFill>
+                  <a:schemeClr val="tx1">
+                    <a:lumMod val="85000"/>
+                    <a:lumOff val="15000"/>
+                  </a:schemeClr>
+                </a:solidFill>
+                <a:latin typeface="Cascadia Code NF" pitchFamily="50" charset="0"/>
+                <a:ea typeface="Cascadia Code NF" pitchFamily="50" charset="0"/>
+                <a:cs typeface="Cascadia Code NF" pitchFamily="50" charset="0"/>
+              </a:rPr>
+              <a:t>Eager import() warms the cache; lazy() resolves from it.</a:t>
+            </a:r>
+            <a:endParaRPr lang="en-US" sz="2800" dirty="0">
+              <a:solidFill>
+                <a:schemeClr val="tx1">
+                  <a:lumMod val="85000"/>
+                  <a:lumOff val="15000"/>
+                </a:schemeClr>
+              </a:solidFill>
+              <a:latin typeface="Cascadia Code NF" pitchFamily="50" charset="0"/>
+              <a:ea typeface="Cascadia Code NF" pitchFamily="50" charset="0"/>
+              <a:cs typeface="Cascadia Code NF" pitchFamily="50" charset="0"/>
+            </a:endParaRPr>
+          </a:p>
+        </p:txBody>
+      </p:sp>
+    </p:spTree>
+    <p:extLst>
+      <p:ext uri="{BB962C8B-B14F-4D97-AF65-F5344CB8AC3E}">
+        <p14:creationId xmlns:p14="http://schemas.microsoft.com/office/powerpoint/2010/main" val="2577224661"/>
+      </p:ext>
+    </p:extLst>
+  </p:cSld>
+  <p:clrMapOvr>
+    <a:masterClrMapping/>
+  </p:clrMapOvr>
+</p:sld>
+</file>
+
+<file path=ppt/slides/slide21.xml><?xml version="1.0" encoding="utf-8"?>
+<p:sld xmlns:a="http://schemas.openxmlformats.org/drawingml/2006/main" xmlns:r="http://schemas.openxmlformats.org/officeDocument/2006/relationships" xmlns:p="http://schemas.openxmlformats.org/presentationml/2006/main">
+  <p:cSld>
+    <p:spTree>
+      <p:nvGrpSpPr>
+        <p:cNvPr id="1" name=""/>
+        <p:cNvGrpSpPr/>
+        <p:nvPr/>
+      </p:nvGrpSpPr>
+      <p:grpSpPr>
+        <a:xfrm>
+          <a:off x="0" y="0"/>
+          <a:ext cx="0" cy="0"/>
+          <a:chOff x="0" y="0"/>
+          <a:chExt cx="0" cy="0"/>
+        </a:xfrm>
+      </p:grpSpPr>
+      <p:sp>
+        <p:nvSpPr>
+          <p:cNvPr id="3" name="Text 2">
+            <a:extLst>
+              <a:ext uri="{FF2B5EF4-FFF2-40B4-BE49-F238E27FC236}">
                 <a16:creationId xmlns:a16="http://schemas.microsoft.com/office/drawing/2014/main" id="{CC0F34E4-70E8-F750-1B49-A033FEC0C4E2}"/>
               </a:ext>
             </a:extLst>
@@ -6096,7 +6275,7 @@
 </p:sld>
 </file>
 
-<file path=ppt/slides/slide21.xml><?xml version="1.0" encoding="utf-8"?>
+<file path=ppt/slides/slide22.xml><?xml version="1.0" encoding="utf-8"?>
 <p:sld xmlns:a="http://schemas.openxmlformats.org/drawingml/2006/main" xmlns:r="http://schemas.openxmlformats.org/officeDocument/2006/relationships" xmlns:p="http://schemas.openxmlformats.org/presentationml/2006/main">
   <p:cSld>
     <p:spTree>
@@ -6156,7 +6335,7 @@
 </p:sld>
 </file>
 
-<file path=ppt/slides/slide22.xml><?xml version="1.0" encoding="utf-8"?>
+<file path=ppt/slides/slide23.xml><?xml version="1.0" encoding="utf-8"?>
 <p:sld xmlns:a="http://schemas.openxmlformats.org/drawingml/2006/main" xmlns:r="http://schemas.openxmlformats.org/officeDocument/2006/relationships" xmlns:p="http://schemas.openxmlformats.org/presentationml/2006/main">
   <p:cSld>
     <p:spTree>
@@ -6429,7 +6608,7 @@
 </p:sld>
 </file>
 
-<file path=ppt/slides/slide23.xml><?xml version="1.0" encoding="utf-8"?>
+<file path=ppt/slides/slide24.xml><?xml version="1.0" encoding="utf-8"?>
 <p:sld xmlns:a="http://schemas.openxmlformats.org/drawingml/2006/main" xmlns:r="http://schemas.openxmlformats.org/officeDocument/2006/relationships" xmlns:p="http://schemas.openxmlformats.org/presentationml/2006/main">
   <p:cSld>
     <p:spTree>
@@ -7314,7 +7493,7 @@
 </p:sld>
 </file>
 
-<file path=ppt/slides/slide24.xml><?xml version="1.0" encoding="utf-8"?>
+<file path=ppt/slides/slide25.xml><?xml version="1.0" encoding="utf-8"?>
 <p:sld xmlns:a="http://schemas.openxmlformats.org/drawingml/2006/main" xmlns:r="http://schemas.openxmlformats.org/officeDocument/2006/relationships" xmlns:p="http://schemas.openxmlformats.org/presentationml/2006/main">
   <p:cSld>
     <p:spTree>
@@ -7603,7 +7782,7 @@
 </p:sld>
 </file>
 
-<file path=ppt/slides/slide25.xml><?xml version="1.0" encoding="utf-8"?>
+<file path=ppt/slides/slide26.xml><?xml version="1.0" encoding="utf-8"?>
 <p:sld xmlns:a="http://schemas.openxmlformats.org/drawingml/2006/main" xmlns:r="http://schemas.openxmlformats.org/officeDocument/2006/relationships" xmlns:p="http://schemas.openxmlformats.org/presentationml/2006/main">
   <p:cSld>
     <p:spTree>
@@ -8587,7 +8766,7 @@
 </p:sld>
 </file>
 
-<file path=ppt/slides/slide26.xml><?xml version="1.0" encoding="utf-8"?>
+<file path=ppt/slides/slide27.xml><?xml version="1.0" encoding="utf-8"?>
 <p:sld xmlns:a="http://schemas.openxmlformats.org/drawingml/2006/main" xmlns:r="http://schemas.openxmlformats.org/officeDocument/2006/relationships" xmlns:p="http://schemas.openxmlformats.org/presentationml/2006/main">
   <p:cSld>
     <p:spTree>
@@ -8938,7 +9117,7 @@
 </p:sld>
 </file>
 
-<file path=ppt/slides/slide27.xml><?xml version="1.0" encoding="utf-8"?>
+<file path=ppt/slides/slide28.xml><?xml version="1.0" encoding="utf-8"?>
 <p:sld xmlns:a="http://schemas.openxmlformats.org/drawingml/2006/main" xmlns:r="http://schemas.openxmlformats.org/officeDocument/2006/relationships" xmlns:p="http://schemas.openxmlformats.org/presentationml/2006/main">
   <p:cSld>
     <p:spTree>
@@ -8998,7 +9177,7 @@
 </p:sld>
 </file>
 
-<file path=ppt/slides/slide28.xml><?xml version="1.0" encoding="utf-8"?>
+<file path=ppt/slides/slide29.xml><?xml version="1.0" encoding="utf-8"?>
 <p:sld xmlns:a="http://schemas.openxmlformats.org/drawingml/2006/main" xmlns:r="http://schemas.openxmlformats.org/officeDocument/2006/relationships" xmlns:p="http://schemas.openxmlformats.org/presentationml/2006/main">
   <p:cSld>
     <p:spTree>
@@ -9351,8 +9530,8 @@
         </p:nvSpPr>
         <p:spPr>
           <a:xfrm>
-            <a:off x="3748972" y="2782669"/>
-            <a:ext cx="5713167" cy="707886"/>
+            <a:off x="1324420" y="2721114"/>
+            <a:ext cx="9539984" cy="707886"/>
           </a:xfrm>
           <a:prstGeom prst="rect">
             <a:avLst/>
@@ -9368,7 +9547,15 @@
             <a:pPr algn="ctr"/>
             <a:r>
               <a:rPr lang="en-US" sz="4000" dirty="0"/>
-              <a:t>What are we solving here?</a:t>
+              <a:t>What are we solving here in </a:t>
+            </a:r>
+            <a:r>
+              <a:rPr lang="en-US" sz="4000" dirty="0" err="1"/>
+              <a:t>microfrontends</a:t>
+            </a:r>
+            <a:r>
+              <a:rPr lang="en-US" sz="4000" dirty="0"/>
+              <a:t>?</a:t>
             </a:r>
             <a:endParaRPr lang="en-GB" sz="4000" dirty="0"/>
           </a:p>

--- a/presentation/module-federation.pptx
+++ b/presentation/module-federation.pptx
@@ -5,7 +5,7 @@
     <p:sldMasterId id="2147483648" r:id="rId1"/>
   </p:sldMasterIdLst>
   <p:notesMasterIdLst>
-    <p:notesMasterId r:id="rId31"/>
+    <p:notesMasterId r:id="rId32"/>
   </p:notesMasterIdLst>
   <p:sldIdLst>
     <p:sldId id="298" r:id="rId2"/>
@@ -22,21 +22,22 @@
     <p:sldId id="318" r:id="rId13"/>
     <p:sldId id="336" r:id="rId14"/>
     <p:sldId id="328" r:id="rId15"/>
-    <p:sldId id="319" r:id="rId16"/>
-    <p:sldId id="320" r:id="rId17"/>
-    <p:sldId id="329" r:id="rId18"/>
-    <p:sldId id="327" r:id="rId19"/>
-    <p:sldId id="335" r:id="rId20"/>
-    <p:sldId id="325" r:id="rId21"/>
-    <p:sldId id="326" r:id="rId22"/>
-    <p:sldId id="334" r:id="rId23"/>
-    <p:sldId id="332" r:id="rId24"/>
-    <p:sldId id="333" r:id="rId25"/>
-    <p:sldId id="331" r:id="rId26"/>
-    <p:sldId id="323" r:id="rId27"/>
-    <p:sldId id="330" r:id="rId28"/>
-    <p:sldId id="310" r:id="rId29"/>
-    <p:sldId id="322" r:id="rId30"/>
+    <p:sldId id="337" r:id="rId16"/>
+    <p:sldId id="319" r:id="rId17"/>
+    <p:sldId id="320" r:id="rId18"/>
+    <p:sldId id="329" r:id="rId19"/>
+    <p:sldId id="327" r:id="rId20"/>
+    <p:sldId id="335" r:id="rId21"/>
+    <p:sldId id="325" r:id="rId22"/>
+    <p:sldId id="326" r:id="rId23"/>
+    <p:sldId id="334" r:id="rId24"/>
+    <p:sldId id="332" r:id="rId25"/>
+    <p:sldId id="333" r:id="rId26"/>
+    <p:sldId id="331" r:id="rId27"/>
+    <p:sldId id="323" r:id="rId28"/>
+    <p:sldId id="330" r:id="rId29"/>
+    <p:sldId id="310" r:id="rId30"/>
+    <p:sldId id="322" r:id="rId31"/>
   </p:sldIdLst>
   <p:sldSz cx="12188825" cy="6858000"/>
   <p:notesSz cx="6858000" cy="12188825"/>
@@ -921,29 +922,56 @@
           <a:bodyPr/>
           <a:lstStyle/>
           <a:p>
+            <a:pPr rtl="0"/>
             <a:r>
               <a:rPr lang="en-US" dirty="0"/>
-              <a:t>Module Federation is for developers and teams. Independent builds. Independent deploys. Onboarding that actually scales.</a:t>
-            </a:r>
-          </a:p>
-          <a:p>
-            <a:endParaRPr lang="en-US" dirty="0"/>
-          </a:p>
-          <a:p>
+              <a:t>The different ports are just a local dev artifact — three dev servers can't all bind port 3000 on one laptop — and they vanish on deploy. In production the browser only ever sees </a:t>
+            </a:r>
+            <a:r>
+              <a:rPr lang="en-US" sz="1200" kern="1200" dirty="0">
+                <a:solidFill>
+                  <a:schemeClr val="tx1"/>
+                </a:solidFill>
+                <a:latin typeface="+mn-lt"/>
+                <a:ea typeface="+mn-ea"/>
+                <a:cs typeface="+mn-cs"/>
+              </a:rPr>
+              <a:t>acme.com</a:t>
+            </a:r>
             <a:r>
               <a:rPr lang="en-US" dirty="0"/>
-              <a:t>Suspense and skeletons are for end users. Instant perceived load. No blank screens at runtime.</a:t>
-            </a:r>
-          </a:p>
-          <a:p>
-            <a:endParaRPr lang="en-GB" dirty="0"/>
+              <a:t>, with a router at the edge (a </a:t>
+            </a:r>
+            <a:r>
+              <a:rPr lang="en-US" dirty="0" err="1"/>
+              <a:t>Vercel</a:t>
+            </a:r>
+            <a:r>
+              <a:rPr lang="en-US" dirty="0"/>
+              <a:t> rewrite, a CloudFront behavior, an nginx </a:t>
+            </a:r>
+            <a:r>
+              <a:rPr lang="en-US" sz="1200" kern="1200" dirty="0" err="1">
+                <a:solidFill>
+                  <a:schemeClr val="tx1"/>
+                </a:solidFill>
+                <a:latin typeface="+mn-lt"/>
+                <a:ea typeface="+mn-ea"/>
+                <a:cs typeface="+mn-cs"/>
+              </a:rPr>
+              <a:t>proxy_pass</a:t>
+            </a:r>
+            <a:r>
+              <a:rPr lang="en-US" dirty="0"/>
+              <a:t>, a Cloudflare Worker) mapping each path to the host where that team deploys, so users stay on one origin while each team still ships on its own schedule. Those deploy targets are free: every platform hands you a hostname, and subdomains of a domain you already own are just DNS records, not purchases. One domain, three paths, nothing extra to buy.</a:t>
+            </a:r>
           </a:p>
         </p:txBody>
       </p:sp>
     </p:spTree>
     <p:extLst>
       <p:ext uri="{BB962C8B-B14F-4D97-AF65-F5344CB8AC3E}">
-        <p14:creationId xmlns:p14="http://schemas.microsoft.com/office/powerpoint/2010/main" val="447115205"/>
+        <p14:creationId xmlns:p14="http://schemas.microsoft.com/office/powerpoint/2010/main" val="108089564"/>
       </p:ext>
     </p:extLst>
   </p:cSld>
@@ -1021,7 +1049,7 @@
           <a:p>
             <a:r>
               <a:rPr lang="en-US" dirty="0"/>
-              <a:t>You can have one without the other. Plenty of teams do. You can federate four remotes and still show a blank screen and a spinner every time someone clicks a tab. That is slow user experience even when team ownership is solid.</a:t>
+              <a:t>Module Federation is for developers and teams. Gives you independent builds and independent deploys. Onboarding improvements.</a:t>
             </a:r>
           </a:p>
           <a:p>
@@ -1030,7 +1058,7 @@
           <a:p>
             <a:r>
               <a:rPr lang="en-US" dirty="0"/>
-              <a:t>With Suspense, the user clicks a tab, a skeleton appears immediately, and the content resolves when it is ready. Each remote owns its own loading choreography.</a:t>
+              <a:t>Suspense and skeletons are for end users. They experience perceived instant load and no blank screens at runtime.</a:t>
             </a:r>
           </a:p>
           <a:p>
@@ -1041,7 +1069,7 @@
     </p:spTree>
     <p:extLst>
       <p:ext uri="{BB962C8B-B14F-4D97-AF65-F5344CB8AC3E}">
-        <p14:creationId xmlns:p14="http://schemas.microsoft.com/office/powerpoint/2010/main" val="2672093464"/>
+        <p14:creationId xmlns:p14="http://schemas.microsoft.com/office/powerpoint/2010/main" val="447115205"/>
       </p:ext>
     </p:extLst>
   </p:cSld>
@@ -1119,22 +1147,16 @@
           <a:p>
             <a:r>
               <a:rPr lang="en-US" dirty="0"/>
-              <a:t>This is the shape of the app. One shell on port 3000. It owns navigation, the router, the theme, and a status strip that reads Instant, Eager, or Streaming.</a:t>
-            </a:r>
+              <a:t>You can have one without the other. Plenty of teams do. You can federate four remotes and still show a blank screen and a spinner every time someone clicks a tab. That is slow user experience even when team ownership is solid.</a:t>
+            </a:r>
+          </a:p>
+          <a:p>
+            <a:endParaRPr lang="en-US" dirty="0"/>
           </a:p>
           <a:p>
             <a:r>
               <a:rPr lang="en-US" dirty="0"/>
-              <a:t>Every remote is wrapped the same way. An error boundary. Then Suspense with a skeleton fallback. Then the remote module itself.</a:t>
-            </a:r>
-          </a:p>
-          <a:p>
-            <a:endParaRPr lang="en-US" dirty="0"/>
-          </a:p>
-          <a:p>
-            <a:r>
-              <a:rPr lang="en-US" dirty="0"/>
-              <a:t>Four remotes hang off that shell. Home on 3004, instant. Records on 3001, eager. Prescriptions on 3002, streamed. Analytics on 3003, streamed. Not every module should load the same way. Content priority decides the strategy.</a:t>
+              <a:t>With Suspense, the user clicks a tab, a skeleton appears immediately, and the content resolves when it is ready. Each remote owns its own loading choreography.</a:t>
             </a:r>
           </a:p>
           <a:p>
@@ -1145,7 +1167,7 @@
     </p:spTree>
     <p:extLst>
       <p:ext uri="{BB962C8B-B14F-4D97-AF65-F5344CB8AC3E}">
-        <p14:creationId xmlns:p14="http://schemas.microsoft.com/office/powerpoint/2010/main" val="1899568420"/>
+        <p14:creationId xmlns:p14="http://schemas.microsoft.com/office/powerpoint/2010/main" val="2672093464"/>
       </p:ext>
     </p:extLst>
   </p:cSld>
@@ -1223,13 +1245,22 @@
           <a:p>
             <a:r>
               <a:rPr lang="en-US" dirty="0"/>
-              <a:t>Prescriptions and Analytics are streamed. They load on demand, behind per-module skeletons.</a:t>
+              <a:t>This is the shape of the app. One shell on port 3000. It owns navigation, the router, the theme, and a status strip that reads Instant, Eager, or Streaming.</a:t>
             </a:r>
           </a:p>
           <a:p>
             <a:r>
               <a:rPr lang="en-US" dirty="0"/>
-              <a:t>Every strategy still gets three layers of resilience. A catch on lazy, so an unreachable remote becomes a fallback instead of a white screen. Suspense, so a loading remote shows its own skeleton. An error boundary, so a runtime crash in one remote does not take down the app.</a:t>
+              <a:t>Every remote is wrapped the same way. An error boundary. Then Suspense with a skeleton fallback. Then the remote module itself.</a:t>
+            </a:r>
+          </a:p>
+          <a:p>
+            <a:endParaRPr lang="en-US" dirty="0"/>
+          </a:p>
+          <a:p>
+            <a:r>
+              <a:rPr lang="en-US" dirty="0"/>
+              <a:t>Four remotes hang off that shell. Home on 3004, instant. Records on 3001, eager. Prescriptions on 3002, streamed. Analytics on 3003, streamed. Not every module should load the same way. Content priority decides the strategy.</a:t>
             </a:r>
           </a:p>
           <a:p>
@@ -1240,7 +1271,7 @@
     </p:spTree>
     <p:extLst>
       <p:ext uri="{BB962C8B-B14F-4D97-AF65-F5344CB8AC3E}">
-        <p14:creationId xmlns:p14="http://schemas.microsoft.com/office/powerpoint/2010/main" val="4040777647"/>
+        <p14:creationId xmlns:p14="http://schemas.microsoft.com/office/powerpoint/2010/main" val="1899568420"/>
       </p:ext>
     </p:extLst>
   </p:cSld>
@@ -1316,6 +1347,18 @@
           <a:bodyPr/>
           <a:lstStyle/>
           <a:p>
+            <a:r>
+              <a:rPr lang="en-US" dirty="0"/>
+              <a:t>Prescriptions and Analytics are streamed. They load on demand, behind per-module skeletons.</a:t>
+            </a:r>
+          </a:p>
+          <a:p>
+            <a:r>
+              <a:rPr lang="en-US" dirty="0"/>
+              <a:t>Every strategy still gets three layers of resilience. A catch on lazy, so an unreachable remote becomes a fallback instead of a white screen. Suspense, so a loading remote shows its own skeleton. An error boundary, so a runtime crash in one remote does not take down the app.</a:t>
+            </a:r>
+          </a:p>
+          <a:p>
             <a:endParaRPr lang="en-GB" dirty="0"/>
           </a:p>
         </p:txBody>
@@ -1323,7 +1366,7 @@
     </p:spTree>
     <p:extLst>
       <p:ext uri="{BB962C8B-B14F-4D97-AF65-F5344CB8AC3E}">
-        <p14:creationId xmlns:p14="http://schemas.microsoft.com/office/powerpoint/2010/main" val="874813599"/>
+        <p14:creationId xmlns:p14="http://schemas.microsoft.com/office/powerpoint/2010/main" val="4040777647"/>
       </p:ext>
     </p:extLst>
   </p:cSld>
@@ -1482,109 +1525,6 @@
           <a:bodyPr/>
           <a:lstStyle/>
           <a:p>
-            <a:pPr marL="0" marR="0" lvl="0" indent="0" algn="l" defTabSz="914400" rtl="0" eaLnBrk="1" fontAlgn="auto" latinLnBrk="0" hangingPunct="1">
-              <a:lnSpc>
-                <a:spcPct val="100000"/>
-              </a:lnSpc>
-              <a:spcBef>
-                <a:spcPts val="0"/>
-              </a:spcBef>
-              <a:spcAft>
-                <a:spcPts val="0"/>
-              </a:spcAft>
-              <a:buClrTx/>
-              <a:buSzTx/>
-              <a:buFontTx/>
-              <a:buNone/>
-              <a:tabLst/>
-              <a:defRPr/>
-            </a:pPr>
-            <a:r>
-              <a:rPr lang="en-US" dirty="0"/>
-              <a:t>People ask why we wrap eager modules in </a:t>
-            </a:r>
-            <a:r>
-              <a:rPr lang="en-US" sz="1200" kern="1200" dirty="0">
-                <a:solidFill>
-                  <a:schemeClr val="tx1"/>
-                </a:solidFill>
-                <a:latin typeface="+mn-lt"/>
-                <a:ea typeface="+mn-ea"/>
-                <a:cs typeface="+mn-cs"/>
-              </a:rPr>
-              <a:t>lazy()</a:t>
-            </a:r>
-            <a:r>
-              <a:rPr lang="en-US" dirty="0"/>
-              <a:t>. It's not that static imports are impossible — they work, because </a:t>
-            </a:r>
-            <a:r>
-              <a:rPr lang="en-US" sz="1200" kern="1200" dirty="0" err="1">
-                <a:solidFill>
-                  <a:schemeClr val="tx1"/>
-                </a:solidFill>
-                <a:latin typeface="+mn-lt"/>
-                <a:ea typeface="+mn-ea"/>
-                <a:cs typeface="+mn-cs"/>
-              </a:rPr>
-              <a:t>index.tsx</a:t>
-            </a:r>
-            <a:r>
-              <a:rPr lang="en-US" dirty="0" err="1"/>
-              <a:t>'s</a:t>
-            </a:r>
-            <a:r>
-              <a:rPr lang="en-US" dirty="0"/>
-              <a:t> dynamic import already resolved the shared scope. It's that a static import makes the remote block first paint, and leaves nowhere to catch a failed remote. So we fire </a:t>
-            </a:r>
-            <a:r>
-              <a:rPr lang="en-US" sz="1200" kern="1200" dirty="0">
-                <a:solidFill>
-                  <a:schemeClr val="tx1"/>
-                </a:solidFill>
-                <a:latin typeface="+mn-lt"/>
-                <a:ea typeface="+mn-ea"/>
-                <a:cs typeface="+mn-cs"/>
-              </a:rPr>
-              <a:t>import()</a:t>
-            </a:r>
-            <a:r>
-              <a:rPr lang="en-US" dirty="0"/>
-              <a:t> at shell </a:t>
-            </a:r>
-            <a:r>
-              <a:rPr lang="en-US" dirty="0" err="1"/>
-              <a:t>init</a:t>
-            </a:r>
-            <a:r>
-              <a:rPr lang="en-US" dirty="0"/>
-              <a:t> to warm it, and </a:t>
-            </a:r>
-            <a:r>
-              <a:rPr lang="en-US" sz="1200" kern="1200" dirty="0">
-                <a:solidFill>
-                  <a:schemeClr val="tx1"/>
-                </a:solidFill>
-                <a:latin typeface="+mn-lt"/>
-                <a:ea typeface="+mn-ea"/>
-                <a:cs typeface="+mn-cs"/>
-              </a:rPr>
-              <a:t>lazy()</a:t>
-            </a:r>
-            <a:r>
-              <a:rPr lang="en-US" dirty="0"/>
-              <a:t> resolves from the module registry instantly — while keeping the Suspense and </a:t>
-            </a:r>
-            <a:r>
-              <a:rPr lang="en-US" dirty="0" err="1"/>
-              <a:t>ErrorBoundary</a:t>
-            </a:r>
-            <a:r>
-              <a:rPr lang="en-US" dirty="0"/>
-              <a:t> per module.</a:t>
-            </a:r>
-          </a:p>
-          <a:p>
             <a:endParaRPr lang="en-GB" dirty="0"/>
           </a:p>
         </p:txBody>
@@ -1592,7 +1532,7 @@
     </p:spTree>
     <p:extLst>
       <p:ext uri="{BB962C8B-B14F-4D97-AF65-F5344CB8AC3E}">
-        <p14:creationId xmlns:p14="http://schemas.microsoft.com/office/powerpoint/2010/main" val="2316851497"/>
+        <p14:creationId xmlns:p14="http://schemas.microsoft.com/office/powerpoint/2010/main" val="874813599"/>
       </p:ext>
     </p:extLst>
   </p:cSld>
@@ -1668,43 +1608,117 @@
           <a:bodyPr/>
           <a:lstStyle/>
           <a:p>
+            <a:pPr marL="0" marR="0" lvl="0" indent="0" algn="l" defTabSz="914400" rtl="0" eaLnBrk="1" fontAlgn="auto" latinLnBrk="0" hangingPunct="1">
+              <a:lnSpc>
+                <a:spcPct val="100000"/>
+              </a:lnSpc>
+              <a:spcBef>
+                <a:spcPts val="0"/>
+              </a:spcBef>
+              <a:spcAft>
+                <a:spcPts val="0"/>
+              </a:spcAft>
+              <a:buClrTx/>
+              <a:buSzTx/>
+              <a:buFontTx/>
+              <a:buNone/>
+              <a:tabLst/>
+              <a:defRPr/>
+            </a:pPr>
             <a:r>
               <a:rPr lang="en-US" dirty="0"/>
-              <a:t>A health monitor that polls remoteEntry.js every five seconds. Kill switches. An A/B deployment ring. That panel is for the demo. I can take a module down in front of you and show you that the rest of the app keeps running. Basically we are going to simulate </a:t>
-            </a:r>
-            <a:r>
-              <a:rPr lang="en-US" sz="1200" i="1" dirty="0">
+              <a:t>People ask why we wrap eager modules in </a:t>
+            </a:r>
+            <a:r>
+              <a:rPr lang="en-US" sz="1200" kern="1200" dirty="0">
                 <a:solidFill>
-                  <a:schemeClr val="bg1">
-                    <a:lumMod val="95000"/>
-                  </a:schemeClr>
+                  <a:schemeClr val="tx1"/>
                 </a:solidFill>
-                <a:latin typeface="Instrument Serif" pitchFamily="34" charset="0"/>
-                <a:ea typeface="Instrument Serif" pitchFamily="34" charset="-122"/>
+                <a:latin typeface="+mn-lt"/>
+                <a:ea typeface="+mn-ea"/>
+                <a:cs typeface="+mn-cs"/>
               </a:rPr>
-              <a:t>m</a:t>
-            </a:r>
-            <a:r>
-              <a:rPr lang="en-US" sz="1200" i="1" dirty="0">
+              <a:t>lazy()</a:t>
+            </a:r>
+            <a:r>
+              <a:rPr lang="en-US" dirty="0"/>
+              <a:t>. It's not that static imports are impossible — they work, because </a:t>
+            </a:r>
+            <a:r>
+              <a:rPr lang="en-US" sz="1200" kern="1200" dirty="0" err="1">
                 <a:solidFill>
-                  <a:schemeClr val="bg1">
-                    <a:lumMod val="95000"/>
-                  </a:schemeClr>
+                  <a:schemeClr val="tx1"/>
                 </a:solidFill>
-                <a:latin typeface="Instrument Serif" pitchFamily="34" charset="0"/>
-                <a:ea typeface="Instrument Serif" pitchFamily="34" charset="-122"/>
-                <a:cs typeface="Instrument Serif" pitchFamily="34" charset="-120"/>
+                <a:latin typeface="+mn-lt"/>
+                <a:ea typeface="+mn-ea"/>
+                <a:cs typeface="+mn-cs"/>
               </a:rPr>
-              <a:t>odule-level crashes, network failures, and bad deploys are isolated at the boundary. </a:t>
-            </a:r>
-            <a:endParaRPr lang="en-US" dirty="0"/>
+              <a:t>index.tsx</a:t>
+            </a:r>
+            <a:r>
+              <a:rPr lang="en-US" dirty="0" err="1"/>
+              <a:t>'s</a:t>
+            </a:r>
+            <a:r>
+              <a:rPr lang="en-US" dirty="0"/>
+              <a:t> dynamic import already resolved the shared scope. It's that a static import makes the remote block first paint, and leaves nowhere to catch a failed remote. So we fire </a:t>
+            </a:r>
+            <a:r>
+              <a:rPr lang="en-US" sz="1200" kern="1200" dirty="0">
+                <a:solidFill>
+                  <a:schemeClr val="tx1"/>
+                </a:solidFill>
+                <a:latin typeface="+mn-lt"/>
+                <a:ea typeface="+mn-ea"/>
+                <a:cs typeface="+mn-cs"/>
+              </a:rPr>
+              <a:t>import()</a:t>
+            </a:r>
+            <a:r>
+              <a:rPr lang="en-US" dirty="0"/>
+              <a:t> at shell </a:t>
+            </a:r>
+            <a:r>
+              <a:rPr lang="en-US" dirty="0" err="1"/>
+              <a:t>init</a:t>
+            </a:r>
+            <a:r>
+              <a:rPr lang="en-US" dirty="0"/>
+              <a:t> to warm it, and </a:t>
+            </a:r>
+            <a:r>
+              <a:rPr lang="en-US" sz="1200" kern="1200" dirty="0">
+                <a:solidFill>
+                  <a:schemeClr val="tx1"/>
+                </a:solidFill>
+                <a:latin typeface="+mn-lt"/>
+                <a:ea typeface="+mn-ea"/>
+                <a:cs typeface="+mn-cs"/>
+              </a:rPr>
+              <a:t>lazy()</a:t>
+            </a:r>
+            <a:r>
+              <a:rPr lang="en-US" dirty="0"/>
+              <a:t> resolves from the module registry instantly — while keeping the Suspense and </a:t>
+            </a:r>
+            <a:r>
+              <a:rPr lang="en-US" dirty="0" err="1"/>
+              <a:t>ErrorBoundary</a:t>
+            </a:r>
+            <a:r>
+              <a:rPr lang="en-US" dirty="0"/>
+              <a:t> per module.</a:t>
+            </a:r>
+          </a:p>
+          <a:p>
+            <a:endParaRPr lang="en-GB" dirty="0"/>
           </a:p>
         </p:txBody>
       </p:sp>
     </p:spTree>
     <p:extLst>
       <p:ext uri="{BB962C8B-B14F-4D97-AF65-F5344CB8AC3E}">
-        <p14:creationId xmlns:p14="http://schemas.microsoft.com/office/powerpoint/2010/main" val="3599504877"/>
+        <p14:creationId xmlns:p14="http://schemas.microsoft.com/office/powerpoint/2010/main" val="2316851497"/>
       </p:ext>
     </p:extLst>
   </p:cSld>
@@ -1780,14 +1794,43 @@
           <a:bodyPr/>
           <a:lstStyle/>
           <a:p>
-            <a:endParaRPr lang="en-GB" dirty="0"/>
+            <a:r>
+              <a:rPr lang="en-US" dirty="0"/>
+              <a:t>A health monitor that polls remoteEntry.js every five seconds. Kill switches. An A/B deployment ring. That panel is for the demo. I can take a module down in front of you and show you that the rest of the app keeps running. Basically we are going to simulate </a:t>
+            </a:r>
+            <a:r>
+              <a:rPr lang="en-US" sz="1200" i="1" dirty="0">
+                <a:solidFill>
+                  <a:schemeClr val="bg1">
+                    <a:lumMod val="95000"/>
+                  </a:schemeClr>
+                </a:solidFill>
+                <a:latin typeface="Instrument Serif" pitchFamily="34" charset="0"/>
+                <a:ea typeface="Instrument Serif" pitchFamily="34" charset="-122"/>
+              </a:rPr>
+              <a:t>m</a:t>
+            </a:r>
+            <a:r>
+              <a:rPr lang="en-US" sz="1200" i="1" dirty="0">
+                <a:solidFill>
+                  <a:schemeClr val="bg1">
+                    <a:lumMod val="95000"/>
+                  </a:schemeClr>
+                </a:solidFill>
+                <a:latin typeface="Instrument Serif" pitchFamily="34" charset="0"/>
+                <a:ea typeface="Instrument Serif" pitchFamily="34" charset="-122"/>
+                <a:cs typeface="Instrument Serif" pitchFamily="34" charset="-120"/>
+              </a:rPr>
+              <a:t>odule-level crashes, network failures, and bad deploys are isolated at the boundary. </a:t>
+            </a:r>
+            <a:endParaRPr lang="en-US" dirty="0"/>
           </a:p>
         </p:txBody>
       </p:sp>
     </p:spTree>
     <p:extLst>
       <p:ext uri="{BB962C8B-B14F-4D97-AF65-F5344CB8AC3E}">
-        <p14:creationId xmlns:p14="http://schemas.microsoft.com/office/powerpoint/2010/main" val="3759391641"/>
+        <p14:creationId xmlns:p14="http://schemas.microsoft.com/office/powerpoint/2010/main" val="3599504877"/>
       </p:ext>
     </p:extLst>
   </p:cSld>
@@ -1863,34 +1906,6 @@
           <a:bodyPr/>
           <a:lstStyle/>
           <a:p>
-            <a:r>
-              <a:rPr lang="en-US" dirty="0"/>
-              <a:t>Why events instead of a shared store? A shared store is a shared dependency. Version coupling between teams. Events survive independent deploys. They even survive framework diversity. A Vue remote and a React remote can talk through the same window contract.</a:t>
-            </a:r>
-          </a:p>
-          <a:p>
-            <a:r>
-              <a:rPr lang="en-US" dirty="0"/>
-              <a:t>The payload is still a versioned contract. Keep it backward compatible. Each remote defines the same event shapes in its own types file by augmenting </a:t>
-            </a:r>
-            <a:r>
-              <a:rPr lang="en-US" dirty="0" err="1"/>
-              <a:t>WindowEventMap</a:t>
-            </a:r>
-            <a:r>
-              <a:rPr lang="en-US" dirty="0"/>
-              <a:t>. No shared package is required. </a:t>
-            </a:r>
-            <a:r>
-              <a:rPr lang="en-US" dirty="0" err="1"/>
-              <a:t>addEventListener</a:t>
-            </a:r>
-            <a:r>
-              <a:rPr lang="en-US" dirty="0"/>
-              <a:t> is fully typed.</a:t>
-            </a:r>
-          </a:p>
-          <a:p>
             <a:endParaRPr lang="en-GB" dirty="0"/>
           </a:p>
         </p:txBody>
@@ -1898,7 +1913,7 @@
     </p:spTree>
     <p:extLst>
       <p:ext uri="{BB962C8B-B14F-4D97-AF65-F5344CB8AC3E}">
-        <p14:creationId xmlns:p14="http://schemas.microsoft.com/office/powerpoint/2010/main" val="3974856141"/>
+        <p14:creationId xmlns:p14="http://schemas.microsoft.com/office/powerpoint/2010/main" val="3759391641"/>
       </p:ext>
     </p:extLst>
   </p:cSld>
@@ -1976,8 +1991,32 @@
           <a:p>
             <a:r>
               <a:rPr lang="en-US" dirty="0"/>
-              <a:t>Each app owns its own store and its own query client — nothing is shared. For client state they agree on a typed event contract, and whoever owns the state is the one who broadcasts: the shell owns theme and routing, so it broadcasts those; the counter belongs to nobody, so any module can. For server state there's no syncing at all — every app just fetches, because the API is already the shared state.</a:t>
-            </a:r>
+              <a:t>Why events instead of a shared store? A shared store is a shared dependency. Version coupling between teams. Events survive independent deploys. They even survive framework diversity. A Vue remote and a React remote can talk through the same window contract.</a:t>
+            </a:r>
+          </a:p>
+          <a:p>
+            <a:r>
+              <a:rPr lang="en-US" dirty="0"/>
+              <a:t>The payload is still a versioned contract. Keep it backward compatible. Each remote defines the same event shapes in its own types file by augmenting </a:t>
+            </a:r>
+            <a:r>
+              <a:rPr lang="en-US" dirty="0" err="1"/>
+              <a:t>WindowEventMap</a:t>
+            </a:r>
+            <a:r>
+              <a:rPr lang="en-US" dirty="0"/>
+              <a:t>. No shared package is required. </a:t>
+            </a:r>
+            <a:r>
+              <a:rPr lang="en-US" dirty="0" err="1"/>
+              <a:t>addEventListener</a:t>
+            </a:r>
+            <a:r>
+              <a:rPr lang="en-US" dirty="0"/>
+              <a:t> is fully typed.</a:t>
+            </a:r>
+          </a:p>
+          <a:p>
             <a:endParaRPr lang="en-GB" dirty="0"/>
           </a:p>
         </p:txBody>
@@ -1985,7 +2024,7 @@
     </p:spTree>
     <p:extLst>
       <p:ext uri="{BB962C8B-B14F-4D97-AF65-F5344CB8AC3E}">
-        <p14:creationId xmlns:p14="http://schemas.microsoft.com/office/powerpoint/2010/main" val="983126966"/>
+        <p14:creationId xmlns:p14="http://schemas.microsoft.com/office/powerpoint/2010/main" val="3974856141"/>
       </p:ext>
     </p:extLst>
   </p:cSld>
@@ -2063,16 +2102,8 @@
           <a:p>
             <a:r>
               <a:rPr lang="en-US" dirty="0"/>
-              <a:t>Theming is a cross-cutting concern, and the shell owns it.</a:t>
-            </a:r>
-          </a:p>
-          <a:p>
-            <a:r>
-              <a:rPr lang="en-US" dirty="0"/>
-              <a:t>The shell persists the choice to local storage. It applies CSS variables to the document element. It exposes a small bridge on window so a remote can read or set the theme without importing host code. And it broadcasts a theme-change event.</a:t>
-            </a:r>
-          </a:p>
-          <a:p>
+              <a:t>Each app owns its own store and its own query client — nothing is shared. For client state they agree on a typed event contract, and whoever owns the state is the one who broadcasts: the shell owns theme and routing, so it broadcasts those; the counter belongs to nobody, so any module can. For server state there's no syncing at all — every app just fetches, because the API is already the shared state.</a:t>
+            </a:r>
             <a:endParaRPr lang="en-GB" dirty="0"/>
           </a:p>
         </p:txBody>
@@ -2080,7 +2111,7 @@
     </p:spTree>
     <p:extLst>
       <p:ext uri="{BB962C8B-B14F-4D97-AF65-F5344CB8AC3E}">
-        <p14:creationId xmlns:p14="http://schemas.microsoft.com/office/powerpoint/2010/main" val="2728972476"/>
+        <p14:creationId xmlns:p14="http://schemas.microsoft.com/office/powerpoint/2010/main" val="983126966"/>
       </p:ext>
     </p:extLst>
   </p:cSld>
@@ -2158,13 +2189,13 @@
           <a:p>
             <a:r>
               <a:rPr lang="en-US" dirty="0"/>
-              <a:t>For the rest, the nav link fires on mouse enter. When the cursor touches Prescriptions or Analytics, the chunk starts fetching in the background. Click, and it is often already cached.</a:t>
+              <a:t>Theming is a cross-cutting concern, and the shell owns it.</a:t>
             </a:r>
           </a:p>
           <a:p>
             <a:r>
               <a:rPr lang="en-US" dirty="0"/>
-              <a:t>Instant means the landing page fetches lazily, with no streaming delay. Eager means preloaded the moment the shell mounts. Hover means prefetched when the user aims at a tab. That is why Records feels instant even though it is a separate app on a separate server. The work happened at mount.</a:t>
+              <a:t>The shell persists the choice to local storage. It applies CSS variables to the document element. It exposes a small bridge on window so a remote can read or set the theme without importing host code. And it broadcasts a theme-change event.</a:t>
             </a:r>
           </a:p>
           <a:p>
@@ -2175,7 +2206,7 @@
     </p:spTree>
     <p:extLst>
       <p:ext uri="{BB962C8B-B14F-4D97-AF65-F5344CB8AC3E}">
-        <p14:creationId xmlns:p14="http://schemas.microsoft.com/office/powerpoint/2010/main" val="2202382534"/>
+        <p14:creationId xmlns:p14="http://schemas.microsoft.com/office/powerpoint/2010/main" val="2728972476"/>
       </p:ext>
     </p:extLst>
   </p:cSld>
@@ -2253,6 +2284,101 @@
           <a:p>
             <a:r>
               <a:rPr lang="en-US" dirty="0"/>
+              <a:t>For the rest, the nav link fires on mouse enter. When the cursor touches Prescriptions or Analytics, the chunk starts fetching in the background. Click, and it is often already cached.</a:t>
+            </a:r>
+          </a:p>
+          <a:p>
+            <a:r>
+              <a:rPr lang="en-US" dirty="0"/>
+              <a:t>Instant means the landing page fetches lazily, with no streaming delay. Eager means preloaded the moment the shell mounts. Hover means prefetched when the user aims at a tab. That is why Records feels instant even though it is a separate app on a separate server. The work happened at mount.</a:t>
+            </a:r>
+          </a:p>
+          <a:p>
+            <a:endParaRPr lang="en-GB" dirty="0"/>
+          </a:p>
+        </p:txBody>
+      </p:sp>
+    </p:spTree>
+    <p:extLst>
+      <p:ext uri="{BB962C8B-B14F-4D97-AF65-F5344CB8AC3E}">
+        <p14:creationId xmlns:p14="http://schemas.microsoft.com/office/powerpoint/2010/main" val="2202382534"/>
+      </p:ext>
+    </p:extLst>
+  </p:cSld>
+  <p:clrMapOvr>
+    <a:masterClrMapping/>
+  </p:clrMapOvr>
+</p:notes>
+</file>
+
+<file path=ppt/notesSlides/notesSlide28.xml><?xml version="1.0" encoding="utf-8"?>
+<p:notes xmlns:a="http://schemas.openxmlformats.org/drawingml/2006/main" xmlns:r="http://schemas.openxmlformats.org/officeDocument/2006/relationships" xmlns:p="http://schemas.openxmlformats.org/presentationml/2006/main">
+  <p:cSld>
+    <p:spTree>
+      <p:nvGrpSpPr>
+        <p:cNvPr id="1" name=""/>
+        <p:cNvGrpSpPr/>
+        <p:nvPr/>
+      </p:nvGrpSpPr>
+      <p:grpSpPr>
+        <a:xfrm>
+          <a:off x="0" y="0"/>
+          <a:ext cx="0" cy="0"/>
+          <a:chOff x="0" y="0"/>
+          <a:chExt cx="0" cy="0"/>
+        </a:xfrm>
+      </p:grpSpPr>
+      <p:sp>
+        <p:nvSpPr>
+          <p:cNvPr id="2" name="Slide Image Placeholder 1"/>
+          <p:cNvSpPr>
+            <a:spLocks noGrp="1" noRot="1" noChangeAspect="1"/>
+          </p:cNvSpPr>
+          <p:nvPr>
+            <p:ph type="sldImg"/>
+          </p:nvPr>
+        </p:nvSpPr>
+        <p:spPr>
+          <a:xfrm>
+            <a:off x="-225425" y="1524000"/>
+            <a:ext cx="7308850" cy="4113213"/>
+          </a:xfrm>
+          <a:prstGeom prst="rect">
+            <a:avLst/>
+          </a:prstGeom>
+          <a:noFill/>
+          <a:ln w="12700">
+            <a:solidFill>
+              <a:prstClr val="black"/>
+            </a:solidFill>
+          </a:ln>
+        </p:spPr>
+      </p:sp>
+      <p:sp>
+        <p:nvSpPr>
+          <p:cNvPr id="3" name="Notes Placeholder 2"/>
+          <p:cNvSpPr>
+            <a:spLocks noGrp="1"/>
+          </p:cNvSpPr>
+          <p:nvPr>
+            <p:ph type="body" idx="1"/>
+          </p:nvPr>
+        </p:nvSpPr>
+        <p:spPr>
+          <a:xfrm>
+            <a:off x="685800" y="5865813"/>
+            <a:ext cx="5486400" cy="4799012"/>
+          </a:xfrm>
+          <a:prstGeom prst="rect">
+            <a:avLst/>
+          </a:prstGeom>
+        </p:spPr>
+        <p:txBody>
+          <a:bodyPr/>
+          <a:lstStyle/>
+          <a:p>
+            <a:r>
+              <a:rPr lang="en-US" dirty="0"/>
               <a:t>Seven things to take with you.</a:t>
             </a:r>
           </a:p>
@@ -2348,7 +2474,7 @@
 </p:notes>
 </file>
 
-<file path=ppt/notesSlides/notesSlide28.xml><?xml version="1.0" encoding="utf-8"?>
+<file path=ppt/notesSlides/notesSlide29.xml><?xml version="1.0" encoding="utf-8"?>
 <p:notes xmlns:a="http://schemas.openxmlformats.org/drawingml/2006/main" xmlns:r="http://schemas.openxmlformats.org/officeDocument/2006/relationships" xmlns:p="http://schemas.openxmlformats.org/presentationml/2006/main">
   <p:cSld>
     <p:spTree>
@@ -2422,89 +2548,6 @@
     <p:extLst>
       <p:ext uri="{BB962C8B-B14F-4D97-AF65-F5344CB8AC3E}">
         <p14:creationId xmlns:p14="http://schemas.microsoft.com/office/powerpoint/2010/main" val="922607855"/>
-      </p:ext>
-    </p:extLst>
-  </p:cSld>
-  <p:clrMapOvr>
-    <a:masterClrMapping/>
-  </p:clrMapOvr>
-</p:notes>
-</file>
-
-<file path=ppt/notesSlides/notesSlide29.xml><?xml version="1.0" encoding="utf-8"?>
-<p:notes xmlns:a="http://schemas.openxmlformats.org/drawingml/2006/main" xmlns:r="http://schemas.openxmlformats.org/officeDocument/2006/relationships" xmlns:p="http://schemas.openxmlformats.org/presentationml/2006/main">
-  <p:cSld>
-    <p:spTree>
-      <p:nvGrpSpPr>
-        <p:cNvPr id="1" name=""/>
-        <p:cNvGrpSpPr/>
-        <p:nvPr/>
-      </p:nvGrpSpPr>
-      <p:grpSpPr>
-        <a:xfrm>
-          <a:off x="0" y="0"/>
-          <a:ext cx="0" cy="0"/>
-          <a:chOff x="0" y="0"/>
-          <a:chExt cx="0" cy="0"/>
-        </a:xfrm>
-      </p:grpSpPr>
-      <p:sp>
-        <p:nvSpPr>
-          <p:cNvPr id="2" name="Slide Image Placeholder 1"/>
-          <p:cNvSpPr>
-            <a:spLocks noGrp="1" noRot="1" noChangeAspect="1"/>
-          </p:cNvSpPr>
-          <p:nvPr>
-            <p:ph type="sldImg"/>
-          </p:nvPr>
-        </p:nvSpPr>
-        <p:spPr>
-          <a:xfrm>
-            <a:off x="-225425" y="1524000"/>
-            <a:ext cx="7308850" cy="4113213"/>
-          </a:xfrm>
-          <a:prstGeom prst="rect">
-            <a:avLst/>
-          </a:prstGeom>
-          <a:noFill/>
-          <a:ln w="12700">
-            <a:solidFill>
-              <a:prstClr val="black"/>
-            </a:solidFill>
-          </a:ln>
-        </p:spPr>
-      </p:sp>
-      <p:sp>
-        <p:nvSpPr>
-          <p:cNvPr id="3" name="Notes Placeholder 2"/>
-          <p:cNvSpPr>
-            <a:spLocks noGrp="1"/>
-          </p:cNvSpPr>
-          <p:nvPr>
-            <p:ph type="body" idx="1"/>
-          </p:nvPr>
-        </p:nvSpPr>
-        <p:spPr>
-          <a:xfrm>
-            <a:off x="685800" y="5865813"/>
-            <a:ext cx="5486400" cy="4799012"/>
-          </a:xfrm>
-          <a:prstGeom prst="rect">
-            <a:avLst/>
-          </a:prstGeom>
-        </p:spPr>
-        <p:txBody>
-          <a:bodyPr/>
-          <a:lstStyle/>
-          <a:p>
-            <a:endParaRPr lang="en-GB"/>
-          </a:p>
-        </p:txBody>
-      </p:sp>
-    </p:spTree>
-    <p:extLst>
-      <p:ext uri="{BB962C8B-B14F-4D97-AF65-F5344CB8AC3E}">
-        <p14:creationId xmlns:p14="http://schemas.microsoft.com/office/powerpoint/2010/main" val="3223691410"/>
       </p:ext>
     </p:extLst>
   </p:cSld>
@@ -2588,6 +2631,89 @@
     <p:extLst>
       <p:ext uri="{BB962C8B-B14F-4D97-AF65-F5344CB8AC3E}">
         <p14:creationId xmlns:p14="http://schemas.microsoft.com/office/powerpoint/2010/main" val="3842075076"/>
+      </p:ext>
+    </p:extLst>
+  </p:cSld>
+  <p:clrMapOvr>
+    <a:masterClrMapping/>
+  </p:clrMapOvr>
+</p:notes>
+</file>
+
+<file path=ppt/notesSlides/notesSlide30.xml><?xml version="1.0" encoding="utf-8"?>
+<p:notes xmlns:a="http://schemas.openxmlformats.org/drawingml/2006/main" xmlns:r="http://schemas.openxmlformats.org/officeDocument/2006/relationships" xmlns:p="http://schemas.openxmlformats.org/presentationml/2006/main">
+  <p:cSld>
+    <p:spTree>
+      <p:nvGrpSpPr>
+        <p:cNvPr id="1" name=""/>
+        <p:cNvGrpSpPr/>
+        <p:nvPr/>
+      </p:nvGrpSpPr>
+      <p:grpSpPr>
+        <a:xfrm>
+          <a:off x="0" y="0"/>
+          <a:ext cx="0" cy="0"/>
+          <a:chOff x="0" y="0"/>
+          <a:chExt cx="0" cy="0"/>
+        </a:xfrm>
+      </p:grpSpPr>
+      <p:sp>
+        <p:nvSpPr>
+          <p:cNvPr id="2" name="Slide Image Placeholder 1"/>
+          <p:cNvSpPr>
+            <a:spLocks noGrp="1" noRot="1" noChangeAspect="1"/>
+          </p:cNvSpPr>
+          <p:nvPr>
+            <p:ph type="sldImg"/>
+          </p:nvPr>
+        </p:nvSpPr>
+        <p:spPr>
+          <a:xfrm>
+            <a:off x="-225425" y="1524000"/>
+            <a:ext cx="7308850" cy="4113213"/>
+          </a:xfrm>
+          <a:prstGeom prst="rect">
+            <a:avLst/>
+          </a:prstGeom>
+          <a:noFill/>
+          <a:ln w="12700">
+            <a:solidFill>
+              <a:prstClr val="black"/>
+            </a:solidFill>
+          </a:ln>
+        </p:spPr>
+      </p:sp>
+      <p:sp>
+        <p:nvSpPr>
+          <p:cNvPr id="3" name="Notes Placeholder 2"/>
+          <p:cNvSpPr>
+            <a:spLocks noGrp="1"/>
+          </p:cNvSpPr>
+          <p:nvPr>
+            <p:ph type="body" idx="1"/>
+          </p:nvPr>
+        </p:nvSpPr>
+        <p:spPr>
+          <a:xfrm>
+            <a:off x="685800" y="5865813"/>
+            <a:ext cx="5486400" cy="4799012"/>
+          </a:xfrm>
+          <a:prstGeom prst="rect">
+            <a:avLst/>
+          </a:prstGeom>
+        </p:spPr>
+        <p:txBody>
+          <a:bodyPr/>
+          <a:lstStyle/>
+          <a:p>
+            <a:endParaRPr lang="en-GB"/>
+          </a:p>
+        </p:txBody>
+      </p:sp>
+    </p:spTree>
+    <p:extLst>
+      <p:ext uri="{BB962C8B-B14F-4D97-AF65-F5344CB8AC3E}">
+        <p14:creationId xmlns:p14="http://schemas.microsoft.com/office/powerpoint/2010/main" val="3223691410"/>
       </p:ext>
     </p:extLst>
   </p:cSld>
@@ -3257,7 +3383,7 @@
           <a:p>
             <a:fld id="{5BCAD085-E8A6-8845-BD4E-CB4CCA059FC4}" type="datetimeFigureOut">
               <a:rPr lang="en-US" smtClean="0"/>
-              <a:t>9/5/2026</a:t>
+              <a:t>9/8/2026</a:t>
             </a:fld>
             <a:endParaRPr lang="en-US"/>
           </a:p>
@@ -3657,7 +3783,35 @@
                 <a:ea typeface="Instrument Serif" pitchFamily="34" charset="-122"/>
                 <a:cs typeface="Instrument Serif" pitchFamily="34" charset="-120"/>
               </a:rPr>
-              <a:t>Streaming Micro-Frontends: React 19 Meets Module Federation</a:t>
+              <a:t>React </a:t>
+            </a:r>
+            <a:r>
+              <a:rPr lang="en-US" sz="6600">
+                <a:solidFill>
+                  <a:schemeClr val="tx1">
+                    <a:lumMod val="95000"/>
+                    <a:lumOff val="5000"/>
+                  </a:schemeClr>
+                </a:solidFill>
+                <a:latin typeface="Instrument Serif" pitchFamily="34" charset="0"/>
+                <a:ea typeface="Instrument Serif" pitchFamily="34" charset="-122"/>
+                <a:cs typeface="Instrument Serif" pitchFamily="34" charset="-120"/>
+              </a:rPr>
+              <a:t>19 Suspense </a:t>
+            </a:r>
+            <a:r>
+              <a:rPr lang="en-US" sz="6600" dirty="0">
+                <a:solidFill>
+                  <a:schemeClr val="tx1">
+                    <a:lumMod val="95000"/>
+                    <a:lumOff val="5000"/>
+                  </a:schemeClr>
+                </a:solidFill>
+                <a:latin typeface="Instrument Serif" pitchFamily="34" charset="0"/>
+                <a:ea typeface="Instrument Serif" pitchFamily="34" charset="-122"/>
+                <a:cs typeface="Instrument Serif" pitchFamily="34" charset="-120"/>
+              </a:rPr>
+              <a:t>Meets Module Federation</a:t>
             </a:r>
             <a:endParaRPr lang="en-US" sz="6600" dirty="0">
               <a:solidFill>
@@ -4176,6 +4330,66 @@
 </file>
 
 <file path=ppt/slides/slide15.xml><?xml version="1.0" encoding="utf-8"?>
+<p:sld xmlns:a="http://schemas.openxmlformats.org/drawingml/2006/main" xmlns:r="http://schemas.openxmlformats.org/officeDocument/2006/relationships" xmlns:p="http://schemas.openxmlformats.org/presentationml/2006/main">
+  <p:cSld>
+    <p:spTree>
+      <p:nvGrpSpPr>
+        <p:cNvPr id="1" name=""/>
+        <p:cNvGrpSpPr/>
+        <p:nvPr/>
+      </p:nvGrpSpPr>
+      <p:grpSpPr>
+        <a:xfrm>
+          <a:off x="0" y="0"/>
+          <a:ext cx="0" cy="0"/>
+          <a:chOff x="0" y="0"/>
+          <a:chExt cx="0" cy="0"/>
+        </a:xfrm>
+      </p:grpSpPr>
+      <p:pic>
+        <p:nvPicPr>
+          <p:cNvPr id="3" name="Picture 2">
+            <a:extLst>
+              <a:ext uri="{FF2B5EF4-FFF2-40B4-BE49-F238E27FC236}">
+                <a16:creationId xmlns:a16="http://schemas.microsoft.com/office/drawing/2014/main" id="{46637D03-7E43-E40A-D2C9-714E3D46262C}"/>
+              </a:ext>
+            </a:extLst>
+          </p:cNvPr>
+          <p:cNvPicPr>
+            <a:picLocks noChangeAspect="1"/>
+          </p:cNvPicPr>
+          <p:nvPr/>
+        </p:nvPicPr>
+        <p:blipFill>
+          <a:blip r:embed="rId3"/>
+          <a:stretch>
+            <a:fillRect/>
+          </a:stretch>
+        </p:blipFill>
+        <p:spPr>
+          <a:xfrm>
+            <a:off x="6370" y="0"/>
+            <a:ext cx="12176084" cy="6858000"/>
+          </a:xfrm>
+          <a:prstGeom prst="rect">
+            <a:avLst/>
+          </a:prstGeom>
+        </p:spPr>
+      </p:pic>
+    </p:spTree>
+    <p:extLst>
+      <p:ext uri="{BB962C8B-B14F-4D97-AF65-F5344CB8AC3E}">
+        <p14:creationId xmlns:p14="http://schemas.microsoft.com/office/powerpoint/2010/main" val="315652290"/>
+      </p:ext>
+    </p:extLst>
+  </p:cSld>
+  <p:clrMapOvr>
+    <a:masterClrMapping/>
+  </p:clrMapOvr>
+</p:sld>
+</file>
+
+<file path=ppt/slides/slide16.xml><?xml version="1.0" encoding="utf-8"?>
 <p:sld xmlns:a="http://schemas.openxmlformats.org/drawingml/2006/main" xmlns:r="http://schemas.openxmlformats.org/officeDocument/2006/relationships" xmlns:p="http://schemas.openxmlformats.org/presentationml/2006/main">
   <p:cSld>
     <p:spTree>
@@ -4948,7 +5162,7 @@
 </p:sld>
 </file>
 
-<file path=ppt/slides/slide16.xml><?xml version="1.0" encoding="utf-8"?>
+<file path=ppt/slides/slide17.xml><?xml version="1.0" encoding="utf-8"?>
 <p:sld xmlns:a="http://schemas.openxmlformats.org/drawingml/2006/main" xmlns:r="http://schemas.openxmlformats.org/officeDocument/2006/relationships" xmlns:p="http://schemas.openxmlformats.org/presentationml/2006/main">
   <p:cSld>
     <p:spTree>
@@ -5207,7 +5421,7 @@
 </p:sld>
 </file>
 
-<file path=ppt/slides/slide17.xml><?xml version="1.0" encoding="utf-8"?>
+<file path=ppt/slides/slide18.xml><?xml version="1.0" encoding="utf-8"?>
 <p:sld xmlns:a="http://schemas.openxmlformats.org/drawingml/2006/main" xmlns:r="http://schemas.openxmlformats.org/officeDocument/2006/relationships" xmlns:p="http://schemas.openxmlformats.org/presentationml/2006/main">
   <p:cSld>
     <p:spTree>
@@ -5562,7 +5776,7 @@
 </p:sld>
 </file>
 
-<file path=ppt/slides/slide18.xml><?xml version="1.0" encoding="utf-8"?>
+<file path=ppt/slides/slide19.xml><?xml version="1.0" encoding="utf-8"?>
 <p:sld xmlns:a="http://schemas.openxmlformats.org/drawingml/2006/main" xmlns:r="http://schemas.openxmlformats.org/officeDocument/2006/relationships" xmlns:p="http://schemas.openxmlformats.org/presentationml/2006/main">
   <p:cSld>
     <p:spTree>
@@ -5732,66 +5946,6 @@
     <p:extLst>
       <p:ext uri="{BB962C8B-B14F-4D97-AF65-F5344CB8AC3E}">
         <p14:creationId xmlns:p14="http://schemas.microsoft.com/office/powerpoint/2010/main" val="2619125639"/>
-      </p:ext>
-    </p:extLst>
-  </p:cSld>
-  <p:clrMapOvr>
-    <a:masterClrMapping/>
-  </p:clrMapOvr>
-</p:sld>
-</file>
-
-<file path=ppt/slides/slide19.xml><?xml version="1.0" encoding="utf-8"?>
-<p:sld xmlns:a="http://schemas.openxmlformats.org/drawingml/2006/main" xmlns:r="http://schemas.openxmlformats.org/officeDocument/2006/relationships" xmlns:p="http://schemas.openxmlformats.org/presentationml/2006/main">
-  <p:cSld>
-    <p:spTree>
-      <p:nvGrpSpPr>
-        <p:cNvPr id="1" name=""/>
-        <p:cNvGrpSpPr/>
-        <p:nvPr/>
-      </p:nvGrpSpPr>
-      <p:grpSpPr>
-        <a:xfrm>
-          <a:off x="0" y="0"/>
-          <a:ext cx="0" cy="0"/>
-          <a:chOff x="0" y="0"/>
-          <a:chExt cx="0" cy="0"/>
-        </a:xfrm>
-      </p:grpSpPr>
-      <p:pic>
-        <p:nvPicPr>
-          <p:cNvPr id="3" name="Picture 2">
-            <a:extLst>
-              <a:ext uri="{FF2B5EF4-FFF2-40B4-BE49-F238E27FC236}">
-                <a16:creationId xmlns:a16="http://schemas.microsoft.com/office/drawing/2014/main" id="{B66439F7-DFAD-81AB-B8BD-241FD9547508}"/>
-              </a:ext>
-            </a:extLst>
-          </p:cNvPr>
-          <p:cNvPicPr>
-            <a:picLocks noChangeAspect="1"/>
-          </p:cNvPicPr>
-          <p:nvPr/>
-        </p:nvPicPr>
-        <p:blipFill>
-          <a:blip r:embed="rId3"/>
-          <a:stretch>
-            <a:fillRect/>
-          </a:stretch>
-        </p:blipFill>
-        <p:spPr>
-          <a:xfrm>
-            <a:off x="192869" y="0"/>
-            <a:ext cx="11803086" cy="6858000"/>
-          </a:xfrm>
-          <a:prstGeom prst="rect">
-            <a:avLst/>
-          </a:prstGeom>
-        </p:spPr>
-      </p:pic>
-    </p:spTree>
-    <p:extLst>
-      <p:ext uri="{BB962C8B-B14F-4D97-AF65-F5344CB8AC3E}">
-        <p14:creationId xmlns:p14="http://schemas.microsoft.com/office/powerpoint/2010/main" val="836858276"/>
       </p:ext>
     </p:extLst>
   </p:cSld>
@@ -5878,6 +6032,66 @@
           <a:chExt cx="0" cy="0"/>
         </a:xfrm>
       </p:grpSpPr>
+      <p:pic>
+        <p:nvPicPr>
+          <p:cNvPr id="3" name="Picture 2">
+            <a:extLst>
+              <a:ext uri="{FF2B5EF4-FFF2-40B4-BE49-F238E27FC236}">
+                <a16:creationId xmlns:a16="http://schemas.microsoft.com/office/drawing/2014/main" id="{B66439F7-DFAD-81AB-B8BD-241FD9547508}"/>
+              </a:ext>
+            </a:extLst>
+          </p:cNvPr>
+          <p:cNvPicPr>
+            <a:picLocks noChangeAspect="1"/>
+          </p:cNvPicPr>
+          <p:nvPr/>
+        </p:nvPicPr>
+        <p:blipFill>
+          <a:blip r:embed="rId3"/>
+          <a:stretch>
+            <a:fillRect/>
+          </a:stretch>
+        </p:blipFill>
+        <p:spPr>
+          <a:xfrm>
+            <a:off x="192869" y="0"/>
+            <a:ext cx="11803086" cy="6858000"/>
+          </a:xfrm>
+          <a:prstGeom prst="rect">
+            <a:avLst/>
+          </a:prstGeom>
+        </p:spPr>
+      </p:pic>
+    </p:spTree>
+    <p:extLst>
+      <p:ext uri="{BB962C8B-B14F-4D97-AF65-F5344CB8AC3E}">
+        <p14:creationId xmlns:p14="http://schemas.microsoft.com/office/powerpoint/2010/main" val="836858276"/>
+      </p:ext>
+    </p:extLst>
+  </p:cSld>
+  <p:clrMapOvr>
+    <a:masterClrMapping/>
+  </p:clrMapOvr>
+</p:sld>
+</file>
+
+<file path=ppt/slides/slide21.xml><?xml version="1.0" encoding="utf-8"?>
+<p:sld xmlns:a="http://schemas.openxmlformats.org/drawingml/2006/main" xmlns:r="http://schemas.openxmlformats.org/officeDocument/2006/relationships" xmlns:p="http://schemas.openxmlformats.org/presentationml/2006/main">
+  <p:cSld>
+    <p:spTree>
+      <p:nvGrpSpPr>
+        <p:cNvPr id="1" name=""/>
+        <p:cNvGrpSpPr/>
+        <p:nvPr/>
+      </p:nvGrpSpPr>
+      <p:grpSpPr>
+        <a:xfrm>
+          <a:off x="0" y="0"/>
+          <a:ext cx="0" cy="0"/>
+          <a:chOff x="0" y="0"/>
+          <a:chExt cx="0" cy="0"/>
+        </a:xfrm>
+      </p:grpSpPr>
       <p:sp>
         <p:nvSpPr>
           <p:cNvPr id="3" name="Text 2">
@@ -6042,7 +6256,7 @@
 </p:sld>
 </file>
 
-<file path=ppt/slides/slide21.xml><?xml version="1.0" encoding="utf-8"?>
+<file path=ppt/slides/slide22.xml><?xml version="1.0" encoding="utf-8"?>
 <p:sld xmlns:a="http://schemas.openxmlformats.org/drawingml/2006/main" xmlns:r="http://schemas.openxmlformats.org/officeDocument/2006/relationships" xmlns:p="http://schemas.openxmlformats.org/presentationml/2006/main">
   <p:cSld>
     <p:spTree>
@@ -6275,7 +6489,7 @@
 </p:sld>
 </file>
 
-<file path=ppt/slides/slide22.xml><?xml version="1.0" encoding="utf-8"?>
+<file path=ppt/slides/slide23.xml><?xml version="1.0" encoding="utf-8"?>
 <p:sld xmlns:a="http://schemas.openxmlformats.org/drawingml/2006/main" xmlns:r="http://schemas.openxmlformats.org/officeDocument/2006/relationships" xmlns:p="http://schemas.openxmlformats.org/presentationml/2006/main">
   <p:cSld>
     <p:spTree>
@@ -6335,7 +6549,7 @@
 </p:sld>
 </file>
 
-<file path=ppt/slides/slide23.xml><?xml version="1.0" encoding="utf-8"?>
+<file path=ppt/slides/slide24.xml><?xml version="1.0" encoding="utf-8"?>
 <p:sld xmlns:a="http://schemas.openxmlformats.org/drawingml/2006/main" xmlns:r="http://schemas.openxmlformats.org/officeDocument/2006/relationships" xmlns:p="http://schemas.openxmlformats.org/presentationml/2006/main">
   <p:cSld>
     <p:spTree>
@@ -6608,7 +6822,7 @@
 </p:sld>
 </file>
 
-<file path=ppt/slides/slide24.xml><?xml version="1.0" encoding="utf-8"?>
+<file path=ppt/slides/slide25.xml><?xml version="1.0" encoding="utf-8"?>
 <p:sld xmlns:a="http://schemas.openxmlformats.org/drawingml/2006/main" xmlns:r="http://schemas.openxmlformats.org/officeDocument/2006/relationships" xmlns:p="http://schemas.openxmlformats.org/presentationml/2006/main">
   <p:cSld>
     <p:spTree>
@@ -7493,7 +7707,7 @@
 </p:sld>
 </file>
 
-<file path=ppt/slides/slide25.xml><?xml version="1.0" encoding="utf-8"?>
+<file path=ppt/slides/slide26.xml><?xml version="1.0" encoding="utf-8"?>
 <p:sld xmlns:a="http://schemas.openxmlformats.org/drawingml/2006/main" xmlns:r="http://schemas.openxmlformats.org/officeDocument/2006/relationships" xmlns:p="http://schemas.openxmlformats.org/presentationml/2006/main">
   <p:cSld>
     <p:spTree>
@@ -7782,7 +7996,7 @@
 </p:sld>
 </file>
 
-<file path=ppt/slides/slide26.xml><?xml version="1.0" encoding="utf-8"?>
+<file path=ppt/slides/slide27.xml><?xml version="1.0" encoding="utf-8"?>
 <p:sld xmlns:a="http://schemas.openxmlformats.org/drawingml/2006/main" xmlns:r="http://schemas.openxmlformats.org/officeDocument/2006/relationships" xmlns:p="http://schemas.openxmlformats.org/presentationml/2006/main">
   <p:cSld>
     <p:spTree>
@@ -8766,7 +8980,7 @@
 </p:sld>
 </file>
 
-<file path=ppt/slides/slide27.xml><?xml version="1.0" encoding="utf-8"?>
+<file path=ppt/slides/slide28.xml><?xml version="1.0" encoding="utf-8"?>
 <p:sld xmlns:a="http://schemas.openxmlformats.org/drawingml/2006/main" xmlns:r="http://schemas.openxmlformats.org/officeDocument/2006/relationships" xmlns:p="http://schemas.openxmlformats.org/presentationml/2006/main">
   <p:cSld>
     <p:spTree>
@@ -9117,7 +9331,7 @@
 </p:sld>
 </file>
 
-<file path=ppt/slides/slide28.xml><?xml version="1.0" encoding="utf-8"?>
+<file path=ppt/slides/slide29.xml><?xml version="1.0" encoding="utf-8"?>
 <p:sld xmlns:a="http://schemas.openxmlformats.org/drawingml/2006/main" xmlns:r="http://schemas.openxmlformats.org/officeDocument/2006/relationships" xmlns:p="http://schemas.openxmlformats.org/presentationml/2006/main">
   <p:cSld>
     <p:spTree>
@@ -9168,238 +9382,6 @@
     <p:extLst>
       <p:ext uri="{BB962C8B-B14F-4D97-AF65-F5344CB8AC3E}">
         <p14:creationId xmlns:p14="http://schemas.microsoft.com/office/powerpoint/2010/main" val="3470241132"/>
-      </p:ext>
-    </p:extLst>
-  </p:cSld>
-  <p:clrMapOvr>
-    <a:masterClrMapping/>
-  </p:clrMapOvr>
-</p:sld>
-</file>
-
-<file path=ppt/slides/slide29.xml><?xml version="1.0" encoding="utf-8"?>
-<p:sld xmlns:a="http://schemas.openxmlformats.org/drawingml/2006/main" xmlns:r="http://schemas.openxmlformats.org/officeDocument/2006/relationships" xmlns:p="http://schemas.openxmlformats.org/presentationml/2006/main">
-  <p:cSld>
-    <p:spTree>
-      <p:nvGrpSpPr>
-        <p:cNvPr id="1" name=""/>
-        <p:cNvGrpSpPr/>
-        <p:nvPr/>
-      </p:nvGrpSpPr>
-      <p:grpSpPr>
-        <a:xfrm>
-          <a:off x="0" y="0"/>
-          <a:ext cx="0" cy="0"/>
-          <a:chOff x="0" y="0"/>
-          <a:chExt cx="0" cy="0"/>
-        </a:xfrm>
-      </p:grpSpPr>
-      <p:sp>
-        <p:nvSpPr>
-          <p:cNvPr id="5" name="Text 1">
-            <a:extLst>
-              <a:ext uri="{FF2B5EF4-FFF2-40B4-BE49-F238E27FC236}">
-                <a16:creationId xmlns:a16="http://schemas.microsoft.com/office/drawing/2014/main" id="{B9B17927-D537-2054-3DCD-46D230E54D61}"/>
-              </a:ext>
-            </a:extLst>
-          </p:cNvPr>
-          <p:cNvSpPr/>
-          <p:nvPr/>
-        </p:nvSpPr>
-        <p:spPr>
-          <a:xfrm>
-            <a:off x="548640" y="2331720"/>
-            <a:ext cx="11064240" cy="1280160"/>
-          </a:xfrm>
-          <a:prstGeom prst="rect">
-            <a:avLst/>
-          </a:prstGeom>
-          <a:noFill/>
-          <a:ln/>
-        </p:spPr>
-        <p:txBody>
-          <a:bodyPr wrap="square" rtlCol="0" anchor="ctr"/>
-          <a:lstStyle/>
-          <a:p>
-            <a:pPr marL="0" indent="0">
-              <a:buNone/>
-            </a:pPr>
-            <a:r>
-              <a:rPr lang="en-US" sz="6000" i="1" dirty="0">
-                <a:solidFill>
-                  <a:schemeClr val="tx1">
-                    <a:lumMod val="95000"/>
-                    <a:lumOff val="5000"/>
-                  </a:schemeClr>
-                </a:solidFill>
-                <a:latin typeface="Instrument Serif" pitchFamily="34" charset="0"/>
-                <a:ea typeface="Instrument Serif" pitchFamily="34" charset="-122"/>
-                <a:cs typeface="Instrument Serif" pitchFamily="34" charset="-120"/>
-              </a:rPr>
-              <a:t>Thank you.</a:t>
-            </a:r>
-            <a:endParaRPr lang="en-US" sz="6000" dirty="0">
-              <a:solidFill>
-                <a:schemeClr val="tx1">
-                  <a:lumMod val="95000"/>
-                  <a:lumOff val="5000"/>
-                </a:schemeClr>
-              </a:solidFill>
-            </a:endParaRPr>
-          </a:p>
-        </p:txBody>
-      </p:sp>
-      <p:sp>
-        <p:nvSpPr>
-          <p:cNvPr id="7" name="Text 2">
-            <a:extLst>
-              <a:ext uri="{FF2B5EF4-FFF2-40B4-BE49-F238E27FC236}">
-                <a16:creationId xmlns:a16="http://schemas.microsoft.com/office/drawing/2014/main" id="{74B31B54-B88A-D269-A665-00C530BE9093}"/>
-              </a:ext>
-            </a:extLst>
-          </p:cNvPr>
-          <p:cNvSpPr/>
-          <p:nvPr/>
-        </p:nvSpPr>
-        <p:spPr>
-          <a:xfrm>
-            <a:off x="640080" y="3703320"/>
-            <a:ext cx="10972800" cy="457200"/>
-          </a:xfrm>
-          <a:prstGeom prst="rect">
-            <a:avLst/>
-          </a:prstGeom>
-          <a:noFill/>
-          <a:ln/>
-        </p:spPr>
-        <p:txBody>
-          <a:bodyPr wrap="square" rtlCol="0" anchor="ctr"/>
-          <a:lstStyle/>
-          <a:p>
-            <a:pPr marL="0" indent="0">
-              <a:buNone/>
-            </a:pPr>
-            <a:r>
-              <a:rPr lang="en-US" sz="2800" dirty="0">
-                <a:solidFill>
-                  <a:schemeClr val="tx1">
-                    <a:lumMod val="95000"/>
-                    <a:lumOff val="5000"/>
-                  </a:schemeClr>
-                </a:solidFill>
-                <a:latin typeface="DM Sans" pitchFamily="34" charset="0"/>
-                <a:ea typeface="DM Sans" pitchFamily="34" charset="-122"/>
-                <a:cs typeface="DM Sans" pitchFamily="34" charset="-120"/>
-              </a:rPr>
-              <a:t>@DevlinDuldulao</a:t>
-            </a:r>
-            <a:endParaRPr lang="en-US" sz="2800" dirty="0">
-              <a:solidFill>
-                <a:schemeClr val="tx1">
-                  <a:lumMod val="95000"/>
-                  <a:lumOff val="5000"/>
-                </a:schemeClr>
-              </a:solidFill>
-            </a:endParaRPr>
-          </a:p>
-        </p:txBody>
-      </p:sp>
-      <p:pic>
-        <p:nvPicPr>
-          <p:cNvPr id="11" name="Picture 10">
-            <a:extLst>
-              <a:ext uri="{FF2B5EF4-FFF2-40B4-BE49-F238E27FC236}">
-                <a16:creationId xmlns:a16="http://schemas.microsoft.com/office/drawing/2014/main" id="{EE42FC8F-E622-B57A-8D17-21F71B4A521E}"/>
-              </a:ext>
-            </a:extLst>
-          </p:cNvPr>
-          <p:cNvPicPr>
-            <a:picLocks noChangeAspect="1"/>
-          </p:cNvPicPr>
-          <p:nvPr/>
-        </p:nvPicPr>
-        <p:blipFill>
-          <a:blip r:embed="rId3">
-            <a:extLst>
-              <a:ext uri="{28A0092B-C50C-407E-A947-70E740481C1C}">
-                <a14:useLocalDpi xmlns:a14="http://schemas.microsoft.com/office/drawing/2010/main" val="0"/>
-              </a:ext>
-            </a:extLst>
-          </a:blip>
-          <a:stretch>
-            <a:fillRect/>
-          </a:stretch>
-        </p:blipFill>
-        <p:spPr>
-          <a:xfrm>
-            <a:off x="6390945" y="534340"/>
-            <a:ext cx="4874920" cy="4874920"/>
-          </a:xfrm>
-          <a:prstGeom prst="rect">
-            <a:avLst/>
-          </a:prstGeom>
-        </p:spPr>
-      </p:pic>
-      <p:sp>
-        <p:nvSpPr>
-          <p:cNvPr id="13" name="Text 3">
-            <a:extLst>
-              <a:ext uri="{FF2B5EF4-FFF2-40B4-BE49-F238E27FC236}">
-                <a16:creationId xmlns:a16="http://schemas.microsoft.com/office/drawing/2014/main" id="{C8E8866F-ACA3-AC4B-2C7F-ED97CBE40635}"/>
-              </a:ext>
-            </a:extLst>
-          </p:cNvPr>
-          <p:cNvSpPr/>
-          <p:nvPr/>
-        </p:nvSpPr>
-        <p:spPr>
-          <a:xfrm>
-            <a:off x="7022465" y="5294960"/>
-            <a:ext cx="3611880" cy="228600"/>
-          </a:xfrm>
-          <a:prstGeom prst="rect">
-            <a:avLst/>
-          </a:prstGeom>
-          <a:noFill/>
-          <a:ln/>
-        </p:spPr>
-        <p:txBody>
-          <a:bodyPr wrap="square" rtlCol="0" anchor="ctr"/>
-          <a:lstStyle/>
-          <a:p>
-            <a:pPr marL="0" indent="0" algn="ctr">
-              <a:buNone/>
-            </a:pPr>
-            <a:r>
-              <a:rPr lang="en-US" sz="2000" kern="0" spc="100" dirty="0">
-                <a:solidFill>
-                  <a:schemeClr val="tx1">
-                    <a:lumMod val="95000"/>
-                    <a:lumOff val="5000"/>
-                  </a:schemeClr>
-                </a:solidFill>
-                <a:latin typeface="Brush Script MT" panose="03060802040406070304" pitchFamily="66" charset="0"/>
-                <a:ea typeface="IBM Plex Mono" pitchFamily="34" charset="-122"/>
-                <a:cs typeface="IBM Plex Mono" pitchFamily="34" charset="-120"/>
-              </a:rPr>
-              <a:t>Social links</a:t>
-            </a:r>
-            <a:endParaRPr lang="en-US" sz="2000" dirty="0">
-              <a:solidFill>
-                <a:schemeClr val="tx1">
-                  <a:lumMod val="95000"/>
-                  <a:lumOff val="5000"/>
-                </a:schemeClr>
-              </a:solidFill>
-              <a:latin typeface="Brush Script MT" panose="03060802040406070304" pitchFamily="66" charset="0"/>
-            </a:endParaRPr>
-          </a:p>
-        </p:txBody>
-      </p:sp>
-    </p:spTree>
-    <p:extLst>
-      <p:ext uri="{BB962C8B-B14F-4D97-AF65-F5344CB8AC3E}">
-        <p14:creationId xmlns:p14="http://schemas.microsoft.com/office/powerpoint/2010/main" val="2917265450"/>
       </p:ext>
     </p:extLst>
   </p:cSld>
@@ -9490,6 +9472,238 @@
     <p:extLst>
       <p:ext uri="{BB962C8B-B14F-4D97-AF65-F5344CB8AC3E}">
         <p14:creationId xmlns:p14="http://schemas.microsoft.com/office/powerpoint/2010/main" val="1070007935"/>
+      </p:ext>
+    </p:extLst>
+  </p:cSld>
+  <p:clrMapOvr>
+    <a:masterClrMapping/>
+  </p:clrMapOvr>
+</p:sld>
+</file>
+
+<file path=ppt/slides/slide30.xml><?xml version="1.0" encoding="utf-8"?>
+<p:sld xmlns:a="http://schemas.openxmlformats.org/drawingml/2006/main" xmlns:r="http://schemas.openxmlformats.org/officeDocument/2006/relationships" xmlns:p="http://schemas.openxmlformats.org/presentationml/2006/main">
+  <p:cSld>
+    <p:spTree>
+      <p:nvGrpSpPr>
+        <p:cNvPr id="1" name=""/>
+        <p:cNvGrpSpPr/>
+        <p:nvPr/>
+      </p:nvGrpSpPr>
+      <p:grpSpPr>
+        <a:xfrm>
+          <a:off x="0" y="0"/>
+          <a:ext cx="0" cy="0"/>
+          <a:chOff x="0" y="0"/>
+          <a:chExt cx="0" cy="0"/>
+        </a:xfrm>
+      </p:grpSpPr>
+      <p:sp>
+        <p:nvSpPr>
+          <p:cNvPr id="5" name="Text 1">
+            <a:extLst>
+              <a:ext uri="{FF2B5EF4-FFF2-40B4-BE49-F238E27FC236}">
+                <a16:creationId xmlns:a16="http://schemas.microsoft.com/office/drawing/2014/main" id="{B9B17927-D537-2054-3DCD-46D230E54D61}"/>
+              </a:ext>
+            </a:extLst>
+          </p:cNvPr>
+          <p:cNvSpPr/>
+          <p:nvPr/>
+        </p:nvSpPr>
+        <p:spPr>
+          <a:xfrm>
+            <a:off x="548640" y="2331720"/>
+            <a:ext cx="11064240" cy="1280160"/>
+          </a:xfrm>
+          <a:prstGeom prst="rect">
+            <a:avLst/>
+          </a:prstGeom>
+          <a:noFill/>
+          <a:ln/>
+        </p:spPr>
+        <p:txBody>
+          <a:bodyPr wrap="square" rtlCol="0" anchor="ctr"/>
+          <a:lstStyle/>
+          <a:p>
+            <a:pPr marL="0" indent="0">
+              <a:buNone/>
+            </a:pPr>
+            <a:r>
+              <a:rPr lang="en-US" sz="6000" i="1" dirty="0">
+                <a:solidFill>
+                  <a:schemeClr val="tx1">
+                    <a:lumMod val="95000"/>
+                    <a:lumOff val="5000"/>
+                  </a:schemeClr>
+                </a:solidFill>
+                <a:latin typeface="Instrument Serif" pitchFamily="34" charset="0"/>
+                <a:ea typeface="Instrument Serif" pitchFamily="34" charset="-122"/>
+                <a:cs typeface="Instrument Serif" pitchFamily="34" charset="-120"/>
+              </a:rPr>
+              <a:t>Thank you.</a:t>
+            </a:r>
+            <a:endParaRPr lang="en-US" sz="6000" dirty="0">
+              <a:solidFill>
+                <a:schemeClr val="tx1">
+                  <a:lumMod val="95000"/>
+                  <a:lumOff val="5000"/>
+                </a:schemeClr>
+              </a:solidFill>
+            </a:endParaRPr>
+          </a:p>
+        </p:txBody>
+      </p:sp>
+      <p:sp>
+        <p:nvSpPr>
+          <p:cNvPr id="7" name="Text 2">
+            <a:extLst>
+              <a:ext uri="{FF2B5EF4-FFF2-40B4-BE49-F238E27FC236}">
+                <a16:creationId xmlns:a16="http://schemas.microsoft.com/office/drawing/2014/main" id="{74B31B54-B88A-D269-A665-00C530BE9093}"/>
+              </a:ext>
+            </a:extLst>
+          </p:cNvPr>
+          <p:cNvSpPr/>
+          <p:nvPr/>
+        </p:nvSpPr>
+        <p:spPr>
+          <a:xfrm>
+            <a:off x="640080" y="3703320"/>
+            <a:ext cx="10972800" cy="457200"/>
+          </a:xfrm>
+          <a:prstGeom prst="rect">
+            <a:avLst/>
+          </a:prstGeom>
+          <a:noFill/>
+          <a:ln/>
+        </p:spPr>
+        <p:txBody>
+          <a:bodyPr wrap="square" rtlCol="0" anchor="ctr"/>
+          <a:lstStyle/>
+          <a:p>
+            <a:pPr marL="0" indent="0">
+              <a:buNone/>
+            </a:pPr>
+            <a:r>
+              <a:rPr lang="en-US" sz="2800" dirty="0">
+                <a:solidFill>
+                  <a:schemeClr val="tx1">
+                    <a:lumMod val="95000"/>
+                    <a:lumOff val="5000"/>
+                  </a:schemeClr>
+                </a:solidFill>
+                <a:latin typeface="DM Sans" pitchFamily="34" charset="0"/>
+                <a:ea typeface="DM Sans" pitchFamily="34" charset="-122"/>
+                <a:cs typeface="DM Sans" pitchFamily="34" charset="-120"/>
+              </a:rPr>
+              <a:t>@DevlinDuldulao</a:t>
+            </a:r>
+            <a:endParaRPr lang="en-US" sz="2800" dirty="0">
+              <a:solidFill>
+                <a:schemeClr val="tx1">
+                  <a:lumMod val="95000"/>
+                  <a:lumOff val="5000"/>
+                </a:schemeClr>
+              </a:solidFill>
+            </a:endParaRPr>
+          </a:p>
+        </p:txBody>
+      </p:sp>
+      <p:pic>
+        <p:nvPicPr>
+          <p:cNvPr id="11" name="Picture 10">
+            <a:extLst>
+              <a:ext uri="{FF2B5EF4-FFF2-40B4-BE49-F238E27FC236}">
+                <a16:creationId xmlns:a16="http://schemas.microsoft.com/office/drawing/2014/main" id="{EE42FC8F-E622-B57A-8D17-21F71B4A521E}"/>
+              </a:ext>
+            </a:extLst>
+          </p:cNvPr>
+          <p:cNvPicPr>
+            <a:picLocks noChangeAspect="1"/>
+          </p:cNvPicPr>
+          <p:nvPr/>
+        </p:nvPicPr>
+        <p:blipFill>
+          <a:blip r:embed="rId3">
+            <a:extLst>
+              <a:ext uri="{28A0092B-C50C-407E-A947-70E740481C1C}">
+                <a14:useLocalDpi xmlns:a14="http://schemas.microsoft.com/office/drawing/2010/main" val="0"/>
+              </a:ext>
+            </a:extLst>
+          </a:blip>
+          <a:stretch>
+            <a:fillRect/>
+          </a:stretch>
+        </p:blipFill>
+        <p:spPr>
+          <a:xfrm>
+            <a:off x="6390945" y="534340"/>
+            <a:ext cx="4874920" cy="4874920"/>
+          </a:xfrm>
+          <a:prstGeom prst="rect">
+            <a:avLst/>
+          </a:prstGeom>
+        </p:spPr>
+      </p:pic>
+      <p:sp>
+        <p:nvSpPr>
+          <p:cNvPr id="13" name="Text 3">
+            <a:extLst>
+              <a:ext uri="{FF2B5EF4-FFF2-40B4-BE49-F238E27FC236}">
+                <a16:creationId xmlns:a16="http://schemas.microsoft.com/office/drawing/2014/main" id="{C8E8866F-ACA3-AC4B-2C7F-ED97CBE40635}"/>
+              </a:ext>
+            </a:extLst>
+          </p:cNvPr>
+          <p:cNvSpPr/>
+          <p:nvPr/>
+        </p:nvSpPr>
+        <p:spPr>
+          <a:xfrm>
+            <a:off x="7022465" y="5294960"/>
+            <a:ext cx="3611880" cy="228600"/>
+          </a:xfrm>
+          <a:prstGeom prst="rect">
+            <a:avLst/>
+          </a:prstGeom>
+          <a:noFill/>
+          <a:ln/>
+        </p:spPr>
+        <p:txBody>
+          <a:bodyPr wrap="square" rtlCol="0" anchor="ctr"/>
+          <a:lstStyle/>
+          <a:p>
+            <a:pPr marL="0" indent="0" algn="ctr">
+              <a:buNone/>
+            </a:pPr>
+            <a:r>
+              <a:rPr lang="en-US" sz="2000" kern="0" spc="100" dirty="0">
+                <a:solidFill>
+                  <a:schemeClr val="tx1">
+                    <a:lumMod val="95000"/>
+                    <a:lumOff val="5000"/>
+                  </a:schemeClr>
+                </a:solidFill>
+                <a:latin typeface="Brush Script MT" panose="03060802040406070304" pitchFamily="66" charset="0"/>
+                <a:ea typeface="IBM Plex Mono" pitchFamily="34" charset="-122"/>
+                <a:cs typeface="IBM Plex Mono" pitchFamily="34" charset="-120"/>
+              </a:rPr>
+              <a:t>Social links</a:t>
+            </a:r>
+            <a:endParaRPr lang="en-US" sz="2000" dirty="0">
+              <a:solidFill>
+                <a:schemeClr val="tx1">
+                  <a:lumMod val="95000"/>
+                  <a:lumOff val="5000"/>
+                </a:schemeClr>
+              </a:solidFill>
+              <a:latin typeface="Brush Script MT" panose="03060802040406070304" pitchFamily="66" charset="0"/>
+            </a:endParaRPr>
+          </a:p>
+        </p:txBody>
+      </p:sp>
+    </p:spTree>
+    <p:extLst>
+      <p:ext uri="{BB962C8B-B14F-4D97-AF65-F5344CB8AC3E}">
+        <p14:creationId xmlns:p14="http://schemas.microsoft.com/office/powerpoint/2010/main" val="2917265450"/>
       </p:ext>
     </p:extLst>
   </p:cSld>

--- a/presentation/module-federation.pptx
+++ b/presentation/module-federation.pptx
@@ -5,7 +5,7 @@
     <p:sldMasterId id="2147483648" r:id="rId1"/>
   </p:sldMasterIdLst>
   <p:notesMasterIdLst>
-    <p:notesMasterId r:id="rId32"/>
+    <p:notesMasterId r:id="rId39"/>
   </p:notesMasterIdLst>
   <p:sldIdLst>
     <p:sldId id="298" r:id="rId2"/>
@@ -22,22 +22,29 @@
     <p:sldId id="318" r:id="rId13"/>
     <p:sldId id="336" r:id="rId14"/>
     <p:sldId id="328" r:id="rId15"/>
-    <p:sldId id="337" r:id="rId16"/>
-    <p:sldId id="319" r:id="rId17"/>
-    <p:sldId id="320" r:id="rId18"/>
-    <p:sldId id="329" r:id="rId19"/>
-    <p:sldId id="327" r:id="rId20"/>
-    <p:sldId id="335" r:id="rId21"/>
-    <p:sldId id="325" r:id="rId22"/>
-    <p:sldId id="326" r:id="rId23"/>
-    <p:sldId id="334" r:id="rId24"/>
-    <p:sldId id="332" r:id="rId25"/>
-    <p:sldId id="333" r:id="rId26"/>
-    <p:sldId id="331" r:id="rId27"/>
-    <p:sldId id="323" r:id="rId28"/>
-    <p:sldId id="330" r:id="rId29"/>
-    <p:sldId id="310" r:id="rId30"/>
-    <p:sldId id="322" r:id="rId31"/>
+    <p:sldId id="341" r:id="rId16"/>
+    <p:sldId id="337" r:id="rId17"/>
+    <p:sldId id="319" r:id="rId18"/>
+    <p:sldId id="320" r:id="rId19"/>
+    <p:sldId id="329" r:id="rId20"/>
+    <p:sldId id="323" r:id="rId21"/>
+    <p:sldId id="344" r:id="rId22"/>
+    <p:sldId id="327" r:id="rId23"/>
+    <p:sldId id="335" r:id="rId24"/>
+    <p:sldId id="325" r:id="rId25"/>
+    <p:sldId id="326" r:id="rId26"/>
+    <p:sldId id="342" r:id="rId27"/>
+    <p:sldId id="334" r:id="rId28"/>
+    <p:sldId id="332" r:id="rId29"/>
+    <p:sldId id="333" r:id="rId30"/>
+    <p:sldId id="343" r:id="rId31"/>
+    <p:sldId id="331" r:id="rId32"/>
+    <p:sldId id="330" r:id="rId33"/>
+    <p:sldId id="340" r:id="rId34"/>
+    <p:sldId id="338" r:id="rId35"/>
+    <p:sldId id="339" r:id="rId36"/>
+    <p:sldId id="310" r:id="rId37"/>
+    <p:sldId id="322" r:id="rId38"/>
   </p:sldIdLst>
   <p:sldSz cx="12188825" cy="6858000"/>
   <p:notesSz cx="6858000" cy="12188825"/>
@@ -800,7 +807,7 @@
           <a:p>
             <a:r>
               <a:rPr lang="en-US" dirty="0"/>
-              <a:t>Prescriptions is on 3002 and streams on demand. </a:t>
+              <a:t>Prescriptions is on 3002 and suspense on demand. </a:t>
             </a:r>
           </a:p>
           <a:p>
@@ -1349,13 +1356,34 @@
           <a:p>
             <a:r>
               <a:rPr lang="en-US" dirty="0"/>
-              <a:t>Prescriptions and Analytics are streamed. They load on demand, behind per-module skeletons.</a:t>
-            </a:r>
+              <a:t>For the rest, the nav link fires on mouse enter. When the cursor touches Prescriptions or Analytics, the chunk starts fetching in the background. Click, and it is often already cached.</a:t>
+            </a:r>
+          </a:p>
+          <a:p>
+            <a:endParaRPr lang="en-US" dirty="0"/>
           </a:p>
           <a:p>
             <a:r>
               <a:rPr lang="en-US" dirty="0"/>
-              <a:t>Every strategy still gets three layers of resilience. A catch on lazy, so an unreachable remote becomes a fallback instead of a white screen. Suspense, so a loading remote shows its own skeleton. An error boundary, so a runtime crash in one remote does not take down the app.</a:t>
+              <a:t>Instant means the landing page fetches lazily, with no streaming delay. </a:t>
+            </a:r>
+          </a:p>
+          <a:p>
+            <a:endParaRPr lang="en-US" dirty="0"/>
+          </a:p>
+          <a:p>
+            <a:r>
+              <a:rPr lang="en-US" dirty="0"/>
+              <a:t>Eager means preloaded the moment the shell mounts. </a:t>
+            </a:r>
+          </a:p>
+          <a:p>
+            <a:endParaRPr lang="en-US" dirty="0"/>
+          </a:p>
+          <a:p>
+            <a:r>
+              <a:rPr lang="en-US" dirty="0"/>
+              <a:t>Hover means prefetched when the user aims at a tab. That is why Records feels instant even though it is a separate app on a separate server. The work happened at mount.</a:t>
             </a:r>
           </a:p>
           <a:p>
@@ -1366,7 +1394,7 @@
     </p:spTree>
     <p:extLst>
       <p:ext uri="{BB962C8B-B14F-4D97-AF65-F5344CB8AC3E}">
-        <p14:creationId xmlns:p14="http://schemas.microsoft.com/office/powerpoint/2010/main" val="4040777647"/>
+        <p14:creationId xmlns:p14="http://schemas.microsoft.com/office/powerpoint/2010/main" val="3602175556"/>
       </p:ext>
     </p:extLst>
   </p:cSld>
@@ -1525,6 +1553,21 @@
           <a:bodyPr/>
           <a:lstStyle/>
           <a:p>
+            <a:r>
+              <a:rPr lang="en-US" dirty="0"/>
+              <a:t>Prescriptions and Analytics are streamed. They load on demand, behind per-module skeletons.</a:t>
+            </a:r>
+          </a:p>
+          <a:p>
+            <a:endParaRPr lang="en-US" dirty="0"/>
+          </a:p>
+          <a:p>
+            <a:r>
+              <a:rPr lang="en-US" dirty="0"/>
+              <a:t>Every strategy still gets three layers of resilience. A catch on lazy, so an unreachable remote becomes a fallback instead of a white screen. Suspense, so a loading remote shows its own skeleton. An error boundary, so a runtime crash in one remote does not take down the app.</a:t>
+            </a:r>
+          </a:p>
+          <a:p>
             <a:endParaRPr lang="en-GB" dirty="0"/>
           </a:p>
         </p:txBody>
@@ -1532,7 +1575,7 @@
     </p:spTree>
     <p:extLst>
       <p:ext uri="{BB962C8B-B14F-4D97-AF65-F5344CB8AC3E}">
-        <p14:creationId xmlns:p14="http://schemas.microsoft.com/office/powerpoint/2010/main" val="874813599"/>
+        <p14:creationId xmlns:p14="http://schemas.microsoft.com/office/powerpoint/2010/main" val="4040777647"/>
       </p:ext>
     </p:extLst>
   </p:cSld>
@@ -1608,117 +1651,17 @@
           <a:bodyPr/>
           <a:lstStyle/>
           <a:p>
-            <a:pPr marL="0" marR="0" lvl="0" indent="0" algn="l" defTabSz="914400" rtl="0" eaLnBrk="1" fontAlgn="auto" latinLnBrk="0" hangingPunct="1">
-              <a:lnSpc>
-                <a:spcPct val="100000"/>
-              </a:lnSpc>
-              <a:spcBef>
-                <a:spcPts val="0"/>
-              </a:spcBef>
-              <a:spcAft>
-                <a:spcPts val="0"/>
-              </a:spcAft>
-              <a:buClrTx/>
-              <a:buSzTx/>
-              <a:buFontTx/>
-              <a:buNone/>
-              <a:tabLst/>
-              <a:defRPr/>
-            </a:pPr>
-            <a:r>
-              <a:rPr lang="en-US" dirty="0"/>
-              <a:t>People ask why we wrap eager modules in </a:t>
-            </a:r>
-            <a:r>
-              <a:rPr lang="en-US" sz="1200" kern="1200" dirty="0">
-                <a:solidFill>
-                  <a:schemeClr val="tx1"/>
-                </a:solidFill>
-                <a:latin typeface="+mn-lt"/>
-                <a:ea typeface="+mn-ea"/>
-                <a:cs typeface="+mn-cs"/>
-              </a:rPr>
-              <a:t>lazy()</a:t>
-            </a:r>
-            <a:r>
-              <a:rPr lang="en-US" dirty="0"/>
-              <a:t>. It's not that static imports are impossible — they work, because </a:t>
-            </a:r>
-            <a:r>
-              <a:rPr lang="en-US" sz="1200" kern="1200" dirty="0" err="1">
-                <a:solidFill>
-                  <a:schemeClr val="tx1"/>
-                </a:solidFill>
-                <a:latin typeface="+mn-lt"/>
-                <a:ea typeface="+mn-ea"/>
-                <a:cs typeface="+mn-cs"/>
-              </a:rPr>
-              <a:t>index.tsx</a:t>
-            </a:r>
-            <a:r>
-              <a:rPr lang="en-US" dirty="0" err="1"/>
-              <a:t>'s</a:t>
-            </a:r>
-            <a:r>
-              <a:rPr lang="en-US" dirty="0"/>
-              <a:t> dynamic import already resolved the shared scope. It's that a static import makes the remote block first paint, and leaves nowhere to catch a failed remote. So we fire </a:t>
-            </a:r>
-            <a:r>
-              <a:rPr lang="en-US" sz="1200" kern="1200" dirty="0">
-                <a:solidFill>
-                  <a:schemeClr val="tx1"/>
-                </a:solidFill>
-                <a:latin typeface="+mn-lt"/>
-                <a:ea typeface="+mn-ea"/>
-                <a:cs typeface="+mn-cs"/>
-              </a:rPr>
-              <a:t>import()</a:t>
-            </a:r>
-            <a:r>
-              <a:rPr lang="en-US" dirty="0"/>
-              <a:t> at shell </a:t>
-            </a:r>
-            <a:r>
-              <a:rPr lang="en-US" dirty="0" err="1"/>
-              <a:t>init</a:t>
-            </a:r>
-            <a:r>
-              <a:rPr lang="en-US" dirty="0"/>
-              <a:t> to warm it, and </a:t>
-            </a:r>
-            <a:r>
-              <a:rPr lang="en-US" sz="1200" kern="1200" dirty="0">
-                <a:solidFill>
-                  <a:schemeClr val="tx1"/>
-                </a:solidFill>
-                <a:latin typeface="+mn-lt"/>
-                <a:ea typeface="+mn-ea"/>
-                <a:cs typeface="+mn-cs"/>
-              </a:rPr>
-              <a:t>lazy()</a:t>
-            </a:r>
-            <a:r>
-              <a:rPr lang="en-US" dirty="0"/>
-              <a:t> resolves from the module registry instantly — while keeping the Suspense and </a:t>
-            </a:r>
-            <a:r>
-              <a:rPr lang="en-US" dirty="0" err="1"/>
-              <a:t>ErrorBoundary</a:t>
-            </a:r>
-            <a:r>
-              <a:rPr lang="en-US" dirty="0"/>
-              <a:t> per module.</a:t>
-            </a:r>
-          </a:p>
-          <a:p>
-            <a:endParaRPr lang="en-GB" dirty="0"/>
+            <a:r>
+              <a:rPr lang="en-GB" dirty="0"/>
+              <a:t>So, this is the flow if I click the Prescriptions menu which will navigate to the Prescriptions app.</a:t>
+            </a:r>
           </a:p>
         </p:txBody>
       </p:sp>
     </p:spTree>
     <p:extLst>
       <p:ext uri="{BB962C8B-B14F-4D97-AF65-F5344CB8AC3E}">
-        <p14:creationId xmlns:p14="http://schemas.microsoft.com/office/powerpoint/2010/main" val="2316851497"/>
+        <p14:creationId xmlns:p14="http://schemas.microsoft.com/office/powerpoint/2010/main" val="874813599"/>
       </p:ext>
     </p:extLst>
   </p:cSld>
@@ -1794,43 +1737,117 @@
           <a:bodyPr/>
           <a:lstStyle/>
           <a:p>
+            <a:pPr marL="0" marR="0" lvl="0" indent="0" algn="l" defTabSz="914400" rtl="0" eaLnBrk="1" fontAlgn="auto" latinLnBrk="0" hangingPunct="1">
+              <a:lnSpc>
+                <a:spcPct val="100000"/>
+              </a:lnSpc>
+              <a:spcBef>
+                <a:spcPts val="0"/>
+              </a:spcBef>
+              <a:spcAft>
+                <a:spcPts val="0"/>
+              </a:spcAft>
+              <a:buClrTx/>
+              <a:buSzTx/>
+              <a:buFontTx/>
+              <a:buNone/>
+              <a:tabLst/>
+              <a:defRPr/>
+            </a:pPr>
             <a:r>
               <a:rPr lang="en-US" dirty="0"/>
-              <a:t>A health monitor that polls remoteEntry.js every five seconds. Kill switches. An A/B deployment ring. That panel is for the demo. I can take a module down in front of you and show you that the rest of the app keeps running. Basically we are going to simulate </a:t>
-            </a:r>
-            <a:r>
-              <a:rPr lang="en-US" sz="1200" i="1" dirty="0">
+              <a:t>People ask why we wrap eager modules in </a:t>
+            </a:r>
+            <a:r>
+              <a:rPr lang="en-US" sz="1200" kern="1200" dirty="0">
                 <a:solidFill>
-                  <a:schemeClr val="bg1">
-                    <a:lumMod val="95000"/>
-                  </a:schemeClr>
+                  <a:schemeClr val="tx1"/>
                 </a:solidFill>
-                <a:latin typeface="Instrument Serif" pitchFamily="34" charset="0"/>
-                <a:ea typeface="Instrument Serif" pitchFamily="34" charset="-122"/>
+                <a:latin typeface="+mn-lt"/>
+                <a:ea typeface="+mn-ea"/>
+                <a:cs typeface="+mn-cs"/>
               </a:rPr>
-              <a:t>m</a:t>
-            </a:r>
-            <a:r>
-              <a:rPr lang="en-US" sz="1200" i="1" dirty="0">
+              <a:t>lazy()</a:t>
+            </a:r>
+            <a:r>
+              <a:rPr lang="en-US" dirty="0"/>
+              <a:t>. It's not that static imports are impossible — they work, because </a:t>
+            </a:r>
+            <a:r>
+              <a:rPr lang="en-US" sz="1200" kern="1200" dirty="0" err="1">
                 <a:solidFill>
-                  <a:schemeClr val="bg1">
-                    <a:lumMod val="95000"/>
-                  </a:schemeClr>
+                  <a:schemeClr val="tx1"/>
                 </a:solidFill>
-                <a:latin typeface="Instrument Serif" pitchFamily="34" charset="0"/>
-                <a:ea typeface="Instrument Serif" pitchFamily="34" charset="-122"/>
-                <a:cs typeface="Instrument Serif" pitchFamily="34" charset="-120"/>
+                <a:latin typeface="+mn-lt"/>
+                <a:ea typeface="+mn-ea"/>
+                <a:cs typeface="+mn-cs"/>
               </a:rPr>
-              <a:t>odule-level crashes, network failures, and bad deploys are isolated at the boundary. </a:t>
-            </a:r>
-            <a:endParaRPr lang="en-US" dirty="0"/>
+              <a:t>index.tsx</a:t>
+            </a:r>
+            <a:r>
+              <a:rPr lang="en-US" dirty="0" err="1"/>
+              <a:t>'s</a:t>
+            </a:r>
+            <a:r>
+              <a:rPr lang="en-US" dirty="0"/>
+              <a:t> dynamic import already resolved the shared scope. It's that a static import makes the remote block first paint, and leaves nowhere to catch a failed remote. So we fire </a:t>
+            </a:r>
+            <a:r>
+              <a:rPr lang="en-US" sz="1200" kern="1200" dirty="0">
+                <a:solidFill>
+                  <a:schemeClr val="tx1"/>
+                </a:solidFill>
+                <a:latin typeface="+mn-lt"/>
+                <a:ea typeface="+mn-ea"/>
+                <a:cs typeface="+mn-cs"/>
+              </a:rPr>
+              <a:t>import()</a:t>
+            </a:r>
+            <a:r>
+              <a:rPr lang="en-US" dirty="0"/>
+              <a:t> at shell </a:t>
+            </a:r>
+            <a:r>
+              <a:rPr lang="en-US" dirty="0" err="1"/>
+              <a:t>init</a:t>
+            </a:r>
+            <a:r>
+              <a:rPr lang="en-US" dirty="0"/>
+              <a:t> to warm it, and </a:t>
+            </a:r>
+            <a:r>
+              <a:rPr lang="en-US" sz="1200" kern="1200" dirty="0">
+                <a:solidFill>
+                  <a:schemeClr val="tx1"/>
+                </a:solidFill>
+                <a:latin typeface="+mn-lt"/>
+                <a:ea typeface="+mn-ea"/>
+                <a:cs typeface="+mn-cs"/>
+              </a:rPr>
+              <a:t>lazy()</a:t>
+            </a:r>
+            <a:r>
+              <a:rPr lang="en-US" dirty="0"/>
+              <a:t> resolves from the module registry instantly — while keeping the Suspense and </a:t>
+            </a:r>
+            <a:r>
+              <a:rPr lang="en-US" dirty="0" err="1"/>
+              <a:t>ErrorBoundary</a:t>
+            </a:r>
+            <a:r>
+              <a:rPr lang="en-US" dirty="0"/>
+              <a:t> per module.</a:t>
+            </a:r>
+          </a:p>
+          <a:p>
+            <a:endParaRPr lang="en-GB" dirty="0"/>
           </a:p>
         </p:txBody>
       </p:sp>
     </p:spTree>
     <p:extLst>
       <p:ext uri="{BB962C8B-B14F-4D97-AF65-F5344CB8AC3E}">
-        <p14:creationId xmlns:p14="http://schemas.microsoft.com/office/powerpoint/2010/main" val="3599504877"/>
+        <p14:creationId xmlns:p14="http://schemas.microsoft.com/office/powerpoint/2010/main" val="2316851497"/>
       </p:ext>
     </p:extLst>
   </p:cSld>
@@ -1906,14 +1923,69 @@
           <a:bodyPr/>
           <a:lstStyle/>
           <a:p>
-            <a:endParaRPr lang="en-GB" dirty="0"/>
+            <a:r>
+              <a:rPr lang="en-US" dirty="0"/>
+              <a:t>A health monitor that polls remoteEntry.js every five seconds. </a:t>
+            </a:r>
+          </a:p>
+          <a:p>
+            <a:r>
+              <a:rPr lang="en-US" dirty="0"/>
+              <a:t>Kill switches. </a:t>
+            </a:r>
+          </a:p>
+          <a:p>
+            <a:r>
+              <a:rPr lang="en-US" dirty="0"/>
+              <a:t>An A/B deployment ring. That panel is for the demo. I can take a module down in front of you and show you that the rest of the app keeps running. Basically, we are going to simulate </a:t>
+            </a:r>
+            <a:r>
+              <a:rPr lang="en-US" sz="1200" i="1" dirty="0">
+                <a:solidFill>
+                  <a:schemeClr val="bg1">
+                    <a:lumMod val="95000"/>
+                  </a:schemeClr>
+                </a:solidFill>
+                <a:latin typeface="Instrument Serif" pitchFamily="34" charset="0"/>
+                <a:ea typeface="Instrument Serif" pitchFamily="34" charset="-122"/>
+              </a:rPr>
+              <a:t>m</a:t>
+            </a:r>
+            <a:r>
+              <a:rPr lang="en-US" sz="1200" i="1" dirty="0">
+                <a:solidFill>
+                  <a:schemeClr val="bg1">
+                    <a:lumMod val="95000"/>
+                  </a:schemeClr>
+                </a:solidFill>
+                <a:latin typeface="Instrument Serif" pitchFamily="34" charset="0"/>
+                <a:ea typeface="Instrument Serif" pitchFamily="34" charset="-122"/>
+                <a:cs typeface="Instrument Serif" pitchFamily="34" charset="-120"/>
+              </a:rPr>
+              <a:t>odule-level crashes, network failures, and bad deploys are isolated at the boundary. </a:t>
+            </a:r>
+          </a:p>
+          <a:p>
+            <a:r>
+              <a:rPr lang="en-US" sz="1200" i="0" dirty="0">
+                <a:solidFill>
+                  <a:schemeClr val="bg1">
+                    <a:lumMod val="95000"/>
+                  </a:schemeClr>
+                </a:solidFill>
+                <a:latin typeface="Instrument Serif" pitchFamily="34" charset="0"/>
+                <a:ea typeface="Instrument Serif" pitchFamily="34" charset="-122"/>
+              </a:rPr>
+              <a:t>Theming.</a:t>
+            </a:r>
+            <a:endParaRPr lang="en-US" i="0" dirty="0"/>
           </a:p>
         </p:txBody>
       </p:sp>
     </p:spTree>
     <p:extLst>
       <p:ext uri="{BB962C8B-B14F-4D97-AF65-F5344CB8AC3E}">
-        <p14:creationId xmlns:p14="http://schemas.microsoft.com/office/powerpoint/2010/main" val="3759391641"/>
+        <p14:creationId xmlns:p14="http://schemas.microsoft.com/office/powerpoint/2010/main" val="3599504877"/>
       </p:ext>
     </p:extLst>
   </p:cSld>
@@ -1990,41 +2062,24 @@
           <a:lstStyle/>
           <a:p>
             <a:r>
-              <a:rPr lang="en-US" dirty="0"/>
-              <a:t>Why events instead of a shared store? A shared store is a shared dependency. Version coupling between teams. Events survive independent deploys. They even survive framework diversity. A Vue remote and a React remote can talk through the same window contract.</a:t>
-            </a:r>
-          </a:p>
-          <a:p>
-            <a:r>
-              <a:rPr lang="en-US" dirty="0"/>
-              <a:t>The payload is still a versioned contract. Keep it backward compatible. Each remote defines the same event shapes in its own types file by augmenting </a:t>
-            </a:r>
-            <a:r>
-              <a:rPr lang="en-US" dirty="0" err="1"/>
-              <a:t>WindowEventMap</a:t>
-            </a:r>
-            <a:r>
-              <a:rPr lang="en-US" dirty="0"/>
-              <a:t>. No shared package is required. </a:t>
-            </a:r>
-            <a:r>
-              <a:rPr lang="en-US" dirty="0" err="1"/>
-              <a:t>addEventListener</a:t>
-            </a:r>
-            <a:r>
-              <a:rPr lang="en-US" dirty="0"/>
-              <a:t> is fully typed.</a:t>
-            </a:r>
-          </a:p>
-          <a:p>
-            <a:endParaRPr lang="en-GB" dirty="0"/>
+              <a:rPr lang="en-GB" dirty="0"/>
+              <a:t>This is how you deal with client state management. I will show you more later and also something about server state management like </a:t>
+            </a:r>
+            <a:r>
+              <a:rPr lang="en-GB" dirty="0" err="1"/>
+              <a:t>TanStack</a:t>
+            </a:r>
+            <a:r>
+              <a:rPr lang="en-GB" dirty="0"/>
+              <a:t> Query.</a:t>
+            </a:r>
           </a:p>
         </p:txBody>
       </p:sp>
     </p:spTree>
     <p:extLst>
       <p:ext uri="{BB962C8B-B14F-4D97-AF65-F5344CB8AC3E}">
-        <p14:creationId xmlns:p14="http://schemas.microsoft.com/office/powerpoint/2010/main" val="3974856141"/>
+        <p14:creationId xmlns:p14="http://schemas.microsoft.com/office/powerpoint/2010/main" val="3759391641"/>
       </p:ext>
     </p:extLst>
   </p:cSld>
@@ -2102,8 +2157,44 @@
           <a:p>
             <a:r>
               <a:rPr lang="en-US" dirty="0"/>
-              <a:t>Each app owns its own store and its own query client — nothing is shared. For client state they agree on a typed event contract, and whoever owns the state is the one who broadcasts: the shell owns theme and routing, so it broadcasts those; the counter belongs to nobody, so any module can. For server state there's no syncing at all — every app just fetches, because the API is already the shared state.</a:t>
-            </a:r>
+              <a:t>Why events instead of a shared store? A shared store is a shared dependency. </a:t>
+            </a:r>
+          </a:p>
+          <a:p>
+            <a:endParaRPr lang="en-US" dirty="0"/>
+          </a:p>
+          <a:p>
+            <a:r>
+              <a:rPr lang="en-US" dirty="0"/>
+              <a:t>There will be version coupling between teams if shared, while events survive independent deploys. They even survive framework diversity. For example, a Vue remote and a React remote can talk through the same window contract.</a:t>
+            </a:r>
+          </a:p>
+          <a:p>
+            <a:endParaRPr lang="en-US" dirty="0"/>
+          </a:p>
+          <a:p>
+            <a:r>
+              <a:rPr lang="en-US" dirty="0"/>
+              <a:t>The payload is still a versioned contract. Keep it backward compatible. Each remote defines the same event shapes in its own types file by augmenting </a:t>
+            </a:r>
+            <a:r>
+              <a:rPr lang="en-US" dirty="0" err="1"/>
+              <a:t>WindowEventMap</a:t>
+            </a:r>
+            <a:r>
+              <a:rPr lang="en-US" dirty="0"/>
+              <a:t>. No shared package is required. </a:t>
+            </a:r>
+            <a:r>
+              <a:rPr lang="en-US" dirty="0" err="1"/>
+              <a:t>addEventListener</a:t>
+            </a:r>
+            <a:r>
+              <a:rPr lang="en-US" dirty="0"/>
+              <a:t> is fully typed.</a:t>
+            </a:r>
+          </a:p>
+          <a:p>
             <a:endParaRPr lang="en-GB" dirty="0"/>
           </a:p>
         </p:txBody>
@@ -2111,7 +2202,7 @@
     </p:spTree>
     <p:extLst>
       <p:ext uri="{BB962C8B-B14F-4D97-AF65-F5344CB8AC3E}">
-        <p14:creationId xmlns:p14="http://schemas.microsoft.com/office/powerpoint/2010/main" val="983126966"/>
+        <p14:creationId xmlns:p14="http://schemas.microsoft.com/office/powerpoint/2010/main" val="3974856141"/>
       </p:ext>
     </p:extLst>
   </p:cSld>
@@ -2189,16 +2280,69 @@
           <a:p>
             <a:r>
               <a:rPr lang="en-US" dirty="0"/>
-              <a:t>Theming is a cross-cutting concern, and the shell owns it.</a:t>
-            </a:r>
+              <a:t>Each app owns its own store and its own query client — nothing is shared. For client state they agree on a typed event contract, and whoever owns the state is the one who broadcasts: </a:t>
+            </a:r>
+          </a:p>
+          <a:p>
+            <a:endParaRPr lang="en-US" dirty="0"/>
           </a:p>
           <a:p>
             <a:r>
               <a:rPr lang="en-US" dirty="0"/>
-              <a:t>The shell persists the choice to local storage. It applies CSS variables to the document element. It exposes a small bridge on window so a remote can read or set the theme without importing host code. And it broadcasts a theme-change event.</a:t>
-            </a:r>
-          </a:p>
-          <a:p>
+              <a:t>the shell owns theme and routing, so it broadcasts those; </a:t>
+            </a:r>
+          </a:p>
+          <a:p>
+            <a:endParaRPr lang="en-US" dirty="0"/>
+          </a:p>
+          <a:p>
+            <a:r>
+              <a:rPr lang="en-US" dirty="0" err="1"/>
+              <a:t>addPrescription</a:t>
+            </a:r>
+            <a:r>
+              <a:rPr lang="en-US" dirty="0"/>
+              <a:t>.</a:t>
+            </a:r>
+          </a:p>
+          <a:p>
+            <a:endParaRPr lang="en-US" dirty="0"/>
+          </a:p>
+          <a:p>
+            <a:r>
+              <a:rPr lang="en-US" dirty="0" err="1"/>
+              <a:t>showNotification</a:t>
+            </a:r>
+            <a:r>
+              <a:rPr lang="en-US" dirty="0"/>
+              <a:t>.</a:t>
+            </a:r>
+          </a:p>
+          <a:p>
+            <a:endParaRPr lang="en-US" dirty="0"/>
+          </a:p>
+          <a:p>
+            <a:r>
+              <a:rPr lang="en-US" dirty="0"/>
+              <a:t>the counter belongs to nobody, so any module can. </a:t>
+            </a:r>
+          </a:p>
+          <a:p>
+            <a:endParaRPr lang="en-US" dirty="0"/>
+          </a:p>
+          <a:p>
+            <a:r>
+              <a:rPr lang="en-US" dirty="0"/>
+              <a:t>For server state, like </a:t>
+            </a:r>
+            <a:r>
+              <a:rPr lang="en-US" dirty="0" err="1"/>
+              <a:t>TanStack</a:t>
+            </a:r>
+            <a:r>
+              <a:rPr lang="en-US" dirty="0"/>
+              <a:t> Query, there's no syncing at all — every app just fetches, because the API is already the shared state.</a:t>
+            </a:r>
             <a:endParaRPr lang="en-GB" dirty="0"/>
           </a:p>
         </p:txBody>
@@ -2206,7 +2350,7 @@
     </p:spTree>
     <p:extLst>
       <p:ext uri="{BB962C8B-B14F-4D97-AF65-F5344CB8AC3E}">
-        <p14:creationId xmlns:p14="http://schemas.microsoft.com/office/powerpoint/2010/main" val="2728972476"/>
+        <p14:creationId xmlns:p14="http://schemas.microsoft.com/office/powerpoint/2010/main" val="983126966"/>
       </p:ext>
     </p:extLst>
   </p:cSld>
@@ -2284,13 +2428,13 @@
           <a:p>
             <a:r>
               <a:rPr lang="en-US" dirty="0"/>
-              <a:t>For the rest, the nav link fires on mouse enter. When the cursor touches Prescriptions or Analytics, the chunk starts fetching in the background. Click, and it is often already cached.</a:t>
+              <a:t>Theming is a cross-cutting concern, and the shell owns it.</a:t>
             </a:r>
           </a:p>
           <a:p>
             <a:r>
               <a:rPr lang="en-US" dirty="0"/>
-              <a:t>Instant means the landing page fetches lazily, with no streaming delay. Eager means preloaded the moment the shell mounts. Hover means prefetched when the user aims at a tab. That is why Records feels instant even though it is a separate app on a separate server. The work happened at mount.</a:t>
+              <a:t>The shell persists the choice to local storage. It applies CSS variables to the document element. It exposes a small bridge on window so a remote can read or set the theme without importing host code. And it broadcasts a theme-change event.</a:t>
             </a:r>
           </a:p>
           <a:p>
@@ -2301,7 +2445,7 @@
     </p:spTree>
     <p:extLst>
       <p:ext uri="{BB962C8B-B14F-4D97-AF65-F5344CB8AC3E}">
-        <p14:creationId xmlns:p14="http://schemas.microsoft.com/office/powerpoint/2010/main" val="2202382534"/>
+        <p14:creationId xmlns:p14="http://schemas.microsoft.com/office/powerpoint/2010/main" val="2728972476"/>
       </p:ext>
     </p:extLst>
   </p:cSld>
@@ -2383,10 +2527,16 @@
             </a:r>
           </a:p>
           <a:p>
+            <a:endParaRPr lang="en-US" dirty="0"/>
+          </a:p>
+          <a:p>
             <a:r>
               <a:rPr lang="en-US" dirty="0"/>
-              <a:t>One. Micro-frontends solve a people problem. Adopt this when your team is growing and the monolith cannot keep up. Independent modules let independent teams ship without blocking each other. Team size is the signal, not bundle size.</a:t>
-            </a:r>
+              <a:t>One. Micro-frontends solve a people problem. Adopt this when your team is growing and the monolith cannot keep up. And independent modules let independent teams ship without blocking each other. Rember the team size is the signal, not bundle size.</a:t>
+            </a:r>
+          </a:p>
+          <a:p>
+            <a:endParaRPr lang="en-US" dirty="0"/>
           </a:p>
           <a:p>
             <a:r>
@@ -2395,12 +2545,18 @@
             </a:r>
           </a:p>
           <a:p>
+            <a:endParaRPr lang="en-US" dirty="0"/>
+          </a:p>
+          <a:p>
             <a:r>
               <a:rPr lang="en-US" dirty="0"/>
               <a:t>Three. Prefer events over shared state. A custom event on window gives you decoupled communication that survives independent deploys. Keep the payload backward compatible.</a:t>
             </a:r>
           </a:p>
           <a:p>
+            <a:endParaRPr lang="en-US" dirty="0"/>
+          </a:p>
+          <a:p>
             <a:r>
               <a:rPr lang="en-US" dirty="0"/>
               <a:t>Four. The host owns routing. Remotes can ask for navigation with </a:t>
@@ -2415,12 +2571,18 @@
             </a:r>
           </a:p>
           <a:p>
+            <a:endParaRPr lang="en-US" dirty="0"/>
+          </a:p>
+          <a:p>
             <a:r>
               <a:rPr lang="en-US" dirty="0"/>
               <a:t>Five. Ship fault isolation on purpose. A catch on every lazy import, plus an error boundary per module, keeps one broken remote from taking down the app.</a:t>
             </a:r>
           </a:p>
           <a:p>
+            <a:endParaRPr lang="en-US" dirty="0"/>
+          </a:p>
+          <a:p>
             <a:r>
               <a:rPr lang="en-US" dirty="0"/>
               <a:t>Six. </a:t>
@@ -2447,13 +2609,16 @@
             </a:r>
             <a:r>
               <a:rPr lang="en-US" dirty="0"/>
-              <a:t> 2.1 ships the Rust React Compiler, and persistent caching for faster builds and faster restarts.</a:t>
-            </a:r>
+              <a:t> ships the Rust React Compiler, and persistent caching for faster builds and faster restarts.</a:t>
+            </a:r>
+          </a:p>
+          <a:p>
+            <a:endParaRPr lang="en-US" dirty="0"/>
           </a:p>
           <a:p>
             <a:r>
               <a:rPr lang="en-US" dirty="0"/>
-              <a:t>Seven. Match load strategy to content priority. Instant for the landing page. Eager for high-value content. Streamed for secondary modules, with skeletons. Do not load every remote the same way.</a:t>
+              <a:t>Seven. Match load strategy to content priority. Instant for the landing page. Eager for high-value content. Suspense for secondary modules, with skeletons. Do not load every remote the same way.</a:t>
             </a:r>
           </a:p>
           <a:p>
@@ -2503,8 +2668,8 @@
         </p:nvSpPr>
         <p:spPr>
           <a:xfrm>
-            <a:off x="685800" y="1143000"/>
-            <a:ext cx="5486400" cy="3086100"/>
+            <a:off x="-225425" y="1524000"/>
+            <a:ext cx="7308850" cy="4113213"/>
           </a:xfrm>
           <a:prstGeom prst="rect">
             <a:avLst/>
@@ -2529,8 +2694,8 @@
         </p:nvSpPr>
         <p:spPr>
           <a:xfrm>
-            <a:off x="685800" y="4400550"/>
-            <a:ext cx="5486400" cy="3600450"/>
+            <a:off x="685800" y="5865813"/>
+            <a:ext cx="5486400" cy="4799012"/>
           </a:xfrm>
           <a:prstGeom prst="rect">
             <a:avLst/>
@@ -2540,14 +2705,25 @@
           <a:bodyPr/>
           <a:lstStyle/>
           <a:p>
-            <a:endParaRPr lang="en-GB" dirty="0"/>
+            <a:r>
+              <a:rPr lang="en-GB" dirty="0"/>
+              <a:t>And before I end this presentation, I have 3 things here I want to share. This is important because of our work has changed from writing code to </a:t>
+            </a:r>
+            <a:r>
+              <a:rPr lang="en-GB" dirty="0" err="1"/>
+              <a:t>vibecoding</a:t>
+            </a:r>
+            <a:r>
+              <a:rPr lang="en-GB" dirty="0"/>
+              <a:t> using AI agents making us 20x engineers now.</a:t>
+            </a:r>
           </a:p>
         </p:txBody>
       </p:sp>
     </p:spTree>
     <p:extLst>
       <p:ext uri="{BB962C8B-B14F-4D97-AF65-F5344CB8AC3E}">
-        <p14:creationId xmlns:p14="http://schemas.microsoft.com/office/powerpoint/2010/main" val="922607855"/>
+        <p14:creationId xmlns:p14="http://schemas.microsoft.com/office/powerpoint/2010/main" val="2069423728"/>
       </p:ext>
     </p:extLst>
   </p:cSld>
@@ -2641,6 +2817,296 @@
 </file>
 
 <file path=ppt/notesSlides/notesSlide30.xml><?xml version="1.0" encoding="utf-8"?>
+<p:notes xmlns:a="http://schemas.openxmlformats.org/drawingml/2006/main" xmlns:r="http://schemas.openxmlformats.org/officeDocument/2006/relationships" xmlns:p="http://schemas.openxmlformats.org/presentationml/2006/main">
+  <p:cSld>
+    <p:spTree>
+      <p:nvGrpSpPr>
+        <p:cNvPr id="1" name=""/>
+        <p:cNvGrpSpPr/>
+        <p:nvPr/>
+      </p:nvGrpSpPr>
+      <p:grpSpPr>
+        <a:xfrm>
+          <a:off x="0" y="0"/>
+          <a:ext cx="0" cy="0"/>
+          <a:chOff x="0" y="0"/>
+          <a:chExt cx="0" cy="0"/>
+        </a:xfrm>
+      </p:grpSpPr>
+      <p:sp>
+        <p:nvSpPr>
+          <p:cNvPr id="2" name="Slide Image Placeholder 1"/>
+          <p:cNvSpPr>
+            <a:spLocks noGrp="1" noRot="1" noChangeAspect="1"/>
+          </p:cNvSpPr>
+          <p:nvPr>
+            <p:ph type="sldImg"/>
+          </p:nvPr>
+        </p:nvSpPr>
+        <p:spPr>
+          <a:xfrm>
+            <a:off x="-225425" y="1524000"/>
+            <a:ext cx="7308850" cy="4113213"/>
+          </a:xfrm>
+          <a:prstGeom prst="rect">
+            <a:avLst/>
+          </a:prstGeom>
+          <a:noFill/>
+          <a:ln w="12700">
+            <a:solidFill>
+              <a:prstClr val="black"/>
+            </a:solidFill>
+          </a:ln>
+        </p:spPr>
+      </p:sp>
+      <p:sp>
+        <p:nvSpPr>
+          <p:cNvPr id="3" name="Notes Placeholder 2"/>
+          <p:cNvSpPr>
+            <a:spLocks noGrp="1"/>
+          </p:cNvSpPr>
+          <p:nvPr>
+            <p:ph type="body" idx="1"/>
+          </p:nvPr>
+        </p:nvSpPr>
+        <p:spPr>
+          <a:xfrm>
+            <a:off x="685800" y="5865813"/>
+            <a:ext cx="5486400" cy="4799012"/>
+          </a:xfrm>
+          <a:prstGeom prst="rect">
+            <a:avLst/>
+          </a:prstGeom>
+        </p:spPr>
+        <p:txBody>
+          <a:bodyPr/>
+          <a:lstStyle/>
+          <a:p>
+            <a:r>
+              <a:rPr lang="en-GB" dirty="0"/>
+              <a:t>First is, you can nest AGENTS.md files to your different micro frontend apps that’s good for your AI agents.</a:t>
+            </a:r>
+          </a:p>
+        </p:txBody>
+      </p:sp>
+    </p:spTree>
+    <p:extLst>
+      <p:ext uri="{BB962C8B-B14F-4D97-AF65-F5344CB8AC3E}">
+        <p14:creationId xmlns:p14="http://schemas.microsoft.com/office/powerpoint/2010/main" val="4203036748"/>
+      </p:ext>
+    </p:extLst>
+  </p:cSld>
+  <p:clrMapOvr>
+    <a:masterClrMapping/>
+  </p:clrMapOvr>
+</p:notes>
+</file>
+
+<file path=ppt/notesSlides/notesSlide31.xml><?xml version="1.0" encoding="utf-8"?>
+<p:notes xmlns:a="http://schemas.openxmlformats.org/drawingml/2006/main" xmlns:r="http://schemas.openxmlformats.org/officeDocument/2006/relationships" xmlns:p="http://schemas.openxmlformats.org/presentationml/2006/main">
+  <p:cSld>
+    <p:spTree>
+      <p:nvGrpSpPr>
+        <p:cNvPr id="1" name="">
+          <a:extLst>
+            <a:ext uri="{FF2B5EF4-FFF2-40B4-BE49-F238E27FC236}">
+              <a16:creationId xmlns:a16="http://schemas.microsoft.com/office/drawing/2014/main" id="{D11FA9EC-F1C4-8475-4C34-982AA7BE60A7}"/>
+            </a:ext>
+          </a:extLst>
+        </p:cNvPr>
+        <p:cNvGrpSpPr/>
+        <p:nvPr/>
+      </p:nvGrpSpPr>
+      <p:grpSpPr>
+        <a:xfrm>
+          <a:off x="0" y="0"/>
+          <a:ext cx="0" cy="0"/>
+          <a:chOff x="0" y="0"/>
+          <a:chExt cx="0" cy="0"/>
+        </a:xfrm>
+      </p:grpSpPr>
+      <p:sp>
+        <p:nvSpPr>
+          <p:cNvPr id="2" name="Slide Image Placeholder 1">
+            <a:extLst>
+              <a:ext uri="{FF2B5EF4-FFF2-40B4-BE49-F238E27FC236}">
+                <a16:creationId xmlns:a16="http://schemas.microsoft.com/office/drawing/2014/main" id="{9F28C641-A123-4973-51FA-0665B2813653}"/>
+              </a:ext>
+            </a:extLst>
+          </p:cNvPr>
+          <p:cNvSpPr>
+            <a:spLocks noGrp="1" noRot="1" noChangeAspect="1"/>
+          </p:cNvSpPr>
+          <p:nvPr>
+            <p:ph type="sldImg"/>
+          </p:nvPr>
+        </p:nvSpPr>
+        <p:spPr/>
+      </p:sp>
+      <p:sp>
+        <p:nvSpPr>
+          <p:cNvPr id="3" name="Notes Placeholder 2">
+            <a:extLst>
+              <a:ext uri="{FF2B5EF4-FFF2-40B4-BE49-F238E27FC236}">
+                <a16:creationId xmlns:a16="http://schemas.microsoft.com/office/drawing/2014/main" id="{AB824122-D8E6-13A2-EF59-883AC6891774}"/>
+              </a:ext>
+            </a:extLst>
+          </p:cNvPr>
+          <p:cNvSpPr>
+            <a:spLocks noGrp="1"/>
+          </p:cNvSpPr>
+          <p:nvPr>
+            <p:ph type="body" idx="1"/>
+          </p:nvPr>
+        </p:nvSpPr>
+        <p:spPr/>
+        <p:txBody>
+          <a:bodyPr/>
+          <a:lstStyle/>
+          <a:p>
+            <a:r>
+              <a:rPr lang="en-US" dirty="0"/>
+              <a:t>Knowledge atrophy, or cognitive atrophy, is the gradual decline of memory, critical thinking, and problem-solving skills caused by overreliance on AI tools like LLMs for mental work. </a:t>
+            </a:r>
+            <a:br>
+              <a:rPr lang="en-US" dirty="0"/>
+            </a:br>
+            <a:br>
+              <a:rPr lang="en-US" dirty="0"/>
+            </a:br>
+            <a:r>
+              <a:rPr lang="en-US" dirty="0"/>
+              <a:t>Keep learning the technical details of things that you are building. This will help you in the future in guiding agents to the right directions. It will save money because of lesser prompting. And lastly it will improve your skills</a:t>
+            </a:r>
+          </a:p>
+        </p:txBody>
+      </p:sp>
+      <p:sp>
+        <p:nvSpPr>
+          <p:cNvPr id="4" name="Slide Number Placeholder 3">
+            <a:extLst>
+              <a:ext uri="{FF2B5EF4-FFF2-40B4-BE49-F238E27FC236}">
+                <a16:creationId xmlns:a16="http://schemas.microsoft.com/office/drawing/2014/main" id="{876E6526-0A27-7059-0E06-088E9428FC92}"/>
+              </a:ext>
+            </a:extLst>
+          </p:cNvPr>
+          <p:cNvSpPr>
+            <a:spLocks noGrp="1"/>
+          </p:cNvSpPr>
+          <p:nvPr>
+            <p:ph type="sldNum" sz="quarter" idx="10"/>
+          </p:nvPr>
+        </p:nvSpPr>
+        <p:spPr/>
+        <p:txBody>
+          <a:bodyPr/>
+          <a:lstStyle/>
+          <a:p>
+            <a:fld id="{F7021451-1387-4CA6-816F-3879F97B5CBC}" type="slidenum">
+              <a:rPr lang="en-US"/>
+              <a:t>35</a:t>
+            </a:fld>
+            <a:endParaRPr lang="en-US"/>
+          </a:p>
+        </p:txBody>
+      </p:sp>
+    </p:spTree>
+    <p:extLst>
+      <p:ext uri="{BB962C8B-B14F-4D97-AF65-F5344CB8AC3E}">
+        <p14:creationId xmlns:p14="http://schemas.microsoft.com/office/powerpoint/2010/main" val="3486230722"/>
+      </p:ext>
+    </p:extLst>
+  </p:cSld>
+  <p:clrMapOvr>
+    <a:masterClrMapping/>
+  </p:clrMapOvr>
+</p:notes>
+</file>
+
+<file path=ppt/notesSlides/notesSlide32.xml><?xml version="1.0" encoding="utf-8"?>
+<p:notes xmlns:a="http://schemas.openxmlformats.org/drawingml/2006/main" xmlns:r="http://schemas.openxmlformats.org/officeDocument/2006/relationships" xmlns:p="http://schemas.openxmlformats.org/presentationml/2006/main">
+  <p:cSld>
+    <p:spTree>
+      <p:nvGrpSpPr>
+        <p:cNvPr id="1" name=""/>
+        <p:cNvGrpSpPr/>
+        <p:nvPr/>
+      </p:nvGrpSpPr>
+      <p:grpSpPr>
+        <a:xfrm>
+          <a:off x="0" y="0"/>
+          <a:ext cx="0" cy="0"/>
+          <a:chOff x="0" y="0"/>
+          <a:chExt cx="0" cy="0"/>
+        </a:xfrm>
+      </p:grpSpPr>
+      <p:sp>
+        <p:nvSpPr>
+          <p:cNvPr id="2" name="Slide Image Placeholder 1"/>
+          <p:cNvSpPr>
+            <a:spLocks noGrp="1" noRot="1" noChangeAspect="1"/>
+          </p:cNvSpPr>
+          <p:nvPr>
+            <p:ph type="sldImg"/>
+          </p:nvPr>
+        </p:nvSpPr>
+        <p:spPr>
+          <a:xfrm>
+            <a:off x="685800" y="1143000"/>
+            <a:ext cx="5486400" cy="3086100"/>
+          </a:xfrm>
+          <a:prstGeom prst="rect">
+            <a:avLst/>
+          </a:prstGeom>
+          <a:noFill/>
+          <a:ln w="12700">
+            <a:solidFill>
+              <a:prstClr val="black"/>
+            </a:solidFill>
+          </a:ln>
+        </p:spPr>
+      </p:sp>
+      <p:sp>
+        <p:nvSpPr>
+          <p:cNvPr id="3" name="Notes Placeholder 2"/>
+          <p:cNvSpPr>
+            <a:spLocks noGrp="1"/>
+          </p:cNvSpPr>
+          <p:nvPr>
+            <p:ph type="body" idx="1"/>
+          </p:nvPr>
+        </p:nvSpPr>
+        <p:spPr>
+          <a:xfrm>
+            <a:off x="685800" y="4400550"/>
+            <a:ext cx="5486400" cy="3600450"/>
+          </a:xfrm>
+          <a:prstGeom prst="rect">
+            <a:avLst/>
+          </a:prstGeom>
+        </p:spPr>
+        <p:txBody>
+          <a:bodyPr/>
+          <a:lstStyle/>
+          <a:p>
+            <a:endParaRPr lang="en-GB" dirty="0"/>
+          </a:p>
+        </p:txBody>
+      </p:sp>
+    </p:spTree>
+    <p:extLst>
+      <p:ext uri="{BB962C8B-B14F-4D97-AF65-F5344CB8AC3E}">
+        <p14:creationId xmlns:p14="http://schemas.microsoft.com/office/powerpoint/2010/main" val="922607855"/>
+      </p:ext>
+    </p:extLst>
+  </p:cSld>
+  <p:clrMapOvr>
+    <a:masterClrMapping/>
+  </p:clrMapOvr>
+</p:notes>
+</file>
+
+<file path=ppt/notesSlides/notesSlide33.xml><?xml version="1.0" encoding="utf-8"?>
 <p:notes xmlns:a="http://schemas.openxmlformats.org/drawingml/2006/main" xmlns:r="http://schemas.openxmlformats.org/officeDocument/2006/relationships" xmlns:p="http://schemas.openxmlformats.org/presentationml/2006/main">
   <p:cSld>
     <p:spTree>
@@ -4289,7 +4755,7 @@
                 <a:ea typeface="Cascadia Code NF" pitchFamily="50" charset="0"/>
                 <a:cs typeface="Cascadia Code NF" pitchFamily="50" charset="0"/>
               </a:rPr>
-              <a:t>├── Prescriptions :3002   STREAMED</a:t>
+              <a:t>├── Prescriptions :3002   SUSPENSE</a:t>
             </a:r>
           </a:p>
           <a:p>
@@ -4311,7 +4777,7 @@
                 <a:ea typeface="Cascadia Code NF" pitchFamily="50" charset="0"/>
                 <a:cs typeface="Cascadia Code NF" pitchFamily="50" charset="0"/>
               </a:rPr>
-              <a:t>└── Analytics     :3003   STREAMED</a:t>
+              <a:t>└── Analytics     :3003   SUSPENSE</a:t>
             </a:r>
           </a:p>
         </p:txBody>
@@ -4330,6 +4796,123 @@
 </file>
 
 <file path=ppt/slides/slide15.xml><?xml version="1.0" encoding="utf-8"?>
+<p:sld xmlns:a="http://schemas.openxmlformats.org/drawingml/2006/main" xmlns:r="http://schemas.openxmlformats.org/officeDocument/2006/relationships" xmlns:p="http://schemas.openxmlformats.org/presentationml/2006/main">
+  <p:cSld>
+    <p:spTree>
+      <p:nvGrpSpPr>
+        <p:cNvPr id="1" name=""/>
+        <p:cNvGrpSpPr/>
+        <p:nvPr/>
+      </p:nvGrpSpPr>
+      <p:grpSpPr>
+        <a:xfrm>
+          <a:off x="0" y="0"/>
+          <a:ext cx="0" cy="0"/>
+          <a:chOff x="0" y="0"/>
+          <a:chExt cx="0" cy="0"/>
+        </a:xfrm>
+      </p:grpSpPr>
+      <p:sp>
+        <p:nvSpPr>
+          <p:cNvPr id="2" name="TextBox 1">
+            <a:extLst>
+              <a:ext uri="{FF2B5EF4-FFF2-40B4-BE49-F238E27FC236}">
+                <a16:creationId xmlns:a16="http://schemas.microsoft.com/office/drawing/2014/main" id="{48559209-AAA2-1CB4-6BF2-0C4E86659D30}"/>
+              </a:ext>
+            </a:extLst>
+          </p:cNvPr>
+          <p:cNvSpPr txBox="1"/>
+          <p:nvPr/>
+        </p:nvSpPr>
+        <p:spPr>
+          <a:xfrm>
+            <a:off x="722376" y="576072"/>
+            <a:ext cx="1436612" cy="707886"/>
+          </a:xfrm>
+          <a:prstGeom prst="rect">
+            <a:avLst/>
+          </a:prstGeom>
+          <a:noFill/>
+        </p:spPr>
+        <p:txBody>
+          <a:bodyPr wrap="none" rtlCol="0">
+            <a:spAutoFit/>
+          </a:bodyPr>
+          <a:lstStyle/>
+          <a:p>
+            <a:r>
+              <a:rPr lang="en-GB" sz="4000" dirty="0"/>
+              <a:t>Demo</a:t>
+            </a:r>
+          </a:p>
+        </p:txBody>
+      </p:sp>
+      <p:sp>
+        <p:nvSpPr>
+          <p:cNvPr id="4" name="TextBox 3">
+            <a:extLst>
+              <a:ext uri="{FF2B5EF4-FFF2-40B4-BE49-F238E27FC236}">
+                <a16:creationId xmlns:a16="http://schemas.microsoft.com/office/drawing/2014/main" id="{FF9BFBAD-B63F-0C95-BF4B-77443B953A89}"/>
+              </a:ext>
+            </a:extLst>
+          </p:cNvPr>
+          <p:cNvSpPr txBox="1"/>
+          <p:nvPr/>
+        </p:nvSpPr>
+        <p:spPr>
+          <a:xfrm>
+            <a:off x="634848" y="3075057"/>
+            <a:ext cx="10919143" cy="646331"/>
+          </a:xfrm>
+          <a:prstGeom prst="rect">
+            <a:avLst/>
+          </a:prstGeom>
+          <a:noFill/>
+        </p:spPr>
+        <p:txBody>
+          <a:bodyPr wrap="none" rtlCol="0">
+            <a:spAutoFit/>
+          </a:bodyPr>
+          <a:lstStyle/>
+          <a:p>
+            <a:pPr algn="ctr"/>
+            <a:r>
+              <a:rPr lang="en-GB" sz="3600" dirty="0"/>
+              <a:t>Code base (</a:t>
+            </a:r>
+            <a:r>
+              <a:rPr lang="en-GB" sz="3600" dirty="0" err="1"/>
+              <a:t>bootstrap.tsx</a:t>
+            </a:r>
+            <a:r>
+              <a:rPr lang="en-GB" sz="3600" dirty="0"/>
+              <a:t>, Routes, </a:t>
+            </a:r>
+            <a:r>
+              <a:rPr lang="en-GB" sz="3600" dirty="0" err="1"/>
+              <a:t>Rspack</a:t>
+            </a:r>
+            <a:r>
+              <a:rPr lang="en-GB" sz="3600" dirty="0"/>
+              <a:t> config &amp; plugin)</a:t>
+            </a:r>
+          </a:p>
+        </p:txBody>
+      </p:sp>
+    </p:spTree>
+    <p:extLst>
+      <p:ext uri="{BB962C8B-B14F-4D97-AF65-F5344CB8AC3E}">
+        <p14:creationId xmlns:p14="http://schemas.microsoft.com/office/powerpoint/2010/main" val="765978407"/>
+      </p:ext>
+    </p:extLst>
+  </p:cSld>
+  <p:clrMapOvr>
+    <a:masterClrMapping/>
+  </p:clrMapOvr>
+</p:sld>
+</file>
+
+<file path=ppt/slides/slide16.xml><?xml version="1.0" encoding="utf-8"?>
 <p:sld xmlns:a="http://schemas.openxmlformats.org/drawingml/2006/main" xmlns:r="http://schemas.openxmlformats.org/officeDocument/2006/relationships" xmlns:p="http://schemas.openxmlformats.org/presentationml/2006/main">
   <p:cSld>
     <p:spTree>
@@ -4389,7 +4972,7 @@
 </p:sld>
 </file>
 
-<file path=ppt/slides/slide16.xml><?xml version="1.0" encoding="utf-8"?>
+<file path=ppt/slides/slide17.xml><?xml version="1.0" encoding="utf-8"?>
 <p:sld xmlns:a="http://schemas.openxmlformats.org/drawingml/2006/main" xmlns:r="http://schemas.openxmlformats.org/officeDocument/2006/relationships" xmlns:p="http://schemas.openxmlformats.org/presentationml/2006/main">
   <p:cSld>
     <p:spTree>
@@ -5162,7 +5745,7 @@
 </p:sld>
 </file>
 
-<file path=ppt/slides/slide17.xml><?xml version="1.0" encoding="utf-8"?>
+<file path=ppt/slides/slide18.xml><?xml version="1.0" encoding="utf-8"?>
 <p:sld xmlns:a="http://schemas.openxmlformats.org/drawingml/2006/main" xmlns:r="http://schemas.openxmlformats.org/officeDocument/2006/relationships" xmlns:p="http://schemas.openxmlformats.org/presentationml/2006/main">
   <p:cSld>
     <p:spTree>
@@ -5421,7 +6004,7 @@
 </p:sld>
 </file>
 
-<file path=ppt/slides/slide18.xml><?xml version="1.0" encoding="utf-8"?>
+<file path=ppt/slides/slide19.xml><?xml version="1.0" encoding="utf-8"?>
 <p:sld xmlns:a="http://schemas.openxmlformats.org/drawingml/2006/main" xmlns:r="http://schemas.openxmlformats.org/officeDocument/2006/relationships" xmlns:p="http://schemas.openxmlformats.org/presentationml/2006/main">
   <p:cSld>
     <p:spTree>
@@ -5767,185 +6350,6 @@
     <p:extLst>
       <p:ext uri="{BB962C8B-B14F-4D97-AF65-F5344CB8AC3E}">
         <p14:creationId xmlns:p14="http://schemas.microsoft.com/office/powerpoint/2010/main" val="32020069"/>
-      </p:ext>
-    </p:extLst>
-  </p:cSld>
-  <p:clrMapOvr>
-    <a:masterClrMapping/>
-  </p:clrMapOvr>
-</p:sld>
-</file>
-
-<file path=ppt/slides/slide19.xml><?xml version="1.0" encoding="utf-8"?>
-<p:sld xmlns:a="http://schemas.openxmlformats.org/drawingml/2006/main" xmlns:r="http://schemas.openxmlformats.org/officeDocument/2006/relationships" xmlns:p="http://schemas.openxmlformats.org/presentationml/2006/main">
-  <p:cSld>
-    <p:spTree>
-      <p:nvGrpSpPr>
-        <p:cNvPr id="1" name=""/>
-        <p:cNvGrpSpPr/>
-        <p:nvPr/>
-      </p:nvGrpSpPr>
-      <p:grpSpPr>
-        <a:xfrm>
-          <a:off x="0" y="0"/>
-          <a:ext cx="0" cy="0"/>
-          <a:chOff x="0" y="0"/>
-          <a:chExt cx="0" cy="0"/>
-        </a:xfrm>
-      </p:grpSpPr>
-      <p:sp>
-        <p:nvSpPr>
-          <p:cNvPr id="3" name="Text 2">
-            <a:extLst>
-              <a:ext uri="{FF2B5EF4-FFF2-40B4-BE49-F238E27FC236}">
-                <a16:creationId xmlns:a16="http://schemas.microsoft.com/office/drawing/2014/main" id="{915B897A-3EEC-DD92-29A6-A9DC36773ED2}"/>
-              </a:ext>
-            </a:extLst>
-          </p:cNvPr>
-          <p:cNvSpPr/>
-          <p:nvPr/>
-        </p:nvSpPr>
-        <p:spPr>
-          <a:xfrm>
-            <a:off x="530352" y="713232"/>
-            <a:ext cx="11109960" cy="777240"/>
-          </a:xfrm>
-          <a:prstGeom prst="rect">
-            <a:avLst/>
-          </a:prstGeom>
-          <a:noFill/>
-          <a:ln/>
-        </p:spPr>
-        <p:txBody>
-          <a:bodyPr wrap="square" rtlCol="0" anchor="ctr"/>
-          <a:lstStyle/>
-          <a:p>
-            <a:pPr marL="0" indent="0">
-              <a:buNone/>
-            </a:pPr>
-            <a:r>
-              <a:rPr lang="en-US" sz="3300" i="1" dirty="0">
-                <a:solidFill>
-                  <a:schemeClr val="tx1">
-                    <a:lumMod val="95000"/>
-                    <a:lumOff val="5000"/>
-                  </a:schemeClr>
-                </a:solidFill>
-                <a:latin typeface="Instrument Serif" pitchFamily="34" charset="0"/>
-                <a:ea typeface="Instrument Serif" pitchFamily="34" charset="-122"/>
-                <a:cs typeface="Instrument Serif" pitchFamily="34" charset="-120"/>
-              </a:rPr>
-              <a:t>Three strategies, three layers of resilience</a:t>
-            </a:r>
-            <a:endParaRPr lang="en-US" sz="3300" dirty="0">
-              <a:solidFill>
-                <a:schemeClr val="tx1">
-                  <a:lumMod val="95000"/>
-                  <a:lumOff val="5000"/>
-                </a:schemeClr>
-              </a:solidFill>
-            </a:endParaRPr>
-          </a:p>
-        </p:txBody>
-      </p:sp>
-      <p:sp>
-        <p:nvSpPr>
-          <p:cNvPr id="5" name="Text 6">
-            <a:extLst>
-              <a:ext uri="{FF2B5EF4-FFF2-40B4-BE49-F238E27FC236}">
-                <a16:creationId xmlns:a16="http://schemas.microsoft.com/office/drawing/2014/main" id="{668BF609-EEBF-0FAC-875A-FCD5A6335B19}"/>
-              </a:ext>
-            </a:extLst>
-          </p:cNvPr>
-          <p:cNvSpPr/>
-          <p:nvPr/>
-        </p:nvSpPr>
-        <p:spPr>
-          <a:xfrm>
-            <a:off x="548640" y="2850776"/>
-            <a:ext cx="10854466" cy="2377440"/>
-          </a:xfrm>
-          <a:prstGeom prst="rect">
-            <a:avLst/>
-          </a:prstGeom>
-          <a:noFill/>
-          <a:ln/>
-        </p:spPr>
-        <p:txBody>
-          <a:bodyPr wrap="square" rtlCol="0" anchor="t"/>
-          <a:lstStyle/>
-          <a:p>
-            <a:pPr>
-              <a:lnSpc>
-                <a:spcPct val="150000"/>
-              </a:lnSpc>
-              <a:buSzPct val="100000"/>
-            </a:pPr>
-            <a:r>
-              <a:rPr lang="en-US" sz="2800" dirty="0">
-                <a:solidFill>
-                  <a:schemeClr val="tx1">
-                    <a:lumMod val="95000"/>
-                    <a:lumOff val="5000"/>
-                  </a:schemeClr>
-                </a:solidFill>
-                <a:latin typeface="Cascadia Code NF" pitchFamily="50" charset="0"/>
-                <a:ea typeface="Cascadia Code NF" pitchFamily="50" charset="0"/>
-                <a:cs typeface="Cascadia Code NF" pitchFamily="50" charset="0"/>
-              </a:rPr>
-              <a:t>Layer 1: lazy() + .catch() if remote is unreachable</a:t>
-            </a:r>
-          </a:p>
-          <a:p>
-            <a:pPr>
-              <a:lnSpc>
-                <a:spcPct val="150000"/>
-              </a:lnSpc>
-              <a:buSzPct val="100000"/>
-            </a:pPr>
-            <a:r>
-              <a:rPr lang="en-US" sz="2800" dirty="0">
-                <a:solidFill>
-                  <a:schemeClr val="tx1">
-                    <a:lumMod val="95000"/>
-                    <a:lumOff val="5000"/>
-                  </a:schemeClr>
-                </a:solidFill>
-                <a:latin typeface="Cascadia Code NF" pitchFamily="50" charset="0"/>
-                <a:ea typeface="Cascadia Code NF" pitchFamily="50" charset="0"/>
-                <a:cs typeface="Cascadia Code NF" pitchFamily="50" charset="0"/>
-              </a:rPr>
-              <a:t>Layer 2: &lt;Suspense&gt; skeleton while loading</a:t>
-            </a:r>
-          </a:p>
-          <a:p>
-            <a:pPr>
-              <a:lnSpc>
-                <a:spcPct val="150000"/>
-              </a:lnSpc>
-              <a:buSzPct val="100000"/>
-            </a:pPr>
-            <a:r>
-              <a:rPr lang="en-US" sz="2800" dirty="0">
-                <a:solidFill>
-                  <a:schemeClr val="tx1">
-                    <a:lumMod val="95000"/>
-                    <a:lumOff val="5000"/>
-                  </a:schemeClr>
-                </a:solidFill>
-                <a:latin typeface="Cascadia Code NF" pitchFamily="50" charset="0"/>
-                <a:ea typeface="Cascadia Code NF" pitchFamily="50" charset="0"/>
-                <a:cs typeface="Cascadia Code NF" pitchFamily="50" charset="0"/>
-              </a:rPr>
-              <a:t>Layer 3: &lt;ErrorBoundary&gt; for runtime errors</a:t>
-            </a:r>
-          </a:p>
-        </p:txBody>
-      </p:sp>
-    </p:spTree>
-    <p:extLst>
-      <p:ext uri="{BB962C8B-B14F-4D97-AF65-F5344CB8AC3E}">
-        <p14:creationId xmlns:p14="http://schemas.microsoft.com/office/powerpoint/2010/main" val="2619125639"/>
       </p:ext>
     </p:extLst>
   </p:cSld>
@@ -6032,1987 +6436,6 @@
           <a:chExt cx="0" cy="0"/>
         </a:xfrm>
       </p:grpSpPr>
-      <p:pic>
-        <p:nvPicPr>
-          <p:cNvPr id="3" name="Picture 2">
-            <a:extLst>
-              <a:ext uri="{FF2B5EF4-FFF2-40B4-BE49-F238E27FC236}">
-                <a16:creationId xmlns:a16="http://schemas.microsoft.com/office/drawing/2014/main" id="{B66439F7-DFAD-81AB-B8BD-241FD9547508}"/>
-              </a:ext>
-            </a:extLst>
-          </p:cNvPr>
-          <p:cNvPicPr>
-            <a:picLocks noChangeAspect="1"/>
-          </p:cNvPicPr>
-          <p:nvPr/>
-        </p:nvPicPr>
-        <p:blipFill>
-          <a:blip r:embed="rId3"/>
-          <a:stretch>
-            <a:fillRect/>
-          </a:stretch>
-        </p:blipFill>
-        <p:spPr>
-          <a:xfrm>
-            <a:off x="192869" y="0"/>
-            <a:ext cx="11803086" cy="6858000"/>
-          </a:xfrm>
-          <a:prstGeom prst="rect">
-            <a:avLst/>
-          </a:prstGeom>
-        </p:spPr>
-      </p:pic>
-    </p:spTree>
-    <p:extLst>
-      <p:ext uri="{BB962C8B-B14F-4D97-AF65-F5344CB8AC3E}">
-        <p14:creationId xmlns:p14="http://schemas.microsoft.com/office/powerpoint/2010/main" val="836858276"/>
-      </p:ext>
-    </p:extLst>
-  </p:cSld>
-  <p:clrMapOvr>
-    <a:masterClrMapping/>
-  </p:clrMapOvr>
-</p:sld>
-</file>
-
-<file path=ppt/slides/slide21.xml><?xml version="1.0" encoding="utf-8"?>
-<p:sld xmlns:a="http://schemas.openxmlformats.org/drawingml/2006/main" xmlns:r="http://schemas.openxmlformats.org/officeDocument/2006/relationships" xmlns:p="http://schemas.openxmlformats.org/presentationml/2006/main">
-  <p:cSld>
-    <p:spTree>
-      <p:nvGrpSpPr>
-        <p:cNvPr id="1" name=""/>
-        <p:cNvGrpSpPr/>
-        <p:nvPr/>
-      </p:nvGrpSpPr>
-      <p:grpSpPr>
-        <a:xfrm>
-          <a:off x="0" y="0"/>
-          <a:ext cx="0" cy="0"/>
-          <a:chOff x="0" y="0"/>
-          <a:chExt cx="0" cy="0"/>
-        </a:xfrm>
-      </p:grpSpPr>
-      <p:sp>
-        <p:nvSpPr>
-          <p:cNvPr id="3" name="Text 2">
-            <a:extLst>
-              <a:ext uri="{FF2B5EF4-FFF2-40B4-BE49-F238E27FC236}">
-                <a16:creationId xmlns:a16="http://schemas.microsoft.com/office/drawing/2014/main" id="{E6D9864B-997C-D392-B5C0-9E000C1A03B8}"/>
-              </a:ext>
-            </a:extLst>
-          </p:cNvPr>
-          <p:cNvSpPr/>
-          <p:nvPr/>
-        </p:nvSpPr>
-        <p:spPr>
-          <a:xfrm>
-            <a:off x="530352" y="713232"/>
-            <a:ext cx="11109960" cy="777240"/>
-          </a:xfrm>
-          <a:prstGeom prst="rect">
-            <a:avLst/>
-          </a:prstGeom>
-          <a:noFill/>
-          <a:ln/>
-        </p:spPr>
-        <p:txBody>
-          <a:bodyPr wrap="square" rtlCol="0" anchor="ctr"/>
-          <a:lstStyle/>
-          <a:p>
-            <a:pPr marL="0" indent="0">
-              <a:buNone/>
-            </a:pPr>
-            <a:r>
-              <a:rPr lang="en-US" sz="3300" i="1" dirty="0">
-                <a:solidFill>
-                  <a:schemeClr val="tx1">
-                    <a:lumMod val="95000"/>
-                    <a:lumOff val="5000"/>
-                  </a:schemeClr>
-                </a:solidFill>
-                <a:latin typeface="Instrument Serif" pitchFamily="34" charset="0"/>
-                <a:ea typeface="Instrument Serif" pitchFamily="34" charset="-122"/>
-                <a:cs typeface="Instrument Serif" pitchFamily="34" charset="-120"/>
-              </a:rPr>
-              <a:t>Question</a:t>
-            </a:r>
-            <a:endParaRPr lang="en-US" sz="3300" dirty="0">
-              <a:solidFill>
-                <a:schemeClr val="tx1">
-                  <a:lumMod val="95000"/>
-                  <a:lumOff val="5000"/>
-                </a:schemeClr>
-              </a:solidFill>
-            </a:endParaRPr>
-          </a:p>
-        </p:txBody>
-      </p:sp>
-      <p:sp>
-        <p:nvSpPr>
-          <p:cNvPr id="7" name="Text 8">
-            <a:extLst>
-              <a:ext uri="{FF2B5EF4-FFF2-40B4-BE49-F238E27FC236}">
-                <a16:creationId xmlns:a16="http://schemas.microsoft.com/office/drawing/2014/main" id="{626E23A0-B775-D9BA-9D15-6D62663E3A4A}"/>
-              </a:ext>
-            </a:extLst>
-          </p:cNvPr>
-          <p:cNvSpPr/>
-          <p:nvPr/>
-        </p:nvSpPr>
-        <p:spPr>
-          <a:xfrm>
-            <a:off x="713232" y="2678653"/>
-            <a:ext cx="10395758" cy="1796527"/>
-          </a:xfrm>
-          <a:prstGeom prst="rect">
-            <a:avLst/>
-          </a:prstGeom>
-          <a:noFill/>
-          <a:ln/>
-        </p:spPr>
-        <p:txBody>
-          <a:bodyPr wrap="square" rtlCol="0" anchor="ctr"/>
-          <a:lstStyle/>
-          <a:p>
-            <a:pPr marL="0" indent="0">
-              <a:buNone/>
-            </a:pPr>
-            <a:r>
-              <a:rPr lang="en-US" sz="2800" i="1" dirty="0">
-                <a:solidFill>
-                  <a:schemeClr val="tx1">
-                    <a:lumMod val="85000"/>
-                    <a:lumOff val="15000"/>
-                  </a:schemeClr>
-                </a:solidFill>
-                <a:latin typeface="Cascadia Code NF" pitchFamily="50" charset="0"/>
-                <a:ea typeface="Cascadia Code NF" pitchFamily="50" charset="0"/>
-                <a:cs typeface="Cascadia Code NF" pitchFamily="50" charset="0"/>
-              </a:rPr>
-              <a:t>Why lazy() for eager modules? </a:t>
-            </a:r>
-          </a:p>
-          <a:p>
-            <a:pPr marL="0" indent="0">
-              <a:buNone/>
-            </a:pPr>
-            <a:r>
-              <a:rPr lang="en-US" sz="2800" i="1" dirty="0">
-                <a:solidFill>
-                  <a:schemeClr val="tx1">
-                    <a:lumMod val="85000"/>
-                    <a:lumOff val="15000"/>
-                  </a:schemeClr>
-                </a:solidFill>
-                <a:latin typeface="Cascadia Code NF" pitchFamily="50" charset="0"/>
-                <a:ea typeface="Cascadia Code NF" pitchFamily="50" charset="0"/>
-                <a:cs typeface="Cascadia Code NF" pitchFamily="50" charset="0"/>
-              </a:rPr>
-              <a:t>Remotes are separate builds resolved at runtime. </a:t>
-            </a:r>
-          </a:p>
-          <a:p>
-            <a:pPr marL="0" indent="0">
-              <a:buNone/>
-            </a:pPr>
-            <a:r>
-              <a:rPr lang="en-US" sz="2800" i="1" dirty="0">
-                <a:solidFill>
-                  <a:schemeClr val="tx1">
-                    <a:lumMod val="85000"/>
-                    <a:lumOff val="15000"/>
-                  </a:schemeClr>
-                </a:solidFill>
-                <a:latin typeface="Cascadia Code NF" pitchFamily="50" charset="0"/>
-                <a:ea typeface="Cascadia Code NF" pitchFamily="50" charset="0"/>
-                <a:cs typeface="Cascadia Code NF" pitchFamily="50" charset="0"/>
-              </a:rPr>
-              <a:t>Eager import() warms the cache; lazy() resolves from it.</a:t>
-            </a:r>
-            <a:endParaRPr lang="en-US" sz="2800" dirty="0">
-              <a:solidFill>
-                <a:schemeClr val="tx1">
-                  <a:lumMod val="85000"/>
-                  <a:lumOff val="15000"/>
-                </a:schemeClr>
-              </a:solidFill>
-              <a:latin typeface="Cascadia Code NF" pitchFamily="50" charset="0"/>
-              <a:ea typeface="Cascadia Code NF" pitchFamily="50" charset="0"/>
-              <a:cs typeface="Cascadia Code NF" pitchFamily="50" charset="0"/>
-            </a:endParaRPr>
-          </a:p>
-        </p:txBody>
-      </p:sp>
-    </p:spTree>
-    <p:extLst>
-      <p:ext uri="{BB962C8B-B14F-4D97-AF65-F5344CB8AC3E}">
-        <p14:creationId xmlns:p14="http://schemas.microsoft.com/office/powerpoint/2010/main" val="2577224661"/>
-      </p:ext>
-    </p:extLst>
-  </p:cSld>
-  <p:clrMapOvr>
-    <a:masterClrMapping/>
-  </p:clrMapOvr>
-</p:sld>
-</file>
-
-<file path=ppt/slides/slide22.xml><?xml version="1.0" encoding="utf-8"?>
-<p:sld xmlns:a="http://schemas.openxmlformats.org/drawingml/2006/main" xmlns:r="http://schemas.openxmlformats.org/officeDocument/2006/relationships" xmlns:p="http://schemas.openxmlformats.org/presentationml/2006/main">
-  <p:cSld>
-    <p:spTree>
-      <p:nvGrpSpPr>
-        <p:cNvPr id="1" name=""/>
-        <p:cNvGrpSpPr/>
-        <p:nvPr/>
-      </p:nvGrpSpPr>
-      <p:grpSpPr>
-        <a:xfrm>
-          <a:off x="0" y="0"/>
-          <a:ext cx="0" cy="0"/>
-          <a:chOff x="0" y="0"/>
-          <a:chExt cx="0" cy="0"/>
-        </a:xfrm>
-      </p:grpSpPr>
-      <p:sp>
-        <p:nvSpPr>
-          <p:cNvPr id="3" name="Text 2">
-            <a:extLst>
-              <a:ext uri="{FF2B5EF4-FFF2-40B4-BE49-F238E27FC236}">
-                <a16:creationId xmlns:a16="http://schemas.microsoft.com/office/drawing/2014/main" id="{CC0F34E4-70E8-F750-1B49-A033FEC0C4E2}"/>
-              </a:ext>
-            </a:extLst>
-          </p:cNvPr>
-          <p:cNvSpPr/>
-          <p:nvPr/>
-        </p:nvSpPr>
-        <p:spPr>
-          <a:xfrm>
-            <a:off x="530352" y="135008"/>
-            <a:ext cx="11109960" cy="777240"/>
-          </a:xfrm>
-          <a:prstGeom prst="rect">
-            <a:avLst/>
-          </a:prstGeom>
-          <a:noFill/>
-          <a:ln/>
-        </p:spPr>
-        <p:txBody>
-          <a:bodyPr wrap="square" rtlCol="0" anchor="ctr"/>
-          <a:lstStyle/>
-          <a:p>
-            <a:pPr marL="0" indent="0">
-              <a:buNone/>
-            </a:pPr>
-            <a:r>
-              <a:rPr lang="en-US" sz="3300" i="1" dirty="0">
-                <a:solidFill>
-                  <a:schemeClr val="tx1">
-                    <a:lumMod val="95000"/>
-                    <a:lumOff val="5000"/>
-                  </a:schemeClr>
-                </a:solidFill>
-                <a:latin typeface="Instrument Serif" pitchFamily="34" charset="0"/>
-                <a:ea typeface="Instrument Serif" pitchFamily="34" charset="-122"/>
-                <a:cs typeface="Instrument Serif" pitchFamily="34" charset="-120"/>
-              </a:rPr>
-              <a:t>Settings · Commands · Federation Lab</a:t>
-            </a:r>
-            <a:endParaRPr lang="en-US" sz="3300" dirty="0">
-              <a:solidFill>
-                <a:schemeClr val="tx1">
-                  <a:lumMod val="95000"/>
-                  <a:lumOff val="5000"/>
-                </a:schemeClr>
-              </a:solidFill>
-            </a:endParaRPr>
-          </a:p>
-        </p:txBody>
-      </p:sp>
-      <p:sp>
-        <p:nvSpPr>
-          <p:cNvPr id="5" name="Text 5">
-            <a:extLst>
-              <a:ext uri="{FF2B5EF4-FFF2-40B4-BE49-F238E27FC236}">
-                <a16:creationId xmlns:a16="http://schemas.microsoft.com/office/drawing/2014/main" id="{8EB8FE32-AB1B-8F6E-B031-72E31947DF0F}"/>
-              </a:ext>
-            </a:extLst>
-          </p:cNvPr>
-          <p:cNvSpPr/>
-          <p:nvPr/>
-        </p:nvSpPr>
-        <p:spPr>
-          <a:xfrm>
-            <a:off x="576072" y="1202166"/>
-            <a:ext cx="10706010" cy="4660752"/>
-          </a:xfrm>
-          <a:prstGeom prst="rect">
-            <a:avLst/>
-          </a:prstGeom>
-          <a:noFill/>
-          <a:ln/>
-        </p:spPr>
-        <p:txBody>
-          <a:bodyPr wrap="square" rtlCol="0" anchor="t"/>
-          <a:lstStyle/>
-          <a:p>
-            <a:pPr marL="285750" indent="-285750">
-              <a:lnSpc>
-                <a:spcPct val="150000"/>
-              </a:lnSpc>
-              <a:buSzPct val="100000"/>
-              <a:buFont typeface="Arial" panose="020B0604020202020204" pitchFamily="34" charset="0"/>
-              <a:buChar char="•"/>
-            </a:pPr>
-            <a:r>
-              <a:rPr lang="en-US" sz="2800" dirty="0">
-                <a:solidFill>
-                  <a:schemeClr val="tx1">
-                    <a:lumMod val="95000"/>
-                    <a:lumOff val="5000"/>
-                  </a:schemeClr>
-                </a:solidFill>
-                <a:latin typeface="DM Sans" pitchFamily="34" charset="0"/>
-                <a:ea typeface="DM Sans" pitchFamily="34" charset="-122"/>
-                <a:cs typeface="DM Sans" pitchFamily="34" charset="-120"/>
-              </a:rPr>
-              <a:t>Health Monitor: polls each remoteEntry.js every 5s, shows latency</a:t>
-            </a:r>
-            <a:endParaRPr lang="en-US" sz="2800" dirty="0">
-              <a:solidFill>
-                <a:schemeClr val="tx1">
-                  <a:lumMod val="95000"/>
-                  <a:lumOff val="5000"/>
-                </a:schemeClr>
-              </a:solidFill>
-            </a:endParaRPr>
-          </a:p>
-          <a:p>
-            <a:pPr marL="285750" indent="-285750">
-              <a:lnSpc>
-                <a:spcPct val="150000"/>
-              </a:lnSpc>
-              <a:buSzPct val="100000"/>
-              <a:buFont typeface="Arial" panose="020B0604020202020204" pitchFamily="34" charset="0"/>
-              <a:buChar char="•"/>
-            </a:pPr>
-            <a:r>
-              <a:rPr lang="en-US" sz="2800" dirty="0">
-                <a:solidFill>
-                  <a:schemeClr val="tx1">
-                    <a:lumMod val="95000"/>
-                    <a:lumOff val="5000"/>
-                  </a:schemeClr>
-                </a:solidFill>
-                <a:latin typeface="DM Sans" pitchFamily="34" charset="0"/>
-                <a:ea typeface="DM Sans" pitchFamily="34" charset="-122"/>
-                <a:cs typeface="DM Sans" pitchFamily="34" charset="-120"/>
-              </a:rPr>
-              <a:t>Kill Switches: simulate remote failure; the rest keeps running</a:t>
-            </a:r>
-            <a:endParaRPr lang="en-US" sz="2800" dirty="0">
-              <a:solidFill>
-                <a:schemeClr val="tx1">
-                  <a:lumMod val="95000"/>
-                  <a:lumOff val="5000"/>
-                </a:schemeClr>
-              </a:solidFill>
-            </a:endParaRPr>
-          </a:p>
-          <a:p>
-            <a:pPr marL="285750" indent="-285750">
-              <a:lnSpc>
-                <a:spcPct val="150000"/>
-              </a:lnSpc>
-              <a:buSzPct val="100000"/>
-              <a:buFont typeface="Arial" panose="020B0604020202020204" pitchFamily="34" charset="0"/>
-              <a:buChar char="•"/>
-            </a:pPr>
-            <a:r>
-              <a:rPr lang="en-US" sz="2800" dirty="0">
-                <a:solidFill>
-                  <a:schemeClr val="tx1">
-                    <a:lumMod val="95000"/>
-                    <a:lumOff val="5000"/>
-                  </a:schemeClr>
-                </a:solidFill>
-                <a:latin typeface="DM Sans" pitchFamily="34" charset="0"/>
-                <a:ea typeface="DM Sans" pitchFamily="34" charset="-122"/>
-                <a:cs typeface="DM Sans" pitchFamily="34" charset="-120"/>
-              </a:rPr>
-              <a:t>A/B Deployment: toggle Stable ↔ Canary ring, per-module versions</a:t>
-            </a:r>
-            <a:endParaRPr lang="en-US" sz="2800" dirty="0">
-              <a:solidFill>
-                <a:schemeClr val="tx1">
-                  <a:lumMod val="95000"/>
-                  <a:lumOff val="5000"/>
-                </a:schemeClr>
-              </a:solidFill>
-            </a:endParaRPr>
-          </a:p>
-          <a:p>
-            <a:pPr marL="285750" indent="-285750">
-              <a:lnSpc>
-                <a:spcPct val="150000"/>
-              </a:lnSpc>
-              <a:buSzPct val="100000"/>
-              <a:buFont typeface="Arial" panose="020B0604020202020204" pitchFamily="34" charset="0"/>
-              <a:buChar char="•"/>
-            </a:pPr>
-            <a:r>
-              <a:rPr lang="en-US" sz="2800" dirty="0">
-                <a:solidFill>
-                  <a:schemeClr val="tx1">
-                    <a:lumMod val="95000"/>
-                    <a:lumOff val="5000"/>
-                  </a:schemeClr>
-                </a:solidFill>
-                <a:latin typeface="DM Sans" pitchFamily="34" charset="0"/>
-                <a:ea typeface="DM Sans" pitchFamily="34" charset="-122"/>
-                <a:cs typeface="DM Sans" pitchFamily="34" charset="-120"/>
-              </a:rPr>
-              <a:t>Theme: CSS variables + localStorage + themeChange event, zero shared imports</a:t>
-            </a:r>
-          </a:p>
-        </p:txBody>
-      </p:sp>
-    </p:spTree>
-    <p:extLst>
-      <p:ext uri="{BB962C8B-B14F-4D97-AF65-F5344CB8AC3E}">
-        <p14:creationId xmlns:p14="http://schemas.microsoft.com/office/powerpoint/2010/main" val="399107473"/>
-      </p:ext>
-    </p:extLst>
-  </p:cSld>
-  <p:clrMapOvr>
-    <a:masterClrMapping/>
-  </p:clrMapOvr>
-</p:sld>
-</file>
-
-<file path=ppt/slides/slide23.xml><?xml version="1.0" encoding="utf-8"?>
-<p:sld xmlns:a="http://schemas.openxmlformats.org/drawingml/2006/main" xmlns:r="http://schemas.openxmlformats.org/officeDocument/2006/relationships" xmlns:p="http://schemas.openxmlformats.org/presentationml/2006/main">
-  <p:cSld>
-    <p:spTree>
-      <p:nvGrpSpPr>
-        <p:cNvPr id="1" name=""/>
-        <p:cNvGrpSpPr/>
-        <p:nvPr/>
-      </p:nvGrpSpPr>
-      <p:grpSpPr>
-        <a:xfrm>
-          <a:off x="0" y="0"/>
-          <a:ext cx="0" cy="0"/>
-          <a:chOff x="0" y="0"/>
-          <a:chExt cx="0" cy="0"/>
-        </a:xfrm>
-      </p:grpSpPr>
-      <p:pic>
-        <p:nvPicPr>
-          <p:cNvPr id="3" name="Picture 2">
-            <a:extLst>
-              <a:ext uri="{FF2B5EF4-FFF2-40B4-BE49-F238E27FC236}">
-                <a16:creationId xmlns:a16="http://schemas.microsoft.com/office/drawing/2014/main" id="{3728B204-4642-8AB0-8C60-54C9C48B708A}"/>
-              </a:ext>
-            </a:extLst>
-          </p:cNvPr>
-          <p:cNvPicPr>
-            <a:picLocks noChangeAspect="1"/>
-          </p:cNvPicPr>
-          <p:nvPr/>
-        </p:nvPicPr>
-        <p:blipFill>
-          <a:blip r:embed="rId3"/>
-          <a:stretch>
-            <a:fillRect/>
-          </a:stretch>
-        </p:blipFill>
-        <p:spPr>
-          <a:xfrm>
-            <a:off x="192869" y="0"/>
-            <a:ext cx="11803086" cy="6858000"/>
-          </a:xfrm>
-          <a:prstGeom prst="rect">
-            <a:avLst/>
-          </a:prstGeom>
-        </p:spPr>
-      </p:pic>
-    </p:spTree>
-    <p:extLst>
-      <p:ext uri="{BB962C8B-B14F-4D97-AF65-F5344CB8AC3E}">
-        <p14:creationId xmlns:p14="http://schemas.microsoft.com/office/powerpoint/2010/main" val="4196902174"/>
-      </p:ext>
-    </p:extLst>
-  </p:cSld>
-  <p:clrMapOvr>
-    <a:masterClrMapping/>
-  </p:clrMapOvr>
-</p:sld>
-</file>
-
-<file path=ppt/slides/slide24.xml><?xml version="1.0" encoding="utf-8"?>
-<p:sld xmlns:a="http://schemas.openxmlformats.org/drawingml/2006/main" xmlns:r="http://schemas.openxmlformats.org/officeDocument/2006/relationships" xmlns:p="http://schemas.openxmlformats.org/presentationml/2006/main">
-  <p:cSld>
-    <p:spTree>
-      <p:nvGrpSpPr>
-        <p:cNvPr id="1" name=""/>
-        <p:cNvGrpSpPr/>
-        <p:nvPr/>
-      </p:nvGrpSpPr>
-      <p:grpSpPr>
-        <a:xfrm>
-          <a:off x="0" y="0"/>
-          <a:ext cx="0" cy="0"/>
-          <a:chOff x="0" y="0"/>
-          <a:chExt cx="0" cy="0"/>
-        </a:xfrm>
-      </p:grpSpPr>
-      <p:sp>
-        <p:nvSpPr>
-          <p:cNvPr id="3" name="Text 2">
-            <a:extLst>
-              <a:ext uri="{FF2B5EF4-FFF2-40B4-BE49-F238E27FC236}">
-                <a16:creationId xmlns:a16="http://schemas.microsoft.com/office/drawing/2014/main" id="{48D92EEC-F99D-6E3A-015E-51DCF972D104}"/>
-              </a:ext>
-            </a:extLst>
-          </p:cNvPr>
-          <p:cNvSpPr/>
-          <p:nvPr/>
-        </p:nvSpPr>
-        <p:spPr>
-          <a:xfrm>
-            <a:off x="530352" y="713232"/>
-            <a:ext cx="11109960" cy="777240"/>
-          </a:xfrm>
-          <a:prstGeom prst="rect">
-            <a:avLst/>
-          </a:prstGeom>
-          <a:noFill/>
-          <a:ln/>
-        </p:spPr>
-        <p:txBody>
-          <a:bodyPr wrap="square" rtlCol="0" anchor="ctr"/>
-          <a:lstStyle/>
-          <a:p>
-            <a:pPr marL="0" indent="0">
-              <a:buNone/>
-            </a:pPr>
-            <a:r>
-              <a:rPr lang="en-US" sz="3300" i="1" dirty="0">
-                <a:solidFill>
-                  <a:schemeClr val="tx1">
-                    <a:lumMod val="95000"/>
-                    <a:lumOff val="5000"/>
-                  </a:schemeClr>
-                </a:solidFill>
-                <a:latin typeface="Instrument Serif" pitchFamily="34" charset="0"/>
-                <a:ea typeface="Instrument Serif" pitchFamily="34" charset="-122"/>
-                <a:cs typeface="Instrument Serif" pitchFamily="34" charset="-120"/>
-              </a:rPr>
-              <a:t>Prefer events over shared state</a:t>
-            </a:r>
-            <a:endParaRPr lang="en-US" sz="3300" dirty="0">
-              <a:solidFill>
-                <a:schemeClr val="tx1">
-                  <a:lumMod val="95000"/>
-                  <a:lumOff val="5000"/>
-                </a:schemeClr>
-              </a:solidFill>
-            </a:endParaRPr>
-          </a:p>
-        </p:txBody>
-      </p:sp>
-      <p:sp>
-        <p:nvSpPr>
-          <p:cNvPr id="5" name="Text 6">
-            <a:extLst>
-              <a:ext uri="{FF2B5EF4-FFF2-40B4-BE49-F238E27FC236}">
-                <a16:creationId xmlns:a16="http://schemas.microsoft.com/office/drawing/2014/main" id="{F96AB674-C4AE-79FF-80B1-8B452266F247}"/>
-              </a:ext>
-            </a:extLst>
-          </p:cNvPr>
-          <p:cNvSpPr/>
-          <p:nvPr/>
-        </p:nvSpPr>
-        <p:spPr>
-          <a:xfrm>
-            <a:off x="548640" y="2474259"/>
-            <a:ext cx="11064240" cy="3291840"/>
-          </a:xfrm>
-          <a:prstGeom prst="rect">
-            <a:avLst/>
-          </a:prstGeom>
-          <a:noFill/>
-          <a:ln/>
-        </p:spPr>
-        <p:txBody>
-          <a:bodyPr wrap="square" rtlCol="0" anchor="t"/>
-          <a:lstStyle/>
-          <a:p>
-            <a:pPr marL="342900" indent="-342900">
-              <a:lnSpc>
-                <a:spcPct val="150000"/>
-              </a:lnSpc>
-              <a:buSzPct val="100000"/>
-              <a:buFont typeface="Arial" panose="020B0604020202020204" pitchFamily="34" charset="0"/>
-              <a:buChar char="•"/>
-            </a:pPr>
-            <a:r>
-              <a:rPr lang="en-US" sz="2400" dirty="0">
-                <a:solidFill>
-                  <a:schemeClr val="tx1">
-                    <a:lumMod val="95000"/>
-                    <a:lumOff val="5000"/>
-                  </a:schemeClr>
-                </a:solidFill>
-                <a:latin typeface="DM Sans" pitchFamily="34" charset="0"/>
-                <a:ea typeface="DM Sans" pitchFamily="34" charset="-122"/>
-                <a:cs typeface="DM Sans" pitchFamily="34" charset="-120"/>
-              </a:rPr>
-              <a:t>No direct cross-module imports</a:t>
-            </a:r>
-            <a:endParaRPr lang="en-US" sz="2400" dirty="0">
-              <a:solidFill>
-                <a:schemeClr val="tx1">
-                  <a:lumMod val="95000"/>
-                  <a:lumOff val="5000"/>
-                </a:schemeClr>
-              </a:solidFill>
-            </a:endParaRPr>
-          </a:p>
-          <a:p>
-            <a:pPr marL="342900" indent="-342900">
-              <a:lnSpc>
-                <a:spcPct val="150000"/>
-              </a:lnSpc>
-              <a:buSzPct val="100000"/>
-              <a:buFont typeface="Arial" panose="020B0604020202020204" pitchFamily="34" charset="0"/>
-              <a:buChar char="•"/>
-            </a:pPr>
-            <a:r>
-              <a:rPr lang="en-US" sz="2400" dirty="0">
-                <a:solidFill>
-                  <a:schemeClr val="tx1">
-                    <a:lumMod val="95000"/>
-                    <a:lumOff val="5000"/>
-                  </a:schemeClr>
-                </a:solidFill>
-                <a:latin typeface="DM Sans" pitchFamily="34" charset="0"/>
-                <a:ea typeface="DM Sans" pitchFamily="34" charset="-122"/>
-                <a:cs typeface="DM Sans" pitchFamily="34" charset="-120"/>
-              </a:rPr>
-              <a:t>Shell stays the only router owner</a:t>
-            </a:r>
-            <a:endParaRPr lang="en-US" sz="2400" dirty="0">
-              <a:solidFill>
-                <a:schemeClr val="tx1">
-                  <a:lumMod val="95000"/>
-                  <a:lumOff val="5000"/>
-                </a:schemeClr>
-              </a:solidFill>
-            </a:endParaRPr>
-          </a:p>
-          <a:p>
-            <a:pPr marL="342900" indent="-342900">
-              <a:lnSpc>
-                <a:spcPct val="150000"/>
-              </a:lnSpc>
-              <a:buSzPct val="100000"/>
-              <a:buFont typeface="Arial" panose="020B0604020202020204" pitchFamily="34" charset="0"/>
-              <a:buChar char="•"/>
-            </a:pPr>
-            <a:r>
-              <a:rPr lang="en-US" sz="2400" dirty="0">
-                <a:solidFill>
-                  <a:schemeClr val="tx1">
-                    <a:lumMod val="95000"/>
-                    <a:lumOff val="5000"/>
-                  </a:schemeClr>
-                </a:solidFill>
-                <a:latin typeface="DM Sans" pitchFamily="34" charset="0"/>
-                <a:ea typeface="DM Sans" pitchFamily="34" charset="-122"/>
-                <a:cs typeface="DM Sans" pitchFamily="34" charset="-120"/>
-              </a:rPr>
-              <a:t>Works across deployments when the event contract stays compatible</a:t>
-            </a:r>
-            <a:endParaRPr lang="en-US" sz="2400" dirty="0">
-              <a:solidFill>
-                <a:schemeClr val="tx1">
-                  <a:lumMod val="95000"/>
-                  <a:lumOff val="5000"/>
-                </a:schemeClr>
-              </a:solidFill>
-            </a:endParaRPr>
-          </a:p>
-          <a:p>
-            <a:pPr marL="342900" indent="-342900">
-              <a:lnSpc>
-                <a:spcPct val="150000"/>
-              </a:lnSpc>
-              <a:buSzPct val="100000"/>
-              <a:buFont typeface="Arial" panose="020B0604020202020204" pitchFamily="34" charset="0"/>
-              <a:buChar char="•"/>
-            </a:pPr>
-            <a:r>
-              <a:rPr lang="en-US" sz="2400" dirty="0">
-                <a:solidFill>
-                  <a:schemeClr val="tx1">
-                    <a:lumMod val="95000"/>
-                    <a:lumOff val="5000"/>
-                  </a:schemeClr>
-                </a:solidFill>
-                <a:latin typeface="DM Sans" pitchFamily="34" charset="0"/>
-                <a:ea typeface="DM Sans" pitchFamily="34" charset="-122"/>
-                <a:cs typeface="DM Sans" pitchFamily="34" charset="-120"/>
-              </a:rPr>
-              <a:t>Framework-agnostic (React, Vue, Svelte)</a:t>
-            </a:r>
-            <a:endParaRPr lang="en-US" sz="2400" dirty="0">
-              <a:solidFill>
-                <a:schemeClr val="tx1">
-                  <a:lumMod val="95000"/>
-                  <a:lumOff val="5000"/>
-                </a:schemeClr>
-              </a:solidFill>
-            </a:endParaRPr>
-          </a:p>
-          <a:p>
-            <a:pPr marL="342900" indent="-342900">
-              <a:lnSpc>
-                <a:spcPct val="150000"/>
-              </a:lnSpc>
-              <a:buSzPct val="100000"/>
-              <a:buFont typeface="Arial" panose="020B0604020202020204" pitchFamily="34" charset="0"/>
-              <a:buChar char="•"/>
-            </a:pPr>
-            <a:r>
-              <a:rPr lang="en-US" sz="2400" dirty="0">
-                <a:solidFill>
-                  <a:schemeClr val="tx1">
-                    <a:lumMod val="95000"/>
-                    <a:lumOff val="5000"/>
-                  </a:schemeClr>
-                </a:solidFill>
-                <a:latin typeface="DM Sans" pitchFamily="34" charset="0"/>
-                <a:ea typeface="DM Sans" pitchFamily="34" charset="-122"/>
-                <a:cs typeface="DM Sans" pitchFamily="34" charset="-120"/>
-              </a:rPr>
-              <a:t>Typed via WindowEventMap augmentation</a:t>
-            </a:r>
-            <a:endParaRPr lang="en-US" sz="2400" dirty="0">
-              <a:solidFill>
-                <a:schemeClr val="tx1">
-                  <a:lumMod val="95000"/>
-                  <a:lumOff val="5000"/>
-                </a:schemeClr>
-              </a:solidFill>
-            </a:endParaRPr>
-          </a:p>
-        </p:txBody>
-      </p:sp>
-    </p:spTree>
-    <p:extLst>
-      <p:ext uri="{BB962C8B-B14F-4D97-AF65-F5344CB8AC3E}">
-        <p14:creationId xmlns:p14="http://schemas.microsoft.com/office/powerpoint/2010/main" val="2583238171"/>
-      </p:ext>
-    </p:extLst>
-  </p:cSld>
-  <p:clrMapOvr>
-    <a:masterClrMapping/>
-  </p:clrMapOvr>
-</p:sld>
-</file>
-
-<file path=ppt/slides/slide25.xml><?xml version="1.0" encoding="utf-8"?>
-<p:sld xmlns:a="http://schemas.openxmlformats.org/drawingml/2006/main" xmlns:r="http://schemas.openxmlformats.org/officeDocument/2006/relationships" xmlns:p="http://schemas.openxmlformats.org/presentationml/2006/main">
-  <p:cSld>
-    <p:spTree>
-      <p:nvGrpSpPr>
-        <p:cNvPr id="1" name=""/>
-        <p:cNvGrpSpPr/>
-        <p:nvPr/>
-      </p:nvGrpSpPr>
-      <p:grpSpPr>
-        <a:xfrm>
-          <a:off x="0" y="0"/>
-          <a:ext cx="0" cy="0"/>
-          <a:chOff x="0" y="0"/>
-          <a:chExt cx="0" cy="0"/>
-        </a:xfrm>
-      </p:grpSpPr>
-      <p:graphicFrame>
-        <p:nvGraphicFramePr>
-          <p:cNvPr id="2" name="Table 1">
-            <a:extLst>
-              <a:ext uri="{FF2B5EF4-FFF2-40B4-BE49-F238E27FC236}">
-                <a16:creationId xmlns:a16="http://schemas.microsoft.com/office/drawing/2014/main" id="{46D2C31A-9631-8861-A387-D11C77608896}"/>
-              </a:ext>
-            </a:extLst>
-          </p:cNvPr>
-          <p:cNvGraphicFramePr>
-            <a:graphicFrameLocks noGrp="1"/>
-          </p:cNvGraphicFramePr>
-          <p:nvPr>
-            <p:extLst>
-              <p:ext uri="{D42A27DB-BD31-4B8C-83A1-F6EECF244321}">
-                <p14:modId xmlns:p14="http://schemas.microsoft.com/office/powerpoint/2010/main" val="780093546"/>
-              </p:ext>
-            </p:extLst>
-          </p:nvPr>
-        </p:nvGraphicFramePr>
-        <p:xfrm>
-          <a:off x="362857" y="1320800"/>
-          <a:ext cx="11654972" cy="5455967"/>
-        </p:xfrm>
-        <a:graphic>
-          <a:graphicData uri="http://schemas.openxmlformats.org/drawingml/2006/table">
-            <a:tbl>
-              <a:tblPr/>
-              <a:tblGrid>
-                <a:gridCol w="3178629">
-                  <a:extLst>
-                    <a:ext uri="{9D8B030D-6E8A-4147-A177-3AD203B41FA5}">
-                      <a16:colId xmlns:a16="http://schemas.microsoft.com/office/drawing/2014/main" val="607345058"/>
-                    </a:ext>
-                  </a:extLst>
-                </a:gridCol>
-                <a:gridCol w="2975428">
-                  <a:extLst>
-                    <a:ext uri="{9D8B030D-6E8A-4147-A177-3AD203B41FA5}">
-                      <a16:colId xmlns:a16="http://schemas.microsoft.com/office/drawing/2014/main" val="2182254365"/>
-                    </a:ext>
-                  </a:extLst>
-                </a:gridCol>
-                <a:gridCol w="5500915">
-                  <a:extLst>
-                    <a:ext uri="{9D8B030D-6E8A-4147-A177-3AD203B41FA5}">
-                      <a16:colId xmlns:a16="http://schemas.microsoft.com/office/drawing/2014/main" val="3397293518"/>
-                    </a:ext>
-                  </a:extLst>
-                </a:gridCol>
-              </a:tblGrid>
-              <a:tr h="416364">
-                <a:tc>
-                  <a:txBody>
-                    <a:bodyPr/>
-                    <a:lstStyle/>
-                    <a:p>
-                      <a:pPr algn="l">
-                        <a:buNone/>
-                      </a:pPr>
-                      <a:r>
-                        <a:rPr lang="en-US" sz="2400" b="0" i="0">
-                          <a:solidFill>
-                            <a:srgbClr val="3B3B3B"/>
-                          </a:solidFill>
-                          <a:effectLst/>
-                          <a:latin typeface="Cascadia Code" panose="020B0609020000020004" pitchFamily="49" charset="0"/>
-                          <a:cs typeface="Cascadia Code" panose="020B0609020000020004" pitchFamily="49" charset="0"/>
-                        </a:rPr>
-                        <a:t>Event</a:t>
-                      </a:r>
-                    </a:p>
-                  </a:txBody>
-                  <a:tcPr marL="76200" marR="76200" marT="38100" marB="38100" anchor="ctr">
-                    <a:lnL>
-                      <a:noFill/>
-                    </a:lnL>
-                    <a:lnR>
-                      <a:noFill/>
-                    </a:lnR>
-                    <a:lnT>
-                      <a:noFill/>
-                    </a:lnT>
-                    <a:lnB>
-                      <a:noFill/>
-                    </a:lnB>
-                    <a:noFill/>
-                  </a:tcPr>
-                </a:tc>
-                <a:tc>
-                  <a:txBody>
-                    <a:bodyPr/>
-                    <a:lstStyle/>
-                    <a:p>
-                      <a:pPr algn="l">
-                        <a:buNone/>
-                      </a:pPr>
-                      <a:r>
-                        <a:rPr lang="en-US" sz="2400" b="0" i="0">
-                          <a:solidFill>
-                            <a:srgbClr val="3B3B3B"/>
-                          </a:solidFill>
-                          <a:effectLst/>
-                          <a:latin typeface="Cascadia Code" panose="020B0609020000020004" pitchFamily="49" charset="0"/>
-                          <a:cs typeface="Cascadia Code" panose="020B0609020000020004" pitchFamily="49" charset="0"/>
-                        </a:rPr>
-                        <a:t>Who broadcasts</a:t>
-                      </a:r>
-                    </a:p>
-                  </a:txBody>
-                  <a:tcPr marL="76200" marR="76200" marT="38100" marB="38100" anchor="ctr">
-                    <a:lnL>
-                      <a:noFill/>
-                    </a:lnL>
-                    <a:lnR>
-                      <a:noFill/>
-                    </a:lnR>
-                    <a:lnT>
-                      <a:noFill/>
-                    </a:lnT>
-                    <a:lnB>
-                      <a:noFill/>
-                    </a:lnB>
-                    <a:noFill/>
-                  </a:tcPr>
-                </a:tc>
-                <a:tc>
-                  <a:txBody>
-                    <a:bodyPr/>
-                    <a:lstStyle/>
-                    <a:p>
-                      <a:pPr algn="l">
-                        <a:buNone/>
-                      </a:pPr>
-                      <a:r>
-                        <a:rPr lang="en-US" sz="2400" b="0" i="0">
-                          <a:solidFill>
-                            <a:srgbClr val="3B3B3B"/>
-                          </a:solidFill>
-                          <a:effectLst/>
-                          <a:latin typeface="Cascadia Code" panose="020B0609020000020004" pitchFamily="49" charset="0"/>
-                          <a:cs typeface="Cascadia Code" panose="020B0609020000020004" pitchFamily="49" charset="0"/>
-                        </a:rPr>
-                        <a:t>Why</a:t>
-                      </a:r>
-                    </a:p>
-                  </a:txBody>
-                  <a:tcPr marL="76200" marR="76200" marT="38100" marB="38100" anchor="ctr">
-                    <a:lnL>
-                      <a:noFill/>
-                    </a:lnL>
-                    <a:lnR>
-                      <a:noFill/>
-                    </a:lnR>
-                    <a:lnT>
-                      <a:noFill/>
-                    </a:lnT>
-                    <a:lnB>
-                      <a:noFill/>
-                    </a:lnB>
-                    <a:noFill/>
-                  </a:tcPr>
-                </a:tc>
-                <a:extLst>
-                  <a:ext uri="{0D108BD9-81ED-4DB2-BD59-A6C34878D82A}">
-                    <a16:rowId xmlns:a16="http://schemas.microsoft.com/office/drawing/2014/main" val="3074802040"/>
-                  </a:ext>
-                </a:extLst>
-              </a:tr>
-              <a:tr h="735957">
-                <a:tc>
-                  <a:txBody>
-                    <a:bodyPr/>
-                    <a:lstStyle/>
-                    <a:p>
-                      <a:pPr algn="l">
-                        <a:buNone/>
-                      </a:pPr>
-                      <a:r>
-                        <a:rPr lang="en-US" sz="2400" b="0" i="0">
-                          <a:solidFill>
-                            <a:srgbClr val="3B3B3B"/>
-                          </a:solidFill>
-                          <a:effectLst/>
-                          <a:latin typeface="Cascadia Code" panose="020B0609020000020004" pitchFamily="49" charset="0"/>
-                          <a:cs typeface="Cascadia Code" panose="020B0609020000020004" pitchFamily="49" charset="0"/>
-                        </a:rPr>
-                        <a:t>themeChange</a:t>
-                      </a:r>
-                    </a:p>
-                  </a:txBody>
-                  <a:tcPr marL="76200" marR="76200" marT="38100" marB="38100" anchor="ctr">
-                    <a:lnL>
-                      <a:noFill/>
-                    </a:lnL>
-                    <a:lnR>
-                      <a:noFill/>
-                    </a:lnR>
-                    <a:lnT>
-                      <a:noFill/>
-                    </a:lnT>
-                    <a:lnB>
-                      <a:noFill/>
-                    </a:lnB>
-                    <a:noFill/>
-                  </a:tcPr>
-                </a:tc>
-                <a:tc>
-                  <a:txBody>
-                    <a:bodyPr/>
-                    <a:lstStyle/>
-                    <a:p>
-                      <a:pPr algn="l">
-                        <a:buNone/>
-                      </a:pPr>
-                      <a:r>
-                        <a:rPr lang="en-US" sz="2400" b="1" i="0">
-                          <a:solidFill>
-                            <a:srgbClr val="3B3B3B"/>
-                          </a:solidFill>
-                          <a:effectLst/>
-                          <a:latin typeface="Cascadia Code" panose="020B0609020000020004" pitchFamily="49" charset="0"/>
-                          <a:cs typeface="Cascadia Code" panose="020B0609020000020004" pitchFamily="49" charset="0"/>
-                        </a:rPr>
-                        <a:t>shell only</a:t>
-                      </a:r>
-                      <a:endParaRPr lang="en-US" sz="2400" b="0" i="0">
-                        <a:solidFill>
-                          <a:srgbClr val="3B3B3B"/>
-                        </a:solidFill>
-                        <a:effectLst/>
-                        <a:latin typeface="Cascadia Code" panose="020B0609020000020004" pitchFamily="49" charset="0"/>
-                        <a:cs typeface="Cascadia Code" panose="020B0609020000020004" pitchFamily="49" charset="0"/>
-                      </a:endParaRPr>
-                    </a:p>
-                  </a:txBody>
-                  <a:tcPr marL="76200" marR="76200" marT="38100" marB="38100" anchor="ctr">
-                    <a:lnL>
-                      <a:noFill/>
-                    </a:lnL>
-                    <a:lnR>
-                      <a:noFill/>
-                    </a:lnR>
-                    <a:lnT>
-                      <a:noFill/>
-                    </a:lnT>
-                    <a:lnB>
-                      <a:noFill/>
-                    </a:lnB>
-                    <a:noFill/>
-                  </a:tcPr>
-                </a:tc>
-                <a:tc>
-                  <a:txBody>
-                    <a:bodyPr/>
-                    <a:lstStyle/>
-                    <a:p>
-                      <a:pPr algn="l">
-                        <a:buNone/>
-                      </a:pPr>
-                      <a:r>
-                        <a:rPr lang="en-US" sz="2400" b="0" i="0">
-                          <a:solidFill>
-                            <a:srgbClr val="3B3B3B"/>
-                          </a:solidFill>
-                          <a:effectLst/>
-                          <a:latin typeface="Cascadia Code" panose="020B0609020000020004" pitchFamily="49" charset="0"/>
-                          <a:cs typeface="Cascadia Code" panose="020B0609020000020004" pitchFamily="49" charset="0"/>
-                        </a:rPr>
-                        <a:t>The shell owns the theme</a:t>
-                      </a:r>
-                    </a:p>
-                  </a:txBody>
-                  <a:tcPr marL="76200" marR="76200" marT="38100" marB="38100" anchor="ctr">
-                    <a:lnL>
-                      <a:noFill/>
-                    </a:lnL>
-                    <a:lnR>
-                      <a:noFill/>
-                    </a:lnR>
-                    <a:lnT>
-                      <a:noFill/>
-                    </a:lnT>
-                    <a:lnB>
-                      <a:noFill/>
-                    </a:lnB>
-                    <a:noFill/>
-                  </a:tcPr>
-                </a:tc>
-                <a:extLst>
-                  <a:ext uri="{0D108BD9-81ED-4DB2-BD59-A6C34878D82A}">
-                    <a16:rowId xmlns:a16="http://schemas.microsoft.com/office/drawing/2014/main" val="240654752"/>
-                  </a:ext>
-                </a:extLst>
-              </a:tr>
-              <a:tr h="735957">
-                <a:tc>
-                  <a:txBody>
-                    <a:bodyPr/>
-                    <a:lstStyle/>
-                    <a:p>
-                      <a:pPr algn="l">
-                        <a:buNone/>
-                      </a:pPr>
-                      <a:r>
-                        <a:rPr lang="en-US" sz="2400" b="0" i="0">
-                          <a:solidFill>
-                            <a:srgbClr val="3B3B3B"/>
-                          </a:solidFill>
-                          <a:effectLst/>
-                          <a:latin typeface="Cascadia Code" panose="020B0609020000020004" pitchFamily="49" charset="0"/>
-                          <a:cs typeface="Cascadia Code" panose="020B0609020000020004" pitchFamily="49" charset="0"/>
-                        </a:rPr>
-                        <a:t>moduleChange</a:t>
-                      </a:r>
-                    </a:p>
-                  </a:txBody>
-                  <a:tcPr marL="76200" marR="76200" marT="38100" marB="38100" anchor="ctr">
-                    <a:lnL>
-                      <a:noFill/>
-                    </a:lnL>
-                    <a:lnR>
-                      <a:noFill/>
-                    </a:lnR>
-                    <a:lnT>
-                      <a:noFill/>
-                    </a:lnT>
-                    <a:lnB>
-                      <a:noFill/>
-                    </a:lnB>
-                    <a:noFill/>
-                  </a:tcPr>
-                </a:tc>
-                <a:tc>
-                  <a:txBody>
-                    <a:bodyPr/>
-                    <a:lstStyle/>
-                    <a:p>
-                      <a:pPr algn="l">
-                        <a:buNone/>
-                      </a:pPr>
-                      <a:r>
-                        <a:rPr lang="en-US" sz="2400" b="1" i="0">
-                          <a:solidFill>
-                            <a:srgbClr val="3B3B3B"/>
-                          </a:solidFill>
-                          <a:effectLst/>
-                          <a:latin typeface="Cascadia Code" panose="020B0609020000020004" pitchFamily="49" charset="0"/>
-                          <a:cs typeface="Cascadia Code" panose="020B0609020000020004" pitchFamily="49" charset="0"/>
-                        </a:rPr>
-                        <a:t>shell only</a:t>
-                      </a:r>
-                      <a:endParaRPr lang="en-US" sz="2400" b="0" i="0">
-                        <a:solidFill>
-                          <a:srgbClr val="3B3B3B"/>
-                        </a:solidFill>
-                        <a:effectLst/>
-                        <a:latin typeface="Cascadia Code" panose="020B0609020000020004" pitchFamily="49" charset="0"/>
-                        <a:cs typeface="Cascadia Code" panose="020B0609020000020004" pitchFamily="49" charset="0"/>
-                      </a:endParaRPr>
-                    </a:p>
-                  </a:txBody>
-                  <a:tcPr marL="76200" marR="76200" marT="38100" marB="38100" anchor="ctr">
-                    <a:lnL>
-                      <a:noFill/>
-                    </a:lnL>
-                    <a:lnR>
-                      <a:noFill/>
-                    </a:lnR>
-                    <a:lnT>
-                      <a:noFill/>
-                    </a:lnT>
-                    <a:lnB>
-                      <a:noFill/>
-                    </a:lnB>
-                    <a:noFill/>
-                  </a:tcPr>
-                </a:tc>
-                <a:tc>
-                  <a:txBody>
-                    <a:bodyPr/>
-                    <a:lstStyle/>
-                    <a:p>
-                      <a:pPr algn="l">
-                        <a:buNone/>
-                      </a:pPr>
-                      <a:r>
-                        <a:rPr lang="en-US" sz="2400" b="0" i="0">
-                          <a:solidFill>
-                            <a:srgbClr val="3B3B3B"/>
-                          </a:solidFill>
-                          <a:effectLst/>
-                          <a:latin typeface="Cascadia Code" panose="020B0609020000020004" pitchFamily="49" charset="0"/>
-                          <a:cs typeface="Cascadia Code" panose="020B0609020000020004" pitchFamily="49" charset="0"/>
-                        </a:rPr>
-                        <a:t>The shell owns the router</a:t>
-                      </a:r>
-                    </a:p>
-                  </a:txBody>
-                  <a:tcPr marL="76200" marR="76200" marT="38100" marB="38100" anchor="ctr">
-                    <a:lnL>
-                      <a:noFill/>
-                    </a:lnL>
-                    <a:lnR>
-                      <a:noFill/>
-                    </a:lnR>
-                    <a:lnT>
-                      <a:noFill/>
-                    </a:lnT>
-                    <a:lnB>
-                      <a:noFill/>
-                    </a:lnB>
-                    <a:noFill/>
-                  </a:tcPr>
-                </a:tc>
-                <a:extLst>
-                  <a:ext uri="{0D108BD9-81ED-4DB2-BD59-A6C34878D82A}">
-                    <a16:rowId xmlns:a16="http://schemas.microsoft.com/office/drawing/2014/main" val="1750626137"/>
-                  </a:ext>
-                </a:extLst>
-              </a:tr>
-              <a:tr h="1069222">
-                <a:tc>
-                  <a:txBody>
-                    <a:bodyPr/>
-                    <a:lstStyle/>
-                    <a:p>
-                      <a:pPr algn="l">
-                        <a:buNone/>
-                      </a:pPr>
-                      <a:r>
-                        <a:rPr lang="en-US" sz="2400" b="0" i="0" dirty="0" err="1">
-                          <a:solidFill>
-                            <a:srgbClr val="3B3B3B"/>
-                          </a:solidFill>
-                          <a:effectLst/>
-                          <a:latin typeface="Cascadia Code" panose="020B0609020000020004" pitchFamily="49" charset="0"/>
-                          <a:cs typeface="Cascadia Code" panose="020B0609020000020004" pitchFamily="49" charset="0"/>
-                        </a:rPr>
-                        <a:t>addPrescription</a:t>
-                      </a:r>
-                      <a:endParaRPr lang="en-US" sz="2400" b="0" i="0" dirty="0">
-                        <a:solidFill>
-                          <a:srgbClr val="3B3B3B"/>
-                        </a:solidFill>
-                        <a:effectLst/>
-                        <a:latin typeface="Cascadia Code" panose="020B0609020000020004" pitchFamily="49" charset="0"/>
-                        <a:cs typeface="Cascadia Code" panose="020B0609020000020004" pitchFamily="49" charset="0"/>
-                      </a:endParaRPr>
-                    </a:p>
-                  </a:txBody>
-                  <a:tcPr marL="76200" marR="76200" marT="38100" marB="38100" anchor="ctr">
-                    <a:lnL>
-                      <a:noFill/>
-                    </a:lnL>
-                    <a:lnR>
-                      <a:noFill/>
-                    </a:lnR>
-                    <a:lnT>
-                      <a:noFill/>
-                    </a:lnT>
-                    <a:lnB>
-                      <a:noFill/>
-                    </a:lnB>
-                    <a:noFill/>
-                  </a:tcPr>
-                </a:tc>
-                <a:tc>
-                  <a:txBody>
-                    <a:bodyPr/>
-                    <a:lstStyle/>
-                    <a:p>
-                      <a:pPr algn="l">
-                        <a:buNone/>
-                      </a:pPr>
-                      <a:r>
-                        <a:rPr lang="en-US" sz="2400" b="1" i="0" dirty="0">
-                          <a:solidFill>
-                            <a:srgbClr val="3B3B3B"/>
-                          </a:solidFill>
-                          <a:effectLst/>
-                          <a:latin typeface="Cascadia Code" panose="020B0609020000020004" pitchFamily="49" charset="0"/>
-                          <a:cs typeface="Cascadia Code" panose="020B0609020000020004" pitchFamily="49" charset="0"/>
-                        </a:rPr>
-                        <a:t>records</a:t>
-                      </a:r>
-                      <a:endParaRPr lang="en-US" sz="2400" b="0" i="0" dirty="0">
-                        <a:solidFill>
-                          <a:srgbClr val="3B3B3B"/>
-                        </a:solidFill>
-                        <a:effectLst/>
-                        <a:latin typeface="Cascadia Code" panose="020B0609020000020004" pitchFamily="49" charset="0"/>
-                        <a:cs typeface="Cascadia Code" panose="020B0609020000020004" pitchFamily="49" charset="0"/>
-                      </a:endParaRPr>
-                    </a:p>
-                  </a:txBody>
-                  <a:tcPr marL="76200" marR="76200" marT="38100" marB="38100" anchor="ctr">
-                    <a:lnL>
-                      <a:noFill/>
-                    </a:lnL>
-                    <a:lnR>
-                      <a:noFill/>
-                    </a:lnR>
-                    <a:lnT>
-                      <a:noFill/>
-                    </a:lnT>
-                    <a:lnB>
-                      <a:noFill/>
-                    </a:lnB>
-                    <a:noFill/>
-                  </a:tcPr>
-                </a:tc>
-                <a:tc>
-                  <a:txBody>
-                    <a:bodyPr/>
-                    <a:lstStyle/>
-                    <a:p>
-                      <a:pPr algn="l">
-                        <a:buNone/>
-                      </a:pPr>
-                      <a:r>
-                        <a:rPr lang="en-US" sz="2400" b="0" i="0">
-                          <a:solidFill>
-                            <a:srgbClr val="3B3B3B"/>
-                          </a:solidFill>
-                          <a:effectLst/>
-                          <a:latin typeface="Cascadia Code" panose="020B0609020000020004" pitchFamily="49" charset="0"/>
-                          <a:cs typeface="Cascadia Code" panose="020B0609020000020004" pitchFamily="49" charset="0"/>
-                        </a:rPr>
-                        <a:t>Records owns "a prescription was requested"</a:t>
-                      </a:r>
-                    </a:p>
-                  </a:txBody>
-                  <a:tcPr marL="76200" marR="76200" marT="38100" marB="38100" anchor="ctr">
-                    <a:lnL>
-                      <a:noFill/>
-                    </a:lnL>
-                    <a:lnR>
-                      <a:noFill/>
-                    </a:lnR>
-                    <a:lnT>
-                      <a:noFill/>
-                    </a:lnT>
-                    <a:lnB>
-                      <a:noFill/>
-                    </a:lnB>
-                    <a:noFill/>
-                  </a:tcPr>
-                </a:tc>
-                <a:extLst>
-                  <a:ext uri="{0D108BD9-81ED-4DB2-BD59-A6C34878D82A}">
-                    <a16:rowId xmlns:a16="http://schemas.microsoft.com/office/drawing/2014/main" val="1485486134"/>
-                  </a:ext>
-                </a:extLst>
-              </a:tr>
-              <a:tr h="1402485">
-                <a:tc>
-                  <a:txBody>
-                    <a:bodyPr/>
-                    <a:lstStyle/>
-                    <a:p>
-                      <a:pPr algn="l">
-                        <a:buNone/>
-                      </a:pPr>
-                      <a:r>
-                        <a:rPr lang="en-US" sz="2400" b="0" i="0">
-                          <a:solidFill>
-                            <a:srgbClr val="3B3B3B"/>
-                          </a:solidFill>
-                          <a:effectLst/>
-                          <a:latin typeface="Cascadia Code" panose="020B0609020000020004" pitchFamily="49" charset="0"/>
-                          <a:cs typeface="Cascadia Code" panose="020B0609020000020004" pitchFamily="49" charset="0"/>
-                        </a:rPr>
-                        <a:t>showNotification</a:t>
-                      </a:r>
-                    </a:p>
-                  </a:txBody>
-                  <a:tcPr marL="76200" marR="76200" marT="38100" marB="38100" anchor="ctr">
-                    <a:lnL>
-                      <a:noFill/>
-                    </a:lnL>
-                    <a:lnR>
-                      <a:noFill/>
-                    </a:lnR>
-                    <a:lnT>
-                      <a:noFill/>
-                    </a:lnT>
-                    <a:lnB>
-                      <a:noFill/>
-                    </a:lnB>
-                    <a:noFill/>
-                  </a:tcPr>
-                </a:tc>
-                <a:tc>
-                  <a:txBody>
-                    <a:bodyPr/>
-                    <a:lstStyle/>
-                    <a:p>
-                      <a:pPr algn="l">
-                        <a:buNone/>
-                      </a:pPr>
-                      <a:r>
-                        <a:rPr lang="en-US" sz="2400" b="1" i="0">
-                          <a:solidFill>
-                            <a:srgbClr val="3B3B3B"/>
-                          </a:solidFill>
-                          <a:effectLst/>
-                          <a:latin typeface="Cascadia Code" panose="020B0609020000020004" pitchFamily="49" charset="0"/>
-                          <a:cs typeface="Cascadia Code" panose="020B0609020000020004" pitchFamily="49" charset="0"/>
-                        </a:rPr>
-                        <a:t>any module</a:t>
-                      </a:r>
-                      <a:endParaRPr lang="en-US" sz="2400" b="0" i="0">
-                        <a:solidFill>
-                          <a:srgbClr val="3B3B3B"/>
-                        </a:solidFill>
-                        <a:effectLst/>
-                        <a:latin typeface="Cascadia Code" panose="020B0609020000020004" pitchFamily="49" charset="0"/>
-                        <a:cs typeface="Cascadia Code" panose="020B0609020000020004" pitchFamily="49" charset="0"/>
-                      </a:endParaRPr>
-                    </a:p>
-                  </a:txBody>
-                  <a:tcPr marL="76200" marR="76200" marT="38100" marB="38100" anchor="ctr">
-                    <a:lnL>
-                      <a:noFill/>
-                    </a:lnL>
-                    <a:lnR>
-                      <a:noFill/>
-                    </a:lnR>
-                    <a:lnT>
-                      <a:noFill/>
-                    </a:lnT>
-                    <a:lnB>
-                      <a:noFill/>
-                    </a:lnB>
-                    <a:noFill/>
-                  </a:tcPr>
-                </a:tc>
-                <a:tc>
-                  <a:txBody>
-                    <a:bodyPr/>
-                    <a:lstStyle/>
-                    <a:p>
-                      <a:pPr algn="l">
-                        <a:buNone/>
-                      </a:pPr>
-                      <a:r>
-                        <a:rPr lang="en-US" sz="2400" b="0" i="0">
-                          <a:solidFill>
-                            <a:srgbClr val="3B3B3B"/>
-                          </a:solidFill>
-                          <a:effectLst/>
-                          <a:latin typeface="Cascadia Code" panose="020B0609020000020004" pitchFamily="49" charset="0"/>
-                          <a:cs typeface="Cascadia Code" panose="020B0609020000020004" pitchFamily="49" charset="0"/>
-                        </a:rPr>
-                        <a:t>Anyone can have something to say; the shell owns the &lt;Toaster /&gt;</a:t>
-                      </a:r>
-                    </a:p>
-                  </a:txBody>
-                  <a:tcPr marL="76200" marR="76200" marT="38100" marB="38100" anchor="ctr">
-                    <a:lnL>
-                      <a:noFill/>
-                    </a:lnL>
-                    <a:lnR>
-                      <a:noFill/>
-                    </a:lnR>
-                    <a:lnT>
-                      <a:noFill/>
-                    </a:lnT>
-                    <a:lnB>
-                      <a:noFill/>
-                    </a:lnB>
-                    <a:noFill/>
-                  </a:tcPr>
-                </a:tc>
-                <a:extLst>
-                  <a:ext uri="{0D108BD9-81ED-4DB2-BD59-A6C34878D82A}">
-                    <a16:rowId xmlns:a16="http://schemas.microsoft.com/office/drawing/2014/main" val="3065737248"/>
-                  </a:ext>
-                </a:extLst>
-              </a:tr>
-              <a:tr h="1070386">
-                <a:tc>
-                  <a:txBody>
-                    <a:bodyPr/>
-                    <a:lstStyle/>
-                    <a:p>
-                      <a:pPr algn="l">
-                        <a:buNone/>
-                      </a:pPr>
-                      <a:r>
-                        <a:rPr lang="en-US" sz="2400" b="0" i="0" dirty="0" err="1">
-                          <a:solidFill>
-                            <a:srgbClr val="3B3B3B"/>
-                          </a:solidFill>
-                          <a:effectLst/>
-                          <a:latin typeface="Cascadia Code" panose="020B0609020000020004" pitchFamily="49" charset="0"/>
-                          <a:cs typeface="Cascadia Code" panose="020B0609020000020004" pitchFamily="49" charset="0"/>
-                        </a:rPr>
-                        <a:t>counterChange</a:t>
-                      </a:r>
-                      <a:endParaRPr lang="en-US" sz="2400" b="0" i="0" dirty="0">
-                        <a:solidFill>
-                          <a:srgbClr val="3B3B3B"/>
-                        </a:solidFill>
-                        <a:effectLst/>
-                        <a:latin typeface="Cascadia Code" panose="020B0609020000020004" pitchFamily="49" charset="0"/>
-                        <a:cs typeface="Cascadia Code" panose="020B0609020000020004" pitchFamily="49" charset="0"/>
-                      </a:endParaRPr>
-                    </a:p>
-                  </a:txBody>
-                  <a:tcPr marL="76200" marR="76200" marT="38100" marB="38100" anchor="ctr">
-                    <a:lnL>
-                      <a:noFill/>
-                    </a:lnL>
-                    <a:lnR>
-                      <a:noFill/>
-                    </a:lnR>
-                    <a:lnT>
-                      <a:noFill/>
-                    </a:lnT>
-                    <a:lnB>
-                      <a:noFill/>
-                    </a:lnB>
-                    <a:noFill/>
-                  </a:tcPr>
-                </a:tc>
-                <a:tc>
-                  <a:txBody>
-                    <a:bodyPr/>
-                    <a:lstStyle/>
-                    <a:p>
-                      <a:pPr algn="l">
-                        <a:buNone/>
-                      </a:pPr>
-                      <a:r>
-                        <a:rPr lang="en-US" sz="2400" b="1" i="0">
-                          <a:solidFill>
-                            <a:srgbClr val="3B3B3B"/>
-                          </a:solidFill>
-                          <a:effectLst/>
-                          <a:latin typeface="Cascadia Code" panose="020B0609020000020004" pitchFamily="49" charset="0"/>
-                          <a:cs typeface="Cascadia Code" panose="020B0609020000020004" pitchFamily="49" charset="0"/>
-                        </a:rPr>
-                        <a:t>any module</a:t>
-                      </a:r>
-                      <a:endParaRPr lang="en-US" sz="2400" b="0" i="0">
-                        <a:solidFill>
-                          <a:srgbClr val="3B3B3B"/>
-                        </a:solidFill>
-                        <a:effectLst/>
-                        <a:latin typeface="Cascadia Code" panose="020B0609020000020004" pitchFamily="49" charset="0"/>
-                        <a:cs typeface="Cascadia Code" panose="020B0609020000020004" pitchFamily="49" charset="0"/>
-                      </a:endParaRPr>
-                    </a:p>
-                  </a:txBody>
-                  <a:tcPr marL="76200" marR="76200" marT="38100" marB="38100" anchor="ctr">
-                    <a:lnL>
-                      <a:noFill/>
-                    </a:lnL>
-                    <a:lnR>
-                      <a:noFill/>
-                    </a:lnR>
-                    <a:lnT>
-                      <a:noFill/>
-                    </a:lnT>
-                    <a:lnB>
-                      <a:noFill/>
-                    </a:lnB>
-                    <a:noFill/>
-                  </a:tcPr>
-                </a:tc>
-                <a:tc>
-                  <a:txBody>
-                    <a:bodyPr/>
-                    <a:lstStyle/>
-                    <a:p>
-                      <a:pPr algn="l">
-                        <a:buNone/>
-                      </a:pPr>
-                      <a:r>
-                        <a:rPr lang="en-US" sz="2400" b="0" i="0" dirty="0">
-                          <a:solidFill>
-                            <a:srgbClr val="3B3B3B"/>
-                          </a:solidFill>
-                          <a:effectLst/>
-                          <a:latin typeface="Cascadia Code" panose="020B0609020000020004" pitchFamily="49" charset="0"/>
-                          <a:cs typeface="Cascadia Code" panose="020B0609020000020004" pitchFamily="49" charset="0"/>
-                        </a:rPr>
-                        <a:t>Nobody owns the counter — it's genuinely peer state</a:t>
-                      </a:r>
-                    </a:p>
-                  </a:txBody>
-                  <a:tcPr marL="76200" marR="76200" marT="38100" marB="38100" anchor="ctr">
-                    <a:lnL>
-                      <a:noFill/>
-                    </a:lnL>
-                    <a:lnR>
-                      <a:noFill/>
-                    </a:lnR>
-                    <a:lnT>
-                      <a:noFill/>
-                    </a:lnT>
-                    <a:lnB>
-                      <a:noFill/>
-                    </a:lnB>
-                    <a:noFill/>
-                  </a:tcPr>
-                </a:tc>
-                <a:extLst>
-                  <a:ext uri="{0D108BD9-81ED-4DB2-BD59-A6C34878D82A}">
-                    <a16:rowId xmlns:a16="http://schemas.microsoft.com/office/drawing/2014/main" val="1091983602"/>
-                  </a:ext>
-                </a:extLst>
-              </a:tr>
-            </a:tbl>
-          </a:graphicData>
-        </a:graphic>
-      </p:graphicFrame>
-      <p:sp>
-        <p:nvSpPr>
-          <p:cNvPr id="4" name="TextBox 3">
-            <a:extLst>
-              <a:ext uri="{FF2B5EF4-FFF2-40B4-BE49-F238E27FC236}">
-                <a16:creationId xmlns:a16="http://schemas.microsoft.com/office/drawing/2014/main" id="{FCBFEC0A-AD33-0E5A-BF45-ABD21D98423F}"/>
-              </a:ext>
-            </a:extLst>
-          </p:cNvPr>
-          <p:cNvSpPr txBox="1"/>
-          <p:nvPr/>
-        </p:nvSpPr>
-        <p:spPr>
-          <a:xfrm>
-            <a:off x="362857" y="231614"/>
-            <a:ext cx="11161486" cy="646331"/>
-          </a:xfrm>
-          <a:prstGeom prst="rect">
-            <a:avLst/>
-          </a:prstGeom>
-          <a:noFill/>
-        </p:spPr>
-        <p:txBody>
-          <a:bodyPr wrap="square">
-            <a:spAutoFit/>
-          </a:bodyPr>
-          <a:lstStyle/>
-          <a:p>
-            <a:r>
-              <a:rPr lang="en-US" sz="3600" i="1" dirty="0"/>
-              <a:t>The ownership rule </a:t>
-            </a:r>
-            <a:endParaRPr lang="en-GB" sz="4800" i="1" dirty="0"/>
-          </a:p>
-        </p:txBody>
-      </p:sp>
-    </p:spTree>
-    <p:extLst>
-      <p:ext uri="{BB962C8B-B14F-4D97-AF65-F5344CB8AC3E}">
-        <p14:creationId xmlns:p14="http://schemas.microsoft.com/office/powerpoint/2010/main" val="3174723160"/>
-      </p:ext>
-    </p:extLst>
-  </p:cSld>
-  <p:clrMapOvr>
-    <a:masterClrMapping/>
-  </p:clrMapOvr>
-</p:sld>
-</file>
-
-<file path=ppt/slides/slide26.xml><?xml version="1.0" encoding="utf-8"?>
-<p:sld xmlns:a="http://schemas.openxmlformats.org/drawingml/2006/main" xmlns:r="http://schemas.openxmlformats.org/officeDocument/2006/relationships" xmlns:p="http://schemas.openxmlformats.org/presentationml/2006/main">
-  <p:cSld>
-    <p:spTree>
-      <p:nvGrpSpPr>
-        <p:cNvPr id="1" name=""/>
-        <p:cNvGrpSpPr/>
-        <p:nvPr/>
-      </p:nvGrpSpPr>
-      <p:grpSpPr>
-        <a:xfrm>
-          <a:off x="0" y="0"/>
-          <a:ext cx="0" cy="0"/>
-          <a:chOff x="0" y="0"/>
-          <a:chExt cx="0" cy="0"/>
-        </a:xfrm>
-      </p:grpSpPr>
-      <p:sp>
-        <p:nvSpPr>
-          <p:cNvPr id="3" name="Text 2">
-            <a:extLst>
-              <a:ext uri="{FF2B5EF4-FFF2-40B4-BE49-F238E27FC236}">
-                <a16:creationId xmlns:a16="http://schemas.microsoft.com/office/drawing/2014/main" id="{177067D6-BE87-AD69-1C20-9125336CF2E5}"/>
-              </a:ext>
-            </a:extLst>
-          </p:cNvPr>
-          <p:cNvSpPr/>
-          <p:nvPr/>
-        </p:nvSpPr>
-        <p:spPr>
-          <a:xfrm>
-            <a:off x="530352" y="0"/>
-            <a:ext cx="11109960" cy="777240"/>
-          </a:xfrm>
-          <a:prstGeom prst="rect">
-            <a:avLst/>
-          </a:prstGeom>
-          <a:noFill/>
-          <a:ln/>
-        </p:spPr>
-        <p:txBody>
-          <a:bodyPr wrap="square" rtlCol="0" anchor="ctr"/>
-          <a:lstStyle/>
-          <a:p>
-            <a:pPr marL="0" indent="0">
-              <a:buNone/>
-            </a:pPr>
-            <a:r>
-              <a:rPr lang="en-US" sz="3300" i="1" dirty="0">
-                <a:solidFill>
-                  <a:schemeClr val="tx1">
-                    <a:lumMod val="95000"/>
-                    <a:lumOff val="5000"/>
-                  </a:schemeClr>
-                </a:solidFill>
-                <a:latin typeface="Instrument Serif" pitchFamily="34" charset="0"/>
-                <a:ea typeface="Instrument Serif" pitchFamily="34" charset="-122"/>
-                <a:cs typeface="Instrument Serif" pitchFamily="34" charset="-120"/>
-              </a:rPr>
-              <a:t>Shell-owned theming across the federation</a:t>
-            </a:r>
-            <a:endParaRPr lang="en-US" sz="3300" dirty="0">
-              <a:solidFill>
-                <a:schemeClr val="tx1">
-                  <a:lumMod val="95000"/>
-                  <a:lumOff val="5000"/>
-                </a:schemeClr>
-              </a:solidFill>
-            </a:endParaRPr>
-          </a:p>
-        </p:txBody>
-      </p:sp>
-      <p:sp>
-        <p:nvSpPr>
-          <p:cNvPr id="5" name="Text 5">
-            <a:extLst>
-              <a:ext uri="{FF2B5EF4-FFF2-40B4-BE49-F238E27FC236}">
-                <a16:creationId xmlns:a16="http://schemas.microsoft.com/office/drawing/2014/main" id="{956EBAC9-BB98-ECDE-8693-BBDC50395DCE}"/>
-              </a:ext>
-            </a:extLst>
-          </p:cNvPr>
-          <p:cNvSpPr/>
-          <p:nvPr/>
-        </p:nvSpPr>
-        <p:spPr>
-          <a:xfrm>
-            <a:off x="536448" y="777240"/>
-            <a:ext cx="11064240" cy="4741433"/>
-          </a:xfrm>
-          <a:prstGeom prst="rect">
-            <a:avLst/>
-          </a:prstGeom>
-          <a:noFill/>
-          <a:ln/>
-        </p:spPr>
-        <p:txBody>
-          <a:bodyPr wrap="square" rtlCol="0" anchor="t"/>
-          <a:lstStyle/>
-          <a:p>
-            <a:pPr marL="0" indent="0" algn="l">
-              <a:lnSpc>
-                <a:spcPct val="150000"/>
-              </a:lnSpc>
-              <a:buNone/>
-            </a:pPr>
-            <a:r>
-              <a:rPr lang="en-US" sz="2400" dirty="0">
-                <a:solidFill>
-                  <a:schemeClr val="tx1">
-                    <a:lumMod val="95000"/>
-                    <a:lumOff val="5000"/>
-                  </a:schemeClr>
-                </a:solidFill>
-                <a:latin typeface="Cascadia Code NF" pitchFamily="50" charset="0"/>
-                <a:ea typeface="Cascadia Code NF" pitchFamily="50" charset="0"/>
-                <a:cs typeface="Cascadia Code NF" pitchFamily="50" charset="0"/>
-              </a:rPr>
-              <a:t>Shell (owns theme)</a:t>
-            </a:r>
-          </a:p>
-          <a:p>
-            <a:pPr marL="0" indent="0" algn="l">
-              <a:lnSpc>
-                <a:spcPct val="150000"/>
-              </a:lnSpc>
-              <a:buNone/>
-            </a:pPr>
-            <a:r>
-              <a:rPr lang="en-US" sz="2400" dirty="0">
-                <a:solidFill>
-                  <a:schemeClr val="tx1">
-                    <a:lumMod val="95000"/>
-                    <a:lumOff val="5000"/>
-                  </a:schemeClr>
-                </a:solidFill>
-                <a:latin typeface="Cascadia Code NF" pitchFamily="50" charset="0"/>
-                <a:ea typeface="Cascadia Code NF" pitchFamily="50" charset="0"/>
-                <a:cs typeface="Cascadia Code NF" pitchFamily="50" charset="0"/>
-              </a:rPr>
-              <a:t>  ├── Persists to localStorage ("mf-demo-theme")</a:t>
-            </a:r>
-          </a:p>
-          <a:p>
-            <a:pPr marL="0" indent="0" algn="l">
-              <a:lnSpc>
-                <a:spcPct val="150000"/>
-              </a:lnSpc>
-              <a:buNone/>
-            </a:pPr>
-            <a:r>
-              <a:rPr lang="en-US" sz="2400" dirty="0">
-                <a:solidFill>
-                  <a:schemeClr val="tx1">
-                    <a:lumMod val="95000"/>
-                    <a:lumOff val="5000"/>
-                  </a:schemeClr>
-                </a:solidFill>
-                <a:latin typeface="Cascadia Code NF" pitchFamily="50" charset="0"/>
-                <a:ea typeface="Cascadia Code NF" pitchFamily="50" charset="0"/>
-                <a:cs typeface="Cascadia Code NF" pitchFamily="50" charset="0"/>
-              </a:rPr>
-              <a:t>  ├── Applies CSS variables to document.documentElement</a:t>
-            </a:r>
-          </a:p>
-          <a:p>
-            <a:pPr marL="0" indent="0" algn="l">
-              <a:lnSpc>
-                <a:spcPct val="150000"/>
-              </a:lnSpc>
-              <a:buNone/>
-            </a:pPr>
-            <a:r>
-              <a:rPr lang="en-US" sz="2400" dirty="0">
-                <a:solidFill>
-                  <a:schemeClr val="tx1">
-                    <a:lumMod val="95000"/>
-                    <a:lumOff val="5000"/>
-                  </a:schemeClr>
-                </a:solidFill>
-                <a:latin typeface="Cascadia Code NF" pitchFamily="50" charset="0"/>
-                <a:ea typeface="Cascadia Code NF" pitchFamily="50" charset="0"/>
-                <a:cs typeface="Cascadia Code NF" pitchFamily="50" charset="0"/>
-              </a:rPr>
-              <a:t>  ├── Exposes window.__MF_THEME__ bridge</a:t>
-            </a:r>
-          </a:p>
-          <a:p>
-            <a:pPr marL="0" indent="0" algn="l">
-              <a:lnSpc>
-                <a:spcPct val="150000"/>
-              </a:lnSpc>
-              <a:buNone/>
-            </a:pPr>
-            <a:r>
-              <a:rPr lang="en-US" sz="2400" dirty="0">
-                <a:solidFill>
-                  <a:schemeClr val="tx1">
-                    <a:lumMod val="95000"/>
-                    <a:lumOff val="5000"/>
-                  </a:schemeClr>
-                </a:solidFill>
-                <a:latin typeface="Cascadia Code NF" pitchFamily="50" charset="0"/>
-                <a:ea typeface="Cascadia Code NF" pitchFamily="50" charset="0"/>
-                <a:cs typeface="Cascadia Code NF" pitchFamily="50" charset="0"/>
-              </a:rPr>
-              <a:t>  └── Broadcasts "themeChange" event</a:t>
-            </a:r>
-          </a:p>
-          <a:p>
-            <a:pPr marL="0" indent="0" algn="l">
-              <a:lnSpc>
-                <a:spcPct val="150000"/>
-              </a:lnSpc>
-              <a:buNone/>
-            </a:pPr>
-            <a:r>
-              <a:rPr lang="en-US" sz="2400" dirty="0">
-                <a:solidFill>
-                  <a:schemeClr val="tx1">
-                    <a:lumMod val="95000"/>
-                    <a:lumOff val="5000"/>
-                  </a:schemeClr>
-                </a:solidFill>
-                <a:latin typeface="Cascadia Code NF" pitchFamily="50" charset="0"/>
-                <a:ea typeface="Cascadia Code NF" pitchFamily="50" charset="0"/>
-                <a:cs typeface="Cascadia Code NF" pitchFamily="50" charset="0"/>
-              </a:rPr>
-              <a:t>        ├── Records       → useActiveTheme()</a:t>
-            </a:r>
-          </a:p>
-          <a:p>
-            <a:pPr marL="0" indent="0" algn="l">
-              <a:lnSpc>
-                <a:spcPct val="150000"/>
-              </a:lnSpc>
-              <a:buNone/>
-            </a:pPr>
-            <a:r>
-              <a:rPr lang="en-US" sz="2400" dirty="0">
-                <a:solidFill>
-                  <a:schemeClr val="tx1">
-                    <a:lumMod val="95000"/>
-                    <a:lumOff val="5000"/>
-                  </a:schemeClr>
-                </a:solidFill>
-                <a:latin typeface="Cascadia Code NF" pitchFamily="50" charset="0"/>
-                <a:ea typeface="Cascadia Code NF" pitchFamily="50" charset="0"/>
-                <a:cs typeface="Cascadia Code NF" pitchFamily="50" charset="0"/>
-              </a:rPr>
-              <a:t>        ├── Prescriptions → useActiveTheme()</a:t>
-            </a:r>
-          </a:p>
-          <a:p>
-            <a:pPr marL="0" indent="0" algn="l">
-              <a:lnSpc>
-                <a:spcPct val="150000"/>
-              </a:lnSpc>
-              <a:buNone/>
-            </a:pPr>
-            <a:r>
-              <a:rPr lang="en-US" sz="2400" dirty="0">
-                <a:solidFill>
-                  <a:schemeClr val="tx1">
-                    <a:lumMod val="95000"/>
-                    <a:lumOff val="5000"/>
-                  </a:schemeClr>
-                </a:solidFill>
-                <a:latin typeface="Cascadia Code NF" pitchFamily="50" charset="0"/>
-                <a:ea typeface="Cascadia Code NF" pitchFamily="50" charset="0"/>
-                <a:cs typeface="Cascadia Code NF" pitchFamily="50" charset="0"/>
-              </a:rPr>
-              <a:t>        └── Analytics     → useActiveTheme()</a:t>
-            </a:r>
-          </a:p>
-        </p:txBody>
-      </p:sp>
-    </p:spTree>
-    <p:extLst>
-      <p:ext uri="{BB962C8B-B14F-4D97-AF65-F5344CB8AC3E}">
-        <p14:creationId xmlns:p14="http://schemas.microsoft.com/office/powerpoint/2010/main" val="3171738305"/>
-      </p:ext>
-    </p:extLst>
-  </p:cSld>
-  <p:clrMapOvr>
-    <a:masterClrMapping/>
-  </p:clrMapOvr>
-</p:sld>
-</file>
-
-<file path=ppt/slides/slide27.xml><?xml version="1.0" encoding="utf-8"?>
-<p:sld xmlns:a="http://schemas.openxmlformats.org/drawingml/2006/main" xmlns:r="http://schemas.openxmlformats.org/officeDocument/2006/relationships" xmlns:p="http://schemas.openxmlformats.org/presentationml/2006/main">
-  <p:cSld>
-    <p:spTree>
-      <p:nvGrpSpPr>
-        <p:cNvPr id="1" name=""/>
-        <p:cNvGrpSpPr/>
-        <p:nvPr/>
-      </p:nvGrpSpPr>
-      <p:grpSpPr>
-        <a:xfrm>
-          <a:off x="0" y="0"/>
-          <a:ext cx="0" cy="0"/>
-          <a:chOff x="0" y="0"/>
-          <a:chExt cx="0" cy="0"/>
-        </a:xfrm>
-      </p:grpSpPr>
       <p:sp>
         <p:nvSpPr>
           <p:cNvPr id="3" name="Text 2">
@@ -8080,13 +6503,7 @@
           <p:cNvGraphicFramePr>
             <a:graphicFrameLocks noGrp="1"/>
           </p:cNvGraphicFramePr>
-          <p:nvPr>
-            <p:extLst>
-              <p:ext uri="{D42A27DB-BD31-4B8C-83A1-F6EECF244321}">
-                <p14:modId xmlns:p14="http://schemas.microsoft.com/office/powerpoint/2010/main" val="180649158"/>
-              </p:ext>
-            </p:extLst>
-          </p:nvPr>
+          <p:nvPr/>
         </p:nvGraphicFramePr>
         <p:xfrm>
           <a:off x="548640" y="2302742"/>
@@ -8970,7 +7387,942 @@
     </p:spTree>
     <p:extLst>
       <p:ext uri="{BB962C8B-B14F-4D97-AF65-F5344CB8AC3E}">
-        <p14:creationId xmlns:p14="http://schemas.microsoft.com/office/powerpoint/2010/main" val="835178796"/>
+        <p14:creationId xmlns:p14="http://schemas.microsoft.com/office/powerpoint/2010/main" val="1110886258"/>
+      </p:ext>
+    </p:extLst>
+  </p:cSld>
+  <p:clrMapOvr>
+    <a:masterClrMapping/>
+  </p:clrMapOvr>
+</p:sld>
+</file>
+
+<file path=ppt/slides/slide21.xml><?xml version="1.0" encoding="utf-8"?>
+<p:sld xmlns:a="http://schemas.openxmlformats.org/drawingml/2006/main" xmlns:r="http://schemas.openxmlformats.org/officeDocument/2006/relationships" xmlns:p="http://schemas.openxmlformats.org/presentationml/2006/main">
+  <p:cSld>
+    <p:spTree>
+      <p:nvGrpSpPr>
+        <p:cNvPr id="1" name="">
+          <a:extLst>
+            <a:ext uri="{FF2B5EF4-FFF2-40B4-BE49-F238E27FC236}">
+              <a16:creationId xmlns:a16="http://schemas.microsoft.com/office/drawing/2014/main" id="{62BE3F89-483A-0053-D78D-1A8901B047F7}"/>
+            </a:ext>
+          </a:extLst>
+        </p:cNvPr>
+        <p:cNvGrpSpPr/>
+        <p:nvPr/>
+      </p:nvGrpSpPr>
+      <p:grpSpPr>
+        <a:xfrm>
+          <a:off x="0" y="0"/>
+          <a:ext cx="0" cy="0"/>
+          <a:chOff x="0" y="0"/>
+          <a:chExt cx="0" cy="0"/>
+        </a:xfrm>
+      </p:grpSpPr>
+      <p:sp>
+        <p:nvSpPr>
+          <p:cNvPr id="2" name="TextBox 1">
+            <a:extLst>
+              <a:ext uri="{FF2B5EF4-FFF2-40B4-BE49-F238E27FC236}">
+                <a16:creationId xmlns:a16="http://schemas.microsoft.com/office/drawing/2014/main" id="{348116DE-5DA1-A8F4-171E-98CD8EF39457}"/>
+              </a:ext>
+            </a:extLst>
+          </p:cNvPr>
+          <p:cNvSpPr txBox="1"/>
+          <p:nvPr/>
+        </p:nvSpPr>
+        <p:spPr>
+          <a:xfrm>
+            <a:off x="722376" y="576072"/>
+            <a:ext cx="1436612" cy="707886"/>
+          </a:xfrm>
+          <a:prstGeom prst="rect">
+            <a:avLst/>
+          </a:prstGeom>
+          <a:noFill/>
+        </p:spPr>
+        <p:txBody>
+          <a:bodyPr wrap="none" rtlCol="0">
+            <a:spAutoFit/>
+          </a:bodyPr>
+          <a:lstStyle/>
+          <a:p>
+            <a:r>
+              <a:rPr lang="en-GB" sz="4000" dirty="0"/>
+              <a:t>Demo</a:t>
+            </a:r>
+          </a:p>
+        </p:txBody>
+      </p:sp>
+      <p:sp>
+        <p:nvSpPr>
+          <p:cNvPr id="4" name="TextBox 3">
+            <a:extLst>
+              <a:ext uri="{FF2B5EF4-FFF2-40B4-BE49-F238E27FC236}">
+                <a16:creationId xmlns:a16="http://schemas.microsoft.com/office/drawing/2014/main" id="{FCCE98A8-BD8A-6B23-799E-D4E934D31BDC}"/>
+              </a:ext>
+            </a:extLst>
+          </p:cNvPr>
+          <p:cNvSpPr txBox="1"/>
+          <p:nvPr/>
+        </p:nvSpPr>
+        <p:spPr>
+          <a:xfrm>
+            <a:off x="1167918" y="3075057"/>
+            <a:ext cx="9853018" cy="707886"/>
+          </a:xfrm>
+          <a:prstGeom prst="rect">
+            <a:avLst/>
+          </a:prstGeom>
+          <a:noFill/>
+        </p:spPr>
+        <p:txBody>
+          <a:bodyPr wrap="none" rtlCol="0">
+            <a:spAutoFit/>
+          </a:bodyPr>
+          <a:lstStyle/>
+          <a:p>
+            <a:pPr algn="ctr"/>
+            <a:r>
+              <a:rPr lang="en-GB" sz="4000" dirty="0"/>
+              <a:t>Preloading and prefetching (network </a:t>
+            </a:r>
+            <a:r>
+              <a:rPr lang="en-GB" sz="4000" dirty="0" err="1"/>
+              <a:t>devtools</a:t>
+            </a:r>
+            <a:r>
+              <a:rPr lang="en-GB" sz="4000" dirty="0"/>
+              <a:t>)</a:t>
+            </a:r>
+          </a:p>
+        </p:txBody>
+      </p:sp>
+    </p:spTree>
+    <p:extLst>
+      <p:ext uri="{BB962C8B-B14F-4D97-AF65-F5344CB8AC3E}">
+        <p14:creationId xmlns:p14="http://schemas.microsoft.com/office/powerpoint/2010/main" val="2398107306"/>
+      </p:ext>
+    </p:extLst>
+  </p:cSld>
+  <p:clrMapOvr>
+    <a:masterClrMapping/>
+  </p:clrMapOvr>
+</p:sld>
+</file>
+
+<file path=ppt/slides/slide22.xml><?xml version="1.0" encoding="utf-8"?>
+<p:sld xmlns:a="http://schemas.openxmlformats.org/drawingml/2006/main" xmlns:r="http://schemas.openxmlformats.org/officeDocument/2006/relationships" xmlns:p="http://schemas.openxmlformats.org/presentationml/2006/main">
+  <p:cSld>
+    <p:spTree>
+      <p:nvGrpSpPr>
+        <p:cNvPr id="1" name=""/>
+        <p:cNvGrpSpPr/>
+        <p:nvPr/>
+      </p:nvGrpSpPr>
+      <p:grpSpPr>
+        <a:xfrm>
+          <a:off x="0" y="0"/>
+          <a:ext cx="0" cy="0"/>
+          <a:chOff x="0" y="0"/>
+          <a:chExt cx="0" cy="0"/>
+        </a:xfrm>
+      </p:grpSpPr>
+      <p:sp>
+        <p:nvSpPr>
+          <p:cNvPr id="3" name="Text 2">
+            <a:extLst>
+              <a:ext uri="{FF2B5EF4-FFF2-40B4-BE49-F238E27FC236}">
+                <a16:creationId xmlns:a16="http://schemas.microsoft.com/office/drawing/2014/main" id="{915B897A-3EEC-DD92-29A6-A9DC36773ED2}"/>
+              </a:ext>
+            </a:extLst>
+          </p:cNvPr>
+          <p:cNvSpPr/>
+          <p:nvPr/>
+        </p:nvSpPr>
+        <p:spPr>
+          <a:xfrm>
+            <a:off x="530352" y="713232"/>
+            <a:ext cx="11109960" cy="777240"/>
+          </a:xfrm>
+          <a:prstGeom prst="rect">
+            <a:avLst/>
+          </a:prstGeom>
+          <a:noFill/>
+          <a:ln/>
+        </p:spPr>
+        <p:txBody>
+          <a:bodyPr wrap="square" rtlCol="0" anchor="ctr"/>
+          <a:lstStyle/>
+          <a:p>
+            <a:pPr marL="0" indent="0">
+              <a:buNone/>
+            </a:pPr>
+            <a:r>
+              <a:rPr lang="en-US" sz="3300" i="1" dirty="0">
+                <a:solidFill>
+                  <a:schemeClr val="tx1">
+                    <a:lumMod val="95000"/>
+                    <a:lumOff val="5000"/>
+                  </a:schemeClr>
+                </a:solidFill>
+                <a:latin typeface="Instrument Serif" pitchFamily="34" charset="0"/>
+                <a:ea typeface="Instrument Serif" pitchFamily="34" charset="-122"/>
+                <a:cs typeface="Instrument Serif" pitchFamily="34" charset="-120"/>
+              </a:rPr>
+              <a:t>Three strategies, three layers of resilience</a:t>
+            </a:r>
+            <a:endParaRPr lang="en-US" sz="3300" dirty="0">
+              <a:solidFill>
+                <a:schemeClr val="tx1">
+                  <a:lumMod val="95000"/>
+                  <a:lumOff val="5000"/>
+                </a:schemeClr>
+              </a:solidFill>
+            </a:endParaRPr>
+          </a:p>
+        </p:txBody>
+      </p:sp>
+      <p:sp>
+        <p:nvSpPr>
+          <p:cNvPr id="5" name="Text 6">
+            <a:extLst>
+              <a:ext uri="{FF2B5EF4-FFF2-40B4-BE49-F238E27FC236}">
+                <a16:creationId xmlns:a16="http://schemas.microsoft.com/office/drawing/2014/main" id="{668BF609-EEBF-0FAC-875A-FCD5A6335B19}"/>
+              </a:ext>
+            </a:extLst>
+          </p:cNvPr>
+          <p:cNvSpPr/>
+          <p:nvPr/>
+        </p:nvSpPr>
+        <p:spPr>
+          <a:xfrm>
+            <a:off x="548640" y="2850776"/>
+            <a:ext cx="10854466" cy="2377440"/>
+          </a:xfrm>
+          <a:prstGeom prst="rect">
+            <a:avLst/>
+          </a:prstGeom>
+          <a:noFill/>
+          <a:ln/>
+        </p:spPr>
+        <p:txBody>
+          <a:bodyPr wrap="square" rtlCol="0" anchor="t"/>
+          <a:lstStyle/>
+          <a:p>
+            <a:pPr>
+              <a:lnSpc>
+                <a:spcPct val="150000"/>
+              </a:lnSpc>
+              <a:buSzPct val="100000"/>
+            </a:pPr>
+            <a:r>
+              <a:rPr lang="en-US" sz="2800" dirty="0">
+                <a:solidFill>
+                  <a:schemeClr val="tx1">
+                    <a:lumMod val="95000"/>
+                    <a:lumOff val="5000"/>
+                  </a:schemeClr>
+                </a:solidFill>
+                <a:latin typeface="Cascadia Code NF" pitchFamily="50" charset="0"/>
+                <a:ea typeface="Cascadia Code NF" pitchFamily="50" charset="0"/>
+                <a:cs typeface="Cascadia Code NF" pitchFamily="50" charset="0"/>
+              </a:rPr>
+              <a:t>Layer 1: lazy() + .catch() if remote is unreachable</a:t>
+            </a:r>
+          </a:p>
+          <a:p>
+            <a:pPr>
+              <a:lnSpc>
+                <a:spcPct val="150000"/>
+              </a:lnSpc>
+              <a:buSzPct val="100000"/>
+            </a:pPr>
+            <a:r>
+              <a:rPr lang="en-US" sz="2800" dirty="0">
+                <a:solidFill>
+                  <a:schemeClr val="tx1">
+                    <a:lumMod val="95000"/>
+                    <a:lumOff val="5000"/>
+                  </a:schemeClr>
+                </a:solidFill>
+                <a:latin typeface="Cascadia Code NF" pitchFamily="50" charset="0"/>
+                <a:ea typeface="Cascadia Code NF" pitchFamily="50" charset="0"/>
+                <a:cs typeface="Cascadia Code NF" pitchFamily="50" charset="0"/>
+              </a:rPr>
+              <a:t>Layer 2: &lt;Suspense&gt; skeleton while loading</a:t>
+            </a:r>
+          </a:p>
+          <a:p>
+            <a:pPr>
+              <a:lnSpc>
+                <a:spcPct val="150000"/>
+              </a:lnSpc>
+              <a:buSzPct val="100000"/>
+            </a:pPr>
+            <a:r>
+              <a:rPr lang="en-US" sz="2800" dirty="0">
+                <a:solidFill>
+                  <a:schemeClr val="tx1">
+                    <a:lumMod val="95000"/>
+                    <a:lumOff val="5000"/>
+                  </a:schemeClr>
+                </a:solidFill>
+                <a:latin typeface="Cascadia Code NF" pitchFamily="50" charset="0"/>
+                <a:ea typeface="Cascadia Code NF" pitchFamily="50" charset="0"/>
+                <a:cs typeface="Cascadia Code NF" pitchFamily="50" charset="0"/>
+              </a:rPr>
+              <a:t>Layer 3: &lt;ErrorBoundary&gt; for runtime errors</a:t>
+            </a:r>
+          </a:p>
+        </p:txBody>
+      </p:sp>
+    </p:spTree>
+    <p:extLst>
+      <p:ext uri="{BB962C8B-B14F-4D97-AF65-F5344CB8AC3E}">
+        <p14:creationId xmlns:p14="http://schemas.microsoft.com/office/powerpoint/2010/main" val="2619125639"/>
+      </p:ext>
+    </p:extLst>
+  </p:cSld>
+  <p:clrMapOvr>
+    <a:masterClrMapping/>
+  </p:clrMapOvr>
+</p:sld>
+</file>
+
+<file path=ppt/slides/slide23.xml><?xml version="1.0" encoding="utf-8"?>
+<p:sld xmlns:a="http://schemas.openxmlformats.org/drawingml/2006/main" xmlns:r="http://schemas.openxmlformats.org/officeDocument/2006/relationships" xmlns:p="http://schemas.openxmlformats.org/presentationml/2006/main">
+  <p:cSld>
+    <p:spTree>
+      <p:nvGrpSpPr>
+        <p:cNvPr id="1" name=""/>
+        <p:cNvGrpSpPr/>
+        <p:nvPr/>
+      </p:nvGrpSpPr>
+      <p:grpSpPr>
+        <a:xfrm>
+          <a:off x="0" y="0"/>
+          <a:ext cx="0" cy="0"/>
+          <a:chOff x="0" y="0"/>
+          <a:chExt cx="0" cy="0"/>
+        </a:xfrm>
+      </p:grpSpPr>
+      <p:pic>
+        <p:nvPicPr>
+          <p:cNvPr id="3" name="Picture 2">
+            <a:extLst>
+              <a:ext uri="{FF2B5EF4-FFF2-40B4-BE49-F238E27FC236}">
+                <a16:creationId xmlns:a16="http://schemas.microsoft.com/office/drawing/2014/main" id="{B66439F7-DFAD-81AB-B8BD-241FD9547508}"/>
+              </a:ext>
+            </a:extLst>
+          </p:cNvPr>
+          <p:cNvPicPr>
+            <a:picLocks noChangeAspect="1"/>
+          </p:cNvPicPr>
+          <p:nvPr/>
+        </p:nvPicPr>
+        <p:blipFill>
+          <a:blip r:embed="rId3"/>
+          <a:stretch>
+            <a:fillRect/>
+          </a:stretch>
+        </p:blipFill>
+        <p:spPr>
+          <a:xfrm>
+            <a:off x="192869" y="0"/>
+            <a:ext cx="11803086" cy="6858000"/>
+          </a:xfrm>
+          <a:prstGeom prst="rect">
+            <a:avLst/>
+          </a:prstGeom>
+        </p:spPr>
+      </p:pic>
+    </p:spTree>
+    <p:extLst>
+      <p:ext uri="{BB962C8B-B14F-4D97-AF65-F5344CB8AC3E}">
+        <p14:creationId xmlns:p14="http://schemas.microsoft.com/office/powerpoint/2010/main" val="836858276"/>
+      </p:ext>
+    </p:extLst>
+  </p:cSld>
+  <p:clrMapOvr>
+    <a:masterClrMapping/>
+  </p:clrMapOvr>
+</p:sld>
+</file>
+
+<file path=ppt/slides/slide24.xml><?xml version="1.0" encoding="utf-8"?>
+<p:sld xmlns:a="http://schemas.openxmlformats.org/drawingml/2006/main" xmlns:r="http://schemas.openxmlformats.org/officeDocument/2006/relationships" xmlns:p="http://schemas.openxmlformats.org/presentationml/2006/main">
+  <p:cSld>
+    <p:spTree>
+      <p:nvGrpSpPr>
+        <p:cNvPr id="1" name=""/>
+        <p:cNvGrpSpPr/>
+        <p:nvPr/>
+      </p:nvGrpSpPr>
+      <p:grpSpPr>
+        <a:xfrm>
+          <a:off x="0" y="0"/>
+          <a:ext cx="0" cy="0"/>
+          <a:chOff x="0" y="0"/>
+          <a:chExt cx="0" cy="0"/>
+        </a:xfrm>
+      </p:grpSpPr>
+      <p:sp>
+        <p:nvSpPr>
+          <p:cNvPr id="3" name="Text 2">
+            <a:extLst>
+              <a:ext uri="{FF2B5EF4-FFF2-40B4-BE49-F238E27FC236}">
+                <a16:creationId xmlns:a16="http://schemas.microsoft.com/office/drawing/2014/main" id="{E6D9864B-997C-D392-B5C0-9E000C1A03B8}"/>
+              </a:ext>
+            </a:extLst>
+          </p:cNvPr>
+          <p:cNvSpPr/>
+          <p:nvPr/>
+        </p:nvSpPr>
+        <p:spPr>
+          <a:xfrm>
+            <a:off x="530352" y="713232"/>
+            <a:ext cx="11109960" cy="777240"/>
+          </a:xfrm>
+          <a:prstGeom prst="rect">
+            <a:avLst/>
+          </a:prstGeom>
+          <a:noFill/>
+          <a:ln/>
+        </p:spPr>
+        <p:txBody>
+          <a:bodyPr wrap="square" rtlCol="0" anchor="ctr"/>
+          <a:lstStyle/>
+          <a:p>
+            <a:pPr marL="0" indent="0">
+              <a:buNone/>
+            </a:pPr>
+            <a:r>
+              <a:rPr lang="en-US" sz="3300" i="1" dirty="0">
+                <a:solidFill>
+                  <a:schemeClr val="tx1">
+                    <a:lumMod val="95000"/>
+                    <a:lumOff val="5000"/>
+                  </a:schemeClr>
+                </a:solidFill>
+                <a:latin typeface="Instrument Serif" pitchFamily="34" charset="0"/>
+                <a:ea typeface="Instrument Serif" pitchFamily="34" charset="-122"/>
+                <a:cs typeface="Instrument Serif" pitchFamily="34" charset="-120"/>
+              </a:rPr>
+              <a:t>Question</a:t>
+            </a:r>
+            <a:endParaRPr lang="en-US" sz="3300" dirty="0">
+              <a:solidFill>
+                <a:schemeClr val="tx1">
+                  <a:lumMod val="95000"/>
+                  <a:lumOff val="5000"/>
+                </a:schemeClr>
+              </a:solidFill>
+            </a:endParaRPr>
+          </a:p>
+        </p:txBody>
+      </p:sp>
+      <p:sp>
+        <p:nvSpPr>
+          <p:cNvPr id="7" name="Text 8">
+            <a:extLst>
+              <a:ext uri="{FF2B5EF4-FFF2-40B4-BE49-F238E27FC236}">
+                <a16:creationId xmlns:a16="http://schemas.microsoft.com/office/drawing/2014/main" id="{626E23A0-B775-D9BA-9D15-6D62663E3A4A}"/>
+              </a:ext>
+            </a:extLst>
+          </p:cNvPr>
+          <p:cNvSpPr/>
+          <p:nvPr/>
+        </p:nvSpPr>
+        <p:spPr>
+          <a:xfrm>
+            <a:off x="713232" y="2678653"/>
+            <a:ext cx="10395758" cy="1796527"/>
+          </a:xfrm>
+          <a:prstGeom prst="rect">
+            <a:avLst/>
+          </a:prstGeom>
+          <a:noFill/>
+          <a:ln/>
+        </p:spPr>
+        <p:txBody>
+          <a:bodyPr wrap="square" rtlCol="0" anchor="ctr"/>
+          <a:lstStyle/>
+          <a:p>
+            <a:pPr marL="0" indent="0">
+              <a:buNone/>
+            </a:pPr>
+            <a:r>
+              <a:rPr lang="en-US" sz="2800" i="1" dirty="0">
+                <a:solidFill>
+                  <a:schemeClr val="tx1">
+                    <a:lumMod val="85000"/>
+                    <a:lumOff val="15000"/>
+                  </a:schemeClr>
+                </a:solidFill>
+                <a:latin typeface="Cascadia Code NF" pitchFamily="50" charset="0"/>
+                <a:ea typeface="Cascadia Code NF" pitchFamily="50" charset="0"/>
+                <a:cs typeface="Cascadia Code NF" pitchFamily="50" charset="0"/>
+              </a:rPr>
+              <a:t>Why lazy() for eager modules? </a:t>
+            </a:r>
+          </a:p>
+          <a:p>
+            <a:pPr marL="0" indent="0">
+              <a:buNone/>
+            </a:pPr>
+            <a:r>
+              <a:rPr lang="en-US" sz="2800" i="1" dirty="0">
+                <a:solidFill>
+                  <a:schemeClr val="tx1">
+                    <a:lumMod val="85000"/>
+                    <a:lumOff val="15000"/>
+                  </a:schemeClr>
+                </a:solidFill>
+                <a:latin typeface="Cascadia Code NF" pitchFamily="50" charset="0"/>
+                <a:ea typeface="Cascadia Code NF" pitchFamily="50" charset="0"/>
+                <a:cs typeface="Cascadia Code NF" pitchFamily="50" charset="0"/>
+              </a:rPr>
+              <a:t>Remotes are separate builds resolved at runtime. </a:t>
+            </a:r>
+          </a:p>
+          <a:p>
+            <a:pPr marL="0" indent="0">
+              <a:buNone/>
+            </a:pPr>
+            <a:r>
+              <a:rPr lang="en-US" sz="2800" i="1" dirty="0">
+                <a:solidFill>
+                  <a:schemeClr val="tx1">
+                    <a:lumMod val="85000"/>
+                    <a:lumOff val="15000"/>
+                  </a:schemeClr>
+                </a:solidFill>
+                <a:latin typeface="Cascadia Code NF" pitchFamily="50" charset="0"/>
+                <a:ea typeface="Cascadia Code NF" pitchFamily="50" charset="0"/>
+                <a:cs typeface="Cascadia Code NF" pitchFamily="50" charset="0"/>
+              </a:rPr>
+              <a:t>Eager import() warms the cache; lazy() resolves from it.</a:t>
+            </a:r>
+            <a:endParaRPr lang="en-US" sz="2800" dirty="0">
+              <a:solidFill>
+                <a:schemeClr val="tx1">
+                  <a:lumMod val="85000"/>
+                  <a:lumOff val="15000"/>
+                </a:schemeClr>
+              </a:solidFill>
+              <a:latin typeface="Cascadia Code NF" pitchFamily="50" charset="0"/>
+              <a:ea typeface="Cascadia Code NF" pitchFamily="50" charset="0"/>
+              <a:cs typeface="Cascadia Code NF" pitchFamily="50" charset="0"/>
+            </a:endParaRPr>
+          </a:p>
+        </p:txBody>
+      </p:sp>
+    </p:spTree>
+    <p:extLst>
+      <p:ext uri="{BB962C8B-B14F-4D97-AF65-F5344CB8AC3E}">
+        <p14:creationId xmlns:p14="http://schemas.microsoft.com/office/powerpoint/2010/main" val="2577224661"/>
+      </p:ext>
+    </p:extLst>
+  </p:cSld>
+  <p:clrMapOvr>
+    <a:masterClrMapping/>
+  </p:clrMapOvr>
+</p:sld>
+</file>
+
+<file path=ppt/slides/slide25.xml><?xml version="1.0" encoding="utf-8"?>
+<p:sld xmlns:a="http://schemas.openxmlformats.org/drawingml/2006/main" xmlns:r="http://schemas.openxmlformats.org/officeDocument/2006/relationships" xmlns:p="http://schemas.openxmlformats.org/presentationml/2006/main">
+  <p:cSld>
+    <p:spTree>
+      <p:nvGrpSpPr>
+        <p:cNvPr id="1" name=""/>
+        <p:cNvGrpSpPr/>
+        <p:nvPr/>
+      </p:nvGrpSpPr>
+      <p:grpSpPr>
+        <a:xfrm>
+          <a:off x="0" y="0"/>
+          <a:ext cx="0" cy="0"/>
+          <a:chOff x="0" y="0"/>
+          <a:chExt cx="0" cy="0"/>
+        </a:xfrm>
+      </p:grpSpPr>
+      <p:sp>
+        <p:nvSpPr>
+          <p:cNvPr id="3" name="Text 2">
+            <a:extLst>
+              <a:ext uri="{FF2B5EF4-FFF2-40B4-BE49-F238E27FC236}">
+                <a16:creationId xmlns:a16="http://schemas.microsoft.com/office/drawing/2014/main" id="{CC0F34E4-70E8-F750-1B49-A033FEC0C4E2}"/>
+              </a:ext>
+            </a:extLst>
+          </p:cNvPr>
+          <p:cNvSpPr/>
+          <p:nvPr/>
+        </p:nvSpPr>
+        <p:spPr>
+          <a:xfrm>
+            <a:off x="530352" y="135008"/>
+            <a:ext cx="11109960" cy="777240"/>
+          </a:xfrm>
+          <a:prstGeom prst="rect">
+            <a:avLst/>
+          </a:prstGeom>
+          <a:noFill/>
+          <a:ln/>
+        </p:spPr>
+        <p:txBody>
+          <a:bodyPr wrap="square" rtlCol="0" anchor="ctr"/>
+          <a:lstStyle/>
+          <a:p>
+            <a:pPr marL="0" indent="0">
+              <a:buNone/>
+            </a:pPr>
+            <a:r>
+              <a:rPr lang="en-US" sz="3300" i="1" dirty="0">
+                <a:solidFill>
+                  <a:schemeClr val="tx1">
+                    <a:lumMod val="95000"/>
+                    <a:lumOff val="5000"/>
+                  </a:schemeClr>
+                </a:solidFill>
+                <a:latin typeface="Instrument Serif" pitchFamily="34" charset="0"/>
+                <a:ea typeface="Instrument Serif" pitchFamily="34" charset="-122"/>
+                <a:cs typeface="Instrument Serif" pitchFamily="34" charset="-120"/>
+              </a:rPr>
+              <a:t>Settings, Commands, Federation Lab menus</a:t>
+            </a:r>
+            <a:endParaRPr lang="en-US" sz="3300" dirty="0">
+              <a:solidFill>
+                <a:schemeClr val="tx1">
+                  <a:lumMod val="95000"/>
+                  <a:lumOff val="5000"/>
+                </a:schemeClr>
+              </a:solidFill>
+            </a:endParaRPr>
+          </a:p>
+        </p:txBody>
+      </p:sp>
+      <p:sp>
+        <p:nvSpPr>
+          <p:cNvPr id="5" name="Text 5">
+            <a:extLst>
+              <a:ext uri="{FF2B5EF4-FFF2-40B4-BE49-F238E27FC236}">
+                <a16:creationId xmlns:a16="http://schemas.microsoft.com/office/drawing/2014/main" id="{8EB8FE32-AB1B-8F6E-B031-72E31947DF0F}"/>
+              </a:ext>
+            </a:extLst>
+          </p:cNvPr>
+          <p:cNvSpPr/>
+          <p:nvPr/>
+        </p:nvSpPr>
+        <p:spPr>
+          <a:xfrm>
+            <a:off x="576072" y="1202166"/>
+            <a:ext cx="10706010" cy="4660752"/>
+          </a:xfrm>
+          <a:prstGeom prst="rect">
+            <a:avLst/>
+          </a:prstGeom>
+          <a:noFill/>
+          <a:ln/>
+        </p:spPr>
+        <p:txBody>
+          <a:bodyPr wrap="square" rtlCol="0" anchor="t"/>
+          <a:lstStyle/>
+          <a:p>
+            <a:pPr marL="285750" indent="-285750">
+              <a:lnSpc>
+                <a:spcPct val="150000"/>
+              </a:lnSpc>
+              <a:buSzPct val="100000"/>
+              <a:buFont typeface="Arial" panose="020B0604020202020204" pitchFamily="34" charset="0"/>
+              <a:buChar char="•"/>
+            </a:pPr>
+            <a:r>
+              <a:rPr lang="en-US" sz="2800" dirty="0">
+                <a:solidFill>
+                  <a:schemeClr val="tx1">
+                    <a:lumMod val="95000"/>
+                    <a:lumOff val="5000"/>
+                  </a:schemeClr>
+                </a:solidFill>
+                <a:latin typeface="DM Sans" pitchFamily="34" charset="0"/>
+                <a:ea typeface="DM Sans" pitchFamily="34" charset="-122"/>
+                <a:cs typeface="DM Sans" pitchFamily="34" charset="-120"/>
+              </a:rPr>
+              <a:t>Health Monitor: polls each remoteEntry.js every 5s, shows latency</a:t>
+            </a:r>
+            <a:endParaRPr lang="en-US" sz="2800" dirty="0">
+              <a:solidFill>
+                <a:schemeClr val="tx1">
+                  <a:lumMod val="95000"/>
+                  <a:lumOff val="5000"/>
+                </a:schemeClr>
+              </a:solidFill>
+            </a:endParaRPr>
+          </a:p>
+          <a:p>
+            <a:pPr marL="285750" indent="-285750">
+              <a:lnSpc>
+                <a:spcPct val="150000"/>
+              </a:lnSpc>
+              <a:buSzPct val="100000"/>
+              <a:buFont typeface="Arial" panose="020B0604020202020204" pitchFamily="34" charset="0"/>
+              <a:buChar char="•"/>
+            </a:pPr>
+            <a:r>
+              <a:rPr lang="en-US" sz="2800" dirty="0">
+                <a:solidFill>
+                  <a:schemeClr val="tx1">
+                    <a:lumMod val="95000"/>
+                    <a:lumOff val="5000"/>
+                  </a:schemeClr>
+                </a:solidFill>
+                <a:latin typeface="DM Sans" pitchFamily="34" charset="0"/>
+                <a:ea typeface="DM Sans" pitchFamily="34" charset="-122"/>
+                <a:cs typeface="DM Sans" pitchFamily="34" charset="-120"/>
+              </a:rPr>
+              <a:t>Kill Switches: simulate remote failure; the rest keeps running</a:t>
+            </a:r>
+            <a:endParaRPr lang="en-US" sz="2800" dirty="0">
+              <a:solidFill>
+                <a:schemeClr val="tx1">
+                  <a:lumMod val="95000"/>
+                  <a:lumOff val="5000"/>
+                </a:schemeClr>
+              </a:solidFill>
+            </a:endParaRPr>
+          </a:p>
+          <a:p>
+            <a:pPr marL="285750" indent="-285750">
+              <a:lnSpc>
+                <a:spcPct val="150000"/>
+              </a:lnSpc>
+              <a:buSzPct val="100000"/>
+              <a:buFont typeface="Arial" panose="020B0604020202020204" pitchFamily="34" charset="0"/>
+              <a:buChar char="•"/>
+            </a:pPr>
+            <a:r>
+              <a:rPr lang="en-US" sz="2800" dirty="0">
+                <a:solidFill>
+                  <a:schemeClr val="tx1">
+                    <a:lumMod val="95000"/>
+                    <a:lumOff val="5000"/>
+                  </a:schemeClr>
+                </a:solidFill>
+                <a:latin typeface="DM Sans" pitchFamily="34" charset="0"/>
+                <a:ea typeface="DM Sans" pitchFamily="34" charset="-122"/>
+                <a:cs typeface="DM Sans" pitchFamily="34" charset="-120"/>
+              </a:rPr>
+              <a:t>A/B Deployment: toggle Stable ↔ Canary ring, per-module versions</a:t>
+            </a:r>
+            <a:endParaRPr lang="en-US" sz="2800" dirty="0">
+              <a:solidFill>
+                <a:schemeClr val="tx1">
+                  <a:lumMod val="95000"/>
+                  <a:lumOff val="5000"/>
+                </a:schemeClr>
+              </a:solidFill>
+            </a:endParaRPr>
+          </a:p>
+          <a:p>
+            <a:pPr marL="285750" indent="-285750">
+              <a:lnSpc>
+                <a:spcPct val="150000"/>
+              </a:lnSpc>
+              <a:buSzPct val="100000"/>
+              <a:buFont typeface="Arial" panose="020B0604020202020204" pitchFamily="34" charset="0"/>
+              <a:buChar char="•"/>
+            </a:pPr>
+            <a:r>
+              <a:rPr lang="en-US" sz="2800" dirty="0">
+                <a:solidFill>
+                  <a:schemeClr val="tx1">
+                    <a:lumMod val="95000"/>
+                    <a:lumOff val="5000"/>
+                  </a:schemeClr>
+                </a:solidFill>
+                <a:latin typeface="DM Sans" pitchFamily="34" charset="0"/>
+                <a:ea typeface="DM Sans" pitchFamily="34" charset="-122"/>
+                <a:cs typeface="DM Sans" pitchFamily="34" charset="-120"/>
+              </a:rPr>
+              <a:t>Theme: CSS variables + localStorage + themeChange event, zero shared imports</a:t>
+            </a:r>
+          </a:p>
+        </p:txBody>
+      </p:sp>
+    </p:spTree>
+    <p:extLst>
+      <p:ext uri="{BB962C8B-B14F-4D97-AF65-F5344CB8AC3E}">
+        <p14:creationId xmlns:p14="http://schemas.microsoft.com/office/powerpoint/2010/main" val="399107473"/>
+      </p:ext>
+    </p:extLst>
+  </p:cSld>
+  <p:clrMapOvr>
+    <a:masterClrMapping/>
+  </p:clrMapOvr>
+</p:sld>
+</file>
+
+<file path=ppt/slides/slide26.xml><?xml version="1.0" encoding="utf-8"?>
+<p:sld xmlns:a="http://schemas.openxmlformats.org/drawingml/2006/main" xmlns:r="http://schemas.openxmlformats.org/officeDocument/2006/relationships" xmlns:p="http://schemas.openxmlformats.org/presentationml/2006/main">
+  <p:cSld>
+    <p:spTree>
+      <p:nvGrpSpPr>
+        <p:cNvPr id="1" name="">
+          <a:extLst>
+            <a:ext uri="{FF2B5EF4-FFF2-40B4-BE49-F238E27FC236}">
+              <a16:creationId xmlns:a16="http://schemas.microsoft.com/office/drawing/2014/main" id="{5BC2434E-A423-B165-16BC-7AF688676ED3}"/>
+            </a:ext>
+          </a:extLst>
+        </p:cNvPr>
+        <p:cNvGrpSpPr/>
+        <p:nvPr/>
+      </p:nvGrpSpPr>
+      <p:grpSpPr>
+        <a:xfrm>
+          <a:off x="0" y="0"/>
+          <a:ext cx="0" cy="0"/>
+          <a:chOff x="0" y="0"/>
+          <a:chExt cx="0" cy="0"/>
+        </a:xfrm>
+      </p:grpSpPr>
+      <p:sp>
+        <p:nvSpPr>
+          <p:cNvPr id="2" name="TextBox 1">
+            <a:extLst>
+              <a:ext uri="{FF2B5EF4-FFF2-40B4-BE49-F238E27FC236}">
+                <a16:creationId xmlns:a16="http://schemas.microsoft.com/office/drawing/2014/main" id="{66374511-5B5D-F7F6-D4DE-965190A47438}"/>
+              </a:ext>
+            </a:extLst>
+          </p:cNvPr>
+          <p:cNvSpPr txBox="1"/>
+          <p:nvPr/>
+        </p:nvSpPr>
+        <p:spPr>
+          <a:xfrm>
+            <a:off x="722376" y="576072"/>
+            <a:ext cx="1436612" cy="707886"/>
+          </a:xfrm>
+          <a:prstGeom prst="rect">
+            <a:avLst/>
+          </a:prstGeom>
+          <a:noFill/>
+        </p:spPr>
+        <p:txBody>
+          <a:bodyPr wrap="none" rtlCol="0">
+            <a:spAutoFit/>
+          </a:bodyPr>
+          <a:lstStyle/>
+          <a:p>
+            <a:r>
+              <a:rPr lang="en-GB" sz="4000" dirty="0"/>
+              <a:t>Demo</a:t>
+            </a:r>
+          </a:p>
+        </p:txBody>
+      </p:sp>
+      <p:sp>
+        <p:nvSpPr>
+          <p:cNvPr id="4" name="TextBox 3">
+            <a:extLst>
+              <a:ext uri="{FF2B5EF4-FFF2-40B4-BE49-F238E27FC236}">
+                <a16:creationId xmlns:a16="http://schemas.microsoft.com/office/drawing/2014/main" id="{34AF8797-4227-8449-C765-143D3A90429D}"/>
+              </a:ext>
+            </a:extLst>
+          </p:cNvPr>
+          <p:cNvSpPr txBox="1"/>
+          <p:nvPr/>
+        </p:nvSpPr>
+        <p:spPr>
+          <a:xfrm>
+            <a:off x="3025055" y="3075057"/>
+            <a:ext cx="6138732" cy="707886"/>
+          </a:xfrm>
+          <a:prstGeom prst="rect">
+            <a:avLst/>
+          </a:prstGeom>
+          <a:noFill/>
+        </p:spPr>
+        <p:txBody>
+          <a:bodyPr wrap="none" rtlCol="0">
+            <a:spAutoFit/>
+          </a:bodyPr>
+          <a:lstStyle/>
+          <a:p>
+            <a:pPr algn="ctr"/>
+            <a:r>
+              <a:rPr lang="en-GB" sz="4000" dirty="0"/>
+              <a:t>Command palette app demo</a:t>
+            </a:r>
+          </a:p>
+        </p:txBody>
+      </p:sp>
+    </p:spTree>
+    <p:extLst>
+      <p:ext uri="{BB962C8B-B14F-4D97-AF65-F5344CB8AC3E}">
+        <p14:creationId xmlns:p14="http://schemas.microsoft.com/office/powerpoint/2010/main" val="318269479"/>
+      </p:ext>
+    </p:extLst>
+  </p:cSld>
+  <p:clrMapOvr>
+    <a:masterClrMapping/>
+  </p:clrMapOvr>
+</p:sld>
+</file>
+
+<file path=ppt/slides/slide27.xml><?xml version="1.0" encoding="utf-8"?>
+<p:sld xmlns:a="http://schemas.openxmlformats.org/drawingml/2006/main" xmlns:r="http://schemas.openxmlformats.org/officeDocument/2006/relationships" xmlns:p="http://schemas.openxmlformats.org/presentationml/2006/main">
+  <p:cSld>
+    <p:spTree>
+      <p:nvGrpSpPr>
+        <p:cNvPr id="1" name=""/>
+        <p:cNvGrpSpPr/>
+        <p:nvPr/>
+      </p:nvGrpSpPr>
+      <p:grpSpPr>
+        <a:xfrm>
+          <a:off x="0" y="0"/>
+          <a:ext cx="0" cy="0"/>
+          <a:chOff x="0" y="0"/>
+          <a:chExt cx="0" cy="0"/>
+        </a:xfrm>
+      </p:grpSpPr>
+      <p:pic>
+        <p:nvPicPr>
+          <p:cNvPr id="3" name="Picture 2">
+            <a:extLst>
+              <a:ext uri="{FF2B5EF4-FFF2-40B4-BE49-F238E27FC236}">
+                <a16:creationId xmlns:a16="http://schemas.microsoft.com/office/drawing/2014/main" id="{3728B204-4642-8AB0-8C60-54C9C48B708A}"/>
+              </a:ext>
+            </a:extLst>
+          </p:cNvPr>
+          <p:cNvPicPr>
+            <a:picLocks noChangeAspect="1"/>
+          </p:cNvPicPr>
+          <p:nvPr/>
+        </p:nvPicPr>
+        <p:blipFill>
+          <a:blip r:embed="rId3"/>
+          <a:stretch>
+            <a:fillRect/>
+          </a:stretch>
+        </p:blipFill>
+        <p:spPr>
+          <a:xfrm>
+            <a:off x="192869" y="0"/>
+            <a:ext cx="11803086" cy="6858000"/>
+          </a:xfrm>
+          <a:prstGeom prst="rect">
+            <a:avLst/>
+          </a:prstGeom>
+        </p:spPr>
+      </p:pic>
+    </p:spTree>
+    <p:extLst>
+      <p:ext uri="{BB962C8B-B14F-4D97-AF65-F5344CB8AC3E}">
+        <p14:creationId xmlns:p14="http://schemas.microsoft.com/office/powerpoint/2010/main" val="4196902174"/>
       </p:ext>
     </p:extLst>
   </p:cSld>
@@ -9002,7 +8354,7 @@
           <p:cNvPr id="3" name="Text 2">
             <a:extLst>
               <a:ext uri="{FF2B5EF4-FFF2-40B4-BE49-F238E27FC236}">
-                <a16:creationId xmlns:a16="http://schemas.microsoft.com/office/drawing/2014/main" id="{EF027E61-C1A6-D975-A2F7-55C2DC49228C}"/>
+                <a16:creationId xmlns:a16="http://schemas.microsoft.com/office/drawing/2014/main" id="{48D92EEC-F99D-6E3A-015E-51DCF972D104}"/>
               </a:ext>
             </a:extLst>
           </p:cNvPr>
@@ -9011,7 +8363,7 @@
         </p:nvSpPr>
         <p:spPr>
           <a:xfrm>
-            <a:off x="566801" y="0"/>
+            <a:off x="530352" y="713232"/>
             <a:ext cx="11109960" cy="777240"/>
           </a:xfrm>
           <a:prstGeom prst="rect">
@@ -9039,7 +8391,7 @@
                 <a:ea typeface="Instrument Serif" pitchFamily="34" charset="-122"/>
                 <a:cs typeface="Instrument Serif" pitchFamily="34" charset="-120"/>
               </a:rPr>
-              <a:t>Seven things to remember</a:t>
+              <a:t>Prefer events over shared state</a:t>
             </a:r>
             <a:endParaRPr lang="en-US" sz="3300" dirty="0">
               <a:solidFill>
@@ -9054,10 +8406,10 @@
       </p:sp>
       <p:sp>
         <p:nvSpPr>
-          <p:cNvPr id="5" name="Text 5">
+          <p:cNvPr id="5" name="Text 6">
             <a:extLst>
               <a:ext uri="{FF2B5EF4-FFF2-40B4-BE49-F238E27FC236}">
-                <a16:creationId xmlns:a16="http://schemas.microsoft.com/office/drawing/2014/main" id="{EFF2B295-89D0-700E-1CD6-1F0E290DD0E1}"/>
+                <a16:creationId xmlns:a16="http://schemas.microsoft.com/office/drawing/2014/main" id="{F96AB674-C4AE-79FF-80B1-8B452266F247}"/>
               </a:ext>
             </a:extLst>
           </p:cNvPr>
@@ -9066,8 +8418,8 @@
         </p:nvSpPr>
         <p:spPr>
           <a:xfrm>
-            <a:off x="566801" y="777240"/>
-            <a:ext cx="11182985" cy="5824728"/>
+            <a:off x="548640" y="2474259"/>
+            <a:ext cx="11064240" cy="3291840"/>
           </a:xfrm>
           <a:prstGeom prst="rect">
             <a:avLst/>
@@ -9099,7 +8451,7 @@
                 <a:ea typeface="DM Sans" pitchFamily="34" charset="-122"/>
                 <a:cs typeface="DM Sans" pitchFamily="34" charset="-120"/>
               </a:rPr>
-              <a:t>Micro-frontends solve a people problem: team scale, not bundle size</a:t>
+              <a:t>No direct cross-module imports</a:t>
             </a:r>
             <a:endParaRPr lang="en-US" sz="2400" dirty="0">
               <a:solidFill>
@@ -9131,7 +8483,7 @@
                 <a:ea typeface="DM Sans" pitchFamily="34" charset="-122"/>
                 <a:cs typeface="DM Sans" pitchFamily="34" charset="-120"/>
               </a:rPr>
-              <a:t>Suspense fallbacks cover load UX. Module Federation covers team DX</a:t>
+              <a:t>Shell stays the only router owner</a:t>
             </a:r>
             <a:endParaRPr lang="en-US" sz="2400" dirty="0">
               <a:solidFill>
@@ -9163,7 +8515,7 @@
                 <a:ea typeface="DM Sans" pitchFamily="34" charset="-122"/>
                 <a:cs typeface="DM Sans" pitchFamily="34" charset="-120"/>
               </a:rPr>
-              <a:t>Prefer events over shared state: CustomEvents survive independent deploys</a:t>
+              <a:t>Works across deployments when the event contract stays compatible</a:t>
             </a:r>
             <a:endParaRPr lang="en-US" sz="2400" dirty="0">
               <a:solidFill>
@@ -9195,7 +8547,7 @@
                 <a:ea typeface="DM Sans" pitchFamily="34" charset="-122"/>
                 <a:cs typeface="DM Sans" pitchFamily="34" charset="-120"/>
               </a:rPr>
-              <a:t>Host owns routing: remotes request navigation, only the shell mutates it</a:t>
+              <a:t>Framework-agnostic (React, Vue, Svelte)</a:t>
             </a:r>
             <a:endParaRPr lang="en-US" sz="2400" dirty="0">
               <a:solidFill>
@@ -9227,7 +8579,7 @@
                 <a:ea typeface="DM Sans" pitchFamily="34" charset="-122"/>
                 <a:cs typeface="DM Sans" pitchFamily="34" charset="-120"/>
               </a:rPr>
-              <a:t>Ship fault isolation on purpose: .catch() + ErrorBoundary per module</a:t>
+              <a:t>Typed via WindowEventMap augmentation</a:t>
             </a:r>
             <a:endParaRPr lang="en-US" sz="2400" dirty="0">
               <a:solidFill>
@@ -9238,90 +8590,12 @@
               </a:solidFill>
             </a:endParaRPr>
           </a:p>
-          <a:p>
-            <a:pPr marL="342900" indent="-342900">
-              <a:lnSpc>
-                <a:spcPct val="150000"/>
-              </a:lnSpc>
-              <a:buSzPct val="100000"/>
-              <a:buFont typeface="Arial" panose="020B0604020202020204" pitchFamily="34" charset="0"/>
-              <a:buChar char="•"/>
-            </a:pPr>
-            <a:r>
-              <a:rPr lang="en-US" sz="2400" dirty="0" err="1">
-                <a:solidFill>
-                  <a:schemeClr val="tx1">
-                    <a:lumMod val="95000"/>
-                    <a:lumOff val="5000"/>
-                  </a:schemeClr>
-                </a:solidFill>
-                <a:latin typeface="DM Sans" pitchFamily="34" charset="0"/>
-                <a:ea typeface="DM Sans" pitchFamily="34" charset="-122"/>
-                <a:cs typeface="DM Sans" pitchFamily="34" charset="-120"/>
-              </a:rPr>
-              <a:t>Rspack</a:t>
-            </a:r>
-            <a:r>
-              <a:rPr lang="en-US" sz="2400" dirty="0">
-                <a:solidFill>
-                  <a:schemeClr val="tx1">
-                    <a:lumMod val="95000"/>
-                    <a:lumOff val="5000"/>
-                  </a:schemeClr>
-                </a:solidFill>
-                <a:latin typeface="DM Sans" pitchFamily="34" charset="0"/>
-                <a:ea typeface="DM Sans" pitchFamily="34" charset="-122"/>
-                <a:cs typeface="DM Sans" pitchFamily="34" charset="-120"/>
-              </a:rPr>
-              <a:t> keeps the monorepo fast: sub-second HMR, Rust React Compiler, cache</a:t>
-            </a:r>
-            <a:endParaRPr lang="en-US" sz="2400" dirty="0">
-              <a:solidFill>
-                <a:schemeClr val="tx1">
-                  <a:lumMod val="95000"/>
-                  <a:lumOff val="5000"/>
-                </a:schemeClr>
-              </a:solidFill>
-            </a:endParaRPr>
-          </a:p>
-          <a:p>
-            <a:pPr marL="342900" indent="-342900">
-              <a:lnSpc>
-                <a:spcPct val="150000"/>
-              </a:lnSpc>
-              <a:buSzPct val="100000"/>
-              <a:buFont typeface="Arial" panose="020B0604020202020204" pitchFamily="34" charset="0"/>
-              <a:buChar char="•"/>
-            </a:pPr>
-            <a:r>
-              <a:rPr lang="en-US" sz="2400" dirty="0">
-                <a:solidFill>
-                  <a:schemeClr val="tx1">
-                    <a:lumMod val="95000"/>
-                    <a:lumOff val="5000"/>
-                  </a:schemeClr>
-                </a:solidFill>
-                <a:latin typeface="DM Sans" pitchFamily="34" charset="0"/>
-                <a:ea typeface="DM Sans" pitchFamily="34" charset="-122"/>
-                <a:cs typeface="DM Sans" pitchFamily="34" charset="-120"/>
-              </a:rPr>
-              <a:t>Match load strategy to content: instant / eager / streamed</a:t>
-            </a:r>
-            <a:endParaRPr lang="en-US" sz="2400" dirty="0">
-              <a:solidFill>
-                <a:schemeClr val="tx1">
-                  <a:lumMod val="95000"/>
-                  <a:lumOff val="5000"/>
-                </a:schemeClr>
-              </a:solidFill>
-            </a:endParaRPr>
-          </a:p>
         </p:txBody>
       </p:sp>
     </p:spTree>
     <p:extLst>
       <p:ext uri="{BB962C8B-B14F-4D97-AF65-F5344CB8AC3E}">
-        <p14:creationId xmlns:p14="http://schemas.microsoft.com/office/powerpoint/2010/main" val="1008954746"/>
+        <p14:creationId xmlns:p14="http://schemas.microsoft.com/office/powerpoint/2010/main" val="2583238171"/>
       </p:ext>
     </p:extLst>
   </p:cSld>
@@ -9348,40 +8622,881 @@
           <a:chExt cx="0" cy="0"/>
         </a:xfrm>
       </p:grpSpPr>
-      <p:pic>
-        <p:nvPicPr>
-          <p:cNvPr id="5" name="Picture 4">
+      <p:graphicFrame>
+        <p:nvGraphicFramePr>
+          <p:cNvPr id="2" name="Table 1">
             <a:extLst>
               <a:ext uri="{FF2B5EF4-FFF2-40B4-BE49-F238E27FC236}">
-                <a16:creationId xmlns:a16="http://schemas.microsoft.com/office/drawing/2014/main" id="{CAC10217-0EAC-9F13-AEFC-6AB11AA41BCD}"/>
+                <a16:creationId xmlns:a16="http://schemas.microsoft.com/office/drawing/2014/main" id="{46D2C31A-9631-8861-A387-D11C77608896}"/>
               </a:ext>
             </a:extLst>
           </p:cNvPr>
-          <p:cNvPicPr>
-            <a:picLocks noChangeAspect="1"/>
-          </p:cNvPicPr>
+          <p:cNvGraphicFramePr>
+            <a:graphicFrameLocks noGrp="1"/>
+          </p:cNvGraphicFramePr>
+          <p:nvPr>
+            <p:extLst>
+              <p:ext uri="{D42A27DB-BD31-4B8C-83A1-F6EECF244321}">
+                <p14:modId xmlns:p14="http://schemas.microsoft.com/office/powerpoint/2010/main" val="780093546"/>
+              </p:ext>
+            </p:extLst>
+          </p:nvPr>
+        </p:nvGraphicFramePr>
+        <p:xfrm>
+          <a:off x="362857" y="1320800"/>
+          <a:ext cx="11654972" cy="5455967"/>
+        </p:xfrm>
+        <a:graphic>
+          <a:graphicData uri="http://schemas.openxmlformats.org/drawingml/2006/table">
+            <a:tbl>
+              <a:tblPr/>
+              <a:tblGrid>
+                <a:gridCol w="3178629">
+                  <a:extLst>
+                    <a:ext uri="{9D8B030D-6E8A-4147-A177-3AD203B41FA5}">
+                      <a16:colId xmlns:a16="http://schemas.microsoft.com/office/drawing/2014/main" val="607345058"/>
+                    </a:ext>
+                  </a:extLst>
+                </a:gridCol>
+                <a:gridCol w="2975428">
+                  <a:extLst>
+                    <a:ext uri="{9D8B030D-6E8A-4147-A177-3AD203B41FA5}">
+                      <a16:colId xmlns:a16="http://schemas.microsoft.com/office/drawing/2014/main" val="2182254365"/>
+                    </a:ext>
+                  </a:extLst>
+                </a:gridCol>
+                <a:gridCol w="5500915">
+                  <a:extLst>
+                    <a:ext uri="{9D8B030D-6E8A-4147-A177-3AD203B41FA5}">
+                      <a16:colId xmlns:a16="http://schemas.microsoft.com/office/drawing/2014/main" val="3397293518"/>
+                    </a:ext>
+                  </a:extLst>
+                </a:gridCol>
+              </a:tblGrid>
+              <a:tr h="416364">
+                <a:tc>
+                  <a:txBody>
+                    <a:bodyPr/>
+                    <a:lstStyle/>
+                    <a:p>
+                      <a:pPr algn="l">
+                        <a:buNone/>
+                      </a:pPr>
+                      <a:r>
+                        <a:rPr lang="en-US" sz="2400" b="0" i="0">
+                          <a:solidFill>
+                            <a:srgbClr val="3B3B3B"/>
+                          </a:solidFill>
+                          <a:effectLst/>
+                          <a:latin typeface="Cascadia Code" panose="020B0609020000020004" pitchFamily="49" charset="0"/>
+                          <a:cs typeface="Cascadia Code" panose="020B0609020000020004" pitchFamily="49" charset="0"/>
+                        </a:rPr>
+                        <a:t>Event</a:t>
+                      </a:r>
+                    </a:p>
+                  </a:txBody>
+                  <a:tcPr marL="76200" marR="76200" marT="38100" marB="38100" anchor="ctr">
+                    <a:lnL>
+                      <a:noFill/>
+                    </a:lnL>
+                    <a:lnR>
+                      <a:noFill/>
+                    </a:lnR>
+                    <a:lnT>
+                      <a:noFill/>
+                    </a:lnT>
+                    <a:lnB>
+                      <a:noFill/>
+                    </a:lnB>
+                    <a:noFill/>
+                  </a:tcPr>
+                </a:tc>
+                <a:tc>
+                  <a:txBody>
+                    <a:bodyPr/>
+                    <a:lstStyle/>
+                    <a:p>
+                      <a:pPr algn="l">
+                        <a:buNone/>
+                      </a:pPr>
+                      <a:r>
+                        <a:rPr lang="en-US" sz="2400" b="0" i="0">
+                          <a:solidFill>
+                            <a:srgbClr val="3B3B3B"/>
+                          </a:solidFill>
+                          <a:effectLst/>
+                          <a:latin typeface="Cascadia Code" panose="020B0609020000020004" pitchFamily="49" charset="0"/>
+                          <a:cs typeface="Cascadia Code" panose="020B0609020000020004" pitchFamily="49" charset="0"/>
+                        </a:rPr>
+                        <a:t>Who broadcasts</a:t>
+                      </a:r>
+                    </a:p>
+                  </a:txBody>
+                  <a:tcPr marL="76200" marR="76200" marT="38100" marB="38100" anchor="ctr">
+                    <a:lnL>
+                      <a:noFill/>
+                    </a:lnL>
+                    <a:lnR>
+                      <a:noFill/>
+                    </a:lnR>
+                    <a:lnT>
+                      <a:noFill/>
+                    </a:lnT>
+                    <a:lnB>
+                      <a:noFill/>
+                    </a:lnB>
+                    <a:noFill/>
+                  </a:tcPr>
+                </a:tc>
+                <a:tc>
+                  <a:txBody>
+                    <a:bodyPr/>
+                    <a:lstStyle/>
+                    <a:p>
+                      <a:pPr algn="l">
+                        <a:buNone/>
+                      </a:pPr>
+                      <a:r>
+                        <a:rPr lang="en-US" sz="2400" b="0" i="0">
+                          <a:solidFill>
+                            <a:srgbClr val="3B3B3B"/>
+                          </a:solidFill>
+                          <a:effectLst/>
+                          <a:latin typeface="Cascadia Code" panose="020B0609020000020004" pitchFamily="49" charset="0"/>
+                          <a:cs typeface="Cascadia Code" panose="020B0609020000020004" pitchFamily="49" charset="0"/>
+                        </a:rPr>
+                        <a:t>Why</a:t>
+                      </a:r>
+                    </a:p>
+                  </a:txBody>
+                  <a:tcPr marL="76200" marR="76200" marT="38100" marB="38100" anchor="ctr">
+                    <a:lnL>
+                      <a:noFill/>
+                    </a:lnL>
+                    <a:lnR>
+                      <a:noFill/>
+                    </a:lnR>
+                    <a:lnT>
+                      <a:noFill/>
+                    </a:lnT>
+                    <a:lnB>
+                      <a:noFill/>
+                    </a:lnB>
+                    <a:noFill/>
+                  </a:tcPr>
+                </a:tc>
+                <a:extLst>
+                  <a:ext uri="{0D108BD9-81ED-4DB2-BD59-A6C34878D82A}">
+                    <a16:rowId xmlns:a16="http://schemas.microsoft.com/office/drawing/2014/main" val="3074802040"/>
+                  </a:ext>
+                </a:extLst>
+              </a:tr>
+              <a:tr h="735957">
+                <a:tc>
+                  <a:txBody>
+                    <a:bodyPr/>
+                    <a:lstStyle/>
+                    <a:p>
+                      <a:pPr algn="l">
+                        <a:buNone/>
+                      </a:pPr>
+                      <a:r>
+                        <a:rPr lang="en-US" sz="2400" b="0" i="0" dirty="0" err="1">
+                          <a:solidFill>
+                            <a:srgbClr val="3B3B3B"/>
+                          </a:solidFill>
+                          <a:effectLst/>
+                          <a:latin typeface="Cascadia Code" panose="020B0609020000020004" pitchFamily="49" charset="0"/>
+                          <a:cs typeface="Cascadia Code" panose="020B0609020000020004" pitchFamily="49" charset="0"/>
+                        </a:rPr>
+                        <a:t>themeChange</a:t>
+                      </a:r>
+                      <a:endParaRPr lang="en-US" sz="2400" b="0" i="0" dirty="0">
+                        <a:solidFill>
+                          <a:srgbClr val="3B3B3B"/>
+                        </a:solidFill>
+                        <a:effectLst/>
+                        <a:latin typeface="Cascadia Code" panose="020B0609020000020004" pitchFamily="49" charset="0"/>
+                        <a:cs typeface="Cascadia Code" panose="020B0609020000020004" pitchFamily="49" charset="0"/>
+                      </a:endParaRPr>
+                    </a:p>
+                  </a:txBody>
+                  <a:tcPr marL="76200" marR="76200" marT="38100" marB="38100" anchor="ctr">
+                    <a:lnL>
+                      <a:noFill/>
+                    </a:lnL>
+                    <a:lnR>
+                      <a:noFill/>
+                    </a:lnR>
+                    <a:lnT>
+                      <a:noFill/>
+                    </a:lnT>
+                    <a:lnB>
+                      <a:noFill/>
+                    </a:lnB>
+                    <a:noFill/>
+                  </a:tcPr>
+                </a:tc>
+                <a:tc>
+                  <a:txBody>
+                    <a:bodyPr/>
+                    <a:lstStyle/>
+                    <a:p>
+                      <a:pPr algn="l">
+                        <a:buNone/>
+                      </a:pPr>
+                      <a:r>
+                        <a:rPr lang="en-US" sz="2400" b="1" i="0">
+                          <a:solidFill>
+                            <a:srgbClr val="3B3B3B"/>
+                          </a:solidFill>
+                          <a:effectLst/>
+                          <a:latin typeface="Cascadia Code" panose="020B0609020000020004" pitchFamily="49" charset="0"/>
+                          <a:cs typeface="Cascadia Code" panose="020B0609020000020004" pitchFamily="49" charset="0"/>
+                        </a:rPr>
+                        <a:t>shell only</a:t>
+                      </a:r>
+                      <a:endParaRPr lang="en-US" sz="2400" b="0" i="0">
+                        <a:solidFill>
+                          <a:srgbClr val="3B3B3B"/>
+                        </a:solidFill>
+                        <a:effectLst/>
+                        <a:latin typeface="Cascadia Code" panose="020B0609020000020004" pitchFamily="49" charset="0"/>
+                        <a:cs typeface="Cascadia Code" panose="020B0609020000020004" pitchFamily="49" charset="0"/>
+                      </a:endParaRPr>
+                    </a:p>
+                  </a:txBody>
+                  <a:tcPr marL="76200" marR="76200" marT="38100" marB="38100" anchor="ctr">
+                    <a:lnL>
+                      <a:noFill/>
+                    </a:lnL>
+                    <a:lnR>
+                      <a:noFill/>
+                    </a:lnR>
+                    <a:lnT>
+                      <a:noFill/>
+                    </a:lnT>
+                    <a:lnB>
+                      <a:noFill/>
+                    </a:lnB>
+                    <a:noFill/>
+                  </a:tcPr>
+                </a:tc>
+                <a:tc>
+                  <a:txBody>
+                    <a:bodyPr/>
+                    <a:lstStyle/>
+                    <a:p>
+                      <a:pPr algn="l">
+                        <a:buNone/>
+                      </a:pPr>
+                      <a:r>
+                        <a:rPr lang="en-US" sz="2400" b="0" i="0">
+                          <a:solidFill>
+                            <a:srgbClr val="3B3B3B"/>
+                          </a:solidFill>
+                          <a:effectLst/>
+                          <a:latin typeface="Cascadia Code" panose="020B0609020000020004" pitchFamily="49" charset="0"/>
+                          <a:cs typeface="Cascadia Code" panose="020B0609020000020004" pitchFamily="49" charset="0"/>
+                        </a:rPr>
+                        <a:t>The shell owns the theme</a:t>
+                      </a:r>
+                    </a:p>
+                  </a:txBody>
+                  <a:tcPr marL="76200" marR="76200" marT="38100" marB="38100" anchor="ctr">
+                    <a:lnL>
+                      <a:noFill/>
+                    </a:lnL>
+                    <a:lnR>
+                      <a:noFill/>
+                    </a:lnR>
+                    <a:lnT>
+                      <a:noFill/>
+                    </a:lnT>
+                    <a:lnB>
+                      <a:noFill/>
+                    </a:lnB>
+                    <a:noFill/>
+                  </a:tcPr>
+                </a:tc>
+                <a:extLst>
+                  <a:ext uri="{0D108BD9-81ED-4DB2-BD59-A6C34878D82A}">
+                    <a16:rowId xmlns:a16="http://schemas.microsoft.com/office/drawing/2014/main" val="240654752"/>
+                  </a:ext>
+                </a:extLst>
+              </a:tr>
+              <a:tr h="735957">
+                <a:tc>
+                  <a:txBody>
+                    <a:bodyPr/>
+                    <a:lstStyle/>
+                    <a:p>
+                      <a:pPr algn="l">
+                        <a:buNone/>
+                      </a:pPr>
+                      <a:r>
+                        <a:rPr lang="en-US" sz="2400" b="0" i="0">
+                          <a:solidFill>
+                            <a:srgbClr val="3B3B3B"/>
+                          </a:solidFill>
+                          <a:effectLst/>
+                          <a:latin typeface="Cascadia Code" panose="020B0609020000020004" pitchFamily="49" charset="0"/>
+                          <a:cs typeface="Cascadia Code" panose="020B0609020000020004" pitchFamily="49" charset="0"/>
+                        </a:rPr>
+                        <a:t>moduleChange</a:t>
+                      </a:r>
+                    </a:p>
+                  </a:txBody>
+                  <a:tcPr marL="76200" marR="76200" marT="38100" marB="38100" anchor="ctr">
+                    <a:lnL>
+                      <a:noFill/>
+                    </a:lnL>
+                    <a:lnR>
+                      <a:noFill/>
+                    </a:lnR>
+                    <a:lnT>
+                      <a:noFill/>
+                    </a:lnT>
+                    <a:lnB>
+                      <a:noFill/>
+                    </a:lnB>
+                    <a:noFill/>
+                  </a:tcPr>
+                </a:tc>
+                <a:tc>
+                  <a:txBody>
+                    <a:bodyPr/>
+                    <a:lstStyle/>
+                    <a:p>
+                      <a:pPr algn="l">
+                        <a:buNone/>
+                      </a:pPr>
+                      <a:r>
+                        <a:rPr lang="en-US" sz="2400" b="1" i="0">
+                          <a:solidFill>
+                            <a:srgbClr val="3B3B3B"/>
+                          </a:solidFill>
+                          <a:effectLst/>
+                          <a:latin typeface="Cascadia Code" panose="020B0609020000020004" pitchFamily="49" charset="0"/>
+                          <a:cs typeface="Cascadia Code" panose="020B0609020000020004" pitchFamily="49" charset="0"/>
+                        </a:rPr>
+                        <a:t>shell only</a:t>
+                      </a:r>
+                      <a:endParaRPr lang="en-US" sz="2400" b="0" i="0">
+                        <a:solidFill>
+                          <a:srgbClr val="3B3B3B"/>
+                        </a:solidFill>
+                        <a:effectLst/>
+                        <a:latin typeface="Cascadia Code" panose="020B0609020000020004" pitchFamily="49" charset="0"/>
+                        <a:cs typeface="Cascadia Code" panose="020B0609020000020004" pitchFamily="49" charset="0"/>
+                      </a:endParaRPr>
+                    </a:p>
+                  </a:txBody>
+                  <a:tcPr marL="76200" marR="76200" marT="38100" marB="38100" anchor="ctr">
+                    <a:lnL>
+                      <a:noFill/>
+                    </a:lnL>
+                    <a:lnR>
+                      <a:noFill/>
+                    </a:lnR>
+                    <a:lnT>
+                      <a:noFill/>
+                    </a:lnT>
+                    <a:lnB>
+                      <a:noFill/>
+                    </a:lnB>
+                    <a:noFill/>
+                  </a:tcPr>
+                </a:tc>
+                <a:tc>
+                  <a:txBody>
+                    <a:bodyPr/>
+                    <a:lstStyle/>
+                    <a:p>
+                      <a:pPr algn="l">
+                        <a:buNone/>
+                      </a:pPr>
+                      <a:r>
+                        <a:rPr lang="en-US" sz="2400" b="0" i="0">
+                          <a:solidFill>
+                            <a:srgbClr val="3B3B3B"/>
+                          </a:solidFill>
+                          <a:effectLst/>
+                          <a:latin typeface="Cascadia Code" panose="020B0609020000020004" pitchFamily="49" charset="0"/>
+                          <a:cs typeface="Cascadia Code" panose="020B0609020000020004" pitchFamily="49" charset="0"/>
+                        </a:rPr>
+                        <a:t>The shell owns the router</a:t>
+                      </a:r>
+                    </a:p>
+                  </a:txBody>
+                  <a:tcPr marL="76200" marR="76200" marT="38100" marB="38100" anchor="ctr">
+                    <a:lnL>
+                      <a:noFill/>
+                    </a:lnL>
+                    <a:lnR>
+                      <a:noFill/>
+                    </a:lnR>
+                    <a:lnT>
+                      <a:noFill/>
+                    </a:lnT>
+                    <a:lnB>
+                      <a:noFill/>
+                    </a:lnB>
+                    <a:noFill/>
+                  </a:tcPr>
+                </a:tc>
+                <a:extLst>
+                  <a:ext uri="{0D108BD9-81ED-4DB2-BD59-A6C34878D82A}">
+                    <a16:rowId xmlns:a16="http://schemas.microsoft.com/office/drawing/2014/main" val="1750626137"/>
+                  </a:ext>
+                </a:extLst>
+              </a:tr>
+              <a:tr h="1069222">
+                <a:tc>
+                  <a:txBody>
+                    <a:bodyPr/>
+                    <a:lstStyle/>
+                    <a:p>
+                      <a:pPr algn="l">
+                        <a:buNone/>
+                      </a:pPr>
+                      <a:r>
+                        <a:rPr lang="en-US" sz="2400" b="0" i="0" dirty="0" err="1">
+                          <a:solidFill>
+                            <a:srgbClr val="3B3B3B"/>
+                          </a:solidFill>
+                          <a:effectLst/>
+                          <a:latin typeface="Cascadia Code" panose="020B0609020000020004" pitchFamily="49" charset="0"/>
+                          <a:cs typeface="Cascadia Code" panose="020B0609020000020004" pitchFamily="49" charset="0"/>
+                        </a:rPr>
+                        <a:t>addPrescription</a:t>
+                      </a:r>
+                      <a:endParaRPr lang="en-US" sz="2400" b="0" i="0" dirty="0">
+                        <a:solidFill>
+                          <a:srgbClr val="3B3B3B"/>
+                        </a:solidFill>
+                        <a:effectLst/>
+                        <a:latin typeface="Cascadia Code" panose="020B0609020000020004" pitchFamily="49" charset="0"/>
+                        <a:cs typeface="Cascadia Code" panose="020B0609020000020004" pitchFamily="49" charset="0"/>
+                      </a:endParaRPr>
+                    </a:p>
+                  </a:txBody>
+                  <a:tcPr marL="76200" marR="76200" marT="38100" marB="38100" anchor="ctr">
+                    <a:lnL>
+                      <a:noFill/>
+                    </a:lnL>
+                    <a:lnR>
+                      <a:noFill/>
+                    </a:lnR>
+                    <a:lnT>
+                      <a:noFill/>
+                    </a:lnT>
+                    <a:lnB>
+                      <a:noFill/>
+                    </a:lnB>
+                    <a:noFill/>
+                  </a:tcPr>
+                </a:tc>
+                <a:tc>
+                  <a:txBody>
+                    <a:bodyPr/>
+                    <a:lstStyle/>
+                    <a:p>
+                      <a:pPr algn="l">
+                        <a:buNone/>
+                      </a:pPr>
+                      <a:r>
+                        <a:rPr lang="en-US" sz="2400" b="1" i="0" dirty="0">
+                          <a:solidFill>
+                            <a:srgbClr val="3B3B3B"/>
+                          </a:solidFill>
+                          <a:effectLst/>
+                          <a:latin typeface="Cascadia Code" panose="020B0609020000020004" pitchFamily="49" charset="0"/>
+                          <a:cs typeface="Cascadia Code" panose="020B0609020000020004" pitchFamily="49" charset="0"/>
+                        </a:rPr>
+                        <a:t>records</a:t>
+                      </a:r>
+                      <a:endParaRPr lang="en-US" sz="2400" b="0" i="0" dirty="0">
+                        <a:solidFill>
+                          <a:srgbClr val="3B3B3B"/>
+                        </a:solidFill>
+                        <a:effectLst/>
+                        <a:latin typeface="Cascadia Code" panose="020B0609020000020004" pitchFamily="49" charset="0"/>
+                        <a:cs typeface="Cascadia Code" panose="020B0609020000020004" pitchFamily="49" charset="0"/>
+                      </a:endParaRPr>
+                    </a:p>
+                  </a:txBody>
+                  <a:tcPr marL="76200" marR="76200" marT="38100" marB="38100" anchor="ctr">
+                    <a:lnL>
+                      <a:noFill/>
+                    </a:lnL>
+                    <a:lnR>
+                      <a:noFill/>
+                    </a:lnR>
+                    <a:lnT>
+                      <a:noFill/>
+                    </a:lnT>
+                    <a:lnB>
+                      <a:noFill/>
+                    </a:lnB>
+                    <a:noFill/>
+                  </a:tcPr>
+                </a:tc>
+                <a:tc>
+                  <a:txBody>
+                    <a:bodyPr/>
+                    <a:lstStyle/>
+                    <a:p>
+                      <a:pPr algn="l">
+                        <a:buNone/>
+                      </a:pPr>
+                      <a:r>
+                        <a:rPr lang="en-US" sz="2400" b="0" i="0">
+                          <a:solidFill>
+                            <a:srgbClr val="3B3B3B"/>
+                          </a:solidFill>
+                          <a:effectLst/>
+                          <a:latin typeface="Cascadia Code" panose="020B0609020000020004" pitchFamily="49" charset="0"/>
+                          <a:cs typeface="Cascadia Code" panose="020B0609020000020004" pitchFamily="49" charset="0"/>
+                        </a:rPr>
+                        <a:t>Records owns "a prescription was requested"</a:t>
+                      </a:r>
+                    </a:p>
+                  </a:txBody>
+                  <a:tcPr marL="76200" marR="76200" marT="38100" marB="38100" anchor="ctr">
+                    <a:lnL>
+                      <a:noFill/>
+                    </a:lnL>
+                    <a:lnR>
+                      <a:noFill/>
+                    </a:lnR>
+                    <a:lnT>
+                      <a:noFill/>
+                    </a:lnT>
+                    <a:lnB>
+                      <a:noFill/>
+                    </a:lnB>
+                    <a:noFill/>
+                  </a:tcPr>
+                </a:tc>
+                <a:extLst>
+                  <a:ext uri="{0D108BD9-81ED-4DB2-BD59-A6C34878D82A}">
+                    <a16:rowId xmlns:a16="http://schemas.microsoft.com/office/drawing/2014/main" val="1485486134"/>
+                  </a:ext>
+                </a:extLst>
+              </a:tr>
+              <a:tr h="1402485">
+                <a:tc>
+                  <a:txBody>
+                    <a:bodyPr/>
+                    <a:lstStyle/>
+                    <a:p>
+                      <a:pPr algn="l">
+                        <a:buNone/>
+                      </a:pPr>
+                      <a:r>
+                        <a:rPr lang="en-US" sz="2400" b="0" i="0" dirty="0" err="1">
+                          <a:solidFill>
+                            <a:srgbClr val="3B3B3B"/>
+                          </a:solidFill>
+                          <a:effectLst/>
+                          <a:latin typeface="Cascadia Code" panose="020B0609020000020004" pitchFamily="49" charset="0"/>
+                          <a:cs typeface="Cascadia Code" panose="020B0609020000020004" pitchFamily="49" charset="0"/>
+                        </a:rPr>
+                        <a:t>showNotification</a:t>
+                      </a:r>
+                      <a:endParaRPr lang="en-US" sz="2400" b="0" i="0" dirty="0">
+                        <a:solidFill>
+                          <a:srgbClr val="3B3B3B"/>
+                        </a:solidFill>
+                        <a:effectLst/>
+                        <a:latin typeface="Cascadia Code" panose="020B0609020000020004" pitchFamily="49" charset="0"/>
+                        <a:cs typeface="Cascadia Code" panose="020B0609020000020004" pitchFamily="49" charset="0"/>
+                      </a:endParaRPr>
+                    </a:p>
+                  </a:txBody>
+                  <a:tcPr marL="76200" marR="76200" marT="38100" marB="38100" anchor="ctr">
+                    <a:lnL>
+                      <a:noFill/>
+                    </a:lnL>
+                    <a:lnR>
+                      <a:noFill/>
+                    </a:lnR>
+                    <a:lnT>
+                      <a:noFill/>
+                    </a:lnT>
+                    <a:lnB>
+                      <a:noFill/>
+                    </a:lnB>
+                    <a:noFill/>
+                  </a:tcPr>
+                </a:tc>
+                <a:tc>
+                  <a:txBody>
+                    <a:bodyPr/>
+                    <a:lstStyle/>
+                    <a:p>
+                      <a:pPr algn="l">
+                        <a:buNone/>
+                      </a:pPr>
+                      <a:r>
+                        <a:rPr lang="en-US" sz="2400" b="1" i="0">
+                          <a:solidFill>
+                            <a:srgbClr val="3B3B3B"/>
+                          </a:solidFill>
+                          <a:effectLst/>
+                          <a:latin typeface="Cascadia Code" panose="020B0609020000020004" pitchFamily="49" charset="0"/>
+                          <a:cs typeface="Cascadia Code" panose="020B0609020000020004" pitchFamily="49" charset="0"/>
+                        </a:rPr>
+                        <a:t>any module</a:t>
+                      </a:r>
+                      <a:endParaRPr lang="en-US" sz="2400" b="0" i="0">
+                        <a:solidFill>
+                          <a:srgbClr val="3B3B3B"/>
+                        </a:solidFill>
+                        <a:effectLst/>
+                        <a:latin typeface="Cascadia Code" panose="020B0609020000020004" pitchFamily="49" charset="0"/>
+                        <a:cs typeface="Cascadia Code" panose="020B0609020000020004" pitchFamily="49" charset="0"/>
+                      </a:endParaRPr>
+                    </a:p>
+                  </a:txBody>
+                  <a:tcPr marL="76200" marR="76200" marT="38100" marB="38100" anchor="ctr">
+                    <a:lnL>
+                      <a:noFill/>
+                    </a:lnL>
+                    <a:lnR>
+                      <a:noFill/>
+                    </a:lnR>
+                    <a:lnT>
+                      <a:noFill/>
+                    </a:lnT>
+                    <a:lnB>
+                      <a:noFill/>
+                    </a:lnB>
+                    <a:noFill/>
+                  </a:tcPr>
+                </a:tc>
+                <a:tc>
+                  <a:txBody>
+                    <a:bodyPr/>
+                    <a:lstStyle/>
+                    <a:p>
+                      <a:pPr algn="l">
+                        <a:buNone/>
+                      </a:pPr>
+                      <a:r>
+                        <a:rPr lang="en-US" sz="2400" b="0" i="0">
+                          <a:solidFill>
+                            <a:srgbClr val="3B3B3B"/>
+                          </a:solidFill>
+                          <a:effectLst/>
+                          <a:latin typeface="Cascadia Code" panose="020B0609020000020004" pitchFamily="49" charset="0"/>
+                          <a:cs typeface="Cascadia Code" panose="020B0609020000020004" pitchFamily="49" charset="0"/>
+                        </a:rPr>
+                        <a:t>Anyone can have something to say; the shell owns the &lt;Toaster /&gt;</a:t>
+                      </a:r>
+                    </a:p>
+                  </a:txBody>
+                  <a:tcPr marL="76200" marR="76200" marT="38100" marB="38100" anchor="ctr">
+                    <a:lnL>
+                      <a:noFill/>
+                    </a:lnL>
+                    <a:lnR>
+                      <a:noFill/>
+                    </a:lnR>
+                    <a:lnT>
+                      <a:noFill/>
+                    </a:lnT>
+                    <a:lnB>
+                      <a:noFill/>
+                    </a:lnB>
+                    <a:noFill/>
+                  </a:tcPr>
+                </a:tc>
+                <a:extLst>
+                  <a:ext uri="{0D108BD9-81ED-4DB2-BD59-A6C34878D82A}">
+                    <a16:rowId xmlns:a16="http://schemas.microsoft.com/office/drawing/2014/main" val="3065737248"/>
+                  </a:ext>
+                </a:extLst>
+              </a:tr>
+              <a:tr h="1070386">
+                <a:tc>
+                  <a:txBody>
+                    <a:bodyPr/>
+                    <a:lstStyle/>
+                    <a:p>
+                      <a:pPr algn="l">
+                        <a:buNone/>
+                      </a:pPr>
+                      <a:r>
+                        <a:rPr lang="en-US" sz="2400" b="0" i="0" dirty="0" err="1">
+                          <a:solidFill>
+                            <a:srgbClr val="3B3B3B"/>
+                          </a:solidFill>
+                          <a:effectLst/>
+                          <a:latin typeface="Cascadia Code" panose="020B0609020000020004" pitchFamily="49" charset="0"/>
+                          <a:cs typeface="Cascadia Code" panose="020B0609020000020004" pitchFamily="49" charset="0"/>
+                        </a:rPr>
+                        <a:t>counterChange</a:t>
+                      </a:r>
+                      <a:endParaRPr lang="en-US" sz="2400" b="0" i="0" dirty="0">
+                        <a:solidFill>
+                          <a:srgbClr val="3B3B3B"/>
+                        </a:solidFill>
+                        <a:effectLst/>
+                        <a:latin typeface="Cascadia Code" panose="020B0609020000020004" pitchFamily="49" charset="0"/>
+                        <a:cs typeface="Cascadia Code" panose="020B0609020000020004" pitchFamily="49" charset="0"/>
+                      </a:endParaRPr>
+                    </a:p>
+                  </a:txBody>
+                  <a:tcPr marL="76200" marR="76200" marT="38100" marB="38100" anchor="ctr">
+                    <a:lnL>
+                      <a:noFill/>
+                    </a:lnL>
+                    <a:lnR>
+                      <a:noFill/>
+                    </a:lnR>
+                    <a:lnT>
+                      <a:noFill/>
+                    </a:lnT>
+                    <a:lnB>
+                      <a:noFill/>
+                    </a:lnB>
+                    <a:noFill/>
+                  </a:tcPr>
+                </a:tc>
+                <a:tc>
+                  <a:txBody>
+                    <a:bodyPr/>
+                    <a:lstStyle/>
+                    <a:p>
+                      <a:pPr algn="l">
+                        <a:buNone/>
+                      </a:pPr>
+                      <a:r>
+                        <a:rPr lang="en-US" sz="2400" b="1" i="0">
+                          <a:solidFill>
+                            <a:srgbClr val="3B3B3B"/>
+                          </a:solidFill>
+                          <a:effectLst/>
+                          <a:latin typeface="Cascadia Code" panose="020B0609020000020004" pitchFamily="49" charset="0"/>
+                          <a:cs typeface="Cascadia Code" panose="020B0609020000020004" pitchFamily="49" charset="0"/>
+                        </a:rPr>
+                        <a:t>any module</a:t>
+                      </a:r>
+                      <a:endParaRPr lang="en-US" sz="2400" b="0" i="0">
+                        <a:solidFill>
+                          <a:srgbClr val="3B3B3B"/>
+                        </a:solidFill>
+                        <a:effectLst/>
+                        <a:latin typeface="Cascadia Code" panose="020B0609020000020004" pitchFamily="49" charset="0"/>
+                        <a:cs typeface="Cascadia Code" panose="020B0609020000020004" pitchFamily="49" charset="0"/>
+                      </a:endParaRPr>
+                    </a:p>
+                  </a:txBody>
+                  <a:tcPr marL="76200" marR="76200" marT="38100" marB="38100" anchor="ctr">
+                    <a:lnL>
+                      <a:noFill/>
+                    </a:lnL>
+                    <a:lnR>
+                      <a:noFill/>
+                    </a:lnR>
+                    <a:lnT>
+                      <a:noFill/>
+                    </a:lnT>
+                    <a:lnB>
+                      <a:noFill/>
+                    </a:lnB>
+                    <a:noFill/>
+                  </a:tcPr>
+                </a:tc>
+                <a:tc>
+                  <a:txBody>
+                    <a:bodyPr/>
+                    <a:lstStyle/>
+                    <a:p>
+                      <a:pPr algn="l">
+                        <a:buNone/>
+                      </a:pPr>
+                      <a:r>
+                        <a:rPr lang="en-US" sz="2400" b="0" i="0" dirty="0">
+                          <a:solidFill>
+                            <a:srgbClr val="3B3B3B"/>
+                          </a:solidFill>
+                          <a:effectLst/>
+                          <a:latin typeface="Cascadia Code" panose="020B0609020000020004" pitchFamily="49" charset="0"/>
+                          <a:cs typeface="Cascadia Code" panose="020B0609020000020004" pitchFamily="49" charset="0"/>
+                        </a:rPr>
+                        <a:t>Nobody owns the counter — it's genuinely peer state</a:t>
+                      </a:r>
+                    </a:p>
+                  </a:txBody>
+                  <a:tcPr marL="76200" marR="76200" marT="38100" marB="38100" anchor="ctr">
+                    <a:lnL>
+                      <a:noFill/>
+                    </a:lnL>
+                    <a:lnR>
+                      <a:noFill/>
+                    </a:lnR>
+                    <a:lnT>
+                      <a:noFill/>
+                    </a:lnT>
+                    <a:lnB>
+                      <a:noFill/>
+                    </a:lnB>
+                    <a:noFill/>
+                  </a:tcPr>
+                </a:tc>
+                <a:extLst>
+                  <a:ext uri="{0D108BD9-81ED-4DB2-BD59-A6C34878D82A}">
+                    <a16:rowId xmlns:a16="http://schemas.microsoft.com/office/drawing/2014/main" val="1091983602"/>
+                  </a:ext>
+                </a:extLst>
+              </a:tr>
+            </a:tbl>
+          </a:graphicData>
+        </a:graphic>
+      </p:graphicFrame>
+      <p:sp>
+        <p:nvSpPr>
+          <p:cNvPr id="4" name="TextBox 3">
+            <a:extLst>
+              <a:ext uri="{FF2B5EF4-FFF2-40B4-BE49-F238E27FC236}">
+                <a16:creationId xmlns:a16="http://schemas.microsoft.com/office/drawing/2014/main" id="{FCBFEC0A-AD33-0E5A-BF45-ABD21D98423F}"/>
+              </a:ext>
+            </a:extLst>
+          </p:cNvPr>
+          <p:cNvSpPr txBox="1"/>
           <p:nvPr/>
-        </p:nvPicPr>
-        <p:blipFill>
-          <a:blip r:embed="rId3"/>
-          <a:stretch>
-            <a:fillRect/>
-          </a:stretch>
-        </p:blipFill>
+        </p:nvSpPr>
         <p:spPr>
           <a:xfrm>
-            <a:off x="1" y="138017"/>
-            <a:ext cx="12188475" cy="6719090"/>
+            <a:off x="362857" y="231614"/>
+            <a:ext cx="11161486" cy="646331"/>
           </a:xfrm>
           <a:prstGeom prst="rect">
             <a:avLst/>
           </a:prstGeom>
+          <a:noFill/>
         </p:spPr>
-      </p:pic>
+        <p:txBody>
+          <a:bodyPr wrap="square">
+            <a:spAutoFit/>
+          </a:bodyPr>
+          <a:lstStyle/>
+          <a:p>
+            <a:r>
+              <a:rPr lang="en-US" sz="3600" i="1" dirty="0"/>
+              <a:t>The ownership rule </a:t>
+            </a:r>
+            <a:endParaRPr lang="en-GB" sz="4800" i="1" dirty="0"/>
+          </a:p>
+        </p:txBody>
+      </p:sp>
     </p:spTree>
     <p:extLst>
       <p:ext uri="{BB962C8B-B14F-4D97-AF65-F5344CB8AC3E}">
-        <p14:creationId xmlns:p14="http://schemas.microsoft.com/office/powerpoint/2010/main" val="3470241132"/>
+        <p14:creationId xmlns:p14="http://schemas.microsoft.com/office/powerpoint/2010/main" val="3174723160"/>
       </p:ext>
     </p:extLst>
   </p:cSld>
@@ -9482,6 +9597,1060 @@
 </file>
 
 <file path=ppt/slides/slide30.xml><?xml version="1.0" encoding="utf-8"?>
+<p:sld xmlns:a="http://schemas.openxmlformats.org/drawingml/2006/main" xmlns:r="http://schemas.openxmlformats.org/officeDocument/2006/relationships" xmlns:p="http://schemas.openxmlformats.org/presentationml/2006/main">
+  <p:cSld>
+    <p:spTree>
+      <p:nvGrpSpPr>
+        <p:cNvPr id="1" name="">
+          <a:extLst>
+            <a:ext uri="{FF2B5EF4-FFF2-40B4-BE49-F238E27FC236}">
+              <a16:creationId xmlns:a16="http://schemas.microsoft.com/office/drawing/2014/main" id="{8574E5C8-F845-6867-3F24-0A4D18D440C8}"/>
+            </a:ext>
+          </a:extLst>
+        </p:cNvPr>
+        <p:cNvGrpSpPr/>
+        <p:nvPr/>
+      </p:nvGrpSpPr>
+      <p:grpSpPr>
+        <a:xfrm>
+          <a:off x="0" y="0"/>
+          <a:ext cx="0" cy="0"/>
+          <a:chOff x="0" y="0"/>
+          <a:chExt cx="0" cy="0"/>
+        </a:xfrm>
+      </p:grpSpPr>
+      <p:sp>
+        <p:nvSpPr>
+          <p:cNvPr id="2" name="TextBox 1">
+            <a:extLst>
+              <a:ext uri="{FF2B5EF4-FFF2-40B4-BE49-F238E27FC236}">
+                <a16:creationId xmlns:a16="http://schemas.microsoft.com/office/drawing/2014/main" id="{5251E657-3A4F-F643-B5FE-F848932BB249}"/>
+              </a:ext>
+            </a:extLst>
+          </p:cNvPr>
+          <p:cNvSpPr txBox="1"/>
+          <p:nvPr/>
+        </p:nvSpPr>
+        <p:spPr>
+          <a:xfrm>
+            <a:off x="722376" y="576072"/>
+            <a:ext cx="1436612" cy="707886"/>
+          </a:xfrm>
+          <a:prstGeom prst="rect">
+            <a:avLst/>
+          </a:prstGeom>
+          <a:noFill/>
+        </p:spPr>
+        <p:txBody>
+          <a:bodyPr wrap="none" rtlCol="0">
+            <a:spAutoFit/>
+          </a:bodyPr>
+          <a:lstStyle/>
+          <a:p>
+            <a:r>
+              <a:rPr lang="en-GB" sz="4000" dirty="0"/>
+              <a:t>Demo</a:t>
+            </a:r>
+          </a:p>
+        </p:txBody>
+      </p:sp>
+      <p:sp>
+        <p:nvSpPr>
+          <p:cNvPr id="4" name="TextBox 3">
+            <a:extLst>
+              <a:ext uri="{FF2B5EF4-FFF2-40B4-BE49-F238E27FC236}">
+                <a16:creationId xmlns:a16="http://schemas.microsoft.com/office/drawing/2014/main" id="{303C690B-5769-EFCF-21B9-2F10CBECB5E3}"/>
+              </a:ext>
+            </a:extLst>
+          </p:cNvPr>
+          <p:cNvSpPr txBox="1"/>
+          <p:nvPr/>
+        </p:nvSpPr>
+        <p:spPr>
+          <a:xfrm>
+            <a:off x="2678228" y="3075057"/>
+            <a:ext cx="6832384" cy="707886"/>
+          </a:xfrm>
+          <a:prstGeom prst="rect">
+            <a:avLst/>
+          </a:prstGeom>
+          <a:noFill/>
+        </p:spPr>
+        <p:txBody>
+          <a:bodyPr wrap="none" rtlCol="0">
+            <a:spAutoFit/>
+          </a:bodyPr>
+          <a:lstStyle/>
+          <a:p>
+            <a:pPr algn="ctr"/>
+            <a:r>
+              <a:rPr lang="en-GB" sz="4000" dirty="0"/>
+              <a:t>Counter value in different pages</a:t>
+            </a:r>
+          </a:p>
+        </p:txBody>
+      </p:sp>
+    </p:spTree>
+    <p:extLst>
+      <p:ext uri="{BB962C8B-B14F-4D97-AF65-F5344CB8AC3E}">
+        <p14:creationId xmlns:p14="http://schemas.microsoft.com/office/powerpoint/2010/main" val="212310172"/>
+      </p:ext>
+    </p:extLst>
+  </p:cSld>
+  <p:clrMapOvr>
+    <a:masterClrMapping/>
+  </p:clrMapOvr>
+</p:sld>
+</file>
+
+<file path=ppt/slides/slide31.xml><?xml version="1.0" encoding="utf-8"?>
+<p:sld xmlns:a="http://schemas.openxmlformats.org/drawingml/2006/main" xmlns:r="http://schemas.openxmlformats.org/officeDocument/2006/relationships" xmlns:p="http://schemas.openxmlformats.org/presentationml/2006/main">
+  <p:cSld>
+    <p:spTree>
+      <p:nvGrpSpPr>
+        <p:cNvPr id="1" name=""/>
+        <p:cNvGrpSpPr/>
+        <p:nvPr/>
+      </p:nvGrpSpPr>
+      <p:grpSpPr>
+        <a:xfrm>
+          <a:off x="0" y="0"/>
+          <a:ext cx="0" cy="0"/>
+          <a:chOff x="0" y="0"/>
+          <a:chExt cx="0" cy="0"/>
+        </a:xfrm>
+      </p:grpSpPr>
+      <p:sp>
+        <p:nvSpPr>
+          <p:cNvPr id="3" name="Text 2">
+            <a:extLst>
+              <a:ext uri="{FF2B5EF4-FFF2-40B4-BE49-F238E27FC236}">
+                <a16:creationId xmlns:a16="http://schemas.microsoft.com/office/drawing/2014/main" id="{177067D6-BE87-AD69-1C20-9125336CF2E5}"/>
+              </a:ext>
+            </a:extLst>
+          </p:cNvPr>
+          <p:cNvSpPr/>
+          <p:nvPr/>
+        </p:nvSpPr>
+        <p:spPr>
+          <a:xfrm>
+            <a:off x="530352" y="0"/>
+            <a:ext cx="11109960" cy="777240"/>
+          </a:xfrm>
+          <a:prstGeom prst="rect">
+            <a:avLst/>
+          </a:prstGeom>
+          <a:noFill/>
+          <a:ln/>
+        </p:spPr>
+        <p:txBody>
+          <a:bodyPr wrap="square" rtlCol="0" anchor="ctr"/>
+          <a:lstStyle/>
+          <a:p>
+            <a:pPr marL="0" indent="0">
+              <a:buNone/>
+            </a:pPr>
+            <a:r>
+              <a:rPr lang="en-US" sz="3300" i="1" dirty="0">
+                <a:solidFill>
+                  <a:schemeClr val="tx1">
+                    <a:lumMod val="95000"/>
+                    <a:lumOff val="5000"/>
+                  </a:schemeClr>
+                </a:solidFill>
+                <a:latin typeface="Instrument Serif" pitchFamily="34" charset="0"/>
+                <a:ea typeface="Instrument Serif" pitchFamily="34" charset="-122"/>
+                <a:cs typeface="Instrument Serif" pitchFamily="34" charset="-120"/>
+              </a:rPr>
+              <a:t>Shell-owned theming across the federation</a:t>
+            </a:r>
+            <a:endParaRPr lang="en-US" sz="3300" dirty="0">
+              <a:solidFill>
+                <a:schemeClr val="tx1">
+                  <a:lumMod val="95000"/>
+                  <a:lumOff val="5000"/>
+                </a:schemeClr>
+              </a:solidFill>
+            </a:endParaRPr>
+          </a:p>
+        </p:txBody>
+      </p:sp>
+      <p:sp>
+        <p:nvSpPr>
+          <p:cNvPr id="5" name="Text 5">
+            <a:extLst>
+              <a:ext uri="{FF2B5EF4-FFF2-40B4-BE49-F238E27FC236}">
+                <a16:creationId xmlns:a16="http://schemas.microsoft.com/office/drawing/2014/main" id="{956EBAC9-BB98-ECDE-8693-BBDC50395DCE}"/>
+              </a:ext>
+            </a:extLst>
+          </p:cNvPr>
+          <p:cNvSpPr/>
+          <p:nvPr/>
+        </p:nvSpPr>
+        <p:spPr>
+          <a:xfrm>
+            <a:off x="536448" y="777240"/>
+            <a:ext cx="11064240" cy="4741433"/>
+          </a:xfrm>
+          <a:prstGeom prst="rect">
+            <a:avLst/>
+          </a:prstGeom>
+          <a:noFill/>
+          <a:ln/>
+        </p:spPr>
+        <p:txBody>
+          <a:bodyPr wrap="square" rtlCol="0" anchor="t"/>
+          <a:lstStyle/>
+          <a:p>
+            <a:pPr marL="0" indent="0" algn="l">
+              <a:lnSpc>
+                <a:spcPct val="150000"/>
+              </a:lnSpc>
+              <a:buNone/>
+            </a:pPr>
+            <a:r>
+              <a:rPr lang="en-US" sz="2400" dirty="0">
+                <a:solidFill>
+                  <a:schemeClr val="tx1">
+                    <a:lumMod val="95000"/>
+                    <a:lumOff val="5000"/>
+                  </a:schemeClr>
+                </a:solidFill>
+                <a:latin typeface="Cascadia Code NF" pitchFamily="50" charset="0"/>
+                <a:ea typeface="Cascadia Code NF" pitchFamily="50" charset="0"/>
+                <a:cs typeface="Cascadia Code NF" pitchFamily="50" charset="0"/>
+              </a:rPr>
+              <a:t>Shell (owns theme)</a:t>
+            </a:r>
+          </a:p>
+          <a:p>
+            <a:pPr marL="0" indent="0" algn="l">
+              <a:lnSpc>
+                <a:spcPct val="150000"/>
+              </a:lnSpc>
+              <a:buNone/>
+            </a:pPr>
+            <a:r>
+              <a:rPr lang="en-US" sz="2400" dirty="0">
+                <a:solidFill>
+                  <a:schemeClr val="tx1">
+                    <a:lumMod val="95000"/>
+                    <a:lumOff val="5000"/>
+                  </a:schemeClr>
+                </a:solidFill>
+                <a:latin typeface="Cascadia Code NF" pitchFamily="50" charset="0"/>
+                <a:ea typeface="Cascadia Code NF" pitchFamily="50" charset="0"/>
+                <a:cs typeface="Cascadia Code NF" pitchFamily="50" charset="0"/>
+              </a:rPr>
+              <a:t>  ├── Persists to localStorage ("mf-demo-theme")</a:t>
+            </a:r>
+          </a:p>
+          <a:p>
+            <a:pPr marL="0" indent="0" algn="l">
+              <a:lnSpc>
+                <a:spcPct val="150000"/>
+              </a:lnSpc>
+              <a:buNone/>
+            </a:pPr>
+            <a:r>
+              <a:rPr lang="en-US" sz="2400" dirty="0">
+                <a:solidFill>
+                  <a:schemeClr val="tx1">
+                    <a:lumMod val="95000"/>
+                    <a:lumOff val="5000"/>
+                  </a:schemeClr>
+                </a:solidFill>
+                <a:latin typeface="Cascadia Code NF" pitchFamily="50" charset="0"/>
+                <a:ea typeface="Cascadia Code NF" pitchFamily="50" charset="0"/>
+                <a:cs typeface="Cascadia Code NF" pitchFamily="50" charset="0"/>
+              </a:rPr>
+              <a:t>  ├── Applies CSS variables to document.documentElement</a:t>
+            </a:r>
+          </a:p>
+          <a:p>
+            <a:pPr marL="0" indent="0" algn="l">
+              <a:lnSpc>
+                <a:spcPct val="150000"/>
+              </a:lnSpc>
+              <a:buNone/>
+            </a:pPr>
+            <a:r>
+              <a:rPr lang="en-US" sz="2400" dirty="0">
+                <a:solidFill>
+                  <a:schemeClr val="tx1">
+                    <a:lumMod val="95000"/>
+                    <a:lumOff val="5000"/>
+                  </a:schemeClr>
+                </a:solidFill>
+                <a:latin typeface="Cascadia Code NF" pitchFamily="50" charset="0"/>
+                <a:ea typeface="Cascadia Code NF" pitchFamily="50" charset="0"/>
+                <a:cs typeface="Cascadia Code NF" pitchFamily="50" charset="0"/>
+              </a:rPr>
+              <a:t>  ├── Exposes window.__MF_THEME__ bridge</a:t>
+            </a:r>
+          </a:p>
+          <a:p>
+            <a:pPr marL="0" indent="0" algn="l">
+              <a:lnSpc>
+                <a:spcPct val="150000"/>
+              </a:lnSpc>
+              <a:buNone/>
+            </a:pPr>
+            <a:r>
+              <a:rPr lang="en-US" sz="2400" dirty="0">
+                <a:solidFill>
+                  <a:schemeClr val="tx1">
+                    <a:lumMod val="95000"/>
+                    <a:lumOff val="5000"/>
+                  </a:schemeClr>
+                </a:solidFill>
+                <a:latin typeface="Cascadia Code NF" pitchFamily="50" charset="0"/>
+                <a:ea typeface="Cascadia Code NF" pitchFamily="50" charset="0"/>
+                <a:cs typeface="Cascadia Code NF" pitchFamily="50" charset="0"/>
+              </a:rPr>
+              <a:t>  └── Broadcasts "themeChange" event</a:t>
+            </a:r>
+          </a:p>
+          <a:p>
+            <a:pPr marL="0" indent="0" algn="l">
+              <a:lnSpc>
+                <a:spcPct val="150000"/>
+              </a:lnSpc>
+              <a:buNone/>
+            </a:pPr>
+            <a:r>
+              <a:rPr lang="en-US" sz="2400" dirty="0">
+                <a:solidFill>
+                  <a:schemeClr val="tx1">
+                    <a:lumMod val="95000"/>
+                    <a:lumOff val="5000"/>
+                  </a:schemeClr>
+                </a:solidFill>
+                <a:latin typeface="Cascadia Code NF" pitchFamily="50" charset="0"/>
+                <a:ea typeface="Cascadia Code NF" pitchFamily="50" charset="0"/>
+                <a:cs typeface="Cascadia Code NF" pitchFamily="50" charset="0"/>
+              </a:rPr>
+              <a:t>        ├── Records       → useActiveTheme()</a:t>
+            </a:r>
+          </a:p>
+          <a:p>
+            <a:pPr marL="0" indent="0" algn="l">
+              <a:lnSpc>
+                <a:spcPct val="150000"/>
+              </a:lnSpc>
+              <a:buNone/>
+            </a:pPr>
+            <a:r>
+              <a:rPr lang="en-US" sz="2400" dirty="0">
+                <a:solidFill>
+                  <a:schemeClr val="tx1">
+                    <a:lumMod val="95000"/>
+                    <a:lumOff val="5000"/>
+                  </a:schemeClr>
+                </a:solidFill>
+                <a:latin typeface="Cascadia Code NF" pitchFamily="50" charset="0"/>
+                <a:ea typeface="Cascadia Code NF" pitchFamily="50" charset="0"/>
+                <a:cs typeface="Cascadia Code NF" pitchFamily="50" charset="0"/>
+              </a:rPr>
+              <a:t>        ├── Prescriptions → useActiveTheme()</a:t>
+            </a:r>
+          </a:p>
+          <a:p>
+            <a:pPr marL="0" indent="0" algn="l">
+              <a:lnSpc>
+                <a:spcPct val="150000"/>
+              </a:lnSpc>
+              <a:buNone/>
+            </a:pPr>
+            <a:r>
+              <a:rPr lang="en-US" sz="2400" dirty="0">
+                <a:solidFill>
+                  <a:schemeClr val="tx1">
+                    <a:lumMod val="95000"/>
+                    <a:lumOff val="5000"/>
+                  </a:schemeClr>
+                </a:solidFill>
+                <a:latin typeface="Cascadia Code NF" pitchFamily="50" charset="0"/>
+                <a:ea typeface="Cascadia Code NF" pitchFamily="50" charset="0"/>
+                <a:cs typeface="Cascadia Code NF" pitchFamily="50" charset="0"/>
+              </a:rPr>
+              <a:t>        └── Analytics     → useActiveTheme()</a:t>
+            </a:r>
+          </a:p>
+        </p:txBody>
+      </p:sp>
+    </p:spTree>
+    <p:extLst>
+      <p:ext uri="{BB962C8B-B14F-4D97-AF65-F5344CB8AC3E}">
+        <p14:creationId xmlns:p14="http://schemas.microsoft.com/office/powerpoint/2010/main" val="3171738305"/>
+      </p:ext>
+    </p:extLst>
+  </p:cSld>
+  <p:clrMapOvr>
+    <a:masterClrMapping/>
+  </p:clrMapOvr>
+</p:sld>
+</file>
+
+<file path=ppt/slides/slide32.xml><?xml version="1.0" encoding="utf-8"?>
+<p:sld xmlns:a="http://schemas.openxmlformats.org/drawingml/2006/main" xmlns:r="http://schemas.openxmlformats.org/officeDocument/2006/relationships" xmlns:p="http://schemas.openxmlformats.org/presentationml/2006/main" show="0">
+  <p:cSld>
+    <p:spTree>
+      <p:nvGrpSpPr>
+        <p:cNvPr id="1" name=""/>
+        <p:cNvGrpSpPr/>
+        <p:nvPr/>
+      </p:nvGrpSpPr>
+      <p:grpSpPr>
+        <a:xfrm>
+          <a:off x="0" y="0"/>
+          <a:ext cx="0" cy="0"/>
+          <a:chOff x="0" y="0"/>
+          <a:chExt cx="0" cy="0"/>
+        </a:xfrm>
+      </p:grpSpPr>
+      <p:sp>
+        <p:nvSpPr>
+          <p:cNvPr id="3" name="Text 2">
+            <a:extLst>
+              <a:ext uri="{FF2B5EF4-FFF2-40B4-BE49-F238E27FC236}">
+                <a16:creationId xmlns:a16="http://schemas.microsoft.com/office/drawing/2014/main" id="{EF027E61-C1A6-D975-A2F7-55C2DC49228C}"/>
+              </a:ext>
+            </a:extLst>
+          </p:cNvPr>
+          <p:cNvSpPr/>
+          <p:nvPr/>
+        </p:nvSpPr>
+        <p:spPr>
+          <a:xfrm>
+            <a:off x="566801" y="0"/>
+            <a:ext cx="11109960" cy="777240"/>
+          </a:xfrm>
+          <a:prstGeom prst="rect">
+            <a:avLst/>
+          </a:prstGeom>
+          <a:noFill/>
+          <a:ln/>
+        </p:spPr>
+        <p:txBody>
+          <a:bodyPr wrap="square" rtlCol="0" anchor="ctr"/>
+          <a:lstStyle/>
+          <a:p>
+            <a:pPr marL="0" indent="0">
+              <a:buNone/>
+            </a:pPr>
+            <a:r>
+              <a:rPr lang="en-US" sz="3300" i="1" dirty="0">
+                <a:solidFill>
+                  <a:schemeClr val="tx1">
+                    <a:lumMod val="95000"/>
+                    <a:lumOff val="5000"/>
+                  </a:schemeClr>
+                </a:solidFill>
+                <a:latin typeface="Instrument Serif" pitchFamily="34" charset="0"/>
+                <a:ea typeface="Instrument Serif" pitchFamily="34" charset="-122"/>
+                <a:cs typeface="Instrument Serif" pitchFamily="34" charset="-120"/>
+              </a:rPr>
+              <a:t>Seven things to remember</a:t>
+            </a:r>
+            <a:endParaRPr lang="en-US" sz="3300" dirty="0">
+              <a:solidFill>
+                <a:schemeClr val="tx1">
+                  <a:lumMod val="95000"/>
+                  <a:lumOff val="5000"/>
+                </a:schemeClr>
+              </a:solidFill>
+            </a:endParaRPr>
+          </a:p>
+        </p:txBody>
+      </p:sp>
+      <p:sp>
+        <p:nvSpPr>
+          <p:cNvPr id="5" name="Text 5">
+            <a:extLst>
+              <a:ext uri="{FF2B5EF4-FFF2-40B4-BE49-F238E27FC236}">
+                <a16:creationId xmlns:a16="http://schemas.microsoft.com/office/drawing/2014/main" id="{EFF2B295-89D0-700E-1CD6-1F0E290DD0E1}"/>
+              </a:ext>
+            </a:extLst>
+          </p:cNvPr>
+          <p:cNvSpPr/>
+          <p:nvPr/>
+        </p:nvSpPr>
+        <p:spPr>
+          <a:xfrm>
+            <a:off x="566801" y="777240"/>
+            <a:ext cx="11182985" cy="5824728"/>
+          </a:xfrm>
+          <a:prstGeom prst="rect">
+            <a:avLst/>
+          </a:prstGeom>
+          <a:noFill/>
+          <a:ln/>
+        </p:spPr>
+        <p:txBody>
+          <a:bodyPr wrap="square" rtlCol="0" anchor="t"/>
+          <a:lstStyle/>
+          <a:p>
+            <a:pPr marL="342900" indent="-342900">
+              <a:lnSpc>
+                <a:spcPct val="150000"/>
+              </a:lnSpc>
+              <a:buSzPct val="100000"/>
+              <a:buFont typeface="Arial" panose="020B0604020202020204" pitchFamily="34" charset="0"/>
+              <a:buChar char="•"/>
+            </a:pPr>
+            <a:r>
+              <a:rPr lang="en-US" sz="2400" dirty="0">
+                <a:solidFill>
+                  <a:schemeClr val="tx1">
+                    <a:lumMod val="95000"/>
+                    <a:lumOff val="5000"/>
+                  </a:schemeClr>
+                </a:solidFill>
+                <a:latin typeface="DM Sans" pitchFamily="34" charset="0"/>
+                <a:ea typeface="DM Sans" pitchFamily="34" charset="-122"/>
+                <a:cs typeface="DM Sans" pitchFamily="34" charset="-120"/>
+              </a:rPr>
+              <a:t>Micro-frontends solve a people problem: team scale, not bundle size</a:t>
+            </a:r>
+            <a:endParaRPr lang="en-US" sz="2400" dirty="0">
+              <a:solidFill>
+                <a:schemeClr val="tx1">
+                  <a:lumMod val="95000"/>
+                  <a:lumOff val="5000"/>
+                </a:schemeClr>
+              </a:solidFill>
+            </a:endParaRPr>
+          </a:p>
+          <a:p>
+            <a:pPr marL="342900" indent="-342900">
+              <a:lnSpc>
+                <a:spcPct val="150000"/>
+              </a:lnSpc>
+              <a:buSzPct val="100000"/>
+              <a:buFont typeface="Arial" panose="020B0604020202020204" pitchFamily="34" charset="0"/>
+              <a:buChar char="•"/>
+            </a:pPr>
+            <a:r>
+              <a:rPr lang="en-US" sz="2400" dirty="0">
+                <a:solidFill>
+                  <a:schemeClr val="tx1">
+                    <a:lumMod val="95000"/>
+                    <a:lumOff val="5000"/>
+                  </a:schemeClr>
+                </a:solidFill>
+                <a:latin typeface="DM Sans" pitchFamily="34" charset="0"/>
+                <a:ea typeface="DM Sans" pitchFamily="34" charset="-122"/>
+                <a:cs typeface="DM Sans" pitchFamily="34" charset="-120"/>
+              </a:rPr>
+              <a:t>Suspense fallbacks cover load UX. Module Federation covers team DX</a:t>
+            </a:r>
+            <a:endParaRPr lang="en-US" sz="2400" dirty="0">
+              <a:solidFill>
+                <a:schemeClr val="tx1">
+                  <a:lumMod val="95000"/>
+                  <a:lumOff val="5000"/>
+                </a:schemeClr>
+              </a:solidFill>
+            </a:endParaRPr>
+          </a:p>
+          <a:p>
+            <a:pPr marL="342900" indent="-342900">
+              <a:lnSpc>
+                <a:spcPct val="150000"/>
+              </a:lnSpc>
+              <a:buSzPct val="100000"/>
+              <a:buFont typeface="Arial" panose="020B0604020202020204" pitchFamily="34" charset="0"/>
+              <a:buChar char="•"/>
+            </a:pPr>
+            <a:r>
+              <a:rPr lang="en-US" sz="2400" dirty="0">
+                <a:solidFill>
+                  <a:schemeClr val="tx1">
+                    <a:lumMod val="95000"/>
+                    <a:lumOff val="5000"/>
+                  </a:schemeClr>
+                </a:solidFill>
+                <a:latin typeface="DM Sans" pitchFamily="34" charset="0"/>
+                <a:ea typeface="DM Sans" pitchFamily="34" charset="-122"/>
+                <a:cs typeface="DM Sans" pitchFamily="34" charset="-120"/>
+              </a:rPr>
+              <a:t>Prefer events over shared state: CustomEvents survive independent deploys</a:t>
+            </a:r>
+            <a:endParaRPr lang="en-US" sz="2400" dirty="0">
+              <a:solidFill>
+                <a:schemeClr val="tx1">
+                  <a:lumMod val="95000"/>
+                  <a:lumOff val="5000"/>
+                </a:schemeClr>
+              </a:solidFill>
+            </a:endParaRPr>
+          </a:p>
+          <a:p>
+            <a:pPr marL="342900" indent="-342900">
+              <a:lnSpc>
+                <a:spcPct val="150000"/>
+              </a:lnSpc>
+              <a:buSzPct val="100000"/>
+              <a:buFont typeface="Arial" panose="020B0604020202020204" pitchFamily="34" charset="0"/>
+              <a:buChar char="•"/>
+            </a:pPr>
+            <a:r>
+              <a:rPr lang="en-US" sz="2400" dirty="0">
+                <a:solidFill>
+                  <a:schemeClr val="tx1">
+                    <a:lumMod val="95000"/>
+                    <a:lumOff val="5000"/>
+                  </a:schemeClr>
+                </a:solidFill>
+                <a:latin typeface="DM Sans" pitchFamily="34" charset="0"/>
+                <a:ea typeface="DM Sans" pitchFamily="34" charset="-122"/>
+                <a:cs typeface="DM Sans" pitchFamily="34" charset="-120"/>
+              </a:rPr>
+              <a:t>Host owns routing: remotes request navigation, only the shell mutates it</a:t>
+            </a:r>
+            <a:endParaRPr lang="en-US" sz="2400" dirty="0">
+              <a:solidFill>
+                <a:schemeClr val="tx1">
+                  <a:lumMod val="95000"/>
+                  <a:lumOff val="5000"/>
+                </a:schemeClr>
+              </a:solidFill>
+            </a:endParaRPr>
+          </a:p>
+          <a:p>
+            <a:pPr marL="342900" indent="-342900">
+              <a:lnSpc>
+                <a:spcPct val="150000"/>
+              </a:lnSpc>
+              <a:buSzPct val="100000"/>
+              <a:buFont typeface="Arial" panose="020B0604020202020204" pitchFamily="34" charset="0"/>
+              <a:buChar char="•"/>
+            </a:pPr>
+            <a:r>
+              <a:rPr lang="en-US" sz="2400" dirty="0">
+                <a:solidFill>
+                  <a:schemeClr val="tx1">
+                    <a:lumMod val="95000"/>
+                    <a:lumOff val="5000"/>
+                  </a:schemeClr>
+                </a:solidFill>
+                <a:latin typeface="DM Sans" pitchFamily="34" charset="0"/>
+                <a:ea typeface="DM Sans" pitchFamily="34" charset="-122"/>
+                <a:cs typeface="DM Sans" pitchFamily="34" charset="-120"/>
+              </a:rPr>
+              <a:t>Ship fault isolation on purpose: .catch() + ErrorBoundary per module</a:t>
+            </a:r>
+            <a:endParaRPr lang="en-US" sz="2400" dirty="0">
+              <a:solidFill>
+                <a:schemeClr val="tx1">
+                  <a:lumMod val="95000"/>
+                  <a:lumOff val="5000"/>
+                </a:schemeClr>
+              </a:solidFill>
+            </a:endParaRPr>
+          </a:p>
+          <a:p>
+            <a:pPr marL="342900" indent="-342900">
+              <a:lnSpc>
+                <a:spcPct val="150000"/>
+              </a:lnSpc>
+              <a:buSzPct val="100000"/>
+              <a:buFont typeface="Arial" panose="020B0604020202020204" pitchFamily="34" charset="0"/>
+              <a:buChar char="•"/>
+            </a:pPr>
+            <a:r>
+              <a:rPr lang="en-US" sz="2400" dirty="0" err="1">
+                <a:solidFill>
+                  <a:schemeClr val="tx1">
+                    <a:lumMod val="95000"/>
+                    <a:lumOff val="5000"/>
+                  </a:schemeClr>
+                </a:solidFill>
+                <a:latin typeface="DM Sans" pitchFamily="34" charset="0"/>
+                <a:ea typeface="DM Sans" pitchFamily="34" charset="-122"/>
+                <a:cs typeface="DM Sans" pitchFamily="34" charset="-120"/>
+              </a:rPr>
+              <a:t>Rspack</a:t>
+            </a:r>
+            <a:r>
+              <a:rPr lang="en-US" sz="2400" dirty="0">
+                <a:solidFill>
+                  <a:schemeClr val="tx1">
+                    <a:lumMod val="95000"/>
+                    <a:lumOff val="5000"/>
+                  </a:schemeClr>
+                </a:solidFill>
+                <a:latin typeface="DM Sans" pitchFamily="34" charset="0"/>
+                <a:ea typeface="DM Sans" pitchFamily="34" charset="-122"/>
+                <a:cs typeface="DM Sans" pitchFamily="34" charset="-120"/>
+              </a:rPr>
+              <a:t> keeps the monorepo fast: sub-second HMR, Rust React Compiler, cache</a:t>
+            </a:r>
+            <a:endParaRPr lang="en-US" sz="2400" dirty="0">
+              <a:solidFill>
+                <a:schemeClr val="tx1">
+                  <a:lumMod val="95000"/>
+                  <a:lumOff val="5000"/>
+                </a:schemeClr>
+              </a:solidFill>
+            </a:endParaRPr>
+          </a:p>
+          <a:p>
+            <a:pPr marL="342900" indent="-342900">
+              <a:lnSpc>
+                <a:spcPct val="150000"/>
+              </a:lnSpc>
+              <a:buSzPct val="100000"/>
+              <a:buFont typeface="Arial" panose="020B0604020202020204" pitchFamily="34" charset="0"/>
+              <a:buChar char="•"/>
+            </a:pPr>
+            <a:r>
+              <a:rPr lang="en-US" sz="2400" dirty="0">
+                <a:solidFill>
+                  <a:schemeClr val="tx1">
+                    <a:lumMod val="95000"/>
+                    <a:lumOff val="5000"/>
+                  </a:schemeClr>
+                </a:solidFill>
+                <a:latin typeface="DM Sans" pitchFamily="34" charset="0"/>
+                <a:ea typeface="DM Sans" pitchFamily="34" charset="-122"/>
+                <a:cs typeface="DM Sans" pitchFamily="34" charset="-120"/>
+              </a:rPr>
+              <a:t>Match load strategy to content: instant / eager / suspense</a:t>
+            </a:r>
+            <a:endParaRPr lang="en-US" sz="2400" dirty="0">
+              <a:solidFill>
+                <a:schemeClr val="tx1">
+                  <a:lumMod val="95000"/>
+                  <a:lumOff val="5000"/>
+                </a:schemeClr>
+              </a:solidFill>
+            </a:endParaRPr>
+          </a:p>
+        </p:txBody>
+      </p:sp>
+    </p:spTree>
+    <p:extLst>
+      <p:ext uri="{BB962C8B-B14F-4D97-AF65-F5344CB8AC3E}">
+        <p14:creationId xmlns:p14="http://schemas.microsoft.com/office/powerpoint/2010/main" val="1008954746"/>
+      </p:ext>
+    </p:extLst>
+  </p:cSld>
+  <p:clrMapOvr>
+    <a:masterClrMapping/>
+  </p:clrMapOvr>
+</p:sld>
+</file>
+
+<file path=ppt/slides/slide33.xml><?xml version="1.0" encoding="utf-8"?>
+<p:sld xmlns:a="http://schemas.openxmlformats.org/drawingml/2006/main" xmlns:r="http://schemas.openxmlformats.org/officeDocument/2006/relationships" xmlns:p="http://schemas.openxmlformats.org/presentationml/2006/main">
+  <p:cSld>
+    <p:spTree>
+      <p:nvGrpSpPr>
+        <p:cNvPr id="1" name=""/>
+        <p:cNvGrpSpPr/>
+        <p:nvPr/>
+      </p:nvGrpSpPr>
+      <p:grpSpPr>
+        <a:xfrm>
+          <a:off x="0" y="0"/>
+          <a:ext cx="0" cy="0"/>
+          <a:chOff x="0" y="0"/>
+          <a:chExt cx="0" cy="0"/>
+        </a:xfrm>
+      </p:grpSpPr>
+      <p:pic>
+        <p:nvPicPr>
+          <p:cNvPr id="11" name="Picture 10">
+            <a:extLst>
+              <a:ext uri="{FF2B5EF4-FFF2-40B4-BE49-F238E27FC236}">
+                <a16:creationId xmlns:a16="http://schemas.microsoft.com/office/drawing/2014/main" id="{A803917B-4381-C3C7-FA95-857D711A79FD}"/>
+              </a:ext>
+            </a:extLst>
+          </p:cNvPr>
+          <p:cNvPicPr>
+            <a:picLocks noChangeAspect="1"/>
+          </p:cNvPicPr>
+          <p:nvPr/>
+        </p:nvPicPr>
+        <p:blipFill>
+          <a:blip r:embed="rId3"/>
+          <a:stretch>
+            <a:fillRect/>
+          </a:stretch>
+        </p:blipFill>
+        <p:spPr>
+          <a:xfrm>
+            <a:off x="4297407" y="1158714"/>
+            <a:ext cx="4087786" cy="3871374"/>
+          </a:xfrm>
+          <a:prstGeom prst="rect">
+            <a:avLst/>
+          </a:prstGeom>
+        </p:spPr>
+      </p:pic>
+      <p:sp>
+        <p:nvSpPr>
+          <p:cNvPr id="12" name="TextBox 11">
+            <a:extLst>
+              <a:ext uri="{FF2B5EF4-FFF2-40B4-BE49-F238E27FC236}">
+                <a16:creationId xmlns:a16="http://schemas.microsoft.com/office/drawing/2014/main" id="{29D0F35D-631E-8C23-5845-6023A66D27DD}"/>
+              </a:ext>
+            </a:extLst>
+          </p:cNvPr>
+          <p:cNvSpPr txBox="1"/>
+          <p:nvPr/>
+        </p:nvSpPr>
+        <p:spPr>
+          <a:xfrm>
+            <a:off x="3822192" y="3655026"/>
+            <a:ext cx="1627369" cy="1569660"/>
+          </a:xfrm>
+          <a:prstGeom prst="rect">
+            <a:avLst/>
+          </a:prstGeom>
+          <a:noFill/>
+        </p:spPr>
+        <p:txBody>
+          <a:bodyPr wrap="none" rtlCol="0">
+            <a:spAutoFit/>
+          </a:bodyPr>
+          <a:lstStyle/>
+          <a:p>
+            <a:pPr algn="ctr"/>
+            <a:r>
+              <a:rPr lang="en-GB" sz="9600" dirty="0">
+                <a:latin typeface="Cascadia Code" panose="020B0609020000020004" pitchFamily="49" charset="0"/>
+                <a:cs typeface="Cascadia Code" panose="020B0609020000020004" pitchFamily="49" charset="0"/>
+              </a:rPr>
+              <a:t>AI</a:t>
+            </a:r>
+          </a:p>
+        </p:txBody>
+      </p:sp>
+    </p:spTree>
+    <p:extLst>
+      <p:ext uri="{BB962C8B-B14F-4D97-AF65-F5344CB8AC3E}">
+        <p14:creationId xmlns:p14="http://schemas.microsoft.com/office/powerpoint/2010/main" val="2196739077"/>
+      </p:ext>
+    </p:extLst>
+  </p:cSld>
+  <p:clrMapOvr>
+    <a:masterClrMapping/>
+  </p:clrMapOvr>
+</p:sld>
+</file>
+
+<file path=ppt/slides/slide34.xml><?xml version="1.0" encoding="utf-8"?>
+<p:sld xmlns:a="http://schemas.openxmlformats.org/drawingml/2006/main" xmlns:r="http://schemas.openxmlformats.org/officeDocument/2006/relationships" xmlns:p="http://schemas.openxmlformats.org/presentationml/2006/main">
+  <p:cSld>
+    <p:spTree>
+      <p:nvGrpSpPr>
+        <p:cNvPr id="1" name=""/>
+        <p:cNvGrpSpPr/>
+        <p:nvPr/>
+      </p:nvGrpSpPr>
+      <p:grpSpPr>
+        <a:xfrm>
+          <a:off x="0" y="0"/>
+          <a:ext cx="0" cy="0"/>
+          <a:chOff x="0" y="0"/>
+          <a:chExt cx="0" cy="0"/>
+        </a:xfrm>
+      </p:grpSpPr>
+      <p:pic>
+        <p:nvPicPr>
+          <p:cNvPr id="5" name="Picture 4">
+            <a:extLst>
+              <a:ext uri="{FF2B5EF4-FFF2-40B4-BE49-F238E27FC236}">
+                <a16:creationId xmlns:a16="http://schemas.microsoft.com/office/drawing/2014/main" id="{0B5158BA-B2A6-2F27-F186-4EF8F56E7BD9}"/>
+              </a:ext>
+            </a:extLst>
+          </p:cNvPr>
+          <p:cNvPicPr>
+            <a:picLocks noChangeAspect="1"/>
+          </p:cNvPicPr>
+          <p:nvPr/>
+        </p:nvPicPr>
+        <p:blipFill>
+          <a:blip r:embed="rId3"/>
+          <a:stretch>
+            <a:fillRect/>
+          </a:stretch>
+        </p:blipFill>
+        <p:spPr>
+          <a:xfrm>
+            <a:off x="3557944" y="0"/>
+            <a:ext cx="5072937" cy="6858000"/>
+          </a:xfrm>
+          <a:prstGeom prst="rect">
+            <a:avLst/>
+          </a:prstGeom>
+        </p:spPr>
+      </p:pic>
+    </p:spTree>
+    <p:extLst>
+      <p:ext uri="{BB962C8B-B14F-4D97-AF65-F5344CB8AC3E}">
+        <p14:creationId xmlns:p14="http://schemas.microsoft.com/office/powerpoint/2010/main" val="2588299735"/>
+      </p:ext>
+    </p:extLst>
+  </p:cSld>
+  <p:clrMapOvr>
+    <a:masterClrMapping/>
+  </p:clrMapOvr>
+</p:sld>
+</file>
+
+<file path=ppt/slides/slide35.xml><?xml version="1.0" encoding="utf-8"?>
+<p:sld xmlns:a="http://schemas.openxmlformats.org/drawingml/2006/main" xmlns:r="http://schemas.openxmlformats.org/officeDocument/2006/relationships" xmlns:p="http://schemas.openxmlformats.org/presentationml/2006/main">
+  <p:cSld>
+    <p:spTree>
+      <p:nvGrpSpPr>
+        <p:cNvPr id="1" name="">
+          <a:extLst>
+            <a:ext uri="{FF2B5EF4-FFF2-40B4-BE49-F238E27FC236}">
+              <a16:creationId xmlns:a16="http://schemas.microsoft.com/office/drawing/2014/main" id="{91F1A212-8E57-6816-E45C-C202E54FFB15}"/>
+            </a:ext>
+          </a:extLst>
+        </p:cNvPr>
+        <p:cNvGrpSpPr/>
+        <p:nvPr/>
+      </p:nvGrpSpPr>
+      <p:grpSpPr>
+        <a:xfrm>
+          <a:off x="0" y="0"/>
+          <a:ext cx="0" cy="0"/>
+          <a:chOff x="0" y="0"/>
+          <a:chExt cx="0" cy="0"/>
+        </a:xfrm>
+      </p:grpSpPr>
+      <p:sp>
+        <p:nvSpPr>
+          <p:cNvPr id="6" name="TextBox 5">
+            <a:extLst>
+              <a:ext uri="{FF2B5EF4-FFF2-40B4-BE49-F238E27FC236}">
+                <a16:creationId xmlns:a16="http://schemas.microsoft.com/office/drawing/2014/main" id="{FDFC6324-4D3C-F263-D3FB-B7304428462B}"/>
+              </a:ext>
+            </a:extLst>
+          </p:cNvPr>
+          <p:cNvSpPr txBox="1"/>
+          <p:nvPr/>
+        </p:nvSpPr>
+        <p:spPr>
+          <a:xfrm>
+            <a:off x="1119382" y="2736683"/>
+            <a:ext cx="10027796" cy="1384634"/>
+          </a:xfrm>
+          <a:prstGeom prst="rect">
+            <a:avLst/>
+          </a:prstGeom>
+          <a:noFill/>
+        </p:spPr>
+        <p:txBody>
+          <a:bodyPr wrap="square">
+            <a:spAutoFit/>
+          </a:bodyPr>
+          <a:lstStyle/>
+          <a:p>
+            <a:r>
+              <a:rPr lang="en-GB" sz="2799" b="1" dirty="0">
+                <a:solidFill>
+                  <a:schemeClr val="tx1">
+                    <a:lumMod val="95000"/>
+                    <a:lumOff val="5000"/>
+                  </a:schemeClr>
+                </a:solidFill>
+              </a:rPr>
+              <a:t>Knowledge atrophy </a:t>
+            </a:r>
+            <a:r>
+              <a:rPr lang="en-GB" sz="2799" dirty="0">
+                <a:solidFill>
+                  <a:schemeClr val="bg2">
+                    <a:lumMod val="25000"/>
+                  </a:schemeClr>
+                </a:solidFill>
+              </a:rPr>
+              <a:t>is the gradual weakening of human thinking and problem-solving skills through overreliance on AI to do our mental work.</a:t>
+            </a:r>
+          </a:p>
+        </p:txBody>
+      </p:sp>
+    </p:spTree>
+    <p:extLst>
+      <p:ext uri="{BB962C8B-B14F-4D97-AF65-F5344CB8AC3E}">
+        <p14:creationId xmlns:p14="http://schemas.microsoft.com/office/powerpoint/2010/main" val="1771380820"/>
+      </p:ext>
+    </p:extLst>
+  </p:cSld>
+  <p:clrMapOvr>
+    <a:masterClrMapping/>
+  </p:clrMapOvr>
+</p:sld>
+</file>
+
+<file path=ppt/slides/slide36.xml><?xml version="1.0" encoding="utf-8"?>
+<p:sld xmlns:a="http://schemas.openxmlformats.org/drawingml/2006/main" xmlns:r="http://schemas.openxmlformats.org/officeDocument/2006/relationships" xmlns:p="http://schemas.openxmlformats.org/presentationml/2006/main">
+  <p:cSld>
+    <p:spTree>
+      <p:nvGrpSpPr>
+        <p:cNvPr id="1" name=""/>
+        <p:cNvGrpSpPr/>
+        <p:nvPr/>
+      </p:nvGrpSpPr>
+      <p:grpSpPr>
+        <a:xfrm>
+          <a:off x="0" y="0"/>
+          <a:ext cx="0" cy="0"/>
+          <a:chOff x="0" y="0"/>
+          <a:chExt cx="0" cy="0"/>
+        </a:xfrm>
+      </p:grpSpPr>
+      <p:pic>
+        <p:nvPicPr>
+          <p:cNvPr id="5" name="Picture 4">
+            <a:extLst>
+              <a:ext uri="{FF2B5EF4-FFF2-40B4-BE49-F238E27FC236}">
+                <a16:creationId xmlns:a16="http://schemas.microsoft.com/office/drawing/2014/main" id="{CAC10217-0EAC-9F13-AEFC-6AB11AA41BCD}"/>
+              </a:ext>
+            </a:extLst>
+          </p:cNvPr>
+          <p:cNvPicPr>
+            <a:picLocks noChangeAspect="1"/>
+          </p:cNvPicPr>
+          <p:nvPr/>
+        </p:nvPicPr>
+        <p:blipFill>
+          <a:blip r:embed="rId3"/>
+          <a:stretch>
+            <a:fillRect/>
+          </a:stretch>
+        </p:blipFill>
+        <p:spPr>
+          <a:xfrm>
+            <a:off x="1" y="138017"/>
+            <a:ext cx="12188475" cy="6719090"/>
+          </a:xfrm>
+          <a:prstGeom prst="rect">
+            <a:avLst/>
+          </a:prstGeom>
+        </p:spPr>
+      </p:pic>
+    </p:spTree>
+    <p:extLst>
+      <p:ext uri="{BB962C8B-B14F-4D97-AF65-F5344CB8AC3E}">
+        <p14:creationId xmlns:p14="http://schemas.microsoft.com/office/powerpoint/2010/main" val="3470241132"/>
+      </p:ext>
+    </p:extLst>
+  </p:cSld>
+  <p:clrMapOvr>
+    <a:masterClrMapping/>
+  </p:clrMapOvr>
+</p:sld>
+</file>
+
+<file path=ppt/slides/slide37.xml><?xml version="1.0" encoding="utf-8"?>
 <p:sld xmlns:a="http://schemas.openxmlformats.org/drawingml/2006/main" xmlns:r="http://schemas.openxmlformats.org/officeDocument/2006/relationships" xmlns:p="http://schemas.openxmlformats.org/presentationml/2006/main">
   <p:cSld>
     <p:spTree>

--- a/presentation/module-federation.pptx
+++ b/presentation/module-federation.pptx
@@ -5,7 +5,7 @@
     <p:sldMasterId id="2147483648" r:id="rId1"/>
   </p:sldMasterIdLst>
   <p:notesMasterIdLst>
-    <p:notesMasterId r:id="rId39"/>
+    <p:notesMasterId r:id="rId36"/>
   </p:notesMasterIdLst>
   <p:sldIdLst>
     <p:sldId id="298" r:id="rId2"/>
@@ -27,24 +27,21 @@
     <p:sldId id="319" r:id="rId18"/>
     <p:sldId id="320" r:id="rId19"/>
     <p:sldId id="329" r:id="rId20"/>
-    <p:sldId id="323" r:id="rId21"/>
-    <p:sldId id="344" r:id="rId22"/>
-    <p:sldId id="327" r:id="rId23"/>
-    <p:sldId id="335" r:id="rId24"/>
-    <p:sldId id="325" r:id="rId25"/>
-    <p:sldId id="326" r:id="rId26"/>
-    <p:sldId id="342" r:id="rId27"/>
-    <p:sldId id="334" r:id="rId28"/>
-    <p:sldId id="332" r:id="rId29"/>
-    <p:sldId id="333" r:id="rId30"/>
-    <p:sldId id="343" r:id="rId31"/>
-    <p:sldId id="331" r:id="rId32"/>
-    <p:sldId id="330" r:id="rId33"/>
-    <p:sldId id="340" r:id="rId34"/>
-    <p:sldId id="338" r:id="rId35"/>
-    <p:sldId id="339" r:id="rId36"/>
-    <p:sldId id="310" r:id="rId37"/>
-    <p:sldId id="322" r:id="rId38"/>
+    <p:sldId id="344" r:id="rId21"/>
+    <p:sldId id="327" r:id="rId22"/>
+    <p:sldId id="335" r:id="rId23"/>
+    <p:sldId id="325" r:id="rId24"/>
+    <p:sldId id="326" r:id="rId25"/>
+    <p:sldId id="342" r:id="rId26"/>
+    <p:sldId id="334" r:id="rId27"/>
+    <p:sldId id="332" r:id="rId28"/>
+    <p:sldId id="333" r:id="rId29"/>
+    <p:sldId id="343" r:id="rId30"/>
+    <p:sldId id="331" r:id="rId31"/>
+    <p:sldId id="340" r:id="rId32"/>
+    <p:sldId id="338" r:id="rId33"/>
+    <p:sldId id="339" r:id="rId34"/>
+    <p:sldId id="322" r:id="rId35"/>
   </p:sldIdLst>
   <p:sldSz cx="12188825" cy="6858000"/>
   <p:notesSz cx="6858000" cy="12188825"/>
@@ -424,7 +421,16 @@
           <a:p>
             <a:r>
               <a:rPr lang="en-US" dirty="0"/>
-              <a:t>This is the one people underrate. It isn't about total lines of code — it's about how much of the system a person must hold in their head before they can safely change one line of it.</a:t>
+              <a:t>This is the one people underrate. It isn't about total lines of code — it's about how much of the system a person must hold in their head before they can safely change one line in a codebase.</a:t>
+            </a:r>
+          </a:p>
+          <a:p>
+            <a:endParaRPr lang="en-US" dirty="0"/>
+          </a:p>
+          <a:p>
+            <a:r>
+              <a:rPr lang="en-US" dirty="0"/>
+              <a:t>When onboarding a new frontend developer?</a:t>
             </a:r>
             <a:endParaRPr lang="en-GB" dirty="0"/>
           </a:p>
@@ -531,7 +537,30 @@
               <a:rPr lang="en-US" dirty="0"/>
               <a:t>Last, but not the least. This is actually my first experience in micro-frontend when we were removing little pieces of Angular version 1, which is plain JavaScript, to the latest version of Angular.</a:t>
             </a:r>
-            <a:endParaRPr lang="en-GB" dirty="0"/>
+          </a:p>
+          <a:p>
+            <a:pPr marL="0" marR="0" lvl="0" indent="0" algn="l" defTabSz="914400" rtl="0" eaLnBrk="1" fontAlgn="auto" latinLnBrk="0" hangingPunct="1">
+              <a:lnSpc>
+                <a:spcPct val="100000"/>
+              </a:lnSpc>
+              <a:spcBef>
+                <a:spcPts val="0"/>
+              </a:spcBef>
+              <a:spcAft>
+                <a:spcPts val="0"/>
+              </a:spcAft>
+              <a:buClrTx/>
+              <a:buSzTx/>
+              <a:buFontTx/>
+              <a:buNone/>
+              <a:tabLst/>
+              <a:defRPr/>
+            </a:pPr>
+            <a:r>
+              <a:rPr lang="en-US" sz="1200" dirty="0"/>
+              <a:t>Incremental migration instead of a rewrite</a:t>
+            </a:r>
+            <a:endParaRPr lang="en-GB" sz="1200" dirty="0"/>
           </a:p>
         </p:txBody>
       </p:sp>
@@ -616,7 +645,16 @@
           <a:p>
             <a:r>
               <a:rPr lang="en-US" dirty="0"/>
-              <a:t>This is the one that stands on its own even when the others don't apply. The key detail is that both stacks serve real traffic the entire time, which is what makes it reversible.</a:t>
+              <a:t>This is the one that stands on its own even when the others don't apply. </a:t>
+            </a:r>
+          </a:p>
+          <a:p>
+            <a:endParaRPr lang="en-US" dirty="0"/>
+          </a:p>
+          <a:p>
+            <a:r>
+              <a:rPr lang="en-US" dirty="0"/>
+              <a:t>The key detail is that both stacks serve real traffic the entire time, which is what makes it reversible.</a:t>
             </a:r>
             <a:endParaRPr lang="en-GB" dirty="0"/>
           </a:p>
@@ -703,7 +741,7 @@
           <a:p>
             <a:r>
               <a:rPr lang="en-GB" dirty="0"/>
-              <a:t>This is a healthcare app. With some patient records, prescriptions, analytics.</a:t>
+              <a:t>So demo app is this. This is a healthcare app. With some patient records, prescriptions, analytics.</a:t>
             </a:r>
           </a:p>
         </p:txBody>
@@ -795,7 +833,13 @@
           <a:p>
             <a:r>
               <a:rPr lang="en-US" dirty="0"/>
-              <a:t>The host is on port 3000. Home is on 3004 and loads instantly. </a:t>
+              <a:t>The host is on port 3000. </a:t>
+            </a:r>
+          </a:p>
+          <a:p>
+            <a:r>
+              <a:rPr lang="en-US" dirty="0"/>
+              <a:t>Home is on 3004 and loads instantly. </a:t>
             </a:r>
           </a:p>
           <a:p>
@@ -932,7 +976,18 @@
             <a:pPr rtl="0"/>
             <a:r>
               <a:rPr lang="en-US" dirty="0"/>
-              <a:t>The different ports are just a local dev artifact — three dev servers can't all bind port 3000 on one laptop — and they vanish on deploy. In production the browser only ever sees </a:t>
+              <a:t>The different ports are just a local dev artifact — three dev servers can't all bind port 3000 on one laptop — and they vanish on deploy. </a:t>
+            </a:r>
+          </a:p>
+          <a:p>
+            <a:pPr rtl="0"/>
+            <a:endParaRPr lang="en-US" dirty="0"/>
+          </a:p>
+          <a:p>
+            <a:pPr rtl="0"/>
+            <a:r>
+              <a:rPr lang="en-US" dirty="0"/>
+              <a:t>In production the browser only ever sees </a:t>
             </a:r>
             <a:r>
               <a:rPr lang="en-US" sz="1200" kern="1200" dirty="0">
@@ -947,15 +1002,7 @@
             </a:r>
             <a:r>
               <a:rPr lang="en-US" dirty="0"/>
-              <a:t>, with a router at the edge (a </a:t>
-            </a:r>
-            <a:r>
-              <a:rPr lang="en-US" dirty="0" err="1"/>
-              <a:t>Vercel</a:t>
-            </a:r>
-            <a:r>
-              <a:rPr lang="en-US" dirty="0"/>
-              <a:t> rewrite, a CloudFront behavior, an nginx </a:t>
+              <a:t>, with a router at the edge (a Vercel rewrite, a CloudFront behavior, an nginx </a:t>
             </a:r>
             <a:r>
               <a:rPr lang="en-US" sz="1200" kern="1200" dirty="0" err="1">
@@ -970,7 +1017,18 @@
             </a:r>
             <a:r>
               <a:rPr lang="en-US" dirty="0"/>
-              <a:t>, a Cloudflare Worker) mapping each path to the host where that team deploys, so users stay on one origin while each team still ships on its own schedule. Those deploy targets are free: every platform hands you a hostname, and subdomains of a domain you already own are just DNS records, not purchases. One domain, three paths, nothing extra to buy.</a:t>
+              <a:t>, a Cloudflare Worker) mapping each path to the host where that team deploys, so users stay on one origin while each team still ships on its own schedule. </a:t>
+            </a:r>
+          </a:p>
+          <a:p>
+            <a:pPr rtl="0"/>
+            <a:endParaRPr lang="en-US" dirty="0"/>
+          </a:p>
+          <a:p>
+            <a:pPr rtl="0"/>
+            <a:r>
+              <a:rPr lang="en-US" dirty="0"/>
+              <a:t>Those deploy targets are free: every platform hands you a hostname, and subdomains of a domain you already own are just DNS records, not purchases. One domain, three paths, nothing extra to buy.</a:t>
             </a:r>
           </a:p>
         </p:txBody>
@@ -1056,7 +1114,7 @@
           <a:p>
             <a:r>
               <a:rPr lang="en-US" dirty="0"/>
-              <a:t>Module Federation is for developers and teams. Gives you independent builds and independent deploys. Onboarding improvements.</a:t>
+              <a:t>Module Federation is for developers and teams. It gives you independent builds and independent deploys. Onboarding improvements.</a:t>
             </a:r>
           </a:p>
           <a:p>
@@ -1252,8 +1310,11 @@
           <a:p>
             <a:r>
               <a:rPr lang="en-US" dirty="0"/>
-              <a:t>This is the shape of the app. One shell on port 3000. It owns navigation, the router, the theme, and a status strip that reads Instant, Eager, or Streaming.</a:t>
-            </a:r>
+              <a:t>This is the shape of the app. One shell on port 3000. The shell owns navigation, the router, the theme, the counter, and the logged user.</a:t>
+            </a:r>
+          </a:p>
+          <a:p>
+            <a:endParaRPr lang="en-US" dirty="0"/>
           </a:p>
           <a:p>
             <a:r>
@@ -1267,7 +1328,7 @@
           <a:p>
             <a:r>
               <a:rPr lang="en-US" dirty="0"/>
-              <a:t>Four remotes hang off that shell. Home on 3004, instant. Records on 3001, eager. Prescriptions on 3002, streamed. Analytics on 3003, streamed. Not every module should load the same way. Content priority decides the strategy.</a:t>
+              <a:t>Four remotes hang off that shell. Not every module should load the same way if you want something like this. The strategy will depend on which content you will prioritize.</a:t>
             </a:r>
           </a:p>
           <a:p>
@@ -1356,7 +1417,7 @@
           <a:p>
             <a:r>
               <a:rPr lang="en-US" dirty="0"/>
-              <a:t>For the rest, the nav link fires on mouse enter. When the cursor touches Prescriptions or Analytics, the chunk starts fetching in the background. Click, and it is often already cached.</a:t>
+              <a:t>Prescriptions and Analytics are streamed. They load on demand, behind per-module skeletons.</a:t>
             </a:r>
           </a:p>
           <a:p>
@@ -1365,25 +1426,7 @@
           <a:p>
             <a:r>
               <a:rPr lang="en-US" dirty="0"/>
-              <a:t>Instant means the landing page fetches lazily, with no streaming delay. </a:t>
-            </a:r>
-          </a:p>
-          <a:p>
-            <a:endParaRPr lang="en-US" dirty="0"/>
-          </a:p>
-          <a:p>
-            <a:r>
-              <a:rPr lang="en-US" dirty="0"/>
-              <a:t>Eager means preloaded the moment the shell mounts. </a:t>
-            </a:r>
-          </a:p>
-          <a:p>
-            <a:endParaRPr lang="en-US" dirty="0"/>
-          </a:p>
-          <a:p>
-            <a:r>
-              <a:rPr lang="en-US" dirty="0"/>
-              <a:t>Hover means prefetched when the user aims at a tab. That is why Records feels instant even though it is a separate app on a separate server. The work happened at mount.</a:t>
+              <a:t>Every strategy still gets three layers of resilience. A catch on lazy, so an unreachable remote becomes a fallback instead of a white screen. Suspense, so a loading remote shows its own skeleton. An error boundary, so a runtime crash in one remote does not take down the app.</a:t>
             </a:r>
           </a:p>
           <a:p>
@@ -1394,7 +1437,7 @@
     </p:spTree>
     <p:extLst>
       <p:ext uri="{BB962C8B-B14F-4D97-AF65-F5344CB8AC3E}">
-        <p14:creationId xmlns:p14="http://schemas.microsoft.com/office/powerpoint/2010/main" val="3602175556"/>
+        <p14:creationId xmlns:p14="http://schemas.microsoft.com/office/powerpoint/2010/main" val="4040777647"/>
       </p:ext>
     </p:extLst>
   </p:cSld>
@@ -1554,28 +1597,16 @@
           <a:lstStyle/>
           <a:p>
             <a:r>
-              <a:rPr lang="en-US" dirty="0"/>
-              <a:t>Prescriptions and Analytics are streamed. They load on demand, behind per-module skeletons.</a:t>
-            </a:r>
-          </a:p>
-          <a:p>
-            <a:endParaRPr lang="en-US" dirty="0"/>
-          </a:p>
-          <a:p>
-            <a:r>
-              <a:rPr lang="en-US" dirty="0"/>
-              <a:t>Every strategy still gets three layers of resilience. A catch on lazy, so an unreachable remote becomes a fallback instead of a white screen. Suspense, so a loading remote shows its own skeleton. An error boundary, so a runtime crash in one remote does not take down the app.</a:t>
-            </a:r>
-          </a:p>
-          <a:p>
-            <a:endParaRPr lang="en-GB" dirty="0"/>
+              <a:rPr lang="en-GB" dirty="0"/>
+              <a:t>So, this is the flow if I click the Prescriptions menu which will navigate to the Prescriptions app.</a:t>
+            </a:r>
           </a:p>
         </p:txBody>
       </p:sp>
     </p:spTree>
     <p:extLst>
       <p:ext uri="{BB962C8B-B14F-4D97-AF65-F5344CB8AC3E}">
-        <p14:creationId xmlns:p14="http://schemas.microsoft.com/office/powerpoint/2010/main" val="4040777647"/>
+        <p14:creationId xmlns:p14="http://schemas.microsoft.com/office/powerpoint/2010/main" val="874813599"/>
       </p:ext>
     </p:extLst>
   </p:cSld>
@@ -1651,17 +1682,164 @@
           <a:bodyPr/>
           <a:lstStyle/>
           <a:p>
-            <a:r>
-              <a:rPr lang="en-GB" dirty="0"/>
-              <a:t>So, this is the flow if I click the Prescriptions menu which will navigate to the Prescriptions app.</a:t>
-            </a:r>
+            <a:pPr marL="0" marR="0" lvl="0" indent="0" algn="l" defTabSz="914400" rtl="0" eaLnBrk="1" fontAlgn="auto" latinLnBrk="0" hangingPunct="1">
+              <a:lnSpc>
+                <a:spcPct val="100000"/>
+              </a:lnSpc>
+              <a:spcBef>
+                <a:spcPts val="0"/>
+              </a:spcBef>
+              <a:spcAft>
+                <a:spcPts val="0"/>
+              </a:spcAft>
+              <a:buClrTx/>
+              <a:buSzTx/>
+              <a:buFontTx/>
+              <a:buNone/>
+              <a:tabLst/>
+              <a:defRPr/>
+            </a:pPr>
+            <a:r>
+              <a:rPr lang="en-US" dirty="0"/>
+              <a:t>People ask why we wrap eager modules in </a:t>
+            </a:r>
+            <a:r>
+              <a:rPr lang="en-US" sz="1200" kern="1200" dirty="0">
+                <a:solidFill>
+                  <a:schemeClr val="tx1"/>
+                </a:solidFill>
+                <a:latin typeface="+mn-lt"/>
+                <a:ea typeface="+mn-ea"/>
+                <a:cs typeface="+mn-cs"/>
+              </a:rPr>
+              <a:t>lazy()</a:t>
+            </a:r>
+            <a:r>
+              <a:rPr lang="en-US" dirty="0"/>
+              <a:t>. It's because </a:t>
+            </a:r>
+            <a:r>
+              <a:rPr lang="en-US" sz="1200" kern="1200" dirty="0">
+                <a:solidFill>
+                  <a:schemeClr val="tx1"/>
+                </a:solidFill>
+                <a:latin typeface="+mn-lt"/>
+                <a:ea typeface="+mn-ea"/>
+                <a:cs typeface="+mn-cs"/>
+              </a:rPr>
+              <a:t>the</a:t>
+            </a:r>
+            <a:r>
+              <a:rPr lang="en-US" dirty="0"/>
+              <a:t> dynamic import in </a:t>
+            </a:r>
+            <a:r>
+              <a:rPr lang="en-US" dirty="0" err="1"/>
+              <a:t>index.tsx</a:t>
+            </a:r>
+            <a:r>
+              <a:rPr lang="en-US" dirty="0"/>
+              <a:t> already resolved the shared scope and that a static import makes the remote block first paint, and leaves nowhere to catch a failed remote. </a:t>
+            </a:r>
+          </a:p>
+          <a:p>
+            <a:pPr marL="0" marR="0" lvl="0" indent="0" algn="l" defTabSz="914400" rtl="0" eaLnBrk="1" fontAlgn="auto" latinLnBrk="0" hangingPunct="1">
+              <a:lnSpc>
+                <a:spcPct val="100000"/>
+              </a:lnSpc>
+              <a:spcBef>
+                <a:spcPts val="0"/>
+              </a:spcBef>
+              <a:spcAft>
+                <a:spcPts val="0"/>
+              </a:spcAft>
+              <a:buClrTx/>
+              <a:buSzTx/>
+              <a:buFontTx/>
+              <a:buNone/>
+              <a:tabLst/>
+              <a:defRPr/>
+            </a:pPr>
+            <a:endParaRPr lang="en-US" dirty="0"/>
+          </a:p>
+          <a:p>
+            <a:pPr marL="0" marR="0" lvl="0" indent="0" algn="l" defTabSz="914400" rtl="0" eaLnBrk="1" fontAlgn="auto" latinLnBrk="0" hangingPunct="1">
+              <a:lnSpc>
+                <a:spcPct val="100000"/>
+              </a:lnSpc>
+              <a:spcBef>
+                <a:spcPts val="0"/>
+              </a:spcBef>
+              <a:spcAft>
+                <a:spcPts val="0"/>
+              </a:spcAft>
+              <a:buClrTx/>
+              <a:buSzTx/>
+              <a:buFontTx/>
+              <a:buNone/>
+              <a:tabLst/>
+              <a:defRPr/>
+            </a:pPr>
+            <a:r>
+              <a:rPr lang="en-US" dirty="0"/>
+              <a:t>So, we fire </a:t>
+            </a:r>
+            <a:r>
+              <a:rPr lang="en-US" sz="1200" kern="1200" dirty="0">
+                <a:solidFill>
+                  <a:schemeClr val="tx1"/>
+                </a:solidFill>
+                <a:latin typeface="+mn-lt"/>
+                <a:ea typeface="+mn-ea"/>
+                <a:cs typeface="+mn-cs"/>
+              </a:rPr>
+              <a:t>import()</a:t>
+            </a:r>
+            <a:r>
+              <a:rPr lang="en-US" dirty="0"/>
+              <a:t> at shell </a:t>
+            </a:r>
+            <a:r>
+              <a:rPr lang="en-US" dirty="0" err="1"/>
+              <a:t>init</a:t>
+            </a:r>
+            <a:r>
+              <a:rPr lang="en-US" dirty="0"/>
+              <a:t> to warm it, and </a:t>
+            </a:r>
+            <a:r>
+              <a:rPr lang="en-US" sz="1200" kern="1200" dirty="0">
+                <a:solidFill>
+                  <a:schemeClr val="tx1"/>
+                </a:solidFill>
+                <a:latin typeface="+mn-lt"/>
+                <a:ea typeface="+mn-ea"/>
+                <a:cs typeface="+mn-cs"/>
+              </a:rPr>
+              <a:t>lazy()</a:t>
+            </a:r>
+            <a:r>
+              <a:rPr lang="en-US" dirty="0"/>
+              <a:t> resolves from the module registry instantly — while keeping the Suspense and </a:t>
+            </a:r>
+            <a:r>
+              <a:rPr lang="en-US" dirty="0" err="1"/>
+              <a:t>ErrorBoundary</a:t>
+            </a:r>
+            <a:r>
+              <a:rPr lang="en-US" dirty="0"/>
+              <a:t> per module.</a:t>
+            </a:r>
+          </a:p>
+          <a:p>
+            <a:endParaRPr lang="en-GB" dirty="0"/>
           </a:p>
         </p:txBody>
       </p:sp>
     </p:spTree>
     <p:extLst>
       <p:ext uri="{BB962C8B-B14F-4D97-AF65-F5344CB8AC3E}">
-        <p14:creationId xmlns:p14="http://schemas.microsoft.com/office/powerpoint/2010/main" val="874813599"/>
+        <p14:creationId xmlns:p14="http://schemas.microsoft.com/office/powerpoint/2010/main" val="2316851497"/>
       </p:ext>
     </p:extLst>
   </p:cSld>
@@ -1737,117 +1915,78 @@
           <a:bodyPr/>
           <a:lstStyle/>
           <a:p>
-            <a:pPr marL="0" marR="0" lvl="0" indent="0" algn="l" defTabSz="914400" rtl="0" eaLnBrk="1" fontAlgn="auto" latinLnBrk="0" hangingPunct="1">
-              <a:lnSpc>
-                <a:spcPct val="100000"/>
-              </a:lnSpc>
-              <a:spcBef>
-                <a:spcPts val="0"/>
-              </a:spcBef>
-              <a:spcAft>
-                <a:spcPts val="0"/>
-              </a:spcAft>
-              <a:buClrTx/>
-              <a:buSzTx/>
-              <a:buFontTx/>
-              <a:buNone/>
-              <a:tabLst/>
-              <a:defRPr/>
-            </a:pPr>
             <a:r>
               <a:rPr lang="en-US" dirty="0"/>
-              <a:t>People ask why we wrap eager modules in </a:t>
-            </a:r>
-            <a:r>
-              <a:rPr lang="en-US" sz="1200" kern="1200" dirty="0">
+              <a:t>Before I do another demo, here are the functionalities of the other buttons on the menu header.</a:t>
+            </a:r>
+          </a:p>
+          <a:p>
+            <a:endParaRPr lang="en-US" dirty="0"/>
+          </a:p>
+          <a:p>
+            <a:r>
+              <a:rPr lang="en-US" dirty="0"/>
+              <a:t>A health monitor that polls remoteEntry.js every five seconds. </a:t>
+            </a:r>
+          </a:p>
+          <a:p>
+            <a:r>
+              <a:rPr lang="en-US" dirty="0"/>
+              <a:t>Kill switches. </a:t>
+            </a:r>
+          </a:p>
+          <a:p>
+            <a:r>
+              <a:rPr lang="en-US" dirty="0"/>
+              <a:t>An A/B deployment ring. That panel is for the demo. I can take a module down in front of you and show you that the rest of the app keeps running. Basically, we are going to simulate </a:t>
+            </a:r>
+            <a:r>
+              <a:rPr lang="en-US" sz="1200" i="1" dirty="0">
                 <a:solidFill>
-                  <a:schemeClr val="tx1"/>
+                  <a:schemeClr val="bg1">
+                    <a:lumMod val="95000"/>
+                  </a:schemeClr>
                 </a:solidFill>
-                <a:latin typeface="+mn-lt"/>
-                <a:ea typeface="+mn-ea"/>
-                <a:cs typeface="+mn-cs"/>
+                <a:latin typeface="Instrument Serif" pitchFamily="34" charset="0"/>
+                <a:ea typeface="Instrument Serif" pitchFamily="34" charset="-122"/>
               </a:rPr>
-              <a:t>lazy()</a:t>
-            </a:r>
-            <a:r>
-              <a:rPr lang="en-US" dirty="0"/>
-              <a:t>. It's not that static imports are impossible — they work, because </a:t>
-            </a:r>
-            <a:r>
-              <a:rPr lang="en-US" sz="1200" kern="1200" dirty="0" err="1">
+              <a:t>m</a:t>
+            </a:r>
+            <a:r>
+              <a:rPr lang="en-US" sz="1200" i="1" dirty="0">
                 <a:solidFill>
-                  <a:schemeClr val="tx1"/>
+                  <a:schemeClr val="bg1">
+                    <a:lumMod val="95000"/>
+                  </a:schemeClr>
                 </a:solidFill>
-                <a:latin typeface="+mn-lt"/>
-                <a:ea typeface="+mn-ea"/>
-                <a:cs typeface="+mn-cs"/>
+                <a:latin typeface="Instrument Serif" pitchFamily="34" charset="0"/>
+                <a:ea typeface="Instrument Serif" pitchFamily="34" charset="-122"/>
+                <a:cs typeface="Instrument Serif" pitchFamily="34" charset="-120"/>
               </a:rPr>
-              <a:t>index.tsx</a:t>
-            </a:r>
-            <a:r>
-              <a:rPr lang="en-US" dirty="0" err="1"/>
-              <a:t>'s</a:t>
-            </a:r>
-            <a:r>
-              <a:rPr lang="en-US" dirty="0"/>
-              <a:t> dynamic import already resolved the shared scope. It's that a static import makes the remote block first paint, and leaves nowhere to catch a failed remote. So we fire </a:t>
-            </a:r>
-            <a:r>
-              <a:rPr lang="en-US" sz="1200" kern="1200" dirty="0">
+              <a:t>odule-level crashes, network failures, and bad deploys are isolated at the boundary. </a:t>
+            </a:r>
+          </a:p>
+          <a:p>
+            <a:r>
+              <a:rPr lang="en-US" sz="1200" i="0" dirty="0">
                 <a:solidFill>
-                  <a:schemeClr val="tx1"/>
+                  <a:schemeClr val="bg1">
+                    <a:lumMod val="95000"/>
+                  </a:schemeClr>
                 </a:solidFill>
-                <a:latin typeface="+mn-lt"/>
-                <a:ea typeface="+mn-ea"/>
-                <a:cs typeface="+mn-cs"/>
+                <a:latin typeface="Instrument Serif" pitchFamily="34" charset="0"/>
+                <a:ea typeface="Instrument Serif" pitchFamily="34" charset="-122"/>
               </a:rPr>
-              <a:t>import()</a:t>
-            </a:r>
-            <a:r>
-              <a:rPr lang="en-US" dirty="0"/>
-              <a:t> at shell </a:t>
-            </a:r>
-            <a:r>
-              <a:rPr lang="en-US" dirty="0" err="1"/>
-              <a:t>init</a:t>
-            </a:r>
-            <a:r>
-              <a:rPr lang="en-US" dirty="0"/>
-              <a:t> to warm it, and </a:t>
-            </a:r>
-            <a:r>
-              <a:rPr lang="en-US" sz="1200" kern="1200" dirty="0">
-                <a:solidFill>
-                  <a:schemeClr val="tx1"/>
-                </a:solidFill>
-                <a:latin typeface="+mn-lt"/>
-                <a:ea typeface="+mn-ea"/>
-                <a:cs typeface="+mn-cs"/>
-              </a:rPr>
-              <a:t>lazy()</a:t>
-            </a:r>
-            <a:r>
-              <a:rPr lang="en-US" dirty="0"/>
-              <a:t> resolves from the module registry instantly — while keeping the Suspense and </a:t>
-            </a:r>
-            <a:r>
-              <a:rPr lang="en-US" dirty="0" err="1"/>
-              <a:t>ErrorBoundary</a:t>
-            </a:r>
-            <a:r>
-              <a:rPr lang="en-US" dirty="0"/>
-              <a:t> per module.</a:t>
-            </a:r>
-          </a:p>
-          <a:p>
-            <a:endParaRPr lang="en-GB" dirty="0"/>
+              <a:t>Theming.</a:t>
+            </a:r>
+            <a:endParaRPr lang="en-US" i="0" dirty="0"/>
           </a:p>
         </p:txBody>
       </p:sp>
     </p:spTree>
     <p:extLst>
       <p:ext uri="{BB962C8B-B14F-4D97-AF65-F5344CB8AC3E}">
-        <p14:creationId xmlns:p14="http://schemas.microsoft.com/office/powerpoint/2010/main" val="2316851497"/>
+        <p14:creationId xmlns:p14="http://schemas.microsoft.com/office/powerpoint/2010/main" val="3599504877"/>
       </p:ext>
     </p:extLst>
   </p:cSld>
@@ -1923,69 +2062,14 @@
           <a:bodyPr/>
           <a:lstStyle/>
           <a:p>
-            <a:r>
-              <a:rPr lang="en-US" dirty="0"/>
-              <a:t>A health monitor that polls remoteEntry.js every five seconds. </a:t>
-            </a:r>
-          </a:p>
-          <a:p>
-            <a:r>
-              <a:rPr lang="en-US" dirty="0"/>
-              <a:t>Kill switches. </a:t>
-            </a:r>
-          </a:p>
-          <a:p>
-            <a:r>
-              <a:rPr lang="en-US" dirty="0"/>
-              <a:t>An A/B deployment ring. That panel is for the demo. I can take a module down in front of you and show you that the rest of the app keeps running. Basically, we are going to simulate </a:t>
-            </a:r>
-            <a:r>
-              <a:rPr lang="en-US" sz="1200" i="1" dirty="0">
-                <a:solidFill>
-                  <a:schemeClr val="bg1">
-                    <a:lumMod val="95000"/>
-                  </a:schemeClr>
-                </a:solidFill>
-                <a:latin typeface="Instrument Serif" pitchFamily="34" charset="0"/>
-                <a:ea typeface="Instrument Serif" pitchFamily="34" charset="-122"/>
-              </a:rPr>
-              <a:t>m</a:t>
-            </a:r>
-            <a:r>
-              <a:rPr lang="en-US" sz="1200" i="1" dirty="0">
-                <a:solidFill>
-                  <a:schemeClr val="bg1">
-                    <a:lumMod val="95000"/>
-                  </a:schemeClr>
-                </a:solidFill>
-                <a:latin typeface="Instrument Serif" pitchFamily="34" charset="0"/>
-                <a:ea typeface="Instrument Serif" pitchFamily="34" charset="-122"/>
-                <a:cs typeface="Instrument Serif" pitchFamily="34" charset="-120"/>
-              </a:rPr>
-              <a:t>odule-level crashes, network failures, and bad deploys are isolated at the boundary. </a:t>
-            </a:r>
-          </a:p>
-          <a:p>
-            <a:r>
-              <a:rPr lang="en-US" sz="1200" i="0" dirty="0">
-                <a:solidFill>
-                  <a:schemeClr val="bg1">
-                    <a:lumMod val="95000"/>
-                  </a:schemeClr>
-                </a:solidFill>
-                <a:latin typeface="Instrument Serif" pitchFamily="34" charset="0"/>
-                <a:ea typeface="Instrument Serif" pitchFamily="34" charset="-122"/>
-              </a:rPr>
-              <a:t>Theming.</a:t>
-            </a:r>
-            <a:endParaRPr lang="en-US" i="0" dirty="0"/>
+            <a:endParaRPr lang="en-US" dirty="0"/>
           </a:p>
         </p:txBody>
       </p:sp>
     </p:spTree>
     <p:extLst>
       <p:ext uri="{BB962C8B-B14F-4D97-AF65-F5344CB8AC3E}">
-        <p14:creationId xmlns:p14="http://schemas.microsoft.com/office/powerpoint/2010/main" val="3599504877"/>
+        <p14:creationId xmlns:p14="http://schemas.microsoft.com/office/powerpoint/2010/main" val="3835048777"/>
       </p:ext>
     </p:extLst>
   </p:cSld>
@@ -2157,7 +2241,15 @@
           <a:p>
             <a:r>
               <a:rPr lang="en-US" dirty="0"/>
-              <a:t>Why events instead of a shared store? A shared store is a shared dependency. </a:t>
+              <a:t>Why use the browser </a:t>
+            </a:r>
+            <a:r>
+              <a:rPr lang="en-US" dirty="0" err="1"/>
+              <a:t>api</a:t>
+            </a:r>
+            <a:r>
+              <a:rPr lang="en-US" dirty="0"/>
+              <a:t> events instead of a shared store? A shared store is a shared dependency. </a:t>
             </a:r>
           </a:p>
           <a:p>
@@ -2166,7 +2258,16 @@
           <a:p>
             <a:r>
               <a:rPr lang="en-US" dirty="0"/>
-              <a:t>There will be version coupling between teams if shared, while events survive independent deploys. They even survive framework diversity. For example, a Vue remote and a React remote can talk through the same window contract.</a:t>
+              <a:t>There will be version coupling between teams if shared stores, while the events will survive in independent deploys. </a:t>
+            </a:r>
+          </a:p>
+          <a:p>
+            <a:endParaRPr lang="en-US" dirty="0"/>
+          </a:p>
+          <a:p>
+            <a:r>
+              <a:rPr lang="en-US" dirty="0"/>
+              <a:t>They even survive framework diversity. For example, a Vue remote and a React remote can talk through the same window contract.</a:t>
             </a:r>
           </a:p>
           <a:p>
@@ -2333,15 +2434,7 @@
           <a:p>
             <a:r>
               <a:rPr lang="en-US" dirty="0"/>
-              <a:t>For server state, like </a:t>
-            </a:r>
-            <a:r>
-              <a:rPr lang="en-US" dirty="0" err="1"/>
-              <a:t>TanStack</a:t>
-            </a:r>
-            <a:r>
-              <a:rPr lang="en-US" dirty="0"/>
-              <a:t> Query, there's no syncing at all — every app just fetches, because the API is already the shared state.</a:t>
+              <a:t>For server state, like TanStack Query, there's no syncing at all — every app just fetches, because the REST API is already the shared state.</a:t>
             </a:r>
             <a:endParaRPr lang="en-GB" dirty="0"/>
           </a:p>
@@ -2522,114 +2615,24 @@
           <a:lstStyle/>
           <a:p>
             <a:r>
-              <a:rPr lang="en-US" dirty="0"/>
-              <a:t>Seven things to take with you.</a:t>
-            </a:r>
-          </a:p>
-          <a:p>
-            <a:endParaRPr lang="en-US" dirty="0"/>
-          </a:p>
-          <a:p>
-            <a:r>
-              <a:rPr lang="en-US" dirty="0"/>
-              <a:t>One. Micro-frontends solve a people problem. Adopt this when your team is growing and the monolith cannot keep up. And independent modules let independent teams ship without blocking each other. Rember the team size is the signal, not bundle size.</a:t>
-            </a:r>
-          </a:p>
-          <a:p>
-            <a:endParaRPr lang="en-US" dirty="0"/>
-          </a:p>
-          <a:p>
-            <a:r>
-              <a:rPr lang="en-US" dirty="0"/>
-              <a:t>Two. Suspense fallbacks cover load UX. Module Federation covers team DX. You want both. This demo runs both together.</a:t>
-            </a:r>
-          </a:p>
-          <a:p>
-            <a:endParaRPr lang="en-US" dirty="0"/>
-          </a:p>
-          <a:p>
-            <a:r>
-              <a:rPr lang="en-US" dirty="0"/>
-              <a:t>Three. Prefer events over shared state. A custom event on window gives you decoupled communication that survives independent deploys. Keep the payload backward compatible.</a:t>
-            </a:r>
-          </a:p>
-          <a:p>
-            <a:endParaRPr lang="en-US" dirty="0"/>
-          </a:p>
-          <a:p>
-            <a:r>
-              <a:rPr lang="en-US" dirty="0"/>
-              <a:t>Four. The host owns routing. Remotes can ask for navigation with </a:t>
-            </a:r>
-            <a:r>
-              <a:rPr lang="en-US" dirty="0" err="1"/>
-              <a:t>navigateToModule</a:t>
-            </a:r>
-            <a:r>
-              <a:rPr lang="en-US" dirty="0"/>
-              <a:t>. Only the shell mutates router state.</a:t>
-            </a:r>
-          </a:p>
-          <a:p>
-            <a:endParaRPr lang="en-US" dirty="0"/>
-          </a:p>
-          <a:p>
-            <a:r>
-              <a:rPr lang="en-US" dirty="0"/>
-              <a:t>Five. Ship fault isolation on purpose. A catch on every lazy import, plus an error boundary per module, keeps one broken remote from taking down the app.</a:t>
-            </a:r>
-          </a:p>
-          <a:p>
-            <a:endParaRPr lang="en-US" dirty="0"/>
-          </a:p>
-          <a:p>
-            <a:r>
-              <a:rPr lang="en-US" dirty="0"/>
-              <a:t>Six. </a:t>
-            </a:r>
-            <a:r>
-              <a:rPr lang="en-US" dirty="0" err="1"/>
-              <a:t>Rspack</a:t>
-            </a:r>
-            <a:r>
-              <a:rPr lang="en-US" dirty="0"/>
-              <a:t> keeps the </a:t>
-            </a:r>
-            <a:r>
-              <a:rPr lang="en-US" dirty="0" err="1"/>
-              <a:t>monorepo</a:t>
-            </a:r>
-            <a:r>
-              <a:rPr lang="en-US" dirty="0"/>
-              <a:t> fast. Sub-second hot reload across four applications. Module Federation is built in. </a:t>
-            </a:r>
-            <a:r>
-              <a:rPr lang="en-US" dirty="0" err="1"/>
-              <a:t>Rspack</a:t>
-            </a:r>
-            <a:r>
-              <a:rPr lang="en-US" dirty="0"/>
-              <a:t> ships the Rust React Compiler, and persistent caching for faster builds and faster restarts.</a:t>
-            </a:r>
-          </a:p>
-          <a:p>
-            <a:endParaRPr lang="en-US" dirty="0"/>
-          </a:p>
-          <a:p>
-            <a:r>
-              <a:rPr lang="en-US" dirty="0"/>
-              <a:t>Seven. Match load strategy to content priority. Instant for the landing page. Eager for high-value content. Suspense for secondary modules, with skeletons. Do not load every remote the same way.</a:t>
-            </a:r>
-          </a:p>
-          <a:p>
-            <a:endParaRPr lang="en-GB" dirty="0"/>
+              <a:rPr lang="en-GB" dirty="0"/>
+              <a:t>And before I end this presentation, I have two things here I want to share. This is important because of our work has changed from writing code to </a:t>
+            </a:r>
+            <a:r>
+              <a:rPr lang="en-GB" dirty="0" err="1"/>
+              <a:t>vibecoding</a:t>
+            </a:r>
+            <a:r>
+              <a:rPr lang="en-GB" dirty="0"/>
+              <a:t> using AI agents making us 20x engineers now.</a:t>
+            </a:r>
           </a:p>
         </p:txBody>
       </p:sp>
     </p:spTree>
     <p:extLst>
       <p:ext uri="{BB962C8B-B14F-4D97-AF65-F5344CB8AC3E}">
-        <p14:creationId xmlns:p14="http://schemas.microsoft.com/office/powerpoint/2010/main" val="693830592"/>
+        <p14:creationId xmlns:p14="http://schemas.microsoft.com/office/powerpoint/2010/main" val="2069423728"/>
       </p:ext>
     </p:extLst>
   </p:cSld>
@@ -2707,15 +2710,23 @@
           <a:p>
             <a:r>
               <a:rPr lang="en-GB" dirty="0"/>
-              <a:t>And before I end this presentation, I have 3 things here I want to share. This is important because of our work has changed from writing code to </a:t>
+              <a:t>First is, you can nest AGENTS.md files to your different micro frontend apps that’s good for your AI agents. And </a:t>
             </a:r>
             <a:r>
               <a:rPr lang="en-GB" dirty="0" err="1"/>
-              <a:t>vibecoding</a:t>
+              <a:t>Rspack</a:t>
             </a:r>
             <a:r>
               <a:rPr lang="en-GB" dirty="0"/>
-              <a:t> using AI agents making us 20x engineers now.</a:t>
+              <a:t> published agent skills that you can use just in case today’s frontier models still don’t have any idea what the </a:t>
+            </a:r>
+            <a:r>
+              <a:rPr lang="en-GB" dirty="0" err="1"/>
+              <a:t>Rspack</a:t>
+            </a:r>
+            <a:r>
+              <a:rPr lang="en-GB" dirty="0"/>
+              <a:t> v2.0 can do.</a:t>
             </a:r>
           </a:p>
         </p:txBody>
@@ -2723,7 +2734,7 @@
     </p:spTree>
     <p:extLst>
       <p:ext uri="{BB962C8B-B14F-4D97-AF65-F5344CB8AC3E}">
-        <p14:creationId xmlns:p14="http://schemas.microsoft.com/office/powerpoint/2010/main" val="2069423728"/>
+        <p14:creationId xmlns:p14="http://schemas.microsoft.com/office/powerpoint/2010/main" val="4203036748"/>
       </p:ext>
     </p:extLst>
   </p:cSld>
@@ -2817,92 +2828,6 @@
 </file>
 
 <file path=ppt/notesSlides/notesSlide30.xml><?xml version="1.0" encoding="utf-8"?>
-<p:notes xmlns:a="http://schemas.openxmlformats.org/drawingml/2006/main" xmlns:r="http://schemas.openxmlformats.org/officeDocument/2006/relationships" xmlns:p="http://schemas.openxmlformats.org/presentationml/2006/main">
-  <p:cSld>
-    <p:spTree>
-      <p:nvGrpSpPr>
-        <p:cNvPr id="1" name=""/>
-        <p:cNvGrpSpPr/>
-        <p:nvPr/>
-      </p:nvGrpSpPr>
-      <p:grpSpPr>
-        <a:xfrm>
-          <a:off x="0" y="0"/>
-          <a:ext cx="0" cy="0"/>
-          <a:chOff x="0" y="0"/>
-          <a:chExt cx="0" cy="0"/>
-        </a:xfrm>
-      </p:grpSpPr>
-      <p:sp>
-        <p:nvSpPr>
-          <p:cNvPr id="2" name="Slide Image Placeholder 1"/>
-          <p:cNvSpPr>
-            <a:spLocks noGrp="1" noRot="1" noChangeAspect="1"/>
-          </p:cNvSpPr>
-          <p:nvPr>
-            <p:ph type="sldImg"/>
-          </p:nvPr>
-        </p:nvSpPr>
-        <p:spPr>
-          <a:xfrm>
-            <a:off x="-225425" y="1524000"/>
-            <a:ext cx="7308850" cy="4113213"/>
-          </a:xfrm>
-          <a:prstGeom prst="rect">
-            <a:avLst/>
-          </a:prstGeom>
-          <a:noFill/>
-          <a:ln w="12700">
-            <a:solidFill>
-              <a:prstClr val="black"/>
-            </a:solidFill>
-          </a:ln>
-        </p:spPr>
-      </p:sp>
-      <p:sp>
-        <p:nvSpPr>
-          <p:cNvPr id="3" name="Notes Placeholder 2"/>
-          <p:cNvSpPr>
-            <a:spLocks noGrp="1"/>
-          </p:cNvSpPr>
-          <p:nvPr>
-            <p:ph type="body" idx="1"/>
-          </p:nvPr>
-        </p:nvSpPr>
-        <p:spPr>
-          <a:xfrm>
-            <a:off x="685800" y="5865813"/>
-            <a:ext cx="5486400" cy="4799012"/>
-          </a:xfrm>
-          <a:prstGeom prst="rect">
-            <a:avLst/>
-          </a:prstGeom>
-        </p:spPr>
-        <p:txBody>
-          <a:bodyPr/>
-          <a:lstStyle/>
-          <a:p>
-            <a:r>
-              <a:rPr lang="en-GB" dirty="0"/>
-              <a:t>First is, you can nest AGENTS.md files to your different micro frontend apps that’s good for your AI agents.</a:t>
-            </a:r>
-          </a:p>
-        </p:txBody>
-      </p:sp>
-    </p:spTree>
-    <p:extLst>
-      <p:ext uri="{BB962C8B-B14F-4D97-AF65-F5344CB8AC3E}">
-        <p14:creationId xmlns:p14="http://schemas.microsoft.com/office/powerpoint/2010/main" val="4203036748"/>
-      </p:ext>
-    </p:extLst>
-  </p:cSld>
-  <p:clrMapOvr>
-    <a:masterClrMapping/>
-  </p:clrMapOvr>
-</p:notes>
-</file>
-
-<file path=ppt/notesSlides/notesSlide31.xml><?xml version="1.0" encoding="utf-8"?>
 <p:notes xmlns:a="http://schemas.openxmlformats.org/drawingml/2006/main" xmlns:r="http://schemas.openxmlformats.org/officeDocument/2006/relationships" xmlns:p="http://schemas.openxmlformats.org/presentationml/2006/main">
   <p:cSld>
     <p:spTree>
@@ -2976,7 +2901,7 @@
             </a:br>
             <a:r>
               <a:rPr lang="en-US" dirty="0"/>
-              <a:t>Keep learning the technical details of things that you are building. This will help you in the future in guiding agents to the right directions. It will save money because of lesser prompting. And lastly it will improve your skills</a:t>
+              <a:t>Keep learning the technical details of things that you are building. This will help you in the future in guiding agents to the right directions. It will save you money because of lesser prompting. And lastly it will improve your skills</a:t>
             </a:r>
           </a:p>
         </p:txBody>
@@ -3004,7 +2929,7 @@
           <a:p>
             <a:fld id="{F7021451-1387-4CA6-816F-3879F97B5CBC}" type="slidenum">
               <a:rPr lang="en-US"/>
-              <a:t>35</a:t>
+              <a:t>33</a:t>
             </a:fld>
             <a:endParaRPr lang="en-US"/>
           </a:p>
@@ -3023,90 +2948,7 @@
 </p:notes>
 </file>
 
-<file path=ppt/notesSlides/notesSlide32.xml><?xml version="1.0" encoding="utf-8"?>
-<p:notes xmlns:a="http://schemas.openxmlformats.org/drawingml/2006/main" xmlns:r="http://schemas.openxmlformats.org/officeDocument/2006/relationships" xmlns:p="http://schemas.openxmlformats.org/presentationml/2006/main">
-  <p:cSld>
-    <p:spTree>
-      <p:nvGrpSpPr>
-        <p:cNvPr id="1" name=""/>
-        <p:cNvGrpSpPr/>
-        <p:nvPr/>
-      </p:nvGrpSpPr>
-      <p:grpSpPr>
-        <a:xfrm>
-          <a:off x="0" y="0"/>
-          <a:ext cx="0" cy="0"/>
-          <a:chOff x="0" y="0"/>
-          <a:chExt cx="0" cy="0"/>
-        </a:xfrm>
-      </p:grpSpPr>
-      <p:sp>
-        <p:nvSpPr>
-          <p:cNvPr id="2" name="Slide Image Placeholder 1"/>
-          <p:cNvSpPr>
-            <a:spLocks noGrp="1" noRot="1" noChangeAspect="1"/>
-          </p:cNvSpPr>
-          <p:nvPr>
-            <p:ph type="sldImg"/>
-          </p:nvPr>
-        </p:nvSpPr>
-        <p:spPr>
-          <a:xfrm>
-            <a:off x="685800" y="1143000"/>
-            <a:ext cx="5486400" cy="3086100"/>
-          </a:xfrm>
-          <a:prstGeom prst="rect">
-            <a:avLst/>
-          </a:prstGeom>
-          <a:noFill/>
-          <a:ln w="12700">
-            <a:solidFill>
-              <a:prstClr val="black"/>
-            </a:solidFill>
-          </a:ln>
-        </p:spPr>
-      </p:sp>
-      <p:sp>
-        <p:nvSpPr>
-          <p:cNvPr id="3" name="Notes Placeholder 2"/>
-          <p:cNvSpPr>
-            <a:spLocks noGrp="1"/>
-          </p:cNvSpPr>
-          <p:nvPr>
-            <p:ph type="body" idx="1"/>
-          </p:nvPr>
-        </p:nvSpPr>
-        <p:spPr>
-          <a:xfrm>
-            <a:off x="685800" y="4400550"/>
-            <a:ext cx="5486400" cy="3600450"/>
-          </a:xfrm>
-          <a:prstGeom prst="rect">
-            <a:avLst/>
-          </a:prstGeom>
-        </p:spPr>
-        <p:txBody>
-          <a:bodyPr/>
-          <a:lstStyle/>
-          <a:p>
-            <a:endParaRPr lang="en-GB" dirty="0"/>
-          </a:p>
-        </p:txBody>
-      </p:sp>
-    </p:spTree>
-    <p:extLst>
-      <p:ext uri="{BB962C8B-B14F-4D97-AF65-F5344CB8AC3E}">
-        <p14:creationId xmlns:p14="http://schemas.microsoft.com/office/powerpoint/2010/main" val="922607855"/>
-      </p:ext>
-    </p:extLst>
-  </p:cSld>
-  <p:clrMapOvr>
-    <a:masterClrMapping/>
-  </p:clrMapOvr>
-</p:notes>
-</file>
-
-<file path=ppt/notesSlides/notesSlide33.xml><?xml version="1.0" encoding="utf-8"?>
+<file path=ppt/notesSlides/notesSlide31.xml><?xml version="1.0" encoding="utf-8"?>
 <p:notes xmlns:a="http://schemas.openxmlformats.org/drawingml/2006/main" xmlns:r="http://schemas.openxmlformats.org/officeDocument/2006/relationships" xmlns:p="http://schemas.openxmlformats.org/presentationml/2006/main">
   <p:cSld>
     <p:spTree>
@@ -3255,7 +3097,39 @@
           <a:bodyPr/>
           <a:lstStyle/>
           <a:p>
-            <a:endParaRPr lang="en-GB"/>
+            <a:pPr marL="0" marR="0" lvl="0" indent="0" algn="l" defTabSz="914400" rtl="0" eaLnBrk="1" fontAlgn="auto" latinLnBrk="0" hangingPunct="1">
+              <a:lnSpc>
+                <a:spcPct val="100000"/>
+              </a:lnSpc>
+              <a:spcBef>
+                <a:spcPts val="0"/>
+              </a:spcBef>
+              <a:spcAft>
+                <a:spcPts val="0"/>
+              </a:spcAft>
+              <a:buClrTx/>
+              <a:buSzTx/>
+              <a:buFontTx/>
+              <a:buNone/>
+              <a:tabLst/>
+              <a:defRPr/>
+            </a:pPr>
+            <a:r>
+              <a:rPr lang="en-US" sz="1200" dirty="0"/>
+              <a:t>What are we solving here in </a:t>
+            </a:r>
+            <a:r>
+              <a:rPr lang="en-US" sz="1200" dirty="0" err="1"/>
+              <a:t>microfrontends</a:t>
+            </a:r>
+            <a:r>
+              <a:rPr lang="en-US" sz="1200" dirty="0"/>
+              <a:t>?</a:t>
+            </a:r>
+            <a:endParaRPr lang="en-GB" sz="1200" dirty="0"/>
+          </a:p>
+          <a:p>
+            <a:endParaRPr lang="en-GB" dirty="0"/>
           </a:p>
         </p:txBody>
       </p:sp>
@@ -3342,6 +3216,32 @@
               <a:rPr lang="en-US" dirty="0"/>
               <a:t>Here's the first. </a:t>
             </a:r>
+          </a:p>
+          <a:p>
+            <a:pPr marL="0" marR="0" lvl="0" indent="0" algn="l" defTabSz="914400" rtl="0" eaLnBrk="1" fontAlgn="auto" latinLnBrk="0" hangingPunct="1">
+              <a:lnSpc>
+                <a:spcPct val="100000"/>
+              </a:lnSpc>
+              <a:spcBef>
+                <a:spcPts val="0"/>
+              </a:spcBef>
+              <a:spcAft>
+                <a:spcPts val="0"/>
+              </a:spcAft>
+              <a:buClrTx/>
+              <a:buSzTx/>
+              <a:buFontTx/>
+              <a:buNone/>
+              <a:tabLst/>
+              <a:defRPr/>
+            </a:pPr>
+            <a:r>
+              <a:rPr lang="en-US" sz="1200" dirty="0"/>
+              <a:t>Independent deploys, and a smaller blast radius</a:t>
+            </a:r>
+            <a:endParaRPr lang="en-GB" sz="1200" dirty="0"/>
+          </a:p>
+          <a:p>
             <a:endParaRPr lang="en-GB" dirty="0"/>
           </a:p>
         </p:txBody>
@@ -3443,7 +3343,7 @@
             </a:r>
             <a:r>
               <a:rPr lang="en-US" dirty="0"/>
-              <a:t> coupling — teams can share a repo happily, but sharing a release train means one team's red build becomes everyone's problem.</a:t>
+              <a:t> coupling. Teams can share a repo happily, but sharing a release pipeline means one failing build becomes everyone's problem.</a:t>
             </a:r>
           </a:p>
           <a:p>
@@ -3566,8 +3466,34 @@
           <a:p>
             <a:r>
               <a:rPr lang="en-US" dirty="0"/>
-              <a:t>Second reason</a:t>
-            </a:r>
+              <a:t>Second reason.</a:t>
+            </a:r>
+          </a:p>
+          <a:p>
+            <a:pPr marL="0" marR="0" lvl="0" indent="0" algn="l" defTabSz="914400" rtl="0" eaLnBrk="1" fontAlgn="auto" latinLnBrk="0" hangingPunct="1">
+              <a:lnSpc>
+                <a:spcPct val="100000"/>
+              </a:lnSpc>
+              <a:spcBef>
+                <a:spcPts val="0"/>
+              </a:spcBef>
+              <a:spcAft>
+                <a:spcPts val="0"/>
+              </a:spcAft>
+              <a:buClrTx/>
+              <a:buSzTx/>
+              <a:buFontTx/>
+              <a:buNone/>
+              <a:tabLst/>
+              <a:defRPr/>
+            </a:pPr>
+            <a:r>
+              <a:rPr lang="en-US" sz="1200" dirty="0"/>
+              <a:t>Ownership becomes structural, not cultural</a:t>
+            </a:r>
+            <a:endParaRPr lang="en-GB" sz="1200" dirty="0"/>
+          </a:p>
+          <a:p>
             <a:endParaRPr lang="en-GB" dirty="0"/>
           </a:p>
         </p:txBody>
@@ -3653,7 +3579,34 @@
           <a:p>
             <a:r>
               <a:rPr lang="en-US" dirty="0"/>
-              <a:t>Up top, Checkout, Catalog, and Account are one app, so any team can import from any other part. The dashed lines are those reaches — they look like normal imports, so nobody notices them in review. Down below, each part ships separately, so using Catalog's code means adding a dependency or calling an API. That is a real change in a real file, and a reviewer will see it. Before, crossing a boundary was invisible. After, it is visible. </a:t>
+              <a:t>Up top, Checkout, Catalog, and Account are one app, so any team can import from any other part. The dashed lines are those reaches — they look like normal imports, so nobody notices them in review. </a:t>
+            </a:r>
+          </a:p>
+          <a:p>
+            <a:endParaRPr lang="en-US" dirty="0"/>
+          </a:p>
+          <a:p>
+            <a:r>
+              <a:rPr lang="en-US" dirty="0"/>
+              <a:t>Down below, each part ships separately, so using Catalog's code means adding a dependency or calling an API. That is a real change in a real file, and a reviewer will see it. </a:t>
+            </a:r>
+          </a:p>
+          <a:p>
+            <a:endParaRPr lang="en-US" dirty="0"/>
+          </a:p>
+          <a:p>
+            <a:r>
+              <a:rPr lang="en-US" dirty="0"/>
+              <a:t>Before, crossing a boundary was invisible. </a:t>
+            </a:r>
+          </a:p>
+          <a:p>
+            <a:endParaRPr lang="en-US" dirty="0"/>
+          </a:p>
+          <a:p>
+            <a:r>
+              <a:rPr lang="en-US" dirty="0"/>
+              <a:t>After, it is visible. </a:t>
             </a:r>
           </a:p>
           <a:p>
@@ -3766,9 +3719,35 @@
           <a:p>
             <a:r>
               <a:rPr lang="en-US" dirty="0"/>
-              <a:t>Third reason</a:t>
-            </a:r>
-            <a:endParaRPr lang="en-GB" dirty="0"/>
+              <a:t>Third reason.</a:t>
+            </a:r>
+          </a:p>
+          <a:p>
+            <a:pPr marL="0" marR="0" lvl="0" indent="0" algn="l" defTabSz="914400" rtl="0" eaLnBrk="1" fontAlgn="auto" latinLnBrk="0" hangingPunct="1">
+              <a:lnSpc>
+                <a:spcPct val="100000"/>
+              </a:lnSpc>
+              <a:spcBef>
+                <a:spcPts val="0"/>
+              </a:spcBef>
+              <a:spcAft>
+                <a:spcPts val="0"/>
+              </a:spcAft>
+              <a:buClrTx/>
+              <a:buSzTx/>
+              <a:buFontTx/>
+              <a:buNone/>
+              <a:tabLst/>
+              <a:defRPr/>
+            </a:pPr>
+            <a:r>
+              <a:rPr lang="en-US" sz="1200" dirty="0"/>
+              <a:t>Bounded cognitive load as headcount grows.</a:t>
+            </a:r>
+            <a:endParaRPr lang="en-US" dirty="0"/>
+          </a:p>
+          <a:p>
+            <a:endParaRPr lang="en-US" dirty="0"/>
           </a:p>
         </p:txBody>
       </p:sp>
@@ -3849,7 +3828,7 @@
           <a:p>
             <a:fld id="{5BCAD085-E8A6-8845-BD4E-CB4CCA059FC4}" type="datetimeFigureOut">
               <a:rPr lang="en-US" smtClean="0"/>
-              <a:t>9/8/2026</a:t>
+              <a:t>9/9/26</a:t>
             </a:fld>
             <a:endParaRPr lang="en-US"/>
           </a:p>
@@ -3932,6 +3911,54 @@
           <a:chExt cx="0" cy="0"/>
         </a:xfrm>
       </p:grpSpPr>
+      <p:sp>
+        <p:nvSpPr>
+          <p:cNvPr id="3" name="TextBox 2">
+            <a:extLst>
+              <a:ext uri="{FF2B5EF4-FFF2-40B4-BE49-F238E27FC236}">
+                <a16:creationId xmlns:a16="http://schemas.microsoft.com/office/drawing/2014/main" id="{955660AF-94A0-DF3F-40C1-547982EAE766}"/>
+              </a:ext>
+            </a:extLst>
+          </p:cNvPr>
+          <p:cNvSpPr txBox="1"/>
+          <p:nvPr userDrawn="1">
+            <p:extLst>
+              <p:ext uri="{1162E1C5-73C7-4A58-AE30-91384D911F3F}">
+                <p184:classification xmlns:p184="http://schemas.microsoft.com/office/powerpoint/2018/4/main" val="ftr"/>
+              </p:ext>
+            </p:extLst>
+          </p:nvPr>
+        </p:nvSpPr>
+        <p:spPr>
+          <a:xfrm>
+            <a:off x="63500" y="6642100"/>
+            <a:ext cx="730250" cy="152400"/>
+          </a:xfrm>
+          <a:prstGeom prst="rect">
+            <a:avLst/>
+          </a:prstGeom>
+        </p:spPr>
+        <p:txBody>
+          <a:bodyPr horzOverflow="overflow" lIns="0" tIns="0" rIns="0" bIns="0">
+            <a:spAutoFit/>
+          </a:bodyPr>
+          <a:lstStyle/>
+          <a:p>
+            <a:pPr algn="l"/>
+            <a:r>
+              <a:rPr lang="en-US" sz="1000">
+                <a:solidFill>
+                  <a:srgbClr val="000000">
+                    <a:alpha val="50000"/>
+                  </a:srgbClr>
+                </a:solidFill>
+                <a:latin typeface="Aptos" panose="020B0004020202020204" pitchFamily="34" charset="0"/>
+              </a:rPr>
+              <a:t>Internal Only</a:t>
+            </a:r>
+          </a:p>
+        </p:txBody>
+      </p:sp>
     </p:spTree>
   </p:cSld>
   <p:clrMap bg1="lt1" tx1="dk1" bg2="lt2" tx2="dk2" accent1="accent1" accent2="accent2" accent3="accent3" accent4="accent4" accent5="accent5" accent6="accent6" hlink="hlink" folHlink="folHlink"/>
@@ -6424,984 +6451,6 @@
   <p:cSld>
     <p:spTree>
       <p:nvGrpSpPr>
-        <p:cNvPr id="1" name=""/>
-        <p:cNvGrpSpPr/>
-        <p:nvPr/>
-      </p:nvGrpSpPr>
-      <p:grpSpPr>
-        <a:xfrm>
-          <a:off x="0" y="0"/>
-          <a:ext cx="0" cy="0"/>
-          <a:chOff x="0" y="0"/>
-          <a:chExt cx="0" cy="0"/>
-        </a:xfrm>
-      </p:grpSpPr>
-      <p:sp>
-        <p:nvSpPr>
-          <p:cNvPr id="3" name="Text 2">
-            <a:extLst>
-              <a:ext uri="{FF2B5EF4-FFF2-40B4-BE49-F238E27FC236}">
-                <a16:creationId xmlns:a16="http://schemas.microsoft.com/office/drawing/2014/main" id="{71A9CA60-7D30-2150-A7B8-47F46A40441E}"/>
-              </a:ext>
-            </a:extLst>
-          </p:cNvPr>
-          <p:cNvSpPr/>
-          <p:nvPr/>
-        </p:nvSpPr>
-        <p:spPr>
-          <a:xfrm>
-            <a:off x="530352" y="713232"/>
-            <a:ext cx="11109960" cy="777240"/>
-          </a:xfrm>
-          <a:prstGeom prst="rect">
-            <a:avLst/>
-          </a:prstGeom>
-          <a:noFill/>
-          <a:ln/>
-        </p:spPr>
-        <p:txBody>
-          <a:bodyPr wrap="square" rtlCol="0" anchor="ctr"/>
-          <a:lstStyle/>
-          <a:p>
-            <a:pPr marL="0" indent="0">
-              <a:buNone/>
-            </a:pPr>
-            <a:r>
-              <a:rPr lang="en-US" sz="3300" i="1" dirty="0">
-                <a:solidFill>
-                  <a:schemeClr val="tx1">
-                    <a:lumMod val="95000"/>
-                    <a:lumOff val="5000"/>
-                  </a:schemeClr>
-                </a:solidFill>
-                <a:latin typeface="Instrument Serif" pitchFamily="34" charset="0"/>
-                <a:ea typeface="Instrument Serif" pitchFamily="34" charset="-122"/>
-                <a:cs typeface="Instrument Serif" pitchFamily="34" charset="-120"/>
-              </a:rPr>
-              <a:t>Two-tier preloading: eager on mount, hover on demand</a:t>
-            </a:r>
-            <a:endParaRPr lang="en-US" sz="3300" dirty="0">
-              <a:solidFill>
-                <a:schemeClr val="tx1">
-                  <a:lumMod val="95000"/>
-                  <a:lumOff val="5000"/>
-                </a:schemeClr>
-              </a:solidFill>
-            </a:endParaRPr>
-          </a:p>
-        </p:txBody>
-      </p:sp>
-      <p:graphicFrame>
-        <p:nvGraphicFramePr>
-          <p:cNvPr id="5" name="Table 0">
-            <a:extLst>
-              <a:ext uri="{FF2B5EF4-FFF2-40B4-BE49-F238E27FC236}">
-                <a16:creationId xmlns:a16="http://schemas.microsoft.com/office/drawing/2014/main" id="{48D1E0C3-A9F2-6530-FB9F-3E86D646F9DB}"/>
-              </a:ext>
-            </a:extLst>
-          </p:cNvPr>
-          <p:cNvGraphicFramePr>
-            <a:graphicFrameLocks noGrp="1"/>
-          </p:cNvGraphicFramePr>
-          <p:nvPr/>
-        </p:nvGraphicFramePr>
-        <p:xfrm>
-          <a:off x="548640" y="2302742"/>
-          <a:ext cx="11064240" cy="2252516"/>
-        </p:xfrm>
-        <a:graphic>
-          <a:graphicData uri="http://schemas.openxmlformats.org/drawingml/2006/table">
-            <a:tbl>
-              <a:tblPr/>
-              <a:tblGrid>
-                <a:gridCol w="1645920">
-                  <a:extLst>
-                    <a:ext uri="{9D8B030D-6E8A-4147-A177-3AD203B41FA5}">
-                      <a16:colId xmlns:a16="http://schemas.microsoft.com/office/drawing/2014/main" val="20000"/>
-                    </a:ext>
-                  </a:extLst>
-                </a:gridCol>
-                <a:gridCol w="5760720">
-                  <a:extLst>
-                    <a:ext uri="{9D8B030D-6E8A-4147-A177-3AD203B41FA5}">
-                      <a16:colId xmlns:a16="http://schemas.microsoft.com/office/drawing/2014/main" val="20001"/>
-                    </a:ext>
-                  </a:extLst>
-                </a:gridCol>
-                <a:gridCol w="3657600">
-                  <a:extLst>
-                    <a:ext uri="{9D8B030D-6E8A-4147-A177-3AD203B41FA5}">
-                      <a16:colId xmlns:a16="http://schemas.microsoft.com/office/drawing/2014/main" val="20002"/>
-                    </a:ext>
-                  </a:extLst>
-                </a:gridCol>
-              </a:tblGrid>
-              <a:tr h="541241">
-                <a:tc>
-                  <a:txBody>
-                    <a:bodyPr/>
-                    <a:lstStyle/>
-                    <a:p>
-                      <a:pPr marL="0" indent="0">
-                        <a:buNone/>
-                      </a:pPr>
-                      <a:r>
-                        <a:rPr lang="en-US" sz="1400" b="1" kern="0" spc="200" dirty="0">
-                          <a:solidFill>
-                            <a:srgbClr val="D4FF00"/>
-                          </a:solidFill>
-                          <a:latin typeface="IBM Plex Mono" pitchFamily="34" charset="0"/>
-                          <a:ea typeface="IBM Plex Mono" pitchFamily="34" charset="-122"/>
-                          <a:cs typeface="IBM Plex Mono" pitchFamily="34" charset="-120"/>
-                        </a:rPr>
-                        <a:t>STRATEGY</a:t>
-                      </a:r>
-                      <a:endParaRPr lang="en-US" sz="1400" dirty="0">
-                        <a:latin typeface="IBM Plex Mono" charset="0"/>
-                        <a:ea typeface="IBM Plex Mono" charset="0"/>
-                        <a:cs typeface="IBM Plex Mono" charset="0"/>
-                      </a:endParaRPr>
-                    </a:p>
-                  </a:txBody>
-                  <a:tcPr marL="76200" marR="76200" marT="76200" marB="76200" anchor="ctr">
-                    <a:lnL w="9525" cap="flat" cmpd="sng" algn="ctr">
-                      <a:solidFill>
-                        <a:srgbClr val="2E2E2E"/>
-                      </a:solidFill>
-                      <a:prstDash val="solid"/>
-                      <a:round/>
-                      <a:headEnd type="none" w="med" len="med"/>
-                      <a:tailEnd type="none" w="med" len="med"/>
-                    </a:lnL>
-                    <a:lnR w="9525" cap="flat" cmpd="sng" algn="ctr">
-                      <a:solidFill>
-                        <a:srgbClr val="2E2E2E"/>
-                      </a:solidFill>
-                      <a:prstDash val="solid"/>
-                      <a:round/>
-                      <a:headEnd type="none" w="med" len="med"/>
-                      <a:tailEnd type="none" w="med" len="med"/>
-                    </a:lnR>
-                    <a:lnT w="9525" cap="flat" cmpd="sng" algn="ctr">
-                      <a:solidFill>
-                        <a:srgbClr val="2E2E2E"/>
-                      </a:solidFill>
-                      <a:prstDash val="solid"/>
-                      <a:round/>
-                      <a:headEnd type="none" w="med" len="med"/>
-                      <a:tailEnd type="none" w="med" len="med"/>
-                    </a:lnT>
-                    <a:lnB w="9525" cap="flat" cmpd="sng" algn="ctr">
-                      <a:solidFill>
-                        <a:srgbClr val="2E2E2E"/>
-                      </a:solidFill>
-                      <a:prstDash val="solid"/>
-                      <a:round/>
-                      <a:headEnd type="none" w="med" len="med"/>
-                      <a:tailEnd type="none" w="med" len="med"/>
-                    </a:lnB>
-                    <a:solidFill>
-                      <a:srgbClr val="1C1C1C"/>
-                    </a:solidFill>
-                  </a:tcPr>
-                </a:tc>
-                <a:tc>
-                  <a:txBody>
-                    <a:bodyPr/>
-                    <a:lstStyle/>
-                    <a:p>
-                      <a:pPr marL="0" indent="0">
-                        <a:buNone/>
-                      </a:pPr>
-                      <a:r>
-                        <a:rPr lang="en-US" sz="1400" b="1" kern="0" spc="200" dirty="0">
-                          <a:solidFill>
-                            <a:srgbClr val="D4FF00"/>
-                          </a:solidFill>
-                          <a:latin typeface="IBM Plex Mono" pitchFamily="34" charset="0"/>
-                          <a:ea typeface="IBM Plex Mono" pitchFamily="34" charset="-122"/>
-                          <a:cs typeface="IBM Plex Mono" pitchFamily="34" charset="-120"/>
-                        </a:rPr>
-                        <a:t>WHEN IT LOADS</a:t>
-                      </a:r>
-                      <a:endParaRPr lang="en-US" sz="1400" dirty="0">
-                        <a:latin typeface="IBM Plex Mono" charset="0"/>
-                        <a:ea typeface="IBM Plex Mono" charset="0"/>
-                        <a:cs typeface="IBM Plex Mono" charset="0"/>
-                      </a:endParaRPr>
-                    </a:p>
-                  </a:txBody>
-                  <a:tcPr marL="76200" marR="76200" marT="76200" marB="76200" anchor="ctr">
-                    <a:lnL w="9525" cap="flat" cmpd="sng" algn="ctr">
-                      <a:solidFill>
-                        <a:srgbClr val="2E2E2E"/>
-                      </a:solidFill>
-                      <a:prstDash val="solid"/>
-                      <a:round/>
-                      <a:headEnd type="none" w="med" len="med"/>
-                      <a:tailEnd type="none" w="med" len="med"/>
-                    </a:lnL>
-                    <a:lnR w="9525" cap="flat" cmpd="sng" algn="ctr">
-                      <a:solidFill>
-                        <a:srgbClr val="2E2E2E"/>
-                      </a:solidFill>
-                      <a:prstDash val="solid"/>
-                      <a:round/>
-                      <a:headEnd type="none" w="med" len="med"/>
-                      <a:tailEnd type="none" w="med" len="med"/>
-                    </a:lnR>
-                    <a:lnT w="9525" cap="flat" cmpd="sng" algn="ctr">
-                      <a:solidFill>
-                        <a:srgbClr val="2E2E2E"/>
-                      </a:solidFill>
-                      <a:prstDash val="solid"/>
-                      <a:round/>
-                      <a:headEnd type="none" w="med" len="med"/>
-                      <a:tailEnd type="none" w="med" len="med"/>
-                    </a:lnT>
-                    <a:lnB w="9525" cap="flat" cmpd="sng" algn="ctr">
-                      <a:solidFill>
-                        <a:srgbClr val="2E2E2E"/>
-                      </a:solidFill>
-                      <a:prstDash val="solid"/>
-                      <a:round/>
-                      <a:headEnd type="none" w="med" len="med"/>
-                      <a:tailEnd type="none" w="med" len="med"/>
-                    </a:lnB>
-                    <a:solidFill>
-                      <a:srgbClr val="1C1C1C"/>
-                    </a:solidFill>
-                  </a:tcPr>
-                </a:tc>
-                <a:tc>
-                  <a:txBody>
-                    <a:bodyPr/>
-                    <a:lstStyle/>
-                    <a:p>
-                      <a:pPr marL="0" indent="0">
-                        <a:buNone/>
-                      </a:pPr>
-                      <a:r>
-                        <a:rPr lang="en-US" sz="1400" b="1" kern="0" spc="200" dirty="0">
-                          <a:solidFill>
-                            <a:srgbClr val="D4FF00"/>
-                          </a:solidFill>
-                          <a:latin typeface="IBM Plex Mono" pitchFamily="34" charset="0"/>
-                          <a:ea typeface="IBM Plex Mono" pitchFamily="34" charset="-122"/>
-                          <a:cs typeface="IBM Plex Mono" pitchFamily="34" charset="-120"/>
-                        </a:rPr>
-                        <a:t>EXAMPLE</a:t>
-                      </a:r>
-                      <a:endParaRPr lang="en-US" sz="1400" dirty="0">
-                        <a:latin typeface="IBM Plex Mono" charset="0"/>
-                        <a:ea typeface="IBM Plex Mono" charset="0"/>
-                        <a:cs typeface="IBM Plex Mono" charset="0"/>
-                      </a:endParaRPr>
-                    </a:p>
-                  </a:txBody>
-                  <a:tcPr marL="76200" marR="76200" marT="76200" marB="76200" anchor="ctr">
-                    <a:lnL w="9525" cap="flat" cmpd="sng" algn="ctr">
-                      <a:solidFill>
-                        <a:srgbClr val="2E2E2E"/>
-                      </a:solidFill>
-                      <a:prstDash val="solid"/>
-                      <a:round/>
-                      <a:headEnd type="none" w="med" len="med"/>
-                      <a:tailEnd type="none" w="med" len="med"/>
-                    </a:lnL>
-                    <a:lnR w="9525" cap="flat" cmpd="sng" algn="ctr">
-                      <a:solidFill>
-                        <a:srgbClr val="2E2E2E"/>
-                      </a:solidFill>
-                      <a:prstDash val="solid"/>
-                      <a:round/>
-                      <a:headEnd type="none" w="med" len="med"/>
-                      <a:tailEnd type="none" w="med" len="med"/>
-                    </a:lnR>
-                    <a:lnT w="9525" cap="flat" cmpd="sng" algn="ctr">
-                      <a:solidFill>
-                        <a:srgbClr val="2E2E2E"/>
-                      </a:solidFill>
-                      <a:prstDash val="solid"/>
-                      <a:round/>
-                      <a:headEnd type="none" w="med" len="med"/>
-                      <a:tailEnd type="none" w="med" len="med"/>
-                    </a:lnT>
-                    <a:lnB w="9525" cap="flat" cmpd="sng" algn="ctr">
-                      <a:solidFill>
-                        <a:srgbClr val="2E2E2E"/>
-                      </a:solidFill>
-                      <a:prstDash val="solid"/>
-                      <a:round/>
-                      <a:headEnd type="none" w="med" len="med"/>
-                      <a:tailEnd type="none" w="med" len="med"/>
-                    </a:lnB>
-                    <a:solidFill>
-                      <a:srgbClr val="1C1C1C"/>
-                    </a:solidFill>
-                  </a:tcPr>
-                </a:tc>
-                <a:extLst>
-                  <a:ext uri="{0D108BD9-81ED-4DB2-BD59-A6C34878D82A}">
-                    <a16:rowId xmlns:a16="http://schemas.microsoft.com/office/drawing/2014/main" val="10000"/>
-                  </a:ext>
-                </a:extLst>
-              </a:tr>
-              <a:tr h="570425">
-                <a:tc>
-                  <a:txBody>
-                    <a:bodyPr/>
-                    <a:lstStyle/>
-                    <a:p>
-                      <a:pPr marL="0" indent="0">
-                        <a:buNone/>
-                      </a:pPr>
-                      <a:r>
-                        <a:rPr lang="en-US" sz="2000" dirty="0">
-                          <a:solidFill>
-                            <a:srgbClr val="FAFAF9"/>
-                          </a:solidFill>
-                          <a:latin typeface="DM Sans" pitchFamily="34" charset="0"/>
-                          <a:ea typeface="DM Sans" pitchFamily="34" charset="-122"/>
-                          <a:cs typeface="DM Sans" pitchFamily="34" charset="-120"/>
-                        </a:rPr>
-                        <a:t>Instant</a:t>
-                      </a:r>
-                      <a:endParaRPr lang="en-US" sz="2000" dirty="0">
-                        <a:latin typeface="DM Sans" charset="0"/>
-                        <a:ea typeface="DM Sans" charset="0"/>
-                        <a:cs typeface="DM Sans" charset="0"/>
-                      </a:endParaRPr>
-                    </a:p>
-                  </a:txBody>
-                  <a:tcPr marL="76200" marR="76200" marT="76200" marB="76200" anchor="ctr">
-                    <a:lnL w="9525" cap="flat" cmpd="sng" algn="ctr">
-                      <a:solidFill>
-                        <a:srgbClr val="2E2E2E"/>
-                      </a:solidFill>
-                      <a:prstDash val="solid"/>
-                      <a:round/>
-                      <a:headEnd type="none" w="med" len="med"/>
-                      <a:tailEnd type="none" w="med" len="med"/>
-                    </a:lnL>
-                    <a:lnR w="9525" cap="flat" cmpd="sng" algn="ctr">
-                      <a:solidFill>
-                        <a:srgbClr val="2E2E2E"/>
-                      </a:solidFill>
-                      <a:prstDash val="solid"/>
-                      <a:round/>
-                      <a:headEnd type="none" w="med" len="med"/>
-                      <a:tailEnd type="none" w="med" len="med"/>
-                    </a:lnR>
-                    <a:lnT w="9525" cap="flat" cmpd="sng" algn="ctr">
-                      <a:solidFill>
-                        <a:srgbClr val="2E2E2E"/>
-                      </a:solidFill>
-                      <a:prstDash val="solid"/>
-                      <a:round/>
-                      <a:headEnd type="none" w="med" len="med"/>
-                      <a:tailEnd type="none" w="med" len="med"/>
-                    </a:lnT>
-                    <a:lnB w="9525" cap="flat" cmpd="sng" algn="ctr">
-                      <a:solidFill>
-                        <a:srgbClr val="2E2E2E"/>
-                      </a:solidFill>
-                      <a:prstDash val="solid"/>
-                      <a:round/>
-                      <a:headEnd type="none" w="med" len="med"/>
-                      <a:tailEnd type="none" w="med" len="med"/>
-                    </a:lnB>
-                    <a:solidFill>
-                      <a:srgbClr val="141414"/>
-                    </a:solidFill>
-                  </a:tcPr>
-                </a:tc>
-                <a:tc>
-                  <a:txBody>
-                    <a:bodyPr/>
-                    <a:lstStyle/>
-                    <a:p>
-                      <a:pPr marL="0" indent="0">
-                        <a:buNone/>
-                      </a:pPr>
-                      <a:r>
-                        <a:rPr lang="en-US" sz="2000" dirty="0">
-                          <a:solidFill>
-                            <a:srgbClr val="FAFAF9"/>
-                          </a:solidFill>
-                          <a:latin typeface="DM Sans" pitchFamily="34" charset="0"/>
-                          <a:ea typeface="DM Sans" pitchFamily="34" charset="-122"/>
-                          <a:cs typeface="DM Sans" pitchFamily="34" charset="-120"/>
-                        </a:rPr>
-                        <a:t>Chunk fetched lazily, no streaming delay</a:t>
-                      </a:r>
-                      <a:endParaRPr lang="en-US" sz="2000" dirty="0">
-                        <a:latin typeface="DM Sans" charset="0"/>
-                        <a:ea typeface="DM Sans" charset="0"/>
-                        <a:cs typeface="DM Sans" charset="0"/>
-                      </a:endParaRPr>
-                    </a:p>
-                  </a:txBody>
-                  <a:tcPr marL="76200" marR="76200" marT="76200" marB="76200" anchor="ctr">
-                    <a:lnL w="9525" cap="flat" cmpd="sng" algn="ctr">
-                      <a:solidFill>
-                        <a:srgbClr val="2E2E2E"/>
-                      </a:solidFill>
-                      <a:prstDash val="solid"/>
-                      <a:round/>
-                      <a:headEnd type="none" w="med" len="med"/>
-                      <a:tailEnd type="none" w="med" len="med"/>
-                    </a:lnL>
-                    <a:lnR w="9525" cap="flat" cmpd="sng" algn="ctr">
-                      <a:solidFill>
-                        <a:srgbClr val="2E2E2E"/>
-                      </a:solidFill>
-                      <a:prstDash val="solid"/>
-                      <a:round/>
-                      <a:headEnd type="none" w="med" len="med"/>
-                      <a:tailEnd type="none" w="med" len="med"/>
-                    </a:lnR>
-                    <a:lnT w="9525" cap="flat" cmpd="sng" algn="ctr">
-                      <a:solidFill>
-                        <a:srgbClr val="2E2E2E"/>
-                      </a:solidFill>
-                      <a:prstDash val="solid"/>
-                      <a:round/>
-                      <a:headEnd type="none" w="med" len="med"/>
-                      <a:tailEnd type="none" w="med" len="med"/>
-                    </a:lnT>
-                    <a:lnB w="9525" cap="flat" cmpd="sng" algn="ctr">
-                      <a:solidFill>
-                        <a:srgbClr val="2E2E2E"/>
-                      </a:solidFill>
-                      <a:prstDash val="solid"/>
-                      <a:round/>
-                      <a:headEnd type="none" w="med" len="med"/>
-                      <a:tailEnd type="none" w="med" len="med"/>
-                    </a:lnB>
-                    <a:solidFill>
-                      <a:srgbClr val="141414"/>
-                    </a:solidFill>
-                  </a:tcPr>
-                </a:tc>
-                <a:tc>
-                  <a:txBody>
-                    <a:bodyPr/>
-                    <a:lstStyle/>
-                    <a:p>
-                      <a:pPr marL="0" indent="0">
-                        <a:buNone/>
-                      </a:pPr>
-                      <a:r>
-                        <a:rPr lang="en-US" sz="2000" dirty="0">
-                          <a:solidFill>
-                            <a:srgbClr val="FAFAF9"/>
-                          </a:solidFill>
-                          <a:latin typeface="DM Sans" pitchFamily="34" charset="0"/>
-                          <a:ea typeface="DM Sans" pitchFamily="34" charset="-122"/>
-                          <a:cs typeface="DM Sans" pitchFamily="34" charset="-120"/>
-                        </a:rPr>
-                        <a:t>Home</a:t>
-                      </a:r>
-                      <a:endParaRPr lang="en-US" sz="2000" dirty="0">
-                        <a:latin typeface="DM Sans" charset="0"/>
-                        <a:ea typeface="DM Sans" charset="0"/>
-                        <a:cs typeface="DM Sans" charset="0"/>
-                      </a:endParaRPr>
-                    </a:p>
-                  </a:txBody>
-                  <a:tcPr marL="76200" marR="76200" marT="76200" marB="76200" anchor="ctr">
-                    <a:lnL w="9525" cap="flat" cmpd="sng" algn="ctr">
-                      <a:solidFill>
-                        <a:srgbClr val="2E2E2E"/>
-                      </a:solidFill>
-                      <a:prstDash val="solid"/>
-                      <a:round/>
-                      <a:headEnd type="none" w="med" len="med"/>
-                      <a:tailEnd type="none" w="med" len="med"/>
-                    </a:lnL>
-                    <a:lnR w="9525" cap="flat" cmpd="sng" algn="ctr">
-                      <a:solidFill>
-                        <a:srgbClr val="2E2E2E"/>
-                      </a:solidFill>
-                      <a:prstDash val="solid"/>
-                      <a:round/>
-                      <a:headEnd type="none" w="med" len="med"/>
-                      <a:tailEnd type="none" w="med" len="med"/>
-                    </a:lnR>
-                    <a:lnT w="9525" cap="flat" cmpd="sng" algn="ctr">
-                      <a:solidFill>
-                        <a:srgbClr val="2E2E2E"/>
-                      </a:solidFill>
-                      <a:prstDash val="solid"/>
-                      <a:round/>
-                      <a:headEnd type="none" w="med" len="med"/>
-                      <a:tailEnd type="none" w="med" len="med"/>
-                    </a:lnT>
-                    <a:lnB w="9525" cap="flat" cmpd="sng" algn="ctr">
-                      <a:solidFill>
-                        <a:srgbClr val="2E2E2E"/>
-                      </a:solidFill>
-                      <a:prstDash val="solid"/>
-                      <a:round/>
-                      <a:headEnd type="none" w="med" len="med"/>
-                      <a:tailEnd type="none" w="med" len="med"/>
-                    </a:lnB>
-                    <a:solidFill>
-                      <a:srgbClr val="141414"/>
-                    </a:solidFill>
-                  </a:tcPr>
-                </a:tc>
-                <a:extLst>
-                  <a:ext uri="{0D108BD9-81ED-4DB2-BD59-A6C34878D82A}">
-                    <a16:rowId xmlns:a16="http://schemas.microsoft.com/office/drawing/2014/main" val="10001"/>
-                  </a:ext>
-                </a:extLst>
-              </a:tr>
-              <a:tr h="570425">
-                <a:tc>
-                  <a:txBody>
-                    <a:bodyPr/>
-                    <a:lstStyle/>
-                    <a:p>
-                      <a:pPr marL="0" indent="0">
-                        <a:buNone/>
-                      </a:pPr>
-                      <a:r>
-                        <a:rPr lang="en-US" sz="2000" dirty="0">
-                          <a:solidFill>
-                            <a:srgbClr val="FAFAF9"/>
-                          </a:solidFill>
-                          <a:latin typeface="DM Sans" pitchFamily="34" charset="0"/>
-                          <a:ea typeface="DM Sans" pitchFamily="34" charset="-122"/>
-                          <a:cs typeface="DM Sans" pitchFamily="34" charset="-120"/>
-                        </a:rPr>
-                        <a:t>Eager</a:t>
-                      </a:r>
-                      <a:endParaRPr lang="en-US" sz="2000" dirty="0">
-                        <a:latin typeface="DM Sans" charset="0"/>
-                        <a:ea typeface="DM Sans" charset="0"/>
-                        <a:cs typeface="DM Sans" charset="0"/>
-                      </a:endParaRPr>
-                    </a:p>
-                  </a:txBody>
-                  <a:tcPr marL="76200" marR="76200" marT="76200" marB="76200" anchor="ctr">
-                    <a:lnL w="9525" cap="flat" cmpd="sng" algn="ctr">
-                      <a:solidFill>
-                        <a:srgbClr val="2E2E2E"/>
-                      </a:solidFill>
-                      <a:prstDash val="solid"/>
-                      <a:round/>
-                      <a:headEnd type="none" w="med" len="med"/>
-                      <a:tailEnd type="none" w="med" len="med"/>
-                    </a:lnL>
-                    <a:lnR w="9525" cap="flat" cmpd="sng" algn="ctr">
-                      <a:solidFill>
-                        <a:srgbClr val="2E2E2E"/>
-                      </a:solidFill>
-                      <a:prstDash val="solid"/>
-                      <a:round/>
-                      <a:headEnd type="none" w="med" len="med"/>
-                      <a:tailEnd type="none" w="med" len="med"/>
-                    </a:lnR>
-                    <a:lnT w="9525" cap="flat" cmpd="sng" algn="ctr">
-                      <a:solidFill>
-                        <a:srgbClr val="2E2E2E"/>
-                      </a:solidFill>
-                      <a:prstDash val="solid"/>
-                      <a:round/>
-                      <a:headEnd type="none" w="med" len="med"/>
-                      <a:tailEnd type="none" w="med" len="med"/>
-                    </a:lnT>
-                    <a:lnB w="9525" cap="flat" cmpd="sng" algn="ctr">
-                      <a:solidFill>
-                        <a:srgbClr val="2E2E2E"/>
-                      </a:solidFill>
-                      <a:prstDash val="solid"/>
-                      <a:round/>
-                      <a:headEnd type="none" w="med" len="med"/>
-                      <a:tailEnd type="none" w="med" len="med"/>
-                    </a:lnB>
-                    <a:solidFill>
-                      <a:srgbClr val="141414"/>
-                    </a:solidFill>
-                  </a:tcPr>
-                </a:tc>
-                <a:tc>
-                  <a:txBody>
-                    <a:bodyPr/>
-                    <a:lstStyle/>
-                    <a:p>
-                      <a:pPr marL="0" indent="0">
-                        <a:buNone/>
-                      </a:pPr>
-                      <a:r>
-                        <a:rPr lang="en-US" sz="2000" dirty="0">
-                          <a:solidFill>
-                            <a:srgbClr val="FAFAF9"/>
-                          </a:solidFill>
-                          <a:latin typeface="DM Sans" pitchFamily="34" charset="0"/>
-                          <a:ea typeface="DM Sans" pitchFamily="34" charset="-122"/>
-                          <a:cs typeface="DM Sans" pitchFamily="34" charset="-120"/>
-                        </a:rPr>
-                        <a:t>Preloaded the moment the shell mounts</a:t>
-                      </a:r>
-                      <a:endParaRPr lang="en-US" sz="2000" dirty="0">
-                        <a:latin typeface="DM Sans" charset="0"/>
-                        <a:ea typeface="DM Sans" charset="0"/>
-                        <a:cs typeface="DM Sans" charset="0"/>
-                      </a:endParaRPr>
-                    </a:p>
-                  </a:txBody>
-                  <a:tcPr marL="76200" marR="76200" marT="76200" marB="76200" anchor="ctr">
-                    <a:lnL w="9525" cap="flat" cmpd="sng" algn="ctr">
-                      <a:solidFill>
-                        <a:srgbClr val="2E2E2E"/>
-                      </a:solidFill>
-                      <a:prstDash val="solid"/>
-                      <a:round/>
-                      <a:headEnd type="none" w="med" len="med"/>
-                      <a:tailEnd type="none" w="med" len="med"/>
-                    </a:lnL>
-                    <a:lnR w="9525" cap="flat" cmpd="sng" algn="ctr">
-                      <a:solidFill>
-                        <a:srgbClr val="2E2E2E"/>
-                      </a:solidFill>
-                      <a:prstDash val="solid"/>
-                      <a:round/>
-                      <a:headEnd type="none" w="med" len="med"/>
-                      <a:tailEnd type="none" w="med" len="med"/>
-                    </a:lnR>
-                    <a:lnT w="9525" cap="flat" cmpd="sng" algn="ctr">
-                      <a:solidFill>
-                        <a:srgbClr val="2E2E2E"/>
-                      </a:solidFill>
-                      <a:prstDash val="solid"/>
-                      <a:round/>
-                      <a:headEnd type="none" w="med" len="med"/>
-                      <a:tailEnd type="none" w="med" len="med"/>
-                    </a:lnT>
-                    <a:lnB w="9525" cap="flat" cmpd="sng" algn="ctr">
-                      <a:solidFill>
-                        <a:srgbClr val="2E2E2E"/>
-                      </a:solidFill>
-                      <a:prstDash val="solid"/>
-                      <a:round/>
-                      <a:headEnd type="none" w="med" len="med"/>
-                      <a:tailEnd type="none" w="med" len="med"/>
-                    </a:lnB>
-                    <a:solidFill>
-                      <a:srgbClr val="141414"/>
-                    </a:solidFill>
-                  </a:tcPr>
-                </a:tc>
-                <a:tc>
-                  <a:txBody>
-                    <a:bodyPr/>
-                    <a:lstStyle/>
-                    <a:p>
-                      <a:pPr marL="0" indent="0">
-                        <a:buNone/>
-                      </a:pPr>
-                      <a:r>
-                        <a:rPr lang="en-US" sz="2000" dirty="0">
-                          <a:solidFill>
-                            <a:srgbClr val="FAFAF9"/>
-                          </a:solidFill>
-                          <a:latin typeface="DM Sans" pitchFamily="34" charset="0"/>
-                          <a:ea typeface="DM Sans" pitchFamily="34" charset="-122"/>
-                          <a:cs typeface="DM Sans" pitchFamily="34" charset="-120"/>
-                        </a:rPr>
-                        <a:t>Records</a:t>
-                      </a:r>
-                      <a:endParaRPr lang="en-US" sz="2000" dirty="0">
-                        <a:latin typeface="DM Sans" charset="0"/>
-                        <a:ea typeface="DM Sans" charset="0"/>
-                        <a:cs typeface="DM Sans" charset="0"/>
-                      </a:endParaRPr>
-                    </a:p>
-                  </a:txBody>
-                  <a:tcPr marL="76200" marR="76200" marT="76200" marB="76200" anchor="ctr">
-                    <a:lnL w="9525" cap="flat" cmpd="sng" algn="ctr">
-                      <a:solidFill>
-                        <a:srgbClr val="2E2E2E"/>
-                      </a:solidFill>
-                      <a:prstDash val="solid"/>
-                      <a:round/>
-                      <a:headEnd type="none" w="med" len="med"/>
-                      <a:tailEnd type="none" w="med" len="med"/>
-                    </a:lnL>
-                    <a:lnR w="9525" cap="flat" cmpd="sng" algn="ctr">
-                      <a:solidFill>
-                        <a:srgbClr val="2E2E2E"/>
-                      </a:solidFill>
-                      <a:prstDash val="solid"/>
-                      <a:round/>
-                      <a:headEnd type="none" w="med" len="med"/>
-                      <a:tailEnd type="none" w="med" len="med"/>
-                    </a:lnR>
-                    <a:lnT w="9525" cap="flat" cmpd="sng" algn="ctr">
-                      <a:solidFill>
-                        <a:srgbClr val="2E2E2E"/>
-                      </a:solidFill>
-                      <a:prstDash val="solid"/>
-                      <a:round/>
-                      <a:headEnd type="none" w="med" len="med"/>
-                      <a:tailEnd type="none" w="med" len="med"/>
-                    </a:lnT>
-                    <a:lnB w="9525" cap="flat" cmpd="sng" algn="ctr">
-                      <a:solidFill>
-                        <a:srgbClr val="2E2E2E"/>
-                      </a:solidFill>
-                      <a:prstDash val="solid"/>
-                      <a:round/>
-                      <a:headEnd type="none" w="med" len="med"/>
-                      <a:tailEnd type="none" w="med" len="med"/>
-                    </a:lnB>
-                    <a:solidFill>
-                      <a:srgbClr val="141414"/>
-                    </a:solidFill>
-                  </a:tcPr>
-                </a:tc>
-                <a:extLst>
-                  <a:ext uri="{0D108BD9-81ED-4DB2-BD59-A6C34878D82A}">
-                    <a16:rowId xmlns:a16="http://schemas.microsoft.com/office/drawing/2014/main" val="10002"/>
-                  </a:ext>
-                </a:extLst>
-              </a:tr>
-              <a:tr h="570425">
-                <a:tc>
-                  <a:txBody>
-                    <a:bodyPr/>
-                    <a:lstStyle/>
-                    <a:p>
-                      <a:pPr marL="0" indent="0">
-                        <a:buNone/>
-                      </a:pPr>
-                      <a:r>
-                        <a:rPr lang="en-US" sz="2000" dirty="0">
-                          <a:solidFill>
-                            <a:srgbClr val="FAFAF9"/>
-                          </a:solidFill>
-                          <a:latin typeface="DM Sans" pitchFamily="34" charset="0"/>
-                          <a:ea typeface="DM Sans" pitchFamily="34" charset="-122"/>
-                          <a:cs typeface="DM Sans" pitchFamily="34" charset="-120"/>
-                        </a:rPr>
-                        <a:t>Hover</a:t>
-                      </a:r>
-                      <a:endParaRPr lang="en-US" sz="2000" dirty="0">
-                        <a:latin typeface="DM Sans" charset="0"/>
-                        <a:ea typeface="DM Sans" charset="0"/>
-                        <a:cs typeface="DM Sans" charset="0"/>
-                      </a:endParaRPr>
-                    </a:p>
-                  </a:txBody>
-                  <a:tcPr marL="76200" marR="76200" marT="76200" marB="76200" anchor="ctr">
-                    <a:lnL w="9525" cap="flat" cmpd="sng" algn="ctr">
-                      <a:solidFill>
-                        <a:srgbClr val="2E2E2E"/>
-                      </a:solidFill>
-                      <a:prstDash val="solid"/>
-                      <a:round/>
-                      <a:headEnd type="none" w="med" len="med"/>
-                      <a:tailEnd type="none" w="med" len="med"/>
-                    </a:lnL>
-                    <a:lnR w="9525" cap="flat" cmpd="sng" algn="ctr">
-                      <a:solidFill>
-                        <a:srgbClr val="2E2E2E"/>
-                      </a:solidFill>
-                      <a:prstDash val="solid"/>
-                      <a:round/>
-                      <a:headEnd type="none" w="med" len="med"/>
-                      <a:tailEnd type="none" w="med" len="med"/>
-                    </a:lnR>
-                    <a:lnT w="9525" cap="flat" cmpd="sng" algn="ctr">
-                      <a:solidFill>
-                        <a:srgbClr val="2E2E2E"/>
-                      </a:solidFill>
-                      <a:prstDash val="solid"/>
-                      <a:round/>
-                      <a:headEnd type="none" w="med" len="med"/>
-                      <a:tailEnd type="none" w="med" len="med"/>
-                    </a:lnT>
-                    <a:lnB w="9525" cap="flat" cmpd="sng" algn="ctr">
-                      <a:solidFill>
-                        <a:srgbClr val="2E2E2E"/>
-                      </a:solidFill>
-                      <a:prstDash val="solid"/>
-                      <a:round/>
-                      <a:headEnd type="none" w="med" len="med"/>
-                      <a:tailEnd type="none" w="med" len="med"/>
-                    </a:lnB>
-                    <a:solidFill>
-                      <a:srgbClr val="141414"/>
-                    </a:solidFill>
-                  </a:tcPr>
-                </a:tc>
-                <a:tc>
-                  <a:txBody>
-                    <a:bodyPr/>
-                    <a:lstStyle/>
-                    <a:p>
-                      <a:pPr marL="0" indent="0">
-                        <a:buNone/>
-                      </a:pPr>
-                      <a:r>
-                        <a:rPr lang="en-US" sz="2000" dirty="0">
-                          <a:solidFill>
-                            <a:srgbClr val="FAFAF9"/>
-                          </a:solidFill>
-                          <a:latin typeface="DM Sans" pitchFamily="34" charset="0"/>
-                          <a:ea typeface="DM Sans" pitchFamily="34" charset="-122"/>
-                          <a:cs typeface="DM Sans" pitchFamily="34" charset="-120"/>
-                        </a:rPr>
-                        <a:t>Prefetched when the user hovers a tab</a:t>
-                      </a:r>
-                      <a:endParaRPr lang="en-US" sz="2000" dirty="0">
-                        <a:latin typeface="DM Sans" charset="0"/>
-                        <a:ea typeface="DM Sans" charset="0"/>
-                        <a:cs typeface="DM Sans" charset="0"/>
-                      </a:endParaRPr>
-                    </a:p>
-                  </a:txBody>
-                  <a:tcPr marL="76200" marR="76200" marT="76200" marB="76200" anchor="ctr">
-                    <a:lnL w="9525" cap="flat" cmpd="sng" algn="ctr">
-                      <a:solidFill>
-                        <a:srgbClr val="2E2E2E"/>
-                      </a:solidFill>
-                      <a:prstDash val="solid"/>
-                      <a:round/>
-                      <a:headEnd type="none" w="med" len="med"/>
-                      <a:tailEnd type="none" w="med" len="med"/>
-                    </a:lnL>
-                    <a:lnR w="9525" cap="flat" cmpd="sng" algn="ctr">
-                      <a:solidFill>
-                        <a:srgbClr val="2E2E2E"/>
-                      </a:solidFill>
-                      <a:prstDash val="solid"/>
-                      <a:round/>
-                      <a:headEnd type="none" w="med" len="med"/>
-                      <a:tailEnd type="none" w="med" len="med"/>
-                    </a:lnR>
-                    <a:lnT w="9525" cap="flat" cmpd="sng" algn="ctr">
-                      <a:solidFill>
-                        <a:srgbClr val="2E2E2E"/>
-                      </a:solidFill>
-                      <a:prstDash val="solid"/>
-                      <a:round/>
-                      <a:headEnd type="none" w="med" len="med"/>
-                      <a:tailEnd type="none" w="med" len="med"/>
-                    </a:lnT>
-                    <a:lnB w="9525" cap="flat" cmpd="sng" algn="ctr">
-                      <a:solidFill>
-                        <a:srgbClr val="2E2E2E"/>
-                      </a:solidFill>
-                      <a:prstDash val="solid"/>
-                      <a:round/>
-                      <a:headEnd type="none" w="med" len="med"/>
-                      <a:tailEnd type="none" w="med" len="med"/>
-                    </a:lnB>
-                    <a:solidFill>
-                      <a:srgbClr val="141414"/>
-                    </a:solidFill>
-                  </a:tcPr>
-                </a:tc>
-                <a:tc>
-                  <a:txBody>
-                    <a:bodyPr/>
-                    <a:lstStyle/>
-                    <a:p>
-                      <a:pPr marL="0" indent="0">
-                        <a:buNone/>
-                      </a:pPr>
-                      <a:r>
-                        <a:rPr lang="en-US" sz="2000" dirty="0">
-                          <a:solidFill>
-                            <a:srgbClr val="FAFAF9"/>
-                          </a:solidFill>
-                          <a:latin typeface="DM Sans" pitchFamily="34" charset="0"/>
-                          <a:ea typeface="DM Sans" pitchFamily="34" charset="-122"/>
-                          <a:cs typeface="DM Sans" pitchFamily="34" charset="-120"/>
-                        </a:rPr>
-                        <a:t>Prescriptions, Analytics</a:t>
-                      </a:r>
-                      <a:endParaRPr lang="en-US" sz="2000" dirty="0">
-                        <a:latin typeface="DM Sans" charset="0"/>
-                        <a:ea typeface="DM Sans" charset="0"/>
-                        <a:cs typeface="DM Sans" charset="0"/>
-                      </a:endParaRPr>
-                    </a:p>
-                  </a:txBody>
-                  <a:tcPr marL="76200" marR="76200" marT="76200" marB="76200" anchor="ctr">
-                    <a:lnL w="9525" cap="flat" cmpd="sng" algn="ctr">
-                      <a:solidFill>
-                        <a:srgbClr val="2E2E2E"/>
-                      </a:solidFill>
-                      <a:prstDash val="solid"/>
-                      <a:round/>
-                      <a:headEnd type="none" w="med" len="med"/>
-                      <a:tailEnd type="none" w="med" len="med"/>
-                    </a:lnL>
-                    <a:lnR w="9525" cap="flat" cmpd="sng" algn="ctr">
-                      <a:solidFill>
-                        <a:srgbClr val="2E2E2E"/>
-                      </a:solidFill>
-                      <a:prstDash val="solid"/>
-                      <a:round/>
-                      <a:headEnd type="none" w="med" len="med"/>
-                      <a:tailEnd type="none" w="med" len="med"/>
-                    </a:lnR>
-                    <a:lnT w="9525" cap="flat" cmpd="sng" algn="ctr">
-                      <a:solidFill>
-                        <a:srgbClr val="2E2E2E"/>
-                      </a:solidFill>
-                      <a:prstDash val="solid"/>
-                      <a:round/>
-                      <a:headEnd type="none" w="med" len="med"/>
-                      <a:tailEnd type="none" w="med" len="med"/>
-                    </a:lnT>
-                    <a:lnB w="9525" cap="flat" cmpd="sng" algn="ctr">
-                      <a:solidFill>
-                        <a:srgbClr val="2E2E2E"/>
-                      </a:solidFill>
-                      <a:prstDash val="solid"/>
-                      <a:round/>
-                      <a:headEnd type="none" w="med" len="med"/>
-                      <a:tailEnd type="none" w="med" len="med"/>
-                    </a:lnB>
-                    <a:solidFill>
-                      <a:srgbClr val="141414"/>
-                    </a:solidFill>
-                  </a:tcPr>
-                </a:tc>
-                <a:extLst>
-                  <a:ext uri="{0D108BD9-81ED-4DB2-BD59-A6C34878D82A}">
-                    <a16:rowId xmlns:a16="http://schemas.microsoft.com/office/drawing/2014/main" val="10003"/>
-                  </a:ext>
-                </a:extLst>
-              </a:tr>
-            </a:tbl>
-          </a:graphicData>
-        </a:graphic>
-      </p:graphicFrame>
-    </p:spTree>
-    <p:extLst>
-      <p:ext uri="{BB962C8B-B14F-4D97-AF65-F5344CB8AC3E}">
-        <p14:creationId xmlns:p14="http://schemas.microsoft.com/office/powerpoint/2010/main" val="1110886258"/>
-      </p:ext>
-    </p:extLst>
-  </p:cSld>
-  <p:clrMapOvr>
-    <a:masterClrMapping/>
-  </p:clrMapOvr>
-</p:sld>
-</file>
-
-<file path=ppt/slides/slide21.xml><?xml version="1.0" encoding="utf-8"?>
-<p:sld xmlns:a="http://schemas.openxmlformats.org/drawingml/2006/main" xmlns:r="http://schemas.openxmlformats.org/officeDocument/2006/relationships" xmlns:p="http://schemas.openxmlformats.org/presentationml/2006/main">
-  <p:cSld>
-    <p:spTree>
-      <p:nvGrpSpPr>
         <p:cNvPr id="1" name="">
           <a:extLst>
             <a:ext uri="{FF2B5EF4-FFF2-40B4-BE49-F238E27FC236}">
@@ -7469,8 +6518,8 @@
         </p:nvSpPr>
         <p:spPr>
           <a:xfrm>
-            <a:off x="1167918" y="3075057"/>
-            <a:ext cx="9853018" cy="707886"/>
+            <a:off x="770310" y="3075057"/>
+            <a:ext cx="10648236" cy="707886"/>
           </a:xfrm>
           <a:prstGeom prst="rect">
             <a:avLst/>
@@ -7486,7 +6535,7 @@
             <a:pPr algn="ctr"/>
             <a:r>
               <a:rPr lang="en-GB" sz="4000" dirty="0"/>
-              <a:t>Preloading and prefetching (network </a:t>
+              <a:t>Preloading and prefetching (network tab </a:t>
             </a:r>
             <a:r>
               <a:rPr lang="en-GB" sz="4000" dirty="0" err="1"/>
@@ -7512,7 +6561,7 @@
 </p:sld>
 </file>
 
-<file path=ppt/slides/slide22.xml><?xml version="1.0" encoding="utf-8"?>
+<file path=ppt/slides/slide21.xml><?xml version="1.0" encoding="utf-8"?>
 <p:sld xmlns:a="http://schemas.openxmlformats.org/drawingml/2006/main" xmlns:r="http://schemas.openxmlformats.org/officeDocument/2006/relationships" xmlns:p="http://schemas.openxmlformats.org/presentationml/2006/main">
   <p:cSld>
     <p:spTree>
@@ -7691,7 +6740,7 @@
 </p:sld>
 </file>
 
-<file path=ppt/slides/slide23.xml><?xml version="1.0" encoding="utf-8"?>
+<file path=ppt/slides/slide22.xml><?xml version="1.0" encoding="utf-8"?>
 <p:sld xmlns:a="http://schemas.openxmlformats.org/drawingml/2006/main" xmlns:r="http://schemas.openxmlformats.org/officeDocument/2006/relationships" xmlns:p="http://schemas.openxmlformats.org/presentationml/2006/main">
   <p:cSld>
     <p:spTree>
@@ -7751,7 +6800,7 @@
 </p:sld>
 </file>
 
-<file path=ppt/slides/slide24.xml><?xml version="1.0" encoding="utf-8"?>
+<file path=ppt/slides/slide23.xml><?xml version="1.0" encoding="utf-8"?>
 <p:sld xmlns:a="http://schemas.openxmlformats.org/drawingml/2006/main" xmlns:r="http://schemas.openxmlformats.org/officeDocument/2006/relationships" xmlns:p="http://schemas.openxmlformats.org/presentationml/2006/main">
   <p:cSld>
     <p:spTree>
@@ -7837,8 +6886,8 @@
         </p:nvSpPr>
         <p:spPr>
           <a:xfrm>
-            <a:off x="713232" y="2678653"/>
-            <a:ext cx="10395758" cy="1796527"/>
+            <a:off x="713232" y="2226365"/>
+            <a:ext cx="10710142" cy="2248815"/>
           </a:xfrm>
           <a:prstGeom prst="rect">
             <a:avLst/>
@@ -7854,67 +6903,151 @@
               <a:buNone/>
             </a:pPr>
             <a:r>
-              <a:rPr lang="en-US" sz="2800" i="1" dirty="0">
+              <a:rPr lang="en-US" sz="3200" i="1" dirty="0">
                 <a:solidFill>
                   <a:schemeClr val="tx1">
                     <a:lumMod val="85000"/>
                     <a:lumOff val="15000"/>
                   </a:schemeClr>
                 </a:solidFill>
-                <a:latin typeface="Cascadia Code NF" pitchFamily="50" charset="0"/>
+                <a:latin typeface="Calibri" panose="020F0502020204030204" pitchFamily="34" charset="0"/>
                 <a:ea typeface="Cascadia Code NF" pitchFamily="50" charset="0"/>
-                <a:cs typeface="Cascadia Code NF" pitchFamily="50" charset="0"/>
+                <a:cs typeface="Calibri" panose="020F0502020204030204" pitchFamily="34" charset="0"/>
               </a:rPr>
-              <a:t>Why lazy() for eager modules? </a:t>
-            </a:r>
-          </a:p>
-          <a:p>
-            <a:pPr marL="0" indent="0">
-              <a:buNone/>
-            </a:pPr>
-            <a:r>
-              <a:rPr lang="en-US" sz="2800" i="1" dirty="0">
+              <a:t>Why </a:t>
+            </a:r>
+            <a:r>
+              <a:rPr lang="en-US" sz="3200" i="1" dirty="0">
                 <a:solidFill>
                   <a:schemeClr val="tx1">
                     <a:lumMod val="85000"/>
                     <a:lumOff val="15000"/>
                   </a:schemeClr>
                 </a:solidFill>
-                <a:latin typeface="Cascadia Code NF" pitchFamily="50" charset="0"/>
-                <a:ea typeface="Cascadia Code NF" pitchFamily="50" charset="0"/>
-                <a:cs typeface="Cascadia Code NF" pitchFamily="50" charset="0"/>
+                <a:latin typeface="Cascadia Code" panose="020B0609020000020004" pitchFamily="34" charset="0"/>
+                <a:ea typeface="Cascadia Code" panose="020B0609020000020004" pitchFamily="34" charset="0"/>
+                <a:cs typeface="Cascadia Code" panose="020B0609020000020004" pitchFamily="34" charset="0"/>
               </a:rPr>
-              <a:t>Remotes are separate builds resolved at runtime. </a:t>
-            </a:r>
-          </a:p>
-          <a:p>
-            <a:pPr marL="0" indent="0">
-              <a:buNone/>
-            </a:pPr>
-            <a:r>
-              <a:rPr lang="en-US" sz="2800" i="1" dirty="0">
+              <a:t>lazy() </a:t>
+            </a:r>
+            <a:r>
+              <a:rPr lang="en-US" sz="3200" i="1" dirty="0">
                 <a:solidFill>
                   <a:schemeClr val="tx1">
                     <a:lumMod val="85000"/>
                     <a:lumOff val="15000"/>
                   </a:schemeClr>
                 </a:solidFill>
-                <a:latin typeface="Cascadia Code NF" pitchFamily="50" charset="0"/>
+                <a:latin typeface="Calibri" panose="020F0502020204030204" pitchFamily="34" charset="0"/>
                 <a:ea typeface="Cascadia Code NF" pitchFamily="50" charset="0"/>
-                <a:cs typeface="Cascadia Code NF" pitchFamily="50" charset="0"/>
+                <a:cs typeface="Calibri" panose="020F0502020204030204" pitchFamily="34" charset="0"/>
               </a:rPr>
-              <a:t>Eager import() warms the cache; lazy() resolves from it.</a:t>
-            </a:r>
-            <a:endParaRPr lang="en-US" sz="2800" dirty="0">
+              <a:t>for eager modules? </a:t>
+            </a:r>
+          </a:p>
+          <a:p>
+            <a:pPr marL="0" indent="0">
+              <a:buNone/>
+            </a:pPr>
+            <a:r>
+              <a:rPr lang="en-US" sz="3200" i="1" dirty="0">
+                <a:solidFill>
+                  <a:schemeClr val="tx1">
+                    <a:lumMod val="85000"/>
+                    <a:lumOff val="15000"/>
+                  </a:schemeClr>
+                </a:solidFill>
+                <a:latin typeface="Calibri" panose="020F0502020204030204" pitchFamily="34" charset="0"/>
+                <a:ea typeface="Cascadia Code NF" pitchFamily="50" charset="0"/>
+                <a:cs typeface="Calibri" panose="020F0502020204030204" pitchFamily="34" charset="0"/>
+              </a:rPr>
+              <a:t>Remotes are separate builds resolved at runtime. </a:t>
+            </a:r>
+          </a:p>
+          <a:p>
+            <a:pPr marL="0" indent="0">
+              <a:buNone/>
+            </a:pPr>
+            <a:r>
+              <a:rPr lang="en-US" sz="3200" i="1" dirty="0">
+                <a:solidFill>
+                  <a:schemeClr val="tx1">
+                    <a:lumMod val="85000"/>
+                    <a:lumOff val="15000"/>
+                  </a:schemeClr>
+                </a:solidFill>
+                <a:latin typeface="Calibri" panose="020F0502020204030204" pitchFamily="34" charset="0"/>
+                <a:ea typeface="Cascadia Code NF" pitchFamily="50" charset="0"/>
+                <a:cs typeface="Calibri" panose="020F0502020204030204" pitchFamily="34" charset="0"/>
+              </a:rPr>
+              <a:t>Eager </a:t>
+            </a:r>
+            <a:r>
+              <a:rPr lang="en-US" sz="3200" i="1" dirty="0">
+                <a:solidFill>
+                  <a:schemeClr val="tx1">
+                    <a:lumMod val="85000"/>
+                    <a:lumOff val="15000"/>
+                  </a:schemeClr>
+                </a:solidFill>
+                <a:latin typeface="Cascadia Code" panose="020B0609020000020004" pitchFamily="34" charset="0"/>
+                <a:ea typeface="Cascadia Code" panose="020B0609020000020004" pitchFamily="34" charset="0"/>
+                <a:cs typeface="Cascadia Code" panose="020B0609020000020004" pitchFamily="34" charset="0"/>
+              </a:rPr>
+              <a:t>import() </a:t>
+            </a:r>
+            <a:r>
+              <a:rPr lang="en-US" sz="3200" i="1" dirty="0">
+                <a:solidFill>
+                  <a:schemeClr val="tx1">
+                    <a:lumMod val="85000"/>
+                    <a:lumOff val="15000"/>
+                  </a:schemeClr>
+                </a:solidFill>
+                <a:latin typeface="Calibri" panose="020F0502020204030204" pitchFamily="34" charset="0"/>
+                <a:ea typeface="Cascadia Code NF" pitchFamily="50" charset="0"/>
+                <a:cs typeface="Calibri" panose="020F0502020204030204" pitchFamily="34" charset="0"/>
+              </a:rPr>
+              <a:t>warms the cache; </a:t>
+            </a:r>
+            <a:r>
+              <a:rPr lang="en-US" sz="3200" i="1" dirty="0">
+                <a:solidFill>
+                  <a:schemeClr val="tx1">
+                    <a:lumMod val="85000"/>
+                    <a:lumOff val="15000"/>
+                  </a:schemeClr>
+                </a:solidFill>
+                <a:latin typeface="Cascadia Code" panose="020B0609020000020004" pitchFamily="34" charset="0"/>
+                <a:ea typeface="Cascadia Code" panose="020B0609020000020004" pitchFamily="34" charset="0"/>
+                <a:cs typeface="Cascadia Code" panose="020B0609020000020004" pitchFamily="34" charset="0"/>
+              </a:rPr>
+              <a:t>lazy() </a:t>
+            </a:r>
+            <a:r>
+              <a:rPr lang="en-US" sz="3200" i="1" dirty="0">
+                <a:solidFill>
+                  <a:schemeClr val="tx1">
+                    <a:lumMod val="85000"/>
+                    <a:lumOff val="15000"/>
+                  </a:schemeClr>
+                </a:solidFill>
+                <a:latin typeface="Calibri" panose="020F0502020204030204" pitchFamily="34" charset="0"/>
+                <a:ea typeface="Cascadia Code NF" pitchFamily="50" charset="0"/>
+                <a:cs typeface="Calibri" panose="020F0502020204030204" pitchFamily="34" charset="0"/>
+              </a:rPr>
+              <a:t>resolves from it.</a:t>
+            </a:r>
+            <a:endParaRPr lang="en-US" sz="3200" dirty="0">
               <a:solidFill>
                 <a:schemeClr val="tx1">
                   <a:lumMod val="85000"/>
                   <a:lumOff val="15000"/>
                 </a:schemeClr>
               </a:solidFill>
-              <a:latin typeface="Cascadia Code NF" pitchFamily="50" charset="0"/>
+              <a:latin typeface="Calibri" panose="020F0502020204030204" pitchFamily="34" charset="0"/>
               <a:ea typeface="Cascadia Code NF" pitchFamily="50" charset="0"/>
-              <a:cs typeface="Cascadia Code NF" pitchFamily="50" charset="0"/>
+              <a:cs typeface="Calibri" panose="020F0502020204030204" pitchFamily="34" charset="0"/>
             </a:endParaRPr>
           </a:p>
         </p:txBody>
@@ -7932,7 +7065,7 @@
 </p:sld>
 </file>
 
-<file path=ppt/slides/slide25.xml><?xml version="1.0" encoding="utf-8"?>
+<file path=ppt/slides/slide24.xml><?xml version="1.0" encoding="utf-8"?>
 <p:sld xmlns:a="http://schemas.openxmlformats.org/drawingml/2006/main" xmlns:r="http://schemas.openxmlformats.org/officeDocument/2006/relationships" xmlns:p="http://schemas.openxmlformats.org/presentationml/2006/main">
   <p:cSld>
     <p:spTree>
@@ -8051,7 +7184,35 @@
                 <a:ea typeface="DM Sans" pitchFamily="34" charset="-122"/>
                 <a:cs typeface="DM Sans" pitchFamily="34" charset="-120"/>
               </a:rPr>
-              <a:t>Health Monitor: polls each remoteEntry.js every 5s, shows latency</a:t>
+              <a:t>Health Monitor: polls each </a:t>
+            </a:r>
+            <a:r>
+              <a:rPr lang="en-US" sz="2800" dirty="0" err="1">
+                <a:solidFill>
+                  <a:schemeClr val="tx1">
+                    <a:lumMod val="95000"/>
+                    <a:lumOff val="5000"/>
+                  </a:schemeClr>
+                </a:solidFill>
+                <a:latin typeface="DM Sans" pitchFamily="34" charset="0"/>
+                <a:ea typeface="DM Sans" pitchFamily="34" charset="-122"/>
+                <a:cs typeface="DM Sans" pitchFamily="34" charset="-120"/>
+              </a:rPr>
+              <a:t>remoteEntry.js</a:t>
+            </a:r>
+            <a:r>
+              <a:rPr lang="en-US" sz="2800" dirty="0">
+                <a:solidFill>
+                  <a:schemeClr val="tx1">
+                    <a:lumMod val="95000"/>
+                    <a:lumOff val="5000"/>
+                  </a:schemeClr>
+                </a:solidFill>
+                <a:latin typeface="DM Sans" pitchFamily="34" charset="0"/>
+                <a:ea typeface="DM Sans" pitchFamily="34" charset="-122"/>
+                <a:cs typeface="DM Sans" pitchFamily="34" charset="-120"/>
+              </a:rPr>
+              <a:t> every 5s, shows latency</a:t>
             </a:r>
             <a:endParaRPr lang="en-US" sz="2800" dirty="0">
               <a:solidFill>
@@ -8165,7 +7326,7 @@
 </p:sld>
 </file>
 
-<file path=ppt/slides/slide26.xml><?xml version="1.0" encoding="utf-8"?>
+<file path=ppt/slides/slide25.xml><?xml version="1.0" encoding="utf-8"?>
 <p:sld xmlns:a="http://schemas.openxmlformats.org/drawingml/2006/main" xmlns:r="http://schemas.openxmlformats.org/officeDocument/2006/relationships" xmlns:p="http://schemas.openxmlformats.org/presentationml/2006/main">
   <p:cSld>
     <p:spTree>
@@ -8237,8 +7398,8 @@
         </p:nvSpPr>
         <p:spPr>
           <a:xfrm>
-            <a:off x="3025055" y="3075057"/>
-            <a:ext cx="6138732" cy="707886"/>
+            <a:off x="2279283" y="3075057"/>
+            <a:ext cx="7630295" cy="707886"/>
           </a:xfrm>
           <a:prstGeom prst="rect">
             <a:avLst/>
@@ -8254,7 +7415,7 @@
             <a:pPr algn="ctr"/>
             <a:r>
               <a:rPr lang="en-GB" sz="4000" dirty="0"/>
-              <a:t>Command palette app demo</a:t>
+              <a:t>Admin panel for module federation</a:t>
             </a:r>
           </a:p>
         </p:txBody>
@@ -8272,7 +7433,7 @@
 </p:sld>
 </file>
 
-<file path=ppt/slides/slide27.xml><?xml version="1.0" encoding="utf-8"?>
+<file path=ppt/slides/slide26.xml><?xml version="1.0" encoding="utf-8"?>
 <p:sld xmlns:a="http://schemas.openxmlformats.org/drawingml/2006/main" xmlns:r="http://schemas.openxmlformats.org/officeDocument/2006/relationships" xmlns:p="http://schemas.openxmlformats.org/presentationml/2006/main">
   <p:cSld>
     <p:spTree>
@@ -8332,7 +7493,7 @@
 </p:sld>
 </file>
 
-<file path=ppt/slides/slide28.xml><?xml version="1.0" encoding="utf-8"?>
+<file path=ppt/slides/slide27.xml><?xml version="1.0" encoding="utf-8"?>
 <p:sld xmlns:a="http://schemas.openxmlformats.org/drawingml/2006/main" xmlns:r="http://schemas.openxmlformats.org/officeDocument/2006/relationships" xmlns:p="http://schemas.openxmlformats.org/presentationml/2006/main">
   <p:cSld>
     <p:spTree>
@@ -8605,7 +7766,7 @@
 </p:sld>
 </file>
 
-<file path=ppt/slides/slide29.xml><?xml version="1.0" encoding="utf-8"?>
+<file path=ppt/slides/slide28.xml><?xml version="1.0" encoding="utf-8"?>
 <p:sld xmlns:a="http://schemas.openxmlformats.org/drawingml/2006/main" xmlns:r="http://schemas.openxmlformats.org/officeDocument/2006/relationships" xmlns:p="http://schemas.openxmlformats.org/presentationml/2006/main">
   <p:cSld>
     <p:spTree>
@@ -9506,6 +8667,113 @@
 </p:sld>
 </file>
 
+<file path=ppt/slides/slide29.xml><?xml version="1.0" encoding="utf-8"?>
+<p:sld xmlns:a="http://schemas.openxmlformats.org/drawingml/2006/main" xmlns:r="http://schemas.openxmlformats.org/officeDocument/2006/relationships" xmlns:p="http://schemas.openxmlformats.org/presentationml/2006/main">
+  <p:cSld>
+    <p:spTree>
+      <p:nvGrpSpPr>
+        <p:cNvPr id="1" name="">
+          <a:extLst>
+            <a:ext uri="{FF2B5EF4-FFF2-40B4-BE49-F238E27FC236}">
+              <a16:creationId xmlns:a16="http://schemas.microsoft.com/office/drawing/2014/main" id="{8574E5C8-F845-6867-3F24-0A4D18D440C8}"/>
+            </a:ext>
+          </a:extLst>
+        </p:cNvPr>
+        <p:cNvGrpSpPr/>
+        <p:nvPr/>
+      </p:nvGrpSpPr>
+      <p:grpSpPr>
+        <a:xfrm>
+          <a:off x="0" y="0"/>
+          <a:ext cx="0" cy="0"/>
+          <a:chOff x="0" y="0"/>
+          <a:chExt cx="0" cy="0"/>
+        </a:xfrm>
+      </p:grpSpPr>
+      <p:sp>
+        <p:nvSpPr>
+          <p:cNvPr id="2" name="TextBox 1">
+            <a:extLst>
+              <a:ext uri="{FF2B5EF4-FFF2-40B4-BE49-F238E27FC236}">
+                <a16:creationId xmlns:a16="http://schemas.microsoft.com/office/drawing/2014/main" id="{5251E657-3A4F-F643-B5FE-F848932BB249}"/>
+              </a:ext>
+            </a:extLst>
+          </p:cNvPr>
+          <p:cNvSpPr txBox="1"/>
+          <p:nvPr/>
+        </p:nvSpPr>
+        <p:spPr>
+          <a:xfrm>
+            <a:off x="722376" y="576072"/>
+            <a:ext cx="1436612" cy="707886"/>
+          </a:xfrm>
+          <a:prstGeom prst="rect">
+            <a:avLst/>
+          </a:prstGeom>
+          <a:noFill/>
+        </p:spPr>
+        <p:txBody>
+          <a:bodyPr wrap="none" rtlCol="0">
+            <a:spAutoFit/>
+          </a:bodyPr>
+          <a:lstStyle/>
+          <a:p>
+            <a:r>
+              <a:rPr lang="en-GB" sz="4000" dirty="0"/>
+              <a:t>Demo</a:t>
+            </a:r>
+          </a:p>
+        </p:txBody>
+      </p:sp>
+      <p:sp>
+        <p:nvSpPr>
+          <p:cNvPr id="4" name="TextBox 3">
+            <a:extLst>
+              <a:ext uri="{FF2B5EF4-FFF2-40B4-BE49-F238E27FC236}">
+                <a16:creationId xmlns:a16="http://schemas.microsoft.com/office/drawing/2014/main" id="{303C690B-5769-EFCF-21B9-2F10CBECB5E3}"/>
+              </a:ext>
+            </a:extLst>
+          </p:cNvPr>
+          <p:cNvSpPr txBox="1"/>
+          <p:nvPr/>
+        </p:nvSpPr>
+        <p:spPr>
+          <a:xfrm>
+            <a:off x="2678228" y="3075057"/>
+            <a:ext cx="6832384" cy="707886"/>
+          </a:xfrm>
+          <a:prstGeom prst="rect">
+            <a:avLst/>
+          </a:prstGeom>
+          <a:noFill/>
+        </p:spPr>
+        <p:txBody>
+          <a:bodyPr wrap="none" rtlCol="0">
+            <a:spAutoFit/>
+          </a:bodyPr>
+          <a:lstStyle/>
+          <a:p>
+            <a:pPr algn="ctr"/>
+            <a:r>
+              <a:rPr lang="en-GB" sz="4000" dirty="0"/>
+              <a:t>Counter value in different pages</a:t>
+            </a:r>
+          </a:p>
+        </p:txBody>
+      </p:sp>
+    </p:spTree>
+    <p:extLst>
+      <p:ext uri="{BB962C8B-B14F-4D97-AF65-F5344CB8AC3E}">
+        <p14:creationId xmlns:p14="http://schemas.microsoft.com/office/powerpoint/2010/main" val="212310172"/>
+      </p:ext>
+    </p:extLst>
+  </p:cSld>
+  <p:clrMapOvr>
+    <a:masterClrMapping/>
+  </p:clrMapOvr>
+</p:sld>
+</file>
+
 <file path=ppt/slides/slide3.xml><?xml version="1.0" encoding="utf-8"?>
 <p:sld xmlns:a="http://schemas.openxmlformats.org/drawingml/2006/main" xmlns:r="http://schemas.openxmlformats.org/officeDocument/2006/relationships" xmlns:p="http://schemas.openxmlformats.org/presentationml/2006/main">
   <p:cSld>
@@ -9601,113 +8869,6 @@
   <p:cSld>
     <p:spTree>
       <p:nvGrpSpPr>
-        <p:cNvPr id="1" name="">
-          <a:extLst>
-            <a:ext uri="{FF2B5EF4-FFF2-40B4-BE49-F238E27FC236}">
-              <a16:creationId xmlns:a16="http://schemas.microsoft.com/office/drawing/2014/main" id="{8574E5C8-F845-6867-3F24-0A4D18D440C8}"/>
-            </a:ext>
-          </a:extLst>
-        </p:cNvPr>
-        <p:cNvGrpSpPr/>
-        <p:nvPr/>
-      </p:nvGrpSpPr>
-      <p:grpSpPr>
-        <a:xfrm>
-          <a:off x="0" y="0"/>
-          <a:ext cx="0" cy="0"/>
-          <a:chOff x="0" y="0"/>
-          <a:chExt cx="0" cy="0"/>
-        </a:xfrm>
-      </p:grpSpPr>
-      <p:sp>
-        <p:nvSpPr>
-          <p:cNvPr id="2" name="TextBox 1">
-            <a:extLst>
-              <a:ext uri="{FF2B5EF4-FFF2-40B4-BE49-F238E27FC236}">
-                <a16:creationId xmlns:a16="http://schemas.microsoft.com/office/drawing/2014/main" id="{5251E657-3A4F-F643-B5FE-F848932BB249}"/>
-              </a:ext>
-            </a:extLst>
-          </p:cNvPr>
-          <p:cNvSpPr txBox="1"/>
-          <p:nvPr/>
-        </p:nvSpPr>
-        <p:spPr>
-          <a:xfrm>
-            <a:off x="722376" y="576072"/>
-            <a:ext cx="1436612" cy="707886"/>
-          </a:xfrm>
-          <a:prstGeom prst="rect">
-            <a:avLst/>
-          </a:prstGeom>
-          <a:noFill/>
-        </p:spPr>
-        <p:txBody>
-          <a:bodyPr wrap="none" rtlCol="0">
-            <a:spAutoFit/>
-          </a:bodyPr>
-          <a:lstStyle/>
-          <a:p>
-            <a:r>
-              <a:rPr lang="en-GB" sz="4000" dirty="0"/>
-              <a:t>Demo</a:t>
-            </a:r>
-          </a:p>
-        </p:txBody>
-      </p:sp>
-      <p:sp>
-        <p:nvSpPr>
-          <p:cNvPr id="4" name="TextBox 3">
-            <a:extLst>
-              <a:ext uri="{FF2B5EF4-FFF2-40B4-BE49-F238E27FC236}">
-                <a16:creationId xmlns:a16="http://schemas.microsoft.com/office/drawing/2014/main" id="{303C690B-5769-EFCF-21B9-2F10CBECB5E3}"/>
-              </a:ext>
-            </a:extLst>
-          </p:cNvPr>
-          <p:cNvSpPr txBox="1"/>
-          <p:nvPr/>
-        </p:nvSpPr>
-        <p:spPr>
-          <a:xfrm>
-            <a:off x="2678228" y="3075057"/>
-            <a:ext cx="6832384" cy="707886"/>
-          </a:xfrm>
-          <a:prstGeom prst="rect">
-            <a:avLst/>
-          </a:prstGeom>
-          <a:noFill/>
-        </p:spPr>
-        <p:txBody>
-          <a:bodyPr wrap="none" rtlCol="0">
-            <a:spAutoFit/>
-          </a:bodyPr>
-          <a:lstStyle/>
-          <a:p>
-            <a:pPr algn="ctr"/>
-            <a:r>
-              <a:rPr lang="en-GB" sz="4000" dirty="0"/>
-              <a:t>Counter value in different pages</a:t>
-            </a:r>
-          </a:p>
-        </p:txBody>
-      </p:sp>
-    </p:spTree>
-    <p:extLst>
-      <p:ext uri="{BB962C8B-B14F-4D97-AF65-F5344CB8AC3E}">
-        <p14:creationId xmlns:p14="http://schemas.microsoft.com/office/powerpoint/2010/main" val="212310172"/>
-      </p:ext>
-    </p:extLst>
-  </p:cSld>
-  <p:clrMapOvr>
-    <a:masterClrMapping/>
-  </p:clrMapOvr>
-</p:sld>
-</file>
-
-<file path=ppt/slides/slide31.xml><?xml version="1.0" encoding="utf-8"?>
-<p:sld xmlns:a="http://schemas.openxmlformats.org/drawingml/2006/main" xmlns:r="http://schemas.openxmlformats.org/officeDocument/2006/relationships" xmlns:p="http://schemas.openxmlformats.org/presentationml/2006/main">
-  <p:cSld>
-    <p:spTree>
-      <p:nvGrpSpPr>
         <p:cNvPr id="1" name=""/>
         <p:cNvGrpSpPr/>
         <p:nvPr/>
@@ -9992,358 +9153,7 @@
 </p:sld>
 </file>
 
-<file path=ppt/slides/slide32.xml><?xml version="1.0" encoding="utf-8"?>
-<p:sld xmlns:a="http://schemas.openxmlformats.org/drawingml/2006/main" xmlns:r="http://schemas.openxmlformats.org/officeDocument/2006/relationships" xmlns:p="http://schemas.openxmlformats.org/presentationml/2006/main" show="0">
-  <p:cSld>
-    <p:spTree>
-      <p:nvGrpSpPr>
-        <p:cNvPr id="1" name=""/>
-        <p:cNvGrpSpPr/>
-        <p:nvPr/>
-      </p:nvGrpSpPr>
-      <p:grpSpPr>
-        <a:xfrm>
-          <a:off x="0" y="0"/>
-          <a:ext cx="0" cy="0"/>
-          <a:chOff x="0" y="0"/>
-          <a:chExt cx="0" cy="0"/>
-        </a:xfrm>
-      </p:grpSpPr>
-      <p:sp>
-        <p:nvSpPr>
-          <p:cNvPr id="3" name="Text 2">
-            <a:extLst>
-              <a:ext uri="{FF2B5EF4-FFF2-40B4-BE49-F238E27FC236}">
-                <a16:creationId xmlns:a16="http://schemas.microsoft.com/office/drawing/2014/main" id="{EF027E61-C1A6-D975-A2F7-55C2DC49228C}"/>
-              </a:ext>
-            </a:extLst>
-          </p:cNvPr>
-          <p:cNvSpPr/>
-          <p:nvPr/>
-        </p:nvSpPr>
-        <p:spPr>
-          <a:xfrm>
-            <a:off x="566801" y="0"/>
-            <a:ext cx="11109960" cy="777240"/>
-          </a:xfrm>
-          <a:prstGeom prst="rect">
-            <a:avLst/>
-          </a:prstGeom>
-          <a:noFill/>
-          <a:ln/>
-        </p:spPr>
-        <p:txBody>
-          <a:bodyPr wrap="square" rtlCol="0" anchor="ctr"/>
-          <a:lstStyle/>
-          <a:p>
-            <a:pPr marL="0" indent="0">
-              <a:buNone/>
-            </a:pPr>
-            <a:r>
-              <a:rPr lang="en-US" sz="3300" i="1" dirty="0">
-                <a:solidFill>
-                  <a:schemeClr val="tx1">
-                    <a:lumMod val="95000"/>
-                    <a:lumOff val="5000"/>
-                  </a:schemeClr>
-                </a:solidFill>
-                <a:latin typeface="Instrument Serif" pitchFamily="34" charset="0"/>
-                <a:ea typeface="Instrument Serif" pitchFamily="34" charset="-122"/>
-                <a:cs typeface="Instrument Serif" pitchFamily="34" charset="-120"/>
-              </a:rPr>
-              <a:t>Seven things to remember</a:t>
-            </a:r>
-            <a:endParaRPr lang="en-US" sz="3300" dirty="0">
-              <a:solidFill>
-                <a:schemeClr val="tx1">
-                  <a:lumMod val="95000"/>
-                  <a:lumOff val="5000"/>
-                </a:schemeClr>
-              </a:solidFill>
-            </a:endParaRPr>
-          </a:p>
-        </p:txBody>
-      </p:sp>
-      <p:sp>
-        <p:nvSpPr>
-          <p:cNvPr id="5" name="Text 5">
-            <a:extLst>
-              <a:ext uri="{FF2B5EF4-FFF2-40B4-BE49-F238E27FC236}">
-                <a16:creationId xmlns:a16="http://schemas.microsoft.com/office/drawing/2014/main" id="{EFF2B295-89D0-700E-1CD6-1F0E290DD0E1}"/>
-              </a:ext>
-            </a:extLst>
-          </p:cNvPr>
-          <p:cNvSpPr/>
-          <p:nvPr/>
-        </p:nvSpPr>
-        <p:spPr>
-          <a:xfrm>
-            <a:off x="566801" y="777240"/>
-            <a:ext cx="11182985" cy="5824728"/>
-          </a:xfrm>
-          <a:prstGeom prst="rect">
-            <a:avLst/>
-          </a:prstGeom>
-          <a:noFill/>
-          <a:ln/>
-        </p:spPr>
-        <p:txBody>
-          <a:bodyPr wrap="square" rtlCol="0" anchor="t"/>
-          <a:lstStyle/>
-          <a:p>
-            <a:pPr marL="342900" indent="-342900">
-              <a:lnSpc>
-                <a:spcPct val="150000"/>
-              </a:lnSpc>
-              <a:buSzPct val="100000"/>
-              <a:buFont typeface="Arial" panose="020B0604020202020204" pitchFamily="34" charset="0"/>
-              <a:buChar char="•"/>
-            </a:pPr>
-            <a:r>
-              <a:rPr lang="en-US" sz="2400" dirty="0">
-                <a:solidFill>
-                  <a:schemeClr val="tx1">
-                    <a:lumMod val="95000"/>
-                    <a:lumOff val="5000"/>
-                  </a:schemeClr>
-                </a:solidFill>
-                <a:latin typeface="DM Sans" pitchFamily="34" charset="0"/>
-                <a:ea typeface="DM Sans" pitchFamily="34" charset="-122"/>
-                <a:cs typeface="DM Sans" pitchFamily="34" charset="-120"/>
-              </a:rPr>
-              <a:t>Micro-frontends solve a people problem: team scale, not bundle size</a:t>
-            </a:r>
-            <a:endParaRPr lang="en-US" sz="2400" dirty="0">
-              <a:solidFill>
-                <a:schemeClr val="tx1">
-                  <a:lumMod val="95000"/>
-                  <a:lumOff val="5000"/>
-                </a:schemeClr>
-              </a:solidFill>
-            </a:endParaRPr>
-          </a:p>
-          <a:p>
-            <a:pPr marL="342900" indent="-342900">
-              <a:lnSpc>
-                <a:spcPct val="150000"/>
-              </a:lnSpc>
-              <a:buSzPct val="100000"/>
-              <a:buFont typeface="Arial" panose="020B0604020202020204" pitchFamily="34" charset="0"/>
-              <a:buChar char="•"/>
-            </a:pPr>
-            <a:r>
-              <a:rPr lang="en-US" sz="2400" dirty="0">
-                <a:solidFill>
-                  <a:schemeClr val="tx1">
-                    <a:lumMod val="95000"/>
-                    <a:lumOff val="5000"/>
-                  </a:schemeClr>
-                </a:solidFill>
-                <a:latin typeface="DM Sans" pitchFamily="34" charset="0"/>
-                <a:ea typeface="DM Sans" pitchFamily="34" charset="-122"/>
-                <a:cs typeface="DM Sans" pitchFamily="34" charset="-120"/>
-              </a:rPr>
-              <a:t>Suspense fallbacks cover load UX. Module Federation covers team DX</a:t>
-            </a:r>
-            <a:endParaRPr lang="en-US" sz="2400" dirty="0">
-              <a:solidFill>
-                <a:schemeClr val="tx1">
-                  <a:lumMod val="95000"/>
-                  <a:lumOff val="5000"/>
-                </a:schemeClr>
-              </a:solidFill>
-            </a:endParaRPr>
-          </a:p>
-          <a:p>
-            <a:pPr marL="342900" indent="-342900">
-              <a:lnSpc>
-                <a:spcPct val="150000"/>
-              </a:lnSpc>
-              <a:buSzPct val="100000"/>
-              <a:buFont typeface="Arial" panose="020B0604020202020204" pitchFamily="34" charset="0"/>
-              <a:buChar char="•"/>
-            </a:pPr>
-            <a:r>
-              <a:rPr lang="en-US" sz="2400" dirty="0">
-                <a:solidFill>
-                  <a:schemeClr val="tx1">
-                    <a:lumMod val="95000"/>
-                    <a:lumOff val="5000"/>
-                  </a:schemeClr>
-                </a:solidFill>
-                <a:latin typeface="DM Sans" pitchFamily="34" charset="0"/>
-                <a:ea typeface="DM Sans" pitchFamily="34" charset="-122"/>
-                <a:cs typeface="DM Sans" pitchFamily="34" charset="-120"/>
-              </a:rPr>
-              <a:t>Prefer events over shared state: CustomEvents survive independent deploys</a:t>
-            </a:r>
-            <a:endParaRPr lang="en-US" sz="2400" dirty="0">
-              <a:solidFill>
-                <a:schemeClr val="tx1">
-                  <a:lumMod val="95000"/>
-                  <a:lumOff val="5000"/>
-                </a:schemeClr>
-              </a:solidFill>
-            </a:endParaRPr>
-          </a:p>
-          <a:p>
-            <a:pPr marL="342900" indent="-342900">
-              <a:lnSpc>
-                <a:spcPct val="150000"/>
-              </a:lnSpc>
-              <a:buSzPct val="100000"/>
-              <a:buFont typeface="Arial" panose="020B0604020202020204" pitchFamily="34" charset="0"/>
-              <a:buChar char="•"/>
-            </a:pPr>
-            <a:r>
-              <a:rPr lang="en-US" sz="2400" dirty="0">
-                <a:solidFill>
-                  <a:schemeClr val="tx1">
-                    <a:lumMod val="95000"/>
-                    <a:lumOff val="5000"/>
-                  </a:schemeClr>
-                </a:solidFill>
-                <a:latin typeface="DM Sans" pitchFamily="34" charset="0"/>
-                <a:ea typeface="DM Sans" pitchFamily="34" charset="-122"/>
-                <a:cs typeface="DM Sans" pitchFamily="34" charset="-120"/>
-              </a:rPr>
-              <a:t>Host owns routing: remotes request navigation, only the shell mutates it</a:t>
-            </a:r>
-            <a:endParaRPr lang="en-US" sz="2400" dirty="0">
-              <a:solidFill>
-                <a:schemeClr val="tx1">
-                  <a:lumMod val="95000"/>
-                  <a:lumOff val="5000"/>
-                </a:schemeClr>
-              </a:solidFill>
-            </a:endParaRPr>
-          </a:p>
-          <a:p>
-            <a:pPr marL="342900" indent="-342900">
-              <a:lnSpc>
-                <a:spcPct val="150000"/>
-              </a:lnSpc>
-              <a:buSzPct val="100000"/>
-              <a:buFont typeface="Arial" panose="020B0604020202020204" pitchFamily="34" charset="0"/>
-              <a:buChar char="•"/>
-            </a:pPr>
-            <a:r>
-              <a:rPr lang="en-US" sz="2400" dirty="0">
-                <a:solidFill>
-                  <a:schemeClr val="tx1">
-                    <a:lumMod val="95000"/>
-                    <a:lumOff val="5000"/>
-                  </a:schemeClr>
-                </a:solidFill>
-                <a:latin typeface="DM Sans" pitchFamily="34" charset="0"/>
-                <a:ea typeface="DM Sans" pitchFamily="34" charset="-122"/>
-                <a:cs typeface="DM Sans" pitchFamily="34" charset="-120"/>
-              </a:rPr>
-              <a:t>Ship fault isolation on purpose: .catch() + ErrorBoundary per module</a:t>
-            </a:r>
-            <a:endParaRPr lang="en-US" sz="2400" dirty="0">
-              <a:solidFill>
-                <a:schemeClr val="tx1">
-                  <a:lumMod val="95000"/>
-                  <a:lumOff val="5000"/>
-                </a:schemeClr>
-              </a:solidFill>
-            </a:endParaRPr>
-          </a:p>
-          <a:p>
-            <a:pPr marL="342900" indent="-342900">
-              <a:lnSpc>
-                <a:spcPct val="150000"/>
-              </a:lnSpc>
-              <a:buSzPct val="100000"/>
-              <a:buFont typeface="Arial" panose="020B0604020202020204" pitchFamily="34" charset="0"/>
-              <a:buChar char="•"/>
-            </a:pPr>
-            <a:r>
-              <a:rPr lang="en-US" sz="2400" dirty="0" err="1">
-                <a:solidFill>
-                  <a:schemeClr val="tx1">
-                    <a:lumMod val="95000"/>
-                    <a:lumOff val="5000"/>
-                  </a:schemeClr>
-                </a:solidFill>
-                <a:latin typeface="DM Sans" pitchFamily="34" charset="0"/>
-                <a:ea typeface="DM Sans" pitchFamily="34" charset="-122"/>
-                <a:cs typeface="DM Sans" pitchFamily="34" charset="-120"/>
-              </a:rPr>
-              <a:t>Rspack</a:t>
-            </a:r>
-            <a:r>
-              <a:rPr lang="en-US" sz="2400" dirty="0">
-                <a:solidFill>
-                  <a:schemeClr val="tx1">
-                    <a:lumMod val="95000"/>
-                    <a:lumOff val="5000"/>
-                  </a:schemeClr>
-                </a:solidFill>
-                <a:latin typeface="DM Sans" pitchFamily="34" charset="0"/>
-                <a:ea typeface="DM Sans" pitchFamily="34" charset="-122"/>
-                <a:cs typeface="DM Sans" pitchFamily="34" charset="-120"/>
-              </a:rPr>
-              <a:t> keeps the monorepo fast: sub-second HMR, Rust React Compiler, cache</a:t>
-            </a:r>
-            <a:endParaRPr lang="en-US" sz="2400" dirty="0">
-              <a:solidFill>
-                <a:schemeClr val="tx1">
-                  <a:lumMod val="95000"/>
-                  <a:lumOff val="5000"/>
-                </a:schemeClr>
-              </a:solidFill>
-            </a:endParaRPr>
-          </a:p>
-          <a:p>
-            <a:pPr marL="342900" indent="-342900">
-              <a:lnSpc>
-                <a:spcPct val="150000"/>
-              </a:lnSpc>
-              <a:buSzPct val="100000"/>
-              <a:buFont typeface="Arial" panose="020B0604020202020204" pitchFamily="34" charset="0"/>
-              <a:buChar char="•"/>
-            </a:pPr>
-            <a:r>
-              <a:rPr lang="en-US" sz="2400" dirty="0">
-                <a:solidFill>
-                  <a:schemeClr val="tx1">
-                    <a:lumMod val="95000"/>
-                    <a:lumOff val="5000"/>
-                  </a:schemeClr>
-                </a:solidFill>
-                <a:latin typeface="DM Sans" pitchFamily="34" charset="0"/>
-                <a:ea typeface="DM Sans" pitchFamily="34" charset="-122"/>
-                <a:cs typeface="DM Sans" pitchFamily="34" charset="-120"/>
-              </a:rPr>
-              <a:t>Match load strategy to content: instant / eager / suspense</a:t>
-            </a:r>
-            <a:endParaRPr lang="en-US" sz="2400" dirty="0">
-              <a:solidFill>
-                <a:schemeClr val="tx1">
-                  <a:lumMod val="95000"/>
-                  <a:lumOff val="5000"/>
-                </a:schemeClr>
-              </a:solidFill>
-            </a:endParaRPr>
-          </a:p>
-        </p:txBody>
-      </p:sp>
-    </p:spTree>
-    <p:extLst>
-      <p:ext uri="{BB962C8B-B14F-4D97-AF65-F5344CB8AC3E}">
-        <p14:creationId xmlns:p14="http://schemas.microsoft.com/office/powerpoint/2010/main" val="1008954746"/>
-      </p:ext>
-    </p:extLst>
-  </p:cSld>
-  <p:clrMapOvr>
-    <a:masterClrMapping/>
-  </p:clrMapOvr>
-</p:sld>
-</file>
-
-<file path=ppt/slides/slide33.xml><?xml version="1.0" encoding="utf-8"?>
+<file path=ppt/slides/slide31.xml><?xml version="1.0" encoding="utf-8"?>
 <p:sld xmlns:a="http://schemas.openxmlformats.org/drawingml/2006/main" xmlns:r="http://schemas.openxmlformats.org/officeDocument/2006/relationships" xmlns:p="http://schemas.openxmlformats.org/presentationml/2006/main">
   <p:cSld>
     <p:spTree>
@@ -10442,7 +9252,7 @@
 </p:sld>
 </file>
 
-<file path=ppt/slides/slide34.xml><?xml version="1.0" encoding="utf-8"?>
+<file path=ppt/slides/slide32.xml><?xml version="1.0" encoding="utf-8"?>
 <p:sld xmlns:a="http://schemas.openxmlformats.org/drawingml/2006/main" xmlns:r="http://schemas.openxmlformats.org/officeDocument/2006/relationships" xmlns:p="http://schemas.openxmlformats.org/presentationml/2006/main">
   <p:cSld>
     <p:spTree>
@@ -10502,7 +9312,7 @@
 </p:sld>
 </file>
 
-<file path=ppt/slides/slide35.xml><?xml version="1.0" encoding="utf-8"?>
+<file path=ppt/slides/slide33.xml><?xml version="1.0" encoding="utf-8"?>
 <p:sld xmlns:a="http://schemas.openxmlformats.org/drawingml/2006/main" xmlns:r="http://schemas.openxmlformats.org/officeDocument/2006/relationships" xmlns:p="http://schemas.openxmlformats.org/presentationml/2006/main">
   <p:cSld>
     <p:spTree>
@@ -10590,67 +9400,7 @@
 </p:sld>
 </file>
 
-<file path=ppt/slides/slide36.xml><?xml version="1.0" encoding="utf-8"?>
-<p:sld xmlns:a="http://schemas.openxmlformats.org/drawingml/2006/main" xmlns:r="http://schemas.openxmlformats.org/officeDocument/2006/relationships" xmlns:p="http://schemas.openxmlformats.org/presentationml/2006/main">
-  <p:cSld>
-    <p:spTree>
-      <p:nvGrpSpPr>
-        <p:cNvPr id="1" name=""/>
-        <p:cNvGrpSpPr/>
-        <p:nvPr/>
-      </p:nvGrpSpPr>
-      <p:grpSpPr>
-        <a:xfrm>
-          <a:off x="0" y="0"/>
-          <a:ext cx="0" cy="0"/>
-          <a:chOff x="0" y="0"/>
-          <a:chExt cx="0" cy="0"/>
-        </a:xfrm>
-      </p:grpSpPr>
-      <p:pic>
-        <p:nvPicPr>
-          <p:cNvPr id="5" name="Picture 4">
-            <a:extLst>
-              <a:ext uri="{FF2B5EF4-FFF2-40B4-BE49-F238E27FC236}">
-                <a16:creationId xmlns:a16="http://schemas.microsoft.com/office/drawing/2014/main" id="{CAC10217-0EAC-9F13-AEFC-6AB11AA41BCD}"/>
-              </a:ext>
-            </a:extLst>
-          </p:cNvPr>
-          <p:cNvPicPr>
-            <a:picLocks noChangeAspect="1"/>
-          </p:cNvPicPr>
-          <p:nvPr/>
-        </p:nvPicPr>
-        <p:blipFill>
-          <a:blip r:embed="rId3"/>
-          <a:stretch>
-            <a:fillRect/>
-          </a:stretch>
-        </p:blipFill>
-        <p:spPr>
-          <a:xfrm>
-            <a:off x="1" y="138017"/>
-            <a:ext cx="12188475" cy="6719090"/>
-          </a:xfrm>
-          <a:prstGeom prst="rect">
-            <a:avLst/>
-          </a:prstGeom>
-        </p:spPr>
-      </p:pic>
-    </p:spTree>
-    <p:extLst>
-      <p:ext uri="{BB962C8B-B14F-4D97-AF65-F5344CB8AC3E}">
-        <p14:creationId xmlns:p14="http://schemas.microsoft.com/office/powerpoint/2010/main" val="3470241132"/>
-      </p:ext>
-    </p:extLst>
-  </p:cSld>
-  <p:clrMapOvr>
-    <a:masterClrMapping/>
-  </p:clrMapOvr>
-</p:sld>
-</file>
-
-<file path=ppt/slides/slide37.xml><?xml version="1.0" encoding="utf-8"?>
+<file path=ppt/slides/slide34.xml><?xml version="1.0" encoding="utf-8"?>
 <p:sld xmlns:a="http://schemas.openxmlformats.org/drawingml/2006/main" xmlns:r="http://schemas.openxmlformats.org/officeDocument/2006/relationships" xmlns:p="http://schemas.openxmlformats.org/presentationml/2006/main">
   <p:cSld>
     <p:spTree>
